--- a/apresentacao.pptx
+++ b/apresentacao.pptx
@@ -5,20 +5,21 @@
     <p:sldMasterId id="2147483648" r:id="rId1"/>
   </p:sldMasterIdLst>
   <p:sldIdLst>
-    <p:sldId id="256" r:id="rId2"/>
-    <p:sldId id="257" r:id="rId3"/>
-    <p:sldId id="258" r:id="rId4"/>
-    <p:sldId id="259" r:id="rId5"/>
-    <p:sldId id="260" r:id="rId6"/>
-    <p:sldId id="261" r:id="rId7"/>
-    <p:sldId id="262" r:id="rId8"/>
-    <p:sldId id="263" r:id="rId9"/>
-    <p:sldId id="264" r:id="rId10"/>
-    <p:sldId id="265" r:id="rId11"/>
-    <p:sldId id="266" r:id="rId12"/>
-    <p:sldId id="267" r:id="rId13"/>
+    <p:sldId id="256" r:id="rId7"/>
+    <p:sldId id="257" r:id="rId8"/>
+    <p:sldId id="258" r:id="rId9"/>
+    <p:sldId id="259" r:id="rId10"/>
+    <p:sldId id="260" r:id="rId11"/>
+    <p:sldId id="261" r:id="rId12"/>
+    <p:sldId id="262" r:id="rId13"/>
+    <p:sldId id="263" r:id="rId14"/>
+    <p:sldId id="264" r:id="rId15"/>
+    <p:sldId id="265" r:id="rId16"/>
+    <p:sldId id="266" r:id="rId17"/>
+    <p:sldId id="267" r:id="rId18"/>
+    <p:sldId id="268" r:id="rId19"/>
   </p:sldIdLst>
-  <p:sldSz cx="12192000" cy="6858000"/>
+  <p:sldSz cx="12191695" cy="6858000" type="screen4x3"/>
   <p:notesSz cx="6858000" cy="9144000"/>
   <p:defaultTextStyle>
     <a:defPPr>
@@ -115,22 +116,6 @@
       </a:defRPr>
     </a:lvl9pPr>
   </p:defaultTextStyle>
-  <p:extLst>
-    <p:ext uri="{EFAFB233-063F-42B5-8137-9DF3F51BA10A}">
-      <p15:sldGuideLst xmlns:p15="http://schemas.microsoft.com/office/powerpoint/2012/main">
-        <p15:guide id="1" orient="horz" pos="2160">
-          <p15:clr>
-            <a:srgbClr val="A4A3A4"/>
-          </p15:clr>
-        </p15:guide>
-        <p15:guide id="2" pos="2880">
-          <p15:clr>
-            <a:srgbClr val="A4A3A4"/>
-          </p15:clr>
-        </p15:guide>
-      </p15:sldGuideLst>
-    </p:ext>
-  </p:extLst>
 </p:presentation>
 </file>
 
@@ -172,9 +157,10 @@
           <a:lstStyle/>
           <a:p>
             <a:r>
-              <a:rPr lang="en-US"/>
+              <a:rPr lang="en-US" smtClean="0"/>
               <a:t>Click to edit Master title style</a:t>
             </a:r>
+            <a:endParaRPr lang="en-US"/>
           </a:p>
         </p:txBody>
       </p:sp>
@@ -290,9 +276,10 @@
           </a:lstStyle>
           <a:p>
             <a:r>
-              <a:rPr lang="en-US"/>
+              <a:rPr lang="en-US" smtClean="0"/>
               <a:t>Click to edit Master subtitle style</a:t>
             </a:r>
+            <a:endParaRPr lang="en-US"/>
           </a:p>
         </p:txBody>
       </p:sp>
@@ -313,7 +300,7 @@
           <a:p>
             <a:fld id="{5BCAD085-E8A6-8845-BD4E-CB4CCA059FC4}" type="datetimeFigureOut">
               <a:rPr lang="en-US" smtClean="0"/>
-              <a:t>4/26/2026</a:t>
+              <a:t>1/27/13</a:t>
             </a:fld>
             <a:endParaRPr lang="en-US"/>
           </a:p>
@@ -355,7 +342,7 @@
           <a:p>
             <a:fld id="{C1FF6DA9-008F-8B48-92A6-B652298478BF}" type="slidenum">
               <a:rPr lang="en-US" smtClean="0"/>
-              <a:t>‹nº›</a:t>
+              <a:t>‹#›</a:t>
             </a:fld>
             <a:endParaRPr lang="en-US"/>
           </a:p>
@@ -407,9 +394,10 @@
           <a:lstStyle/>
           <a:p>
             <a:r>
-              <a:rPr lang="en-US"/>
+              <a:rPr lang="en-US" smtClean="0"/>
               <a:t>Click to edit Master title style</a:t>
             </a:r>
+            <a:endParaRPr lang="en-US"/>
           </a:p>
         </p:txBody>
       </p:sp>
@@ -430,37 +418,38 @@
           <a:p>
             <a:pPr lvl="0"/>
             <a:r>
-              <a:rPr lang="en-US"/>
+              <a:rPr lang="en-US" smtClean="0"/>
               <a:t>Click to edit Master text styles</a:t>
             </a:r>
           </a:p>
           <a:p>
             <a:pPr lvl="1"/>
             <a:r>
-              <a:rPr lang="en-US"/>
+              <a:rPr lang="en-US" smtClean="0"/>
               <a:t>Second level</a:t>
             </a:r>
           </a:p>
           <a:p>
             <a:pPr lvl="2"/>
             <a:r>
-              <a:rPr lang="en-US"/>
+              <a:rPr lang="en-US" smtClean="0"/>
               <a:t>Third level</a:t>
             </a:r>
           </a:p>
           <a:p>
             <a:pPr lvl="3"/>
             <a:r>
-              <a:rPr lang="en-US"/>
+              <a:rPr lang="en-US" smtClean="0"/>
               <a:t>Fourth level</a:t>
             </a:r>
           </a:p>
           <a:p>
             <a:pPr lvl="4"/>
             <a:r>
-              <a:rPr lang="en-US"/>
+              <a:rPr lang="en-US" smtClean="0"/>
               <a:t>Fifth level</a:t>
             </a:r>
+            <a:endParaRPr lang="en-US"/>
           </a:p>
         </p:txBody>
       </p:sp>
@@ -481,7 +470,7 @@
           <a:p>
             <a:fld id="{5BCAD085-E8A6-8845-BD4E-CB4CCA059FC4}" type="datetimeFigureOut">
               <a:rPr lang="en-US" smtClean="0"/>
-              <a:t>4/26/2026</a:t>
+              <a:t>1/27/13</a:t>
             </a:fld>
             <a:endParaRPr lang="en-US"/>
           </a:p>
@@ -523,7 +512,7 @@
           <a:p>
             <a:fld id="{C1FF6DA9-008F-8B48-92A6-B652298478BF}" type="slidenum">
               <a:rPr lang="en-US" smtClean="0"/>
-              <a:t>‹nº›</a:t>
+              <a:t>‹#›</a:t>
             </a:fld>
             <a:endParaRPr lang="en-US"/>
           </a:p>
@@ -580,9 +569,10 @@
           <a:lstStyle/>
           <a:p>
             <a:r>
-              <a:rPr lang="en-US"/>
+              <a:rPr lang="en-US" smtClean="0"/>
               <a:t>Click to edit Master title style</a:t>
             </a:r>
+            <a:endParaRPr lang="en-US"/>
           </a:p>
         </p:txBody>
       </p:sp>
@@ -608,37 +598,38 @@
           <a:p>
             <a:pPr lvl="0"/>
             <a:r>
-              <a:rPr lang="en-US"/>
+              <a:rPr lang="en-US" smtClean="0"/>
               <a:t>Click to edit Master text styles</a:t>
             </a:r>
           </a:p>
           <a:p>
             <a:pPr lvl="1"/>
             <a:r>
-              <a:rPr lang="en-US"/>
+              <a:rPr lang="en-US" smtClean="0"/>
               <a:t>Second level</a:t>
             </a:r>
           </a:p>
           <a:p>
             <a:pPr lvl="2"/>
             <a:r>
-              <a:rPr lang="en-US"/>
+              <a:rPr lang="en-US" smtClean="0"/>
               <a:t>Third level</a:t>
             </a:r>
           </a:p>
           <a:p>
             <a:pPr lvl="3"/>
             <a:r>
-              <a:rPr lang="en-US"/>
+              <a:rPr lang="en-US" smtClean="0"/>
               <a:t>Fourth level</a:t>
             </a:r>
           </a:p>
           <a:p>
             <a:pPr lvl="4"/>
             <a:r>
-              <a:rPr lang="en-US"/>
+              <a:rPr lang="en-US" smtClean="0"/>
               <a:t>Fifth level</a:t>
             </a:r>
+            <a:endParaRPr lang="en-US"/>
           </a:p>
         </p:txBody>
       </p:sp>
@@ -659,7 +650,7 @@
           <a:p>
             <a:fld id="{5BCAD085-E8A6-8845-BD4E-CB4CCA059FC4}" type="datetimeFigureOut">
               <a:rPr lang="en-US" smtClean="0"/>
-              <a:t>4/26/2026</a:t>
+              <a:t>1/27/13</a:t>
             </a:fld>
             <a:endParaRPr lang="en-US"/>
           </a:p>
@@ -701,7 +692,7 @@
           <a:p>
             <a:fld id="{C1FF6DA9-008F-8B48-92A6-B652298478BF}" type="slidenum">
               <a:rPr lang="en-US" smtClean="0"/>
-              <a:t>‹nº›</a:t>
+              <a:t>‹#›</a:t>
             </a:fld>
             <a:endParaRPr lang="en-US"/>
           </a:p>
@@ -753,9 +744,10 @@
           <a:lstStyle/>
           <a:p>
             <a:r>
-              <a:rPr lang="en-US"/>
+              <a:rPr lang="en-US" smtClean="0"/>
               <a:t>Click to edit Master title style</a:t>
             </a:r>
+            <a:endParaRPr lang="en-US"/>
           </a:p>
         </p:txBody>
       </p:sp>
@@ -776,37 +768,38 @@
           <a:p>
             <a:pPr lvl="0"/>
             <a:r>
-              <a:rPr lang="en-US"/>
+              <a:rPr lang="en-US" smtClean="0"/>
               <a:t>Click to edit Master text styles</a:t>
             </a:r>
           </a:p>
           <a:p>
             <a:pPr lvl="1"/>
             <a:r>
-              <a:rPr lang="en-US"/>
+              <a:rPr lang="en-US" smtClean="0"/>
               <a:t>Second level</a:t>
             </a:r>
           </a:p>
           <a:p>
             <a:pPr lvl="2"/>
             <a:r>
-              <a:rPr lang="en-US"/>
+              <a:rPr lang="en-US" smtClean="0"/>
               <a:t>Third level</a:t>
             </a:r>
           </a:p>
           <a:p>
             <a:pPr lvl="3"/>
             <a:r>
-              <a:rPr lang="en-US"/>
+              <a:rPr lang="en-US" smtClean="0"/>
               <a:t>Fourth level</a:t>
             </a:r>
           </a:p>
           <a:p>
             <a:pPr lvl="4"/>
             <a:r>
-              <a:rPr lang="en-US"/>
+              <a:rPr lang="en-US" smtClean="0"/>
               <a:t>Fifth level</a:t>
             </a:r>
+            <a:endParaRPr lang="en-US"/>
           </a:p>
         </p:txBody>
       </p:sp>
@@ -827,7 +820,7 @@
           <a:p>
             <a:fld id="{5BCAD085-E8A6-8845-BD4E-CB4CCA059FC4}" type="datetimeFigureOut">
               <a:rPr lang="en-US" smtClean="0"/>
-              <a:t>4/26/2026</a:t>
+              <a:t>1/27/13</a:t>
             </a:fld>
             <a:endParaRPr lang="en-US"/>
           </a:p>
@@ -869,7 +862,7 @@
           <a:p>
             <a:fld id="{C1FF6DA9-008F-8B48-92A6-B652298478BF}" type="slidenum">
               <a:rPr lang="en-US" smtClean="0"/>
-              <a:t>‹nº›</a:t>
+              <a:t>‹#›</a:t>
             </a:fld>
             <a:endParaRPr lang="en-US"/>
           </a:p>
@@ -930,9 +923,10 @@
           </a:lstStyle>
           <a:p>
             <a:r>
-              <a:rPr lang="en-US"/>
+              <a:rPr lang="en-US" smtClean="0"/>
               <a:t>Click to edit Master title style</a:t>
             </a:r>
+            <a:endParaRPr lang="en-US"/>
           </a:p>
         </p:txBody>
       </p:sp>
@@ -1049,7 +1043,7 @@
           <a:p>
             <a:pPr lvl="0"/>
             <a:r>
-              <a:rPr lang="en-US"/>
+              <a:rPr lang="en-US" smtClean="0"/>
               <a:t>Click to edit Master text styles</a:t>
             </a:r>
           </a:p>
@@ -1072,7 +1066,7 @@
           <a:p>
             <a:fld id="{5BCAD085-E8A6-8845-BD4E-CB4CCA059FC4}" type="datetimeFigureOut">
               <a:rPr lang="en-US" smtClean="0"/>
-              <a:t>4/26/2026</a:t>
+              <a:t>1/27/13</a:t>
             </a:fld>
             <a:endParaRPr lang="en-US"/>
           </a:p>
@@ -1114,7 +1108,7 @@
           <a:p>
             <a:fld id="{C1FF6DA9-008F-8B48-92A6-B652298478BF}" type="slidenum">
               <a:rPr lang="en-US" smtClean="0"/>
-              <a:t>‹nº›</a:t>
+              <a:t>‹#›</a:t>
             </a:fld>
             <a:endParaRPr lang="en-US"/>
           </a:p>
@@ -1166,9 +1160,10 @@
           <a:lstStyle/>
           <a:p>
             <a:r>
-              <a:rPr lang="en-US"/>
+              <a:rPr lang="en-US" smtClean="0"/>
               <a:t>Click to edit Master title style</a:t>
             </a:r>
+            <a:endParaRPr lang="en-US"/>
           </a:p>
         </p:txBody>
       </p:sp>
@@ -1222,37 +1217,38 @@
           <a:p>
             <a:pPr lvl="0"/>
             <a:r>
-              <a:rPr lang="en-US"/>
+              <a:rPr lang="en-US" smtClean="0"/>
               <a:t>Click to edit Master text styles</a:t>
             </a:r>
           </a:p>
           <a:p>
             <a:pPr lvl="1"/>
             <a:r>
-              <a:rPr lang="en-US"/>
+              <a:rPr lang="en-US" smtClean="0"/>
               <a:t>Second level</a:t>
             </a:r>
           </a:p>
           <a:p>
             <a:pPr lvl="2"/>
             <a:r>
-              <a:rPr lang="en-US"/>
+              <a:rPr lang="en-US" smtClean="0"/>
               <a:t>Third level</a:t>
             </a:r>
           </a:p>
           <a:p>
             <a:pPr lvl="3"/>
             <a:r>
-              <a:rPr lang="en-US"/>
+              <a:rPr lang="en-US" smtClean="0"/>
               <a:t>Fourth level</a:t>
             </a:r>
           </a:p>
           <a:p>
             <a:pPr lvl="4"/>
             <a:r>
-              <a:rPr lang="en-US"/>
+              <a:rPr lang="en-US" smtClean="0"/>
               <a:t>Fifth level</a:t>
             </a:r>
+            <a:endParaRPr lang="en-US"/>
           </a:p>
         </p:txBody>
       </p:sp>
@@ -1306,37 +1302,38 @@
           <a:p>
             <a:pPr lvl="0"/>
             <a:r>
-              <a:rPr lang="en-US"/>
+              <a:rPr lang="en-US" smtClean="0"/>
               <a:t>Click to edit Master text styles</a:t>
             </a:r>
           </a:p>
           <a:p>
             <a:pPr lvl="1"/>
             <a:r>
-              <a:rPr lang="en-US"/>
+              <a:rPr lang="en-US" smtClean="0"/>
               <a:t>Second level</a:t>
             </a:r>
           </a:p>
           <a:p>
             <a:pPr lvl="2"/>
             <a:r>
-              <a:rPr lang="en-US"/>
+              <a:rPr lang="en-US" smtClean="0"/>
               <a:t>Third level</a:t>
             </a:r>
           </a:p>
           <a:p>
             <a:pPr lvl="3"/>
             <a:r>
-              <a:rPr lang="en-US"/>
+              <a:rPr lang="en-US" smtClean="0"/>
               <a:t>Fourth level</a:t>
             </a:r>
           </a:p>
           <a:p>
             <a:pPr lvl="4"/>
             <a:r>
-              <a:rPr lang="en-US"/>
+              <a:rPr lang="en-US" smtClean="0"/>
               <a:t>Fifth level</a:t>
             </a:r>
+            <a:endParaRPr lang="en-US"/>
           </a:p>
         </p:txBody>
       </p:sp>
@@ -1357,7 +1354,7 @@
           <a:p>
             <a:fld id="{5BCAD085-E8A6-8845-BD4E-CB4CCA059FC4}" type="datetimeFigureOut">
               <a:rPr lang="en-US" smtClean="0"/>
-              <a:t>4/26/2026</a:t>
+              <a:t>1/27/13</a:t>
             </a:fld>
             <a:endParaRPr lang="en-US"/>
           </a:p>
@@ -1399,7 +1396,7 @@
           <a:p>
             <a:fld id="{C1FF6DA9-008F-8B48-92A6-B652298478BF}" type="slidenum">
               <a:rPr lang="en-US" smtClean="0"/>
-              <a:t>‹nº›</a:t>
+              <a:t>‹#›</a:t>
             </a:fld>
             <a:endParaRPr lang="en-US"/>
           </a:p>
@@ -1455,9 +1452,10 @@
           </a:lstStyle>
           <a:p>
             <a:r>
-              <a:rPr lang="en-US"/>
+              <a:rPr lang="en-US" smtClean="0"/>
               <a:t>Click to edit Master title style</a:t>
             </a:r>
+            <a:endParaRPr lang="en-US"/>
           </a:p>
         </p:txBody>
       </p:sp>
@@ -1520,7 +1518,7 @@
           <a:p>
             <a:pPr lvl="0"/>
             <a:r>
-              <a:rPr lang="en-US"/>
+              <a:rPr lang="en-US" smtClean="0"/>
               <a:t>Click to edit Master text styles</a:t>
             </a:r>
           </a:p>
@@ -1576,37 +1574,38 @@
           <a:p>
             <a:pPr lvl="0"/>
             <a:r>
-              <a:rPr lang="en-US"/>
+              <a:rPr lang="en-US" smtClean="0"/>
               <a:t>Click to edit Master text styles</a:t>
             </a:r>
           </a:p>
           <a:p>
             <a:pPr lvl="1"/>
             <a:r>
-              <a:rPr lang="en-US"/>
+              <a:rPr lang="en-US" smtClean="0"/>
               <a:t>Second level</a:t>
             </a:r>
           </a:p>
           <a:p>
             <a:pPr lvl="2"/>
             <a:r>
-              <a:rPr lang="en-US"/>
+              <a:rPr lang="en-US" smtClean="0"/>
               <a:t>Third level</a:t>
             </a:r>
           </a:p>
           <a:p>
             <a:pPr lvl="3"/>
             <a:r>
-              <a:rPr lang="en-US"/>
+              <a:rPr lang="en-US" smtClean="0"/>
               <a:t>Fourth level</a:t>
             </a:r>
           </a:p>
           <a:p>
             <a:pPr lvl="4"/>
             <a:r>
-              <a:rPr lang="en-US"/>
+              <a:rPr lang="en-US" smtClean="0"/>
               <a:t>Fifth level</a:t>
             </a:r>
+            <a:endParaRPr lang="en-US"/>
           </a:p>
         </p:txBody>
       </p:sp>
@@ -1669,7 +1668,7 @@
           <a:p>
             <a:pPr lvl="0"/>
             <a:r>
-              <a:rPr lang="en-US"/>
+              <a:rPr lang="en-US" smtClean="0"/>
               <a:t>Click to edit Master text styles</a:t>
             </a:r>
           </a:p>
@@ -1725,37 +1724,38 @@
           <a:p>
             <a:pPr lvl="0"/>
             <a:r>
-              <a:rPr lang="en-US"/>
+              <a:rPr lang="en-US" smtClean="0"/>
               <a:t>Click to edit Master text styles</a:t>
             </a:r>
           </a:p>
           <a:p>
             <a:pPr lvl="1"/>
             <a:r>
-              <a:rPr lang="en-US"/>
+              <a:rPr lang="en-US" smtClean="0"/>
               <a:t>Second level</a:t>
             </a:r>
           </a:p>
           <a:p>
             <a:pPr lvl="2"/>
             <a:r>
-              <a:rPr lang="en-US"/>
+              <a:rPr lang="en-US" smtClean="0"/>
               <a:t>Third level</a:t>
             </a:r>
           </a:p>
           <a:p>
             <a:pPr lvl="3"/>
             <a:r>
-              <a:rPr lang="en-US"/>
+              <a:rPr lang="en-US" smtClean="0"/>
               <a:t>Fourth level</a:t>
             </a:r>
           </a:p>
           <a:p>
             <a:pPr lvl="4"/>
             <a:r>
-              <a:rPr lang="en-US"/>
+              <a:rPr lang="en-US" smtClean="0"/>
               <a:t>Fifth level</a:t>
             </a:r>
+            <a:endParaRPr lang="en-US"/>
           </a:p>
         </p:txBody>
       </p:sp>
@@ -1776,7 +1776,7 @@
           <a:p>
             <a:fld id="{5BCAD085-E8A6-8845-BD4E-CB4CCA059FC4}" type="datetimeFigureOut">
               <a:rPr lang="en-US" smtClean="0"/>
-              <a:t>4/26/2026</a:t>
+              <a:t>1/27/13</a:t>
             </a:fld>
             <a:endParaRPr lang="en-US"/>
           </a:p>
@@ -1818,7 +1818,7 @@
           <a:p>
             <a:fld id="{C1FF6DA9-008F-8B48-92A6-B652298478BF}" type="slidenum">
               <a:rPr lang="en-US" smtClean="0"/>
-              <a:t>‹nº›</a:t>
+              <a:t>‹#›</a:t>
             </a:fld>
             <a:endParaRPr lang="en-US"/>
           </a:p>
@@ -1870,9 +1870,10 @@
           <a:lstStyle/>
           <a:p>
             <a:r>
-              <a:rPr lang="en-US"/>
+              <a:rPr lang="en-US" smtClean="0"/>
               <a:t>Click to edit Master title style</a:t>
             </a:r>
+            <a:endParaRPr lang="en-US"/>
           </a:p>
         </p:txBody>
       </p:sp>
@@ -1893,7 +1894,7 @@
           <a:p>
             <a:fld id="{5BCAD085-E8A6-8845-BD4E-CB4CCA059FC4}" type="datetimeFigureOut">
               <a:rPr lang="en-US" smtClean="0"/>
-              <a:t>4/26/2026</a:t>
+              <a:t>1/27/13</a:t>
             </a:fld>
             <a:endParaRPr lang="en-US"/>
           </a:p>
@@ -1935,7 +1936,7 @@
           <a:p>
             <a:fld id="{C1FF6DA9-008F-8B48-92A6-B652298478BF}" type="slidenum">
               <a:rPr lang="en-US" smtClean="0"/>
-              <a:t>‹nº›</a:t>
+              <a:t>‹#›</a:t>
             </a:fld>
             <a:endParaRPr lang="en-US"/>
           </a:p>
@@ -1988,7 +1989,7 @@
           <a:p>
             <a:fld id="{5BCAD085-E8A6-8845-BD4E-CB4CCA059FC4}" type="datetimeFigureOut">
               <a:rPr lang="en-US" smtClean="0"/>
-              <a:t>4/26/2026</a:t>
+              <a:t>1/27/13</a:t>
             </a:fld>
             <a:endParaRPr lang="en-US"/>
           </a:p>
@@ -2030,7 +2031,7 @@
           <a:p>
             <a:fld id="{C1FF6DA9-008F-8B48-92A6-B652298478BF}" type="slidenum">
               <a:rPr lang="en-US" smtClean="0"/>
-              <a:t>‹nº›</a:t>
+              <a:t>‹#›</a:t>
             </a:fld>
             <a:endParaRPr lang="en-US"/>
           </a:p>
@@ -2091,9 +2092,10 @@
           </a:lstStyle>
           <a:p>
             <a:r>
-              <a:rPr lang="en-US"/>
+              <a:rPr lang="en-US" smtClean="0"/>
               <a:t>Click to edit Master title style</a:t>
             </a:r>
+            <a:endParaRPr lang="en-US"/>
           </a:p>
         </p:txBody>
       </p:sp>
@@ -2147,37 +2149,38 @@
           <a:p>
             <a:pPr lvl="0"/>
             <a:r>
-              <a:rPr lang="en-US"/>
+              <a:rPr lang="en-US" smtClean="0"/>
               <a:t>Click to edit Master text styles</a:t>
             </a:r>
           </a:p>
           <a:p>
             <a:pPr lvl="1"/>
             <a:r>
-              <a:rPr lang="en-US"/>
+              <a:rPr lang="en-US" smtClean="0"/>
               <a:t>Second level</a:t>
             </a:r>
           </a:p>
           <a:p>
             <a:pPr lvl="2"/>
             <a:r>
-              <a:rPr lang="en-US"/>
+              <a:rPr lang="en-US" smtClean="0"/>
               <a:t>Third level</a:t>
             </a:r>
           </a:p>
           <a:p>
             <a:pPr lvl="3"/>
             <a:r>
-              <a:rPr lang="en-US"/>
+              <a:rPr lang="en-US" smtClean="0"/>
               <a:t>Fourth level</a:t>
             </a:r>
           </a:p>
           <a:p>
             <a:pPr lvl="4"/>
             <a:r>
-              <a:rPr lang="en-US"/>
+              <a:rPr lang="en-US" smtClean="0"/>
               <a:t>Fifth level</a:t>
             </a:r>
+            <a:endParaRPr lang="en-US"/>
           </a:p>
         </p:txBody>
       </p:sp>
@@ -2240,7 +2243,7 @@
           <a:p>
             <a:pPr lvl="0"/>
             <a:r>
-              <a:rPr lang="en-US"/>
+              <a:rPr lang="en-US" smtClean="0"/>
               <a:t>Click to edit Master text styles</a:t>
             </a:r>
           </a:p>
@@ -2263,7 +2266,7 @@
           <a:p>
             <a:fld id="{5BCAD085-E8A6-8845-BD4E-CB4CCA059FC4}" type="datetimeFigureOut">
               <a:rPr lang="en-US" smtClean="0"/>
-              <a:t>4/26/2026</a:t>
+              <a:t>1/27/13</a:t>
             </a:fld>
             <a:endParaRPr lang="en-US"/>
           </a:p>
@@ -2305,7 +2308,7 @@
           <a:p>
             <a:fld id="{C1FF6DA9-008F-8B48-92A6-B652298478BF}" type="slidenum">
               <a:rPr lang="en-US" smtClean="0"/>
-              <a:t>‹nº›</a:t>
+              <a:t>‹#›</a:t>
             </a:fld>
             <a:endParaRPr lang="en-US"/>
           </a:p>
@@ -2366,9 +2369,10 @@
           </a:lstStyle>
           <a:p>
             <a:r>
-              <a:rPr lang="en-US"/>
+              <a:rPr lang="en-US" smtClean="0"/>
               <a:t>Click to edit Master title style</a:t>
             </a:r>
+            <a:endParaRPr lang="en-US"/>
           </a:p>
         </p:txBody>
       </p:sp>
@@ -2492,7 +2496,7 @@
           <a:p>
             <a:pPr lvl="0"/>
             <a:r>
-              <a:rPr lang="en-US"/>
+              <a:rPr lang="en-US" smtClean="0"/>
               <a:t>Click to edit Master text styles</a:t>
             </a:r>
           </a:p>
@@ -2515,7 +2519,7 @@
           <a:p>
             <a:fld id="{5BCAD085-E8A6-8845-BD4E-CB4CCA059FC4}" type="datetimeFigureOut">
               <a:rPr lang="en-US" smtClean="0"/>
-              <a:t>4/26/2026</a:t>
+              <a:t>1/27/13</a:t>
             </a:fld>
             <a:endParaRPr lang="en-US"/>
           </a:p>
@@ -2557,7 +2561,7 @@
           <a:p>
             <a:fld id="{C1FF6DA9-008F-8B48-92A6-B652298478BF}" type="slidenum">
               <a:rPr lang="en-US" smtClean="0"/>
-              <a:t>‹nº›</a:t>
+              <a:t>‹#›</a:t>
             </a:fld>
             <a:endParaRPr lang="en-US"/>
           </a:p>
@@ -2624,9 +2628,10 @@
           <a:lstStyle/>
           <a:p>
             <a:r>
-              <a:rPr lang="en-US"/>
+              <a:rPr lang="en-US" smtClean="0"/>
               <a:t>Click to edit Master title style</a:t>
             </a:r>
+            <a:endParaRPr lang="en-US"/>
           </a:p>
         </p:txBody>
       </p:sp>
@@ -2657,37 +2662,38 @@
           <a:p>
             <a:pPr lvl="0"/>
             <a:r>
-              <a:rPr lang="en-US"/>
+              <a:rPr lang="en-US" smtClean="0"/>
               <a:t>Click to edit Master text styles</a:t>
             </a:r>
           </a:p>
           <a:p>
             <a:pPr lvl="1"/>
             <a:r>
-              <a:rPr lang="en-US"/>
+              <a:rPr lang="en-US" smtClean="0"/>
               <a:t>Second level</a:t>
             </a:r>
           </a:p>
           <a:p>
             <a:pPr lvl="2"/>
             <a:r>
-              <a:rPr lang="en-US"/>
+              <a:rPr lang="en-US" smtClean="0"/>
               <a:t>Third level</a:t>
             </a:r>
           </a:p>
           <a:p>
             <a:pPr lvl="3"/>
             <a:r>
-              <a:rPr lang="en-US"/>
+              <a:rPr lang="en-US" smtClean="0"/>
               <a:t>Fourth level</a:t>
             </a:r>
           </a:p>
           <a:p>
             <a:pPr lvl="4"/>
             <a:r>
-              <a:rPr lang="en-US"/>
+              <a:rPr lang="en-US" smtClean="0"/>
               <a:t>Fifth level</a:t>
             </a:r>
+            <a:endParaRPr lang="en-US"/>
           </a:p>
         </p:txBody>
       </p:sp>
@@ -2726,7 +2732,7 @@
           <a:p>
             <a:fld id="{5BCAD085-E8A6-8845-BD4E-CB4CCA059FC4}" type="datetimeFigureOut">
               <a:rPr lang="en-US" smtClean="0"/>
-              <a:t>4/26/2026</a:t>
+              <a:t>1/27/13</a:t>
             </a:fld>
             <a:endParaRPr lang="en-US"/>
           </a:p>
@@ -2804,7 +2810,7 @@
           <a:p>
             <a:fld id="{C1FF6DA9-008F-8B48-92A6-B652298478BF}" type="slidenum">
               <a:rPr lang="en-US" smtClean="0"/>
-              <a:t>‹nº›</a:t>
+              <a:t>‹#›</a:t>
             </a:fld>
             <a:endParaRPr lang="en-US"/>
           </a:p>
@@ -3085,7 +3091,7 @@
 </file>
 
 <file path=ppt/slides/slide1.xml><?xml version="1.0" encoding="utf-8"?>
-<p:sld xmlns:a="http://schemas.openxmlformats.org/drawingml/2006/main" xmlns:r="http://schemas.openxmlformats.org/officeDocument/2006/relationships" xmlns:p="http://schemas.openxmlformats.org/presentationml/2006/main">
+<p:sld xmlns:a="http://schemas.openxmlformats.org/drawingml/2006/main" xmlns:p="http://schemas.openxmlformats.org/presentationml/2006/main" xmlns:r="http://schemas.openxmlformats.org/officeDocument/2006/relationships">
   <p:cSld>
     <p:spTree>
       <p:nvGrpSpPr>
@@ -3093,14 +3099,7 @@
         <p:cNvGrpSpPr/>
         <p:nvPr/>
       </p:nvGrpSpPr>
-      <p:grpSpPr>
-        <a:xfrm>
-          <a:off x="0" y="0"/>
-          <a:ext cx="0" cy="0"/>
-          <a:chOff x="0" y="0"/>
-          <a:chExt cx="0" cy="0"/>
-        </a:xfrm>
-      </p:grpSpPr>
+      <p:grpSpPr/>
       <p:sp>
         <p:nvSpPr>
           <p:cNvPr id="2" name="Rectangle 1"/>
@@ -3141,7 +3140,6 @@
           <a:lstStyle/>
           <a:p>
             <a:pPr algn="ctr"/>
-            <a:endParaRPr/>
           </a:p>
         </p:txBody>
       </p:sp>
@@ -3185,7 +3183,6 @@
           <a:lstStyle/>
           <a:p>
             <a:pPr algn="ctr"/>
-            <a:endParaRPr/>
           </a:p>
         </p:txBody>
       </p:sp>
@@ -3206,7 +3203,7 @@
           <a:noFill/>
         </p:spPr>
         <p:txBody>
-          <a:bodyPr wrap="square" lIns="45720" tIns="18288" rIns="45720" bIns="18288">
+          <a:bodyPr wrap="square" lIns="45720" rIns="45720" tIns="18288" bIns="18288">
             <a:spAutoFit/>
           </a:bodyPr>
           <a:lstStyle/>
@@ -3241,7 +3238,7 @@
           <a:noFill/>
         </p:spPr>
         <p:txBody>
-          <a:bodyPr wrap="square" lIns="45720" tIns="18288" rIns="45720" bIns="18288">
+          <a:bodyPr wrap="square" lIns="45720" rIns="45720" tIns="18288" bIns="18288">
             <a:spAutoFit/>
           </a:bodyPr>
           <a:lstStyle/>
@@ -3276,7 +3273,7 @@
           <a:noFill/>
         </p:spPr>
         <p:txBody>
-          <a:bodyPr wrap="square" lIns="45720" tIns="18288" rIns="45720" bIns="18288">
+          <a:bodyPr wrap="square" lIns="45720" rIns="45720" tIns="18288" bIns="18288">
             <a:spAutoFit/>
           </a:bodyPr>
           <a:lstStyle/>
@@ -3303,7 +3300,7 @@
 </file>
 
 <file path=ppt/slides/slide10.xml><?xml version="1.0" encoding="utf-8"?>
-<p:sld xmlns:a="http://schemas.openxmlformats.org/drawingml/2006/main" xmlns:r="http://schemas.openxmlformats.org/officeDocument/2006/relationships" xmlns:p="http://schemas.openxmlformats.org/presentationml/2006/main">
+<p:sld xmlns:a="http://schemas.openxmlformats.org/drawingml/2006/main" xmlns:p="http://schemas.openxmlformats.org/presentationml/2006/main" xmlns:r="http://schemas.openxmlformats.org/officeDocument/2006/relationships">
   <p:cSld>
     <p:spTree>
       <p:nvGrpSpPr>
@@ -3311,14 +3308,7 @@
         <p:cNvGrpSpPr/>
         <p:nvPr/>
       </p:nvGrpSpPr>
-      <p:grpSpPr>
-        <a:xfrm>
-          <a:off x="0" y="0"/>
-          <a:ext cx="0" cy="0"/>
-          <a:chOff x="0" y="0"/>
-          <a:chExt cx="0" cy="0"/>
-        </a:xfrm>
-      </p:grpSpPr>
+      <p:grpSpPr/>
       <p:sp>
         <p:nvSpPr>
           <p:cNvPr id="2" name="Rectangle 1"/>
@@ -3359,7 +3349,6 @@
           <a:lstStyle/>
           <a:p>
             <a:pPr algn="ctr"/>
-            <a:endParaRPr/>
           </a:p>
         </p:txBody>
       </p:sp>
@@ -3380,7 +3369,7 @@
           <a:noFill/>
         </p:spPr>
         <p:txBody>
-          <a:bodyPr wrap="square" lIns="45720" tIns="18288" rIns="45720" bIns="18288">
+          <a:bodyPr wrap="square" lIns="45720" rIns="45720" tIns="18288" bIns="18288">
             <a:spAutoFit/>
           </a:bodyPr>
           <a:lstStyle/>
@@ -3393,7 +3382,7 @@
                 </a:solidFill>
                 <a:latin typeface="Calibri"/>
               </a:rPr>
-              <a:t>Resposta e Como Sabemos Se Está Boa</a:t>
+              <a:t>Como Encontrar o Trecho Certo</a:t>
             </a:r>
           </a:p>
         </p:txBody>
@@ -3415,7 +3404,7 @@
           <a:noFill/>
         </p:spPr>
         <p:txBody>
-          <a:bodyPr wrap="square" lIns="45720" tIns="18288" rIns="45720" bIns="18288">
+          <a:bodyPr wrap="square" lIns="45720" rIns="45720" tIns="18288" bIns="18288">
             <a:spAutoFit/>
           </a:bodyPr>
           <a:lstStyle/>
@@ -3428,67 +3417,30 @@
                 </a:solidFill>
                 <a:latin typeface="Calibri"/>
               </a:rPr>
-              <a:t>LLM monta a resposta · gabarito mede qualidade</a:t>
-            </a:r>
-          </a:p>
-        </p:txBody>
-      </p:sp>
-      <p:sp>
-        <p:nvSpPr>
-          <p:cNvPr id="5" name="TextBox 4"/>
-          <p:cNvSpPr txBox="1"/>
-          <p:nvPr/>
-        </p:nvSpPr>
-        <p:spPr>
-          <a:xfrm>
-            <a:off x="548640" y="1280160"/>
-            <a:ext cx="5577840" cy="365760"/>
-          </a:xfrm>
-          <a:prstGeom prst="rect">
-            <a:avLst/>
-          </a:prstGeom>
-          <a:noFill/>
-        </p:spPr>
-        <p:txBody>
-          <a:bodyPr wrap="square" lIns="45720" tIns="18288" rIns="45720" bIns="18288">
-            <a:spAutoFit/>
-          </a:bodyPr>
-          <a:lstStyle/>
-          <a:p>
-            <a:pPr algn="l"/>
-            <a:r>
-              <a:rPr sz="2000" b="1">
-                <a:solidFill>
-                  <a:srgbClr val="1A4480"/>
-                </a:solidFill>
-                <a:latin typeface="Calibri"/>
-              </a:rPr>
-              <a:t>💬 Como a resposta é montada</a:t>
-            </a:r>
-          </a:p>
-        </p:txBody>
-      </p:sp>
-      <p:sp>
-        <p:nvSpPr>
-          <p:cNvPr id="6" name="Rounded Rectangle 5"/>
+              <a:t>3 "investigadores" trabalham juntos pra achar a melhor resposta</a:t>
+            </a:r>
+          </a:p>
+        </p:txBody>
+      </p:sp>
+      <p:sp>
+        <p:nvSpPr>
+          <p:cNvPr id="5" name="Rounded Rectangle 4"/>
           <p:cNvSpPr/>
           <p:nvPr/>
         </p:nvSpPr>
         <p:spPr>
           <a:xfrm>
-            <a:off x="548640" y="1783080"/>
-            <a:ext cx="5577840" cy="2286000"/>
+            <a:off x="457200" y="2560320"/>
+            <a:ext cx="1828800" cy="640080"/>
           </a:xfrm>
           <a:prstGeom prst="roundRect">
             <a:avLst/>
           </a:prstGeom>
           <a:solidFill>
-            <a:srgbClr val="EEEEF6"/>
+            <a:srgbClr val="222222"/>
           </a:solidFill>
           <a:ln>
-            <a:solidFill>
-              <a:srgbClr val="1A4480"/>
-            </a:solidFill>
+            <a:noFill/>
           </a:ln>
         </p:spPr>
         <p:style>
@@ -3506,127 +3458,400 @@
           </a:fontRef>
         </p:style>
         <p:txBody>
-          <a:bodyPr rtlCol="0" anchor="ctr"/>
+          <a:bodyPr rtlCol="0" anchor="ctr" lIns="45720"/>
           <a:lstStyle/>
           <a:p>
             <a:pPr algn="ctr"/>
-            <a:endParaRPr/>
-          </a:p>
-        </p:txBody>
-      </p:sp>
-      <p:sp>
-        <p:nvSpPr>
-          <p:cNvPr id="7" name="TextBox 6"/>
-          <p:cNvSpPr txBox="1"/>
-          <p:nvPr/>
-        </p:nvSpPr>
-        <p:spPr>
-          <a:xfrm>
-            <a:off x="731520" y="1874519"/>
-            <a:ext cx="5212080" cy="2194560"/>
-          </a:xfrm>
-          <a:prstGeom prst="rect">
-            <a:avLst/>
-          </a:prstGeom>
-          <a:noFill/>
-        </p:spPr>
-        <p:txBody>
-          <a:bodyPr wrap="square" lIns="45720" tIns="18288" rIns="45720" bIns="18288">
-            <a:spAutoFit/>
-          </a:bodyPr>
-          <a:lstStyle/>
-          <a:p>
-            <a:pPr algn="l"/>
-            <a:r>
-              <a:rPr sz="1400" b="0">
-                <a:solidFill>
-                  <a:srgbClr val="222222"/>
-                </a:solidFill>
-                <a:latin typeface="Calibri"/>
-              </a:rPr>
-              <a:t>1. Pegamos os 6 melhores trechos</a:t>
-            </a:r>
-          </a:p>
-          <a:p>
-            <a:pPr algn="l"/>
-            <a:r>
-              <a:rPr sz="1400" b="0">
-                <a:solidFill>
-                  <a:srgbClr val="222222"/>
-                </a:solidFill>
-                <a:latin typeface="Calibri"/>
-              </a:rPr>
-              <a:t>2. Entregamos pra LLM (Gemini) com regras:</a:t>
-            </a:r>
-          </a:p>
-          <a:p>
-            <a:pPr algn="l"/>
-            <a:r>
-              <a:rPr sz="1400" b="0">
-                <a:solidFill>
-                  <a:srgbClr val="222222"/>
-                </a:solidFill>
-                <a:latin typeface="Calibri"/>
-              </a:rPr>
-              <a:t>    – cite a fonte de cada afirmação</a:t>
-            </a:r>
-          </a:p>
-          <a:p>
-            <a:pPr algn="l"/>
-            <a:r>
-              <a:rPr sz="1400" b="0">
-                <a:solidFill>
-                  <a:srgbClr val="222222"/>
-                </a:solidFill>
-                <a:latin typeface="Calibri"/>
-              </a:rPr>
-              <a:t>    – ignore texto revogado (~~...~~)</a:t>
-            </a:r>
-          </a:p>
-          <a:p>
-            <a:pPr algn="l"/>
-            <a:r>
-              <a:rPr sz="1400" b="0">
-                <a:solidFill>
-                  <a:srgbClr val="222222"/>
-                </a:solidFill>
-                <a:latin typeface="Calibri"/>
-              </a:rPr>
-              <a:t>    – se não souber, diga "não consta"</a:t>
-            </a:r>
-          </a:p>
-          <a:p>
-            <a:pPr algn="l"/>
-            <a:r>
-              <a:rPr sz="1400" b="0">
-                <a:solidFill>
-                  <a:srgbClr val="222222"/>
-                </a:solidFill>
-                <a:latin typeface="Calibri"/>
-              </a:rPr>
-              <a:t>3. LLM gera resposta + lista de citações</a:t>
-            </a:r>
-          </a:p>
-        </p:txBody>
-      </p:sp>
-      <p:sp>
-        <p:nvSpPr>
-          <p:cNvPr id="8" name="TextBox 7"/>
-          <p:cNvSpPr txBox="1"/>
-          <p:nvPr/>
-        </p:nvSpPr>
-        <p:spPr>
-          <a:xfrm>
-            <a:off x="548640" y="4251960"/>
-            <a:ext cx="5577840" cy="365760"/>
-          </a:xfrm>
-          <a:prstGeom prst="rect">
-            <a:avLst/>
-          </a:prstGeom>
-          <a:noFill/>
-        </p:spPr>
-        <p:txBody>
-          <a:bodyPr wrap="square" lIns="45720" tIns="18288" rIns="45720" bIns="18288">
+            <a:r>
+              <a:rPr sz="1300" b="1">
+                <a:solidFill>
+                  <a:srgbClr val="FFFFFF"/>
+                </a:solidFill>
+              </a:rPr>
+              <a:t>Pergunta</a:t>
+            </a:r>
+          </a:p>
+        </p:txBody>
+      </p:sp>
+      <p:sp>
+        <p:nvSpPr>
+          <p:cNvPr id="6" name="Rounded Rectangle 5"/>
+          <p:cNvSpPr/>
+          <p:nvPr/>
+        </p:nvSpPr>
+        <p:spPr>
+          <a:xfrm>
+            <a:off x="2834640" y="1463040"/>
+            <a:ext cx="2743200" cy="777240"/>
+          </a:xfrm>
+          <a:prstGeom prst="roundRect">
+            <a:avLst/>
+          </a:prstGeom>
+          <a:solidFill>
+            <a:srgbClr val="1A4480"/>
+          </a:solidFill>
+          <a:ln>
+            <a:noFill/>
+          </a:ln>
+        </p:spPr>
+        <p:style>
+          <a:lnRef idx="1">
+            <a:schemeClr val="accent1"/>
+          </a:lnRef>
+          <a:fillRef idx="3">
+            <a:schemeClr val="accent1"/>
+          </a:fillRef>
+          <a:effectRef idx="2">
+            <a:schemeClr val="accent1"/>
+          </a:effectRef>
+          <a:fontRef idx="minor">
+            <a:schemeClr val="lt1"/>
+          </a:fontRef>
+        </p:style>
+        <p:txBody>
+          <a:bodyPr rtlCol="0" anchor="ctr" lIns="45720"/>
+          <a:lstStyle/>
+          <a:p>
+            <a:pPr algn="ctr"/>
+            <a:r>
+              <a:rPr sz="1300" b="1">
+                <a:solidFill>
+                  <a:srgbClr val="FFFFFF"/>
+                </a:solidFill>
+              </a:rPr>
+              <a:t>🎯 Investigador 1</a:t>
+            </a:r>
+          </a:p>
+          <a:p>
+            <a:pPr algn="ctr"/>
+            <a:r>
+              <a:rPr sz="1000">
+                <a:solidFill>
+                  <a:srgbClr val="FFFFFF"/>
+                </a:solidFill>
+              </a:rPr>
+              <a:t>busca por significado</a:t>
+            </a:r>
+          </a:p>
+        </p:txBody>
+      </p:sp>
+      <p:sp>
+        <p:nvSpPr>
+          <p:cNvPr id="7" name="Rounded Rectangle 6"/>
+          <p:cNvSpPr/>
+          <p:nvPr/>
+        </p:nvSpPr>
+        <p:spPr>
+          <a:xfrm>
+            <a:off x="2834640" y="2514600"/>
+            <a:ext cx="2743200" cy="777240"/>
+          </a:xfrm>
+          <a:prstGeom prst="roundRect">
+            <a:avLst/>
+          </a:prstGeom>
+          <a:solidFill>
+            <a:srgbClr val="1A4480"/>
+          </a:solidFill>
+          <a:ln>
+            <a:noFill/>
+          </a:ln>
+        </p:spPr>
+        <p:style>
+          <a:lnRef idx="1">
+            <a:schemeClr val="accent1"/>
+          </a:lnRef>
+          <a:fillRef idx="3">
+            <a:schemeClr val="accent1"/>
+          </a:fillRef>
+          <a:effectRef idx="2">
+            <a:schemeClr val="accent1"/>
+          </a:effectRef>
+          <a:fontRef idx="minor">
+            <a:schemeClr val="lt1"/>
+          </a:fontRef>
+        </p:style>
+        <p:txBody>
+          <a:bodyPr rtlCol="0" anchor="ctr" lIns="45720"/>
+          <a:lstStyle/>
+          <a:p>
+            <a:pPr algn="ctr"/>
+            <a:r>
+              <a:rPr sz="1300" b="1">
+                <a:solidFill>
+                  <a:srgbClr val="FFFFFF"/>
+                </a:solidFill>
+              </a:rPr>
+              <a:t>🔤 Investigador 2</a:t>
+            </a:r>
+          </a:p>
+          <a:p>
+            <a:pPr algn="ctr"/>
+            <a:r>
+              <a:rPr sz="1000">
+                <a:solidFill>
+                  <a:srgbClr val="FFFFFF"/>
+                </a:solidFill>
+              </a:rPr>
+              <a:t>busca por palavra-chave</a:t>
+            </a:r>
+          </a:p>
+        </p:txBody>
+      </p:sp>
+      <p:sp>
+        <p:nvSpPr>
+          <p:cNvPr id="8" name="Rounded Rectangle 7"/>
+          <p:cNvSpPr/>
+          <p:nvPr/>
+        </p:nvSpPr>
+        <p:spPr>
+          <a:xfrm>
+            <a:off x="2834640" y="3566160"/>
+            <a:ext cx="2743200" cy="777240"/>
+          </a:xfrm>
+          <a:prstGeom prst="roundRect">
+            <a:avLst/>
+          </a:prstGeom>
+          <a:solidFill>
+            <a:srgbClr val="1A4480"/>
+          </a:solidFill>
+          <a:ln>
+            <a:noFill/>
+          </a:ln>
+        </p:spPr>
+        <p:style>
+          <a:lnRef idx="1">
+            <a:schemeClr val="accent1"/>
+          </a:lnRef>
+          <a:fillRef idx="3">
+            <a:schemeClr val="accent1"/>
+          </a:fillRef>
+          <a:effectRef idx="2">
+            <a:schemeClr val="accent1"/>
+          </a:effectRef>
+          <a:fontRef idx="minor">
+            <a:schemeClr val="lt1"/>
+          </a:fontRef>
+        </p:style>
+        <p:txBody>
+          <a:bodyPr rtlCol="0" anchor="ctr" lIns="45720"/>
+          <a:lstStyle/>
+          <a:p>
+            <a:pPr algn="ctr"/>
+            <a:r>
+              <a:rPr sz="1300" b="1">
+                <a:solidFill>
+                  <a:srgbClr val="FFFFFF"/>
+                </a:solidFill>
+              </a:rPr>
+              <a:t>🔢 Investigador 3</a:t>
+            </a:r>
+          </a:p>
+          <a:p>
+            <a:pPr algn="ctr"/>
+            <a:r>
+              <a:rPr sz="1000">
+                <a:solidFill>
+                  <a:srgbClr val="FFFFFF"/>
+                </a:solidFill>
+              </a:rPr>
+              <a:t>busca por número da norma</a:t>
+            </a:r>
+          </a:p>
+        </p:txBody>
+      </p:sp>
+      <p:sp>
+        <p:nvSpPr>
+          <p:cNvPr id="9" name="Rounded Rectangle 8"/>
+          <p:cNvSpPr/>
+          <p:nvPr/>
+        </p:nvSpPr>
+        <p:spPr>
+          <a:xfrm>
+            <a:off x="6126480" y="2514600"/>
+            <a:ext cx="2194560" cy="777240"/>
+          </a:xfrm>
+          <a:prstGeom prst="roundRect">
+            <a:avLst/>
+          </a:prstGeom>
+          <a:solidFill>
+            <a:srgbClr val="446699"/>
+          </a:solidFill>
+          <a:ln>
+            <a:noFill/>
+          </a:ln>
+        </p:spPr>
+        <p:style>
+          <a:lnRef idx="1">
+            <a:schemeClr val="accent1"/>
+          </a:lnRef>
+          <a:fillRef idx="3">
+            <a:schemeClr val="accent1"/>
+          </a:fillRef>
+          <a:effectRef idx="2">
+            <a:schemeClr val="accent1"/>
+          </a:effectRef>
+          <a:fontRef idx="minor">
+            <a:schemeClr val="lt1"/>
+          </a:fontRef>
+        </p:style>
+        <p:txBody>
+          <a:bodyPr rtlCol="0" anchor="ctr" lIns="45720"/>
+          <a:lstStyle/>
+          <a:p>
+            <a:pPr algn="ctr"/>
+            <a:r>
+              <a:rPr sz="1300" b="1">
+                <a:solidFill>
+                  <a:srgbClr val="FFFFFF"/>
+                </a:solidFill>
+              </a:rPr>
+              <a:t>🤝 Vota junto</a:t>
+            </a:r>
+          </a:p>
+          <a:p>
+            <a:pPr algn="ctr"/>
+            <a:r>
+              <a:rPr sz="1000">
+                <a:solidFill>
+                  <a:srgbClr val="FFFFFF"/>
+                </a:solidFill>
+              </a:rPr>
+              <a:t>combina os 3 rankings</a:t>
+            </a:r>
+          </a:p>
+        </p:txBody>
+      </p:sp>
+      <p:sp>
+        <p:nvSpPr>
+          <p:cNvPr id="10" name="Rounded Rectangle 9"/>
+          <p:cNvSpPr/>
+          <p:nvPr/>
+        </p:nvSpPr>
+        <p:spPr>
+          <a:xfrm>
+            <a:off x="8778240" y="2514600"/>
+            <a:ext cx="1828800" cy="777240"/>
+          </a:xfrm>
+          <a:prstGeom prst="roundRect">
+            <a:avLst/>
+          </a:prstGeom>
+          <a:solidFill>
+            <a:srgbClr val="446699"/>
+          </a:solidFill>
+          <a:ln>
+            <a:noFill/>
+          </a:ln>
+        </p:spPr>
+        <p:style>
+          <a:lnRef idx="1">
+            <a:schemeClr val="accent1"/>
+          </a:lnRef>
+          <a:fillRef idx="3">
+            <a:schemeClr val="accent1"/>
+          </a:fillRef>
+          <a:effectRef idx="2">
+            <a:schemeClr val="accent1"/>
+          </a:effectRef>
+          <a:fontRef idx="minor">
+            <a:schemeClr val="lt1"/>
+          </a:fontRef>
+        </p:style>
+        <p:txBody>
+          <a:bodyPr rtlCol="0" anchor="ctr" lIns="45720"/>
+          <a:lstStyle/>
+          <a:p>
+            <a:pPr algn="ctr"/>
+            <a:r>
+              <a:rPr sz="1300" b="1">
+                <a:solidFill>
+                  <a:srgbClr val="FFFFFF"/>
+                </a:solidFill>
+              </a:rPr>
+              <a:t>⚖ Juiz final</a:t>
+            </a:r>
+          </a:p>
+          <a:p>
+            <a:pPr algn="ctr"/>
+            <a:r>
+              <a:rPr sz="1000">
+                <a:solidFill>
+                  <a:srgbClr val="FFFFFF"/>
+                </a:solidFill>
+              </a:rPr>
+              <a:t>reordena top 20</a:t>
+            </a:r>
+          </a:p>
+        </p:txBody>
+      </p:sp>
+      <p:sp>
+        <p:nvSpPr>
+          <p:cNvPr id="11" name="Rounded Rectangle 10"/>
+          <p:cNvSpPr/>
+          <p:nvPr/>
+        </p:nvSpPr>
+        <p:spPr>
+          <a:xfrm>
+            <a:off x="10972800" y="2514600"/>
+            <a:ext cx="822960" cy="777240"/>
+          </a:xfrm>
+          <a:prstGeom prst="roundRect">
+            <a:avLst/>
+          </a:prstGeom>
+          <a:solidFill>
+            <a:srgbClr val="338855"/>
+          </a:solidFill>
+          <a:ln>
+            <a:noFill/>
+          </a:ln>
+        </p:spPr>
+        <p:style>
+          <a:lnRef idx="1">
+            <a:schemeClr val="accent1"/>
+          </a:lnRef>
+          <a:fillRef idx="3">
+            <a:schemeClr val="accent1"/>
+          </a:fillRef>
+          <a:effectRef idx="2">
+            <a:schemeClr val="accent1"/>
+          </a:effectRef>
+          <a:fontRef idx="minor">
+            <a:schemeClr val="lt1"/>
+          </a:fontRef>
+        </p:style>
+        <p:txBody>
+          <a:bodyPr rtlCol="0" anchor="ctr" lIns="45720"/>
+          <a:lstStyle/>
+          <a:p>
+            <a:pPr algn="ctr"/>
+            <a:r>
+              <a:rPr sz="1300" b="1">
+                <a:solidFill>
+                  <a:srgbClr val="FFFFFF"/>
+                </a:solidFill>
+              </a:rPr>
+              <a:t>Top 6</a:t>
+            </a:r>
+          </a:p>
+        </p:txBody>
+      </p:sp>
+      <p:sp>
+        <p:nvSpPr>
+          <p:cNvPr id="12" name="TextBox 11"/>
+          <p:cNvSpPr txBox="1"/>
+          <p:nvPr/>
+        </p:nvSpPr>
+        <p:spPr>
+          <a:xfrm>
+            <a:off x="548640" y="4663440"/>
+            <a:ext cx="10972800" cy="365760"/>
+          </a:xfrm>
+          <a:prstGeom prst="rect">
+            <a:avLst/>
+          </a:prstGeom>
+          <a:noFill/>
+        </p:spPr>
+        <p:txBody>
+          <a:bodyPr wrap="square" lIns="45720" rIns="45720" tIns="18288" bIns="18288">
             <a:spAutoFit/>
           </a:bodyPr>
           <a:lstStyle/>
@@ -3639,162 +3864,21 @@
                 </a:solidFill>
                 <a:latin typeface="Calibri"/>
               </a:rPr>
-              <a:t>🎚 Temperatura zero</a:t>
-            </a:r>
-          </a:p>
-        </p:txBody>
-      </p:sp>
-      <p:sp>
-        <p:nvSpPr>
-          <p:cNvPr id="9" name="TextBox 8"/>
-          <p:cNvSpPr txBox="1"/>
-          <p:nvPr/>
-        </p:nvSpPr>
-        <p:spPr>
-          <a:xfrm>
-            <a:off x="731520" y="4663440"/>
-            <a:ext cx="5394960" cy="1645920"/>
-          </a:xfrm>
-          <a:prstGeom prst="rect">
-            <a:avLst/>
-          </a:prstGeom>
-          <a:noFill/>
-        </p:spPr>
-        <p:txBody>
-          <a:bodyPr wrap="square" lIns="45720" tIns="18288" rIns="45720" bIns="18288">
-            <a:spAutoFit/>
-          </a:bodyPr>
-          <a:lstStyle/>
-          <a:p>
-            <a:pPr algn="l"/>
-            <a:r>
-              <a:rPr sz="1400" b="0">
-                <a:solidFill>
-                  <a:srgbClr val="222222"/>
-                </a:solidFill>
-                <a:latin typeface="Calibri"/>
-              </a:rPr>
-              <a:t>LLM responde de forma determinística — mesma</a:t>
-            </a:r>
-          </a:p>
-          <a:p>
-            <a:pPr algn="l"/>
-            <a:r>
-              <a:rPr sz="1400" b="0">
-                <a:solidFill>
-                  <a:srgbClr val="222222"/>
-                </a:solidFill>
-                <a:latin typeface="Calibri"/>
-              </a:rPr>
-              <a:t>pergunta, mesma resposta. Sem criatividade.</a:t>
-            </a:r>
-          </a:p>
-          <a:p>
-            <a:pPr algn="l"/>
-            <a:r>
-              <a:rPr sz="1400" b="0">
-                <a:solidFill>
-                  <a:srgbClr val="222222"/>
-                </a:solidFill>
-                <a:latin typeface="Calibri"/>
-              </a:rPr>
-              <a:t>Em direito não queremos LLM "inventando".</a:t>
-            </a:r>
-          </a:p>
-        </p:txBody>
-      </p:sp>
-      <p:sp>
-        <p:nvSpPr>
-          <p:cNvPr id="10" name="TextBox 9"/>
-          <p:cNvSpPr txBox="1"/>
-          <p:nvPr/>
-        </p:nvSpPr>
-        <p:spPr>
-          <a:xfrm>
-            <a:off x="6400800" y="1280160"/>
-            <a:ext cx="5486400" cy="365760"/>
-          </a:xfrm>
-          <a:prstGeom prst="rect">
-            <a:avLst/>
-          </a:prstGeom>
-          <a:noFill/>
-        </p:spPr>
-        <p:txBody>
-          <a:bodyPr wrap="square" lIns="45720" tIns="18288" rIns="45720" bIns="18288">
-            <a:spAutoFit/>
-          </a:bodyPr>
-          <a:lstStyle/>
-          <a:p>
-            <a:pPr algn="l"/>
-            <a:r>
-              <a:rPr sz="2000" b="1">
-                <a:solidFill>
-                  <a:srgbClr val="1A4480"/>
-                </a:solidFill>
-                <a:latin typeface="Calibri"/>
-              </a:rPr>
-              <a:t>📏 Como medimos qualidade</a:t>
-            </a:r>
-          </a:p>
-        </p:txBody>
-      </p:sp>
-      <p:sp>
-        <p:nvSpPr>
-          <p:cNvPr id="11" name="TextBox 10"/>
-          <p:cNvSpPr txBox="1"/>
-          <p:nvPr/>
-        </p:nvSpPr>
-        <p:spPr>
-          <a:xfrm>
-            <a:off x="6583680" y="1737360"/>
-            <a:ext cx="5394960" cy="731520"/>
-          </a:xfrm>
-          <a:prstGeom prst="rect">
-            <a:avLst/>
-          </a:prstGeom>
-          <a:noFill/>
-        </p:spPr>
-        <p:txBody>
-          <a:bodyPr wrap="square" lIns="45720" tIns="18288" rIns="45720" bIns="18288">
-            <a:spAutoFit/>
-          </a:bodyPr>
-          <a:lstStyle/>
-          <a:p>
-            <a:pPr algn="l"/>
-            <a:r>
-              <a:rPr sz="1400" b="0">
-                <a:solidFill>
-                  <a:srgbClr val="222222"/>
-                </a:solidFill>
-                <a:latin typeface="Calibri"/>
-              </a:rPr>
-              <a:t>Criamos um "gabarito" — lista de perguntas com</a:t>
-            </a:r>
-          </a:p>
-          <a:p>
-            <a:pPr algn="l"/>
-            <a:r>
-              <a:rPr sz="1400" b="0">
-                <a:solidFill>
-                  <a:srgbClr val="222222"/>
-                </a:solidFill>
-                <a:latin typeface="Calibri"/>
-              </a:rPr>
-              <a:t>as respostas corretas anotadas pelo especialista.</a:t>
-            </a:r>
-          </a:p>
-        </p:txBody>
-      </p:sp>
-      <p:sp>
-        <p:nvSpPr>
-          <p:cNvPr id="12" name="TextBox 11"/>
-          <p:cNvSpPr txBox="1"/>
-          <p:nvPr/>
-        </p:nvSpPr>
-        <p:spPr>
-          <a:xfrm>
-            <a:off x="6583680" y="2606040"/>
-            <a:ext cx="5394960" cy="3657600"/>
+              <a:t>Por que 3 investigadores?</a:t>
+            </a:r>
+          </a:p>
+        </p:txBody>
+      </p:sp>
+      <p:sp>
+        <p:nvSpPr>
+          <p:cNvPr id="13" name="TextBox 12"/>
+          <p:cNvSpPr txBox="1"/>
+          <p:nvPr/>
+        </p:nvSpPr>
+        <p:spPr>
+          <a:xfrm>
+            <a:off x="731520" y="5074920"/>
+            <a:ext cx="10972800" cy="1828800"/>
           </a:xfrm>
           <a:prstGeom prst="rect">
             <a:avLst/>
@@ -3819,7 +3903,55 @@
                 </a:solidFill>
                 <a:latin typeface="Calibri"/>
               </a:rPr>
-              <a:t>• Achou o documento certo? (Hit@k)</a:t>
+              <a:t>• Cada um é bom em algo diferente — combinar é melhor que escolher um só</a:t>
+            </a:r>
+          </a:p>
+          <a:p>
+            <a:pPr lvl="1">
+              <a:spcAft>
+                <a:spcPts val="400"/>
+              </a:spcAft>
+            </a:pPr>
+            <a:r>
+              <a:rPr sz="1200">
+                <a:solidFill>
+                  <a:srgbClr val="222222"/>
+                </a:solidFill>
+                <a:latin typeface="Calibri"/>
+              </a:rPr>
+              <a:t>– Significado pega "prazo de revisão" mesmo se o texto diz "período da reanálise"</a:t>
+            </a:r>
+          </a:p>
+          <a:p>
+            <a:pPr lvl="1">
+              <a:spcAft>
+                <a:spcPts val="400"/>
+              </a:spcAft>
+            </a:pPr>
+            <a:r>
+              <a:rPr sz="1200">
+                <a:solidFill>
+                  <a:srgbClr val="222222"/>
+                </a:solidFill>
+                <a:latin typeface="Calibri"/>
+              </a:rPr>
+              <a:t>– Palavra-chave pega termos técnicos exatos como "bandeira tarifária"</a:t>
+            </a:r>
+          </a:p>
+          <a:p>
+            <a:pPr lvl="1">
+              <a:spcAft>
+                <a:spcPts val="400"/>
+              </a:spcAft>
+            </a:pPr>
+            <a:r>
+              <a:rPr sz="1200">
+                <a:solidFill>
+                  <a:srgbClr val="222222"/>
+                </a:solidFill>
+                <a:latin typeface="Calibri"/>
+              </a:rPr>
+              <a:t>– Número de norma pega "REN 1.000/2021" direto, sem depender de contexto</a:t>
             </a:r>
           </a:p>
           <a:p>
@@ -3835,118 +3967,7 @@
                 </a:solidFill>
                 <a:latin typeface="Calibri"/>
               </a:rPr>
-              <a:t>• Citou o artigo certo?</a:t>
-            </a:r>
-          </a:p>
-          <a:p>
-            <a:pPr>
-              <a:spcAft>
-                <a:spcPts val="400"/>
-              </a:spcAft>
-            </a:pPr>
-            <a:r>
-              <a:rPr sz="1400">
-                <a:solidFill>
-                  <a:srgbClr val="222222"/>
-                </a:solidFill>
-                <a:latin typeface="Calibri"/>
-              </a:rPr>
-              <a:t>• O número/prazo está exato?</a:t>
-            </a:r>
-          </a:p>
-          <a:p>
-            <a:pPr>
-              <a:spcAft>
-                <a:spcPts val="400"/>
-              </a:spcAft>
-            </a:pPr>
-            <a:r>
-              <a:rPr sz="1400">
-                <a:solidFill>
-                  <a:srgbClr val="222222"/>
-                </a:solidFill>
-                <a:latin typeface="Calibri"/>
-              </a:rPr>
-              <a:t>• A resposta cobre o que o gabarito diz?</a:t>
-            </a:r>
-          </a:p>
-          <a:p>
-            <a:pPr>
-              <a:spcAft>
-                <a:spcPts val="400"/>
-              </a:spcAft>
-            </a:pPr>
-            <a:r>
-              <a:rPr sz="1400">
-                <a:solidFill>
-                  <a:srgbClr val="222222"/>
-                </a:solidFill>
-                <a:latin typeface="Calibri"/>
-              </a:rPr>
-              <a:t>• Quando não tem informação, ela recusa?</a:t>
-            </a:r>
-          </a:p>
-          <a:p>
-            <a:pPr>
-              <a:spcAft>
-                <a:spcPts val="400"/>
-              </a:spcAft>
-            </a:pPr>
-            <a:r>
-              <a:rPr sz="1400">
-                <a:solidFill>
-                  <a:srgbClr val="222222"/>
-                </a:solidFill>
-                <a:latin typeface="Calibri"/>
-              </a:rPr>
-              <a:t>• Quanto tempo levou?</a:t>
-            </a:r>
-          </a:p>
-        </p:txBody>
-      </p:sp>
-      <p:sp>
-        <p:nvSpPr>
-          <p:cNvPr id="13" name="TextBox 12"/>
-          <p:cNvSpPr txBox="1"/>
-          <p:nvPr/>
-        </p:nvSpPr>
-        <p:spPr>
-          <a:xfrm>
-            <a:off x="6400800" y="5852160"/>
-            <a:ext cx="5486400" cy="457200"/>
-          </a:xfrm>
-          <a:prstGeom prst="rect">
-            <a:avLst/>
-          </a:prstGeom>
-          <a:noFill/>
-        </p:spPr>
-        <p:txBody>
-          <a:bodyPr wrap="square" lIns="45720" tIns="18288" rIns="45720" bIns="18288">
-            <a:spAutoFit/>
-          </a:bodyPr>
-          <a:lstStyle/>
-          <a:p>
-            <a:pPr algn="l"/>
-            <a:r>
-              <a:rPr sz="1300" b="0">
-                <a:solidFill>
-                  <a:srgbClr val="555555"/>
-                </a:solidFill>
-                <a:latin typeface="Calibri"/>
-              </a:rPr>
-              <a:t>→ Outra LLM atua como "juiz" comparando</a:t>
-            </a:r>
-          </a:p>
-          <a:p>
-            <a:pPr algn="l"/>
-            <a:r>
-              <a:rPr sz="1300" b="0">
-                <a:solidFill>
-                  <a:srgbClr val="555555"/>
-                </a:solidFill>
-                <a:latin typeface="Calibri"/>
-              </a:rPr>
-              <a:t>    resposta nossa × resposta do gabarito.</a:t>
+              <a:t>• Juiz final reordena com modelo mais preciso → garante que os 6 melhores ficam no topo</a:t>
             </a:r>
           </a:p>
         </p:txBody>
@@ -3968,7 +3989,7 @@
           <a:noFill/>
         </p:spPr>
         <p:txBody>
-          <a:bodyPr wrap="square" lIns="45720" tIns="18288" rIns="45720" bIns="18288">
+          <a:bodyPr wrap="square" lIns="45720" rIns="45720" tIns="18288" bIns="18288">
             <a:spAutoFit/>
           </a:bodyPr>
           <a:lstStyle/>
@@ -4003,7 +4024,7 @@
           <a:noFill/>
         </p:spPr>
         <p:txBody>
-          <a:bodyPr wrap="square" lIns="45720" tIns="18288" rIns="45720" bIns="18288">
+          <a:bodyPr wrap="square" lIns="45720" rIns="45720" tIns="18288" bIns="18288">
             <a:spAutoFit/>
           </a:bodyPr>
           <a:lstStyle/>
@@ -4030,7 +4051,7 @@
 </file>
 
 <file path=ppt/slides/slide11.xml><?xml version="1.0" encoding="utf-8"?>
-<p:sld xmlns:a="http://schemas.openxmlformats.org/drawingml/2006/main" xmlns:r="http://schemas.openxmlformats.org/officeDocument/2006/relationships" xmlns:p="http://schemas.openxmlformats.org/presentationml/2006/main">
+<p:sld xmlns:a="http://schemas.openxmlformats.org/drawingml/2006/main" xmlns:p="http://schemas.openxmlformats.org/presentationml/2006/main" xmlns:r="http://schemas.openxmlformats.org/officeDocument/2006/relationships">
   <p:cSld>
     <p:spTree>
       <p:nvGrpSpPr>
@@ -4038,14 +4059,7 @@
         <p:cNvGrpSpPr/>
         <p:nvPr/>
       </p:nvGrpSpPr>
-      <p:grpSpPr>
-        <a:xfrm>
-          <a:off x="0" y="0"/>
-          <a:ext cx="0" cy="0"/>
-          <a:chOff x="0" y="0"/>
-          <a:chExt cx="0" cy="0"/>
-        </a:xfrm>
-      </p:grpSpPr>
+      <p:grpSpPr/>
       <p:sp>
         <p:nvSpPr>
           <p:cNvPr id="2" name="Rectangle 1"/>
@@ -4086,7 +4100,6 @@
           <a:lstStyle/>
           <a:p>
             <a:pPr algn="ctr"/>
-            <a:endParaRPr/>
           </a:p>
         </p:txBody>
       </p:sp>
@@ -4107,7 +4120,7 @@
           <a:noFill/>
         </p:spPr>
         <p:txBody>
-          <a:bodyPr wrap="square" lIns="45720" tIns="18288" rIns="45720" bIns="18288">
+          <a:bodyPr wrap="square" lIns="45720" rIns="45720" tIns="18288" bIns="18288">
             <a:spAutoFit/>
           </a:bodyPr>
           <a:lstStyle/>
@@ -4120,7 +4133,7 @@
                 </a:solidFill>
                 <a:latin typeface="Calibri"/>
               </a:rPr>
-              <a:t>O Que Funcionou e o Que Foi Trocado</a:t>
+              <a:t>Resposta e Como Sabemos Se Está Boa</a:t>
             </a:r>
           </a:p>
         </p:txBody>
@@ -4142,7 +4155,7 @@
           <a:noFill/>
         </p:spPr>
         <p:txBody>
-          <a:bodyPr wrap="square" lIns="45720" tIns="18288" rIns="45720" bIns="18288">
+          <a:bodyPr wrap="square" lIns="45720" rIns="45720" tIns="18288" bIns="18288">
             <a:spAutoFit/>
           </a:bodyPr>
           <a:lstStyle/>
@@ -4155,7 +4168,7 @@
                 </a:solidFill>
                 <a:latin typeface="Calibri"/>
               </a:rPr>
-              <a:t>Decisões importantes em linguagem simples</a:t>
+              <a:t>LLM monta a resposta · gabarito mede qualidade</a:t>
             </a:r>
           </a:p>
         </p:txBody>
@@ -4169,6 +4182,275 @@
         <p:spPr>
           <a:xfrm>
             <a:off x="548640" y="1280160"/>
+            <a:ext cx="5577840" cy="365760"/>
+          </a:xfrm>
+          <a:prstGeom prst="rect">
+            <a:avLst/>
+          </a:prstGeom>
+          <a:noFill/>
+        </p:spPr>
+        <p:txBody>
+          <a:bodyPr wrap="square" lIns="45720" rIns="45720" tIns="18288" bIns="18288">
+            <a:spAutoFit/>
+          </a:bodyPr>
+          <a:lstStyle/>
+          <a:p>
+            <a:pPr algn="l"/>
+            <a:r>
+              <a:rPr sz="2000" b="1">
+                <a:solidFill>
+                  <a:srgbClr val="1A4480"/>
+                </a:solidFill>
+                <a:latin typeface="Calibri"/>
+              </a:rPr>
+              <a:t>💬 Como a resposta é montada</a:t>
+            </a:r>
+          </a:p>
+        </p:txBody>
+      </p:sp>
+      <p:sp>
+        <p:nvSpPr>
+          <p:cNvPr id="6" name="Rounded Rectangle 5"/>
+          <p:cNvSpPr/>
+          <p:nvPr/>
+        </p:nvSpPr>
+        <p:spPr>
+          <a:xfrm>
+            <a:off x="548640" y="1783080"/>
+            <a:ext cx="5577840" cy="2286000"/>
+          </a:xfrm>
+          <a:prstGeom prst="roundRect">
+            <a:avLst/>
+          </a:prstGeom>
+          <a:solidFill>
+            <a:srgbClr val="EEEEF6"/>
+          </a:solidFill>
+          <a:ln>
+            <a:solidFill>
+              <a:srgbClr val="1A4480"/>
+            </a:solidFill>
+          </a:ln>
+        </p:spPr>
+        <p:style>
+          <a:lnRef idx="1">
+            <a:schemeClr val="accent1"/>
+          </a:lnRef>
+          <a:fillRef idx="3">
+            <a:schemeClr val="accent1"/>
+          </a:fillRef>
+          <a:effectRef idx="2">
+            <a:schemeClr val="accent1"/>
+          </a:effectRef>
+          <a:fontRef idx="minor">
+            <a:schemeClr val="lt1"/>
+          </a:fontRef>
+        </p:style>
+        <p:txBody>
+          <a:bodyPr rtlCol="0" anchor="ctr"/>
+          <a:lstStyle/>
+          <a:p>
+            <a:pPr algn="ctr"/>
+          </a:p>
+        </p:txBody>
+      </p:sp>
+      <p:sp>
+        <p:nvSpPr>
+          <p:cNvPr id="7" name="TextBox 6"/>
+          <p:cNvSpPr txBox="1"/>
+          <p:nvPr/>
+        </p:nvSpPr>
+        <p:spPr>
+          <a:xfrm>
+            <a:off x="731520" y="1874519"/>
+            <a:ext cx="5212080" cy="2194560"/>
+          </a:xfrm>
+          <a:prstGeom prst="rect">
+            <a:avLst/>
+          </a:prstGeom>
+          <a:noFill/>
+        </p:spPr>
+        <p:txBody>
+          <a:bodyPr wrap="square" lIns="45720" rIns="45720" tIns="18288" bIns="18288">
+            <a:spAutoFit/>
+          </a:bodyPr>
+          <a:lstStyle/>
+          <a:p>
+            <a:pPr algn="l"/>
+            <a:r>
+              <a:rPr sz="1400" b="0">
+                <a:solidFill>
+                  <a:srgbClr val="222222"/>
+                </a:solidFill>
+                <a:latin typeface="Calibri"/>
+              </a:rPr>
+              <a:t>1. Pegamos os 6 melhores trechos</a:t>
+            </a:r>
+          </a:p>
+          <a:p>
+            <a:pPr algn="l"/>
+            <a:r>
+              <a:rPr sz="1400" b="0">
+                <a:solidFill>
+                  <a:srgbClr val="222222"/>
+                </a:solidFill>
+                <a:latin typeface="Calibri"/>
+              </a:rPr>
+              <a:t>2. Entregamos pra LLM (Gemini) com regras:</a:t>
+            </a:r>
+          </a:p>
+          <a:p>
+            <a:pPr algn="l"/>
+            <a:r>
+              <a:rPr sz="1400" b="0">
+                <a:solidFill>
+                  <a:srgbClr val="222222"/>
+                </a:solidFill>
+                <a:latin typeface="Calibri"/>
+              </a:rPr>
+              <a:t>    – cite a fonte de cada afirmação</a:t>
+            </a:r>
+          </a:p>
+          <a:p>
+            <a:pPr algn="l"/>
+            <a:r>
+              <a:rPr sz="1400" b="0">
+                <a:solidFill>
+                  <a:srgbClr val="222222"/>
+                </a:solidFill>
+                <a:latin typeface="Calibri"/>
+              </a:rPr>
+              <a:t>    – ignore texto revogado (~~...~~)</a:t>
+            </a:r>
+          </a:p>
+          <a:p>
+            <a:pPr algn="l"/>
+            <a:r>
+              <a:rPr sz="1400" b="0">
+                <a:solidFill>
+                  <a:srgbClr val="222222"/>
+                </a:solidFill>
+                <a:latin typeface="Calibri"/>
+              </a:rPr>
+              <a:t>    – se não souber, diga "não consta"</a:t>
+            </a:r>
+          </a:p>
+          <a:p>
+            <a:pPr algn="l"/>
+            <a:r>
+              <a:rPr sz="1400" b="0">
+                <a:solidFill>
+                  <a:srgbClr val="222222"/>
+                </a:solidFill>
+                <a:latin typeface="Calibri"/>
+              </a:rPr>
+              <a:t>3. LLM gera resposta + lista de citações</a:t>
+            </a:r>
+          </a:p>
+        </p:txBody>
+      </p:sp>
+      <p:sp>
+        <p:nvSpPr>
+          <p:cNvPr id="8" name="TextBox 7"/>
+          <p:cNvSpPr txBox="1"/>
+          <p:nvPr/>
+        </p:nvSpPr>
+        <p:spPr>
+          <a:xfrm>
+            <a:off x="548640" y="4251960"/>
+            <a:ext cx="5577840" cy="365760"/>
+          </a:xfrm>
+          <a:prstGeom prst="rect">
+            <a:avLst/>
+          </a:prstGeom>
+          <a:noFill/>
+        </p:spPr>
+        <p:txBody>
+          <a:bodyPr wrap="square" lIns="45720" rIns="45720" tIns="18288" bIns="18288">
+            <a:spAutoFit/>
+          </a:bodyPr>
+          <a:lstStyle/>
+          <a:p>
+            <a:pPr algn="l"/>
+            <a:r>
+              <a:rPr sz="1800" b="1">
+                <a:solidFill>
+                  <a:srgbClr val="1A4480"/>
+                </a:solidFill>
+                <a:latin typeface="Calibri"/>
+              </a:rPr>
+              <a:t>🎚 Temperatura zero</a:t>
+            </a:r>
+          </a:p>
+        </p:txBody>
+      </p:sp>
+      <p:sp>
+        <p:nvSpPr>
+          <p:cNvPr id="9" name="TextBox 8"/>
+          <p:cNvSpPr txBox="1"/>
+          <p:nvPr/>
+        </p:nvSpPr>
+        <p:spPr>
+          <a:xfrm>
+            <a:off x="731520" y="4663440"/>
+            <a:ext cx="5394960" cy="1645920"/>
+          </a:xfrm>
+          <a:prstGeom prst="rect">
+            <a:avLst/>
+          </a:prstGeom>
+          <a:noFill/>
+        </p:spPr>
+        <p:txBody>
+          <a:bodyPr wrap="square" lIns="45720" rIns="45720" tIns="18288" bIns="18288">
+            <a:spAutoFit/>
+          </a:bodyPr>
+          <a:lstStyle/>
+          <a:p>
+            <a:pPr algn="l"/>
+            <a:r>
+              <a:rPr sz="1400" b="0">
+                <a:solidFill>
+                  <a:srgbClr val="222222"/>
+                </a:solidFill>
+                <a:latin typeface="Calibri"/>
+              </a:rPr>
+              <a:t>LLM responde de forma determinística — mesma</a:t>
+            </a:r>
+          </a:p>
+          <a:p>
+            <a:pPr algn="l"/>
+            <a:r>
+              <a:rPr sz="1400" b="0">
+                <a:solidFill>
+                  <a:srgbClr val="222222"/>
+                </a:solidFill>
+                <a:latin typeface="Calibri"/>
+              </a:rPr>
+              <a:t>pergunta, mesma resposta. Sem criatividade.</a:t>
+            </a:r>
+          </a:p>
+          <a:p>
+            <a:pPr algn="l"/>
+            <a:r>
+              <a:rPr sz="1400" b="0">
+                <a:solidFill>
+                  <a:srgbClr val="222222"/>
+                </a:solidFill>
+                <a:latin typeface="Calibri"/>
+              </a:rPr>
+              <a:t>Em direito não queremos LLM "inventando".</a:t>
+            </a:r>
+          </a:p>
+        </p:txBody>
+      </p:sp>
+      <p:sp>
+        <p:nvSpPr>
+          <p:cNvPr id="10" name="TextBox 9"/>
+          <p:cNvSpPr txBox="1"/>
+          <p:nvPr/>
+        </p:nvSpPr>
+        <p:spPr>
+          <a:xfrm>
+            <a:off x="6400800" y="1280160"/>
             <a:ext cx="5486400" cy="365760"/>
           </a:xfrm>
           <a:prstGeom prst="rect">
@@ -4177,34 +4459,81 @@
           <a:noFill/>
         </p:spPr>
         <p:txBody>
-          <a:bodyPr wrap="square" lIns="45720" tIns="18288" rIns="45720" bIns="18288">
-            <a:spAutoFit/>
-          </a:bodyPr>
-          <a:lstStyle/>
-          <a:p>
-            <a:pPr algn="l"/>
-            <a:r>
-              <a:rPr sz="2200" b="1">
-                <a:solidFill>
-                  <a:srgbClr val="228844"/>
-                </a:solidFill>
-                <a:latin typeface="Calibri"/>
-              </a:rPr>
-              <a:t>✓ Acertos</a:t>
-            </a:r>
-          </a:p>
-        </p:txBody>
-      </p:sp>
-      <p:sp>
-        <p:nvSpPr>
-          <p:cNvPr id="6" name="TextBox 5"/>
-          <p:cNvSpPr txBox="1"/>
-          <p:nvPr/>
-        </p:nvSpPr>
-        <p:spPr>
-          <a:xfrm>
-            <a:off x="731520" y="1783080"/>
-            <a:ext cx="5394960" cy="3200400"/>
+          <a:bodyPr wrap="square" lIns="45720" rIns="45720" tIns="18288" bIns="18288">
+            <a:spAutoFit/>
+          </a:bodyPr>
+          <a:lstStyle/>
+          <a:p>
+            <a:pPr algn="l"/>
+            <a:r>
+              <a:rPr sz="2000" b="1">
+                <a:solidFill>
+                  <a:srgbClr val="1A4480"/>
+                </a:solidFill>
+                <a:latin typeface="Calibri"/>
+              </a:rPr>
+              <a:t>📏 Como medimos qualidade</a:t>
+            </a:r>
+          </a:p>
+        </p:txBody>
+      </p:sp>
+      <p:sp>
+        <p:nvSpPr>
+          <p:cNvPr id="11" name="TextBox 10"/>
+          <p:cNvSpPr txBox="1"/>
+          <p:nvPr/>
+        </p:nvSpPr>
+        <p:spPr>
+          <a:xfrm>
+            <a:off x="6583680" y="1737360"/>
+            <a:ext cx="5394960" cy="731520"/>
+          </a:xfrm>
+          <a:prstGeom prst="rect">
+            <a:avLst/>
+          </a:prstGeom>
+          <a:noFill/>
+        </p:spPr>
+        <p:txBody>
+          <a:bodyPr wrap="square" lIns="45720" rIns="45720" tIns="18288" bIns="18288">
+            <a:spAutoFit/>
+          </a:bodyPr>
+          <a:lstStyle/>
+          <a:p>
+            <a:pPr algn="l"/>
+            <a:r>
+              <a:rPr sz="1400" b="0">
+                <a:solidFill>
+                  <a:srgbClr val="222222"/>
+                </a:solidFill>
+                <a:latin typeface="Calibri"/>
+              </a:rPr>
+              <a:t>Criamos um "gabarito" — lista de perguntas com</a:t>
+            </a:r>
+          </a:p>
+          <a:p>
+            <a:pPr algn="l"/>
+            <a:r>
+              <a:rPr sz="1400" b="0">
+                <a:solidFill>
+                  <a:srgbClr val="222222"/>
+                </a:solidFill>
+                <a:latin typeface="Calibri"/>
+              </a:rPr>
+              <a:t>as respostas corretas anotadas pelo especialista.</a:t>
+            </a:r>
+          </a:p>
+        </p:txBody>
+      </p:sp>
+      <p:sp>
+        <p:nvSpPr>
+          <p:cNvPr id="12" name="TextBox 11"/>
+          <p:cNvSpPr txBox="1"/>
+          <p:nvPr/>
+        </p:nvSpPr>
+        <p:spPr>
+          <a:xfrm>
+            <a:off x="6583680" y="2606040"/>
+            <a:ext cx="5394960" cy="3657600"/>
           </a:xfrm>
           <a:prstGeom prst="rect">
             <a:avLst/>
@@ -4223,13 +4552,13 @@
               </a:spcAft>
             </a:pPr>
             <a:r>
-              <a:rPr sz="1500">
+              <a:rPr sz="1400">
                 <a:solidFill>
                   <a:srgbClr val="222222"/>
                 </a:solidFill>
                 <a:latin typeface="Calibri"/>
               </a:rPr>
-              <a:t>• Decisor por página economizou ~93% do custo de OCR</a:t>
+              <a:t>• Achou o documento certo? (Hit@k)</a:t>
             </a:r>
           </a:p>
           <a:p>
@@ -4239,13 +4568,13 @@
               </a:spcAft>
             </a:pPr>
             <a:r>
-              <a:rPr sz="1500">
+              <a:rPr sz="1400">
                 <a:solidFill>
                   <a:srgbClr val="222222"/>
                 </a:solidFill>
                 <a:latin typeface="Calibri"/>
               </a:rPr>
-              <a:t>• Cortar texto pelos artigos da lei melhorou muito as citações</a:t>
+              <a:t>• Citou o artigo certo?</a:t>
             </a:r>
           </a:p>
           <a:p>
@@ -4255,73 +4584,15 @@
               </a:spcAft>
             </a:pPr>
             <a:r>
-              <a:rPr sz="1500">
+              <a:rPr sz="1400">
                 <a:solidFill>
                   <a:srgbClr val="222222"/>
                 </a:solidFill>
                 <a:latin typeface="Calibri"/>
               </a:rPr>
-              <a:t>• Pipeline retoma do ponto onde parou se cair — sem refazer do zero</a:t>
-            </a:r>
-          </a:p>
-        </p:txBody>
-      </p:sp>
-      <p:sp>
-        <p:nvSpPr>
-          <p:cNvPr id="7" name="TextBox 6"/>
-          <p:cNvSpPr txBox="1"/>
-          <p:nvPr/>
-        </p:nvSpPr>
-        <p:spPr>
-          <a:xfrm>
-            <a:off x="6400800" y="1280160"/>
-            <a:ext cx="5486400" cy="365760"/>
-          </a:xfrm>
-          <a:prstGeom prst="rect">
-            <a:avLst/>
-          </a:prstGeom>
-          <a:noFill/>
-        </p:spPr>
-        <p:txBody>
-          <a:bodyPr wrap="square" lIns="45720" tIns="18288" rIns="45720" bIns="18288">
-            <a:spAutoFit/>
-          </a:bodyPr>
-          <a:lstStyle/>
-          <a:p>
-            <a:pPr algn="l"/>
-            <a:r>
-              <a:rPr sz="2200" b="1">
-                <a:solidFill>
-                  <a:srgbClr val="C26B00"/>
-                </a:solidFill>
-                <a:latin typeface="Calibri"/>
-              </a:rPr>
-              <a:t>⚖ Escolhas conscientes</a:t>
-            </a:r>
-          </a:p>
-        </p:txBody>
-      </p:sp>
-      <p:sp>
-        <p:nvSpPr>
-          <p:cNvPr id="8" name="TextBox 7"/>
-          <p:cNvSpPr txBox="1"/>
-          <p:nvPr/>
-        </p:nvSpPr>
-        <p:spPr>
-          <a:xfrm>
-            <a:off x="6583680" y="1783080"/>
-            <a:ext cx="5394960" cy="3200400"/>
-          </a:xfrm>
-          <a:prstGeom prst="rect">
-            <a:avLst/>
-          </a:prstGeom>
-          <a:noFill/>
-        </p:spPr>
-        <p:txBody>
-          <a:bodyPr wrap="square">
-            <a:spAutoFit/>
-          </a:bodyPr>
-          <a:lstStyle/>
+              <a:t>• O número/prazo está exato?</a:t>
+            </a:r>
+          </a:p>
           <a:p>
             <a:pPr>
               <a:spcAft>
@@ -4329,13 +4600,13 @@
               </a:spcAft>
             </a:pPr>
             <a:r>
-              <a:rPr sz="1500">
+              <a:rPr sz="1400">
                 <a:solidFill>
                   <a:srgbClr val="222222"/>
                 </a:solidFill>
                 <a:latin typeface="Calibri"/>
               </a:rPr>
-              <a:t>• Pagamos a LLM (Vertex AI) em vez de usar gratuita — confiabilidade vale mais</a:t>
+              <a:t>• A resposta cobre o que o gabarito diz?</a:t>
             </a:r>
           </a:p>
           <a:p>
@@ -4345,13 +4616,13 @@
               </a:spcAft>
             </a:pPr>
             <a:r>
-              <a:rPr sz="1500">
+              <a:rPr sz="1400">
                 <a:solidFill>
                   <a:srgbClr val="222222"/>
                 </a:solidFill>
                 <a:latin typeface="Calibri"/>
               </a:rPr>
-              <a:t>• Reranker pago é mais rápido e preciso, mas tem limite de chamadas</a:t>
+              <a:t>• Quando não tem informação, ela recusa?</a:t>
             </a:r>
           </a:p>
           <a:p>
@@ -4361,94 +4632,67 @@
               </a:spcAft>
             </a:pPr>
             <a:r>
-              <a:rPr sz="1500">
+              <a:rPr sz="1400">
                 <a:solidFill>
                   <a:srgbClr val="222222"/>
                 </a:solidFill>
                 <a:latin typeface="Calibri"/>
               </a:rPr>
-              <a:t>• Banco de controle simples (sqlite) — basta pra esse projeto</a:t>
-            </a:r>
-          </a:p>
-        </p:txBody>
-      </p:sp>
-      <p:sp>
-        <p:nvSpPr>
-          <p:cNvPr id="9" name="TextBox 8"/>
-          <p:cNvSpPr txBox="1"/>
-          <p:nvPr/>
-        </p:nvSpPr>
-        <p:spPr>
-          <a:xfrm>
-            <a:off x="548640" y="5029200"/>
-            <a:ext cx="10972800" cy="365760"/>
-          </a:xfrm>
-          <a:prstGeom prst="rect">
-            <a:avLst/>
-          </a:prstGeom>
-          <a:noFill/>
-        </p:spPr>
-        <p:txBody>
-          <a:bodyPr wrap="square" lIns="45720" tIns="18288" rIns="45720" bIns="18288">
-            <a:spAutoFit/>
-          </a:bodyPr>
-          <a:lstStyle/>
-          <a:p>
-            <a:pPr algn="l"/>
-            <a:r>
-              <a:rPr sz="2200" b="1">
-                <a:solidFill>
-                  <a:srgbClr val="1A4480"/>
-                </a:solidFill>
-                <a:latin typeface="Calibri"/>
-              </a:rPr>
-              <a:t>🚀 Próximos passos</a:t>
-            </a:r>
-          </a:p>
-        </p:txBody>
-      </p:sp>
-      <p:sp>
-        <p:nvSpPr>
-          <p:cNvPr id="10" name="TextBox 9"/>
-          <p:cNvSpPr txBox="1"/>
-          <p:nvPr/>
-        </p:nvSpPr>
-        <p:spPr>
-          <a:xfrm>
-            <a:off x="731520" y="5532120"/>
-            <a:ext cx="10972800" cy="1371600"/>
-          </a:xfrm>
-          <a:prstGeom prst="rect">
-            <a:avLst/>
-          </a:prstGeom>
-          <a:noFill/>
-        </p:spPr>
-        <p:txBody>
-          <a:bodyPr wrap="square">
-            <a:spAutoFit/>
-          </a:bodyPr>
-          <a:lstStyle/>
-          <a:p>
-            <a:pPr>
-              <a:spcAft>
-                <a:spcPts val="400"/>
-              </a:spcAft>
-            </a:pPr>
-            <a:r>
-              <a:rPr sz="1400">
-                <a:solidFill>
-                  <a:srgbClr val="222222"/>
-                </a:solidFill>
-                <a:latin typeface="Calibri"/>
-              </a:rPr>
-              <a:t>• Testar variações de tamanho de chunk · LLM reescrevendo a pergunta antes de buscar · cache de buscas frequentes</a:t>
-            </a:r>
-          </a:p>
-        </p:txBody>
-      </p:sp>
-      <p:sp>
-        <p:nvSpPr>
-          <p:cNvPr id="11" name="TextBox 10"/>
+              <a:t>• Quanto tempo levou?</a:t>
+            </a:r>
+          </a:p>
+        </p:txBody>
+      </p:sp>
+      <p:sp>
+        <p:nvSpPr>
+          <p:cNvPr id="13" name="TextBox 12"/>
+          <p:cNvSpPr txBox="1"/>
+          <p:nvPr/>
+        </p:nvSpPr>
+        <p:spPr>
+          <a:xfrm>
+            <a:off x="6400800" y="5852160"/>
+            <a:ext cx="5486400" cy="457200"/>
+          </a:xfrm>
+          <a:prstGeom prst="rect">
+            <a:avLst/>
+          </a:prstGeom>
+          <a:noFill/>
+        </p:spPr>
+        <p:txBody>
+          <a:bodyPr wrap="square" lIns="45720" rIns="45720" tIns="18288" bIns="18288">
+            <a:spAutoFit/>
+          </a:bodyPr>
+          <a:lstStyle/>
+          <a:p>
+            <a:pPr algn="l"/>
+            <a:r>
+              <a:rPr sz="1300" b="0">
+                <a:solidFill>
+                  <a:srgbClr val="555555"/>
+                </a:solidFill>
+                <a:latin typeface="Calibri"/>
+              </a:rPr>
+              <a:t>→ Outra LLM atua como "juiz" comparando</a:t>
+            </a:r>
+          </a:p>
+          <a:p>
+            <a:pPr algn="l"/>
+            <a:r>
+              <a:rPr sz="1300" b="0">
+                <a:solidFill>
+                  <a:srgbClr val="555555"/>
+                </a:solidFill>
+                <a:latin typeface="Calibri"/>
+              </a:rPr>
+              <a:t>    resposta nossa × resposta do gabarito.</a:t>
+            </a:r>
+          </a:p>
+        </p:txBody>
+      </p:sp>
+      <p:sp>
+        <p:nvSpPr>
+          <p:cNvPr id="14" name="TextBox 13"/>
           <p:cNvSpPr txBox="1"/>
           <p:nvPr/>
         </p:nvSpPr>
@@ -4463,7 +4707,7 @@
           <a:noFill/>
         </p:spPr>
         <p:txBody>
-          <a:bodyPr wrap="square" lIns="45720" tIns="18288" rIns="45720" bIns="18288">
+          <a:bodyPr wrap="square" lIns="45720" rIns="45720" tIns="18288" bIns="18288">
             <a:spAutoFit/>
           </a:bodyPr>
           <a:lstStyle/>
@@ -4483,7 +4727,7 @@
       </p:sp>
       <p:sp>
         <p:nvSpPr>
-          <p:cNvPr id="12" name="TextBox 11"/>
+          <p:cNvPr id="15" name="TextBox 14"/>
           <p:cNvSpPr txBox="1"/>
           <p:nvPr/>
         </p:nvSpPr>
@@ -4498,7 +4742,7 @@
           <a:noFill/>
         </p:spPr>
         <p:txBody>
-          <a:bodyPr wrap="square" lIns="45720" tIns="18288" rIns="45720" bIns="18288">
+          <a:bodyPr wrap="square" lIns="45720" rIns="45720" tIns="18288" bIns="18288">
             <a:spAutoFit/>
           </a:bodyPr>
           <a:lstStyle/>
@@ -4525,7 +4769,7 @@
 </file>
 
 <file path=ppt/slides/slide12.xml><?xml version="1.0" encoding="utf-8"?>
-<p:sld xmlns:a="http://schemas.openxmlformats.org/drawingml/2006/main" xmlns:r="http://schemas.openxmlformats.org/officeDocument/2006/relationships" xmlns:p="http://schemas.openxmlformats.org/presentationml/2006/main">
+<p:sld xmlns:a="http://schemas.openxmlformats.org/drawingml/2006/main" xmlns:p="http://schemas.openxmlformats.org/presentationml/2006/main" xmlns:r="http://schemas.openxmlformats.org/officeDocument/2006/relationships">
   <p:cSld>
     <p:spTree>
       <p:nvGrpSpPr>
@@ -4533,14 +4777,7 @@
         <p:cNvGrpSpPr/>
         <p:nvPr/>
       </p:nvGrpSpPr>
-      <p:grpSpPr>
-        <a:xfrm>
-          <a:off x="0" y="0"/>
-          <a:ext cx="0" cy="0"/>
-          <a:chOff x="0" y="0"/>
-          <a:chExt cx="0" cy="0"/>
-        </a:xfrm>
-      </p:grpSpPr>
+      <p:grpSpPr/>
       <p:sp>
         <p:nvSpPr>
           <p:cNvPr id="2" name="Rectangle 1"/>
@@ -4581,7 +4818,6 @@
           <a:lstStyle/>
           <a:p>
             <a:pPr algn="ctr"/>
-            <a:endParaRPr/>
           </a:p>
         </p:txBody>
       </p:sp>
@@ -4602,7 +4838,7 @@
           <a:noFill/>
         </p:spPr>
         <p:txBody>
-          <a:bodyPr wrap="square" lIns="45720" tIns="18288" rIns="45720" bIns="18288">
+          <a:bodyPr wrap="square" lIns="45720" rIns="45720" tIns="18288" bIns="18288">
             <a:spAutoFit/>
           </a:bodyPr>
           <a:lstStyle/>
@@ -4615,7 +4851,7 @@
                 </a:solidFill>
                 <a:latin typeface="Calibri"/>
               </a:rPr>
-              <a:t>Ferramentas Usadas</a:t>
+              <a:t>O Que Funcionou e o Que Foi Trocado</a:t>
             </a:r>
           </a:p>
         </p:txBody>
@@ -4637,7 +4873,494 @@
           <a:noFill/>
         </p:spPr>
         <p:txBody>
-          <a:bodyPr wrap="square" lIns="45720" tIns="18288" rIns="45720" bIns="18288">
+          <a:bodyPr wrap="square" lIns="45720" rIns="45720" tIns="18288" bIns="18288">
+            <a:spAutoFit/>
+          </a:bodyPr>
+          <a:lstStyle/>
+          <a:p>
+            <a:pPr algn="l"/>
+            <a:r>
+              <a:rPr sz="1600" b="0">
+                <a:solidFill>
+                  <a:srgbClr val="555555"/>
+                </a:solidFill>
+                <a:latin typeface="Calibri"/>
+              </a:rPr>
+              <a:t>Decisões importantes em linguagem simples</a:t>
+            </a:r>
+          </a:p>
+        </p:txBody>
+      </p:sp>
+      <p:sp>
+        <p:nvSpPr>
+          <p:cNvPr id="5" name="TextBox 4"/>
+          <p:cNvSpPr txBox="1"/>
+          <p:nvPr/>
+        </p:nvSpPr>
+        <p:spPr>
+          <a:xfrm>
+            <a:off x="548640" y="1280160"/>
+            <a:ext cx="5486400" cy="365760"/>
+          </a:xfrm>
+          <a:prstGeom prst="rect">
+            <a:avLst/>
+          </a:prstGeom>
+          <a:noFill/>
+        </p:spPr>
+        <p:txBody>
+          <a:bodyPr wrap="square" lIns="45720" rIns="45720" tIns="18288" bIns="18288">
+            <a:spAutoFit/>
+          </a:bodyPr>
+          <a:lstStyle/>
+          <a:p>
+            <a:pPr algn="l"/>
+            <a:r>
+              <a:rPr sz="2200" b="1">
+                <a:solidFill>
+                  <a:srgbClr val="228844"/>
+                </a:solidFill>
+                <a:latin typeface="Calibri"/>
+              </a:rPr>
+              <a:t>✓ Acertos</a:t>
+            </a:r>
+          </a:p>
+        </p:txBody>
+      </p:sp>
+      <p:sp>
+        <p:nvSpPr>
+          <p:cNvPr id="6" name="TextBox 5"/>
+          <p:cNvSpPr txBox="1"/>
+          <p:nvPr/>
+        </p:nvSpPr>
+        <p:spPr>
+          <a:xfrm>
+            <a:off x="731520" y="1783080"/>
+            <a:ext cx="5394960" cy="3200400"/>
+          </a:xfrm>
+          <a:prstGeom prst="rect">
+            <a:avLst/>
+          </a:prstGeom>
+          <a:noFill/>
+        </p:spPr>
+        <p:txBody>
+          <a:bodyPr wrap="square">
+            <a:spAutoFit/>
+          </a:bodyPr>
+          <a:lstStyle/>
+          <a:p>
+            <a:pPr>
+              <a:spcAft>
+                <a:spcPts val="400"/>
+              </a:spcAft>
+            </a:pPr>
+            <a:r>
+              <a:rPr sz="1500">
+                <a:solidFill>
+                  <a:srgbClr val="222222"/>
+                </a:solidFill>
+                <a:latin typeface="Calibri"/>
+              </a:rPr>
+              <a:t>• Decisor por página economizou ~93% do custo de OCR</a:t>
+            </a:r>
+          </a:p>
+          <a:p>
+            <a:pPr>
+              <a:spcAft>
+                <a:spcPts val="400"/>
+              </a:spcAft>
+            </a:pPr>
+            <a:r>
+              <a:rPr sz="1500">
+                <a:solidFill>
+                  <a:srgbClr val="222222"/>
+                </a:solidFill>
+                <a:latin typeface="Calibri"/>
+              </a:rPr>
+              <a:t>• Cortar texto pelos artigos da lei melhorou muito as citações</a:t>
+            </a:r>
+          </a:p>
+          <a:p>
+            <a:pPr>
+              <a:spcAft>
+                <a:spcPts val="400"/>
+              </a:spcAft>
+            </a:pPr>
+            <a:r>
+              <a:rPr sz="1500">
+                <a:solidFill>
+                  <a:srgbClr val="222222"/>
+                </a:solidFill>
+                <a:latin typeface="Calibri"/>
+              </a:rPr>
+              <a:t>• Pipeline retoma do ponto onde parou se cair — sem refazer do zero</a:t>
+            </a:r>
+          </a:p>
+        </p:txBody>
+      </p:sp>
+      <p:sp>
+        <p:nvSpPr>
+          <p:cNvPr id="7" name="TextBox 6"/>
+          <p:cNvSpPr txBox="1"/>
+          <p:nvPr/>
+        </p:nvSpPr>
+        <p:spPr>
+          <a:xfrm>
+            <a:off x="6400800" y="1280160"/>
+            <a:ext cx="5486400" cy="365760"/>
+          </a:xfrm>
+          <a:prstGeom prst="rect">
+            <a:avLst/>
+          </a:prstGeom>
+          <a:noFill/>
+        </p:spPr>
+        <p:txBody>
+          <a:bodyPr wrap="square" lIns="45720" rIns="45720" tIns="18288" bIns="18288">
+            <a:spAutoFit/>
+          </a:bodyPr>
+          <a:lstStyle/>
+          <a:p>
+            <a:pPr algn="l"/>
+            <a:r>
+              <a:rPr sz="2200" b="1">
+                <a:solidFill>
+                  <a:srgbClr val="C26B00"/>
+                </a:solidFill>
+                <a:latin typeface="Calibri"/>
+              </a:rPr>
+              <a:t>⚖ Escolhas conscientes</a:t>
+            </a:r>
+          </a:p>
+        </p:txBody>
+      </p:sp>
+      <p:sp>
+        <p:nvSpPr>
+          <p:cNvPr id="8" name="TextBox 7"/>
+          <p:cNvSpPr txBox="1"/>
+          <p:nvPr/>
+        </p:nvSpPr>
+        <p:spPr>
+          <a:xfrm>
+            <a:off x="6583680" y="1783080"/>
+            <a:ext cx="5394960" cy="3200400"/>
+          </a:xfrm>
+          <a:prstGeom prst="rect">
+            <a:avLst/>
+          </a:prstGeom>
+          <a:noFill/>
+        </p:spPr>
+        <p:txBody>
+          <a:bodyPr wrap="square">
+            <a:spAutoFit/>
+          </a:bodyPr>
+          <a:lstStyle/>
+          <a:p>
+            <a:pPr>
+              <a:spcAft>
+                <a:spcPts val="400"/>
+              </a:spcAft>
+            </a:pPr>
+            <a:r>
+              <a:rPr sz="1500">
+                <a:solidFill>
+                  <a:srgbClr val="222222"/>
+                </a:solidFill>
+                <a:latin typeface="Calibri"/>
+              </a:rPr>
+              <a:t>• Pagamos a LLM (Vertex AI) em vez de usar gratuita — confiabilidade vale mais</a:t>
+            </a:r>
+          </a:p>
+          <a:p>
+            <a:pPr>
+              <a:spcAft>
+                <a:spcPts val="400"/>
+              </a:spcAft>
+            </a:pPr>
+            <a:r>
+              <a:rPr sz="1500">
+                <a:solidFill>
+                  <a:srgbClr val="222222"/>
+                </a:solidFill>
+                <a:latin typeface="Calibri"/>
+              </a:rPr>
+              <a:t>• Reranker pago é mais rápido e preciso, mas tem limite de chamadas</a:t>
+            </a:r>
+          </a:p>
+          <a:p>
+            <a:pPr>
+              <a:spcAft>
+                <a:spcPts val="400"/>
+              </a:spcAft>
+            </a:pPr>
+            <a:r>
+              <a:rPr sz="1500">
+                <a:solidFill>
+                  <a:srgbClr val="222222"/>
+                </a:solidFill>
+                <a:latin typeface="Calibri"/>
+              </a:rPr>
+              <a:t>• Banco de controle simples (sqlite) — basta pra esse projeto</a:t>
+            </a:r>
+          </a:p>
+        </p:txBody>
+      </p:sp>
+      <p:sp>
+        <p:nvSpPr>
+          <p:cNvPr id="9" name="TextBox 8"/>
+          <p:cNvSpPr txBox="1"/>
+          <p:nvPr/>
+        </p:nvSpPr>
+        <p:spPr>
+          <a:xfrm>
+            <a:off x="548640" y="5029200"/>
+            <a:ext cx="10972800" cy="365760"/>
+          </a:xfrm>
+          <a:prstGeom prst="rect">
+            <a:avLst/>
+          </a:prstGeom>
+          <a:noFill/>
+        </p:spPr>
+        <p:txBody>
+          <a:bodyPr wrap="square" lIns="45720" rIns="45720" tIns="18288" bIns="18288">
+            <a:spAutoFit/>
+          </a:bodyPr>
+          <a:lstStyle/>
+          <a:p>
+            <a:pPr algn="l"/>
+            <a:r>
+              <a:rPr sz="2200" b="1">
+                <a:solidFill>
+                  <a:srgbClr val="1A4480"/>
+                </a:solidFill>
+                <a:latin typeface="Calibri"/>
+              </a:rPr>
+              <a:t>🚀 Próximos passos</a:t>
+            </a:r>
+          </a:p>
+        </p:txBody>
+      </p:sp>
+      <p:sp>
+        <p:nvSpPr>
+          <p:cNvPr id="10" name="TextBox 9"/>
+          <p:cNvSpPr txBox="1"/>
+          <p:nvPr/>
+        </p:nvSpPr>
+        <p:spPr>
+          <a:xfrm>
+            <a:off x="731520" y="5532120"/>
+            <a:ext cx="10972800" cy="1371600"/>
+          </a:xfrm>
+          <a:prstGeom prst="rect">
+            <a:avLst/>
+          </a:prstGeom>
+          <a:noFill/>
+        </p:spPr>
+        <p:txBody>
+          <a:bodyPr wrap="square">
+            <a:spAutoFit/>
+          </a:bodyPr>
+          <a:lstStyle/>
+          <a:p>
+            <a:pPr>
+              <a:spcAft>
+                <a:spcPts val="400"/>
+              </a:spcAft>
+            </a:pPr>
+            <a:r>
+              <a:rPr sz="1400">
+                <a:solidFill>
+                  <a:srgbClr val="222222"/>
+                </a:solidFill>
+                <a:latin typeface="Calibri"/>
+              </a:rPr>
+              <a:t>• Testar variações de tamanho de chunk · LLM reescrevendo a pergunta antes de buscar · cache de buscas frequentes</a:t>
+            </a:r>
+          </a:p>
+        </p:txBody>
+      </p:sp>
+      <p:sp>
+        <p:nvSpPr>
+          <p:cNvPr id="11" name="TextBox 10"/>
+          <p:cNvSpPr txBox="1"/>
+          <p:nvPr/>
+        </p:nvSpPr>
+        <p:spPr>
+          <a:xfrm>
+            <a:off x="457200" y="6492240"/>
+            <a:ext cx="7315200" cy="274320"/>
+          </a:xfrm>
+          <a:prstGeom prst="rect">
+            <a:avLst/>
+          </a:prstGeom>
+          <a:noFill/>
+        </p:spPr>
+        <p:txBody>
+          <a:bodyPr wrap="square" lIns="45720" rIns="45720" tIns="18288" bIns="18288">
+            <a:spAutoFit/>
+          </a:bodyPr>
+          <a:lstStyle/>
+          <a:p>
+            <a:pPr algn="l"/>
+            <a:r>
+              <a:rPr sz="1000" b="0">
+                <a:solidFill>
+                  <a:srgbClr val="555555"/>
+                </a:solidFill>
+                <a:latin typeface="Calibri"/>
+              </a:rPr>
+              <a:t>RAG ANEEL · Desafio CEIA</a:t>
+            </a:r>
+          </a:p>
+        </p:txBody>
+      </p:sp>
+      <p:sp>
+        <p:nvSpPr>
+          <p:cNvPr id="12" name="TextBox 11"/>
+          <p:cNvSpPr txBox="1"/>
+          <p:nvPr/>
+        </p:nvSpPr>
+        <p:spPr>
+          <a:xfrm>
+            <a:off x="11430000" y="6492240"/>
+            <a:ext cx="548640" cy="274320"/>
+          </a:xfrm>
+          <a:prstGeom prst="rect">
+            <a:avLst/>
+          </a:prstGeom>
+          <a:noFill/>
+        </p:spPr>
+        <p:txBody>
+          <a:bodyPr wrap="square" lIns="45720" rIns="45720" tIns="18288" bIns="18288">
+            <a:spAutoFit/>
+          </a:bodyPr>
+          <a:lstStyle/>
+          <a:p>
+            <a:pPr algn="r"/>
+            <a:r>
+              <a:rPr sz="1000" b="0">
+                <a:solidFill>
+                  <a:srgbClr val="555555"/>
+                </a:solidFill>
+                <a:latin typeface="Calibri"/>
+              </a:rPr>
+              <a:t>12</a:t>
+            </a:r>
+          </a:p>
+        </p:txBody>
+      </p:sp>
+    </p:spTree>
+  </p:cSld>
+  <p:clrMapOvr>
+    <a:masterClrMapping/>
+  </p:clrMapOvr>
+</p:sld>
+</file>
+
+<file path=ppt/slides/slide13.xml><?xml version="1.0" encoding="utf-8"?>
+<p:sld xmlns:a="http://schemas.openxmlformats.org/drawingml/2006/main" xmlns:p="http://schemas.openxmlformats.org/presentationml/2006/main" xmlns:r="http://schemas.openxmlformats.org/officeDocument/2006/relationships">
+  <p:cSld>
+    <p:spTree>
+      <p:nvGrpSpPr>
+        <p:cNvPr id="1" name=""/>
+        <p:cNvGrpSpPr/>
+        <p:nvPr/>
+      </p:nvGrpSpPr>
+      <p:grpSpPr/>
+      <p:sp>
+        <p:nvSpPr>
+          <p:cNvPr id="2" name="Rectangle 1"/>
+          <p:cNvSpPr/>
+          <p:nvPr/>
+        </p:nvSpPr>
+        <p:spPr>
+          <a:xfrm>
+            <a:off x="0" y="0"/>
+            <a:ext cx="12191695" cy="73152"/>
+          </a:xfrm>
+          <a:prstGeom prst="rect">
+            <a:avLst/>
+          </a:prstGeom>
+          <a:solidFill>
+            <a:srgbClr val="1A4480"/>
+          </a:solidFill>
+          <a:ln>
+            <a:noFill/>
+          </a:ln>
+        </p:spPr>
+        <p:style>
+          <a:lnRef idx="1">
+            <a:schemeClr val="accent1"/>
+          </a:lnRef>
+          <a:fillRef idx="3">
+            <a:schemeClr val="accent1"/>
+          </a:fillRef>
+          <a:effectRef idx="2">
+            <a:schemeClr val="accent1"/>
+          </a:effectRef>
+          <a:fontRef idx="minor">
+            <a:schemeClr val="lt1"/>
+          </a:fontRef>
+        </p:style>
+        <p:txBody>
+          <a:bodyPr rtlCol="0" anchor="ctr"/>
+          <a:lstStyle/>
+          <a:p>
+            <a:pPr algn="ctr"/>
+          </a:p>
+        </p:txBody>
+      </p:sp>
+      <p:sp>
+        <p:nvSpPr>
+          <p:cNvPr id="3" name="TextBox 2"/>
+          <p:cNvSpPr txBox="1"/>
+          <p:nvPr/>
+        </p:nvSpPr>
+        <p:spPr>
+          <a:xfrm>
+            <a:off x="457200" y="228600"/>
+            <a:ext cx="11247120" cy="640080"/>
+          </a:xfrm>
+          <a:prstGeom prst="rect">
+            <a:avLst/>
+          </a:prstGeom>
+          <a:noFill/>
+        </p:spPr>
+        <p:txBody>
+          <a:bodyPr wrap="square" lIns="45720" rIns="45720" tIns="18288" bIns="18288">
+            <a:spAutoFit/>
+          </a:bodyPr>
+          <a:lstStyle/>
+          <a:p>
+            <a:pPr algn="l"/>
+            <a:r>
+              <a:rPr sz="3000" b="1">
+                <a:solidFill>
+                  <a:srgbClr val="1A4480"/>
+                </a:solidFill>
+                <a:latin typeface="Calibri"/>
+              </a:rPr>
+              <a:t>Ferramentas Usadas</a:t>
+            </a:r>
+          </a:p>
+        </p:txBody>
+      </p:sp>
+      <p:sp>
+        <p:nvSpPr>
+          <p:cNvPr id="4" name="TextBox 3"/>
+          <p:cNvSpPr txBox="1"/>
+          <p:nvPr/>
+        </p:nvSpPr>
+        <p:spPr>
+          <a:xfrm>
+            <a:off x="457200" y="777240"/>
+            <a:ext cx="11247120" cy="365760"/>
+          </a:xfrm>
+          <a:prstGeom prst="rect">
+            <a:avLst/>
+          </a:prstGeom>
+          <a:noFill/>
+        </p:spPr>
+        <p:txBody>
+          <a:bodyPr wrap="square" lIns="45720" rIns="45720" tIns="18288" bIns="18288">
             <a:spAutoFit/>
           </a:bodyPr>
           <a:lstStyle/>
@@ -4674,32 +5397,14 @@
                 <a:tableStyleId>{5C22544A-7EE6-4342-B048-85BDC9FD1C3A}</a:tableStyleId>
               </a:tblPr>
               <a:tblGrid>
-                <a:gridCol w="2637692">
-                  <a:extLst>
-                    <a:ext uri="{9D8B030D-6E8A-4147-A177-3AD203B41FA5}">
-                      <a16:colId xmlns:a16="http://schemas.microsoft.com/office/drawing/2014/main" val="20000"/>
-                    </a:ext>
-                  </a:extLst>
-                </a:gridCol>
-                <a:gridCol w="3516923">
-                  <a:extLst>
-                    <a:ext uri="{9D8B030D-6E8A-4147-A177-3AD203B41FA5}">
-                      <a16:colId xmlns:a16="http://schemas.microsoft.com/office/drawing/2014/main" val="20001"/>
-                    </a:ext>
-                  </a:extLst>
-                </a:gridCol>
-                <a:gridCol w="5275384">
-                  <a:extLst>
-                    <a:ext uri="{9D8B030D-6E8A-4147-A177-3AD203B41FA5}">
-                      <a16:colId xmlns:a16="http://schemas.microsoft.com/office/drawing/2014/main" val="20002"/>
-                    </a:ext>
-                  </a:extLst>
-                </a:gridCol>
+                <a:gridCol w="2637692"/>
+                <a:gridCol w="3516923"/>
+                <a:gridCol w="5275384"/>
               </a:tblGrid>
               <a:tr h="493776">
                 <a:tc>
                   <a:txBody>
-                    <a:bodyPr/>
+                    <a:bodyPr wrap="square" lIns="73152" rIns="73152"/>
                     <a:lstStyle/>
                     <a:p>
                       <a:r>
@@ -4721,7 +5426,7 @@
                 </a:tc>
                 <a:tc>
                   <a:txBody>
-                    <a:bodyPr/>
+                    <a:bodyPr wrap="square" lIns="73152" rIns="73152"/>
                     <a:lstStyle/>
                     <a:p>
                       <a:r>
@@ -4743,7 +5448,7 @@
                 </a:tc>
                 <a:tc>
                   <a:txBody>
-                    <a:bodyPr/>
+                    <a:bodyPr wrap="square" lIns="73152" rIns="73152"/>
                     <a:lstStyle/>
                     <a:p>
                       <a:r>
@@ -4763,16 +5468,11 @@
                     </a:solidFill>
                   </a:tcPr>
                 </a:tc>
-                <a:extLst>
-                  <a:ext uri="{0D108BD9-81ED-4DB2-BD59-A6C34878D82A}">
-                    <a16:rowId xmlns:a16="http://schemas.microsoft.com/office/drawing/2014/main" val="10000"/>
-                  </a:ext>
-                </a:extLst>
               </a:tr>
               <a:tr h="493776">
                 <a:tc>
                   <a:txBody>
-                    <a:bodyPr/>
+                    <a:bodyPr wrap="square" lIns="73152" rIns="73152"/>
                     <a:lstStyle/>
                     <a:p>
                       <a:r>
@@ -4794,7 +5494,7 @@
                 </a:tc>
                 <a:tc>
                   <a:txBody>
-                    <a:bodyPr/>
+                    <a:bodyPr wrap="square" lIns="73152" rIns="73152"/>
                     <a:lstStyle/>
                     <a:p>
                       <a:r>
@@ -4816,7 +5516,7 @@
                 </a:tc>
                 <a:tc>
                   <a:txBody>
-                    <a:bodyPr/>
+                    <a:bodyPr wrap="square" lIns="73152" rIns="73152"/>
                     <a:lstStyle/>
                     <a:p>
                       <a:r>
@@ -4836,16 +5536,11 @@
                     </a:solidFill>
                   </a:tcPr>
                 </a:tc>
-                <a:extLst>
-                  <a:ext uri="{0D108BD9-81ED-4DB2-BD59-A6C34878D82A}">
-                    <a16:rowId xmlns:a16="http://schemas.microsoft.com/office/drawing/2014/main" val="10001"/>
-                  </a:ext>
-                </a:extLst>
               </a:tr>
               <a:tr h="493776">
                 <a:tc>
                   <a:txBody>
-                    <a:bodyPr/>
+                    <a:bodyPr wrap="square" lIns="73152" rIns="73152"/>
                     <a:lstStyle/>
                     <a:p>
                       <a:r>
@@ -4867,7 +5562,7 @@
                 </a:tc>
                 <a:tc>
                   <a:txBody>
-                    <a:bodyPr/>
+                    <a:bodyPr wrap="square" lIns="73152" rIns="73152"/>
                     <a:lstStyle/>
                     <a:p>
                       <a:r>
@@ -4889,7 +5584,7 @@
                 </a:tc>
                 <a:tc>
                   <a:txBody>
-                    <a:bodyPr/>
+                    <a:bodyPr wrap="square" lIns="73152" rIns="73152"/>
                     <a:lstStyle/>
                     <a:p>
                       <a:r>
@@ -4909,16 +5604,11 @@
                     </a:solidFill>
                   </a:tcPr>
                 </a:tc>
-                <a:extLst>
-                  <a:ext uri="{0D108BD9-81ED-4DB2-BD59-A6C34878D82A}">
-                    <a16:rowId xmlns:a16="http://schemas.microsoft.com/office/drawing/2014/main" val="10002"/>
-                  </a:ext>
-                </a:extLst>
               </a:tr>
               <a:tr h="493776">
                 <a:tc>
                   <a:txBody>
-                    <a:bodyPr/>
+                    <a:bodyPr wrap="square" lIns="73152" rIns="73152"/>
                     <a:lstStyle/>
                     <a:p>
                       <a:r>
@@ -4940,7 +5630,7 @@
                 </a:tc>
                 <a:tc>
                   <a:txBody>
-                    <a:bodyPr/>
+                    <a:bodyPr wrap="square" lIns="73152" rIns="73152"/>
                     <a:lstStyle/>
                     <a:p>
                       <a:r>
@@ -4962,7 +5652,7 @@
                 </a:tc>
                 <a:tc>
                   <a:txBody>
-                    <a:bodyPr/>
+                    <a:bodyPr wrap="square" lIns="73152" rIns="73152"/>
                     <a:lstStyle/>
                     <a:p>
                       <a:r>
@@ -4982,16 +5672,11 @@
                     </a:solidFill>
                   </a:tcPr>
                 </a:tc>
-                <a:extLst>
-                  <a:ext uri="{0D108BD9-81ED-4DB2-BD59-A6C34878D82A}">
-                    <a16:rowId xmlns:a16="http://schemas.microsoft.com/office/drawing/2014/main" val="10003"/>
-                  </a:ext>
-                </a:extLst>
               </a:tr>
               <a:tr h="493776">
                 <a:tc>
                   <a:txBody>
-                    <a:bodyPr/>
+                    <a:bodyPr wrap="square" lIns="73152" rIns="73152"/>
                     <a:lstStyle/>
                     <a:p>
                       <a:r>
@@ -5013,7 +5698,7 @@
                 </a:tc>
                 <a:tc>
                   <a:txBody>
-                    <a:bodyPr/>
+                    <a:bodyPr wrap="square" lIns="73152" rIns="73152"/>
                     <a:lstStyle/>
                     <a:p>
                       <a:r>
@@ -5035,7 +5720,7 @@
                 </a:tc>
                 <a:tc>
                   <a:txBody>
-                    <a:bodyPr/>
+                    <a:bodyPr wrap="square" lIns="73152" rIns="73152"/>
                     <a:lstStyle/>
                     <a:p>
                       <a:r>
@@ -5055,16 +5740,11 @@
                     </a:solidFill>
                   </a:tcPr>
                 </a:tc>
-                <a:extLst>
-                  <a:ext uri="{0D108BD9-81ED-4DB2-BD59-A6C34878D82A}">
-                    <a16:rowId xmlns:a16="http://schemas.microsoft.com/office/drawing/2014/main" val="10004"/>
-                  </a:ext>
-                </a:extLst>
               </a:tr>
               <a:tr h="493776">
                 <a:tc>
                   <a:txBody>
-                    <a:bodyPr/>
+                    <a:bodyPr wrap="square" lIns="73152" rIns="73152"/>
                     <a:lstStyle/>
                     <a:p>
                       <a:r>
@@ -5086,7 +5766,7 @@
                 </a:tc>
                 <a:tc>
                   <a:txBody>
-                    <a:bodyPr/>
+                    <a:bodyPr wrap="square" lIns="73152" rIns="73152"/>
                     <a:lstStyle/>
                     <a:p>
                       <a:r>
@@ -5108,7 +5788,7 @@
                 </a:tc>
                 <a:tc>
                   <a:txBody>
-                    <a:bodyPr/>
+                    <a:bodyPr wrap="square" lIns="73152" rIns="73152"/>
                     <a:lstStyle/>
                     <a:p>
                       <a:r>
@@ -5128,16 +5808,11 @@
                     </a:solidFill>
                   </a:tcPr>
                 </a:tc>
-                <a:extLst>
-                  <a:ext uri="{0D108BD9-81ED-4DB2-BD59-A6C34878D82A}">
-                    <a16:rowId xmlns:a16="http://schemas.microsoft.com/office/drawing/2014/main" val="10005"/>
-                  </a:ext>
-                </a:extLst>
               </a:tr>
               <a:tr h="493776">
                 <a:tc>
                   <a:txBody>
-                    <a:bodyPr/>
+                    <a:bodyPr wrap="square" lIns="73152" rIns="73152"/>
                     <a:lstStyle/>
                     <a:p>
                       <a:r>
@@ -5159,7 +5834,7 @@
                 </a:tc>
                 <a:tc>
                   <a:txBody>
-                    <a:bodyPr/>
+                    <a:bodyPr wrap="square" lIns="73152" rIns="73152"/>
                     <a:lstStyle/>
                     <a:p>
                       <a:r>
@@ -5181,7 +5856,7 @@
                 </a:tc>
                 <a:tc>
                   <a:txBody>
-                    <a:bodyPr/>
+                    <a:bodyPr wrap="square" lIns="73152" rIns="73152"/>
                     <a:lstStyle/>
                     <a:p>
                       <a:r>
@@ -5201,16 +5876,11 @@
                     </a:solidFill>
                   </a:tcPr>
                 </a:tc>
-                <a:extLst>
-                  <a:ext uri="{0D108BD9-81ED-4DB2-BD59-A6C34878D82A}">
-                    <a16:rowId xmlns:a16="http://schemas.microsoft.com/office/drawing/2014/main" val="10006"/>
-                  </a:ext>
-                </a:extLst>
               </a:tr>
               <a:tr h="493776">
                 <a:tc>
                   <a:txBody>
-                    <a:bodyPr/>
+                    <a:bodyPr wrap="square" lIns="73152" rIns="73152"/>
                     <a:lstStyle/>
                     <a:p>
                       <a:r>
@@ -5232,7 +5902,7 @@
                 </a:tc>
                 <a:tc>
                   <a:txBody>
-                    <a:bodyPr/>
+                    <a:bodyPr wrap="square" lIns="73152" rIns="73152"/>
                     <a:lstStyle/>
                     <a:p>
                       <a:r>
@@ -5254,7 +5924,7 @@
                 </a:tc>
                 <a:tc>
                   <a:txBody>
-                    <a:bodyPr/>
+                    <a:bodyPr wrap="square" lIns="73152" rIns="73152"/>
                     <a:lstStyle/>
                     <a:p>
                       <a:r>
@@ -5274,16 +5944,11 @@
                     </a:solidFill>
                   </a:tcPr>
                 </a:tc>
-                <a:extLst>
-                  <a:ext uri="{0D108BD9-81ED-4DB2-BD59-A6C34878D82A}">
-                    <a16:rowId xmlns:a16="http://schemas.microsoft.com/office/drawing/2014/main" val="10007"/>
-                  </a:ext>
-                </a:extLst>
               </a:tr>
               <a:tr h="493776">
                 <a:tc>
                   <a:txBody>
-                    <a:bodyPr/>
+                    <a:bodyPr wrap="square" lIns="73152" rIns="73152"/>
                     <a:lstStyle/>
                     <a:p>
                       <a:r>
@@ -5305,7 +5970,7 @@
                 </a:tc>
                 <a:tc>
                   <a:txBody>
-                    <a:bodyPr/>
+                    <a:bodyPr wrap="square" lIns="73152" rIns="73152"/>
                     <a:lstStyle/>
                     <a:p>
                       <a:r>
@@ -5327,7 +5992,7 @@
                 </a:tc>
                 <a:tc>
                   <a:txBody>
-                    <a:bodyPr/>
+                    <a:bodyPr wrap="square" lIns="73152" rIns="73152"/>
                     <a:lstStyle/>
                     <a:p>
                       <a:r>
@@ -5347,16 +6012,11 @@
                     </a:solidFill>
                   </a:tcPr>
                 </a:tc>
-                <a:extLst>
-                  <a:ext uri="{0D108BD9-81ED-4DB2-BD59-A6C34878D82A}">
-                    <a16:rowId xmlns:a16="http://schemas.microsoft.com/office/drawing/2014/main" val="10008"/>
-                  </a:ext>
-                </a:extLst>
               </a:tr>
               <a:tr h="493776">
                 <a:tc>
                   <a:txBody>
-                    <a:bodyPr/>
+                    <a:bodyPr wrap="square" lIns="73152" rIns="73152"/>
                     <a:lstStyle/>
                     <a:p>
                       <a:r>
@@ -5378,7 +6038,7 @@
                 </a:tc>
                 <a:tc>
                   <a:txBody>
-                    <a:bodyPr/>
+                    <a:bodyPr wrap="square" lIns="73152" rIns="73152"/>
                     <a:lstStyle/>
                     <a:p>
                       <a:r>
@@ -5400,7 +6060,7 @@
                 </a:tc>
                 <a:tc>
                   <a:txBody>
-                    <a:bodyPr/>
+                    <a:bodyPr wrap="square" lIns="73152" rIns="73152"/>
                     <a:lstStyle/>
                     <a:p>
                       <a:r>
@@ -5420,11 +6080,6 @@
                     </a:solidFill>
                   </a:tcPr>
                 </a:tc>
-                <a:extLst>
-                  <a:ext uri="{0D108BD9-81ED-4DB2-BD59-A6C34878D82A}">
-                    <a16:rowId xmlns:a16="http://schemas.microsoft.com/office/drawing/2014/main" val="10009"/>
-                  </a:ext>
-                </a:extLst>
               </a:tr>
             </a:tbl>
           </a:graphicData>
@@ -5447,7 +6102,7 @@
           <a:noFill/>
         </p:spPr>
         <p:txBody>
-          <a:bodyPr wrap="square" lIns="45720" tIns="18288" rIns="45720" bIns="18288">
+          <a:bodyPr wrap="square" lIns="45720" rIns="45720" tIns="18288" bIns="18288">
             <a:spAutoFit/>
           </a:bodyPr>
           <a:lstStyle/>
@@ -5482,7 +6137,7 @@
           <a:noFill/>
         </p:spPr>
         <p:txBody>
-          <a:bodyPr wrap="square" lIns="45720" tIns="18288" rIns="45720" bIns="18288">
+          <a:bodyPr wrap="square" lIns="45720" rIns="45720" tIns="18288" bIns="18288">
             <a:spAutoFit/>
           </a:bodyPr>
           <a:lstStyle/>
@@ -5517,7 +6172,7 @@
           <a:noFill/>
         </p:spPr>
         <p:txBody>
-          <a:bodyPr wrap="square" lIns="45720" tIns="18288" rIns="45720" bIns="18288">
+          <a:bodyPr wrap="square" lIns="45720" rIns="45720" tIns="18288" bIns="18288">
             <a:spAutoFit/>
           </a:bodyPr>
           <a:lstStyle/>
@@ -5530,7 +6185,7 @@
                 </a:solidFill>
                 <a:latin typeface="Calibri"/>
               </a:rPr>
-              <a:t>12</a:t>
+              <a:t>13</a:t>
             </a:r>
           </a:p>
         </p:txBody>
@@ -5544,7 +6199,7 @@
 </file>
 
 <file path=ppt/slides/slide2.xml><?xml version="1.0" encoding="utf-8"?>
-<p:sld xmlns:a="http://schemas.openxmlformats.org/drawingml/2006/main" xmlns:r="http://schemas.openxmlformats.org/officeDocument/2006/relationships" xmlns:p="http://schemas.openxmlformats.org/presentationml/2006/main">
+<p:sld xmlns:a="http://schemas.openxmlformats.org/drawingml/2006/main" xmlns:p="http://schemas.openxmlformats.org/presentationml/2006/main" xmlns:r="http://schemas.openxmlformats.org/officeDocument/2006/relationships">
   <p:cSld>
     <p:spTree>
       <p:nvGrpSpPr>
@@ -5552,14 +6207,7 @@
         <p:cNvGrpSpPr/>
         <p:nvPr/>
       </p:nvGrpSpPr>
-      <p:grpSpPr>
-        <a:xfrm>
-          <a:off x="0" y="0"/>
-          <a:ext cx="0" cy="0"/>
-          <a:chOff x="0" y="0"/>
-          <a:chExt cx="0" cy="0"/>
-        </a:xfrm>
-      </p:grpSpPr>
+      <p:grpSpPr/>
       <p:sp>
         <p:nvSpPr>
           <p:cNvPr id="2" name="Rectangle 1"/>
@@ -5600,7 +6248,6 @@
           <a:lstStyle/>
           <a:p>
             <a:pPr algn="ctr"/>
-            <a:endParaRPr/>
           </a:p>
         </p:txBody>
       </p:sp>
@@ -5621,7 +6268,7 @@
           <a:noFill/>
         </p:spPr>
         <p:txBody>
-          <a:bodyPr wrap="square" lIns="45720" tIns="18288" rIns="45720" bIns="18288">
+          <a:bodyPr wrap="square" lIns="45720" rIns="45720" tIns="18288" bIns="18288">
             <a:spAutoFit/>
           </a:bodyPr>
           <a:lstStyle/>
@@ -5656,7 +6303,7 @@
           <a:noFill/>
         </p:spPr>
         <p:txBody>
-          <a:bodyPr wrap="square" lIns="45720" tIns="18288" rIns="45720" bIns="18288">
+          <a:bodyPr wrap="square" lIns="45720" rIns="45720" tIns="18288" bIns="18288">
             <a:spAutoFit/>
           </a:bodyPr>
           <a:lstStyle/>
@@ -5691,7 +6338,7 @@
           <a:noFill/>
         </p:spPr>
         <p:txBody>
-          <a:bodyPr wrap="square" lIns="45720" tIns="18288" rIns="45720" bIns="18288">
+          <a:bodyPr wrap="square" lIns="45720" rIns="45720" tIns="18288" bIns="18288">
             <a:spAutoFit/>
           </a:bodyPr>
           <a:lstStyle/>
@@ -5822,7 +6469,6 @@
           <a:lstStyle/>
           <a:p>
             <a:pPr algn="ctr"/>
-            <a:endParaRPr/>
           </a:p>
         </p:txBody>
       </p:sp>
@@ -5843,7 +6489,7 @@
           <a:noFill/>
         </p:spPr>
         <p:txBody>
-          <a:bodyPr wrap="square" lIns="45720" tIns="18288" rIns="45720" bIns="18288">
+          <a:bodyPr wrap="square" lIns="45720" rIns="45720" tIns="18288" bIns="18288">
             <a:spAutoFit/>
           </a:bodyPr>
           <a:lstStyle/>
@@ -5878,7 +6524,7 @@
           <a:noFill/>
         </p:spPr>
         <p:txBody>
-          <a:bodyPr wrap="square" lIns="45720" tIns="18288" rIns="45720" bIns="18288">
+          <a:bodyPr wrap="square" lIns="45720" rIns="45720" tIns="18288" bIns="18288">
             <a:spAutoFit/>
           </a:bodyPr>
           <a:lstStyle/>
@@ -5938,7 +6584,6 @@
           <a:lstStyle/>
           <a:p>
             <a:pPr algn="ctr"/>
-            <a:endParaRPr/>
           </a:p>
         </p:txBody>
       </p:sp>
@@ -5959,7 +6604,7 @@
           <a:noFill/>
         </p:spPr>
         <p:txBody>
-          <a:bodyPr wrap="square" lIns="45720" tIns="18288" rIns="45720" bIns="18288">
+          <a:bodyPr wrap="square" lIns="45720" rIns="45720" tIns="18288" bIns="18288">
             <a:spAutoFit/>
           </a:bodyPr>
           <a:lstStyle/>
@@ -5994,7 +6639,7 @@
           <a:noFill/>
         </p:spPr>
         <p:txBody>
-          <a:bodyPr wrap="square" lIns="45720" tIns="18288" rIns="45720" bIns="18288">
+          <a:bodyPr wrap="square" lIns="45720" rIns="45720" tIns="18288" bIns="18288">
             <a:spAutoFit/>
           </a:bodyPr>
           <a:lstStyle/>
@@ -6054,7 +6699,6 @@
           <a:lstStyle/>
           <a:p>
             <a:pPr algn="ctr"/>
-            <a:endParaRPr/>
           </a:p>
         </p:txBody>
       </p:sp>
@@ -6075,7 +6719,7 @@
           <a:noFill/>
         </p:spPr>
         <p:txBody>
-          <a:bodyPr wrap="square" lIns="45720" tIns="18288" rIns="45720" bIns="18288">
+          <a:bodyPr wrap="square" lIns="45720" rIns="45720" tIns="18288" bIns="18288">
             <a:spAutoFit/>
           </a:bodyPr>
           <a:lstStyle/>
@@ -6110,7 +6754,7 @@
           <a:noFill/>
         </p:spPr>
         <p:txBody>
-          <a:bodyPr wrap="square" lIns="45720" tIns="18288" rIns="45720" bIns="18288">
+          <a:bodyPr wrap="square" lIns="45720" rIns="45720" tIns="18288" bIns="18288">
             <a:spAutoFit/>
           </a:bodyPr>
           <a:lstStyle/>
@@ -6145,7 +6789,7 @@
           <a:noFill/>
         </p:spPr>
         <p:txBody>
-          <a:bodyPr wrap="square" lIns="45720" tIns="18288" rIns="45720" bIns="18288">
+          <a:bodyPr wrap="square" lIns="45720" rIns="45720" tIns="18288" bIns="18288">
             <a:spAutoFit/>
           </a:bodyPr>
           <a:lstStyle/>
@@ -6180,7 +6824,7 @@
           <a:noFill/>
         </p:spPr>
         <p:txBody>
-          <a:bodyPr wrap="square" lIns="45720" tIns="18288" rIns="45720" bIns="18288">
+          <a:bodyPr wrap="square" lIns="45720" rIns="45720" tIns="18288" bIns="18288">
             <a:spAutoFit/>
           </a:bodyPr>
           <a:lstStyle/>
@@ -6215,7 +6859,7 @@
           <a:noFill/>
         </p:spPr>
         <p:txBody>
-          <a:bodyPr wrap="square" lIns="45720" tIns="18288" rIns="45720" bIns="18288">
+          <a:bodyPr wrap="square" lIns="45720" rIns="45720" tIns="18288" bIns="18288">
             <a:spAutoFit/>
           </a:bodyPr>
           <a:lstStyle/>
@@ -6242,7 +6886,7 @@
 </file>
 
 <file path=ppt/slides/slide3.xml><?xml version="1.0" encoding="utf-8"?>
-<p:sld xmlns:a="http://schemas.openxmlformats.org/drawingml/2006/main" xmlns:r="http://schemas.openxmlformats.org/officeDocument/2006/relationships" xmlns:p="http://schemas.openxmlformats.org/presentationml/2006/main">
+<p:sld xmlns:a="http://schemas.openxmlformats.org/drawingml/2006/main" xmlns:p="http://schemas.openxmlformats.org/presentationml/2006/main" xmlns:r="http://schemas.openxmlformats.org/officeDocument/2006/relationships">
   <p:cSld>
     <p:spTree>
       <p:nvGrpSpPr>
@@ -6250,14 +6894,7 @@
         <p:cNvGrpSpPr/>
         <p:nvPr/>
       </p:nvGrpSpPr>
-      <p:grpSpPr>
-        <a:xfrm>
-          <a:off x="0" y="0"/>
-          <a:ext cx="0" cy="0"/>
-          <a:chOff x="0" y="0"/>
-          <a:chExt cx="0" cy="0"/>
-        </a:xfrm>
-      </p:grpSpPr>
+      <p:grpSpPr/>
       <p:sp>
         <p:nvSpPr>
           <p:cNvPr id="2" name="Rectangle 1"/>
@@ -6298,7 +6935,6 @@
           <a:lstStyle/>
           <a:p>
             <a:pPr algn="ctr"/>
-            <a:endParaRPr/>
           </a:p>
         </p:txBody>
       </p:sp>
@@ -6319,7 +6955,7 @@
           <a:noFill/>
         </p:spPr>
         <p:txBody>
-          <a:bodyPr wrap="square" lIns="45720" tIns="18288" rIns="45720" bIns="18288">
+          <a:bodyPr wrap="square" lIns="45720" rIns="45720" tIns="18288" bIns="18288">
             <a:spAutoFit/>
           </a:bodyPr>
           <a:lstStyle/>
@@ -6354,7 +6990,7 @@
           <a:noFill/>
         </p:spPr>
         <p:txBody>
-          <a:bodyPr wrap="square" lIns="45720" tIns="18288" rIns="45720" bIns="18288">
+          <a:bodyPr wrap="square" lIns="45720" rIns="45720" tIns="18288" bIns="18288">
             <a:spAutoFit/>
           </a:bodyPr>
           <a:lstStyle/>
@@ -6408,7 +7044,7 @@
           </a:fontRef>
         </p:style>
         <p:txBody>
-          <a:bodyPr lIns="182880" rtlCol="0" anchor="ctr"/>
+          <a:bodyPr rtlCol="0" anchor="ctr" lIns="182880"/>
           <a:lstStyle/>
           <a:p>
             <a:pPr algn="l"/>
@@ -6440,7 +7076,7 @@
           <a:noFill/>
         </p:spPr>
         <p:txBody>
-          <a:bodyPr wrap="square" lIns="45720" tIns="18288" rIns="45720" bIns="18288">
+          <a:bodyPr wrap="square" lIns="45720" rIns="45720" tIns="18288" bIns="18288">
             <a:spAutoFit/>
           </a:bodyPr>
           <a:lstStyle/>
@@ -6494,7 +7130,7 @@
           </a:fontRef>
         </p:style>
         <p:txBody>
-          <a:bodyPr lIns="182880" rtlCol="0" anchor="ctr"/>
+          <a:bodyPr rtlCol="0" anchor="ctr" lIns="182880"/>
           <a:lstStyle/>
           <a:p>
             <a:pPr algn="l"/>
@@ -6526,7 +7162,7 @@
           <a:noFill/>
         </p:spPr>
         <p:txBody>
-          <a:bodyPr wrap="square" lIns="45720" tIns="18288" rIns="45720" bIns="18288">
+          <a:bodyPr wrap="square" lIns="45720" rIns="45720" tIns="18288" bIns="18288">
             <a:spAutoFit/>
           </a:bodyPr>
           <a:lstStyle/>
@@ -6580,7 +7216,7 @@
           </a:fontRef>
         </p:style>
         <p:txBody>
-          <a:bodyPr lIns="182880" rtlCol="0" anchor="ctr"/>
+          <a:bodyPr rtlCol="0" anchor="ctr" lIns="182880"/>
           <a:lstStyle/>
           <a:p>
             <a:pPr algn="l"/>
@@ -6612,7 +7248,7 @@
           <a:noFill/>
         </p:spPr>
         <p:txBody>
-          <a:bodyPr wrap="square" lIns="45720" tIns="18288" rIns="45720" bIns="18288">
+          <a:bodyPr wrap="square" lIns="45720" rIns="45720" tIns="18288" bIns="18288">
             <a:spAutoFit/>
           </a:bodyPr>
           <a:lstStyle/>
@@ -6666,7 +7302,7 @@
           </a:fontRef>
         </p:style>
         <p:txBody>
-          <a:bodyPr lIns="182880" rtlCol="0" anchor="ctr"/>
+          <a:bodyPr rtlCol="0" anchor="ctr" lIns="182880"/>
           <a:lstStyle/>
           <a:p>
             <a:pPr algn="l"/>
@@ -6698,7 +7334,7 @@
           <a:noFill/>
         </p:spPr>
         <p:txBody>
-          <a:bodyPr wrap="square" lIns="45720" tIns="18288" rIns="45720" bIns="18288">
+          <a:bodyPr wrap="square" lIns="45720" rIns="45720" tIns="18288" bIns="18288">
             <a:spAutoFit/>
           </a:bodyPr>
           <a:lstStyle/>
@@ -6752,7 +7388,7 @@
           </a:fontRef>
         </p:style>
         <p:txBody>
-          <a:bodyPr lIns="182880" rtlCol="0" anchor="ctr"/>
+          <a:bodyPr rtlCol="0" anchor="ctr" lIns="182880"/>
           <a:lstStyle/>
           <a:p>
             <a:pPr algn="l"/>
@@ -6784,7 +7420,7 @@
           <a:noFill/>
         </p:spPr>
         <p:txBody>
-          <a:bodyPr wrap="square" lIns="45720" tIns="18288" rIns="45720" bIns="18288">
+          <a:bodyPr wrap="square" lIns="45720" rIns="45720" tIns="18288" bIns="18288">
             <a:spAutoFit/>
           </a:bodyPr>
           <a:lstStyle/>
@@ -6838,7 +7474,7 @@
           </a:fontRef>
         </p:style>
         <p:txBody>
-          <a:bodyPr lIns="182880" rtlCol="0" anchor="ctr"/>
+          <a:bodyPr rtlCol="0" anchor="ctr" lIns="182880"/>
           <a:lstStyle/>
           <a:p>
             <a:pPr algn="l"/>
@@ -6870,7 +7506,7 @@
           <a:noFill/>
         </p:spPr>
         <p:txBody>
-          <a:bodyPr wrap="square" lIns="45720" tIns="18288" rIns="45720" bIns="18288">
+          <a:bodyPr wrap="square" lIns="45720" rIns="45720" tIns="18288" bIns="18288">
             <a:spAutoFit/>
           </a:bodyPr>
           <a:lstStyle/>
@@ -6905,7 +7541,7 @@
           <a:noFill/>
         </p:spPr>
         <p:txBody>
-          <a:bodyPr wrap="square" lIns="45720" tIns="18288" rIns="45720" bIns="18288">
+          <a:bodyPr wrap="square" lIns="45720" rIns="45720" tIns="18288" bIns="18288">
             <a:spAutoFit/>
           </a:bodyPr>
           <a:lstStyle/>
@@ -6940,7 +7576,7 @@
           <a:noFill/>
         </p:spPr>
         <p:txBody>
-          <a:bodyPr wrap="square" lIns="45720" tIns="18288" rIns="45720" bIns="18288">
+          <a:bodyPr wrap="square" lIns="45720" rIns="45720" tIns="18288" bIns="18288">
             <a:spAutoFit/>
           </a:bodyPr>
           <a:lstStyle/>
@@ -6967,7 +7603,7 @@
 </file>
 
 <file path=ppt/slides/slide4.xml><?xml version="1.0" encoding="utf-8"?>
-<p:sld xmlns:a="http://schemas.openxmlformats.org/drawingml/2006/main" xmlns:r="http://schemas.openxmlformats.org/officeDocument/2006/relationships" xmlns:p="http://schemas.openxmlformats.org/presentationml/2006/main">
+<p:sld xmlns:a="http://schemas.openxmlformats.org/drawingml/2006/main" xmlns:p="http://schemas.openxmlformats.org/presentationml/2006/main" xmlns:r="http://schemas.openxmlformats.org/officeDocument/2006/relationships">
   <p:cSld>
     <p:spTree>
       <p:nvGrpSpPr>
@@ -6975,14 +7611,7 @@
         <p:cNvGrpSpPr/>
         <p:nvPr/>
       </p:nvGrpSpPr>
-      <p:grpSpPr>
-        <a:xfrm>
-          <a:off x="0" y="0"/>
-          <a:ext cx="0" cy="0"/>
-          <a:chOff x="0" y="0"/>
-          <a:chExt cx="0" cy="0"/>
-        </a:xfrm>
-      </p:grpSpPr>
+      <p:grpSpPr/>
       <p:sp>
         <p:nvSpPr>
           <p:cNvPr id="2" name="Rectangle 1"/>
@@ -7023,7 +7652,6 @@
           <a:lstStyle/>
           <a:p>
             <a:pPr algn="ctr"/>
-            <a:endParaRPr/>
           </a:p>
         </p:txBody>
       </p:sp>
@@ -7044,7 +7672,7 @@
           <a:noFill/>
         </p:spPr>
         <p:txBody>
-          <a:bodyPr wrap="square" lIns="45720" tIns="18288" rIns="45720" bIns="18288">
+          <a:bodyPr wrap="square" lIns="45720" rIns="45720" tIns="18288" bIns="18288">
             <a:spAutoFit/>
           </a:bodyPr>
           <a:lstStyle/>
@@ -7079,7 +7707,7 @@
           <a:noFill/>
         </p:spPr>
         <p:txBody>
-          <a:bodyPr wrap="square" lIns="45720" tIns="18288" rIns="45720" bIns="18288">
+          <a:bodyPr wrap="square" lIns="45720" rIns="45720" tIns="18288" bIns="18288">
             <a:spAutoFit/>
           </a:bodyPr>
           <a:lstStyle/>
@@ -7114,7 +7742,7 @@
           <a:noFill/>
         </p:spPr>
         <p:txBody>
-          <a:bodyPr wrap="square" lIns="45720" tIns="18288" rIns="45720" bIns="18288">
+          <a:bodyPr wrap="square" lIns="45720" rIns="45720" tIns="18288" bIns="18288">
             <a:spAutoFit/>
           </a:bodyPr>
           <a:lstStyle/>
@@ -7220,7 +7848,7 @@
           <a:noFill/>
         </p:spPr>
         <p:txBody>
-          <a:bodyPr wrap="square" lIns="45720" tIns="18288" rIns="45720" bIns="18288">
+          <a:bodyPr wrap="square" lIns="45720" rIns="45720" tIns="18288" bIns="18288">
             <a:spAutoFit/>
           </a:bodyPr>
           <a:lstStyle/>
@@ -7342,7 +7970,7 @@
           <a:noFill/>
         </p:spPr>
         <p:txBody>
-          <a:bodyPr wrap="square" lIns="45720" tIns="18288" rIns="45720" bIns="18288">
+          <a:bodyPr wrap="square" lIns="45720" rIns="45720" tIns="18288" bIns="18288">
             <a:spAutoFit/>
           </a:bodyPr>
           <a:lstStyle/>
@@ -7402,7 +8030,6 @@
           <a:lstStyle/>
           <a:p>
             <a:pPr algn="ctr"/>
-            <a:endParaRPr/>
           </a:p>
         </p:txBody>
       </p:sp>
@@ -7423,7 +8050,7 @@
           <a:noFill/>
         </p:spPr>
         <p:txBody>
-          <a:bodyPr wrap="square" lIns="45720" tIns="18288" rIns="45720" bIns="18288">
+          <a:bodyPr wrap="square" lIns="45720" rIns="45720" tIns="18288" bIns="18288">
             <a:spAutoFit/>
           </a:bodyPr>
           <a:lstStyle/>
@@ -7458,7 +8085,7 @@
           <a:noFill/>
         </p:spPr>
         <p:txBody>
-          <a:bodyPr wrap="square" lIns="45720" tIns="18288" rIns="45720" bIns="18288">
+          <a:bodyPr wrap="square" lIns="45720" rIns="45720" tIns="18288" bIns="18288">
             <a:spAutoFit/>
           </a:bodyPr>
           <a:lstStyle/>
@@ -7542,7 +8169,6 @@
           <a:lstStyle/>
           <a:p>
             <a:pPr algn="ctr"/>
-            <a:endParaRPr/>
           </a:p>
         </p:txBody>
       </p:sp>
@@ -7563,7 +8189,7 @@
           <a:noFill/>
         </p:spPr>
         <p:txBody>
-          <a:bodyPr wrap="square" lIns="45720" tIns="18288" rIns="45720" bIns="18288">
+          <a:bodyPr wrap="square" lIns="45720" rIns="45720" tIns="18288" bIns="18288">
             <a:spAutoFit/>
           </a:bodyPr>
           <a:lstStyle/>
@@ -7598,7 +8224,7 @@
           <a:noFill/>
         </p:spPr>
         <p:txBody>
-          <a:bodyPr wrap="square" lIns="45720" tIns="18288" rIns="45720" bIns="18288">
+          <a:bodyPr wrap="square" lIns="45720" rIns="45720" tIns="18288" bIns="18288">
             <a:spAutoFit/>
           </a:bodyPr>
           <a:lstStyle/>
@@ -7657,7 +8283,7 @@
           <a:noFill/>
         </p:spPr>
         <p:txBody>
-          <a:bodyPr wrap="square" lIns="45720" tIns="18288" rIns="45720" bIns="18288">
+          <a:bodyPr wrap="square" lIns="45720" rIns="45720" tIns="18288" bIns="18288">
             <a:spAutoFit/>
           </a:bodyPr>
           <a:lstStyle/>
@@ -7692,7 +8318,7 @@
           <a:noFill/>
         </p:spPr>
         <p:txBody>
-          <a:bodyPr wrap="square" lIns="45720" tIns="18288" rIns="45720" bIns="18288">
+          <a:bodyPr wrap="square" lIns="45720" rIns="45720" tIns="18288" bIns="18288">
             <a:spAutoFit/>
           </a:bodyPr>
           <a:lstStyle/>
@@ -7727,7 +8353,7 @@
           <a:noFill/>
         </p:spPr>
         <p:txBody>
-          <a:bodyPr wrap="square" lIns="45720" tIns="18288" rIns="45720" bIns="18288">
+          <a:bodyPr wrap="square" lIns="45720" rIns="45720" tIns="18288" bIns="18288">
             <a:spAutoFit/>
           </a:bodyPr>
           <a:lstStyle/>
@@ -7754,7 +8380,7 @@
 </file>
 
 <file path=ppt/slides/slide5.xml><?xml version="1.0" encoding="utf-8"?>
-<p:sld xmlns:a="http://schemas.openxmlformats.org/drawingml/2006/main" xmlns:r="http://schemas.openxmlformats.org/officeDocument/2006/relationships" xmlns:p="http://schemas.openxmlformats.org/presentationml/2006/main">
+<p:sld xmlns:a="http://schemas.openxmlformats.org/drawingml/2006/main" xmlns:p="http://schemas.openxmlformats.org/presentationml/2006/main" xmlns:r="http://schemas.openxmlformats.org/officeDocument/2006/relationships">
   <p:cSld>
     <p:spTree>
       <p:nvGrpSpPr>
@@ -7762,14 +8388,7 @@
         <p:cNvGrpSpPr/>
         <p:nvPr/>
       </p:nvGrpSpPr>
-      <p:grpSpPr>
-        <a:xfrm>
-          <a:off x="0" y="0"/>
-          <a:ext cx="0" cy="0"/>
-          <a:chOff x="0" y="0"/>
-          <a:chExt cx="0" cy="0"/>
-        </a:xfrm>
-      </p:grpSpPr>
+      <p:grpSpPr/>
       <p:sp>
         <p:nvSpPr>
           <p:cNvPr id="2" name="Rectangle 1"/>
@@ -7810,7 +8429,6 @@
           <a:lstStyle/>
           <a:p>
             <a:pPr algn="ctr"/>
-            <a:endParaRPr/>
           </a:p>
         </p:txBody>
       </p:sp>
@@ -7831,7 +8449,7 @@
           <a:noFill/>
         </p:spPr>
         <p:txBody>
-          <a:bodyPr wrap="square" lIns="45720" tIns="18288" rIns="45720" bIns="18288">
+          <a:bodyPr wrap="square" lIns="45720" rIns="45720" tIns="18288" bIns="18288">
             <a:spAutoFit/>
           </a:bodyPr>
           <a:lstStyle/>
@@ -7866,7 +8484,7 @@
           <a:noFill/>
         </p:spPr>
         <p:txBody>
-          <a:bodyPr wrap="square" lIns="45720" tIns="18288" rIns="45720" bIns="18288">
+          <a:bodyPr wrap="square" lIns="45720" rIns="45720" tIns="18288" bIns="18288">
             <a:spAutoFit/>
           </a:bodyPr>
           <a:lstStyle/>
@@ -7901,7 +8519,7 @@
           <a:noFill/>
         </p:spPr>
         <p:txBody>
-          <a:bodyPr wrap="square" lIns="45720" tIns="18288" rIns="45720" bIns="18288">
+          <a:bodyPr wrap="square" lIns="45720" rIns="45720" tIns="18288" bIns="18288">
             <a:spAutoFit/>
           </a:bodyPr>
           <a:lstStyle/>
@@ -7936,7 +8554,7 @@
           <a:noFill/>
         </p:spPr>
         <p:txBody>
-          <a:bodyPr wrap="square" lIns="45720" tIns="18288" rIns="45720" bIns="18288">
+          <a:bodyPr wrap="square" lIns="45720" rIns="45720" tIns="18288" bIns="18288">
             <a:spAutoFit/>
           </a:bodyPr>
           <a:lstStyle/>
@@ -7992,111 +8610,26 @@
           </a:fontRef>
         </p:style>
         <p:txBody>
-          <a:bodyPr lIns="137160" rtlCol="0" anchor="ctr"/>
+          <a:bodyPr rtlCol="0" anchor="ctr" lIns="137160"/>
           <a:lstStyle/>
           <a:p>
             <a:pPr algn="ctr"/>
             <a:r>
-              <a:rPr sz="1800" dirty="0">
+              <a:rPr sz="1800">
                 <a:solidFill>
                   <a:srgbClr val="222222"/>
                 </a:solidFill>
               </a:rPr>
-              <a:t>Art. 5º A </a:t>
-            </a:r>
-            <a:r>
-              <a:rPr sz="1800" dirty="0" err="1">
-                <a:solidFill>
-                  <a:srgbClr val="222222"/>
-                </a:solidFill>
-              </a:rPr>
-              <a:t>distribuidora</a:t>
-            </a:r>
-            <a:r>
-              <a:rPr sz="1800" dirty="0">
-                <a:solidFill>
-                  <a:srgbClr val="222222"/>
-                </a:solidFill>
-              </a:rPr>
-              <a:t> </a:t>
-            </a:r>
-            <a:r>
-              <a:rPr sz="1800" strike="sngStrike" dirty="0" err="1">
+              <a:t>Art. 5º A distribuidora </a:t>
+            </a:r>
+            <a:r>
+              <a:rPr sz="1800">
                 <a:solidFill>
                   <a:srgbClr val="B02020"/>
                 </a:solidFill>
               </a:rPr>
-              <a:t>deve</a:t>
-            </a:r>
-            <a:r>
-              <a:rPr sz="1800" strike="sngStrike" dirty="0">
-                <a:solidFill>
-                  <a:srgbClr val="B02020"/>
-                </a:solidFill>
-              </a:rPr>
-              <a:t> </a:t>
-            </a:r>
-            <a:r>
-              <a:rPr sz="1800" strike="sngStrike" dirty="0" err="1">
-                <a:solidFill>
-                  <a:srgbClr val="B02020"/>
-                </a:solidFill>
-              </a:rPr>
-              <a:t>apresentar</a:t>
-            </a:r>
-            <a:r>
-              <a:rPr sz="1800" strike="sngStrike" dirty="0">
-                <a:solidFill>
-                  <a:srgbClr val="B02020"/>
-                </a:solidFill>
-              </a:rPr>
-              <a:t> </a:t>
-            </a:r>
-            <a:r>
-              <a:rPr sz="1800" strike="sngStrike" dirty="0" err="1">
-                <a:solidFill>
-                  <a:srgbClr val="B02020"/>
-                </a:solidFill>
-              </a:rPr>
-              <a:t>plano</a:t>
-            </a:r>
-            <a:r>
-              <a:rPr sz="1800" strike="sngStrike" dirty="0">
-                <a:solidFill>
-                  <a:srgbClr val="B02020"/>
-                </a:solidFill>
-              </a:rPr>
-              <a:t> </a:t>
-            </a:r>
-            <a:r>
-              <a:rPr sz="1800" strike="sngStrike" dirty="0" err="1">
-                <a:solidFill>
-                  <a:srgbClr val="B02020"/>
-                </a:solidFill>
-              </a:rPr>
-              <a:t>em</a:t>
-            </a:r>
-            <a:r>
-              <a:rPr sz="1800" strike="sngStrike" dirty="0">
-                <a:solidFill>
-                  <a:srgbClr val="B02020"/>
-                </a:solidFill>
-              </a:rPr>
-              <a:t> 30 </a:t>
-            </a:r>
-            <a:r>
-              <a:rPr sz="1800" strike="sngStrike" dirty="0" err="1">
-                <a:solidFill>
-                  <a:srgbClr val="B02020"/>
-                </a:solidFill>
-              </a:rPr>
-              <a:t>dias</a:t>
-            </a:r>
-            <a:endParaRPr sz="1800" strike="sngStrike" dirty="0">
-              <a:solidFill>
-                <a:srgbClr val="B02020"/>
-              </a:solidFill>
-            </a:endParaRPr>
+              <a:t>deve apresentar plano em 30 dias</a:t>
+            </a:r>
           </a:p>
         </p:txBody>
       </p:sp>
@@ -8117,7 +8650,7 @@
           <a:noFill/>
         </p:spPr>
         <p:txBody>
-          <a:bodyPr wrap="square" lIns="45720" tIns="18288" rIns="45720" bIns="18288">
+          <a:bodyPr wrap="square" lIns="45720" rIns="45720" tIns="18288" bIns="18288">
             <a:spAutoFit/>
           </a:bodyPr>
           <a:lstStyle/>
@@ -8248,7 +8781,6 @@
           <a:lstStyle/>
           <a:p>
             <a:pPr algn="ctr"/>
-            <a:endParaRPr/>
           </a:p>
         </p:txBody>
       </p:sp>
@@ -8269,7 +8801,7 @@
           <a:noFill/>
         </p:spPr>
         <p:txBody>
-          <a:bodyPr wrap="square" lIns="45720" tIns="18288" rIns="45720" bIns="18288">
+          <a:bodyPr wrap="square" lIns="45720" rIns="45720" tIns="18288" bIns="18288">
             <a:spAutoFit/>
           </a:bodyPr>
           <a:lstStyle/>
@@ -8391,7 +8923,7 @@
           <a:noFill/>
         </p:spPr>
         <p:txBody>
-          <a:bodyPr wrap="square" lIns="45720" tIns="18288" rIns="45720" bIns="18288">
+          <a:bodyPr wrap="square" lIns="45720" rIns="45720" tIns="18288" bIns="18288">
             <a:spAutoFit/>
           </a:bodyPr>
           <a:lstStyle/>
@@ -8426,7 +8958,7 @@
           <a:noFill/>
         </p:spPr>
         <p:txBody>
-          <a:bodyPr wrap="square" lIns="45720" tIns="18288" rIns="45720" bIns="18288">
+          <a:bodyPr wrap="square" lIns="45720" rIns="45720" tIns="18288" bIns="18288">
             <a:spAutoFit/>
           </a:bodyPr>
           <a:lstStyle/>
@@ -8461,7 +8993,7 @@
           <a:noFill/>
         </p:spPr>
         <p:txBody>
-          <a:bodyPr wrap="square" lIns="45720" tIns="18288" rIns="45720" bIns="18288">
+          <a:bodyPr wrap="square" lIns="45720" rIns="45720" tIns="18288" bIns="18288">
             <a:spAutoFit/>
           </a:bodyPr>
           <a:lstStyle/>
@@ -8488,7 +9020,7 @@
 </file>
 
 <file path=ppt/slides/slide6.xml><?xml version="1.0" encoding="utf-8"?>
-<p:sld xmlns:a="http://schemas.openxmlformats.org/drawingml/2006/main" xmlns:r="http://schemas.openxmlformats.org/officeDocument/2006/relationships" xmlns:p="http://schemas.openxmlformats.org/presentationml/2006/main">
+<p:sld xmlns:a="http://schemas.openxmlformats.org/drawingml/2006/main" xmlns:p="http://schemas.openxmlformats.org/presentationml/2006/main" xmlns:r="http://schemas.openxmlformats.org/officeDocument/2006/relationships">
   <p:cSld>
     <p:spTree>
       <p:nvGrpSpPr>
@@ -8496,14 +9028,7 @@
         <p:cNvGrpSpPr/>
         <p:nvPr/>
       </p:nvGrpSpPr>
-      <p:grpSpPr>
-        <a:xfrm>
-          <a:off x="0" y="0"/>
-          <a:ext cx="0" cy="0"/>
-          <a:chOff x="0" y="0"/>
-          <a:chExt cx="0" cy="0"/>
-        </a:xfrm>
-      </p:grpSpPr>
+      <p:grpSpPr/>
       <p:sp>
         <p:nvSpPr>
           <p:cNvPr id="2" name="Rectangle 1"/>
@@ -8544,7 +9069,6 @@
           <a:lstStyle/>
           <a:p>
             <a:pPr algn="ctr"/>
-            <a:endParaRPr/>
           </a:p>
         </p:txBody>
       </p:sp>
@@ -8565,7 +9089,7 @@
           <a:noFill/>
         </p:spPr>
         <p:txBody>
-          <a:bodyPr wrap="square" lIns="45720" tIns="18288" rIns="45720" bIns="18288">
+          <a:bodyPr wrap="square" lIns="45720" rIns="45720" tIns="18288" bIns="18288">
             <a:spAutoFit/>
           </a:bodyPr>
           <a:lstStyle/>
@@ -8600,7 +9124,7 @@
           <a:noFill/>
         </p:spPr>
         <p:txBody>
-          <a:bodyPr wrap="square" lIns="45720" tIns="18288" rIns="45720" bIns="18288">
+          <a:bodyPr wrap="square" lIns="45720" rIns="45720" tIns="18288" bIns="18288">
             <a:spAutoFit/>
           </a:bodyPr>
           <a:lstStyle/>
@@ -8635,7 +9159,7 @@
           <a:noFill/>
         </p:spPr>
         <p:txBody>
-          <a:bodyPr wrap="square" lIns="45720" tIns="18288" rIns="45720" bIns="18288">
+          <a:bodyPr wrap="square" lIns="45720" rIns="45720" tIns="18288" bIns="18288">
             <a:spAutoFit/>
           </a:bodyPr>
           <a:lstStyle/>
@@ -8691,7 +9215,7 @@
           </a:fontRef>
         </p:style>
         <p:txBody>
-          <a:bodyPr lIns="137160" rtlCol="0" anchor="ctr"/>
+          <a:bodyPr rtlCol="0" anchor="ctr" lIns="137160"/>
           <a:lstStyle/>
           <a:p>
             <a:pPr algn="ctr"/>
@@ -8754,7 +9278,7 @@
           </a:fontRef>
         </p:style>
         <p:txBody>
-          <a:bodyPr lIns="137160" rtlCol="0" anchor="ctr"/>
+          <a:bodyPr rtlCol="0" anchor="ctr" lIns="137160"/>
           <a:lstStyle/>
           <a:p>
             <a:pPr algn="ctr"/>
@@ -8817,7 +9341,7 @@
           </a:fontRef>
         </p:style>
         <p:txBody>
-          <a:bodyPr lIns="137160" rtlCol="0" anchor="ctr"/>
+          <a:bodyPr rtlCol="0" anchor="ctr" lIns="137160"/>
           <a:lstStyle/>
           <a:p>
             <a:pPr algn="ctr"/>
@@ -8859,7 +9383,7 @@
           <a:noFill/>
         </p:spPr>
         <p:txBody>
-          <a:bodyPr wrap="square" lIns="45720" tIns="18288" rIns="45720" bIns="18288">
+          <a:bodyPr wrap="square" lIns="45720" rIns="45720" tIns="18288" bIns="18288">
             <a:spAutoFit/>
           </a:bodyPr>
           <a:lstStyle/>
@@ -8919,7 +9443,6 @@
           <a:lstStyle/>
           <a:p>
             <a:pPr algn="ctr"/>
-            <a:endParaRPr/>
           </a:p>
         </p:txBody>
       </p:sp>
@@ -8940,7 +9463,7 @@
           <a:noFill/>
         </p:spPr>
         <p:txBody>
-          <a:bodyPr wrap="square" lIns="45720" tIns="18288" rIns="45720" bIns="18288">
+          <a:bodyPr wrap="square" lIns="45720" rIns="45720" tIns="18288" bIns="18288">
             <a:spAutoFit/>
           </a:bodyPr>
           <a:lstStyle/>
@@ -8975,7 +9498,7 @@
           <a:noFill/>
         </p:spPr>
         <p:txBody>
-          <a:bodyPr wrap="square" lIns="45720" tIns="18288" rIns="45720" bIns="18288">
+          <a:bodyPr wrap="square" lIns="45720" rIns="45720" tIns="18288" bIns="18288">
             <a:spAutoFit/>
           </a:bodyPr>
           <a:lstStyle/>
@@ -9033,7 +9556,6 @@
           <a:lstStyle/>
           <a:p>
             <a:pPr algn="ctr"/>
-            <a:endParaRPr/>
           </a:p>
         </p:txBody>
       </p:sp>
@@ -9054,7 +9576,7 @@
           <a:noFill/>
         </p:spPr>
         <p:txBody>
-          <a:bodyPr wrap="square" lIns="45720" tIns="18288" rIns="45720" bIns="18288">
+          <a:bodyPr wrap="square" lIns="45720" rIns="45720" tIns="18288" bIns="18288">
             <a:spAutoFit/>
           </a:bodyPr>
           <a:lstStyle/>
@@ -9124,7 +9646,7 @@
           <a:noFill/>
         </p:spPr>
         <p:txBody>
-          <a:bodyPr wrap="square" lIns="45720" tIns="18288" rIns="45720" bIns="18288">
+          <a:bodyPr wrap="square" lIns="45720" rIns="45720" tIns="18288" bIns="18288">
             <a:spAutoFit/>
           </a:bodyPr>
           <a:lstStyle/>
@@ -9159,7 +9681,7 @@
           <a:noFill/>
         </p:spPr>
         <p:txBody>
-          <a:bodyPr wrap="square" lIns="45720" tIns="18288" rIns="45720" bIns="18288">
+          <a:bodyPr wrap="square" lIns="45720" rIns="45720" tIns="18288" bIns="18288">
             <a:spAutoFit/>
           </a:bodyPr>
           <a:lstStyle/>
@@ -9194,7 +9716,7 @@
           <a:noFill/>
         </p:spPr>
         <p:txBody>
-          <a:bodyPr wrap="square" lIns="45720" tIns="18288" rIns="45720" bIns="18288">
+          <a:bodyPr wrap="square" lIns="45720" rIns="45720" tIns="18288" bIns="18288">
             <a:spAutoFit/>
           </a:bodyPr>
           <a:lstStyle/>
@@ -9229,7 +9751,7 @@
           <a:noFill/>
         </p:spPr>
         <p:txBody>
-          <a:bodyPr wrap="square" lIns="45720" tIns="18288" rIns="45720" bIns="18288">
+          <a:bodyPr wrap="square" lIns="45720" rIns="45720" tIns="18288" bIns="18288">
             <a:spAutoFit/>
           </a:bodyPr>
           <a:lstStyle/>
@@ -9264,7 +9786,7 @@
           <a:noFill/>
         </p:spPr>
         <p:txBody>
-          <a:bodyPr wrap="square" lIns="45720" tIns="18288" rIns="45720" bIns="18288">
+          <a:bodyPr wrap="square" lIns="45720" rIns="45720" tIns="18288" bIns="18288">
             <a:spAutoFit/>
           </a:bodyPr>
           <a:lstStyle/>
@@ -9299,7 +9821,7 @@
           <a:noFill/>
         </p:spPr>
         <p:txBody>
-          <a:bodyPr wrap="square" lIns="45720" tIns="18288" rIns="45720" bIns="18288">
+          <a:bodyPr wrap="square" lIns="45720" rIns="45720" tIns="18288" bIns="18288">
             <a:spAutoFit/>
           </a:bodyPr>
           <a:lstStyle/>
@@ -9334,7 +9856,7 @@
           <a:noFill/>
         </p:spPr>
         <p:txBody>
-          <a:bodyPr wrap="square" lIns="45720" tIns="18288" rIns="45720" bIns="18288">
+          <a:bodyPr wrap="square" lIns="45720" rIns="45720" tIns="18288" bIns="18288">
             <a:spAutoFit/>
           </a:bodyPr>
           <a:lstStyle/>
@@ -9369,7 +9891,7 @@
           <a:noFill/>
         </p:spPr>
         <p:txBody>
-          <a:bodyPr wrap="square" lIns="45720" tIns="18288" rIns="45720" bIns="18288">
+          <a:bodyPr wrap="square" lIns="45720" rIns="45720" tIns="18288" bIns="18288">
             <a:spAutoFit/>
           </a:bodyPr>
           <a:lstStyle/>
@@ -9396,7 +9918,7 @@
 </file>
 
 <file path=ppt/slides/slide7.xml><?xml version="1.0" encoding="utf-8"?>
-<p:sld xmlns:a="http://schemas.openxmlformats.org/drawingml/2006/main" xmlns:r="http://schemas.openxmlformats.org/officeDocument/2006/relationships" xmlns:p="http://schemas.openxmlformats.org/presentationml/2006/main">
+<p:sld xmlns:a="http://schemas.openxmlformats.org/drawingml/2006/main" xmlns:p="http://schemas.openxmlformats.org/presentationml/2006/main" xmlns:r="http://schemas.openxmlformats.org/officeDocument/2006/relationships">
   <p:cSld>
     <p:spTree>
       <p:nvGrpSpPr>
@@ -9404,14 +9926,7 @@
         <p:cNvGrpSpPr/>
         <p:nvPr/>
       </p:nvGrpSpPr>
-      <p:grpSpPr>
-        <a:xfrm>
-          <a:off x="0" y="0"/>
-          <a:ext cx="0" cy="0"/>
-          <a:chOff x="0" y="0"/>
-          <a:chExt cx="0" cy="0"/>
-        </a:xfrm>
-      </p:grpSpPr>
+      <p:grpSpPr/>
       <p:sp>
         <p:nvSpPr>
           <p:cNvPr id="2" name="Rectangle 1"/>
@@ -9452,7 +9967,6 @@
           <a:lstStyle/>
           <a:p>
             <a:pPr algn="ctr"/>
-            <a:endParaRPr/>
           </a:p>
         </p:txBody>
       </p:sp>
@@ -9473,7 +9987,7 @@
           <a:noFill/>
         </p:spPr>
         <p:txBody>
-          <a:bodyPr wrap="square" lIns="45720" tIns="18288" rIns="45720" bIns="18288">
+          <a:bodyPr wrap="square" lIns="45720" rIns="45720" tIns="18288" bIns="18288">
             <a:spAutoFit/>
           </a:bodyPr>
           <a:lstStyle/>
@@ -9508,7 +10022,7 @@
           <a:noFill/>
         </p:spPr>
         <p:txBody>
-          <a:bodyPr wrap="square" lIns="45720" tIns="18288" rIns="45720" bIns="18288">
+          <a:bodyPr wrap="square" lIns="45720" rIns="45720" tIns="18288" bIns="18288">
             <a:spAutoFit/>
           </a:bodyPr>
           <a:lstStyle/>
@@ -9543,7 +10057,7 @@
           <a:noFill/>
         </p:spPr>
         <p:txBody>
-          <a:bodyPr wrap="square" lIns="45720" tIns="18288" rIns="45720" bIns="18288">
+          <a:bodyPr wrap="square" lIns="45720" rIns="45720" tIns="18288" bIns="18288">
             <a:spAutoFit/>
           </a:bodyPr>
           <a:lstStyle/>
@@ -9578,7 +10092,7 @@
           <a:noFill/>
         </p:spPr>
         <p:txBody>
-          <a:bodyPr wrap="square" lIns="45720" tIns="18288" rIns="45720" bIns="18288">
+          <a:bodyPr wrap="square" lIns="45720" rIns="45720" tIns="18288" bIns="18288">
             <a:spAutoFit/>
           </a:bodyPr>
           <a:lstStyle/>
@@ -9608,12 +10122,15 @@
           </a:p>
           <a:p>
             <a:pPr algn="l"/>
-            <a:endParaRPr sz="1500" b="0">
-              <a:solidFill>
-                <a:srgbClr val="222222"/>
-              </a:solidFill>
-              <a:latin typeface="Calibri"/>
-            </a:endParaRPr>
+            <a:r>
+              <a:rPr sz="1500" b="0">
+                <a:solidFill>
+                  <a:srgbClr val="222222"/>
+                </a:solidFill>
+                <a:latin typeface="Calibri"/>
+              </a:rPr>
+              <a:t/>
+            </a:r>
           </a:p>
           <a:p>
             <a:pPr algn="l"/>
@@ -9671,7 +10188,6 @@
           <a:lstStyle/>
           <a:p>
             <a:pPr algn="ctr"/>
-            <a:endParaRPr/>
           </a:p>
         </p:txBody>
       </p:sp>
@@ -9692,7 +10208,7 @@
           <a:noFill/>
         </p:spPr>
         <p:txBody>
-          <a:bodyPr wrap="square" lIns="45720" tIns="18288" rIns="45720" bIns="18288">
+          <a:bodyPr wrap="square" lIns="45720" rIns="45720" tIns="18288" bIns="18288">
             <a:spAutoFit/>
           </a:bodyPr>
           <a:lstStyle/>
@@ -9727,7 +10243,7 @@
           <a:noFill/>
         </p:spPr>
         <p:txBody>
-          <a:bodyPr wrap="square" lIns="45720" tIns="18288" rIns="45720" bIns="18288">
+          <a:bodyPr wrap="square" lIns="45720" rIns="45720" tIns="18288" bIns="18288">
             <a:spAutoFit/>
           </a:bodyPr>
           <a:lstStyle/>
@@ -9799,7 +10315,6 @@
           <a:lstStyle/>
           <a:p>
             <a:pPr algn="ctr"/>
-            <a:endParaRPr/>
           </a:p>
         </p:txBody>
       </p:sp>
@@ -9820,7 +10335,7 @@
           <a:noFill/>
         </p:spPr>
         <p:txBody>
-          <a:bodyPr wrap="square" lIns="45720" tIns="18288" rIns="45720" bIns="18288">
+          <a:bodyPr wrap="square" lIns="45720" rIns="45720" tIns="18288" bIns="18288">
             <a:spAutoFit/>
           </a:bodyPr>
           <a:lstStyle/>
@@ -9855,7 +10370,7 @@
           <a:noFill/>
         </p:spPr>
         <p:txBody>
-          <a:bodyPr wrap="square" lIns="45720" tIns="18288" rIns="45720" bIns="18288">
+          <a:bodyPr wrap="square" lIns="45720" rIns="45720" tIns="18288" bIns="18288">
             <a:spAutoFit/>
           </a:bodyPr>
           <a:lstStyle/>
@@ -9902,7 +10417,7 @@
           <a:noFill/>
         </p:spPr>
         <p:txBody>
-          <a:bodyPr wrap="square" lIns="45720" tIns="18288" rIns="45720" bIns="18288">
+          <a:bodyPr wrap="square" lIns="45720" rIns="45720" tIns="18288" bIns="18288">
             <a:spAutoFit/>
           </a:bodyPr>
           <a:lstStyle/>
@@ -9962,7 +10477,6 @@
           <a:lstStyle/>
           <a:p>
             <a:pPr algn="ctr"/>
-            <a:endParaRPr/>
           </a:p>
         </p:txBody>
       </p:sp>
@@ -9983,7 +10497,7 @@
           <a:noFill/>
         </p:spPr>
         <p:txBody>
-          <a:bodyPr wrap="square" lIns="45720" tIns="18288" rIns="45720" bIns="18288">
+          <a:bodyPr wrap="square" lIns="45720" rIns="45720" tIns="18288" bIns="18288">
             <a:spAutoFit/>
           </a:bodyPr>
           <a:lstStyle/>
@@ -10121,7 +10635,7 @@
           <a:noFill/>
         </p:spPr>
         <p:txBody>
-          <a:bodyPr wrap="square" lIns="45720" tIns="18288" rIns="45720" bIns="18288">
+          <a:bodyPr wrap="square" lIns="45720" rIns="45720" tIns="18288" bIns="18288">
             <a:spAutoFit/>
           </a:bodyPr>
           <a:lstStyle/>
@@ -10180,7 +10694,7 @@
           <a:noFill/>
         </p:spPr>
         <p:txBody>
-          <a:bodyPr wrap="square" lIns="45720" tIns="18288" rIns="45720" bIns="18288">
+          <a:bodyPr wrap="square" lIns="45720" rIns="45720" tIns="18288" bIns="18288">
             <a:spAutoFit/>
           </a:bodyPr>
           <a:lstStyle/>
@@ -10215,7 +10729,7 @@
           <a:noFill/>
         </p:spPr>
         <p:txBody>
-          <a:bodyPr wrap="square" lIns="45720" tIns="18288" rIns="45720" bIns="18288">
+          <a:bodyPr wrap="square" lIns="45720" rIns="45720" tIns="18288" bIns="18288">
             <a:spAutoFit/>
           </a:bodyPr>
           <a:lstStyle/>
@@ -10242,7 +10756,7 @@
 </file>
 
 <file path=ppt/slides/slide8.xml><?xml version="1.0" encoding="utf-8"?>
-<p:sld xmlns:a="http://schemas.openxmlformats.org/drawingml/2006/main" xmlns:r="http://schemas.openxmlformats.org/officeDocument/2006/relationships" xmlns:p="http://schemas.openxmlformats.org/presentationml/2006/main">
+<p:sld xmlns:a="http://schemas.openxmlformats.org/drawingml/2006/main" xmlns:p="http://schemas.openxmlformats.org/presentationml/2006/main" xmlns:r="http://schemas.openxmlformats.org/officeDocument/2006/relationships">
   <p:cSld>
     <p:spTree>
       <p:nvGrpSpPr>
@@ -10250,14 +10764,7 @@
         <p:cNvGrpSpPr/>
         <p:nvPr/>
       </p:nvGrpSpPr>
-      <p:grpSpPr>
-        <a:xfrm>
-          <a:off x="0" y="0"/>
-          <a:ext cx="0" cy="0"/>
-          <a:chOff x="0" y="0"/>
-          <a:chExt cx="0" cy="0"/>
-        </a:xfrm>
-      </p:grpSpPr>
+      <p:grpSpPr/>
       <p:sp>
         <p:nvSpPr>
           <p:cNvPr id="2" name="Rectangle 1"/>
@@ -10298,7 +10805,6 @@
           <a:lstStyle/>
           <a:p>
             <a:pPr algn="ctr"/>
-            <a:endParaRPr/>
           </a:p>
         </p:txBody>
       </p:sp>
@@ -10319,7 +10825,7 @@
           <a:noFill/>
         </p:spPr>
         <p:txBody>
-          <a:bodyPr wrap="square" lIns="45720" tIns="18288" rIns="45720" bIns="18288">
+          <a:bodyPr wrap="square" lIns="45720" rIns="45720" tIns="18288" bIns="18288">
             <a:spAutoFit/>
           </a:bodyPr>
           <a:lstStyle/>
@@ -10332,7 +10838,7 @@
                 </a:solidFill>
                 <a:latin typeface="Calibri"/>
               </a:rPr>
-              <a:t>Transformando Texto em "Coordenadas"</a:t>
+              <a:t>Estratégia em 3 Níveis (Cascata)</a:t>
             </a:r>
           </a:p>
         </p:txBody>
@@ -10354,7 +10860,7 @@
           <a:noFill/>
         </p:spPr>
         <p:txBody>
-          <a:bodyPr wrap="square" lIns="45720" tIns="18288" rIns="45720" bIns="18288">
+          <a:bodyPr wrap="square" lIns="45720" rIns="45720" tIns="18288" bIns="18288">
             <a:spAutoFit/>
           </a:bodyPr>
           <a:lstStyle/>
@@ -10367,7 +10873,7 @@
                 </a:solidFill>
                 <a:latin typeface="Calibri"/>
               </a:rPr>
-              <a:t>Como o computador entende o significado de um trecho</a:t>
+              <a:t>Não é só regex, nem só recursivo — é os dois trabalhando juntos</a:t>
             </a:r>
           </a:p>
         </p:txBody>
@@ -10380,51 +10886,16 @@
         </p:nvSpPr>
         <p:spPr>
           <a:xfrm>
-            <a:off x="548640" y="1280160"/>
-            <a:ext cx="10972800" cy="365760"/>
-          </a:xfrm>
-          <a:prstGeom prst="rect">
-            <a:avLst/>
-          </a:prstGeom>
-          <a:noFill/>
-        </p:spPr>
-        <p:txBody>
-          <a:bodyPr wrap="square" lIns="45720" tIns="18288" rIns="45720" bIns="18288">
-            <a:spAutoFit/>
-          </a:bodyPr>
-          <a:lstStyle/>
-          <a:p>
-            <a:pPr algn="l"/>
-            <a:r>
-              <a:rPr sz="2000" b="1">
-                <a:solidFill>
-                  <a:srgbClr val="1A4480"/>
-                </a:solidFill>
-                <a:latin typeface="Calibri"/>
-              </a:rPr>
-              <a:t>🧬 A ideia: cada trecho vira um "DNA numérico"</a:t>
-            </a:r>
-          </a:p>
-        </p:txBody>
-      </p:sp>
-      <p:sp>
-        <p:nvSpPr>
-          <p:cNvPr id="6" name="TextBox 5"/>
-          <p:cNvSpPr txBox="1"/>
-          <p:nvPr/>
-        </p:nvSpPr>
-        <p:spPr>
-          <a:xfrm>
-            <a:off x="731520" y="1737360"/>
-            <a:ext cx="10972800" cy="1371600"/>
-          </a:xfrm>
-          <a:prstGeom prst="rect">
-            <a:avLst/>
-          </a:prstGeom>
-          <a:noFill/>
-        </p:spPr>
-        <p:txBody>
-          <a:bodyPr wrap="square" lIns="45720" tIns="18288" rIns="45720" bIns="18288">
+            <a:off x="548640" y="1234440"/>
+            <a:ext cx="10972800" cy="457200"/>
+          </a:xfrm>
+          <a:prstGeom prst="rect">
+            <a:avLst/>
+          </a:prstGeom>
+          <a:noFill/>
+        </p:spPr>
+        <p:txBody>
+          <a:bodyPr wrap="square" lIns="45720" rIns="45720" tIns="18288" bIns="18288">
             <a:spAutoFit/>
           </a:bodyPr>
           <a:lstStyle/>
@@ -10437,51 +10908,27 @@
                 </a:solidFill>
                 <a:latin typeface="Calibri"/>
               </a:rPr>
-              <a:t>Um modelo de IA lê o texto e gera uma lista de 1024 números.</a:t>
-            </a:r>
-          </a:p>
-          <a:p>
-            <a:pPr algn="l"/>
-            <a:r>
-              <a:rPr sz="1500" b="0">
-                <a:solidFill>
-                  <a:srgbClr val="222222"/>
-                </a:solidFill>
-                <a:latin typeface="Calibri"/>
-              </a:rPr>
-              <a:t>Trechos com significado parecido geram números parecidos.</a:t>
-            </a:r>
-          </a:p>
-          <a:p>
-            <a:pPr algn="l"/>
-            <a:r>
-              <a:rPr sz="1500" b="0">
-                <a:solidFill>
-                  <a:srgbClr val="222222"/>
-                </a:solidFill>
-                <a:latin typeface="Calibri"/>
-              </a:rPr>
-              <a:t>→ Computador consegue "buscar por significado", não só por palavra-chave.</a:t>
-            </a:r>
-          </a:p>
-        </p:txBody>
-      </p:sp>
-      <p:sp>
-        <p:nvSpPr>
-          <p:cNvPr id="7" name="Rounded Rectangle 6"/>
+              <a:t>Cada nível só entra em ação se o anterior não resolveu sozinho:</a:t>
+            </a:r>
+          </a:p>
+        </p:txBody>
+      </p:sp>
+      <p:sp>
+        <p:nvSpPr>
+          <p:cNvPr id="6" name="Rounded Rectangle 5"/>
           <p:cNvSpPr/>
           <p:nvPr/>
         </p:nvSpPr>
         <p:spPr>
           <a:xfrm>
-            <a:off x="548640" y="3383280"/>
-            <a:ext cx="5486400" cy="2194560"/>
+            <a:off x="457200" y="1828800"/>
+            <a:ext cx="11247120" cy="1280160"/>
           </a:xfrm>
           <a:prstGeom prst="roundRect">
             <a:avLst/>
           </a:prstGeom>
           <a:solidFill>
-            <a:srgbClr val="EEEEF6"/>
+            <a:srgbClr val="E6F0FF"/>
           </a:solidFill>
           <a:ln>
             <a:solidFill>
@@ -10508,134 +10955,28 @@
           <a:lstStyle/>
           <a:p>
             <a:pPr algn="ctr"/>
-            <a:endParaRPr/>
-          </a:p>
-        </p:txBody>
-      </p:sp>
-      <p:sp>
-        <p:nvSpPr>
-          <p:cNvPr id="8" name="TextBox 7"/>
-          <p:cNvSpPr txBox="1"/>
-          <p:nvPr/>
-        </p:nvSpPr>
-        <p:spPr>
-          <a:xfrm>
-            <a:off x="731520" y="3520440"/>
-            <a:ext cx="5120640" cy="457200"/>
-          </a:xfrm>
-          <a:prstGeom prst="rect">
-            <a:avLst/>
-          </a:prstGeom>
-          <a:noFill/>
-        </p:spPr>
-        <p:txBody>
-          <a:bodyPr wrap="square" lIns="45720" tIns="18288" rIns="45720" bIns="18288">
-            <a:spAutoFit/>
-          </a:bodyPr>
-          <a:lstStyle/>
-          <a:p>
-            <a:pPr algn="l"/>
-            <a:r>
-              <a:rPr sz="1700" b="1">
-                <a:solidFill>
-                  <a:srgbClr val="1A4480"/>
-                </a:solidFill>
-                <a:latin typeface="Calibri"/>
-              </a:rPr>
-              <a:t>🎯 Busca por significado</a:t>
-            </a:r>
-          </a:p>
-        </p:txBody>
-      </p:sp>
-      <p:sp>
-        <p:nvSpPr>
-          <p:cNvPr id="9" name="TextBox 8"/>
-          <p:cNvSpPr txBox="1"/>
-          <p:nvPr/>
-        </p:nvSpPr>
-        <p:spPr>
-          <a:xfrm>
-            <a:off x="731520" y="3977639"/>
-            <a:ext cx="5120640" cy="1554480"/>
-          </a:xfrm>
-          <a:prstGeom prst="rect">
-            <a:avLst/>
-          </a:prstGeom>
-          <a:noFill/>
-        </p:spPr>
-        <p:txBody>
-          <a:bodyPr wrap="square" lIns="45720" tIns="18288" rIns="45720" bIns="18288">
-            <a:spAutoFit/>
-          </a:bodyPr>
-          <a:lstStyle/>
-          <a:p>
-            <a:pPr algn="l"/>
-            <a:r>
-              <a:rPr sz="1400" b="0">
-                <a:solidFill>
-                  <a:srgbClr val="222222"/>
-                </a:solidFill>
-                <a:latin typeface="Calibri"/>
-              </a:rPr>
-              <a:t>Pergunta: "prazo de revisão tarifária"</a:t>
-            </a:r>
-          </a:p>
-          <a:p>
-            <a:pPr algn="l"/>
-            <a:r>
-              <a:rPr sz="1400" b="0">
-                <a:solidFill>
-                  <a:srgbClr val="222222"/>
-                </a:solidFill>
-                <a:latin typeface="Calibri"/>
-              </a:rPr>
-              <a:t>Encontra: "período da reanálise das tarifas"</a:t>
-            </a:r>
-          </a:p>
-          <a:p>
-            <a:pPr algn="l"/>
-            <a:endParaRPr sz="1400" b="0">
-              <a:solidFill>
-                <a:srgbClr val="222222"/>
-              </a:solidFill>
-              <a:latin typeface="Calibri"/>
-            </a:endParaRPr>
-          </a:p>
-          <a:p>
-            <a:pPr algn="l"/>
-            <a:r>
-              <a:rPr sz="1400" b="0">
-                <a:solidFill>
-                  <a:srgbClr val="222222"/>
-                </a:solidFill>
-                <a:latin typeface="Calibri"/>
-              </a:rPr>
-              <a:t>Mesmo sem palavras iguais.</a:t>
-            </a:r>
-          </a:p>
-        </p:txBody>
-      </p:sp>
-      <p:sp>
-        <p:nvSpPr>
-          <p:cNvPr id="10" name="Rounded Rectangle 9"/>
+          </a:p>
+        </p:txBody>
+      </p:sp>
+      <p:sp>
+        <p:nvSpPr>
+          <p:cNvPr id="7" name="Oval 6"/>
           <p:cNvSpPr/>
           <p:nvPr/>
         </p:nvSpPr>
         <p:spPr>
           <a:xfrm>
-            <a:off x="6309360" y="3383280"/>
-            <a:ext cx="5486400" cy="2194560"/>
-          </a:xfrm>
-          <a:prstGeom prst="roundRect">
+            <a:off x="594360" y="1965960"/>
+            <a:ext cx="548640" cy="548640"/>
+          </a:xfrm>
+          <a:prstGeom prst="ellipse">
             <a:avLst/>
           </a:prstGeom>
           <a:solidFill>
-            <a:srgbClr val="EEEEF6"/>
+            <a:srgbClr val="1A4480"/>
           </a:solidFill>
           <a:ln>
-            <a:solidFill>
-              <a:srgbClr val="1A4480"/>
-            </a:solidFill>
+            <a:noFill/>
           </a:ln>
         </p:spPr>
         <p:style>
@@ -10653,32 +10994,217 @@
           </a:fontRef>
         </p:style>
         <p:txBody>
+          <a:bodyPr rtlCol="0" anchor="ctr" tIns="18288"/>
+          <a:lstStyle/>
+          <a:p>
+            <a:pPr algn="ctr"/>
+            <a:r>
+              <a:rPr sz="2000" b="1">
+                <a:solidFill>
+                  <a:srgbClr val="FFFFFF"/>
+                </a:solidFill>
+              </a:rPr>
+              <a:t>1</a:t>
+            </a:r>
+          </a:p>
+        </p:txBody>
+      </p:sp>
+      <p:sp>
+        <p:nvSpPr>
+          <p:cNvPr id="8" name="TextBox 7"/>
+          <p:cNvSpPr txBox="1"/>
+          <p:nvPr/>
+        </p:nvSpPr>
+        <p:spPr>
+          <a:xfrm>
+            <a:off x="1280160" y="1920240"/>
+            <a:ext cx="10058400" cy="365760"/>
+          </a:xfrm>
+          <a:prstGeom prst="rect">
+            <a:avLst/>
+          </a:prstGeom>
+          <a:noFill/>
+        </p:spPr>
+        <p:txBody>
+          <a:bodyPr wrap="square" lIns="45720" rIns="45720" tIns="18288" bIns="18288">
+            <a:spAutoFit/>
+          </a:bodyPr>
+          <a:lstStyle/>
+          <a:p>
+            <a:pPr algn="l"/>
+            <a:r>
+              <a:rPr sz="1700" b="1">
+                <a:solidFill>
+                  <a:srgbClr val="1A4480"/>
+                </a:solidFill>
+                <a:latin typeface="Calibri"/>
+              </a:rPr>
+              <a:t>Cortar pela estrutura da lei (regex)</a:t>
+            </a:r>
+          </a:p>
+        </p:txBody>
+      </p:sp>
+      <p:sp>
+        <p:nvSpPr>
+          <p:cNvPr id="9" name="TextBox 8"/>
+          <p:cNvSpPr txBox="1"/>
+          <p:nvPr/>
+        </p:nvSpPr>
+        <p:spPr>
+          <a:xfrm>
+            <a:off x="1280160" y="2331720"/>
+            <a:ext cx="10058400" cy="777240"/>
+          </a:xfrm>
+          <a:prstGeom prst="rect">
+            <a:avLst/>
+          </a:prstGeom>
+          <a:noFill/>
+        </p:spPr>
+        <p:txBody>
+          <a:bodyPr wrap="square" lIns="45720" rIns="45720" tIns="18288" bIns="18288">
+            <a:spAutoFit/>
+          </a:bodyPr>
+          <a:lstStyle/>
+          <a:p>
+            <a:pPr algn="l"/>
+            <a:r>
+              <a:rPr sz="1300" b="0">
+                <a:solidFill>
+                  <a:srgbClr val="222222"/>
+                </a:solidFill>
+                <a:latin typeface="Calibri"/>
+              </a:rPr>
+              <a:t>Procura cabeçalhos: Art. 5º · § 1º · Capítulo II · Seção III · Título IV.</a:t>
+            </a:r>
+          </a:p>
+          <a:p>
+            <a:pPr algn="l"/>
+            <a:r>
+              <a:rPr sz="1300" b="0">
+                <a:solidFill>
+                  <a:srgbClr val="222222"/>
+                </a:solidFill>
+                <a:latin typeface="Calibri"/>
+              </a:rPr>
+              <a:t>Cada um deles começa um novo pedaço. Resultado: 1 artigo = 1 chunk.</a:t>
+            </a:r>
+          </a:p>
+        </p:txBody>
+      </p:sp>
+      <p:sp>
+        <p:nvSpPr>
+          <p:cNvPr id="10" name="Rounded Rectangle 9"/>
+          <p:cNvSpPr/>
+          <p:nvPr/>
+        </p:nvSpPr>
+        <p:spPr>
+          <a:xfrm>
+            <a:off x="457200" y="3246120"/>
+            <a:ext cx="11247120" cy="1417320"/>
+          </a:xfrm>
+          <a:prstGeom prst="roundRect">
+            <a:avLst/>
+          </a:prstGeom>
+          <a:solidFill>
+            <a:srgbClr val="FFF4E0"/>
+          </a:solidFill>
+          <a:ln>
+            <a:solidFill>
+              <a:srgbClr val="C26B00"/>
+            </a:solidFill>
+          </a:ln>
+        </p:spPr>
+        <p:style>
+          <a:lnRef idx="1">
+            <a:schemeClr val="accent1"/>
+          </a:lnRef>
+          <a:fillRef idx="3">
+            <a:schemeClr val="accent1"/>
+          </a:fillRef>
+          <a:effectRef idx="2">
+            <a:schemeClr val="accent1"/>
+          </a:effectRef>
+          <a:fontRef idx="minor">
+            <a:schemeClr val="lt1"/>
+          </a:fontRef>
+        </p:style>
+        <p:txBody>
           <a:bodyPr rtlCol="0" anchor="ctr"/>
           <a:lstStyle/>
           <a:p>
             <a:pPr algn="ctr"/>
-            <a:endParaRPr/>
-          </a:p>
-        </p:txBody>
-      </p:sp>
-      <p:sp>
-        <p:nvSpPr>
-          <p:cNvPr id="11" name="TextBox 10"/>
-          <p:cNvSpPr txBox="1"/>
-          <p:nvPr/>
-        </p:nvSpPr>
-        <p:spPr>
-          <a:xfrm>
-            <a:off x="6492240" y="3520440"/>
-            <a:ext cx="5120640" cy="457200"/>
-          </a:xfrm>
-          <a:prstGeom prst="rect">
-            <a:avLst/>
-          </a:prstGeom>
-          <a:noFill/>
-        </p:spPr>
-        <p:txBody>
-          <a:bodyPr wrap="square" lIns="45720" tIns="18288" rIns="45720" bIns="18288">
+          </a:p>
+        </p:txBody>
+      </p:sp>
+      <p:sp>
+        <p:nvSpPr>
+          <p:cNvPr id="11" name="Oval 10"/>
+          <p:cNvSpPr/>
+          <p:nvPr/>
+        </p:nvSpPr>
+        <p:spPr>
+          <a:xfrm>
+            <a:off x="594360" y="3383280"/>
+            <a:ext cx="548640" cy="548640"/>
+          </a:xfrm>
+          <a:prstGeom prst="ellipse">
+            <a:avLst/>
+          </a:prstGeom>
+          <a:solidFill>
+            <a:srgbClr val="C26B00"/>
+          </a:solidFill>
+          <a:ln>
+            <a:noFill/>
+          </a:ln>
+        </p:spPr>
+        <p:style>
+          <a:lnRef idx="1">
+            <a:schemeClr val="accent1"/>
+          </a:lnRef>
+          <a:fillRef idx="3">
+            <a:schemeClr val="accent1"/>
+          </a:fillRef>
+          <a:effectRef idx="2">
+            <a:schemeClr val="accent1"/>
+          </a:effectRef>
+          <a:fontRef idx="minor">
+            <a:schemeClr val="lt1"/>
+          </a:fontRef>
+        </p:style>
+        <p:txBody>
+          <a:bodyPr rtlCol="0" anchor="ctr" tIns="18288"/>
+          <a:lstStyle/>
+          <a:p>
+            <a:pPr algn="ctr"/>
+            <a:r>
+              <a:rPr sz="2000" b="1">
+                <a:solidFill>
+                  <a:srgbClr val="FFFFFF"/>
+                </a:solidFill>
+              </a:rPr>
+              <a:t>2</a:t>
+            </a:r>
+          </a:p>
+        </p:txBody>
+      </p:sp>
+      <p:sp>
+        <p:nvSpPr>
+          <p:cNvPr id="12" name="TextBox 11"/>
+          <p:cNvSpPr txBox="1"/>
+          <p:nvPr/>
+        </p:nvSpPr>
+        <p:spPr>
+          <a:xfrm>
+            <a:off x="1280160" y="3337560"/>
+            <a:ext cx="10058400" cy="365760"/>
+          </a:xfrm>
+          <a:prstGeom prst="rect">
+            <a:avLst/>
+          </a:prstGeom>
+          <a:noFill/>
+        </p:spPr>
+        <p:txBody>
+          <a:bodyPr wrap="square" lIns="45720" rIns="45720" tIns="18288" bIns="18288">
             <a:spAutoFit/>
           </a:bodyPr>
           <a:lstStyle/>
@@ -10687,156 +11213,290 @@
             <a:r>
               <a:rPr sz="1700" b="1">
                 <a:solidFill>
+                  <a:srgbClr val="C26B00"/>
+                </a:solidFill>
+                <a:latin typeface="Calibri"/>
+              </a:rPr>
+              <a:t>SE o artigo for gigante (&gt;900 tokens) → janela deslizante</a:t>
+            </a:r>
+          </a:p>
+        </p:txBody>
+      </p:sp>
+      <p:sp>
+        <p:nvSpPr>
+          <p:cNvPr id="13" name="TextBox 12"/>
+          <p:cNvSpPr txBox="1"/>
+          <p:nvPr/>
+        </p:nvSpPr>
+        <p:spPr>
+          <a:xfrm>
+            <a:off x="1280160" y="3749039"/>
+            <a:ext cx="10058400" cy="914400"/>
+          </a:xfrm>
+          <a:prstGeom prst="rect">
+            <a:avLst/>
+          </a:prstGeom>
+          <a:noFill/>
+        </p:spPr>
+        <p:txBody>
+          <a:bodyPr wrap="square" lIns="45720" rIns="45720" tIns="18288" bIns="18288">
+            <a:spAutoFit/>
+          </a:bodyPr>
+          <a:lstStyle/>
+          <a:p>
+            <a:pPr algn="l"/>
+            <a:r>
+              <a:rPr sz="1300" b="0">
+                <a:solidFill>
+                  <a:srgbClr val="222222"/>
+                </a:solidFill>
+                <a:latin typeface="Calibri"/>
+              </a:rPr>
+              <a:t>Alguns artigos têm 5+ páginas. Cortamos por parágrafos com sobreposição</a:t>
+            </a:r>
+          </a:p>
+          <a:p>
+            <a:pPr algn="l"/>
+            <a:r>
+              <a:rPr sz="1300" b="0">
+                <a:solidFill>
+                  <a:srgbClr val="222222"/>
+                </a:solidFill>
+                <a:latin typeface="Calibri"/>
+              </a:rPr>
+              <a:t>de 100 tokens entre os pedaços — o final de um aparece no começo do próximo.</a:t>
+            </a:r>
+          </a:p>
+          <a:p>
+            <a:pPr algn="l"/>
+            <a:r>
+              <a:rPr sz="1300" b="0">
+                <a:solidFill>
+                  <a:srgbClr val="222222"/>
+                </a:solidFill>
+                <a:latin typeface="Calibri"/>
+              </a:rPr>
+              <a:t>Assim o contexto não "se perde" entre chunks vizinhos.</a:t>
+            </a:r>
+          </a:p>
+        </p:txBody>
+      </p:sp>
+      <p:sp>
+        <p:nvSpPr>
+          <p:cNvPr id="14" name="Rounded Rectangle 13"/>
+          <p:cNvSpPr/>
+          <p:nvPr/>
+        </p:nvSpPr>
+        <p:spPr>
+          <a:xfrm>
+            <a:off x="457200" y="4800600"/>
+            <a:ext cx="11247120" cy="1280160"/>
+          </a:xfrm>
+          <a:prstGeom prst="roundRect">
+            <a:avLst/>
+          </a:prstGeom>
+          <a:solidFill>
+            <a:srgbClr val="E6F4E6"/>
+          </a:solidFill>
+          <a:ln>
+            <a:solidFill>
+              <a:srgbClr val="228844"/>
+            </a:solidFill>
+          </a:ln>
+        </p:spPr>
+        <p:style>
+          <a:lnRef idx="1">
+            <a:schemeClr val="accent1"/>
+          </a:lnRef>
+          <a:fillRef idx="3">
+            <a:schemeClr val="accent1"/>
+          </a:fillRef>
+          <a:effectRef idx="2">
+            <a:schemeClr val="accent1"/>
+          </a:effectRef>
+          <a:fontRef idx="minor">
+            <a:schemeClr val="lt1"/>
+          </a:fontRef>
+        </p:style>
+        <p:txBody>
+          <a:bodyPr rtlCol="0" anchor="ctr"/>
+          <a:lstStyle/>
+          <a:p>
+            <a:pPr algn="ctr"/>
+          </a:p>
+        </p:txBody>
+      </p:sp>
+      <p:sp>
+        <p:nvSpPr>
+          <p:cNvPr id="15" name="Oval 14"/>
+          <p:cNvSpPr/>
+          <p:nvPr/>
+        </p:nvSpPr>
+        <p:spPr>
+          <a:xfrm>
+            <a:off x="594360" y="4937760"/>
+            <a:ext cx="548640" cy="548640"/>
+          </a:xfrm>
+          <a:prstGeom prst="ellipse">
+            <a:avLst/>
+          </a:prstGeom>
+          <a:solidFill>
+            <a:srgbClr val="228844"/>
+          </a:solidFill>
+          <a:ln>
+            <a:noFill/>
+          </a:ln>
+        </p:spPr>
+        <p:style>
+          <a:lnRef idx="1">
+            <a:schemeClr val="accent1"/>
+          </a:lnRef>
+          <a:fillRef idx="3">
+            <a:schemeClr val="accent1"/>
+          </a:fillRef>
+          <a:effectRef idx="2">
+            <a:schemeClr val="accent1"/>
+          </a:effectRef>
+          <a:fontRef idx="minor">
+            <a:schemeClr val="lt1"/>
+          </a:fontRef>
+        </p:style>
+        <p:txBody>
+          <a:bodyPr rtlCol="0" anchor="ctr" tIns="18288"/>
+          <a:lstStyle/>
+          <a:p>
+            <a:pPr algn="ctr"/>
+            <a:r>
+              <a:rPr sz="2000" b="1">
+                <a:solidFill>
+                  <a:srgbClr val="FFFFFF"/>
+                </a:solidFill>
+              </a:rPr>
+              <a:t>3</a:t>
+            </a:r>
+          </a:p>
+        </p:txBody>
+      </p:sp>
+      <p:sp>
+        <p:nvSpPr>
+          <p:cNvPr id="16" name="TextBox 15"/>
+          <p:cNvSpPr txBox="1"/>
+          <p:nvPr/>
+        </p:nvSpPr>
+        <p:spPr>
+          <a:xfrm>
+            <a:off x="1280160" y="4892040"/>
+            <a:ext cx="10058400" cy="365760"/>
+          </a:xfrm>
+          <a:prstGeom prst="rect">
+            <a:avLst/>
+          </a:prstGeom>
+          <a:noFill/>
+        </p:spPr>
+        <p:txBody>
+          <a:bodyPr wrap="square" lIns="45720" rIns="45720" tIns="18288" bIns="18288">
+            <a:spAutoFit/>
+          </a:bodyPr>
+          <a:lstStyle/>
+          <a:p>
+            <a:pPr algn="l"/>
+            <a:r>
+              <a:rPr sz="1700" b="1">
+                <a:solidFill>
+                  <a:srgbClr val="228844"/>
+                </a:solidFill>
+                <a:latin typeface="Calibri"/>
+              </a:rPr>
+              <a:t>SE sobrar pedaço minúsculo (&lt;60 tokens) → funde no anterior</a:t>
+            </a:r>
+          </a:p>
+        </p:txBody>
+      </p:sp>
+      <p:sp>
+        <p:nvSpPr>
+          <p:cNvPr id="17" name="TextBox 16"/>
+          <p:cNvSpPr txBox="1"/>
+          <p:nvPr/>
+        </p:nvSpPr>
+        <p:spPr>
+          <a:xfrm>
+            <a:off x="1280160" y="5303520"/>
+            <a:ext cx="10058400" cy="777240"/>
+          </a:xfrm>
+          <a:prstGeom prst="rect">
+            <a:avLst/>
+          </a:prstGeom>
+          <a:noFill/>
+        </p:spPr>
+        <p:txBody>
+          <a:bodyPr wrap="square" lIns="45720" rIns="45720" tIns="18288" bIns="18288">
+            <a:spAutoFit/>
+          </a:bodyPr>
+          <a:lstStyle/>
+          <a:p>
+            <a:pPr algn="l"/>
+            <a:r>
+              <a:rPr sz="1300" b="0">
+                <a:solidFill>
+                  <a:srgbClr val="222222"/>
+                </a:solidFill>
+                <a:latin typeface="Calibri"/>
+              </a:rPr>
+              <a:t>Migalha tipo "§ 3º Revogado." não vale chunk próprio — vira ruído na busca.</a:t>
+            </a:r>
+          </a:p>
+          <a:p>
+            <a:pPr algn="l"/>
+            <a:r>
+              <a:rPr sz="1300" b="0">
+                <a:solidFill>
+                  <a:srgbClr val="222222"/>
+                </a:solidFill>
+                <a:latin typeface="Calibri"/>
+              </a:rPr>
+              <a:t>Exceção: se contém tabela, mantém separado (tabelas não podem ser fundidas).</a:t>
+            </a:r>
+          </a:p>
+        </p:txBody>
+      </p:sp>
+      <p:sp>
+        <p:nvSpPr>
+          <p:cNvPr id="18" name="TextBox 17"/>
+          <p:cNvSpPr txBox="1"/>
+          <p:nvPr/>
+        </p:nvSpPr>
+        <p:spPr>
+          <a:xfrm>
+            <a:off x="548640" y="6263640"/>
+            <a:ext cx="10972800" cy="365760"/>
+          </a:xfrm>
+          <a:prstGeom prst="rect">
+            <a:avLst/>
+          </a:prstGeom>
+          <a:noFill/>
+        </p:spPr>
+        <p:txBody>
+          <a:bodyPr wrap="square" lIns="45720" rIns="45720" tIns="18288" bIns="18288">
+            <a:spAutoFit/>
+          </a:bodyPr>
+          <a:lstStyle/>
+          <a:p>
+            <a:pPr algn="l"/>
+            <a:r>
+              <a:rPr sz="1500" b="1">
+                <a:solidFill>
                   <a:srgbClr val="1A4480"/>
                 </a:solidFill>
                 <a:latin typeface="Calibri"/>
               </a:rPr>
-              <a:t>🔤 Busca por palavra-chave</a:t>
-            </a:r>
-          </a:p>
-        </p:txBody>
-      </p:sp>
-      <p:sp>
-        <p:nvSpPr>
-          <p:cNvPr id="12" name="TextBox 11"/>
-          <p:cNvSpPr txBox="1"/>
-          <p:nvPr/>
-        </p:nvSpPr>
-        <p:spPr>
-          <a:xfrm>
-            <a:off x="6492240" y="3977639"/>
-            <a:ext cx="5120640" cy="1554480"/>
-          </a:xfrm>
-          <a:prstGeom prst="rect">
-            <a:avLst/>
-          </a:prstGeom>
-          <a:noFill/>
-        </p:spPr>
-        <p:txBody>
-          <a:bodyPr wrap="square" lIns="45720" tIns="18288" rIns="45720" bIns="18288">
-            <a:spAutoFit/>
-          </a:bodyPr>
-          <a:lstStyle/>
-          <a:p>
-            <a:pPr algn="l"/>
-            <a:r>
-              <a:rPr sz="1400" b="0">
-                <a:solidFill>
-                  <a:srgbClr val="222222"/>
-                </a:solidFill>
-                <a:latin typeface="Calibri"/>
-              </a:rPr>
-              <a:t>Pergunta menciona "REN 1.000"</a:t>
-            </a:r>
-          </a:p>
-          <a:p>
-            <a:pPr algn="l"/>
-            <a:r>
-              <a:rPr sz="1400" b="0">
-                <a:solidFill>
-                  <a:srgbClr val="222222"/>
-                </a:solidFill>
-                <a:latin typeface="Calibri"/>
-              </a:rPr>
-              <a:t>Encontra trechos com exatamente "REN 1.000".</a:t>
-            </a:r>
-          </a:p>
-          <a:p>
-            <a:pPr algn="l"/>
-            <a:endParaRPr sz="1400" b="0">
-              <a:solidFill>
-                <a:srgbClr val="222222"/>
-              </a:solidFill>
-              <a:latin typeface="Calibri"/>
-            </a:endParaRPr>
-          </a:p>
-          <a:p>
-            <a:pPr algn="l"/>
-            <a:r>
-              <a:rPr sz="1400" b="0">
-                <a:solidFill>
-                  <a:srgbClr val="222222"/>
-                </a:solidFill>
-                <a:latin typeface="Calibri"/>
-              </a:rPr>
-              <a:t>Bom pra termos técnicos e nomes próprios.</a:t>
-            </a:r>
-          </a:p>
-        </p:txBody>
-      </p:sp>
-      <p:sp>
-        <p:nvSpPr>
-          <p:cNvPr id="13" name="TextBox 12"/>
-          <p:cNvSpPr txBox="1"/>
-          <p:nvPr/>
-        </p:nvSpPr>
-        <p:spPr>
-          <a:xfrm>
-            <a:off x="548640" y="5760720"/>
-            <a:ext cx="10972800" cy="365760"/>
-          </a:xfrm>
-          <a:prstGeom prst="rect">
-            <a:avLst/>
-          </a:prstGeom>
-          <a:noFill/>
-        </p:spPr>
-        <p:txBody>
-          <a:bodyPr wrap="square" lIns="45720" tIns="18288" rIns="45720" bIns="18288">
-            <a:spAutoFit/>
-          </a:bodyPr>
-          <a:lstStyle/>
-          <a:p>
-            <a:pPr algn="l"/>
-            <a:r>
-              <a:rPr sz="1800" b="1">
-                <a:solidFill>
-                  <a:srgbClr val="1A4480"/>
-                </a:solidFill>
-                <a:latin typeface="Calibri"/>
-              </a:rPr>
-              <a:t>📦 Onde guardamos: Qdrant — banco de dados especializado em vetores</a:t>
-            </a:r>
-          </a:p>
-        </p:txBody>
-      </p:sp>
-      <p:sp>
-        <p:nvSpPr>
-          <p:cNvPr id="14" name="TextBox 13"/>
-          <p:cNvSpPr txBox="1"/>
-          <p:nvPr/>
-        </p:nvSpPr>
-        <p:spPr>
-          <a:xfrm>
-            <a:off x="731520" y="6172200"/>
-            <a:ext cx="10972800" cy="365760"/>
-          </a:xfrm>
-          <a:prstGeom prst="rect">
-            <a:avLst/>
-          </a:prstGeom>
-          <a:noFill/>
-        </p:spPr>
-        <p:txBody>
-          <a:bodyPr wrap="square" lIns="45720" tIns="18288" rIns="45720" bIns="18288">
-            <a:spAutoFit/>
-          </a:bodyPr>
-          <a:lstStyle/>
-          <a:p>
-            <a:pPr algn="l"/>
-            <a:r>
-              <a:rPr sz="1400" b="0">
-                <a:solidFill>
-                  <a:srgbClr val="222222"/>
-                </a:solidFill>
-                <a:latin typeface="Calibri"/>
-              </a:rPr>
-              <a:t>Roda local (Docker), grátis. Permite filtrar por ano, documento, situação.</a:t>
-            </a:r>
-          </a:p>
-        </p:txBody>
-      </p:sp>
-      <p:sp>
-        <p:nvSpPr>
-          <p:cNvPr id="15" name="TextBox 14"/>
+              <a:t>📌 Estrutura primeiro · tamanho depois — respeita como a lei foi escrita</a:t>
+            </a:r>
+          </a:p>
+        </p:txBody>
+      </p:sp>
+      <p:sp>
+        <p:nvSpPr>
+          <p:cNvPr id="19" name="TextBox 18"/>
           <p:cNvSpPr txBox="1"/>
           <p:nvPr/>
         </p:nvSpPr>
@@ -10851,7 +11511,7 @@
           <a:noFill/>
         </p:spPr>
         <p:txBody>
-          <a:bodyPr wrap="square" lIns="45720" tIns="18288" rIns="45720" bIns="18288">
+          <a:bodyPr wrap="square" lIns="45720" rIns="45720" tIns="18288" bIns="18288">
             <a:spAutoFit/>
           </a:bodyPr>
           <a:lstStyle/>
@@ -10871,7 +11531,7 @@
       </p:sp>
       <p:sp>
         <p:nvSpPr>
-          <p:cNvPr id="16" name="TextBox 15"/>
+          <p:cNvPr id="20" name="TextBox 19"/>
           <p:cNvSpPr txBox="1"/>
           <p:nvPr/>
         </p:nvSpPr>
@@ -10886,7 +11546,7 @@
           <a:noFill/>
         </p:spPr>
         <p:txBody>
-          <a:bodyPr wrap="square" lIns="45720" tIns="18288" rIns="45720" bIns="18288">
+          <a:bodyPr wrap="square" lIns="45720" rIns="45720" tIns="18288" bIns="18288">
             <a:spAutoFit/>
           </a:bodyPr>
           <a:lstStyle/>
@@ -10913,7 +11573,7 @@
 </file>
 
 <file path=ppt/slides/slide9.xml><?xml version="1.0" encoding="utf-8"?>
-<p:sld xmlns:a="http://schemas.openxmlformats.org/drawingml/2006/main" xmlns:r="http://schemas.openxmlformats.org/officeDocument/2006/relationships" xmlns:p="http://schemas.openxmlformats.org/presentationml/2006/main">
+<p:sld xmlns:a="http://schemas.openxmlformats.org/drawingml/2006/main" xmlns:p="http://schemas.openxmlformats.org/presentationml/2006/main" xmlns:r="http://schemas.openxmlformats.org/officeDocument/2006/relationships">
   <p:cSld>
     <p:spTree>
       <p:nvGrpSpPr>
@@ -10921,14 +11581,7 @@
         <p:cNvGrpSpPr/>
         <p:nvPr/>
       </p:nvGrpSpPr>
-      <p:grpSpPr>
-        <a:xfrm>
-          <a:off x="0" y="0"/>
-          <a:ext cx="0" cy="0"/>
-          <a:chOff x="0" y="0"/>
-          <a:chExt cx="0" cy="0"/>
-        </a:xfrm>
-      </p:grpSpPr>
+      <p:grpSpPr/>
       <p:sp>
         <p:nvSpPr>
           <p:cNvPr id="2" name="Rectangle 1"/>
@@ -10969,7 +11622,6 @@
           <a:lstStyle/>
           <a:p>
             <a:pPr algn="ctr"/>
-            <a:endParaRPr/>
           </a:p>
         </p:txBody>
       </p:sp>
@@ -10990,7 +11642,7 @@
           <a:noFill/>
         </p:spPr>
         <p:txBody>
-          <a:bodyPr wrap="square" lIns="45720" tIns="18288" rIns="45720" bIns="18288">
+          <a:bodyPr wrap="square" lIns="45720" rIns="45720" tIns="18288" bIns="18288">
             <a:spAutoFit/>
           </a:bodyPr>
           <a:lstStyle/>
@@ -11003,7 +11655,7 @@
                 </a:solidFill>
                 <a:latin typeface="Calibri"/>
               </a:rPr>
-              <a:t>Como Encontrar o Trecho Certo</a:t>
+              <a:t>Transformando Texto em "Coordenadas"</a:t>
             </a:r>
           </a:p>
         </p:txBody>
@@ -11025,7 +11677,7 @@
           <a:noFill/>
         </p:spPr>
         <p:txBody>
-          <a:bodyPr wrap="square" lIns="45720" tIns="18288" rIns="45720" bIns="18288">
+          <a:bodyPr wrap="square" lIns="45720" rIns="45720" tIns="18288" bIns="18288">
             <a:spAutoFit/>
           </a:bodyPr>
           <a:lstStyle/>
@@ -11038,30 +11690,126 @@
                 </a:solidFill>
                 <a:latin typeface="Calibri"/>
               </a:rPr>
-              <a:t>3 "investigadores" trabalham juntos pra achar a melhor resposta</a:t>
-            </a:r>
-          </a:p>
-        </p:txBody>
-      </p:sp>
-      <p:sp>
-        <p:nvSpPr>
-          <p:cNvPr id="5" name="Rounded Rectangle 4"/>
+              <a:t>Como o computador entende o significado de um trecho</a:t>
+            </a:r>
+          </a:p>
+        </p:txBody>
+      </p:sp>
+      <p:sp>
+        <p:nvSpPr>
+          <p:cNvPr id="5" name="TextBox 4"/>
+          <p:cNvSpPr txBox="1"/>
+          <p:nvPr/>
+        </p:nvSpPr>
+        <p:spPr>
+          <a:xfrm>
+            <a:off x="548640" y="1280160"/>
+            <a:ext cx="10972800" cy="365760"/>
+          </a:xfrm>
+          <a:prstGeom prst="rect">
+            <a:avLst/>
+          </a:prstGeom>
+          <a:noFill/>
+        </p:spPr>
+        <p:txBody>
+          <a:bodyPr wrap="square" lIns="45720" rIns="45720" tIns="18288" bIns="18288">
+            <a:spAutoFit/>
+          </a:bodyPr>
+          <a:lstStyle/>
+          <a:p>
+            <a:pPr algn="l"/>
+            <a:r>
+              <a:rPr sz="2000" b="1">
+                <a:solidFill>
+                  <a:srgbClr val="1A4480"/>
+                </a:solidFill>
+                <a:latin typeface="Calibri"/>
+              </a:rPr>
+              <a:t>🧬 A ideia: cada trecho vira um "DNA numérico"</a:t>
+            </a:r>
+          </a:p>
+        </p:txBody>
+      </p:sp>
+      <p:sp>
+        <p:nvSpPr>
+          <p:cNvPr id="6" name="TextBox 5"/>
+          <p:cNvSpPr txBox="1"/>
+          <p:nvPr/>
+        </p:nvSpPr>
+        <p:spPr>
+          <a:xfrm>
+            <a:off x="731520" y="1737360"/>
+            <a:ext cx="10972800" cy="1371600"/>
+          </a:xfrm>
+          <a:prstGeom prst="rect">
+            <a:avLst/>
+          </a:prstGeom>
+          <a:noFill/>
+        </p:spPr>
+        <p:txBody>
+          <a:bodyPr wrap="square" lIns="45720" rIns="45720" tIns="18288" bIns="18288">
+            <a:spAutoFit/>
+          </a:bodyPr>
+          <a:lstStyle/>
+          <a:p>
+            <a:pPr algn="l"/>
+            <a:r>
+              <a:rPr sz="1500" b="0">
+                <a:solidFill>
+                  <a:srgbClr val="222222"/>
+                </a:solidFill>
+                <a:latin typeface="Calibri"/>
+              </a:rPr>
+              <a:t>Um modelo de IA lê o texto e gera uma lista de 1024 números.</a:t>
+            </a:r>
+          </a:p>
+          <a:p>
+            <a:pPr algn="l"/>
+            <a:r>
+              <a:rPr sz="1500" b="0">
+                <a:solidFill>
+                  <a:srgbClr val="222222"/>
+                </a:solidFill>
+                <a:latin typeface="Calibri"/>
+              </a:rPr>
+              <a:t>Trechos com significado parecido geram números parecidos.</a:t>
+            </a:r>
+          </a:p>
+          <a:p>
+            <a:pPr algn="l"/>
+            <a:r>
+              <a:rPr sz="1500" b="0">
+                <a:solidFill>
+                  <a:srgbClr val="222222"/>
+                </a:solidFill>
+                <a:latin typeface="Calibri"/>
+              </a:rPr>
+              <a:t>→ Computador consegue "buscar por significado", não só por palavra-chave.</a:t>
+            </a:r>
+          </a:p>
+        </p:txBody>
+      </p:sp>
+      <p:sp>
+        <p:nvSpPr>
+          <p:cNvPr id="7" name="Rounded Rectangle 6"/>
           <p:cNvSpPr/>
           <p:nvPr/>
         </p:nvSpPr>
         <p:spPr>
           <a:xfrm>
-            <a:off x="457200" y="2560320"/>
-            <a:ext cx="1828800" cy="640080"/>
+            <a:off x="548640" y="3383280"/>
+            <a:ext cx="5486400" cy="2194560"/>
           </a:xfrm>
           <a:prstGeom prst="roundRect">
             <a:avLst/>
           </a:prstGeom>
           <a:solidFill>
-            <a:srgbClr val="222222"/>
+            <a:srgbClr val="EEEEF6"/>
           </a:solidFill>
           <a:ln>
-            <a:noFill/>
+            <a:solidFill>
+              <a:srgbClr val="1A4480"/>
+            </a:solidFill>
           </a:ln>
         </p:spPr>
         <p:style>
@@ -11079,40 +11827,140 @@
           </a:fontRef>
         </p:style>
         <p:txBody>
-          <a:bodyPr lIns="45720" rtlCol="0" anchor="ctr"/>
+          <a:bodyPr rtlCol="0" anchor="ctr"/>
           <a:lstStyle/>
           <a:p>
             <a:pPr algn="ctr"/>
-            <a:r>
-              <a:rPr sz="1300" b="1">
-                <a:solidFill>
-                  <a:srgbClr val="FFFFFF"/>
-                </a:solidFill>
-              </a:rPr>
-              <a:t>Pergunta</a:t>
-            </a:r>
-          </a:p>
-        </p:txBody>
-      </p:sp>
-      <p:sp>
-        <p:nvSpPr>
-          <p:cNvPr id="6" name="Rounded Rectangle 5"/>
+          </a:p>
+        </p:txBody>
+      </p:sp>
+      <p:sp>
+        <p:nvSpPr>
+          <p:cNvPr id="8" name="TextBox 7"/>
+          <p:cNvSpPr txBox="1"/>
+          <p:nvPr/>
+        </p:nvSpPr>
+        <p:spPr>
+          <a:xfrm>
+            <a:off x="731520" y="3520440"/>
+            <a:ext cx="5120640" cy="457200"/>
+          </a:xfrm>
+          <a:prstGeom prst="rect">
+            <a:avLst/>
+          </a:prstGeom>
+          <a:noFill/>
+        </p:spPr>
+        <p:txBody>
+          <a:bodyPr wrap="square" lIns="45720" rIns="45720" tIns="18288" bIns="18288">
+            <a:spAutoFit/>
+          </a:bodyPr>
+          <a:lstStyle/>
+          <a:p>
+            <a:pPr algn="l"/>
+            <a:r>
+              <a:rPr sz="1700" b="1">
+                <a:solidFill>
+                  <a:srgbClr val="1A4480"/>
+                </a:solidFill>
+                <a:latin typeface="Calibri"/>
+              </a:rPr>
+              <a:t>🎯 Busca por significado</a:t>
+            </a:r>
+          </a:p>
+        </p:txBody>
+      </p:sp>
+      <p:sp>
+        <p:nvSpPr>
+          <p:cNvPr id="9" name="TextBox 8"/>
+          <p:cNvSpPr txBox="1"/>
+          <p:nvPr/>
+        </p:nvSpPr>
+        <p:spPr>
+          <a:xfrm>
+            <a:off x="731520" y="3977639"/>
+            <a:ext cx="5120640" cy="1554480"/>
+          </a:xfrm>
+          <a:prstGeom prst="rect">
+            <a:avLst/>
+          </a:prstGeom>
+          <a:noFill/>
+        </p:spPr>
+        <p:txBody>
+          <a:bodyPr wrap="square" lIns="45720" rIns="45720" tIns="18288" bIns="18288">
+            <a:spAutoFit/>
+          </a:bodyPr>
+          <a:lstStyle/>
+          <a:p>
+            <a:pPr algn="l"/>
+            <a:r>
+              <a:rPr sz="1400" b="0">
+                <a:solidFill>
+                  <a:srgbClr val="222222"/>
+                </a:solidFill>
+                <a:latin typeface="Calibri"/>
+              </a:rPr>
+              <a:t>Pergunta: "prazo de revisão tarifária"</a:t>
+            </a:r>
+          </a:p>
+          <a:p>
+            <a:pPr algn="l"/>
+            <a:r>
+              <a:rPr sz="1400" b="0">
+                <a:solidFill>
+                  <a:srgbClr val="222222"/>
+                </a:solidFill>
+                <a:latin typeface="Calibri"/>
+              </a:rPr>
+              <a:t>Encontra: "período da reanálise das tarifas"</a:t>
+            </a:r>
+          </a:p>
+          <a:p>
+            <a:pPr algn="l"/>
+            <a:r>
+              <a:rPr sz="1400" b="0">
+                <a:solidFill>
+                  <a:srgbClr val="222222"/>
+                </a:solidFill>
+                <a:latin typeface="Calibri"/>
+              </a:rPr>
+              <a:t/>
+            </a:r>
+          </a:p>
+          <a:p>
+            <a:pPr algn="l"/>
+            <a:r>
+              <a:rPr sz="1400" b="0">
+                <a:solidFill>
+                  <a:srgbClr val="222222"/>
+                </a:solidFill>
+                <a:latin typeface="Calibri"/>
+              </a:rPr>
+              <a:t>Mesmo sem palavras iguais.</a:t>
+            </a:r>
+          </a:p>
+        </p:txBody>
+      </p:sp>
+      <p:sp>
+        <p:nvSpPr>
+          <p:cNvPr id="10" name="Rounded Rectangle 9"/>
           <p:cNvSpPr/>
           <p:nvPr/>
         </p:nvSpPr>
         <p:spPr>
           <a:xfrm>
-            <a:off x="2834640" y="1463040"/>
-            <a:ext cx="2743200" cy="777240"/>
+            <a:off x="6309360" y="3383280"/>
+            <a:ext cx="5486400" cy="2194560"/>
           </a:xfrm>
           <a:prstGeom prst="roundRect">
             <a:avLst/>
           </a:prstGeom>
           <a:solidFill>
-            <a:srgbClr val="1A4480"/>
+            <a:srgbClr val="EEEEF6"/>
           </a:solidFill>
           <a:ln>
-            <a:noFill/>
+            <a:solidFill>
+              <a:srgbClr val="1A4480"/>
+            </a:solidFill>
           </a:ln>
         </p:spPr>
         <p:style>
@@ -11130,327 +11978,44 @@
           </a:fontRef>
         </p:style>
         <p:txBody>
-          <a:bodyPr lIns="45720" rtlCol="0" anchor="ctr"/>
+          <a:bodyPr rtlCol="0" anchor="ctr"/>
           <a:lstStyle/>
           <a:p>
             <a:pPr algn="ctr"/>
-            <a:r>
-              <a:rPr sz="1300" b="1">
-                <a:solidFill>
-                  <a:srgbClr val="FFFFFF"/>
-                </a:solidFill>
-              </a:rPr>
-              <a:t>🎯 Investigador 1</a:t>
-            </a:r>
-          </a:p>
-          <a:p>
-            <a:pPr algn="ctr"/>
-            <a:r>
-              <a:rPr sz="1000">
-                <a:solidFill>
-                  <a:srgbClr val="FFFFFF"/>
-                </a:solidFill>
-              </a:rPr>
-              <a:t>busca por significado</a:t>
-            </a:r>
-          </a:p>
-        </p:txBody>
-      </p:sp>
-      <p:sp>
-        <p:nvSpPr>
-          <p:cNvPr id="7" name="Rounded Rectangle 6"/>
-          <p:cNvSpPr/>
-          <p:nvPr/>
-        </p:nvSpPr>
-        <p:spPr>
-          <a:xfrm>
-            <a:off x="2834640" y="2514600"/>
-            <a:ext cx="2743200" cy="777240"/>
-          </a:xfrm>
-          <a:prstGeom prst="roundRect">
-            <a:avLst/>
-          </a:prstGeom>
-          <a:solidFill>
-            <a:srgbClr val="1A4480"/>
-          </a:solidFill>
-          <a:ln>
-            <a:noFill/>
-          </a:ln>
-        </p:spPr>
-        <p:style>
-          <a:lnRef idx="1">
-            <a:schemeClr val="accent1"/>
-          </a:lnRef>
-          <a:fillRef idx="3">
-            <a:schemeClr val="accent1"/>
-          </a:fillRef>
-          <a:effectRef idx="2">
-            <a:schemeClr val="accent1"/>
-          </a:effectRef>
-          <a:fontRef idx="minor">
-            <a:schemeClr val="lt1"/>
-          </a:fontRef>
-        </p:style>
-        <p:txBody>
-          <a:bodyPr lIns="45720" rtlCol="0" anchor="ctr"/>
-          <a:lstStyle/>
-          <a:p>
-            <a:pPr algn="ctr"/>
-            <a:r>
-              <a:rPr sz="1300" b="1">
-                <a:solidFill>
-                  <a:srgbClr val="FFFFFF"/>
-                </a:solidFill>
-              </a:rPr>
-              <a:t>🔤 Investigador 2</a:t>
-            </a:r>
-          </a:p>
-          <a:p>
-            <a:pPr algn="ctr"/>
-            <a:r>
-              <a:rPr sz="1000">
-                <a:solidFill>
-                  <a:srgbClr val="FFFFFF"/>
-                </a:solidFill>
-              </a:rPr>
-              <a:t>busca por palavra-chave</a:t>
-            </a:r>
-          </a:p>
-        </p:txBody>
-      </p:sp>
-      <p:sp>
-        <p:nvSpPr>
-          <p:cNvPr id="8" name="Rounded Rectangle 7"/>
-          <p:cNvSpPr/>
-          <p:nvPr/>
-        </p:nvSpPr>
-        <p:spPr>
-          <a:xfrm>
-            <a:off x="2834640" y="3566160"/>
-            <a:ext cx="2743200" cy="777240"/>
-          </a:xfrm>
-          <a:prstGeom prst="roundRect">
-            <a:avLst/>
-          </a:prstGeom>
-          <a:solidFill>
-            <a:srgbClr val="1A4480"/>
-          </a:solidFill>
-          <a:ln>
-            <a:noFill/>
-          </a:ln>
-        </p:spPr>
-        <p:style>
-          <a:lnRef idx="1">
-            <a:schemeClr val="accent1"/>
-          </a:lnRef>
-          <a:fillRef idx="3">
-            <a:schemeClr val="accent1"/>
-          </a:fillRef>
-          <a:effectRef idx="2">
-            <a:schemeClr val="accent1"/>
-          </a:effectRef>
-          <a:fontRef idx="minor">
-            <a:schemeClr val="lt1"/>
-          </a:fontRef>
-        </p:style>
-        <p:txBody>
-          <a:bodyPr lIns="45720" rtlCol="0" anchor="ctr"/>
-          <a:lstStyle/>
-          <a:p>
-            <a:pPr algn="ctr"/>
-            <a:r>
-              <a:rPr sz="1300" b="1">
-                <a:solidFill>
-                  <a:srgbClr val="FFFFFF"/>
-                </a:solidFill>
-              </a:rPr>
-              <a:t>🔢 Investigador 3</a:t>
-            </a:r>
-          </a:p>
-          <a:p>
-            <a:pPr algn="ctr"/>
-            <a:r>
-              <a:rPr sz="1000">
-                <a:solidFill>
-                  <a:srgbClr val="FFFFFF"/>
-                </a:solidFill>
-              </a:rPr>
-              <a:t>busca por número da norma</a:t>
-            </a:r>
-          </a:p>
-        </p:txBody>
-      </p:sp>
-      <p:sp>
-        <p:nvSpPr>
-          <p:cNvPr id="9" name="Rounded Rectangle 8"/>
-          <p:cNvSpPr/>
-          <p:nvPr/>
-        </p:nvSpPr>
-        <p:spPr>
-          <a:xfrm>
-            <a:off x="6126480" y="2514600"/>
-            <a:ext cx="2194560" cy="777240"/>
-          </a:xfrm>
-          <a:prstGeom prst="roundRect">
-            <a:avLst/>
-          </a:prstGeom>
-          <a:solidFill>
-            <a:srgbClr val="446699"/>
-          </a:solidFill>
-          <a:ln>
-            <a:noFill/>
-          </a:ln>
-        </p:spPr>
-        <p:style>
-          <a:lnRef idx="1">
-            <a:schemeClr val="accent1"/>
-          </a:lnRef>
-          <a:fillRef idx="3">
-            <a:schemeClr val="accent1"/>
-          </a:fillRef>
-          <a:effectRef idx="2">
-            <a:schemeClr val="accent1"/>
-          </a:effectRef>
-          <a:fontRef idx="minor">
-            <a:schemeClr val="lt1"/>
-          </a:fontRef>
-        </p:style>
-        <p:txBody>
-          <a:bodyPr lIns="45720" rtlCol="0" anchor="ctr"/>
-          <a:lstStyle/>
-          <a:p>
-            <a:pPr algn="ctr"/>
-            <a:r>
-              <a:rPr sz="1300" b="1">
-                <a:solidFill>
-                  <a:srgbClr val="FFFFFF"/>
-                </a:solidFill>
-              </a:rPr>
-              <a:t>🤝 Vota junto</a:t>
-            </a:r>
-          </a:p>
-          <a:p>
-            <a:pPr algn="ctr"/>
-            <a:r>
-              <a:rPr sz="1000">
-                <a:solidFill>
-                  <a:srgbClr val="FFFFFF"/>
-                </a:solidFill>
-              </a:rPr>
-              <a:t>combina os 3 rankings</a:t>
-            </a:r>
-          </a:p>
-        </p:txBody>
-      </p:sp>
-      <p:sp>
-        <p:nvSpPr>
-          <p:cNvPr id="10" name="Rounded Rectangle 9"/>
-          <p:cNvSpPr/>
-          <p:nvPr/>
-        </p:nvSpPr>
-        <p:spPr>
-          <a:xfrm>
-            <a:off x="8778240" y="2514600"/>
-            <a:ext cx="1828800" cy="777240"/>
-          </a:xfrm>
-          <a:prstGeom prst="roundRect">
-            <a:avLst/>
-          </a:prstGeom>
-          <a:solidFill>
-            <a:srgbClr val="446699"/>
-          </a:solidFill>
-          <a:ln>
-            <a:noFill/>
-          </a:ln>
-        </p:spPr>
-        <p:style>
-          <a:lnRef idx="1">
-            <a:schemeClr val="accent1"/>
-          </a:lnRef>
-          <a:fillRef idx="3">
-            <a:schemeClr val="accent1"/>
-          </a:fillRef>
-          <a:effectRef idx="2">
-            <a:schemeClr val="accent1"/>
-          </a:effectRef>
-          <a:fontRef idx="minor">
-            <a:schemeClr val="lt1"/>
-          </a:fontRef>
-        </p:style>
-        <p:txBody>
-          <a:bodyPr lIns="45720" rtlCol="0" anchor="ctr"/>
-          <a:lstStyle/>
-          <a:p>
-            <a:pPr algn="ctr"/>
-            <a:r>
-              <a:rPr sz="1300" b="1">
-                <a:solidFill>
-                  <a:srgbClr val="FFFFFF"/>
-                </a:solidFill>
-              </a:rPr>
-              <a:t>⚖ Juiz final</a:t>
-            </a:r>
-          </a:p>
-          <a:p>
-            <a:pPr algn="ctr"/>
-            <a:r>
-              <a:rPr sz="1000">
-                <a:solidFill>
-                  <a:srgbClr val="FFFFFF"/>
-                </a:solidFill>
-              </a:rPr>
-              <a:t>reordena top 20</a:t>
-            </a:r>
-          </a:p>
-        </p:txBody>
-      </p:sp>
-      <p:sp>
-        <p:nvSpPr>
-          <p:cNvPr id="11" name="Rounded Rectangle 10"/>
-          <p:cNvSpPr/>
-          <p:nvPr/>
-        </p:nvSpPr>
-        <p:spPr>
-          <a:xfrm>
-            <a:off x="10972800" y="2514600"/>
-            <a:ext cx="822960" cy="777240"/>
-          </a:xfrm>
-          <a:prstGeom prst="roundRect">
-            <a:avLst/>
-          </a:prstGeom>
-          <a:solidFill>
-            <a:srgbClr val="338855"/>
-          </a:solidFill>
-          <a:ln>
-            <a:noFill/>
-          </a:ln>
-        </p:spPr>
-        <p:style>
-          <a:lnRef idx="1">
-            <a:schemeClr val="accent1"/>
-          </a:lnRef>
-          <a:fillRef idx="3">
-            <a:schemeClr val="accent1"/>
-          </a:fillRef>
-          <a:effectRef idx="2">
-            <a:schemeClr val="accent1"/>
-          </a:effectRef>
-          <a:fontRef idx="minor">
-            <a:schemeClr val="lt1"/>
-          </a:fontRef>
-        </p:style>
-        <p:txBody>
-          <a:bodyPr lIns="45720" rtlCol="0" anchor="ctr"/>
-          <a:lstStyle/>
-          <a:p>
-            <a:pPr algn="ctr"/>
-            <a:r>
-              <a:rPr sz="1300" b="1">
-                <a:solidFill>
-                  <a:srgbClr val="FFFFFF"/>
-                </a:solidFill>
-              </a:rPr>
-              <a:t>Top 6</a:t>
+          </a:p>
+        </p:txBody>
+      </p:sp>
+      <p:sp>
+        <p:nvSpPr>
+          <p:cNvPr id="11" name="TextBox 10"/>
+          <p:cNvSpPr txBox="1"/>
+          <p:nvPr/>
+        </p:nvSpPr>
+        <p:spPr>
+          <a:xfrm>
+            <a:off x="6492240" y="3520440"/>
+            <a:ext cx="5120640" cy="457200"/>
+          </a:xfrm>
+          <a:prstGeom prst="rect">
+            <a:avLst/>
+          </a:prstGeom>
+          <a:noFill/>
+        </p:spPr>
+        <p:txBody>
+          <a:bodyPr wrap="square" lIns="45720" rIns="45720" tIns="18288" bIns="18288">
+            <a:spAutoFit/>
+          </a:bodyPr>
+          <a:lstStyle/>
+          <a:p>
+            <a:pPr algn="l"/>
+            <a:r>
+              <a:rPr sz="1700" b="1">
+                <a:solidFill>
+                  <a:srgbClr val="1A4480"/>
+                </a:solidFill>
+                <a:latin typeface="Calibri"/>
+              </a:rPr>
+              <a:t>🔤 Busca por palavra-chave</a:t>
             </a:r>
           </a:p>
         </p:txBody>
@@ -11463,7 +12028,78 @@
         </p:nvSpPr>
         <p:spPr>
           <a:xfrm>
-            <a:off x="548640" y="4663440"/>
+            <a:off x="6492240" y="3977639"/>
+            <a:ext cx="5120640" cy="1554480"/>
+          </a:xfrm>
+          <a:prstGeom prst="rect">
+            <a:avLst/>
+          </a:prstGeom>
+          <a:noFill/>
+        </p:spPr>
+        <p:txBody>
+          <a:bodyPr wrap="square" lIns="45720" rIns="45720" tIns="18288" bIns="18288">
+            <a:spAutoFit/>
+          </a:bodyPr>
+          <a:lstStyle/>
+          <a:p>
+            <a:pPr algn="l"/>
+            <a:r>
+              <a:rPr sz="1400" b="0">
+                <a:solidFill>
+                  <a:srgbClr val="222222"/>
+                </a:solidFill>
+                <a:latin typeface="Calibri"/>
+              </a:rPr>
+              <a:t>Pergunta menciona "REN 1.000"</a:t>
+            </a:r>
+          </a:p>
+          <a:p>
+            <a:pPr algn="l"/>
+            <a:r>
+              <a:rPr sz="1400" b="0">
+                <a:solidFill>
+                  <a:srgbClr val="222222"/>
+                </a:solidFill>
+                <a:latin typeface="Calibri"/>
+              </a:rPr>
+              <a:t>Encontra trechos com exatamente "REN 1.000".</a:t>
+            </a:r>
+          </a:p>
+          <a:p>
+            <a:pPr algn="l"/>
+            <a:r>
+              <a:rPr sz="1400" b="0">
+                <a:solidFill>
+                  <a:srgbClr val="222222"/>
+                </a:solidFill>
+                <a:latin typeface="Calibri"/>
+              </a:rPr>
+              <a:t/>
+            </a:r>
+          </a:p>
+          <a:p>
+            <a:pPr algn="l"/>
+            <a:r>
+              <a:rPr sz="1400" b="0">
+                <a:solidFill>
+                  <a:srgbClr val="222222"/>
+                </a:solidFill>
+                <a:latin typeface="Calibri"/>
+              </a:rPr>
+              <a:t>Bom pra termos técnicos e nomes próprios.</a:t>
+            </a:r>
+          </a:p>
+        </p:txBody>
+      </p:sp>
+      <p:sp>
+        <p:nvSpPr>
+          <p:cNvPr id="13" name="TextBox 12"/>
+          <p:cNvSpPr txBox="1"/>
+          <p:nvPr/>
+        </p:nvSpPr>
+        <p:spPr>
+          <a:xfrm>
+            <a:off x="548640" y="5760720"/>
             <a:ext cx="10972800" cy="365760"/>
           </a:xfrm>
           <a:prstGeom prst="rect">
@@ -11472,7 +12108,7 @@
           <a:noFill/>
         </p:spPr>
         <p:txBody>
-          <a:bodyPr wrap="square" lIns="45720" tIns="18288" rIns="45720" bIns="18288">
+          <a:bodyPr wrap="square" lIns="45720" rIns="45720" tIns="18288" bIns="18288">
             <a:spAutoFit/>
           </a:bodyPr>
           <a:lstStyle/>
@@ -11485,117 +12121,49 @@
                 </a:solidFill>
                 <a:latin typeface="Calibri"/>
               </a:rPr>
-              <a:t>Por que 3 investigadores?</a:t>
-            </a:r>
-          </a:p>
-        </p:txBody>
-      </p:sp>
-      <p:sp>
-        <p:nvSpPr>
-          <p:cNvPr id="13" name="TextBox 12"/>
-          <p:cNvSpPr txBox="1"/>
-          <p:nvPr/>
-        </p:nvSpPr>
-        <p:spPr>
-          <a:xfrm>
-            <a:off x="731520" y="5074920"/>
-            <a:ext cx="10972800" cy="1828800"/>
-          </a:xfrm>
-          <a:prstGeom prst="rect">
-            <a:avLst/>
-          </a:prstGeom>
-          <a:noFill/>
-        </p:spPr>
-        <p:txBody>
-          <a:bodyPr wrap="square">
-            <a:spAutoFit/>
-          </a:bodyPr>
-          <a:lstStyle/>
-          <a:p>
-            <a:pPr>
-              <a:spcAft>
-                <a:spcPts val="400"/>
-              </a:spcAft>
-            </a:pPr>
-            <a:r>
-              <a:rPr sz="1400">
+              <a:t>📦 Onde guardamos: Qdrant — banco de dados especializado em vetores</a:t>
+            </a:r>
+          </a:p>
+        </p:txBody>
+      </p:sp>
+      <p:sp>
+        <p:nvSpPr>
+          <p:cNvPr id="14" name="TextBox 13"/>
+          <p:cNvSpPr txBox="1"/>
+          <p:nvPr/>
+        </p:nvSpPr>
+        <p:spPr>
+          <a:xfrm>
+            <a:off x="731520" y="6172200"/>
+            <a:ext cx="10972800" cy="365760"/>
+          </a:xfrm>
+          <a:prstGeom prst="rect">
+            <a:avLst/>
+          </a:prstGeom>
+          <a:noFill/>
+        </p:spPr>
+        <p:txBody>
+          <a:bodyPr wrap="square" lIns="45720" rIns="45720" tIns="18288" bIns="18288">
+            <a:spAutoFit/>
+          </a:bodyPr>
+          <a:lstStyle/>
+          <a:p>
+            <a:pPr algn="l"/>
+            <a:r>
+              <a:rPr sz="1400" b="0">
                 <a:solidFill>
                   <a:srgbClr val="222222"/>
                 </a:solidFill>
                 <a:latin typeface="Calibri"/>
               </a:rPr>
-              <a:t>• Cada um é bom em algo diferente — combinar é melhor que escolher um só</a:t>
-            </a:r>
-          </a:p>
-          <a:p>
-            <a:pPr lvl="1">
-              <a:spcAft>
-                <a:spcPts val="400"/>
-              </a:spcAft>
-            </a:pPr>
-            <a:r>
-              <a:rPr sz="1200">
-                <a:solidFill>
-                  <a:srgbClr val="222222"/>
-                </a:solidFill>
-                <a:latin typeface="Calibri"/>
-              </a:rPr>
-              <a:t>– Significado pega "prazo de revisão" mesmo se o texto diz "período da reanálise"</a:t>
-            </a:r>
-          </a:p>
-          <a:p>
-            <a:pPr lvl="1">
-              <a:spcAft>
-                <a:spcPts val="400"/>
-              </a:spcAft>
-            </a:pPr>
-            <a:r>
-              <a:rPr sz="1200">
-                <a:solidFill>
-                  <a:srgbClr val="222222"/>
-                </a:solidFill>
-                <a:latin typeface="Calibri"/>
-              </a:rPr>
-              <a:t>– Palavra-chave pega termos técnicos exatos como "bandeira tarifária"</a:t>
-            </a:r>
-          </a:p>
-          <a:p>
-            <a:pPr lvl="1">
-              <a:spcAft>
-                <a:spcPts val="400"/>
-              </a:spcAft>
-            </a:pPr>
-            <a:r>
-              <a:rPr sz="1200">
-                <a:solidFill>
-                  <a:srgbClr val="222222"/>
-                </a:solidFill>
-                <a:latin typeface="Calibri"/>
-              </a:rPr>
-              <a:t>– Número de norma pega "REN 1.000/2021" direto, sem depender de contexto</a:t>
-            </a:r>
-          </a:p>
-          <a:p>
-            <a:pPr>
-              <a:spcAft>
-                <a:spcPts val="400"/>
-              </a:spcAft>
-            </a:pPr>
-            <a:r>
-              <a:rPr sz="1400">
-                <a:solidFill>
-                  <a:srgbClr val="222222"/>
-                </a:solidFill>
-                <a:latin typeface="Calibri"/>
-              </a:rPr>
-              <a:t>• Juiz final reordena com modelo mais preciso → garante que os 6 melhores ficam no topo</a:t>
-            </a:r>
-          </a:p>
-        </p:txBody>
-      </p:sp>
-      <p:sp>
-        <p:nvSpPr>
-          <p:cNvPr id="14" name="TextBox 13"/>
+              <a:t>Roda local (Docker), grátis. Permite filtrar por ano, documento, situação.</a:t>
+            </a:r>
+          </a:p>
+        </p:txBody>
+      </p:sp>
+      <p:sp>
+        <p:nvSpPr>
+          <p:cNvPr id="15" name="TextBox 14"/>
           <p:cNvSpPr txBox="1"/>
           <p:nvPr/>
         </p:nvSpPr>
@@ -11610,7 +12178,7 @@
           <a:noFill/>
         </p:spPr>
         <p:txBody>
-          <a:bodyPr wrap="square" lIns="45720" tIns="18288" rIns="45720" bIns="18288">
+          <a:bodyPr wrap="square" lIns="45720" rIns="45720" tIns="18288" bIns="18288">
             <a:spAutoFit/>
           </a:bodyPr>
           <a:lstStyle/>
@@ -11630,7 +12198,7 @@
       </p:sp>
       <p:sp>
         <p:nvSpPr>
-          <p:cNvPr id="15" name="TextBox 14"/>
+          <p:cNvPr id="16" name="TextBox 15"/>
           <p:cNvSpPr txBox="1"/>
           <p:nvPr/>
         </p:nvSpPr>
@@ -11645,7 +12213,7 @@
           <a:noFill/>
         </p:spPr>
         <p:txBody>
-          <a:bodyPr wrap="square" lIns="45720" tIns="18288" rIns="45720" bIns="18288">
+          <a:bodyPr wrap="square" lIns="45720" rIns="45720" tIns="18288" bIns="18288">
             <a:spAutoFit/>
           </a:bodyPr>
           <a:lstStyle/>

--- a/apresentacao.pptx
+++ b/apresentacao.pptx
@@ -5,21 +5,21 @@
     <p:sldMasterId id="2147483648" r:id="rId1"/>
   </p:sldMasterIdLst>
   <p:sldIdLst>
-    <p:sldId id="256" r:id="rId7"/>
-    <p:sldId id="257" r:id="rId8"/>
-    <p:sldId id="258" r:id="rId9"/>
-    <p:sldId id="259" r:id="rId10"/>
-    <p:sldId id="260" r:id="rId11"/>
-    <p:sldId id="261" r:id="rId12"/>
-    <p:sldId id="262" r:id="rId13"/>
-    <p:sldId id="263" r:id="rId14"/>
-    <p:sldId id="264" r:id="rId15"/>
-    <p:sldId id="265" r:id="rId16"/>
-    <p:sldId id="266" r:id="rId17"/>
-    <p:sldId id="267" r:id="rId18"/>
-    <p:sldId id="268" r:id="rId19"/>
+    <p:sldId id="256" r:id="rId2"/>
+    <p:sldId id="257" r:id="rId3"/>
+    <p:sldId id="258" r:id="rId4"/>
+    <p:sldId id="259" r:id="rId5"/>
+    <p:sldId id="260" r:id="rId6"/>
+    <p:sldId id="261" r:id="rId7"/>
+    <p:sldId id="262" r:id="rId8"/>
+    <p:sldId id="263" r:id="rId9"/>
+    <p:sldId id="264" r:id="rId10"/>
+    <p:sldId id="265" r:id="rId11"/>
+    <p:sldId id="266" r:id="rId12"/>
+    <p:sldId id="267" r:id="rId13"/>
+    <p:sldId id="268" r:id="rId14"/>
   </p:sldIdLst>
-  <p:sldSz cx="12191695" cy="6858000" type="screen4x3"/>
+  <p:sldSz cx="12192000" cy="6858000"/>
   <p:notesSz cx="6858000" cy="9144000"/>
   <p:defaultTextStyle>
     <a:defPPr>
@@ -116,6 +116,22 @@
       </a:defRPr>
     </a:lvl9pPr>
   </p:defaultTextStyle>
+  <p:extLst>
+    <p:ext uri="{EFAFB233-063F-42B5-8137-9DF3F51BA10A}">
+      <p15:sldGuideLst xmlns:p15="http://schemas.microsoft.com/office/powerpoint/2012/main">
+        <p15:guide id="1" orient="horz" pos="2160">
+          <p15:clr>
+            <a:srgbClr val="A4A3A4"/>
+          </p15:clr>
+        </p15:guide>
+        <p15:guide id="2" pos="2880">
+          <p15:clr>
+            <a:srgbClr val="A4A3A4"/>
+          </p15:clr>
+        </p15:guide>
+      </p15:sldGuideLst>
+    </p:ext>
+  </p:extLst>
 </p:presentation>
 </file>
 
@@ -157,10 +173,9 @@
           <a:lstStyle/>
           <a:p>
             <a:r>
-              <a:rPr lang="en-US" smtClean="0"/>
+              <a:rPr lang="en-US"/>
               <a:t>Click to edit Master title style</a:t>
             </a:r>
-            <a:endParaRPr lang="en-US"/>
           </a:p>
         </p:txBody>
       </p:sp>
@@ -276,10 +291,9 @@
           </a:lstStyle>
           <a:p>
             <a:r>
-              <a:rPr lang="en-US" smtClean="0"/>
+              <a:rPr lang="en-US"/>
               <a:t>Click to edit Master subtitle style</a:t>
             </a:r>
-            <a:endParaRPr lang="en-US"/>
           </a:p>
         </p:txBody>
       </p:sp>
@@ -300,7 +314,7 @@
           <a:p>
             <a:fld id="{5BCAD085-E8A6-8845-BD4E-CB4CCA059FC4}" type="datetimeFigureOut">
               <a:rPr lang="en-US" smtClean="0"/>
-              <a:t>1/27/13</a:t>
+              <a:t>4/27/2026</a:t>
             </a:fld>
             <a:endParaRPr lang="en-US"/>
           </a:p>
@@ -342,7 +356,7 @@
           <a:p>
             <a:fld id="{C1FF6DA9-008F-8B48-92A6-B652298478BF}" type="slidenum">
               <a:rPr lang="en-US" smtClean="0"/>
-              <a:t>‹#›</a:t>
+              <a:t>‹nº›</a:t>
             </a:fld>
             <a:endParaRPr lang="en-US"/>
           </a:p>
@@ -394,10 +408,9 @@
           <a:lstStyle/>
           <a:p>
             <a:r>
-              <a:rPr lang="en-US" smtClean="0"/>
+              <a:rPr lang="en-US"/>
               <a:t>Click to edit Master title style</a:t>
             </a:r>
-            <a:endParaRPr lang="en-US"/>
           </a:p>
         </p:txBody>
       </p:sp>
@@ -418,38 +431,37 @@
           <a:p>
             <a:pPr lvl="0"/>
             <a:r>
-              <a:rPr lang="en-US" smtClean="0"/>
+              <a:rPr lang="en-US"/>
               <a:t>Click to edit Master text styles</a:t>
             </a:r>
           </a:p>
           <a:p>
             <a:pPr lvl="1"/>
             <a:r>
-              <a:rPr lang="en-US" smtClean="0"/>
+              <a:rPr lang="en-US"/>
               <a:t>Second level</a:t>
             </a:r>
           </a:p>
           <a:p>
             <a:pPr lvl="2"/>
             <a:r>
-              <a:rPr lang="en-US" smtClean="0"/>
+              <a:rPr lang="en-US"/>
               <a:t>Third level</a:t>
             </a:r>
           </a:p>
           <a:p>
             <a:pPr lvl="3"/>
             <a:r>
-              <a:rPr lang="en-US" smtClean="0"/>
+              <a:rPr lang="en-US"/>
               <a:t>Fourth level</a:t>
             </a:r>
           </a:p>
           <a:p>
             <a:pPr lvl="4"/>
             <a:r>
-              <a:rPr lang="en-US" smtClean="0"/>
+              <a:rPr lang="en-US"/>
               <a:t>Fifth level</a:t>
             </a:r>
-            <a:endParaRPr lang="en-US"/>
           </a:p>
         </p:txBody>
       </p:sp>
@@ -470,7 +482,7 @@
           <a:p>
             <a:fld id="{5BCAD085-E8A6-8845-BD4E-CB4CCA059FC4}" type="datetimeFigureOut">
               <a:rPr lang="en-US" smtClean="0"/>
-              <a:t>1/27/13</a:t>
+              <a:t>4/27/2026</a:t>
             </a:fld>
             <a:endParaRPr lang="en-US"/>
           </a:p>
@@ -512,7 +524,7 @@
           <a:p>
             <a:fld id="{C1FF6DA9-008F-8B48-92A6-B652298478BF}" type="slidenum">
               <a:rPr lang="en-US" smtClean="0"/>
-              <a:t>‹#›</a:t>
+              <a:t>‹nº›</a:t>
             </a:fld>
             <a:endParaRPr lang="en-US"/>
           </a:p>
@@ -569,10 +581,9 @@
           <a:lstStyle/>
           <a:p>
             <a:r>
-              <a:rPr lang="en-US" smtClean="0"/>
+              <a:rPr lang="en-US"/>
               <a:t>Click to edit Master title style</a:t>
             </a:r>
-            <a:endParaRPr lang="en-US"/>
           </a:p>
         </p:txBody>
       </p:sp>
@@ -598,38 +609,37 @@
           <a:p>
             <a:pPr lvl="0"/>
             <a:r>
-              <a:rPr lang="en-US" smtClean="0"/>
+              <a:rPr lang="en-US"/>
               <a:t>Click to edit Master text styles</a:t>
             </a:r>
           </a:p>
           <a:p>
             <a:pPr lvl="1"/>
             <a:r>
-              <a:rPr lang="en-US" smtClean="0"/>
+              <a:rPr lang="en-US"/>
               <a:t>Second level</a:t>
             </a:r>
           </a:p>
           <a:p>
             <a:pPr lvl="2"/>
             <a:r>
-              <a:rPr lang="en-US" smtClean="0"/>
+              <a:rPr lang="en-US"/>
               <a:t>Third level</a:t>
             </a:r>
           </a:p>
           <a:p>
             <a:pPr lvl="3"/>
             <a:r>
-              <a:rPr lang="en-US" smtClean="0"/>
+              <a:rPr lang="en-US"/>
               <a:t>Fourth level</a:t>
             </a:r>
           </a:p>
           <a:p>
             <a:pPr lvl="4"/>
             <a:r>
-              <a:rPr lang="en-US" smtClean="0"/>
+              <a:rPr lang="en-US"/>
               <a:t>Fifth level</a:t>
             </a:r>
-            <a:endParaRPr lang="en-US"/>
           </a:p>
         </p:txBody>
       </p:sp>
@@ -650,7 +660,7 @@
           <a:p>
             <a:fld id="{5BCAD085-E8A6-8845-BD4E-CB4CCA059FC4}" type="datetimeFigureOut">
               <a:rPr lang="en-US" smtClean="0"/>
-              <a:t>1/27/13</a:t>
+              <a:t>4/27/2026</a:t>
             </a:fld>
             <a:endParaRPr lang="en-US"/>
           </a:p>
@@ -692,7 +702,7 @@
           <a:p>
             <a:fld id="{C1FF6DA9-008F-8B48-92A6-B652298478BF}" type="slidenum">
               <a:rPr lang="en-US" smtClean="0"/>
-              <a:t>‹#›</a:t>
+              <a:t>‹nº›</a:t>
             </a:fld>
             <a:endParaRPr lang="en-US"/>
           </a:p>
@@ -744,10 +754,9 @@
           <a:lstStyle/>
           <a:p>
             <a:r>
-              <a:rPr lang="en-US" smtClean="0"/>
+              <a:rPr lang="en-US"/>
               <a:t>Click to edit Master title style</a:t>
             </a:r>
-            <a:endParaRPr lang="en-US"/>
           </a:p>
         </p:txBody>
       </p:sp>
@@ -768,38 +777,37 @@
           <a:p>
             <a:pPr lvl="0"/>
             <a:r>
-              <a:rPr lang="en-US" smtClean="0"/>
+              <a:rPr lang="en-US"/>
               <a:t>Click to edit Master text styles</a:t>
             </a:r>
           </a:p>
           <a:p>
             <a:pPr lvl="1"/>
             <a:r>
-              <a:rPr lang="en-US" smtClean="0"/>
+              <a:rPr lang="en-US"/>
               <a:t>Second level</a:t>
             </a:r>
           </a:p>
           <a:p>
             <a:pPr lvl="2"/>
             <a:r>
-              <a:rPr lang="en-US" smtClean="0"/>
+              <a:rPr lang="en-US"/>
               <a:t>Third level</a:t>
             </a:r>
           </a:p>
           <a:p>
             <a:pPr lvl="3"/>
             <a:r>
-              <a:rPr lang="en-US" smtClean="0"/>
+              <a:rPr lang="en-US"/>
               <a:t>Fourth level</a:t>
             </a:r>
           </a:p>
           <a:p>
             <a:pPr lvl="4"/>
             <a:r>
-              <a:rPr lang="en-US" smtClean="0"/>
+              <a:rPr lang="en-US"/>
               <a:t>Fifth level</a:t>
             </a:r>
-            <a:endParaRPr lang="en-US"/>
           </a:p>
         </p:txBody>
       </p:sp>
@@ -820,7 +828,7 @@
           <a:p>
             <a:fld id="{5BCAD085-E8A6-8845-BD4E-CB4CCA059FC4}" type="datetimeFigureOut">
               <a:rPr lang="en-US" smtClean="0"/>
-              <a:t>1/27/13</a:t>
+              <a:t>4/27/2026</a:t>
             </a:fld>
             <a:endParaRPr lang="en-US"/>
           </a:p>
@@ -862,7 +870,7 @@
           <a:p>
             <a:fld id="{C1FF6DA9-008F-8B48-92A6-B652298478BF}" type="slidenum">
               <a:rPr lang="en-US" smtClean="0"/>
-              <a:t>‹#›</a:t>
+              <a:t>‹nº›</a:t>
             </a:fld>
             <a:endParaRPr lang="en-US"/>
           </a:p>
@@ -923,10 +931,9 @@
           </a:lstStyle>
           <a:p>
             <a:r>
-              <a:rPr lang="en-US" smtClean="0"/>
+              <a:rPr lang="en-US"/>
               <a:t>Click to edit Master title style</a:t>
             </a:r>
-            <a:endParaRPr lang="en-US"/>
           </a:p>
         </p:txBody>
       </p:sp>
@@ -1043,7 +1050,7 @@
           <a:p>
             <a:pPr lvl="0"/>
             <a:r>
-              <a:rPr lang="en-US" smtClean="0"/>
+              <a:rPr lang="en-US"/>
               <a:t>Click to edit Master text styles</a:t>
             </a:r>
           </a:p>
@@ -1066,7 +1073,7 @@
           <a:p>
             <a:fld id="{5BCAD085-E8A6-8845-BD4E-CB4CCA059FC4}" type="datetimeFigureOut">
               <a:rPr lang="en-US" smtClean="0"/>
-              <a:t>1/27/13</a:t>
+              <a:t>4/27/2026</a:t>
             </a:fld>
             <a:endParaRPr lang="en-US"/>
           </a:p>
@@ -1108,7 +1115,7 @@
           <a:p>
             <a:fld id="{C1FF6DA9-008F-8B48-92A6-B652298478BF}" type="slidenum">
               <a:rPr lang="en-US" smtClean="0"/>
-              <a:t>‹#›</a:t>
+              <a:t>‹nº›</a:t>
             </a:fld>
             <a:endParaRPr lang="en-US"/>
           </a:p>
@@ -1160,10 +1167,9 @@
           <a:lstStyle/>
           <a:p>
             <a:r>
-              <a:rPr lang="en-US" smtClean="0"/>
+              <a:rPr lang="en-US"/>
               <a:t>Click to edit Master title style</a:t>
             </a:r>
-            <a:endParaRPr lang="en-US"/>
           </a:p>
         </p:txBody>
       </p:sp>
@@ -1217,38 +1223,37 @@
           <a:p>
             <a:pPr lvl="0"/>
             <a:r>
-              <a:rPr lang="en-US" smtClean="0"/>
+              <a:rPr lang="en-US"/>
               <a:t>Click to edit Master text styles</a:t>
             </a:r>
           </a:p>
           <a:p>
             <a:pPr lvl="1"/>
             <a:r>
-              <a:rPr lang="en-US" smtClean="0"/>
+              <a:rPr lang="en-US"/>
               <a:t>Second level</a:t>
             </a:r>
           </a:p>
           <a:p>
             <a:pPr lvl="2"/>
             <a:r>
-              <a:rPr lang="en-US" smtClean="0"/>
+              <a:rPr lang="en-US"/>
               <a:t>Third level</a:t>
             </a:r>
           </a:p>
           <a:p>
             <a:pPr lvl="3"/>
             <a:r>
-              <a:rPr lang="en-US" smtClean="0"/>
+              <a:rPr lang="en-US"/>
               <a:t>Fourth level</a:t>
             </a:r>
           </a:p>
           <a:p>
             <a:pPr lvl="4"/>
             <a:r>
-              <a:rPr lang="en-US" smtClean="0"/>
+              <a:rPr lang="en-US"/>
               <a:t>Fifth level</a:t>
             </a:r>
-            <a:endParaRPr lang="en-US"/>
           </a:p>
         </p:txBody>
       </p:sp>
@@ -1302,38 +1307,37 @@
           <a:p>
             <a:pPr lvl="0"/>
             <a:r>
-              <a:rPr lang="en-US" smtClean="0"/>
+              <a:rPr lang="en-US"/>
               <a:t>Click to edit Master text styles</a:t>
             </a:r>
           </a:p>
           <a:p>
             <a:pPr lvl="1"/>
             <a:r>
-              <a:rPr lang="en-US" smtClean="0"/>
+              <a:rPr lang="en-US"/>
               <a:t>Second level</a:t>
             </a:r>
           </a:p>
           <a:p>
             <a:pPr lvl="2"/>
             <a:r>
-              <a:rPr lang="en-US" smtClean="0"/>
+              <a:rPr lang="en-US"/>
               <a:t>Third level</a:t>
             </a:r>
           </a:p>
           <a:p>
             <a:pPr lvl="3"/>
             <a:r>
-              <a:rPr lang="en-US" smtClean="0"/>
+              <a:rPr lang="en-US"/>
               <a:t>Fourth level</a:t>
             </a:r>
           </a:p>
           <a:p>
             <a:pPr lvl="4"/>
             <a:r>
-              <a:rPr lang="en-US" smtClean="0"/>
+              <a:rPr lang="en-US"/>
               <a:t>Fifth level</a:t>
             </a:r>
-            <a:endParaRPr lang="en-US"/>
           </a:p>
         </p:txBody>
       </p:sp>
@@ -1354,7 +1358,7 @@
           <a:p>
             <a:fld id="{5BCAD085-E8A6-8845-BD4E-CB4CCA059FC4}" type="datetimeFigureOut">
               <a:rPr lang="en-US" smtClean="0"/>
-              <a:t>1/27/13</a:t>
+              <a:t>4/27/2026</a:t>
             </a:fld>
             <a:endParaRPr lang="en-US"/>
           </a:p>
@@ -1396,7 +1400,7 @@
           <a:p>
             <a:fld id="{C1FF6DA9-008F-8B48-92A6-B652298478BF}" type="slidenum">
               <a:rPr lang="en-US" smtClean="0"/>
-              <a:t>‹#›</a:t>
+              <a:t>‹nº›</a:t>
             </a:fld>
             <a:endParaRPr lang="en-US"/>
           </a:p>
@@ -1452,10 +1456,9 @@
           </a:lstStyle>
           <a:p>
             <a:r>
-              <a:rPr lang="en-US" smtClean="0"/>
+              <a:rPr lang="en-US"/>
               <a:t>Click to edit Master title style</a:t>
             </a:r>
-            <a:endParaRPr lang="en-US"/>
           </a:p>
         </p:txBody>
       </p:sp>
@@ -1518,7 +1521,7 @@
           <a:p>
             <a:pPr lvl="0"/>
             <a:r>
-              <a:rPr lang="en-US" smtClean="0"/>
+              <a:rPr lang="en-US"/>
               <a:t>Click to edit Master text styles</a:t>
             </a:r>
           </a:p>
@@ -1574,38 +1577,37 @@
           <a:p>
             <a:pPr lvl="0"/>
             <a:r>
-              <a:rPr lang="en-US" smtClean="0"/>
+              <a:rPr lang="en-US"/>
               <a:t>Click to edit Master text styles</a:t>
             </a:r>
           </a:p>
           <a:p>
             <a:pPr lvl="1"/>
             <a:r>
-              <a:rPr lang="en-US" smtClean="0"/>
+              <a:rPr lang="en-US"/>
               <a:t>Second level</a:t>
             </a:r>
           </a:p>
           <a:p>
             <a:pPr lvl="2"/>
             <a:r>
-              <a:rPr lang="en-US" smtClean="0"/>
+              <a:rPr lang="en-US"/>
               <a:t>Third level</a:t>
             </a:r>
           </a:p>
           <a:p>
             <a:pPr lvl="3"/>
             <a:r>
-              <a:rPr lang="en-US" smtClean="0"/>
+              <a:rPr lang="en-US"/>
               <a:t>Fourth level</a:t>
             </a:r>
           </a:p>
           <a:p>
             <a:pPr lvl="4"/>
             <a:r>
-              <a:rPr lang="en-US" smtClean="0"/>
+              <a:rPr lang="en-US"/>
               <a:t>Fifth level</a:t>
             </a:r>
-            <a:endParaRPr lang="en-US"/>
           </a:p>
         </p:txBody>
       </p:sp>
@@ -1668,7 +1670,7 @@
           <a:p>
             <a:pPr lvl="0"/>
             <a:r>
-              <a:rPr lang="en-US" smtClean="0"/>
+              <a:rPr lang="en-US"/>
               <a:t>Click to edit Master text styles</a:t>
             </a:r>
           </a:p>
@@ -1724,38 +1726,37 @@
           <a:p>
             <a:pPr lvl="0"/>
             <a:r>
-              <a:rPr lang="en-US" smtClean="0"/>
+              <a:rPr lang="en-US"/>
               <a:t>Click to edit Master text styles</a:t>
             </a:r>
           </a:p>
           <a:p>
             <a:pPr lvl="1"/>
             <a:r>
-              <a:rPr lang="en-US" smtClean="0"/>
+              <a:rPr lang="en-US"/>
               <a:t>Second level</a:t>
             </a:r>
           </a:p>
           <a:p>
             <a:pPr lvl="2"/>
             <a:r>
-              <a:rPr lang="en-US" smtClean="0"/>
+              <a:rPr lang="en-US"/>
               <a:t>Third level</a:t>
             </a:r>
           </a:p>
           <a:p>
             <a:pPr lvl="3"/>
             <a:r>
-              <a:rPr lang="en-US" smtClean="0"/>
+              <a:rPr lang="en-US"/>
               <a:t>Fourth level</a:t>
             </a:r>
           </a:p>
           <a:p>
             <a:pPr lvl="4"/>
             <a:r>
-              <a:rPr lang="en-US" smtClean="0"/>
+              <a:rPr lang="en-US"/>
               <a:t>Fifth level</a:t>
             </a:r>
-            <a:endParaRPr lang="en-US"/>
           </a:p>
         </p:txBody>
       </p:sp>
@@ -1776,7 +1777,7 @@
           <a:p>
             <a:fld id="{5BCAD085-E8A6-8845-BD4E-CB4CCA059FC4}" type="datetimeFigureOut">
               <a:rPr lang="en-US" smtClean="0"/>
-              <a:t>1/27/13</a:t>
+              <a:t>4/27/2026</a:t>
             </a:fld>
             <a:endParaRPr lang="en-US"/>
           </a:p>
@@ -1818,7 +1819,7 @@
           <a:p>
             <a:fld id="{C1FF6DA9-008F-8B48-92A6-B652298478BF}" type="slidenum">
               <a:rPr lang="en-US" smtClean="0"/>
-              <a:t>‹#›</a:t>
+              <a:t>‹nº›</a:t>
             </a:fld>
             <a:endParaRPr lang="en-US"/>
           </a:p>
@@ -1870,10 +1871,9 @@
           <a:lstStyle/>
           <a:p>
             <a:r>
-              <a:rPr lang="en-US" smtClean="0"/>
+              <a:rPr lang="en-US"/>
               <a:t>Click to edit Master title style</a:t>
             </a:r>
-            <a:endParaRPr lang="en-US"/>
           </a:p>
         </p:txBody>
       </p:sp>
@@ -1894,7 +1894,7 @@
           <a:p>
             <a:fld id="{5BCAD085-E8A6-8845-BD4E-CB4CCA059FC4}" type="datetimeFigureOut">
               <a:rPr lang="en-US" smtClean="0"/>
-              <a:t>1/27/13</a:t>
+              <a:t>4/27/2026</a:t>
             </a:fld>
             <a:endParaRPr lang="en-US"/>
           </a:p>
@@ -1936,7 +1936,7 @@
           <a:p>
             <a:fld id="{C1FF6DA9-008F-8B48-92A6-B652298478BF}" type="slidenum">
               <a:rPr lang="en-US" smtClean="0"/>
-              <a:t>‹#›</a:t>
+              <a:t>‹nº›</a:t>
             </a:fld>
             <a:endParaRPr lang="en-US"/>
           </a:p>
@@ -1989,7 +1989,7 @@
           <a:p>
             <a:fld id="{5BCAD085-E8A6-8845-BD4E-CB4CCA059FC4}" type="datetimeFigureOut">
               <a:rPr lang="en-US" smtClean="0"/>
-              <a:t>1/27/13</a:t>
+              <a:t>4/27/2026</a:t>
             </a:fld>
             <a:endParaRPr lang="en-US"/>
           </a:p>
@@ -2031,7 +2031,7 @@
           <a:p>
             <a:fld id="{C1FF6DA9-008F-8B48-92A6-B652298478BF}" type="slidenum">
               <a:rPr lang="en-US" smtClean="0"/>
-              <a:t>‹#›</a:t>
+              <a:t>‹nº›</a:t>
             </a:fld>
             <a:endParaRPr lang="en-US"/>
           </a:p>
@@ -2092,10 +2092,9 @@
           </a:lstStyle>
           <a:p>
             <a:r>
-              <a:rPr lang="en-US" smtClean="0"/>
+              <a:rPr lang="en-US"/>
               <a:t>Click to edit Master title style</a:t>
             </a:r>
-            <a:endParaRPr lang="en-US"/>
           </a:p>
         </p:txBody>
       </p:sp>
@@ -2149,38 +2148,37 @@
           <a:p>
             <a:pPr lvl="0"/>
             <a:r>
-              <a:rPr lang="en-US" smtClean="0"/>
+              <a:rPr lang="en-US"/>
               <a:t>Click to edit Master text styles</a:t>
             </a:r>
           </a:p>
           <a:p>
             <a:pPr lvl="1"/>
             <a:r>
-              <a:rPr lang="en-US" smtClean="0"/>
+              <a:rPr lang="en-US"/>
               <a:t>Second level</a:t>
             </a:r>
           </a:p>
           <a:p>
             <a:pPr lvl="2"/>
             <a:r>
-              <a:rPr lang="en-US" smtClean="0"/>
+              <a:rPr lang="en-US"/>
               <a:t>Third level</a:t>
             </a:r>
           </a:p>
           <a:p>
             <a:pPr lvl="3"/>
             <a:r>
-              <a:rPr lang="en-US" smtClean="0"/>
+              <a:rPr lang="en-US"/>
               <a:t>Fourth level</a:t>
             </a:r>
           </a:p>
           <a:p>
             <a:pPr lvl="4"/>
             <a:r>
-              <a:rPr lang="en-US" smtClean="0"/>
+              <a:rPr lang="en-US"/>
               <a:t>Fifth level</a:t>
             </a:r>
-            <a:endParaRPr lang="en-US"/>
           </a:p>
         </p:txBody>
       </p:sp>
@@ -2243,7 +2241,7 @@
           <a:p>
             <a:pPr lvl="0"/>
             <a:r>
-              <a:rPr lang="en-US" smtClean="0"/>
+              <a:rPr lang="en-US"/>
               <a:t>Click to edit Master text styles</a:t>
             </a:r>
           </a:p>
@@ -2266,7 +2264,7 @@
           <a:p>
             <a:fld id="{5BCAD085-E8A6-8845-BD4E-CB4CCA059FC4}" type="datetimeFigureOut">
               <a:rPr lang="en-US" smtClean="0"/>
-              <a:t>1/27/13</a:t>
+              <a:t>4/27/2026</a:t>
             </a:fld>
             <a:endParaRPr lang="en-US"/>
           </a:p>
@@ -2308,7 +2306,7 @@
           <a:p>
             <a:fld id="{C1FF6DA9-008F-8B48-92A6-B652298478BF}" type="slidenum">
               <a:rPr lang="en-US" smtClean="0"/>
-              <a:t>‹#›</a:t>
+              <a:t>‹nº›</a:t>
             </a:fld>
             <a:endParaRPr lang="en-US"/>
           </a:p>
@@ -2369,10 +2367,9 @@
           </a:lstStyle>
           <a:p>
             <a:r>
-              <a:rPr lang="en-US" smtClean="0"/>
+              <a:rPr lang="en-US"/>
               <a:t>Click to edit Master title style</a:t>
             </a:r>
-            <a:endParaRPr lang="en-US"/>
           </a:p>
         </p:txBody>
       </p:sp>
@@ -2496,7 +2493,7 @@
           <a:p>
             <a:pPr lvl="0"/>
             <a:r>
-              <a:rPr lang="en-US" smtClean="0"/>
+              <a:rPr lang="en-US"/>
               <a:t>Click to edit Master text styles</a:t>
             </a:r>
           </a:p>
@@ -2519,7 +2516,7 @@
           <a:p>
             <a:fld id="{5BCAD085-E8A6-8845-BD4E-CB4CCA059FC4}" type="datetimeFigureOut">
               <a:rPr lang="en-US" smtClean="0"/>
-              <a:t>1/27/13</a:t>
+              <a:t>4/27/2026</a:t>
             </a:fld>
             <a:endParaRPr lang="en-US"/>
           </a:p>
@@ -2561,7 +2558,7 @@
           <a:p>
             <a:fld id="{C1FF6DA9-008F-8B48-92A6-B652298478BF}" type="slidenum">
               <a:rPr lang="en-US" smtClean="0"/>
-              <a:t>‹#›</a:t>
+              <a:t>‹nº›</a:t>
             </a:fld>
             <a:endParaRPr lang="en-US"/>
           </a:p>
@@ -2628,10 +2625,9 @@
           <a:lstStyle/>
           <a:p>
             <a:r>
-              <a:rPr lang="en-US" smtClean="0"/>
+              <a:rPr lang="en-US"/>
               <a:t>Click to edit Master title style</a:t>
             </a:r>
-            <a:endParaRPr lang="en-US"/>
           </a:p>
         </p:txBody>
       </p:sp>
@@ -2662,38 +2658,37 @@
           <a:p>
             <a:pPr lvl="0"/>
             <a:r>
-              <a:rPr lang="en-US" smtClean="0"/>
+              <a:rPr lang="en-US"/>
               <a:t>Click to edit Master text styles</a:t>
             </a:r>
           </a:p>
           <a:p>
             <a:pPr lvl="1"/>
             <a:r>
-              <a:rPr lang="en-US" smtClean="0"/>
+              <a:rPr lang="en-US"/>
               <a:t>Second level</a:t>
             </a:r>
           </a:p>
           <a:p>
             <a:pPr lvl="2"/>
             <a:r>
-              <a:rPr lang="en-US" smtClean="0"/>
+              <a:rPr lang="en-US"/>
               <a:t>Third level</a:t>
             </a:r>
           </a:p>
           <a:p>
             <a:pPr lvl="3"/>
             <a:r>
-              <a:rPr lang="en-US" smtClean="0"/>
+              <a:rPr lang="en-US"/>
               <a:t>Fourth level</a:t>
             </a:r>
           </a:p>
           <a:p>
             <a:pPr lvl="4"/>
             <a:r>
-              <a:rPr lang="en-US" smtClean="0"/>
+              <a:rPr lang="en-US"/>
               <a:t>Fifth level</a:t>
             </a:r>
-            <a:endParaRPr lang="en-US"/>
           </a:p>
         </p:txBody>
       </p:sp>
@@ -2732,7 +2727,7 @@
           <a:p>
             <a:fld id="{5BCAD085-E8A6-8845-BD4E-CB4CCA059FC4}" type="datetimeFigureOut">
               <a:rPr lang="en-US" smtClean="0"/>
-              <a:t>1/27/13</a:t>
+              <a:t>4/27/2026</a:t>
             </a:fld>
             <a:endParaRPr lang="en-US"/>
           </a:p>
@@ -2810,7 +2805,7 @@
           <a:p>
             <a:fld id="{C1FF6DA9-008F-8B48-92A6-B652298478BF}" type="slidenum">
               <a:rPr lang="en-US" smtClean="0"/>
-              <a:t>‹#›</a:t>
+              <a:t>‹nº›</a:t>
             </a:fld>
             <a:endParaRPr lang="en-US"/>
           </a:p>
@@ -3091,7 +3086,7 @@
 </file>
 
 <file path=ppt/slides/slide1.xml><?xml version="1.0" encoding="utf-8"?>
-<p:sld xmlns:a="http://schemas.openxmlformats.org/drawingml/2006/main" xmlns:p="http://schemas.openxmlformats.org/presentationml/2006/main" xmlns:r="http://schemas.openxmlformats.org/officeDocument/2006/relationships">
+<p:sld xmlns:a="http://schemas.openxmlformats.org/drawingml/2006/main" xmlns:r="http://schemas.openxmlformats.org/officeDocument/2006/relationships" xmlns:p="http://schemas.openxmlformats.org/presentationml/2006/main">
   <p:cSld>
     <p:spTree>
       <p:nvGrpSpPr>
@@ -3099,7 +3094,14 @@
         <p:cNvGrpSpPr/>
         <p:nvPr/>
       </p:nvGrpSpPr>
-      <p:grpSpPr/>
+      <p:grpSpPr>
+        <a:xfrm>
+          <a:off x="0" y="0"/>
+          <a:ext cx="0" cy="0"/>
+          <a:chOff x="0" y="0"/>
+          <a:chExt cx="0" cy="0"/>
+        </a:xfrm>
+      </p:grpSpPr>
       <p:sp>
         <p:nvSpPr>
           <p:cNvPr id="2" name="Rectangle 1"/>
@@ -3140,6 +3142,7 @@
           <a:lstStyle/>
           <a:p>
             <a:pPr algn="ctr"/>
+            <a:endParaRPr/>
           </a:p>
         </p:txBody>
       </p:sp>
@@ -3183,6 +3186,7 @@
           <a:lstStyle/>
           <a:p>
             <a:pPr algn="ctr"/>
+            <a:endParaRPr/>
           </a:p>
         </p:txBody>
       </p:sp>
@@ -3203,7 +3207,7 @@
           <a:noFill/>
         </p:spPr>
         <p:txBody>
-          <a:bodyPr wrap="square" lIns="45720" rIns="45720" tIns="18288" bIns="18288">
+          <a:bodyPr wrap="square" lIns="45720" tIns="18288" rIns="45720" bIns="18288">
             <a:spAutoFit/>
           </a:bodyPr>
           <a:lstStyle/>
@@ -3238,7 +3242,7 @@
           <a:noFill/>
         </p:spPr>
         <p:txBody>
-          <a:bodyPr wrap="square" lIns="45720" rIns="45720" tIns="18288" bIns="18288">
+          <a:bodyPr wrap="square" lIns="45720" tIns="18288" rIns="45720" bIns="18288">
             <a:spAutoFit/>
           </a:bodyPr>
           <a:lstStyle/>
@@ -3273,7 +3277,7 @@
           <a:noFill/>
         </p:spPr>
         <p:txBody>
-          <a:bodyPr wrap="square" lIns="45720" rIns="45720" tIns="18288" bIns="18288">
+          <a:bodyPr wrap="square" lIns="45720" tIns="18288" rIns="45720" bIns="18288">
             <a:spAutoFit/>
           </a:bodyPr>
           <a:lstStyle/>
@@ -3300,7 +3304,7 @@
 </file>
 
 <file path=ppt/slides/slide10.xml><?xml version="1.0" encoding="utf-8"?>
-<p:sld xmlns:a="http://schemas.openxmlformats.org/drawingml/2006/main" xmlns:p="http://schemas.openxmlformats.org/presentationml/2006/main" xmlns:r="http://schemas.openxmlformats.org/officeDocument/2006/relationships">
+<p:sld xmlns:a="http://schemas.openxmlformats.org/drawingml/2006/main" xmlns:r="http://schemas.openxmlformats.org/officeDocument/2006/relationships" xmlns:p="http://schemas.openxmlformats.org/presentationml/2006/main">
   <p:cSld>
     <p:spTree>
       <p:nvGrpSpPr>
@@ -3308,7 +3312,14 @@
         <p:cNvGrpSpPr/>
         <p:nvPr/>
       </p:nvGrpSpPr>
-      <p:grpSpPr/>
+      <p:grpSpPr>
+        <a:xfrm>
+          <a:off x="0" y="0"/>
+          <a:ext cx="0" cy="0"/>
+          <a:chOff x="0" y="0"/>
+          <a:chExt cx="0" cy="0"/>
+        </a:xfrm>
+      </p:grpSpPr>
       <p:sp>
         <p:nvSpPr>
           <p:cNvPr id="2" name="Rectangle 1"/>
@@ -3349,6 +3360,7 @@
           <a:lstStyle/>
           <a:p>
             <a:pPr algn="ctr"/>
+            <a:endParaRPr/>
           </a:p>
         </p:txBody>
       </p:sp>
@@ -3369,7 +3381,7 @@
           <a:noFill/>
         </p:spPr>
         <p:txBody>
-          <a:bodyPr wrap="square" lIns="45720" rIns="45720" tIns="18288" bIns="18288">
+          <a:bodyPr wrap="square" lIns="45720" tIns="18288" rIns="45720" bIns="18288">
             <a:spAutoFit/>
           </a:bodyPr>
           <a:lstStyle/>
@@ -3404,7 +3416,7 @@
           <a:noFill/>
         </p:spPr>
         <p:txBody>
-          <a:bodyPr wrap="square" lIns="45720" rIns="45720" tIns="18288" bIns="18288">
+          <a:bodyPr wrap="square" lIns="45720" tIns="18288" rIns="45720" bIns="18288">
             <a:spAutoFit/>
           </a:bodyPr>
           <a:lstStyle/>
@@ -3458,7 +3470,7 @@
           </a:fontRef>
         </p:style>
         <p:txBody>
-          <a:bodyPr rtlCol="0" anchor="ctr" lIns="45720"/>
+          <a:bodyPr lIns="45720" rtlCol="0" anchor="ctr"/>
           <a:lstStyle/>
           <a:p>
             <a:pPr algn="ctr"/>
@@ -3509,29 +3521,66 @@
           </a:fontRef>
         </p:style>
         <p:txBody>
-          <a:bodyPr rtlCol="0" anchor="ctr" lIns="45720"/>
+          <a:bodyPr lIns="45720" rtlCol="0" anchor="ctr"/>
           <a:lstStyle/>
           <a:p>
             <a:pPr algn="ctr"/>
             <a:r>
-              <a:rPr sz="1300" b="1">
+              <a:rPr sz="1300" b="1" dirty="0">
                 <a:solidFill>
                   <a:srgbClr val="FFFFFF"/>
                 </a:solidFill>
               </a:rPr>
-              <a:t>🎯 Investigador 1</a:t>
+              <a:t>🎯 </a:t>
+            </a:r>
+            <a:r>
+              <a:rPr sz="1300" b="1" dirty="0" err="1">
+                <a:solidFill>
+                  <a:srgbClr val="FFFFFF"/>
+                </a:solidFill>
+              </a:rPr>
+              <a:t>Investigador</a:t>
+            </a:r>
+            <a:r>
+              <a:rPr sz="1300" b="1" dirty="0">
+                <a:solidFill>
+                  <a:srgbClr val="FFFFFF"/>
+                </a:solidFill>
+              </a:rPr>
+              <a:t> 1</a:t>
             </a:r>
           </a:p>
           <a:p>
             <a:pPr algn="ctr"/>
             <a:r>
-              <a:rPr sz="1000">
+              <a:rPr sz="1000" dirty="0" err="1">
                 <a:solidFill>
                   <a:srgbClr val="FFFFFF"/>
                 </a:solidFill>
               </a:rPr>
-              <a:t>busca por significado</a:t>
-            </a:r>
+              <a:t>busca</a:t>
+            </a:r>
+            <a:r>
+              <a:rPr sz="1000" dirty="0">
+                <a:solidFill>
+                  <a:srgbClr val="FFFFFF"/>
+                </a:solidFill>
+              </a:rPr>
+              <a:t> por </a:t>
+            </a:r>
+            <a:r>
+              <a:rPr sz="1000" dirty="0" err="1">
+                <a:solidFill>
+                  <a:srgbClr val="FFFFFF"/>
+                </a:solidFill>
+              </a:rPr>
+              <a:t>significado</a:t>
+            </a:r>
+            <a:endParaRPr sz="1000" dirty="0">
+              <a:solidFill>
+                <a:srgbClr val="FFFFFF"/>
+              </a:solidFill>
+            </a:endParaRPr>
           </a:p>
         </p:txBody>
       </p:sp>
@@ -3571,7 +3620,7 @@
           </a:fontRef>
         </p:style>
         <p:txBody>
-          <a:bodyPr rtlCol="0" anchor="ctr" lIns="45720"/>
+          <a:bodyPr lIns="45720" rtlCol="0" anchor="ctr"/>
           <a:lstStyle/>
           <a:p>
             <a:pPr algn="ctr"/>
@@ -3633,7 +3682,7 @@
           </a:fontRef>
         </p:style>
         <p:txBody>
-          <a:bodyPr rtlCol="0" anchor="ctr" lIns="45720"/>
+          <a:bodyPr lIns="45720" rtlCol="0" anchor="ctr"/>
           <a:lstStyle/>
           <a:p>
             <a:pPr algn="ctr"/>
@@ -3695,7 +3744,7 @@
           </a:fontRef>
         </p:style>
         <p:txBody>
-          <a:bodyPr rtlCol="0" anchor="ctr" lIns="45720"/>
+          <a:bodyPr lIns="45720" rtlCol="0" anchor="ctr"/>
           <a:lstStyle/>
           <a:p>
             <a:pPr algn="ctr"/>
@@ -3757,12 +3806,12 @@
           </a:fontRef>
         </p:style>
         <p:txBody>
-          <a:bodyPr rtlCol="0" anchor="ctr" lIns="45720"/>
+          <a:bodyPr lIns="45720" rtlCol="0" anchor="ctr"/>
           <a:lstStyle/>
           <a:p>
             <a:pPr algn="ctr"/>
             <a:r>
-              <a:rPr sz="1300" b="1">
+              <a:rPr sz="1300" b="1" dirty="0">
                 <a:solidFill>
                   <a:srgbClr val="FFFFFF"/>
                 </a:solidFill>
@@ -3773,12 +3822,20 @@
           <a:p>
             <a:pPr algn="ctr"/>
             <a:r>
-              <a:rPr sz="1000">
+              <a:rPr sz="1000" dirty="0" err="1">
                 <a:solidFill>
                   <a:srgbClr val="FFFFFF"/>
                 </a:solidFill>
               </a:rPr>
-              <a:t>reordena top 20</a:t>
+              <a:t>reordena</a:t>
+            </a:r>
+            <a:r>
+              <a:rPr sz="1000" dirty="0">
+                <a:solidFill>
+                  <a:srgbClr val="FFFFFF"/>
+                </a:solidFill>
+              </a:rPr>
+              <a:t> top 20</a:t>
             </a:r>
           </a:p>
         </p:txBody>
@@ -3819,18 +3876,31 @@
           </a:fontRef>
         </p:style>
         <p:txBody>
-          <a:bodyPr rtlCol="0" anchor="ctr" lIns="45720"/>
+          <a:bodyPr lIns="45720" rtlCol="0" anchor="ctr"/>
           <a:lstStyle/>
           <a:p>
             <a:pPr algn="ctr"/>
             <a:r>
-              <a:rPr sz="1300" b="1">
+              <a:rPr sz="1300" b="1" dirty="0">
                 <a:solidFill>
                   <a:srgbClr val="FFFFFF"/>
                 </a:solidFill>
               </a:rPr>
-              <a:t>Top 6</a:t>
-            </a:r>
+              <a:t>Top </a:t>
+            </a:r>
+            <a:r>
+              <a:rPr lang="pt-BR" sz="1300" b="1" dirty="0">
+                <a:solidFill>
+                  <a:srgbClr val="FFFFFF"/>
+                </a:solidFill>
+              </a:rPr>
+              <a:t>5</a:t>
+            </a:r>
+            <a:endParaRPr sz="1300" b="1" dirty="0">
+              <a:solidFill>
+                <a:srgbClr val="FFFFFF"/>
+              </a:solidFill>
+            </a:endParaRPr>
           </a:p>
         </p:txBody>
       </p:sp>
@@ -3851,7 +3921,7 @@
           <a:noFill/>
         </p:spPr>
         <p:txBody>
-          <a:bodyPr wrap="square" lIns="45720" rIns="45720" tIns="18288" bIns="18288">
+          <a:bodyPr wrap="square" lIns="45720" tIns="18288" rIns="45720" bIns="18288">
             <a:spAutoFit/>
           </a:bodyPr>
           <a:lstStyle/>
@@ -3897,14 +3967,155 @@
               </a:spcAft>
             </a:pPr>
             <a:r>
-              <a:rPr sz="1400">
-                <a:solidFill>
-                  <a:srgbClr val="222222"/>
-                </a:solidFill>
-                <a:latin typeface="Calibri"/>
-              </a:rPr>
-              <a:t>• Cada um é bom em algo diferente — combinar é melhor que escolher um só</a:t>
-            </a:r>
+              <a:rPr sz="1400" dirty="0">
+                <a:solidFill>
+                  <a:srgbClr val="222222"/>
+                </a:solidFill>
+                <a:latin typeface="Calibri"/>
+              </a:rPr>
+              <a:t>• </a:t>
+            </a:r>
+            <a:r>
+              <a:rPr sz="1400" dirty="0" err="1">
+                <a:solidFill>
+                  <a:srgbClr val="222222"/>
+                </a:solidFill>
+                <a:latin typeface="Calibri"/>
+              </a:rPr>
+              <a:t>Cada</a:t>
+            </a:r>
+            <a:r>
+              <a:rPr sz="1400" dirty="0">
+                <a:solidFill>
+                  <a:srgbClr val="222222"/>
+                </a:solidFill>
+                <a:latin typeface="Calibri"/>
+              </a:rPr>
+              <a:t> um é </a:t>
+            </a:r>
+            <a:r>
+              <a:rPr sz="1400" dirty="0" err="1">
+                <a:solidFill>
+                  <a:srgbClr val="222222"/>
+                </a:solidFill>
+                <a:latin typeface="Calibri"/>
+              </a:rPr>
+              <a:t>bom</a:t>
+            </a:r>
+            <a:r>
+              <a:rPr sz="1400" dirty="0">
+                <a:solidFill>
+                  <a:srgbClr val="222222"/>
+                </a:solidFill>
+                <a:latin typeface="Calibri"/>
+              </a:rPr>
+              <a:t> </a:t>
+            </a:r>
+            <a:r>
+              <a:rPr sz="1400" dirty="0" err="1">
+                <a:solidFill>
+                  <a:srgbClr val="222222"/>
+                </a:solidFill>
+                <a:latin typeface="Calibri"/>
+              </a:rPr>
+              <a:t>em</a:t>
+            </a:r>
+            <a:r>
+              <a:rPr sz="1400" dirty="0">
+                <a:solidFill>
+                  <a:srgbClr val="222222"/>
+                </a:solidFill>
+                <a:latin typeface="Calibri"/>
+              </a:rPr>
+              <a:t> algo </a:t>
+            </a:r>
+            <a:r>
+              <a:rPr sz="1400" dirty="0" err="1">
+                <a:solidFill>
+                  <a:srgbClr val="222222"/>
+                </a:solidFill>
+                <a:latin typeface="Calibri"/>
+              </a:rPr>
+              <a:t>diferente</a:t>
+            </a:r>
+            <a:r>
+              <a:rPr sz="1400" dirty="0">
+                <a:solidFill>
+                  <a:srgbClr val="222222"/>
+                </a:solidFill>
+                <a:latin typeface="Calibri"/>
+              </a:rPr>
+              <a:t> — </a:t>
+            </a:r>
+            <a:r>
+              <a:rPr sz="1400" dirty="0" err="1">
+                <a:solidFill>
+                  <a:srgbClr val="222222"/>
+                </a:solidFill>
+                <a:latin typeface="Calibri"/>
+              </a:rPr>
+              <a:t>combinar</a:t>
+            </a:r>
+            <a:r>
+              <a:rPr sz="1400" dirty="0">
+                <a:solidFill>
+                  <a:srgbClr val="222222"/>
+                </a:solidFill>
+                <a:latin typeface="Calibri"/>
+              </a:rPr>
+              <a:t> é </a:t>
+            </a:r>
+            <a:r>
+              <a:rPr sz="1400" dirty="0" err="1">
+                <a:solidFill>
+                  <a:srgbClr val="222222"/>
+                </a:solidFill>
+                <a:latin typeface="Calibri"/>
+              </a:rPr>
+              <a:t>melhor</a:t>
+            </a:r>
+            <a:r>
+              <a:rPr sz="1400" dirty="0">
+                <a:solidFill>
+                  <a:srgbClr val="222222"/>
+                </a:solidFill>
+                <a:latin typeface="Calibri"/>
+              </a:rPr>
+              <a:t> que </a:t>
+            </a:r>
+            <a:r>
+              <a:rPr sz="1400" dirty="0" err="1">
+                <a:solidFill>
+                  <a:srgbClr val="222222"/>
+                </a:solidFill>
+                <a:latin typeface="Calibri"/>
+              </a:rPr>
+              <a:t>escolher</a:t>
+            </a:r>
+            <a:r>
+              <a:rPr sz="1400" dirty="0">
+                <a:solidFill>
+                  <a:srgbClr val="222222"/>
+                </a:solidFill>
+                <a:latin typeface="Calibri"/>
+              </a:rPr>
+              <a:t> um </a:t>
+            </a:r>
+            <a:r>
+              <a:rPr sz="1400" dirty="0" err="1">
+                <a:solidFill>
+                  <a:srgbClr val="222222"/>
+                </a:solidFill>
+                <a:latin typeface="Calibri"/>
+              </a:rPr>
+              <a:t>só</a:t>
+            </a:r>
+            <a:endParaRPr sz="1400" dirty="0">
+              <a:solidFill>
+                <a:srgbClr val="222222"/>
+              </a:solidFill>
+              <a:latin typeface="Calibri"/>
+            </a:endParaRPr>
           </a:p>
           <a:p>
             <a:pPr lvl="1">
@@ -3913,13 +4124,175 @@
               </a:spcAft>
             </a:pPr>
             <a:r>
-              <a:rPr sz="1200">
-                <a:solidFill>
-                  <a:srgbClr val="222222"/>
-                </a:solidFill>
-                <a:latin typeface="Calibri"/>
-              </a:rPr>
-              <a:t>– Significado pega "prazo de revisão" mesmo se o texto diz "período da reanálise"</a:t>
+              <a:rPr sz="1200" dirty="0">
+                <a:solidFill>
+                  <a:srgbClr val="222222"/>
+                </a:solidFill>
+                <a:latin typeface="Calibri"/>
+              </a:rPr>
+              <a:t>– </a:t>
+            </a:r>
+            <a:r>
+              <a:rPr sz="1200" dirty="0" err="1">
+                <a:solidFill>
+                  <a:srgbClr val="222222"/>
+                </a:solidFill>
+                <a:latin typeface="Calibri"/>
+              </a:rPr>
+              <a:t>Significado</a:t>
+            </a:r>
+            <a:r>
+              <a:rPr sz="1200" dirty="0">
+                <a:solidFill>
+                  <a:srgbClr val="222222"/>
+                </a:solidFill>
+                <a:latin typeface="Calibri"/>
+              </a:rPr>
+              <a:t> </a:t>
+            </a:r>
+            <a:r>
+              <a:rPr sz="1200" dirty="0" err="1">
+                <a:solidFill>
+                  <a:srgbClr val="222222"/>
+                </a:solidFill>
+                <a:latin typeface="Calibri"/>
+              </a:rPr>
+              <a:t>pega</a:t>
+            </a:r>
+            <a:r>
+              <a:rPr sz="1200" dirty="0">
+                <a:solidFill>
+                  <a:srgbClr val="222222"/>
+                </a:solidFill>
+                <a:latin typeface="Calibri"/>
+              </a:rPr>
+              <a:t> "</a:t>
+            </a:r>
+            <a:r>
+              <a:rPr sz="1200" dirty="0" err="1">
+                <a:solidFill>
+                  <a:srgbClr val="222222"/>
+                </a:solidFill>
+                <a:latin typeface="Calibri"/>
+              </a:rPr>
+              <a:t>prazo</a:t>
+            </a:r>
+            <a:r>
+              <a:rPr sz="1200" dirty="0">
+                <a:solidFill>
+                  <a:srgbClr val="222222"/>
+                </a:solidFill>
+                <a:latin typeface="Calibri"/>
+              </a:rPr>
+              <a:t> de </a:t>
+            </a:r>
+            <a:r>
+              <a:rPr sz="1200" dirty="0" err="1">
+                <a:solidFill>
+                  <a:srgbClr val="222222"/>
+                </a:solidFill>
+                <a:latin typeface="Calibri"/>
+              </a:rPr>
+              <a:t>revisão</a:t>
+            </a:r>
+            <a:r>
+              <a:rPr sz="1200" dirty="0">
+                <a:solidFill>
+                  <a:srgbClr val="222222"/>
+                </a:solidFill>
+                <a:latin typeface="Calibri"/>
+              </a:rPr>
+              <a:t>" </a:t>
+            </a:r>
+            <a:r>
+              <a:rPr sz="1200" dirty="0" err="1">
+                <a:solidFill>
+                  <a:srgbClr val="222222"/>
+                </a:solidFill>
+                <a:latin typeface="Calibri"/>
+              </a:rPr>
+              <a:t>mesmo</a:t>
+            </a:r>
+            <a:r>
+              <a:rPr sz="1200" dirty="0">
+                <a:solidFill>
+                  <a:srgbClr val="222222"/>
+                </a:solidFill>
+                <a:latin typeface="Calibri"/>
+              </a:rPr>
+              <a:t> se o </a:t>
+            </a:r>
+            <a:r>
+              <a:rPr sz="1200" dirty="0" err="1">
+                <a:solidFill>
+                  <a:srgbClr val="222222"/>
+                </a:solidFill>
+                <a:latin typeface="Calibri"/>
+              </a:rPr>
+              <a:t>texto</a:t>
+            </a:r>
+            <a:r>
+              <a:rPr sz="1200" dirty="0">
+                <a:solidFill>
+                  <a:srgbClr val="222222"/>
+                </a:solidFill>
+                <a:latin typeface="Calibri"/>
+              </a:rPr>
+              <a:t> </a:t>
+            </a:r>
+            <a:r>
+              <a:rPr sz="1200" dirty="0" err="1">
+                <a:solidFill>
+                  <a:srgbClr val="222222"/>
+                </a:solidFill>
+                <a:latin typeface="Calibri"/>
+              </a:rPr>
+              <a:t>diz</a:t>
+            </a:r>
+            <a:r>
+              <a:rPr sz="1200" dirty="0">
+                <a:solidFill>
+                  <a:srgbClr val="222222"/>
+                </a:solidFill>
+                <a:latin typeface="Calibri"/>
+              </a:rPr>
+              <a:t> "</a:t>
+            </a:r>
+            <a:r>
+              <a:rPr sz="1200" dirty="0" err="1">
+                <a:solidFill>
+                  <a:srgbClr val="222222"/>
+                </a:solidFill>
+                <a:latin typeface="Calibri"/>
+              </a:rPr>
+              <a:t>período</a:t>
+            </a:r>
+            <a:r>
+              <a:rPr sz="1200" dirty="0">
+                <a:solidFill>
+                  <a:srgbClr val="222222"/>
+                </a:solidFill>
+                <a:latin typeface="Calibri"/>
+              </a:rPr>
+              <a:t> da </a:t>
+            </a:r>
+            <a:r>
+              <a:rPr sz="1200" dirty="0" err="1">
+                <a:solidFill>
+                  <a:srgbClr val="222222"/>
+                </a:solidFill>
+                <a:latin typeface="Calibri"/>
+              </a:rPr>
+              <a:t>reanálise</a:t>
+            </a:r>
+            <a:r>
+              <a:rPr sz="1200" dirty="0">
+                <a:solidFill>
+                  <a:srgbClr val="222222"/>
+                </a:solidFill>
+                <a:latin typeface="Calibri"/>
+              </a:rPr>
+              <a:t>"</a:t>
             </a:r>
           </a:p>
           <a:p>
@@ -3929,13 +4302,157 @@
               </a:spcAft>
             </a:pPr>
             <a:r>
-              <a:rPr sz="1200">
-                <a:solidFill>
-                  <a:srgbClr val="222222"/>
-                </a:solidFill>
-                <a:latin typeface="Calibri"/>
-              </a:rPr>
-              <a:t>– Palavra-chave pega termos técnicos exatos como "bandeira tarifária"</a:t>
+              <a:rPr sz="1200" dirty="0">
+                <a:solidFill>
+                  <a:srgbClr val="222222"/>
+                </a:solidFill>
+                <a:latin typeface="Calibri"/>
+              </a:rPr>
+              <a:t>– </a:t>
+            </a:r>
+            <a:r>
+              <a:rPr sz="1200" dirty="0" err="1">
+                <a:solidFill>
+                  <a:srgbClr val="222222"/>
+                </a:solidFill>
+                <a:latin typeface="Calibri"/>
+              </a:rPr>
+              <a:t>Palavra-chave</a:t>
+            </a:r>
+            <a:r>
+              <a:rPr sz="1200" dirty="0">
+                <a:solidFill>
+                  <a:srgbClr val="222222"/>
+                </a:solidFill>
+                <a:latin typeface="Calibri"/>
+              </a:rPr>
+              <a:t> </a:t>
+            </a:r>
+            <a:r>
+              <a:rPr sz="1200" dirty="0" err="1">
+                <a:solidFill>
+                  <a:srgbClr val="222222"/>
+                </a:solidFill>
+                <a:latin typeface="Calibri"/>
+              </a:rPr>
+              <a:t>pega</a:t>
+            </a:r>
+            <a:r>
+              <a:rPr sz="1200" dirty="0">
+                <a:solidFill>
+                  <a:srgbClr val="222222"/>
+                </a:solidFill>
+                <a:latin typeface="Calibri"/>
+              </a:rPr>
+              <a:t> </a:t>
+            </a:r>
+            <a:r>
+              <a:rPr sz="1200" dirty="0" err="1">
+                <a:solidFill>
+                  <a:srgbClr val="222222"/>
+                </a:solidFill>
+                <a:latin typeface="Calibri"/>
+              </a:rPr>
+              <a:t>termos</a:t>
+            </a:r>
+            <a:r>
+              <a:rPr sz="1200" dirty="0">
+                <a:solidFill>
+                  <a:srgbClr val="222222"/>
+                </a:solidFill>
+                <a:latin typeface="Calibri"/>
+              </a:rPr>
+              <a:t> </a:t>
+            </a:r>
+            <a:r>
+              <a:rPr sz="1200" dirty="0" err="1">
+                <a:solidFill>
+                  <a:srgbClr val="222222"/>
+                </a:solidFill>
+                <a:latin typeface="Calibri"/>
+              </a:rPr>
+              <a:t>técnicos</a:t>
+            </a:r>
+            <a:r>
+              <a:rPr sz="1200" dirty="0">
+                <a:solidFill>
+                  <a:srgbClr val="222222"/>
+                </a:solidFill>
+                <a:latin typeface="Calibri"/>
+              </a:rPr>
+              <a:t> </a:t>
+            </a:r>
+            <a:r>
+              <a:rPr sz="1200" dirty="0" err="1">
+                <a:solidFill>
+                  <a:srgbClr val="222222"/>
+                </a:solidFill>
+                <a:latin typeface="Calibri"/>
+              </a:rPr>
+              <a:t>exatos</a:t>
+            </a:r>
+            <a:r>
+              <a:rPr sz="1200" dirty="0">
+                <a:solidFill>
+                  <a:srgbClr val="222222"/>
+                </a:solidFill>
+                <a:latin typeface="Calibri"/>
+              </a:rPr>
+              <a:t> </a:t>
+            </a:r>
+            <a:r>
+              <a:rPr sz="1200" dirty="0" err="1">
+                <a:solidFill>
+                  <a:srgbClr val="222222"/>
+                </a:solidFill>
+                <a:latin typeface="Calibri"/>
+              </a:rPr>
+              <a:t>como</a:t>
+            </a:r>
+            <a:r>
+              <a:rPr sz="1200" dirty="0">
+                <a:solidFill>
+                  <a:srgbClr val="222222"/>
+                </a:solidFill>
+                <a:latin typeface="Calibri"/>
+              </a:rPr>
+              <a:t> "</a:t>
+            </a:r>
+            <a:r>
+              <a:rPr sz="1200" dirty="0" err="1">
+                <a:solidFill>
+                  <a:srgbClr val="222222"/>
+                </a:solidFill>
+                <a:latin typeface="Calibri"/>
+              </a:rPr>
+              <a:t>bandeira</a:t>
+            </a:r>
+            <a:r>
+              <a:rPr sz="1200" dirty="0">
+                <a:solidFill>
+                  <a:srgbClr val="222222"/>
+                </a:solidFill>
+                <a:latin typeface="Calibri"/>
+              </a:rPr>
+              <a:t> </a:t>
+            </a:r>
+            <a:r>
+              <a:rPr sz="1200" dirty="0" err="1">
+                <a:solidFill>
+                  <a:srgbClr val="222222"/>
+                </a:solidFill>
+                <a:latin typeface="Calibri"/>
+              </a:rPr>
+              <a:t>tarifária</a:t>
+            </a:r>
+            <a:r>
+              <a:rPr sz="1200" dirty="0">
+                <a:solidFill>
+                  <a:srgbClr val="222222"/>
+                </a:solidFill>
+                <a:latin typeface="Calibri"/>
+              </a:rPr>
+              <a:t>"</a:t>
             </a:r>
           </a:p>
           <a:p>
@@ -3945,14 +4462,137 @@
               </a:spcAft>
             </a:pPr>
             <a:r>
-              <a:rPr sz="1200">
-                <a:solidFill>
-                  <a:srgbClr val="222222"/>
-                </a:solidFill>
-                <a:latin typeface="Calibri"/>
-              </a:rPr>
-              <a:t>– Número de norma pega "REN 1.000/2021" direto, sem depender de contexto</a:t>
-            </a:r>
+              <a:rPr sz="1200" dirty="0">
+                <a:solidFill>
+                  <a:srgbClr val="222222"/>
+                </a:solidFill>
+                <a:latin typeface="Calibri"/>
+              </a:rPr>
+              <a:t>– </a:t>
+            </a:r>
+            <a:r>
+              <a:rPr sz="1200" dirty="0" err="1">
+                <a:solidFill>
+                  <a:srgbClr val="222222"/>
+                </a:solidFill>
+                <a:latin typeface="Calibri"/>
+              </a:rPr>
+              <a:t>Número</a:t>
+            </a:r>
+            <a:r>
+              <a:rPr sz="1200" dirty="0">
+                <a:solidFill>
+                  <a:srgbClr val="222222"/>
+                </a:solidFill>
+                <a:latin typeface="Calibri"/>
+              </a:rPr>
+              <a:t> de </a:t>
+            </a:r>
+            <a:r>
+              <a:rPr sz="1200" dirty="0" err="1">
+                <a:solidFill>
+                  <a:srgbClr val="222222"/>
+                </a:solidFill>
+                <a:latin typeface="Calibri"/>
+              </a:rPr>
+              <a:t>norma</a:t>
+            </a:r>
+            <a:r>
+              <a:rPr sz="1200" dirty="0">
+                <a:solidFill>
+                  <a:srgbClr val="222222"/>
+                </a:solidFill>
+                <a:latin typeface="Calibri"/>
+              </a:rPr>
+              <a:t> </a:t>
+            </a:r>
+            <a:r>
+              <a:rPr sz="1200" dirty="0" err="1">
+                <a:solidFill>
+                  <a:srgbClr val="222222"/>
+                </a:solidFill>
+                <a:latin typeface="Calibri"/>
+              </a:rPr>
+              <a:t>pega</a:t>
+            </a:r>
+            <a:r>
+              <a:rPr sz="1200" dirty="0">
+                <a:solidFill>
+                  <a:srgbClr val="222222"/>
+                </a:solidFill>
+                <a:latin typeface="Calibri"/>
+              </a:rPr>
+              <a:t> "REN 1.000/2021" </a:t>
+            </a:r>
+            <a:r>
+              <a:rPr sz="1200" dirty="0" err="1">
+                <a:solidFill>
+                  <a:srgbClr val="222222"/>
+                </a:solidFill>
+                <a:latin typeface="Calibri"/>
+              </a:rPr>
+              <a:t>direto</a:t>
+            </a:r>
+            <a:r>
+              <a:rPr sz="1200" dirty="0">
+                <a:solidFill>
+                  <a:srgbClr val="222222"/>
+                </a:solidFill>
+                <a:latin typeface="Calibri"/>
+              </a:rPr>
+              <a:t>, </a:t>
+            </a:r>
+            <a:r>
+              <a:rPr sz="1200" dirty="0" err="1">
+                <a:solidFill>
+                  <a:srgbClr val="222222"/>
+                </a:solidFill>
+                <a:latin typeface="Calibri"/>
+              </a:rPr>
+              <a:t>sem</a:t>
+            </a:r>
+            <a:r>
+              <a:rPr sz="1200" dirty="0">
+                <a:solidFill>
+                  <a:srgbClr val="222222"/>
+                </a:solidFill>
+                <a:latin typeface="Calibri"/>
+              </a:rPr>
+              <a:t> </a:t>
+            </a:r>
+            <a:r>
+              <a:rPr sz="1200" dirty="0" err="1">
+                <a:solidFill>
+                  <a:srgbClr val="222222"/>
+                </a:solidFill>
+                <a:latin typeface="Calibri"/>
+              </a:rPr>
+              <a:t>depender</a:t>
+            </a:r>
+            <a:r>
+              <a:rPr sz="1200" dirty="0">
+                <a:solidFill>
+                  <a:srgbClr val="222222"/>
+                </a:solidFill>
+                <a:latin typeface="Calibri"/>
+              </a:rPr>
+              <a:t> de </a:t>
+            </a:r>
+            <a:r>
+              <a:rPr sz="1200" dirty="0" err="1">
+                <a:solidFill>
+                  <a:srgbClr val="222222"/>
+                </a:solidFill>
+                <a:latin typeface="Calibri"/>
+              </a:rPr>
+              <a:t>contexto</a:t>
+            </a:r>
+            <a:endParaRPr sz="1200" dirty="0">
+              <a:solidFill>
+                <a:srgbClr val="222222"/>
+              </a:solidFill>
+              <a:latin typeface="Calibri"/>
+            </a:endParaRPr>
           </a:p>
           <a:p>
             <a:pPr>
@@ -3961,13 +4601,157 @@
               </a:spcAft>
             </a:pPr>
             <a:r>
-              <a:rPr sz="1400">
-                <a:solidFill>
-                  <a:srgbClr val="222222"/>
-                </a:solidFill>
-                <a:latin typeface="Calibri"/>
-              </a:rPr>
-              <a:t>• Juiz final reordena com modelo mais preciso → garante que os 6 melhores ficam no topo</a:t>
+              <a:rPr sz="1400" dirty="0">
+                <a:solidFill>
+                  <a:srgbClr val="222222"/>
+                </a:solidFill>
+                <a:latin typeface="Calibri"/>
+              </a:rPr>
+              <a:t>• Juiz final </a:t>
+            </a:r>
+            <a:r>
+              <a:rPr sz="1400" dirty="0" err="1">
+                <a:solidFill>
+                  <a:srgbClr val="222222"/>
+                </a:solidFill>
+                <a:latin typeface="Calibri"/>
+              </a:rPr>
+              <a:t>reordena</a:t>
+            </a:r>
+            <a:r>
+              <a:rPr sz="1400" dirty="0">
+                <a:solidFill>
+                  <a:srgbClr val="222222"/>
+                </a:solidFill>
+                <a:latin typeface="Calibri"/>
+              </a:rPr>
+              <a:t> com </a:t>
+            </a:r>
+            <a:r>
+              <a:rPr sz="1400" dirty="0" err="1">
+                <a:solidFill>
+                  <a:srgbClr val="222222"/>
+                </a:solidFill>
+                <a:latin typeface="Calibri"/>
+              </a:rPr>
+              <a:t>modelo</a:t>
+            </a:r>
+            <a:r>
+              <a:rPr sz="1400" dirty="0">
+                <a:solidFill>
+                  <a:srgbClr val="222222"/>
+                </a:solidFill>
+                <a:latin typeface="Calibri"/>
+              </a:rPr>
+              <a:t> </a:t>
+            </a:r>
+            <a:r>
+              <a:rPr sz="1400" dirty="0" err="1">
+                <a:solidFill>
+                  <a:srgbClr val="222222"/>
+                </a:solidFill>
+                <a:latin typeface="Calibri"/>
+              </a:rPr>
+              <a:t>mais</a:t>
+            </a:r>
+            <a:r>
+              <a:rPr sz="1400" dirty="0">
+                <a:solidFill>
+                  <a:srgbClr val="222222"/>
+                </a:solidFill>
+                <a:latin typeface="Calibri"/>
+              </a:rPr>
+              <a:t> </a:t>
+            </a:r>
+            <a:r>
+              <a:rPr sz="1400" dirty="0" err="1">
+                <a:solidFill>
+                  <a:srgbClr val="222222"/>
+                </a:solidFill>
+                <a:latin typeface="Calibri"/>
+              </a:rPr>
+              <a:t>preciso</a:t>
+            </a:r>
+            <a:r>
+              <a:rPr sz="1400" dirty="0">
+                <a:solidFill>
+                  <a:srgbClr val="222222"/>
+                </a:solidFill>
+                <a:latin typeface="Calibri"/>
+              </a:rPr>
+              <a:t> → </a:t>
+            </a:r>
+            <a:r>
+              <a:rPr sz="1400" dirty="0" err="1">
+                <a:solidFill>
+                  <a:srgbClr val="222222"/>
+                </a:solidFill>
+                <a:latin typeface="Calibri"/>
+              </a:rPr>
+              <a:t>garante</a:t>
+            </a:r>
+            <a:r>
+              <a:rPr sz="1400" dirty="0">
+                <a:solidFill>
+                  <a:srgbClr val="222222"/>
+                </a:solidFill>
+                <a:latin typeface="Calibri"/>
+              </a:rPr>
+              <a:t> que </a:t>
+            </a:r>
+            <a:r>
+              <a:rPr sz="1400" dirty="0" err="1">
+                <a:solidFill>
+                  <a:srgbClr val="222222"/>
+                </a:solidFill>
+                <a:latin typeface="Calibri"/>
+              </a:rPr>
+              <a:t>os</a:t>
+            </a:r>
+            <a:r>
+              <a:rPr sz="1400" dirty="0">
+                <a:solidFill>
+                  <a:srgbClr val="222222"/>
+                </a:solidFill>
+                <a:latin typeface="Calibri"/>
+              </a:rPr>
+              <a:t> 6 </a:t>
+            </a:r>
+            <a:r>
+              <a:rPr sz="1400" dirty="0" err="1">
+                <a:solidFill>
+                  <a:srgbClr val="222222"/>
+                </a:solidFill>
+                <a:latin typeface="Calibri"/>
+              </a:rPr>
+              <a:t>melhores</a:t>
+            </a:r>
+            <a:r>
+              <a:rPr sz="1400" dirty="0">
+                <a:solidFill>
+                  <a:srgbClr val="222222"/>
+                </a:solidFill>
+                <a:latin typeface="Calibri"/>
+              </a:rPr>
+              <a:t> </a:t>
+            </a:r>
+            <a:r>
+              <a:rPr sz="1400" dirty="0" err="1">
+                <a:solidFill>
+                  <a:srgbClr val="222222"/>
+                </a:solidFill>
+                <a:latin typeface="Calibri"/>
+              </a:rPr>
+              <a:t>ficam</a:t>
+            </a:r>
+            <a:r>
+              <a:rPr sz="1400" dirty="0">
+                <a:solidFill>
+                  <a:srgbClr val="222222"/>
+                </a:solidFill>
+                <a:latin typeface="Calibri"/>
+              </a:rPr>
+              <a:t> no topo</a:t>
             </a:r>
           </a:p>
         </p:txBody>
@@ -3989,7 +4773,7 @@
           <a:noFill/>
         </p:spPr>
         <p:txBody>
-          <a:bodyPr wrap="square" lIns="45720" rIns="45720" tIns="18288" bIns="18288">
+          <a:bodyPr wrap="square" lIns="45720" tIns="18288" rIns="45720" bIns="18288">
             <a:spAutoFit/>
           </a:bodyPr>
           <a:lstStyle/>
@@ -4024,7 +4808,7 @@
           <a:noFill/>
         </p:spPr>
         <p:txBody>
-          <a:bodyPr wrap="square" lIns="45720" rIns="45720" tIns="18288" bIns="18288">
+          <a:bodyPr wrap="square" lIns="45720" tIns="18288" rIns="45720" bIns="18288">
             <a:spAutoFit/>
           </a:bodyPr>
           <a:lstStyle/>
@@ -4051,7 +4835,7 @@
 </file>
 
 <file path=ppt/slides/slide11.xml><?xml version="1.0" encoding="utf-8"?>
-<p:sld xmlns:a="http://schemas.openxmlformats.org/drawingml/2006/main" xmlns:p="http://schemas.openxmlformats.org/presentationml/2006/main" xmlns:r="http://schemas.openxmlformats.org/officeDocument/2006/relationships">
+<p:sld xmlns:a="http://schemas.openxmlformats.org/drawingml/2006/main" xmlns:r="http://schemas.openxmlformats.org/officeDocument/2006/relationships" xmlns:p="http://schemas.openxmlformats.org/presentationml/2006/main">
   <p:cSld>
     <p:spTree>
       <p:nvGrpSpPr>
@@ -4059,7 +4843,14 @@
         <p:cNvGrpSpPr/>
         <p:nvPr/>
       </p:nvGrpSpPr>
-      <p:grpSpPr/>
+      <p:grpSpPr>
+        <a:xfrm>
+          <a:off x="0" y="0"/>
+          <a:ext cx="0" cy="0"/>
+          <a:chOff x="0" y="0"/>
+          <a:chExt cx="0" cy="0"/>
+        </a:xfrm>
+      </p:grpSpPr>
       <p:sp>
         <p:nvSpPr>
           <p:cNvPr id="2" name="Rectangle 1"/>
@@ -4100,6 +4891,7 @@
           <a:lstStyle/>
           <a:p>
             <a:pPr algn="ctr"/>
+            <a:endParaRPr/>
           </a:p>
         </p:txBody>
       </p:sp>
@@ -4120,7 +4912,7 @@
           <a:noFill/>
         </p:spPr>
         <p:txBody>
-          <a:bodyPr wrap="square" lIns="45720" rIns="45720" tIns="18288" bIns="18288">
+          <a:bodyPr wrap="square" lIns="45720" tIns="18288" rIns="45720" bIns="18288">
             <a:spAutoFit/>
           </a:bodyPr>
           <a:lstStyle/>
@@ -4155,7 +4947,7 @@
           <a:noFill/>
         </p:spPr>
         <p:txBody>
-          <a:bodyPr wrap="square" lIns="45720" rIns="45720" tIns="18288" bIns="18288">
+          <a:bodyPr wrap="square" lIns="45720" tIns="18288" rIns="45720" bIns="18288">
             <a:spAutoFit/>
           </a:bodyPr>
           <a:lstStyle/>
@@ -4190,7 +4982,7 @@
           <a:noFill/>
         </p:spPr>
         <p:txBody>
-          <a:bodyPr wrap="square" lIns="45720" rIns="45720" tIns="18288" bIns="18288">
+          <a:bodyPr wrap="square" lIns="45720" tIns="18288" rIns="45720" bIns="18288">
             <a:spAutoFit/>
           </a:bodyPr>
           <a:lstStyle/>
@@ -4250,6 +5042,7 @@
           <a:lstStyle/>
           <a:p>
             <a:pPr algn="ctr"/>
+            <a:endParaRPr/>
           </a:p>
         </p:txBody>
       </p:sp>
@@ -4262,7 +5055,7 @@
         <p:spPr>
           <a:xfrm>
             <a:off x="731520" y="1874519"/>
-            <a:ext cx="5212080" cy="2194560"/>
+            <a:ext cx="5212080" cy="1760482"/>
           </a:xfrm>
           <a:prstGeom prst="rect">
             <a:avLst/>
@@ -4270,81 +5063,492 @@
           <a:noFill/>
         </p:spPr>
         <p:txBody>
-          <a:bodyPr wrap="square" lIns="45720" rIns="45720" tIns="18288" bIns="18288">
+          <a:bodyPr wrap="square" lIns="45720" tIns="18288" rIns="45720" bIns="18288">
             <a:spAutoFit/>
           </a:bodyPr>
           <a:lstStyle/>
           <a:p>
             <a:pPr algn="l"/>
             <a:r>
-              <a:rPr sz="1400" b="0">
-                <a:solidFill>
-                  <a:srgbClr val="222222"/>
-                </a:solidFill>
-                <a:latin typeface="Calibri"/>
-              </a:rPr>
-              <a:t>1. Pegamos os 6 melhores trechos</a:t>
-            </a:r>
-          </a:p>
-          <a:p>
-            <a:pPr algn="l"/>
-            <a:r>
-              <a:rPr sz="1400" b="0">
-                <a:solidFill>
-                  <a:srgbClr val="222222"/>
-                </a:solidFill>
-                <a:latin typeface="Calibri"/>
-              </a:rPr>
-              <a:t>2. Entregamos pra LLM (Gemini) com regras:</a:t>
-            </a:r>
-          </a:p>
-          <a:p>
-            <a:pPr algn="l"/>
-            <a:r>
-              <a:rPr sz="1400" b="0">
-                <a:solidFill>
-                  <a:srgbClr val="222222"/>
-                </a:solidFill>
-                <a:latin typeface="Calibri"/>
-              </a:rPr>
-              <a:t>    – cite a fonte de cada afirmação</a:t>
-            </a:r>
-          </a:p>
-          <a:p>
-            <a:pPr algn="l"/>
-            <a:r>
-              <a:rPr sz="1400" b="0">
-                <a:solidFill>
-                  <a:srgbClr val="222222"/>
-                </a:solidFill>
-                <a:latin typeface="Calibri"/>
-              </a:rPr>
-              <a:t>    – ignore texto revogado (~~...~~)</a:t>
-            </a:r>
-          </a:p>
-          <a:p>
-            <a:pPr algn="l"/>
-            <a:r>
-              <a:rPr sz="1400" b="0">
-                <a:solidFill>
-                  <a:srgbClr val="222222"/>
-                </a:solidFill>
-                <a:latin typeface="Calibri"/>
-              </a:rPr>
-              <a:t>    – se não souber, diga "não consta"</a:t>
-            </a:r>
-          </a:p>
-          <a:p>
-            <a:pPr algn="l"/>
-            <a:r>
-              <a:rPr sz="1400" b="0">
-                <a:solidFill>
-                  <a:srgbClr val="222222"/>
-                </a:solidFill>
-                <a:latin typeface="Calibri"/>
-              </a:rPr>
-              <a:t>3. LLM gera resposta + lista de citações</a:t>
-            </a:r>
+              <a:rPr sz="1400" b="0" dirty="0">
+                <a:solidFill>
+                  <a:srgbClr val="222222"/>
+                </a:solidFill>
+                <a:latin typeface="Calibri"/>
+              </a:rPr>
+              <a:t>1. </a:t>
+            </a:r>
+            <a:r>
+              <a:rPr sz="1400" b="0" dirty="0" err="1">
+                <a:solidFill>
+                  <a:srgbClr val="222222"/>
+                </a:solidFill>
+                <a:latin typeface="Calibri"/>
+              </a:rPr>
+              <a:t>Pegamos</a:t>
+            </a:r>
+            <a:r>
+              <a:rPr sz="1400" b="0" dirty="0">
+                <a:solidFill>
+                  <a:srgbClr val="222222"/>
+                </a:solidFill>
+                <a:latin typeface="Calibri"/>
+              </a:rPr>
+              <a:t> </a:t>
+            </a:r>
+            <a:r>
+              <a:rPr sz="1400" b="0" dirty="0" err="1">
+                <a:solidFill>
+                  <a:srgbClr val="222222"/>
+                </a:solidFill>
+                <a:latin typeface="Calibri"/>
+              </a:rPr>
+              <a:t>os</a:t>
+            </a:r>
+            <a:r>
+              <a:rPr sz="1400" b="0" dirty="0">
+                <a:solidFill>
+                  <a:srgbClr val="222222"/>
+                </a:solidFill>
+                <a:latin typeface="Calibri"/>
+              </a:rPr>
+              <a:t> </a:t>
+            </a:r>
+            <a:r>
+              <a:rPr lang="pt-BR" sz="1400" b="0" dirty="0">
+                <a:solidFill>
+                  <a:srgbClr val="222222"/>
+                </a:solidFill>
+                <a:latin typeface="Calibri"/>
+              </a:rPr>
+              <a:t>k</a:t>
+            </a:r>
+            <a:r>
+              <a:rPr sz="1400" b="0" dirty="0">
+                <a:solidFill>
+                  <a:srgbClr val="222222"/>
+                </a:solidFill>
+                <a:latin typeface="Calibri"/>
+              </a:rPr>
+              <a:t> </a:t>
+            </a:r>
+            <a:r>
+              <a:rPr sz="1400" b="0" dirty="0" err="1">
+                <a:solidFill>
+                  <a:srgbClr val="222222"/>
+                </a:solidFill>
+                <a:latin typeface="Calibri"/>
+              </a:rPr>
+              <a:t>melhores</a:t>
+            </a:r>
+            <a:r>
+              <a:rPr sz="1400" b="0" dirty="0">
+                <a:solidFill>
+                  <a:srgbClr val="222222"/>
+                </a:solidFill>
+                <a:latin typeface="Calibri"/>
+              </a:rPr>
+              <a:t> </a:t>
+            </a:r>
+            <a:r>
+              <a:rPr sz="1400" b="0" dirty="0" err="1">
+                <a:solidFill>
+                  <a:srgbClr val="222222"/>
+                </a:solidFill>
+                <a:latin typeface="Calibri"/>
+              </a:rPr>
+              <a:t>trechos</a:t>
+            </a:r>
+            <a:endParaRPr lang="pt-BR" sz="1400" b="0" dirty="0">
+              <a:solidFill>
+                <a:srgbClr val="222222"/>
+              </a:solidFill>
+              <a:latin typeface="Calibri"/>
+            </a:endParaRPr>
+          </a:p>
+          <a:p>
+            <a:pPr algn="l"/>
+            <a:endParaRPr sz="1400" b="0" dirty="0">
+              <a:solidFill>
+                <a:srgbClr val="222222"/>
+              </a:solidFill>
+              <a:latin typeface="Calibri"/>
+            </a:endParaRPr>
+          </a:p>
+          <a:p>
+            <a:pPr algn="l"/>
+            <a:r>
+              <a:rPr sz="1400" b="0" dirty="0">
+                <a:solidFill>
+                  <a:srgbClr val="222222"/>
+                </a:solidFill>
+                <a:latin typeface="Calibri"/>
+              </a:rPr>
+              <a:t>2. </a:t>
+            </a:r>
+            <a:r>
+              <a:rPr sz="1400" b="0" dirty="0" err="1">
+                <a:solidFill>
+                  <a:srgbClr val="222222"/>
+                </a:solidFill>
+                <a:latin typeface="Calibri"/>
+              </a:rPr>
+              <a:t>Entregamos</a:t>
+            </a:r>
+            <a:r>
+              <a:rPr sz="1400" b="0" dirty="0">
+                <a:solidFill>
+                  <a:srgbClr val="222222"/>
+                </a:solidFill>
+                <a:latin typeface="Calibri"/>
+              </a:rPr>
+              <a:t> </a:t>
+            </a:r>
+            <a:r>
+              <a:rPr sz="1400" b="0" dirty="0" err="1">
+                <a:solidFill>
+                  <a:srgbClr val="222222"/>
+                </a:solidFill>
+                <a:latin typeface="Calibri"/>
+              </a:rPr>
+              <a:t>pra</a:t>
+            </a:r>
+            <a:r>
+              <a:rPr sz="1400" b="0" dirty="0">
+                <a:solidFill>
+                  <a:srgbClr val="222222"/>
+                </a:solidFill>
+                <a:latin typeface="Calibri"/>
+              </a:rPr>
+              <a:t> LLM (Gemini) com </a:t>
+            </a:r>
+            <a:r>
+              <a:rPr sz="1400" b="0" dirty="0" err="1">
+                <a:solidFill>
+                  <a:srgbClr val="222222"/>
+                </a:solidFill>
+                <a:latin typeface="Calibri"/>
+              </a:rPr>
+              <a:t>regras</a:t>
+            </a:r>
+            <a:r>
+              <a:rPr sz="1400" b="0" dirty="0">
+                <a:solidFill>
+                  <a:srgbClr val="222222"/>
+                </a:solidFill>
+                <a:latin typeface="Calibri"/>
+              </a:rPr>
+              <a:t>:</a:t>
+            </a:r>
+          </a:p>
+          <a:p>
+            <a:pPr algn="l"/>
+            <a:r>
+              <a:rPr sz="1400" b="0" dirty="0">
+                <a:solidFill>
+                  <a:srgbClr val="222222"/>
+                </a:solidFill>
+                <a:latin typeface="Calibri"/>
+              </a:rPr>
+              <a:t>    – cite a </a:t>
+            </a:r>
+            <a:r>
+              <a:rPr sz="1400" b="0" dirty="0" err="1">
+                <a:solidFill>
+                  <a:srgbClr val="222222"/>
+                </a:solidFill>
+                <a:latin typeface="Calibri"/>
+              </a:rPr>
+              <a:t>fonte</a:t>
+            </a:r>
+            <a:r>
+              <a:rPr sz="1400" b="0" dirty="0">
+                <a:solidFill>
+                  <a:srgbClr val="222222"/>
+                </a:solidFill>
+                <a:latin typeface="Calibri"/>
+              </a:rPr>
+              <a:t> de </a:t>
+            </a:r>
+            <a:r>
+              <a:rPr sz="1400" b="0" dirty="0" err="1">
+                <a:solidFill>
+                  <a:srgbClr val="222222"/>
+                </a:solidFill>
+                <a:latin typeface="Calibri"/>
+              </a:rPr>
+              <a:t>cada</a:t>
+            </a:r>
+            <a:r>
+              <a:rPr sz="1400" b="0" dirty="0">
+                <a:solidFill>
+                  <a:srgbClr val="222222"/>
+                </a:solidFill>
+                <a:latin typeface="Calibri"/>
+              </a:rPr>
+              <a:t> </a:t>
+            </a:r>
+            <a:r>
+              <a:rPr sz="1400" b="0" dirty="0" err="1">
+                <a:solidFill>
+                  <a:srgbClr val="222222"/>
+                </a:solidFill>
+                <a:latin typeface="Calibri"/>
+              </a:rPr>
+              <a:t>afirmação</a:t>
+            </a:r>
+            <a:endParaRPr sz="1400" b="0" dirty="0">
+              <a:solidFill>
+                <a:srgbClr val="222222"/>
+              </a:solidFill>
+              <a:latin typeface="Calibri"/>
+            </a:endParaRPr>
+          </a:p>
+          <a:p>
+            <a:pPr algn="l"/>
+            <a:r>
+              <a:rPr sz="1400" b="0" dirty="0">
+                <a:solidFill>
+                  <a:srgbClr val="222222"/>
+                </a:solidFill>
+                <a:latin typeface="Calibri"/>
+              </a:rPr>
+              <a:t>    – ignore </a:t>
+            </a:r>
+            <a:r>
+              <a:rPr sz="1400" b="0" dirty="0" err="1">
+                <a:solidFill>
+                  <a:srgbClr val="222222"/>
+                </a:solidFill>
+                <a:latin typeface="Calibri"/>
+              </a:rPr>
+              <a:t>texto</a:t>
+            </a:r>
+            <a:r>
+              <a:rPr sz="1400" b="0" dirty="0">
+                <a:solidFill>
+                  <a:srgbClr val="222222"/>
+                </a:solidFill>
+                <a:latin typeface="Calibri"/>
+              </a:rPr>
+              <a:t> </a:t>
+            </a:r>
+            <a:r>
+              <a:rPr sz="1400" b="0" dirty="0" err="1">
+                <a:solidFill>
+                  <a:srgbClr val="222222"/>
+                </a:solidFill>
+                <a:latin typeface="Calibri"/>
+              </a:rPr>
+              <a:t>revogado</a:t>
+            </a:r>
+            <a:r>
+              <a:rPr sz="1400" b="0" dirty="0">
+                <a:solidFill>
+                  <a:srgbClr val="222222"/>
+                </a:solidFill>
+                <a:latin typeface="Calibri"/>
+              </a:rPr>
+              <a:t> (~~...~~)</a:t>
+            </a:r>
+          </a:p>
+          <a:p>
+            <a:pPr algn="l"/>
+            <a:r>
+              <a:rPr sz="1400" b="0" dirty="0">
+                <a:solidFill>
+                  <a:srgbClr val="222222"/>
+                </a:solidFill>
+                <a:latin typeface="Calibri"/>
+              </a:rPr>
+              <a:t>    – se </a:t>
+            </a:r>
+            <a:r>
+              <a:rPr sz="1400" b="0" dirty="0" err="1">
+                <a:solidFill>
+                  <a:srgbClr val="222222"/>
+                </a:solidFill>
+                <a:latin typeface="Calibri"/>
+              </a:rPr>
+              <a:t>não</a:t>
+            </a:r>
+            <a:r>
+              <a:rPr sz="1400" b="0" dirty="0">
+                <a:solidFill>
+                  <a:srgbClr val="222222"/>
+                </a:solidFill>
+                <a:latin typeface="Calibri"/>
+              </a:rPr>
+              <a:t> </a:t>
+            </a:r>
+            <a:r>
+              <a:rPr sz="1400" b="0" dirty="0" err="1">
+                <a:solidFill>
+                  <a:srgbClr val="222222"/>
+                </a:solidFill>
+                <a:latin typeface="Calibri"/>
+              </a:rPr>
+              <a:t>souber</a:t>
+            </a:r>
+            <a:r>
+              <a:rPr sz="1400" b="0" dirty="0">
+                <a:solidFill>
+                  <a:srgbClr val="222222"/>
+                </a:solidFill>
+                <a:latin typeface="Calibri"/>
+              </a:rPr>
+              <a:t>, </a:t>
+            </a:r>
+            <a:r>
+              <a:rPr sz="1400" b="0" dirty="0" err="1">
+                <a:solidFill>
+                  <a:srgbClr val="222222"/>
+                </a:solidFill>
+                <a:latin typeface="Calibri"/>
+              </a:rPr>
+              <a:t>diga</a:t>
+            </a:r>
+            <a:r>
+              <a:rPr sz="1400" b="0" dirty="0">
+                <a:solidFill>
+                  <a:srgbClr val="222222"/>
+                </a:solidFill>
+                <a:latin typeface="Calibri"/>
+              </a:rPr>
+              <a:t> "</a:t>
+            </a:r>
+            <a:r>
+              <a:rPr sz="1400" b="0" dirty="0" err="1">
+                <a:solidFill>
+                  <a:srgbClr val="222222"/>
+                </a:solidFill>
+                <a:latin typeface="Calibri"/>
+              </a:rPr>
+              <a:t>não</a:t>
+            </a:r>
+            <a:r>
+              <a:rPr sz="1400" b="0" dirty="0">
+                <a:solidFill>
+                  <a:srgbClr val="222222"/>
+                </a:solidFill>
+                <a:latin typeface="Calibri"/>
+              </a:rPr>
+              <a:t> </a:t>
+            </a:r>
+            <a:r>
+              <a:rPr sz="1400" b="0" dirty="0" err="1">
+                <a:solidFill>
+                  <a:srgbClr val="222222"/>
+                </a:solidFill>
+                <a:latin typeface="Calibri"/>
+              </a:rPr>
+              <a:t>consta</a:t>
+            </a:r>
+            <a:r>
+              <a:rPr sz="1400" b="0" dirty="0">
+                <a:solidFill>
+                  <a:srgbClr val="222222"/>
+                </a:solidFill>
+                <a:latin typeface="Calibri"/>
+              </a:rPr>
+              <a:t>"</a:t>
+            </a:r>
+            <a:endParaRPr lang="pt-BR" sz="1400" b="0" dirty="0">
+              <a:solidFill>
+                <a:srgbClr val="222222"/>
+              </a:solidFill>
+              <a:latin typeface="Calibri"/>
+            </a:endParaRPr>
+          </a:p>
+          <a:p>
+            <a:pPr algn="l"/>
+            <a:endParaRPr sz="1400" b="0" dirty="0">
+              <a:solidFill>
+                <a:srgbClr val="222222"/>
+              </a:solidFill>
+              <a:latin typeface="Calibri"/>
+            </a:endParaRPr>
+          </a:p>
+          <a:p>
+            <a:pPr algn="l"/>
+            <a:r>
+              <a:rPr sz="1400" b="0" dirty="0">
+                <a:solidFill>
+                  <a:srgbClr val="222222"/>
+                </a:solidFill>
+                <a:latin typeface="Calibri"/>
+              </a:rPr>
+              <a:t>3. LLM </a:t>
+            </a:r>
+            <a:r>
+              <a:rPr sz="1400" b="0" dirty="0" err="1">
+                <a:solidFill>
+                  <a:srgbClr val="222222"/>
+                </a:solidFill>
+                <a:latin typeface="Calibri"/>
+              </a:rPr>
+              <a:t>gera</a:t>
+            </a:r>
+            <a:r>
+              <a:rPr sz="1400" b="0" dirty="0">
+                <a:solidFill>
+                  <a:srgbClr val="222222"/>
+                </a:solidFill>
+                <a:latin typeface="Calibri"/>
+              </a:rPr>
+              <a:t> </a:t>
+            </a:r>
+            <a:r>
+              <a:rPr sz="1400" b="0" dirty="0" err="1">
+                <a:solidFill>
+                  <a:srgbClr val="222222"/>
+                </a:solidFill>
+                <a:latin typeface="Calibri"/>
+              </a:rPr>
+              <a:t>resposta</a:t>
+            </a:r>
+            <a:r>
+              <a:rPr sz="1400" b="0" dirty="0">
+                <a:solidFill>
+                  <a:srgbClr val="222222"/>
+                </a:solidFill>
+                <a:latin typeface="Calibri"/>
+              </a:rPr>
+              <a:t> + </a:t>
+            </a:r>
+            <a:r>
+              <a:rPr sz="1400" b="0" dirty="0" err="1">
+                <a:solidFill>
+                  <a:srgbClr val="222222"/>
+                </a:solidFill>
+                <a:latin typeface="Calibri"/>
+              </a:rPr>
+              <a:t>lista</a:t>
+            </a:r>
+            <a:r>
+              <a:rPr sz="1400" b="0" dirty="0">
+                <a:solidFill>
+                  <a:srgbClr val="222222"/>
+                </a:solidFill>
+                <a:latin typeface="Calibri"/>
+              </a:rPr>
+              <a:t> de </a:t>
+            </a:r>
+            <a:r>
+              <a:rPr sz="1400" b="0" dirty="0" err="1">
+                <a:solidFill>
+                  <a:srgbClr val="222222"/>
+                </a:solidFill>
+                <a:latin typeface="Calibri"/>
+              </a:rPr>
+              <a:t>citações</a:t>
+            </a:r>
+            <a:endParaRPr sz="1400" b="0" dirty="0">
+              <a:solidFill>
+                <a:srgbClr val="222222"/>
+              </a:solidFill>
+              <a:latin typeface="Calibri"/>
+            </a:endParaRPr>
           </a:p>
         </p:txBody>
       </p:sp>
@@ -4365,7 +5569,7 @@
           <a:noFill/>
         </p:spPr>
         <p:txBody>
-          <a:bodyPr wrap="square" lIns="45720" rIns="45720" tIns="18288" bIns="18288">
+          <a:bodyPr wrap="square" lIns="45720" tIns="18288" rIns="45720" bIns="18288">
             <a:spAutoFit/>
           </a:bodyPr>
           <a:lstStyle/>
@@ -4400,7 +5604,7 @@
           <a:noFill/>
         </p:spPr>
         <p:txBody>
-          <a:bodyPr wrap="square" lIns="45720" rIns="45720" tIns="18288" bIns="18288">
+          <a:bodyPr wrap="square" lIns="45720" tIns="18288" rIns="45720" bIns="18288">
             <a:spAutoFit/>
           </a:bodyPr>
           <a:lstStyle/>
@@ -4459,7 +5663,7 @@
           <a:noFill/>
         </p:spPr>
         <p:txBody>
-          <a:bodyPr wrap="square" lIns="45720" rIns="45720" tIns="18288" bIns="18288">
+          <a:bodyPr wrap="square" lIns="45720" tIns="18288" rIns="45720" bIns="18288">
             <a:spAutoFit/>
           </a:bodyPr>
           <a:lstStyle/>
@@ -4494,7 +5698,7 @@
           <a:noFill/>
         </p:spPr>
         <p:txBody>
-          <a:bodyPr wrap="square" lIns="45720" rIns="45720" tIns="18288" bIns="18288">
+          <a:bodyPr wrap="square" lIns="45720" tIns="18288" rIns="45720" bIns="18288">
             <a:spAutoFit/>
           </a:bodyPr>
           <a:lstStyle/>
@@ -4660,7 +5864,7 @@
           <a:noFill/>
         </p:spPr>
         <p:txBody>
-          <a:bodyPr wrap="square" lIns="45720" rIns="45720" tIns="18288" bIns="18288">
+          <a:bodyPr wrap="square" lIns="45720" tIns="18288" rIns="45720" bIns="18288">
             <a:spAutoFit/>
           </a:bodyPr>
           <a:lstStyle/>
@@ -4707,7 +5911,7 @@
           <a:noFill/>
         </p:spPr>
         <p:txBody>
-          <a:bodyPr wrap="square" lIns="45720" rIns="45720" tIns="18288" bIns="18288">
+          <a:bodyPr wrap="square" lIns="45720" tIns="18288" rIns="45720" bIns="18288">
             <a:spAutoFit/>
           </a:bodyPr>
           <a:lstStyle/>
@@ -4742,7 +5946,7 @@
           <a:noFill/>
         </p:spPr>
         <p:txBody>
-          <a:bodyPr wrap="square" lIns="45720" rIns="45720" tIns="18288" bIns="18288">
+          <a:bodyPr wrap="square" lIns="45720" tIns="18288" rIns="45720" bIns="18288">
             <a:spAutoFit/>
           </a:bodyPr>
           <a:lstStyle/>
@@ -4769,7 +5973,7 @@
 </file>
 
 <file path=ppt/slides/slide12.xml><?xml version="1.0" encoding="utf-8"?>
-<p:sld xmlns:a="http://schemas.openxmlformats.org/drawingml/2006/main" xmlns:p="http://schemas.openxmlformats.org/presentationml/2006/main" xmlns:r="http://schemas.openxmlformats.org/officeDocument/2006/relationships">
+<p:sld xmlns:a="http://schemas.openxmlformats.org/drawingml/2006/main" xmlns:r="http://schemas.openxmlformats.org/officeDocument/2006/relationships" xmlns:p="http://schemas.openxmlformats.org/presentationml/2006/main">
   <p:cSld>
     <p:spTree>
       <p:nvGrpSpPr>
@@ -4777,7 +5981,14 @@
         <p:cNvGrpSpPr/>
         <p:nvPr/>
       </p:nvGrpSpPr>
-      <p:grpSpPr/>
+      <p:grpSpPr>
+        <a:xfrm>
+          <a:off x="0" y="0"/>
+          <a:ext cx="0" cy="0"/>
+          <a:chOff x="0" y="0"/>
+          <a:chExt cx="0" cy="0"/>
+        </a:xfrm>
+      </p:grpSpPr>
       <p:sp>
         <p:nvSpPr>
           <p:cNvPr id="2" name="Rectangle 1"/>
@@ -4818,6 +6029,7 @@
           <a:lstStyle/>
           <a:p>
             <a:pPr algn="ctr"/>
+            <a:endParaRPr/>
           </a:p>
         </p:txBody>
       </p:sp>
@@ -4838,7 +6050,7 @@
           <a:noFill/>
         </p:spPr>
         <p:txBody>
-          <a:bodyPr wrap="square" lIns="45720" rIns="45720" tIns="18288" bIns="18288">
+          <a:bodyPr wrap="square" lIns="45720" tIns="18288" rIns="45720" bIns="18288">
             <a:spAutoFit/>
           </a:bodyPr>
           <a:lstStyle/>
@@ -4873,7 +6085,7 @@
           <a:noFill/>
         </p:spPr>
         <p:txBody>
-          <a:bodyPr wrap="square" lIns="45720" rIns="45720" tIns="18288" bIns="18288">
+          <a:bodyPr wrap="square" lIns="45720" tIns="18288" rIns="45720" bIns="18288">
             <a:spAutoFit/>
           </a:bodyPr>
           <a:lstStyle/>
@@ -4908,7 +6120,7 @@
           <a:noFill/>
         </p:spPr>
         <p:txBody>
-          <a:bodyPr wrap="square" lIns="45720" rIns="45720" tIns="18288" bIns="18288">
+          <a:bodyPr wrap="square" lIns="45720" tIns="18288" rIns="45720" bIns="18288">
             <a:spAutoFit/>
           </a:bodyPr>
           <a:lstStyle/>
@@ -5014,7 +6226,7 @@
           <a:noFill/>
         </p:spPr>
         <p:txBody>
-          <a:bodyPr wrap="square" lIns="45720" rIns="45720" tIns="18288" bIns="18288">
+          <a:bodyPr wrap="square" lIns="45720" tIns="18288" rIns="45720" bIns="18288">
             <a:spAutoFit/>
           </a:bodyPr>
           <a:lstStyle/>
@@ -5105,14 +6317,14 @@
       </p:sp>
       <p:sp>
         <p:nvSpPr>
-          <p:cNvPr id="9" name="TextBox 8"/>
+          <p:cNvPr id="11" name="TextBox 10"/>
           <p:cNvSpPr txBox="1"/>
           <p:nvPr/>
         </p:nvSpPr>
         <p:spPr>
           <a:xfrm>
-            <a:off x="548640" y="5029200"/>
-            <a:ext cx="10972800" cy="365760"/>
+            <a:off x="457200" y="6492240"/>
+            <a:ext cx="7315200" cy="274320"/>
           </a:xfrm>
           <a:prstGeom prst="rect">
             <a:avLst/>
@@ -5120,87 +6332,13 @@
           <a:noFill/>
         </p:spPr>
         <p:txBody>
-          <a:bodyPr wrap="square" lIns="45720" rIns="45720" tIns="18288" bIns="18288">
+          <a:bodyPr wrap="square" lIns="45720" tIns="18288" rIns="45720" bIns="18288">
             <a:spAutoFit/>
           </a:bodyPr>
           <a:lstStyle/>
           <a:p>
             <a:pPr algn="l"/>
             <a:r>
-              <a:rPr sz="2200" b="1">
-                <a:solidFill>
-                  <a:srgbClr val="1A4480"/>
-                </a:solidFill>
-                <a:latin typeface="Calibri"/>
-              </a:rPr>
-              <a:t>🚀 Próximos passos</a:t>
-            </a:r>
-          </a:p>
-        </p:txBody>
-      </p:sp>
-      <p:sp>
-        <p:nvSpPr>
-          <p:cNvPr id="10" name="TextBox 9"/>
-          <p:cNvSpPr txBox="1"/>
-          <p:nvPr/>
-        </p:nvSpPr>
-        <p:spPr>
-          <a:xfrm>
-            <a:off x="731520" y="5532120"/>
-            <a:ext cx="10972800" cy="1371600"/>
-          </a:xfrm>
-          <a:prstGeom prst="rect">
-            <a:avLst/>
-          </a:prstGeom>
-          <a:noFill/>
-        </p:spPr>
-        <p:txBody>
-          <a:bodyPr wrap="square">
-            <a:spAutoFit/>
-          </a:bodyPr>
-          <a:lstStyle/>
-          <a:p>
-            <a:pPr>
-              <a:spcAft>
-                <a:spcPts val="400"/>
-              </a:spcAft>
-            </a:pPr>
-            <a:r>
-              <a:rPr sz="1400">
-                <a:solidFill>
-                  <a:srgbClr val="222222"/>
-                </a:solidFill>
-                <a:latin typeface="Calibri"/>
-              </a:rPr>
-              <a:t>• Testar variações de tamanho de chunk · LLM reescrevendo a pergunta antes de buscar · cache de buscas frequentes</a:t>
-            </a:r>
-          </a:p>
-        </p:txBody>
-      </p:sp>
-      <p:sp>
-        <p:nvSpPr>
-          <p:cNvPr id="11" name="TextBox 10"/>
-          <p:cNvSpPr txBox="1"/>
-          <p:nvPr/>
-        </p:nvSpPr>
-        <p:spPr>
-          <a:xfrm>
-            <a:off x="457200" y="6492240"/>
-            <a:ext cx="7315200" cy="274320"/>
-          </a:xfrm>
-          <a:prstGeom prst="rect">
-            <a:avLst/>
-          </a:prstGeom>
-          <a:noFill/>
-        </p:spPr>
-        <p:txBody>
-          <a:bodyPr wrap="square" lIns="45720" rIns="45720" tIns="18288" bIns="18288">
-            <a:spAutoFit/>
-          </a:bodyPr>
-          <a:lstStyle/>
-          <a:p>
-            <a:pPr algn="l"/>
-            <a:r>
               <a:rPr sz="1000" b="0">
                 <a:solidFill>
                   <a:srgbClr val="555555"/>
@@ -5229,7 +6367,7 @@
           <a:noFill/>
         </p:spPr>
         <p:txBody>
-          <a:bodyPr wrap="square" lIns="45720" rIns="45720" tIns="18288" bIns="18288">
+          <a:bodyPr wrap="square" lIns="45720" tIns="18288" rIns="45720" bIns="18288">
             <a:spAutoFit/>
           </a:bodyPr>
           <a:lstStyle/>
@@ -5256,7 +6394,7 @@
 </file>
 
 <file path=ppt/slides/slide13.xml><?xml version="1.0" encoding="utf-8"?>
-<p:sld xmlns:a="http://schemas.openxmlformats.org/drawingml/2006/main" xmlns:p="http://schemas.openxmlformats.org/presentationml/2006/main" xmlns:r="http://schemas.openxmlformats.org/officeDocument/2006/relationships">
+<p:sld xmlns:a="http://schemas.openxmlformats.org/drawingml/2006/main" xmlns:r="http://schemas.openxmlformats.org/officeDocument/2006/relationships" xmlns:p="http://schemas.openxmlformats.org/presentationml/2006/main">
   <p:cSld>
     <p:spTree>
       <p:nvGrpSpPr>
@@ -5264,7 +6402,14 @@
         <p:cNvGrpSpPr/>
         <p:nvPr/>
       </p:nvGrpSpPr>
-      <p:grpSpPr/>
+      <p:grpSpPr>
+        <a:xfrm>
+          <a:off x="0" y="0"/>
+          <a:ext cx="0" cy="0"/>
+          <a:chOff x="0" y="0"/>
+          <a:chExt cx="0" cy="0"/>
+        </a:xfrm>
+      </p:grpSpPr>
       <p:sp>
         <p:nvSpPr>
           <p:cNvPr id="2" name="Rectangle 1"/>
@@ -5305,6 +6450,7 @@
           <a:lstStyle/>
           <a:p>
             <a:pPr algn="ctr"/>
+            <a:endParaRPr/>
           </a:p>
         </p:txBody>
       </p:sp>
@@ -5325,7 +6471,7 @@
           <a:noFill/>
         </p:spPr>
         <p:txBody>
-          <a:bodyPr wrap="square" lIns="45720" rIns="45720" tIns="18288" bIns="18288">
+          <a:bodyPr wrap="square" lIns="45720" tIns="18288" rIns="45720" bIns="18288">
             <a:spAutoFit/>
           </a:bodyPr>
           <a:lstStyle/>
@@ -5360,7 +6506,7 @@
           <a:noFill/>
         </p:spPr>
         <p:txBody>
-          <a:bodyPr wrap="square" lIns="45720" rIns="45720" tIns="18288" bIns="18288">
+          <a:bodyPr wrap="square" lIns="45720" tIns="18288" rIns="45720" bIns="18288">
             <a:spAutoFit/>
           </a:bodyPr>
           <a:lstStyle/>
@@ -5384,7 +6530,13 @@
           <p:cNvGraphicFramePr>
             <a:graphicFrameLocks noGrp="1"/>
           </p:cNvGraphicFramePr>
-          <p:nvPr/>
+          <p:nvPr>
+            <p:extLst>
+              <p:ext uri="{D42A27DB-BD31-4B8C-83A1-F6EECF244321}">
+                <p14:modId xmlns:p14="http://schemas.microsoft.com/office/powerpoint/2010/main" val="3690043225"/>
+              </p:ext>
+            </p:extLst>
+          </p:nvPr>
         </p:nvGraphicFramePr>
         <p:xfrm>
           <a:off x="365760" y="1188720"/>
@@ -5397,14 +6549,32 @@
                 <a:tableStyleId>{5C22544A-7EE6-4342-B048-85BDC9FD1C3A}</a:tableStyleId>
               </a:tblPr>
               <a:tblGrid>
-                <a:gridCol w="2637692"/>
-                <a:gridCol w="3516923"/>
-                <a:gridCol w="5275384"/>
+                <a:gridCol w="2637692">
+                  <a:extLst>
+                    <a:ext uri="{9D8B030D-6E8A-4147-A177-3AD203B41FA5}">
+                      <a16:colId xmlns:a16="http://schemas.microsoft.com/office/drawing/2014/main" val="20000"/>
+                    </a:ext>
+                  </a:extLst>
+                </a:gridCol>
+                <a:gridCol w="3516923">
+                  <a:extLst>
+                    <a:ext uri="{9D8B030D-6E8A-4147-A177-3AD203B41FA5}">
+                      <a16:colId xmlns:a16="http://schemas.microsoft.com/office/drawing/2014/main" val="20001"/>
+                    </a:ext>
+                  </a:extLst>
+                </a:gridCol>
+                <a:gridCol w="5275384">
+                  <a:extLst>
+                    <a:ext uri="{9D8B030D-6E8A-4147-A177-3AD203B41FA5}">
+                      <a16:colId xmlns:a16="http://schemas.microsoft.com/office/drawing/2014/main" val="20002"/>
+                    </a:ext>
+                  </a:extLst>
+                </a:gridCol>
               </a:tblGrid>
               <a:tr h="493776">
                 <a:tc>
                   <a:txBody>
-                    <a:bodyPr wrap="square" lIns="73152" rIns="73152"/>
+                    <a:bodyPr/>
                     <a:lstStyle/>
                     <a:p>
                       <a:r>
@@ -5426,7 +6596,7 @@
                 </a:tc>
                 <a:tc>
                   <a:txBody>
-                    <a:bodyPr wrap="square" lIns="73152" rIns="73152"/>
+                    <a:bodyPr/>
                     <a:lstStyle/>
                     <a:p>
                       <a:r>
@@ -5448,7 +6618,7 @@
                 </a:tc>
                 <a:tc>
                   <a:txBody>
-                    <a:bodyPr wrap="square" lIns="73152" rIns="73152"/>
+                    <a:bodyPr/>
                     <a:lstStyle/>
                     <a:p>
                       <a:r>
@@ -5468,11 +6638,16 @@
                     </a:solidFill>
                   </a:tcPr>
                 </a:tc>
+                <a:extLst>
+                  <a:ext uri="{0D108BD9-81ED-4DB2-BD59-A6C34878D82A}">
+                    <a16:rowId xmlns:a16="http://schemas.microsoft.com/office/drawing/2014/main" val="10000"/>
+                  </a:ext>
+                </a:extLst>
               </a:tr>
               <a:tr h="493776">
                 <a:tc>
                   <a:txBody>
-                    <a:bodyPr wrap="square" lIns="73152" rIns="73152"/>
+                    <a:bodyPr/>
                     <a:lstStyle/>
                     <a:p>
                       <a:r>
@@ -5494,7 +6669,7 @@
                 </a:tc>
                 <a:tc>
                   <a:txBody>
-                    <a:bodyPr wrap="square" lIns="73152" rIns="73152"/>
+                    <a:bodyPr/>
                     <a:lstStyle/>
                     <a:p>
                       <a:r>
@@ -5516,7 +6691,7 @@
                 </a:tc>
                 <a:tc>
                   <a:txBody>
-                    <a:bodyPr wrap="square" lIns="73152" rIns="73152"/>
+                    <a:bodyPr/>
                     <a:lstStyle/>
                     <a:p>
                       <a:r>
@@ -5536,11 +6711,16 @@
                     </a:solidFill>
                   </a:tcPr>
                 </a:tc>
+                <a:extLst>
+                  <a:ext uri="{0D108BD9-81ED-4DB2-BD59-A6C34878D82A}">
+                    <a16:rowId xmlns:a16="http://schemas.microsoft.com/office/drawing/2014/main" val="10001"/>
+                  </a:ext>
+                </a:extLst>
               </a:tr>
               <a:tr h="493776">
                 <a:tc>
                   <a:txBody>
-                    <a:bodyPr wrap="square" lIns="73152" rIns="73152"/>
+                    <a:bodyPr/>
                     <a:lstStyle/>
                     <a:p>
                       <a:r>
@@ -5562,7 +6742,7 @@
                 </a:tc>
                 <a:tc>
                   <a:txBody>
-                    <a:bodyPr wrap="square" lIns="73152" rIns="73152"/>
+                    <a:bodyPr/>
                     <a:lstStyle/>
                     <a:p>
                       <a:r>
@@ -5584,7 +6764,7 @@
                 </a:tc>
                 <a:tc>
                   <a:txBody>
-                    <a:bodyPr wrap="square" lIns="73152" rIns="73152"/>
+                    <a:bodyPr/>
                     <a:lstStyle/>
                     <a:p>
                       <a:r>
@@ -5604,11 +6784,16 @@
                     </a:solidFill>
                   </a:tcPr>
                 </a:tc>
+                <a:extLst>
+                  <a:ext uri="{0D108BD9-81ED-4DB2-BD59-A6C34878D82A}">
+                    <a16:rowId xmlns:a16="http://schemas.microsoft.com/office/drawing/2014/main" val="10002"/>
+                  </a:ext>
+                </a:extLst>
               </a:tr>
               <a:tr h="493776">
                 <a:tc>
                   <a:txBody>
-                    <a:bodyPr wrap="square" lIns="73152" rIns="73152"/>
+                    <a:bodyPr/>
                     <a:lstStyle/>
                     <a:p>
                       <a:r>
@@ -5630,7 +6815,7 @@
                 </a:tc>
                 <a:tc>
                   <a:txBody>
-                    <a:bodyPr wrap="square" lIns="73152" rIns="73152"/>
+                    <a:bodyPr/>
                     <a:lstStyle/>
                     <a:p>
                       <a:r>
@@ -5652,7 +6837,7 @@
                 </a:tc>
                 <a:tc>
                   <a:txBody>
-                    <a:bodyPr wrap="square" lIns="73152" rIns="73152"/>
+                    <a:bodyPr/>
                     <a:lstStyle/>
                     <a:p>
                       <a:r>
@@ -5672,22 +6857,33 @@
                     </a:solidFill>
                   </a:tcPr>
                 </a:tc>
+                <a:extLst>
+                  <a:ext uri="{0D108BD9-81ED-4DB2-BD59-A6C34878D82A}">
+                    <a16:rowId xmlns:a16="http://schemas.microsoft.com/office/drawing/2014/main" val="10003"/>
+                  </a:ext>
+                </a:extLst>
               </a:tr>
               <a:tr h="493776">
                 <a:tc>
                   <a:txBody>
-                    <a:bodyPr wrap="square" lIns="73152" rIns="73152"/>
+                    <a:bodyPr/>
                     <a:lstStyle/>
                     <a:p>
                       <a:r>
-                        <a:rPr sz="1200">
+                        <a:rPr lang="pt-BR" sz="1200" dirty="0" err="1">
                           <a:solidFill>
                             <a:srgbClr val="222222"/>
                           </a:solidFill>
                           <a:latin typeface="Calibri"/>
                         </a:rPr>
-                        <a:t>Cortar em pedaços</a:t>
+                        <a:t>Chunk</a:t>
                       </a:r>
+                      <a:endParaRPr sz="1200" dirty="0">
+                        <a:solidFill>
+                          <a:srgbClr val="222222"/>
+                        </a:solidFill>
+                        <a:latin typeface="Calibri"/>
+                      </a:endParaRPr>
                     </a:p>
                   </a:txBody>
                   <a:tcPr>
@@ -5698,18 +6894,42 @@
                 </a:tc>
                 <a:tc>
                   <a:txBody>
-                    <a:bodyPr wrap="square" lIns="73152" rIns="73152"/>
+                    <a:bodyPr/>
                     <a:lstStyle/>
                     <a:p>
                       <a:r>
-                        <a:rPr sz="1200">
+                        <a:rPr lang="pt-BR" sz="1200" dirty="0">
                           <a:solidFill>
                             <a:srgbClr val="222222"/>
                           </a:solidFill>
                           <a:latin typeface="Calibri"/>
                         </a:rPr>
-                        <a:t>Lógica própria</a:t>
+                        <a:t>Cascata (</a:t>
                       </a:r>
+                      <a:r>
+                        <a:rPr lang="pt-BR" sz="1200" dirty="0" err="1">
+                          <a:solidFill>
+                            <a:srgbClr val="222222"/>
+                          </a:solidFill>
+                          <a:latin typeface="Calibri"/>
+                        </a:rPr>
+                        <a:t>Regex</a:t>
+                      </a:r>
+                      <a:r>
+                        <a:rPr lang="pt-BR" sz="1200" dirty="0">
+                          <a:solidFill>
+                            <a:srgbClr val="222222"/>
+                          </a:solidFill>
+                          <a:latin typeface="Calibri"/>
+                        </a:rPr>
+                        <a:t> + Janela deslizante + fusão)</a:t>
+                      </a:r>
+                      <a:endParaRPr sz="1200" dirty="0">
+                        <a:solidFill>
+                          <a:srgbClr val="222222"/>
+                        </a:solidFill>
+                        <a:latin typeface="Calibri"/>
+                      </a:endParaRPr>
                     </a:p>
                   </a:txBody>
                   <a:tcPr>
@@ -5720,7 +6940,7 @@
                 </a:tc>
                 <a:tc>
                   <a:txBody>
-                    <a:bodyPr wrap="square" lIns="73152" rIns="73152"/>
+                    <a:bodyPr/>
                     <a:lstStyle/>
                     <a:p>
                       <a:r>
@@ -5740,22 +6960,42 @@
                     </a:solidFill>
                   </a:tcPr>
                 </a:tc>
+                <a:extLst>
+                  <a:ext uri="{0D108BD9-81ED-4DB2-BD59-A6C34878D82A}">
+                    <a16:rowId xmlns:a16="http://schemas.microsoft.com/office/drawing/2014/main" val="10004"/>
+                  </a:ext>
+                </a:extLst>
               </a:tr>
               <a:tr h="493776">
                 <a:tc>
                   <a:txBody>
-                    <a:bodyPr wrap="square" lIns="73152" rIns="73152"/>
+                    <a:bodyPr/>
                     <a:lstStyle/>
                     <a:p>
                       <a:r>
-                        <a:rPr sz="1200">
+                        <a:rPr lang="pt-BR" sz="1200" dirty="0">
                           <a:solidFill>
                             <a:srgbClr val="222222"/>
                           </a:solidFill>
                           <a:latin typeface="Calibri"/>
                         </a:rPr>
-                        <a:t>DNA do texto</a:t>
+                        <a:t>Modelo de </a:t>
                       </a:r>
+                      <a:r>
+                        <a:rPr lang="pt-BR" sz="1200" dirty="0" err="1">
+                          <a:solidFill>
+                            <a:srgbClr val="222222"/>
+                          </a:solidFill>
+                          <a:latin typeface="Calibri"/>
+                        </a:rPr>
+                        <a:t>embedding</a:t>
+                      </a:r>
+                      <a:endParaRPr sz="1200" dirty="0">
+                        <a:solidFill>
+                          <a:srgbClr val="222222"/>
+                        </a:solidFill>
+                        <a:latin typeface="Calibri"/>
+                      </a:endParaRPr>
                     </a:p>
                   </a:txBody>
                   <a:tcPr>
@@ -5766,7 +7006,7 @@
                 </a:tc>
                 <a:tc>
                   <a:txBody>
-                    <a:bodyPr wrap="square" lIns="73152" rIns="73152"/>
+                    <a:bodyPr/>
                     <a:lstStyle/>
                     <a:p>
                       <a:r>
@@ -5788,7 +7028,7 @@
                 </a:tc>
                 <a:tc>
                   <a:txBody>
-                    <a:bodyPr wrap="square" lIns="73152" rIns="73152"/>
+                    <a:bodyPr/>
                     <a:lstStyle/>
                     <a:p>
                       <a:r>
@@ -5808,22 +7048,33 @@
                     </a:solidFill>
                   </a:tcPr>
                 </a:tc>
+                <a:extLst>
+                  <a:ext uri="{0D108BD9-81ED-4DB2-BD59-A6C34878D82A}">
+                    <a16:rowId xmlns:a16="http://schemas.microsoft.com/office/drawing/2014/main" val="10005"/>
+                  </a:ext>
+                </a:extLst>
               </a:tr>
               <a:tr h="493776">
                 <a:tc>
                   <a:txBody>
-                    <a:bodyPr wrap="square" lIns="73152" rIns="73152"/>
+                    <a:bodyPr/>
                     <a:lstStyle/>
                     <a:p>
                       <a:r>
-                        <a:rPr sz="1200">
+                        <a:rPr lang="pt-BR" sz="1200" dirty="0">
                           <a:solidFill>
                             <a:srgbClr val="222222"/>
                           </a:solidFill>
                           <a:latin typeface="Calibri"/>
                         </a:rPr>
-                        <a:t>Banco de busca</a:t>
+                        <a:t>BD VETORIAL</a:t>
                       </a:r>
+                      <a:endParaRPr sz="1200" dirty="0">
+                        <a:solidFill>
+                          <a:srgbClr val="222222"/>
+                        </a:solidFill>
+                        <a:latin typeface="Calibri"/>
+                      </a:endParaRPr>
                     </a:p>
                   </a:txBody>
                   <a:tcPr>
@@ -5834,7 +7085,7 @@
                 </a:tc>
                 <a:tc>
                   <a:txBody>
-                    <a:bodyPr wrap="square" lIns="73152" rIns="73152"/>
+                    <a:bodyPr/>
                     <a:lstStyle/>
                     <a:p>
                       <a:r>
@@ -5856,7 +7107,7 @@
                 </a:tc>
                 <a:tc>
                   <a:txBody>
-                    <a:bodyPr wrap="square" lIns="73152" rIns="73152"/>
+                    <a:bodyPr/>
                     <a:lstStyle/>
                     <a:p>
                       <a:r>
@@ -5876,11 +7127,16 @@
                     </a:solidFill>
                   </a:tcPr>
                 </a:tc>
+                <a:extLst>
+                  <a:ext uri="{0D108BD9-81ED-4DB2-BD59-A6C34878D82A}">
+                    <a16:rowId xmlns:a16="http://schemas.microsoft.com/office/drawing/2014/main" val="10006"/>
+                  </a:ext>
+                </a:extLst>
               </a:tr>
               <a:tr h="493776">
                 <a:tc>
                   <a:txBody>
-                    <a:bodyPr wrap="square" lIns="73152" rIns="73152"/>
+                    <a:bodyPr/>
                     <a:lstStyle/>
                     <a:p>
                       <a:r>
@@ -5902,18 +7158,60 @@
                 </a:tc>
                 <a:tc>
                   <a:txBody>
-                    <a:bodyPr wrap="square" lIns="73152" rIns="73152"/>
+                    <a:bodyPr/>
                     <a:lstStyle/>
                     <a:p>
                       <a:r>
-                        <a:rPr sz="1200">
+                        <a:rPr sz="1200" dirty="0">
                           <a:solidFill>
                             <a:srgbClr val="222222"/>
                           </a:solidFill>
                           <a:latin typeface="Calibri"/>
                         </a:rPr>
-                        <a:t>3 buscas + fusão + juiz</a:t>
+                        <a:t>3 </a:t>
                       </a:r>
+                      <a:r>
+                        <a:rPr sz="1200" dirty="0" err="1">
+                          <a:solidFill>
+                            <a:srgbClr val="222222"/>
+                          </a:solidFill>
+                          <a:latin typeface="Calibri"/>
+                        </a:rPr>
+                        <a:t>buscas</a:t>
+                      </a:r>
+                      <a:r>
+                        <a:rPr sz="1200" dirty="0">
+                          <a:solidFill>
+                            <a:srgbClr val="222222"/>
+                          </a:solidFill>
+                          <a:latin typeface="Calibri"/>
+                        </a:rPr>
+                        <a:t> + </a:t>
+                      </a:r>
+                      <a:r>
+                        <a:rPr lang="pt-BR" sz="1200" dirty="0">
+                          <a:solidFill>
+                            <a:srgbClr val="222222"/>
+                          </a:solidFill>
+                          <a:latin typeface="Calibri"/>
+                        </a:rPr>
+                        <a:t>RRF + </a:t>
+                      </a:r>
+                      <a:r>
+                        <a:rPr lang="pt-BR" sz="1200" dirty="0" err="1">
+                          <a:solidFill>
+                            <a:srgbClr val="222222"/>
+                          </a:solidFill>
+                          <a:latin typeface="Calibri"/>
+                        </a:rPr>
+                        <a:t>Reranker</a:t>
+                      </a:r>
+                      <a:endParaRPr sz="1200" dirty="0">
+                        <a:solidFill>
+                          <a:srgbClr val="222222"/>
+                        </a:solidFill>
+                        <a:latin typeface="Calibri"/>
+                      </a:endParaRPr>
                     </a:p>
                   </a:txBody>
                   <a:tcPr>
@@ -5924,18 +7222,78 @@
                 </a:tc>
                 <a:tc>
                   <a:txBody>
-                    <a:bodyPr wrap="square" lIns="73152" rIns="73152"/>
+                    <a:bodyPr/>
                     <a:lstStyle/>
                     <a:p>
                       <a:r>
-                        <a:rPr sz="1200">
+                        <a:rPr sz="1200" dirty="0" err="1">
                           <a:solidFill>
                             <a:srgbClr val="222222"/>
                           </a:solidFill>
                           <a:latin typeface="Calibri"/>
                         </a:rPr>
-                        <a:t>Acha os 6 melhores</a:t>
+                        <a:t>Acha</a:t>
                       </a:r>
+                      <a:r>
+                        <a:rPr sz="1200" dirty="0">
+                          <a:solidFill>
+                            <a:srgbClr val="222222"/>
+                          </a:solidFill>
+                          <a:latin typeface="Calibri"/>
+                        </a:rPr>
+                        <a:t> </a:t>
+                      </a:r>
+                      <a:r>
+                        <a:rPr sz="1200" dirty="0" err="1">
+                          <a:solidFill>
+                            <a:srgbClr val="222222"/>
+                          </a:solidFill>
+                          <a:latin typeface="Calibri"/>
+                        </a:rPr>
+                        <a:t>os</a:t>
+                      </a:r>
+                      <a:r>
+                        <a:rPr sz="1200" dirty="0">
+                          <a:solidFill>
+                            <a:srgbClr val="222222"/>
+                          </a:solidFill>
+                          <a:latin typeface="Calibri"/>
+                        </a:rPr>
+                        <a:t> </a:t>
+                      </a:r>
+                      <a:r>
+                        <a:rPr lang="pt-BR" sz="1200" dirty="0">
+                          <a:solidFill>
+                            <a:srgbClr val="222222"/>
+                          </a:solidFill>
+                          <a:latin typeface="Calibri"/>
+                        </a:rPr>
+                        <a:t>K</a:t>
+                      </a:r>
+                      <a:r>
+                        <a:rPr sz="1200" dirty="0">
+                          <a:solidFill>
+                            <a:srgbClr val="222222"/>
+                          </a:solidFill>
+                          <a:latin typeface="Calibri"/>
+                        </a:rPr>
+                        <a:t> </a:t>
+                      </a:r>
+                      <a:r>
+                        <a:rPr sz="1200" dirty="0" err="1">
+                          <a:solidFill>
+                            <a:srgbClr val="222222"/>
+                          </a:solidFill>
+                          <a:latin typeface="Calibri"/>
+                        </a:rPr>
+                        <a:t>melhores</a:t>
+                      </a:r>
+                      <a:endParaRPr sz="1200" dirty="0">
+                        <a:solidFill>
+                          <a:srgbClr val="222222"/>
+                        </a:solidFill>
+                        <a:latin typeface="Calibri"/>
+                      </a:endParaRPr>
                     </a:p>
                   </a:txBody>
                   <a:tcPr>
@@ -5944,11 +7302,16 @@
                     </a:solidFill>
                   </a:tcPr>
                 </a:tc>
+                <a:extLst>
+                  <a:ext uri="{0D108BD9-81ED-4DB2-BD59-A6C34878D82A}">
+                    <a16:rowId xmlns:a16="http://schemas.microsoft.com/office/drawing/2014/main" val="10007"/>
+                  </a:ext>
+                </a:extLst>
               </a:tr>
               <a:tr h="493776">
                 <a:tc>
                   <a:txBody>
-                    <a:bodyPr wrap="square" lIns="73152" rIns="73152"/>
+                    <a:bodyPr/>
                     <a:lstStyle/>
                     <a:p>
                       <a:r>
@@ -5970,7 +7333,7 @@
                 </a:tc>
                 <a:tc>
                   <a:txBody>
-                    <a:bodyPr wrap="square" lIns="73152" rIns="73152"/>
+                    <a:bodyPr/>
                     <a:lstStyle/>
                     <a:p>
                       <a:r>
@@ -5992,7 +7355,7 @@
                 </a:tc>
                 <a:tc>
                   <a:txBody>
-                    <a:bodyPr wrap="square" lIns="73152" rIns="73152"/>
+                    <a:bodyPr/>
                     <a:lstStyle/>
                     <a:p>
                       <a:r>
@@ -6012,22 +7375,24 @@
                     </a:solidFill>
                   </a:tcPr>
                 </a:tc>
+                <a:extLst>
+                  <a:ext uri="{0D108BD9-81ED-4DB2-BD59-A6C34878D82A}">
+                    <a16:rowId xmlns:a16="http://schemas.microsoft.com/office/drawing/2014/main" val="10008"/>
+                  </a:ext>
+                </a:extLst>
               </a:tr>
               <a:tr h="493776">
                 <a:tc>
                   <a:txBody>
-                    <a:bodyPr wrap="square" lIns="73152" rIns="73152"/>
+                    <a:bodyPr/>
                     <a:lstStyle/>
                     <a:p>
-                      <a:r>
-                        <a:rPr sz="1200">
-                          <a:solidFill>
-                            <a:srgbClr val="222222"/>
-                          </a:solidFill>
-                          <a:latin typeface="Calibri"/>
-                        </a:rPr>
-                        <a:t>Avaliar</a:t>
-                      </a:r>
+                      <a:endParaRPr sz="1200" dirty="0">
+                        <a:solidFill>
+                          <a:srgbClr val="222222"/>
+                        </a:solidFill>
+                        <a:latin typeface="Calibri"/>
+                      </a:endParaRPr>
                     </a:p>
                   </a:txBody>
                   <a:tcPr>
@@ -6038,18 +7403,15 @@
                 </a:tc>
                 <a:tc>
                   <a:txBody>
-                    <a:bodyPr wrap="square" lIns="73152" rIns="73152"/>
+                    <a:bodyPr/>
                     <a:lstStyle/>
                     <a:p>
-                      <a:r>
-                        <a:rPr sz="1200">
-                          <a:solidFill>
-                            <a:srgbClr val="222222"/>
-                          </a:solidFill>
-                          <a:latin typeface="Calibri"/>
-                        </a:rPr>
-                        <a:t>Gabarito + outra LLM como juiz</a:t>
-                      </a:r>
+                      <a:endParaRPr sz="1200" dirty="0">
+                        <a:solidFill>
+                          <a:srgbClr val="222222"/>
+                        </a:solidFill>
+                        <a:latin typeface="Calibri"/>
+                      </a:endParaRPr>
                     </a:p>
                   </a:txBody>
                   <a:tcPr>
@@ -6060,18 +7422,15 @@
                 </a:tc>
                 <a:tc>
                   <a:txBody>
-                    <a:bodyPr wrap="square" lIns="73152" rIns="73152"/>
+                    <a:bodyPr/>
                     <a:lstStyle/>
                     <a:p>
-                      <a:r>
-                        <a:rPr sz="1200">
-                          <a:solidFill>
-                            <a:srgbClr val="222222"/>
-                          </a:solidFill>
-                          <a:latin typeface="Calibri"/>
-                        </a:rPr>
-                        <a:t>Mede se a resposta está boa</a:t>
-                      </a:r>
+                      <a:endParaRPr sz="1200" dirty="0">
+                        <a:solidFill>
+                          <a:srgbClr val="222222"/>
+                        </a:solidFill>
+                        <a:latin typeface="Calibri"/>
+                      </a:endParaRPr>
                     </a:p>
                   </a:txBody>
                   <a:tcPr>
@@ -6080,6 +7439,11 @@
                     </a:solidFill>
                   </a:tcPr>
                 </a:tc>
+                <a:extLst>
+                  <a:ext uri="{0D108BD9-81ED-4DB2-BD59-A6C34878D82A}">
+                    <a16:rowId xmlns:a16="http://schemas.microsoft.com/office/drawing/2014/main" val="10009"/>
+                  </a:ext>
+                </a:extLst>
               </a:tr>
             </a:tbl>
           </a:graphicData>
@@ -6102,7 +7466,7 @@
           <a:noFill/>
         </p:spPr>
         <p:txBody>
-          <a:bodyPr wrap="square" lIns="45720" rIns="45720" tIns="18288" bIns="18288">
+          <a:bodyPr wrap="square" lIns="45720" tIns="18288" rIns="45720" bIns="18288">
             <a:spAutoFit/>
           </a:bodyPr>
           <a:lstStyle/>
@@ -6137,7 +7501,7 @@
           <a:noFill/>
         </p:spPr>
         <p:txBody>
-          <a:bodyPr wrap="square" lIns="45720" rIns="45720" tIns="18288" bIns="18288">
+          <a:bodyPr wrap="square" lIns="45720" tIns="18288" rIns="45720" bIns="18288">
             <a:spAutoFit/>
           </a:bodyPr>
           <a:lstStyle/>
@@ -6172,7 +7536,7 @@
           <a:noFill/>
         </p:spPr>
         <p:txBody>
-          <a:bodyPr wrap="square" lIns="45720" rIns="45720" tIns="18288" bIns="18288">
+          <a:bodyPr wrap="square" lIns="45720" tIns="18288" rIns="45720" bIns="18288">
             <a:spAutoFit/>
           </a:bodyPr>
           <a:lstStyle/>
@@ -6199,7 +7563,7 @@
 </file>
 
 <file path=ppt/slides/slide2.xml><?xml version="1.0" encoding="utf-8"?>
-<p:sld xmlns:a="http://schemas.openxmlformats.org/drawingml/2006/main" xmlns:p="http://schemas.openxmlformats.org/presentationml/2006/main" xmlns:r="http://schemas.openxmlformats.org/officeDocument/2006/relationships">
+<p:sld xmlns:a="http://schemas.openxmlformats.org/drawingml/2006/main" xmlns:r="http://schemas.openxmlformats.org/officeDocument/2006/relationships" xmlns:p="http://schemas.openxmlformats.org/presentationml/2006/main">
   <p:cSld>
     <p:spTree>
       <p:nvGrpSpPr>
@@ -6207,7 +7571,14 @@
         <p:cNvGrpSpPr/>
         <p:nvPr/>
       </p:nvGrpSpPr>
-      <p:grpSpPr/>
+      <p:grpSpPr>
+        <a:xfrm>
+          <a:off x="0" y="0"/>
+          <a:ext cx="0" cy="0"/>
+          <a:chOff x="0" y="0"/>
+          <a:chExt cx="0" cy="0"/>
+        </a:xfrm>
+      </p:grpSpPr>
       <p:sp>
         <p:nvSpPr>
           <p:cNvPr id="2" name="Rectangle 1"/>
@@ -6248,6 +7619,7 @@
           <a:lstStyle/>
           <a:p>
             <a:pPr algn="ctr"/>
+            <a:endParaRPr/>
           </a:p>
         </p:txBody>
       </p:sp>
@@ -6268,7 +7640,7 @@
           <a:noFill/>
         </p:spPr>
         <p:txBody>
-          <a:bodyPr wrap="square" lIns="45720" rIns="45720" tIns="18288" bIns="18288">
+          <a:bodyPr wrap="square" lIns="45720" tIns="18288" rIns="45720" bIns="18288">
             <a:spAutoFit/>
           </a:bodyPr>
           <a:lstStyle/>
@@ -6303,7 +7675,7 @@
           <a:noFill/>
         </p:spPr>
         <p:txBody>
-          <a:bodyPr wrap="square" lIns="45720" rIns="45720" tIns="18288" bIns="18288">
+          <a:bodyPr wrap="square" lIns="45720" tIns="18288" rIns="45720" bIns="18288">
             <a:spAutoFit/>
           </a:bodyPr>
           <a:lstStyle/>
@@ -6338,7 +7710,7 @@
           <a:noFill/>
         </p:spPr>
         <p:txBody>
-          <a:bodyPr wrap="square" lIns="45720" rIns="45720" tIns="18288" bIns="18288">
+          <a:bodyPr wrap="square" lIns="45720" tIns="18288" rIns="45720" bIns="18288">
             <a:spAutoFit/>
           </a:bodyPr>
           <a:lstStyle/>
@@ -6469,6 +7841,7 @@
           <a:lstStyle/>
           <a:p>
             <a:pPr algn="ctr"/>
+            <a:endParaRPr/>
           </a:p>
         </p:txBody>
       </p:sp>
@@ -6489,7 +7862,7 @@
           <a:noFill/>
         </p:spPr>
         <p:txBody>
-          <a:bodyPr wrap="square" lIns="45720" rIns="45720" tIns="18288" bIns="18288">
+          <a:bodyPr wrap="square" lIns="45720" tIns="18288" rIns="45720" bIns="18288">
             <a:spAutoFit/>
           </a:bodyPr>
           <a:lstStyle/>
@@ -6524,7 +7897,7 @@
           <a:noFill/>
         </p:spPr>
         <p:txBody>
-          <a:bodyPr wrap="square" lIns="45720" rIns="45720" tIns="18288" bIns="18288">
+          <a:bodyPr wrap="square" lIns="45720" tIns="18288" rIns="45720" bIns="18288">
             <a:spAutoFit/>
           </a:bodyPr>
           <a:lstStyle/>
@@ -6584,6 +7957,7 @@
           <a:lstStyle/>
           <a:p>
             <a:pPr algn="ctr"/>
+            <a:endParaRPr/>
           </a:p>
         </p:txBody>
       </p:sp>
@@ -6604,7 +7978,7 @@
           <a:noFill/>
         </p:spPr>
         <p:txBody>
-          <a:bodyPr wrap="square" lIns="45720" rIns="45720" tIns="18288" bIns="18288">
+          <a:bodyPr wrap="square" lIns="45720" tIns="18288" rIns="45720" bIns="18288">
             <a:spAutoFit/>
           </a:bodyPr>
           <a:lstStyle/>
@@ -6639,7 +8013,7 @@
           <a:noFill/>
         </p:spPr>
         <p:txBody>
-          <a:bodyPr wrap="square" lIns="45720" rIns="45720" tIns="18288" bIns="18288">
+          <a:bodyPr wrap="square" lIns="45720" tIns="18288" rIns="45720" bIns="18288">
             <a:spAutoFit/>
           </a:bodyPr>
           <a:lstStyle/>
@@ -6699,6 +8073,7 @@
           <a:lstStyle/>
           <a:p>
             <a:pPr algn="ctr"/>
+            <a:endParaRPr/>
           </a:p>
         </p:txBody>
       </p:sp>
@@ -6719,7 +8094,7 @@
           <a:noFill/>
         </p:spPr>
         <p:txBody>
-          <a:bodyPr wrap="square" lIns="45720" rIns="45720" tIns="18288" bIns="18288">
+          <a:bodyPr wrap="square" lIns="45720" tIns="18288" rIns="45720" bIns="18288">
             <a:spAutoFit/>
           </a:bodyPr>
           <a:lstStyle/>
@@ -6754,7 +8129,7 @@
           <a:noFill/>
         </p:spPr>
         <p:txBody>
-          <a:bodyPr wrap="square" lIns="45720" rIns="45720" tIns="18288" bIns="18288">
+          <a:bodyPr wrap="square" lIns="45720" tIns="18288" rIns="45720" bIns="18288">
             <a:spAutoFit/>
           </a:bodyPr>
           <a:lstStyle/>
@@ -6789,7 +8164,7 @@
           <a:noFill/>
         </p:spPr>
         <p:txBody>
-          <a:bodyPr wrap="square" lIns="45720" rIns="45720" tIns="18288" bIns="18288">
+          <a:bodyPr wrap="square" lIns="45720" tIns="18288" rIns="45720" bIns="18288">
             <a:spAutoFit/>
           </a:bodyPr>
           <a:lstStyle/>
@@ -6824,7 +8199,7 @@
           <a:noFill/>
         </p:spPr>
         <p:txBody>
-          <a:bodyPr wrap="square" lIns="45720" rIns="45720" tIns="18288" bIns="18288">
+          <a:bodyPr wrap="square" lIns="45720" tIns="18288" rIns="45720" bIns="18288">
             <a:spAutoFit/>
           </a:bodyPr>
           <a:lstStyle/>
@@ -6859,7 +8234,7 @@
           <a:noFill/>
         </p:spPr>
         <p:txBody>
-          <a:bodyPr wrap="square" lIns="45720" rIns="45720" tIns="18288" bIns="18288">
+          <a:bodyPr wrap="square" lIns="45720" tIns="18288" rIns="45720" bIns="18288">
             <a:spAutoFit/>
           </a:bodyPr>
           <a:lstStyle/>
@@ -6886,7 +8261,7 @@
 </file>
 
 <file path=ppt/slides/slide3.xml><?xml version="1.0" encoding="utf-8"?>
-<p:sld xmlns:a="http://schemas.openxmlformats.org/drawingml/2006/main" xmlns:p="http://schemas.openxmlformats.org/presentationml/2006/main" xmlns:r="http://schemas.openxmlformats.org/officeDocument/2006/relationships">
+<p:sld xmlns:a="http://schemas.openxmlformats.org/drawingml/2006/main" xmlns:r="http://schemas.openxmlformats.org/officeDocument/2006/relationships" xmlns:p="http://schemas.openxmlformats.org/presentationml/2006/main">
   <p:cSld>
     <p:spTree>
       <p:nvGrpSpPr>
@@ -6894,7 +8269,14 @@
         <p:cNvGrpSpPr/>
         <p:nvPr/>
       </p:nvGrpSpPr>
-      <p:grpSpPr/>
+      <p:grpSpPr>
+        <a:xfrm>
+          <a:off x="0" y="0"/>
+          <a:ext cx="0" cy="0"/>
+          <a:chOff x="0" y="0"/>
+          <a:chExt cx="0" cy="0"/>
+        </a:xfrm>
+      </p:grpSpPr>
       <p:sp>
         <p:nvSpPr>
           <p:cNvPr id="2" name="Rectangle 1"/>
@@ -6935,6 +8317,7 @@
           <a:lstStyle/>
           <a:p>
             <a:pPr algn="ctr"/>
+            <a:endParaRPr/>
           </a:p>
         </p:txBody>
       </p:sp>
@@ -6955,7 +8338,7 @@
           <a:noFill/>
         </p:spPr>
         <p:txBody>
-          <a:bodyPr wrap="square" lIns="45720" rIns="45720" tIns="18288" bIns="18288">
+          <a:bodyPr wrap="square" lIns="45720" tIns="18288" rIns="45720" bIns="18288">
             <a:spAutoFit/>
           </a:bodyPr>
           <a:lstStyle/>
@@ -6990,7 +8373,7 @@
           <a:noFill/>
         </p:spPr>
         <p:txBody>
-          <a:bodyPr wrap="square" lIns="45720" rIns="45720" tIns="18288" bIns="18288">
+          <a:bodyPr wrap="square" lIns="45720" tIns="18288" rIns="45720" bIns="18288">
             <a:spAutoFit/>
           </a:bodyPr>
           <a:lstStyle/>
@@ -7044,7 +8427,7 @@
           </a:fontRef>
         </p:style>
         <p:txBody>
-          <a:bodyPr rtlCol="0" anchor="ctr" lIns="182880"/>
+          <a:bodyPr lIns="182880" rtlCol="0" anchor="ctr"/>
           <a:lstStyle/>
           <a:p>
             <a:pPr algn="l"/>
@@ -7076,7 +8459,7 @@
           <a:noFill/>
         </p:spPr>
         <p:txBody>
-          <a:bodyPr wrap="square" lIns="45720" rIns="45720" tIns="18288" bIns="18288">
+          <a:bodyPr wrap="square" lIns="45720" tIns="18288" rIns="45720" bIns="18288">
             <a:spAutoFit/>
           </a:bodyPr>
           <a:lstStyle/>
@@ -7130,7 +8513,7 @@
           </a:fontRef>
         </p:style>
         <p:txBody>
-          <a:bodyPr rtlCol="0" anchor="ctr" lIns="182880"/>
+          <a:bodyPr lIns="182880" rtlCol="0" anchor="ctr"/>
           <a:lstStyle/>
           <a:p>
             <a:pPr algn="l"/>
@@ -7162,7 +8545,7 @@
           <a:noFill/>
         </p:spPr>
         <p:txBody>
-          <a:bodyPr wrap="square" lIns="45720" rIns="45720" tIns="18288" bIns="18288">
+          <a:bodyPr wrap="square" lIns="45720" tIns="18288" rIns="45720" bIns="18288">
             <a:spAutoFit/>
           </a:bodyPr>
           <a:lstStyle/>
@@ -7216,7 +8599,7 @@
           </a:fontRef>
         </p:style>
         <p:txBody>
-          <a:bodyPr rtlCol="0" anchor="ctr" lIns="182880"/>
+          <a:bodyPr lIns="182880" rtlCol="0" anchor="ctr"/>
           <a:lstStyle/>
           <a:p>
             <a:pPr algn="l"/>
@@ -7248,7 +8631,7 @@
           <a:noFill/>
         </p:spPr>
         <p:txBody>
-          <a:bodyPr wrap="square" lIns="45720" rIns="45720" tIns="18288" bIns="18288">
+          <a:bodyPr wrap="square" lIns="45720" tIns="18288" rIns="45720" bIns="18288">
             <a:spAutoFit/>
           </a:bodyPr>
           <a:lstStyle/>
@@ -7302,7 +8685,7 @@
           </a:fontRef>
         </p:style>
         <p:txBody>
-          <a:bodyPr rtlCol="0" anchor="ctr" lIns="182880"/>
+          <a:bodyPr lIns="182880" rtlCol="0" anchor="ctr"/>
           <a:lstStyle/>
           <a:p>
             <a:pPr algn="l"/>
@@ -7334,7 +8717,7 @@
           <a:noFill/>
         </p:spPr>
         <p:txBody>
-          <a:bodyPr wrap="square" lIns="45720" rIns="45720" tIns="18288" bIns="18288">
+          <a:bodyPr wrap="square" lIns="45720" tIns="18288" rIns="45720" bIns="18288">
             <a:spAutoFit/>
           </a:bodyPr>
           <a:lstStyle/>
@@ -7388,7 +8771,7 @@
           </a:fontRef>
         </p:style>
         <p:txBody>
-          <a:bodyPr rtlCol="0" anchor="ctr" lIns="182880"/>
+          <a:bodyPr lIns="182880" rtlCol="0" anchor="ctr"/>
           <a:lstStyle/>
           <a:p>
             <a:pPr algn="l"/>
@@ -7420,7 +8803,7 @@
           <a:noFill/>
         </p:spPr>
         <p:txBody>
-          <a:bodyPr wrap="square" lIns="45720" rIns="45720" tIns="18288" bIns="18288">
+          <a:bodyPr wrap="square" lIns="45720" tIns="18288" rIns="45720" bIns="18288">
             <a:spAutoFit/>
           </a:bodyPr>
           <a:lstStyle/>
@@ -7474,7 +8857,7 @@
           </a:fontRef>
         </p:style>
         <p:txBody>
-          <a:bodyPr rtlCol="0" anchor="ctr" lIns="182880"/>
+          <a:bodyPr lIns="182880" rtlCol="0" anchor="ctr"/>
           <a:lstStyle/>
           <a:p>
             <a:pPr algn="l"/>
@@ -7506,7 +8889,7 @@
           <a:noFill/>
         </p:spPr>
         <p:txBody>
-          <a:bodyPr wrap="square" lIns="45720" rIns="45720" tIns="18288" bIns="18288">
+          <a:bodyPr wrap="square" lIns="45720" tIns="18288" rIns="45720" bIns="18288">
             <a:spAutoFit/>
           </a:bodyPr>
           <a:lstStyle/>
@@ -7541,7 +8924,7 @@
           <a:noFill/>
         </p:spPr>
         <p:txBody>
-          <a:bodyPr wrap="square" lIns="45720" rIns="45720" tIns="18288" bIns="18288">
+          <a:bodyPr wrap="square" lIns="45720" tIns="18288" rIns="45720" bIns="18288">
             <a:spAutoFit/>
           </a:bodyPr>
           <a:lstStyle/>
@@ -7576,7 +8959,7 @@
           <a:noFill/>
         </p:spPr>
         <p:txBody>
-          <a:bodyPr wrap="square" lIns="45720" rIns="45720" tIns="18288" bIns="18288">
+          <a:bodyPr wrap="square" lIns="45720" tIns="18288" rIns="45720" bIns="18288">
             <a:spAutoFit/>
           </a:bodyPr>
           <a:lstStyle/>
@@ -7603,7 +8986,7 @@
 </file>
 
 <file path=ppt/slides/slide4.xml><?xml version="1.0" encoding="utf-8"?>
-<p:sld xmlns:a="http://schemas.openxmlformats.org/drawingml/2006/main" xmlns:p="http://schemas.openxmlformats.org/presentationml/2006/main" xmlns:r="http://schemas.openxmlformats.org/officeDocument/2006/relationships">
+<p:sld xmlns:a="http://schemas.openxmlformats.org/drawingml/2006/main" xmlns:r="http://schemas.openxmlformats.org/officeDocument/2006/relationships" xmlns:p="http://schemas.openxmlformats.org/presentationml/2006/main">
   <p:cSld>
     <p:spTree>
       <p:nvGrpSpPr>
@@ -7611,7 +8994,14 @@
         <p:cNvGrpSpPr/>
         <p:nvPr/>
       </p:nvGrpSpPr>
-      <p:grpSpPr/>
+      <p:grpSpPr>
+        <a:xfrm>
+          <a:off x="0" y="0"/>
+          <a:ext cx="0" cy="0"/>
+          <a:chOff x="0" y="0"/>
+          <a:chExt cx="0" cy="0"/>
+        </a:xfrm>
+      </p:grpSpPr>
       <p:sp>
         <p:nvSpPr>
           <p:cNvPr id="2" name="Rectangle 1"/>
@@ -7652,6 +9042,7 @@
           <a:lstStyle/>
           <a:p>
             <a:pPr algn="ctr"/>
+            <a:endParaRPr/>
           </a:p>
         </p:txBody>
       </p:sp>
@@ -7672,7 +9063,7 @@
           <a:noFill/>
         </p:spPr>
         <p:txBody>
-          <a:bodyPr wrap="square" lIns="45720" rIns="45720" tIns="18288" bIns="18288">
+          <a:bodyPr wrap="square" lIns="45720" tIns="18288" rIns="45720" bIns="18288">
             <a:spAutoFit/>
           </a:bodyPr>
           <a:lstStyle/>
@@ -7707,7 +9098,7 @@
           <a:noFill/>
         </p:spPr>
         <p:txBody>
-          <a:bodyPr wrap="square" lIns="45720" rIns="45720" tIns="18288" bIns="18288">
+          <a:bodyPr wrap="square" lIns="45720" tIns="18288" rIns="45720" bIns="18288">
             <a:spAutoFit/>
           </a:bodyPr>
           <a:lstStyle/>
@@ -7742,7 +9133,7 @@
           <a:noFill/>
         </p:spPr>
         <p:txBody>
-          <a:bodyPr wrap="square" lIns="45720" rIns="45720" tIns="18288" bIns="18288">
+          <a:bodyPr wrap="square" lIns="45720" tIns="18288" rIns="45720" bIns="18288">
             <a:spAutoFit/>
           </a:bodyPr>
           <a:lstStyle/>
@@ -7848,7 +9239,7 @@
           <a:noFill/>
         </p:spPr>
         <p:txBody>
-          <a:bodyPr wrap="square" lIns="45720" rIns="45720" tIns="18288" bIns="18288">
+          <a:bodyPr wrap="square" lIns="45720" tIns="18288" rIns="45720" bIns="18288">
             <a:spAutoFit/>
           </a:bodyPr>
           <a:lstStyle/>
@@ -7970,7 +9361,7 @@
           <a:noFill/>
         </p:spPr>
         <p:txBody>
-          <a:bodyPr wrap="square" lIns="45720" rIns="45720" tIns="18288" bIns="18288">
+          <a:bodyPr wrap="square" lIns="45720" tIns="18288" rIns="45720" bIns="18288">
             <a:spAutoFit/>
           </a:bodyPr>
           <a:lstStyle/>
@@ -8030,6 +9421,7 @@
           <a:lstStyle/>
           <a:p>
             <a:pPr algn="ctr"/>
+            <a:endParaRPr/>
           </a:p>
         </p:txBody>
       </p:sp>
@@ -8050,7 +9442,7 @@
           <a:noFill/>
         </p:spPr>
         <p:txBody>
-          <a:bodyPr wrap="square" lIns="45720" rIns="45720" tIns="18288" bIns="18288">
+          <a:bodyPr wrap="square" lIns="45720" tIns="18288" rIns="45720" bIns="18288">
             <a:spAutoFit/>
           </a:bodyPr>
           <a:lstStyle/>
@@ -8085,7 +9477,7 @@
           <a:noFill/>
         </p:spPr>
         <p:txBody>
-          <a:bodyPr wrap="square" lIns="45720" rIns="45720" tIns="18288" bIns="18288">
+          <a:bodyPr wrap="square" lIns="45720" tIns="18288" rIns="45720" bIns="18288">
             <a:spAutoFit/>
           </a:bodyPr>
           <a:lstStyle/>
@@ -8169,6 +9561,7 @@
           <a:lstStyle/>
           <a:p>
             <a:pPr algn="ctr"/>
+            <a:endParaRPr/>
           </a:p>
         </p:txBody>
       </p:sp>
@@ -8189,7 +9582,7 @@
           <a:noFill/>
         </p:spPr>
         <p:txBody>
-          <a:bodyPr wrap="square" lIns="45720" rIns="45720" tIns="18288" bIns="18288">
+          <a:bodyPr wrap="square" lIns="45720" tIns="18288" rIns="45720" bIns="18288">
             <a:spAutoFit/>
           </a:bodyPr>
           <a:lstStyle/>
@@ -8224,7 +9617,7 @@
           <a:noFill/>
         </p:spPr>
         <p:txBody>
-          <a:bodyPr wrap="square" lIns="45720" rIns="45720" tIns="18288" bIns="18288">
+          <a:bodyPr wrap="square" lIns="45720" tIns="18288" rIns="45720" bIns="18288">
             <a:spAutoFit/>
           </a:bodyPr>
           <a:lstStyle/>
@@ -8283,7 +9676,7 @@
           <a:noFill/>
         </p:spPr>
         <p:txBody>
-          <a:bodyPr wrap="square" lIns="45720" rIns="45720" tIns="18288" bIns="18288">
+          <a:bodyPr wrap="square" lIns="45720" tIns="18288" rIns="45720" bIns="18288">
             <a:spAutoFit/>
           </a:bodyPr>
           <a:lstStyle/>
@@ -8318,7 +9711,7 @@
           <a:noFill/>
         </p:spPr>
         <p:txBody>
-          <a:bodyPr wrap="square" lIns="45720" rIns="45720" tIns="18288" bIns="18288">
+          <a:bodyPr wrap="square" lIns="45720" tIns="18288" rIns="45720" bIns="18288">
             <a:spAutoFit/>
           </a:bodyPr>
           <a:lstStyle/>
@@ -8353,7 +9746,7 @@
           <a:noFill/>
         </p:spPr>
         <p:txBody>
-          <a:bodyPr wrap="square" lIns="45720" rIns="45720" tIns="18288" bIns="18288">
+          <a:bodyPr wrap="square" lIns="45720" tIns="18288" rIns="45720" bIns="18288">
             <a:spAutoFit/>
           </a:bodyPr>
           <a:lstStyle/>
@@ -8380,7 +9773,7 @@
 </file>
 
 <file path=ppt/slides/slide5.xml><?xml version="1.0" encoding="utf-8"?>
-<p:sld xmlns:a="http://schemas.openxmlformats.org/drawingml/2006/main" xmlns:p="http://schemas.openxmlformats.org/presentationml/2006/main" xmlns:r="http://schemas.openxmlformats.org/officeDocument/2006/relationships">
+<p:sld xmlns:a="http://schemas.openxmlformats.org/drawingml/2006/main" xmlns:r="http://schemas.openxmlformats.org/officeDocument/2006/relationships" xmlns:p="http://schemas.openxmlformats.org/presentationml/2006/main">
   <p:cSld>
     <p:spTree>
       <p:nvGrpSpPr>
@@ -8388,7 +9781,14 @@
         <p:cNvGrpSpPr/>
         <p:nvPr/>
       </p:nvGrpSpPr>
-      <p:grpSpPr/>
+      <p:grpSpPr>
+        <a:xfrm>
+          <a:off x="0" y="0"/>
+          <a:ext cx="0" cy="0"/>
+          <a:chOff x="0" y="0"/>
+          <a:chExt cx="0" cy="0"/>
+        </a:xfrm>
+      </p:grpSpPr>
       <p:sp>
         <p:nvSpPr>
           <p:cNvPr id="2" name="Rectangle 1"/>
@@ -8429,6 +9829,7 @@
           <a:lstStyle/>
           <a:p>
             <a:pPr algn="ctr"/>
+            <a:endParaRPr/>
           </a:p>
         </p:txBody>
       </p:sp>
@@ -8449,7 +9850,7 @@
           <a:noFill/>
         </p:spPr>
         <p:txBody>
-          <a:bodyPr wrap="square" lIns="45720" rIns="45720" tIns="18288" bIns="18288">
+          <a:bodyPr wrap="square" lIns="45720" tIns="18288" rIns="45720" bIns="18288">
             <a:spAutoFit/>
           </a:bodyPr>
           <a:lstStyle/>
@@ -8484,7 +9885,7 @@
           <a:noFill/>
         </p:spPr>
         <p:txBody>
-          <a:bodyPr wrap="square" lIns="45720" rIns="45720" tIns="18288" bIns="18288">
+          <a:bodyPr wrap="square" lIns="45720" tIns="18288" rIns="45720" bIns="18288">
             <a:spAutoFit/>
           </a:bodyPr>
           <a:lstStyle/>
@@ -8519,7 +9920,7 @@
           <a:noFill/>
         </p:spPr>
         <p:txBody>
-          <a:bodyPr wrap="square" lIns="45720" rIns="45720" tIns="18288" bIns="18288">
+          <a:bodyPr wrap="square" lIns="45720" tIns="18288" rIns="45720" bIns="18288">
             <a:spAutoFit/>
           </a:bodyPr>
           <a:lstStyle/>
@@ -8554,7 +9955,7 @@
           <a:noFill/>
         </p:spPr>
         <p:txBody>
-          <a:bodyPr wrap="square" lIns="45720" rIns="45720" tIns="18288" bIns="18288">
+          <a:bodyPr wrap="square" lIns="45720" tIns="18288" rIns="45720" bIns="18288">
             <a:spAutoFit/>
           </a:bodyPr>
           <a:lstStyle/>
@@ -8610,7 +10011,7 @@
           </a:fontRef>
         </p:style>
         <p:txBody>
-          <a:bodyPr rtlCol="0" anchor="ctr" lIns="137160"/>
+          <a:bodyPr lIns="137160" rtlCol="0" anchor="ctr"/>
           <a:lstStyle/>
           <a:p>
             <a:pPr algn="ctr"/>
@@ -8650,7 +10051,7 @@
           <a:noFill/>
         </p:spPr>
         <p:txBody>
-          <a:bodyPr wrap="square" lIns="45720" rIns="45720" tIns="18288" bIns="18288">
+          <a:bodyPr wrap="square" lIns="45720" tIns="18288" rIns="45720" bIns="18288">
             <a:spAutoFit/>
           </a:bodyPr>
           <a:lstStyle/>
@@ -8781,6 +10182,7 @@
           <a:lstStyle/>
           <a:p>
             <a:pPr algn="ctr"/>
+            <a:endParaRPr/>
           </a:p>
         </p:txBody>
       </p:sp>
@@ -8801,7 +10203,7 @@
           <a:noFill/>
         </p:spPr>
         <p:txBody>
-          <a:bodyPr wrap="square" lIns="45720" rIns="45720" tIns="18288" bIns="18288">
+          <a:bodyPr wrap="square" lIns="45720" tIns="18288" rIns="45720" bIns="18288">
             <a:spAutoFit/>
           </a:bodyPr>
           <a:lstStyle/>
@@ -8923,7 +10325,7 @@
           <a:noFill/>
         </p:spPr>
         <p:txBody>
-          <a:bodyPr wrap="square" lIns="45720" rIns="45720" tIns="18288" bIns="18288">
+          <a:bodyPr wrap="square" lIns="45720" tIns="18288" rIns="45720" bIns="18288">
             <a:spAutoFit/>
           </a:bodyPr>
           <a:lstStyle/>
@@ -8958,7 +10360,7 @@
           <a:noFill/>
         </p:spPr>
         <p:txBody>
-          <a:bodyPr wrap="square" lIns="45720" rIns="45720" tIns="18288" bIns="18288">
+          <a:bodyPr wrap="square" lIns="45720" tIns="18288" rIns="45720" bIns="18288">
             <a:spAutoFit/>
           </a:bodyPr>
           <a:lstStyle/>
@@ -8993,7 +10395,7 @@
           <a:noFill/>
         </p:spPr>
         <p:txBody>
-          <a:bodyPr wrap="square" lIns="45720" rIns="45720" tIns="18288" bIns="18288">
+          <a:bodyPr wrap="square" lIns="45720" tIns="18288" rIns="45720" bIns="18288">
             <a:spAutoFit/>
           </a:bodyPr>
           <a:lstStyle/>
@@ -9020,7 +10422,7 @@
 </file>
 
 <file path=ppt/slides/slide6.xml><?xml version="1.0" encoding="utf-8"?>
-<p:sld xmlns:a="http://schemas.openxmlformats.org/drawingml/2006/main" xmlns:p="http://schemas.openxmlformats.org/presentationml/2006/main" xmlns:r="http://schemas.openxmlformats.org/officeDocument/2006/relationships">
+<p:sld xmlns:a="http://schemas.openxmlformats.org/drawingml/2006/main" xmlns:r="http://schemas.openxmlformats.org/officeDocument/2006/relationships" xmlns:p="http://schemas.openxmlformats.org/presentationml/2006/main">
   <p:cSld>
     <p:spTree>
       <p:nvGrpSpPr>
@@ -9028,7 +10430,14 @@
         <p:cNvGrpSpPr/>
         <p:nvPr/>
       </p:nvGrpSpPr>
-      <p:grpSpPr/>
+      <p:grpSpPr>
+        <a:xfrm>
+          <a:off x="0" y="0"/>
+          <a:ext cx="0" cy="0"/>
+          <a:chOff x="0" y="0"/>
+          <a:chExt cx="0" cy="0"/>
+        </a:xfrm>
+      </p:grpSpPr>
       <p:sp>
         <p:nvSpPr>
           <p:cNvPr id="2" name="Rectangle 1"/>
@@ -9069,6 +10478,7 @@
           <a:lstStyle/>
           <a:p>
             <a:pPr algn="ctr"/>
+            <a:endParaRPr/>
           </a:p>
         </p:txBody>
       </p:sp>
@@ -9089,7 +10499,7 @@
           <a:noFill/>
         </p:spPr>
         <p:txBody>
-          <a:bodyPr wrap="square" lIns="45720" rIns="45720" tIns="18288" bIns="18288">
+          <a:bodyPr wrap="square" lIns="45720" tIns="18288" rIns="45720" bIns="18288">
             <a:spAutoFit/>
           </a:bodyPr>
           <a:lstStyle/>
@@ -9124,7 +10534,7 @@
           <a:noFill/>
         </p:spPr>
         <p:txBody>
-          <a:bodyPr wrap="square" lIns="45720" rIns="45720" tIns="18288" bIns="18288">
+          <a:bodyPr wrap="square" lIns="45720" tIns="18288" rIns="45720" bIns="18288">
             <a:spAutoFit/>
           </a:bodyPr>
           <a:lstStyle/>
@@ -9159,7 +10569,7 @@
           <a:noFill/>
         </p:spPr>
         <p:txBody>
-          <a:bodyPr wrap="square" lIns="45720" rIns="45720" tIns="18288" bIns="18288">
+          <a:bodyPr wrap="square" lIns="45720" tIns="18288" rIns="45720" bIns="18288">
             <a:spAutoFit/>
           </a:bodyPr>
           <a:lstStyle/>
@@ -9215,7 +10625,7 @@
           </a:fontRef>
         </p:style>
         <p:txBody>
-          <a:bodyPr rtlCol="0" anchor="ctr" lIns="137160"/>
+          <a:bodyPr lIns="137160" rtlCol="0" anchor="ctr"/>
           <a:lstStyle/>
           <a:p>
             <a:pPr algn="ctr"/>
@@ -9278,7 +10688,7 @@
           </a:fontRef>
         </p:style>
         <p:txBody>
-          <a:bodyPr rtlCol="0" anchor="ctr" lIns="137160"/>
+          <a:bodyPr lIns="137160" rtlCol="0" anchor="ctr"/>
           <a:lstStyle/>
           <a:p>
             <a:pPr algn="ctr"/>
@@ -9341,7 +10751,7 @@
           </a:fontRef>
         </p:style>
         <p:txBody>
-          <a:bodyPr rtlCol="0" anchor="ctr" lIns="137160"/>
+          <a:bodyPr lIns="137160" rtlCol="0" anchor="ctr"/>
           <a:lstStyle/>
           <a:p>
             <a:pPr algn="ctr"/>
@@ -9383,7 +10793,7 @@
           <a:noFill/>
         </p:spPr>
         <p:txBody>
-          <a:bodyPr wrap="square" lIns="45720" rIns="45720" tIns="18288" bIns="18288">
+          <a:bodyPr wrap="square" lIns="45720" tIns="18288" rIns="45720" bIns="18288">
             <a:spAutoFit/>
           </a:bodyPr>
           <a:lstStyle/>
@@ -9443,6 +10853,7 @@
           <a:lstStyle/>
           <a:p>
             <a:pPr algn="ctr"/>
+            <a:endParaRPr/>
           </a:p>
         </p:txBody>
       </p:sp>
@@ -9463,7 +10874,7 @@
           <a:noFill/>
         </p:spPr>
         <p:txBody>
-          <a:bodyPr wrap="square" lIns="45720" rIns="45720" tIns="18288" bIns="18288">
+          <a:bodyPr wrap="square" lIns="45720" tIns="18288" rIns="45720" bIns="18288">
             <a:spAutoFit/>
           </a:bodyPr>
           <a:lstStyle/>
@@ -9498,7 +10909,7 @@
           <a:noFill/>
         </p:spPr>
         <p:txBody>
-          <a:bodyPr wrap="square" lIns="45720" rIns="45720" tIns="18288" bIns="18288">
+          <a:bodyPr wrap="square" lIns="45720" tIns="18288" rIns="45720" bIns="18288">
             <a:spAutoFit/>
           </a:bodyPr>
           <a:lstStyle/>
@@ -9556,6 +10967,7 @@
           <a:lstStyle/>
           <a:p>
             <a:pPr algn="ctr"/>
+            <a:endParaRPr/>
           </a:p>
         </p:txBody>
       </p:sp>
@@ -9576,7 +10988,7 @@
           <a:noFill/>
         </p:spPr>
         <p:txBody>
-          <a:bodyPr wrap="square" lIns="45720" rIns="45720" tIns="18288" bIns="18288">
+          <a:bodyPr wrap="square" lIns="45720" tIns="18288" rIns="45720" bIns="18288">
             <a:spAutoFit/>
           </a:bodyPr>
           <a:lstStyle/>
@@ -9646,7 +11058,7 @@
           <a:noFill/>
         </p:spPr>
         <p:txBody>
-          <a:bodyPr wrap="square" lIns="45720" rIns="45720" tIns="18288" bIns="18288">
+          <a:bodyPr wrap="square" lIns="45720" tIns="18288" rIns="45720" bIns="18288">
             <a:spAutoFit/>
           </a:bodyPr>
           <a:lstStyle/>
@@ -9681,7 +11093,7 @@
           <a:noFill/>
         </p:spPr>
         <p:txBody>
-          <a:bodyPr wrap="square" lIns="45720" rIns="45720" tIns="18288" bIns="18288">
+          <a:bodyPr wrap="square" lIns="45720" tIns="18288" rIns="45720" bIns="18288">
             <a:spAutoFit/>
           </a:bodyPr>
           <a:lstStyle/>
@@ -9716,7 +11128,7 @@
           <a:noFill/>
         </p:spPr>
         <p:txBody>
-          <a:bodyPr wrap="square" lIns="45720" rIns="45720" tIns="18288" bIns="18288">
+          <a:bodyPr wrap="square" lIns="45720" tIns="18288" rIns="45720" bIns="18288">
             <a:spAutoFit/>
           </a:bodyPr>
           <a:lstStyle/>
@@ -9751,7 +11163,7 @@
           <a:noFill/>
         </p:spPr>
         <p:txBody>
-          <a:bodyPr wrap="square" lIns="45720" rIns="45720" tIns="18288" bIns="18288">
+          <a:bodyPr wrap="square" lIns="45720" tIns="18288" rIns="45720" bIns="18288">
             <a:spAutoFit/>
           </a:bodyPr>
           <a:lstStyle/>
@@ -9786,7 +11198,7 @@
           <a:noFill/>
         </p:spPr>
         <p:txBody>
-          <a:bodyPr wrap="square" lIns="45720" rIns="45720" tIns="18288" bIns="18288">
+          <a:bodyPr wrap="square" lIns="45720" tIns="18288" rIns="45720" bIns="18288">
             <a:spAutoFit/>
           </a:bodyPr>
           <a:lstStyle/>
@@ -9821,7 +11233,7 @@
           <a:noFill/>
         </p:spPr>
         <p:txBody>
-          <a:bodyPr wrap="square" lIns="45720" rIns="45720" tIns="18288" bIns="18288">
+          <a:bodyPr wrap="square" lIns="45720" tIns="18288" rIns="45720" bIns="18288">
             <a:spAutoFit/>
           </a:bodyPr>
           <a:lstStyle/>
@@ -9856,7 +11268,7 @@
           <a:noFill/>
         </p:spPr>
         <p:txBody>
-          <a:bodyPr wrap="square" lIns="45720" rIns="45720" tIns="18288" bIns="18288">
+          <a:bodyPr wrap="square" lIns="45720" tIns="18288" rIns="45720" bIns="18288">
             <a:spAutoFit/>
           </a:bodyPr>
           <a:lstStyle/>
@@ -9891,7 +11303,7 @@
           <a:noFill/>
         </p:spPr>
         <p:txBody>
-          <a:bodyPr wrap="square" lIns="45720" rIns="45720" tIns="18288" bIns="18288">
+          <a:bodyPr wrap="square" lIns="45720" tIns="18288" rIns="45720" bIns="18288">
             <a:spAutoFit/>
           </a:bodyPr>
           <a:lstStyle/>
@@ -9918,7 +11330,7 @@
 </file>
 
 <file path=ppt/slides/slide7.xml><?xml version="1.0" encoding="utf-8"?>
-<p:sld xmlns:a="http://schemas.openxmlformats.org/drawingml/2006/main" xmlns:p="http://schemas.openxmlformats.org/presentationml/2006/main" xmlns:r="http://schemas.openxmlformats.org/officeDocument/2006/relationships">
+<p:sld xmlns:a="http://schemas.openxmlformats.org/drawingml/2006/main" xmlns:r="http://schemas.openxmlformats.org/officeDocument/2006/relationships" xmlns:p="http://schemas.openxmlformats.org/presentationml/2006/main">
   <p:cSld>
     <p:spTree>
       <p:nvGrpSpPr>
@@ -9926,7 +11338,14 @@
         <p:cNvGrpSpPr/>
         <p:nvPr/>
       </p:nvGrpSpPr>
-      <p:grpSpPr/>
+      <p:grpSpPr>
+        <a:xfrm>
+          <a:off x="0" y="0"/>
+          <a:ext cx="0" cy="0"/>
+          <a:chOff x="0" y="0"/>
+          <a:chExt cx="0" cy="0"/>
+        </a:xfrm>
+      </p:grpSpPr>
       <p:sp>
         <p:nvSpPr>
           <p:cNvPr id="2" name="Rectangle 1"/>
@@ -9967,6 +11386,7 @@
           <a:lstStyle/>
           <a:p>
             <a:pPr algn="ctr"/>
+            <a:endParaRPr/>
           </a:p>
         </p:txBody>
       </p:sp>
@@ -9987,7 +11407,7 @@
           <a:noFill/>
         </p:spPr>
         <p:txBody>
-          <a:bodyPr wrap="square" lIns="45720" rIns="45720" tIns="18288" bIns="18288">
+          <a:bodyPr wrap="square" lIns="45720" tIns="18288" rIns="45720" bIns="18288">
             <a:spAutoFit/>
           </a:bodyPr>
           <a:lstStyle/>
@@ -10022,7 +11442,7 @@
           <a:noFill/>
         </p:spPr>
         <p:txBody>
-          <a:bodyPr wrap="square" lIns="45720" rIns="45720" tIns="18288" bIns="18288">
+          <a:bodyPr wrap="square" lIns="45720" tIns="18288" rIns="45720" bIns="18288">
             <a:spAutoFit/>
           </a:bodyPr>
           <a:lstStyle/>
@@ -10057,7 +11477,7 @@
           <a:noFill/>
         </p:spPr>
         <p:txBody>
-          <a:bodyPr wrap="square" lIns="45720" rIns="45720" tIns="18288" bIns="18288">
+          <a:bodyPr wrap="square" lIns="45720" tIns="18288" rIns="45720" bIns="18288">
             <a:spAutoFit/>
           </a:bodyPr>
           <a:lstStyle/>
@@ -10092,7 +11512,7 @@
           <a:noFill/>
         </p:spPr>
         <p:txBody>
-          <a:bodyPr wrap="square" lIns="45720" rIns="45720" tIns="18288" bIns="18288">
+          <a:bodyPr wrap="square" lIns="45720" tIns="18288" rIns="45720" bIns="18288">
             <a:spAutoFit/>
           </a:bodyPr>
           <a:lstStyle/>
@@ -10122,15 +11542,12 @@
           </a:p>
           <a:p>
             <a:pPr algn="l"/>
-            <a:r>
-              <a:rPr sz="1500" b="0">
-                <a:solidFill>
-                  <a:srgbClr val="222222"/>
-                </a:solidFill>
-                <a:latin typeface="Calibri"/>
-              </a:rPr>
-              <a:t/>
-            </a:r>
+            <a:endParaRPr sz="1500" b="0">
+              <a:solidFill>
+                <a:srgbClr val="222222"/>
+              </a:solidFill>
+              <a:latin typeface="Calibri"/>
+            </a:endParaRPr>
           </a:p>
           <a:p>
             <a:pPr algn="l"/>
@@ -10188,6 +11605,7 @@
           <a:lstStyle/>
           <a:p>
             <a:pPr algn="ctr"/>
+            <a:endParaRPr/>
           </a:p>
         </p:txBody>
       </p:sp>
@@ -10208,7 +11626,7 @@
           <a:noFill/>
         </p:spPr>
         <p:txBody>
-          <a:bodyPr wrap="square" lIns="45720" rIns="45720" tIns="18288" bIns="18288">
+          <a:bodyPr wrap="square" lIns="45720" tIns="18288" rIns="45720" bIns="18288">
             <a:spAutoFit/>
           </a:bodyPr>
           <a:lstStyle/>
@@ -10243,7 +11661,7 @@
           <a:noFill/>
         </p:spPr>
         <p:txBody>
-          <a:bodyPr wrap="square" lIns="45720" rIns="45720" tIns="18288" bIns="18288">
+          <a:bodyPr wrap="square" lIns="45720" tIns="18288" rIns="45720" bIns="18288">
             <a:spAutoFit/>
           </a:bodyPr>
           <a:lstStyle/>
@@ -10315,6 +11733,7 @@
           <a:lstStyle/>
           <a:p>
             <a:pPr algn="ctr"/>
+            <a:endParaRPr/>
           </a:p>
         </p:txBody>
       </p:sp>
@@ -10335,7 +11754,7 @@
           <a:noFill/>
         </p:spPr>
         <p:txBody>
-          <a:bodyPr wrap="square" lIns="45720" rIns="45720" tIns="18288" bIns="18288">
+          <a:bodyPr wrap="square" lIns="45720" tIns="18288" rIns="45720" bIns="18288">
             <a:spAutoFit/>
           </a:bodyPr>
           <a:lstStyle/>
@@ -10370,7 +11789,7 @@
           <a:noFill/>
         </p:spPr>
         <p:txBody>
-          <a:bodyPr wrap="square" lIns="45720" rIns="45720" tIns="18288" bIns="18288">
+          <a:bodyPr wrap="square" lIns="45720" tIns="18288" rIns="45720" bIns="18288">
             <a:spAutoFit/>
           </a:bodyPr>
           <a:lstStyle/>
@@ -10417,7 +11836,7 @@
           <a:noFill/>
         </p:spPr>
         <p:txBody>
-          <a:bodyPr wrap="square" lIns="45720" rIns="45720" tIns="18288" bIns="18288">
+          <a:bodyPr wrap="square" lIns="45720" tIns="18288" rIns="45720" bIns="18288">
             <a:spAutoFit/>
           </a:bodyPr>
           <a:lstStyle/>
@@ -10477,6 +11896,7 @@
           <a:lstStyle/>
           <a:p>
             <a:pPr algn="ctr"/>
+            <a:endParaRPr/>
           </a:p>
         </p:txBody>
       </p:sp>
@@ -10497,7 +11917,7 @@
           <a:noFill/>
         </p:spPr>
         <p:txBody>
-          <a:bodyPr wrap="square" lIns="45720" rIns="45720" tIns="18288" bIns="18288">
+          <a:bodyPr wrap="square" lIns="45720" tIns="18288" rIns="45720" bIns="18288">
             <a:spAutoFit/>
           </a:bodyPr>
           <a:lstStyle/>
@@ -10635,7 +12055,7 @@
           <a:noFill/>
         </p:spPr>
         <p:txBody>
-          <a:bodyPr wrap="square" lIns="45720" rIns="45720" tIns="18288" bIns="18288">
+          <a:bodyPr wrap="square" lIns="45720" tIns="18288" rIns="45720" bIns="18288">
             <a:spAutoFit/>
           </a:bodyPr>
           <a:lstStyle/>
@@ -10694,7 +12114,7 @@
           <a:noFill/>
         </p:spPr>
         <p:txBody>
-          <a:bodyPr wrap="square" lIns="45720" rIns="45720" tIns="18288" bIns="18288">
+          <a:bodyPr wrap="square" lIns="45720" tIns="18288" rIns="45720" bIns="18288">
             <a:spAutoFit/>
           </a:bodyPr>
           <a:lstStyle/>
@@ -10729,7 +12149,7 @@
           <a:noFill/>
         </p:spPr>
         <p:txBody>
-          <a:bodyPr wrap="square" lIns="45720" rIns="45720" tIns="18288" bIns="18288">
+          <a:bodyPr wrap="square" lIns="45720" tIns="18288" rIns="45720" bIns="18288">
             <a:spAutoFit/>
           </a:bodyPr>
           <a:lstStyle/>
@@ -10756,7 +12176,7 @@
 </file>
 
 <file path=ppt/slides/slide8.xml><?xml version="1.0" encoding="utf-8"?>
-<p:sld xmlns:a="http://schemas.openxmlformats.org/drawingml/2006/main" xmlns:p="http://schemas.openxmlformats.org/presentationml/2006/main" xmlns:r="http://schemas.openxmlformats.org/officeDocument/2006/relationships">
+<p:sld xmlns:a="http://schemas.openxmlformats.org/drawingml/2006/main" xmlns:r="http://schemas.openxmlformats.org/officeDocument/2006/relationships" xmlns:p="http://schemas.openxmlformats.org/presentationml/2006/main">
   <p:cSld>
     <p:spTree>
       <p:nvGrpSpPr>
@@ -10764,7 +12184,14 @@
         <p:cNvGrpSpPr/>
         <p:nvPr/>
       </p:nvGrpSpPr>
-      <p:grpSpPr/>
+      <p:grpSpPr>
+        <a:xfrm>
+          <a:off x="0" y="0"/>
+          <a:ext cx="0" cy="0"/>
+          <a:chOff x="0" y="0"/>
+          <a:chExt cx="0" cy="0"/>
+        </a:xfrm>
+      </p:grpSpPr>
       <p:sp>
         <p:nvSpPr>
           <p:cNvPr id="2" name="Rectangle 1"/>
@@ -10805,6 +12232,7 @@
           <a:lstStyle/>
           <a:p>
             <a:pPr algn="ctr"/>
+            <a:endParaRPr/>
           </a:p>
         </p:txBody>
       </p:sp>
@@ -10825,7 +12253,7 @@
           <a:noFill/>
         </p:spPr>
         <p:txBody>
-          <a:bodyPr wrap="square" lIns="45720" rIns="45720" tIns="18288" bIns="18288">
+          <a:bodyPr wrap="square" lIns="45720" tIns="18288" rIns="45720" bIns="18288">
             <a:spAutoFit/>
           </a:bodyPr>
           <a:lstStyle/>
@@ -10860,7 +12288,7 @@
           <a:noFill/>
         </p:spPr>
         <p:txBody>
-          <a:bodyPr wrap="square" lIns="45720" rIns="45720" tIns="18288" bIns="18288">
+          <a:bodyPr wrap="square" lIns="45720" tIns="18288" rIns="45720" bIns="18288">
             <a:spAutoFit/>
           </a:bodyPr>
           <a:lstStyle/>
@@ -10895,7 +12323,7 @@
           <a:noFill/>
         </p:spPr>
         <p:txBody>
-          <a:bodyPr wrap="square" lIns="45720" rIns="45720" tIns="18288" bIns="18288">
+          <a:bodyPr wrap="square" lIns="45720" tIns="18288" rIns="45720" bIns="18288">
             <a:spAutoFit/>
           </a:bodyPr>
           <a:lstStyle/>
@@ -10955,6 +12383,7 @@
           <a:lstStyle/>
           <a:p>
             <a:pPr algn="ctr"/>
+            <a:endParaRPr/>
           </a:p>
         </p:txBody>
       </p:sp>
@@ -10994,7 +12423,7 @@
           </a:fontRef>
         </p:style>
         <p:txBody>
-          <a:bodyPr rtlCol="0" anchor="ctr" tIns="18288"/>
+          <a:bodyPr tIns="18288" rtlCol="0" anchor="ctr"/>
           <a:lstStyle/>
           <a:p>
             <a:pPr algn="ctr"/>
@@ -11026,7 +12455,7 @@
           <a:noFill/>
         </p:spPr>
         <p:txBody>
-          <a:bodyPr wrap="square" lIns="45720" rIns="45720" tIns="18288" bIns="18288">
+          <a:bodyPr wrap="square" lIns="45720" tIns="18288" rIns="45720" bIns="18288">
             <a:spAutoFit/>
           </a:bodyPr>
           <a:lstStyle/>
@@ -11061,7 +12490,7 @@
           <a:noFill/>
         </p:spPr>
         <p:txBody>
-          <a:bodyPr wrap="square" lIns="45720" rIns="45720" tIns="18288" bIns="18288">
+          <a:bodyPr wrap="square" lIns="45720" tIns="18288" rIns="45720" bIns="18288">
             <a:spAutoFit/>
           </a:bodyPr>
           <a:lstStyle/>
@@ -11133,6 +12562,7 @@
           <a:lstStyle/>
           <a:p>
             <a:pPr algn="ctr"/>
+            <a:endParaRPr/>
           </a:p>
         </p:txBody>
       </p:sp>
@@ -11172,7 +12602,7 @@
           </a:fontRef>
         </p:style>
         <p:txBody>
-          <a:bodyPr rtlCol="0" anchor="ctr" tIns="18288"/>
+          <a:bodyPr tIns="18288" rtlCol="0" anchor="ctr"/>
           <a:lstStyle/>
           <a:p>
             <a:pPr algn="ctr"/>
@@ -11204,7 +12634,7 @@
           <a:noFill/>
         </p:spPr>
         <p:txBody>
-          <a:bodyPr wrap="square" lIns="45720" rIns="45720" tIns="18288" bIns="18288">
+          <a:bodyPr wrap="square" lIns="45720" tIns="18288" rIns="45720" bIns="18288">
             <a:spAutoFit/>
           </a:bodyPr>
           <a:lstStyle/>
@@ -11239,7 +12669,7 @@
           <a:noFill/>
         </p:spPr>
         <p:txBody>
-          <a:bodyPr wrap="square" lIns="45720" rIns="45720" tIns="18288" bIns="18288">
+          <a:bodyPr wrap="square" lIns="45720" tIns="18288" rIns="45720" bIns="18288">
             <a:spAutoFit/>
           </a:bodyPr>
           <a:lstStyle/>
@@ -11323,6 +12753,7 @@
           <a:lstStyle/>
           <a:p>
             <a:pPr algn="ctr"/>
+            <a:endParaRPr/>
           </a:p>
         </p:txBody>
       </p:sp>
@@ -11362,7 +12793,7 @@
           </a:fontRef>
         </p:style>
         <p:txBody>
-          <a:bodyPr rtlCol="0" anchor="ctr" tIns="18288"/>
+          <a:bodyPr tIns="18288" rtlCol="0" anchor="ctr"/>
           <a:lstStyle/>
           <a:p>
             <a:pPr algn="ctr"/>
@@ -11394,7 +12825,7 @@
           <a:noFill/>
         </p:spPr>
         <p:txBody>
-          <a:bodyPr wrap="square" lIns="45720" rIns="45720" tIns="18288" bIns="18288">
+          <a:bodyPr wrap="square" lIns="45720" tIns="18288" rIns="45720" bIns="18288">
             <a:spAutoFit/>
           </a:bodyPr>
           <a:lstStyle/>
@@ -11429,7 +12860,7 @@
           <a:noFill/>
         </p:spPr>
         <p:txBody>
-          <a:bodyPr wrap="square" lIns="45720" rIns="45720" tIns="18288" bIns="18288">
+          <a:bodyPr wrap="square" lIns="45720" tIns="18288" rIns="45720" bIns="18288">
             <a:spAutoFit/>
           </a:bodyPr>
           <a:lstStyle/>
@@ -11476,7 +12907,7 @@
           <a:noFill/>
         </p:spPr>
         <p:txBody>
-          <a:bodyPr wrap="square" lIns="45720" rIns="45720" tIns="18288" bIns="18288">
+          <a:bodyPr wrap="square" lIns="45720" tIns="18288" rIns="45720" bIns="18288">
             <a:spAutoFit/>
           </a:bodyPr>
           <a:lstStyle/>
@@ -11511,7 +12942,7 @@
           <a:noFill/>
         </p:spPr>
         <p:txBody>
-          <a:bodyPr wrap="square" lIns="45720" rIns="45720" tIns="18288" bIns="18288">
+          <a:bodyPr wrap="square" lIns="45720" tIns="18288" rIns="45720" bIns="18288">
             <a:spAutoFit/>
           </a:bodyPr>
           <a:lstStyle/>
@@ -11546,7 +12977,7 @@
           <a:noFill/>
         </p:spPr>
         <p:txBody>
-          <a:bodyPr wrap="square" lIns="45720" rIns="45720" tIns="18288" bIns="18288">
+          <a:bodyPr wrap="square" lIns="45720" tIns="18288" rIns="45720" bIns="18288">
             <a:spAutoFit/>
           </a:bodyPr>
           <a:lstStyle/>
@@ -11573,7 +13004,7 @@
 </file>
 
 <file path=ppt/slides/slide9.xml><?xml version="1.0" encoding="utf-8"?>
-<p:sld xmlns:a="http://schemas.openxmlformats.org/drawingml/2006/main" xmlns:p="http://schemas.openxmlformats.org/presentationml/2006/main" xmlns:r="http://schemas.openxmlformats.org/officeDocument/2006/relationships">
+<p:sld xmlns:a="http://schemas.openxmlformats.org/drawingml/2006/main" xmlns:r="http://schemas.openxmlformats.org/officeDocument/2006/relationships" xmlns:p="http://schemas.openxmlformats.org/presentationml/2006/main">
   <p:cSld>
     <p:spTree>
       <p:nvGrpSpPr>
@@ -11581,7 +13012,14 @@
         <p:cNvGrpSpPr/>
         <p:nvPr/>
       </p:nvGrpSpPr>
-      <p:grpSpPr/>
+      <p:grpSpPr>
+        <a:xfrm>
+          <a:off x="0" y="0"/>
+          <a:ext cx="0" cy="0"/>
+          <a:chOff x="0" y="0"/>
+          <a:chExt cx="0" cy="0"/>
+        </a:xfrm>
+      </p:grpSpPr>
       <p:sp>
         <p:nvSpPr>
           <p:cNvPr id="2" name="Rectangle 1"/>
@@ -11622,6 +13060,7 @@
           <a:lstStyle/>
           <a:p>
             <a:pPr algn="ctr"/>
+            <a:endParaRPr/>
           </a:p>
         </p:txBody>
       </p:sp>
@@ -11634,7 +13073,7 @@
         <p:spPr>
           <a:xfrm>
             <a:off x="457200" y="228600"/>
-            <a:ext cx="11247120" cy="640080"/>
+            <a:ext cx="11247120" cy="498598"/>
           </a:xfrm>
           <a:prstGeom prst="rect">
             <a:avLst/>
@@ -11642,34 +13081,40 @@
           <a:noFill/>
         </p:spPr>
         <p:txBody>
-          <a:bodyPr wrap="square" lIns="45720" rIns="45720" tIns="18288" bIns="18288">
+          <a:bodyPr wrap="square" lIns="45720" tIns="18288" rIns="45720" bIns="18288">
             <a:spAutoFit/>
           </a:bodyPr>
           <a:lstStyle/>
           <a:p>
             <a:pPr algn="l"/>
             <a:r>
-              <a:rPr sz="3000" b="1">
+              <a:rPr lang="pt-BR" sz="3000" b="1" dirty="0" err="1">
                 <a:solidFill>
                   <a:srgbClr val="1A4480"/>
                 </a:solidFill>
                 <a:latin typeface="Calibri"/>
               </a:rPr>
-              <a:t>Transformando Texto em "Coordenadas"</a:t>
-            </a:r>
-          </a:p>
-        </p:txBody>
-      </p:sp>
-      <p:sp>
-        <p:nvSpPr>
-          <p:cNvPr id="4" name="TextBox 3"/>
+              <a:t>Embeddings</a:t>
+            </a:r>
+            <a:endParaRPr sz="3000" b="1" dirty="0">
+              <a:solidFill>
+                <a:srgbClr val="1A4480"/>
+              </a:solidFill>
+              <a:latin typeface="Calibri"/>
+            </a:endParaRPr>
+          </a:p>
+        </p:txBody>
+      </p:sp>
+      <p:sp>
+        <p:nvSpPr>
+          <p:cNvPr id="5" name="TextBox 4"/>
           <p:cNvSpPr txBox="1"/>
           <p:nvPr/>
         </p:nvSpPr>
         <p:spPr>
           <a:xfrm>
-            <a:off x="457200" y="777240"/>
-            <a:ext cx="11247120" cy="365760"/>
+            <a:off x="548640" y="951474"/>
+            <a:ext cx="10972800" cy="365760"/>
           </a:xfrm>
           <a:prstGeom prst="rect">
             <a:avLst/>
@@ -11677,34 +13122,124 @@
           <a:noFill/>
         </p:spPr>
         <p:txBody>
-          <a:bodyPr wrap="square" lIns="45720" rIns="45720" tIns="18288" bIns="18288">
+          <a:bodyPr wrap="square" lIns="45720" tIns="18288" rIns="45720" bIns="18288">
             <a:spAutoFit/>
           </a:bodyPr>
           <a:lstStyle/>
           <a:p>
             <a:pPr algn="l"/>
             <a:r>
-              <a:rPr sz="1600" b="0">
-                <a:solidFill>
-                  <a:srgbClr val="555555"/>
-                </a:solidFill>
-                <a:latin typeface="Calibri"/>
-              </a:rPr>
-              <a:t>Como o computador entende o significado de um trecho</a:t>
-            </a:r>
-          </a:p>
-        </p:txBody>
-      </p:sp>
-      <p:sp>
-        <p:nvSpPr>
-          <p:cNvPr id="5" name="TextBox 4"/>
+              <a:rPr sz="2000" b="1" dirty="0">
+                <a:solidFill>
+                  <a:srgbClr val="1A4480"/>
+                </a:solidFill>
+                <a:latin typeface="Calibri"/>
+              </a:rPr>
+              <a:t>🧬 A </a:t>
+            </a:r>
+            <a:r>
+              <a:rPr sz="2000" b="1" dirty="0" err="1">
+                <a:solidFill>
+                  <a:srgbClr val="1A4480"/>
+                </a:solidFill>
+                <a:latin typeface="Calibri"/>
+              </a:rPr>
+              <a:t>ideia</a:t>
+            </a:r>
+            <a:r>
+              <a:rPr sz="2000" b="1" dirty="0">
+                <a:solidFill>
+                  <a:srgbClr val="1A4480"/>
+                </a:solidFill>
+                <a:latin typeface="Calibri"/>
+              </a:rPr>
+              <a:t>: </a:t>
+            </a:r>
+            <a:r>
+              <a:rPr sz="2000" b="1" dirty="0" err="1">
+                <a:solidFill>
+                  <a:srgbClr val="1A4480"/>
+                </a:solidFill>
+                <a:latin typeface="Calibri"/>
+              </a:rPr>
+              <a:t>cada</a:t>
+            </a:r>
+            <a:r>
+              <a:rPr sz="2000" b="1" dirty="0">
+                <a:solidFill>
+                  <a:srgbClr val="1A4480"/>
+                </a:solidFill>
+                <a:latin typeface="Calibri"/>
+              </a:rPr>
+              <a:t> </a:t>
+            </a:r>
+            <a:r>
+              <a:rPr sz="2000" b="1" dirty="0" err="1">
+                <a:solidFill>
+                  <a:srgbClr val="1A4480"/>
+                </a:solidFill>
+                <a:latin typeface="Calibri"/>
+              </a:rPr>
+              <a:t>trecho</a:t>
+            </a:r>
+            <a:r>
+              <a:rPr sz="2000" b="1" dirty="0">
+                <a:solidFill>
+                  <a:srgbClr val="1A4480"/>
+                </a:solidFill>
+                <a:latin typeface="Calibri"/>
+              </a:rPr>
+              <a:t> </a:t>
+            </a:r>
+            <a:r>
+              <a:rPr sz="2000" b="1" dirty="0" err="1">
+                <a:solidFill>
+                  <a:srgbClr val="1A4480"/>
+                </a:solidFill>
+                <a:latin typeface="Calibri"/>
+              </a:rPr>
+              <a:t>vira</a:t>
+            </a:r>
+            <a:r>
+              <a:rPr sz="2000" b="1" dirty="0">
+                <a:solidFill>
+                  <a:srgbClr val="1A4480"/>
+                </a:solidFill>
+                <a:latin typeface="Calibri"/>
+              </a:rPr>
+              <a:t> um "DNA </a:t>
+            </a:r>
+            <a:r>
+              <a:rPr sz="2000" b="1" dirty="0" err="1">
+                <a:solidFill>
+                  <a:srgbClr val="1A4480"/>
+                </a:solidFill>
+                <a:latin typeface="Calibri"/>
+              </a:rPr>
+              <a:t>numérico</a:t>
+            </a:r>
+            <a:r>
+              <a:rPr sz="2000" b="1" dirty="0">
+                <a:solidFill>
+                  <a:srgbClr val="1A4480"/>
+                </a:solidFill>
+                <a:latin typeface="Calibri"/>
+              </a:rPr>
+              <a:t>"</a:t>
+            </a:r>
+          </a:p>
+        </p:txBody>
+      </p:sp>
+      <p:sp>
+        <p:nvSpPr>
+          <p:cNvPr id="6" name="TextBox 5"/>
           <p:cNvSpPr txBox="1"/>
           <p:nvPr/>
         </p:nvSpPr>
         <p:spPr>
           <a:xfrm>
-            <a:off x="548640" y="1280160"/>
-            <a:ext cx="10972800" cy="365760"/>
+            <a:off x="731520" y="1527297"/>
+            <a:ext cx="10972800" cy="729430"/>
           </a:xfrm>
           <a:prstGeom prst="rect">
             <a:avLst/>
@@ -11712,79 +13247,194 @@
           <a:noFill/>
         </p:spPr>
         <p:txBody>
-          <a:bodyPr wrap="square" lIns="45720" rIns="45720" tIns="18288" bIns="18288">
+          <a:bodyPr wrap="square" lIns="45720" tIns="18288" rIns="45720" bIns="18288">
             <a:spAutoFit/>
           </a:bodyPr>
           <a:lstStyle/>
           <a:p>
             <a:pPr algn="l"/>
             <a:r>
-              <a:rPr sz="2000" b="1">
-                <a:solidFill>
-                  <a:srgbClr val="1A4480"/>
-                </a:solidFill>
-                <a:latin typeface="Calibri"/>
-              </a:rPr>
-              <a:t>🧬 A ideia: cada trecho vira um "DNA numérico"</a:t>
-            </a:r>
-          </a:p>
-        </p:txBody>
-      </p:sp>
-      <p:sp>
-        <p:nvSpPr>
-          <p:cNvPr id="6" name="TextBox 5"/>
-          <p:cNvSpPr txBox="1"/>
-          <p:nvPr/>
-        </p:nvSpPr>
-        <p:spPr>
-          <a:xfrm>
-            <a:off x="731520" y="1737360"/>
-            <a:ext cx="10972800" cy="1371600"/>
-          </a:xfrm>
-          <a:prstGeom prst="rect">
-            <a:avLst/>
-          </a:prstGeom>
-          <a:noFill/>
-        </p:spPr>
-        <p:txBody>
-          <a:bodyPr wrap="square" lIns="45720" rIns="45720" tIns="18288" bIns="18288">
-            <a:spAutoFit/>
-          </a:bodyPr>
-          <a:lstStyle/>
-          <a:p>
-            <a:pPr algn="l"/>
-            <a:r>
-              <a:rPr sz="1500" b="0">
-                <a:solidFill>
-                  <a:srgbClr val="222222"/>
-                </a:solidFill>
-                <a:latin typeface="Calibri"/>
-              </a:rPr>
-              <a:t>Um modelo de IA lê o texto e gera uma lista de 1024 números.</a:t>
-            </a:r>
-          </a:p>
-          <a:p>
-            <a:pPr algn="l"/>
-            <a:r>
-              <a:rPr sz="1500" b="0">
-                <a:solidFill>
-                  <a:srgbClr val="222222"/>
-                </a:solidFill>
-                <a:latin typeface="Calibri"/>
-              </a:rPr>
-              <a:t>Trechos com significado parecido geram números parecidos.</a:t>
-            </a:r>
-          </a:p>
-          <a:p>
-            <a:pPr algn="l"/>
-            <a:r>
-              <a:rPr sz="1500" b="0">
-                <a:solidFill>
-                  <a:srgbClr val="222222"/>
-                </a:solidFill>
-                <a:latin typeface="Calibri"/>
-              </a:rPr>
-              <a:t>→ Computador consegue "buscar por significado", não só por palavra-chave.</a:t>
+              <a:rPr lang="pt-BR" sz="1500" b="0" dirty="0">
+                <a:solidFill>
+                  <a:srgbClr val="222222"/>
+                </a:solidFill>
+                <a:latin typeface="Calibri"/>
+              </a:rPr>
+              <a:t>O modelo de </a:t>
+            </a:r>
+            <a:r>
+              <a:rPr lang="pt-BR" sz="1500" b="0" dirty="0" err="1">
+                <a:solidFill>
+                  <a:srgbClr val="222222"/>
+                </a:solidFill>
+                <a:latin typeface="Calibri"/>
+              </a:rPr>
+              <a:t>embeddings</a:t>
+            </a:r>
+            <a:r>
+              <a:rPr lang="pt-BR" sz="1500" b="0" dirty="0">
+                <a:solidFill>
+                  <a:srgbClr val="222222"/>
+                </a:solidFill>
+                <a:latin typeface="Calibri"/>
+              </a:rPr>
+              <a:t> gera um vetor </a:t>
+            </a:r>
+            <a:r>
+              <a:rPr sz="1500" b="0" dirty="0">
+                <a:solidFill>
+                  <a:srgbClr val="222222"/>
+                </a:solidFill>
+                <a:latin typeface="Calibri"/>
+              </a:rPr>
+              <a:t>1024 </a:t>
+            </a:r>
+            <a:r>
+              <a:rPr lang="pt-BR" sz="1500" b="0" dirty="0">
+                <a:solidFill>
+                  <a:srgbClr val="222222"/>
+                </a:solidFill>
+                <a:latin typeface="Calibri"/>
+              </a:rPr>
+              <a:t>dimensões.</a:t>
+            </a:r>
+          </a:p>
+          <a:p>
+            <a:pPr algn="l"/>
+            <a:endParaRPr sz="1500" b="0" dirty="0">
+              <a:solidFill>
+                <a:srgbClr val="222222"/>
+              </a:solidFill>
+              <a:latin typeface="Calibri"/>
+            </a:endParaRPr>
+          </a:p>
+          <a:p>
+            <a:pPr algn="l"/>
+            <a:r>
+              <a:rPr sz="1500" b="0" dirty="0" err="1">
+                <a:solidFill>
+                  <a:srgbClr val="222222"/>
+                </a:solidFill>
+                <a:latin typeface="Calibri"/>
+              </a:rPr>
+              <a:t>Computador</a:t>
+            </a:r>
+            <a:r>
+              <a:rPr sz="1500" b="0" dirty="0">
+                <a:solidFill>
+                  <a:srgbClr val="222222"/>
+                </a:solidFill>
+                <a:latin typeface="Calibri"/>
+              </a:rPr>
+              <a:t> </a:t>
+            </a:r>
+            <a:r>
+              <a:rPr sz="1500" b="0" dirty="0" err="1">
+                <a:solidFill>
+                  <a:srgbClr val="222222"/>
+                </a:solidFill>
+                <a:latin typeface="Calibri"/>
+              </a:rPr>
+              <a:t>consegue</a:t>
+            </a:r>
+            <a:r>
+              <a:rPr sz="1500" b="0" dirty="0">
+                <a:solidFill>
+                  <a:srgbClr val="222222"/>
+                </a:solidFill>
+                <a:latin typeface="Calibri"/>
+              </a:rPr>
+              <a:t> "</a:t>
+            </a:r>
+            <a:r>
+              <a:rPr sz="1500" b="0" dirty="0" err="1">
+                <a:solidFill>
+                  <a:srgbClr val="222222"/>
+                </a:solidFill>
+                <a:latin typeface="Calibri"/>
+              </a:rPr>
+              <a:t>buscar</a:t>
+            </a:r>
+            <a:r>
+              <a:rPr sz="1500" b="0" dirty="0">
+                <a:solidFill>
+                  <a:srgbClr val="222222"/>
+                </a:solidFill>
+                <a:latin typeface="Calibri"/>
+              </a:rPr>
+              <a:t> por </a:t>
+            </a:r>
+            <a:r>
+              <a:rPr sz="1500" b="0" dirty="0" err="1">
+                <a:solidFill>
+                  <a:srgbClr val="222222"/>
+                </a:solidFill>
+                <a:latin typeface="Calibri"/>
+              </a:rPr>
+              <a:t>significado</a:t>
+            </a:r>
+            <a:r>
+              <a:rPr sz="1500" b="0" dirty="0">
+                <a:solidFill>
+                  <a:srgbClr val="222222"/>
+                </a:solidFill>
+                <a:latin typeface="Calibri"/>
+              </a:rPr>
+              <a:t>", </a:t>
+            </a:r>
+            <a:r>
+              <a:rPr sz="1500" b="0" dirty="0" err="1">
+                <a:solidFill>
+                  <a:srgbClr val="222222"/>
+                </a:solidFill>
+                <a:latin typeface="Calibri"/>
+              </a:rPr>
+              <a:t>não</a:t>
+            </a:r>
+            <a:r>
+              <a:rPr sz="1500" b="0" dirty="0">
+                <a:solidFill>
+                  <a:srgbClr val="222222"/>
+                </a:solidFill>
+                <a:latin typeface="Calibri"/>
+              </a:rPr>
+              <a:t> </a:t>
+            </a:r>
+            <a:r>
+              <a:rPr sz="1500" b="0" dirty="0" err="1">
+                <a:solidFill>
+                  <a:srgbClr val="222222"/>
+                </a:solidFill>
+                <a:latin typeface="Calibri"/>
+              </a:rPr>
+              <a:t>só</a:t>
+            </a:r>
+            <a:r>
+              <a:rPr sz="1500" b="0" dirty="0">
+                <a:solidFill>
+                  <a:srgbClr val="222222"/>
+                </a:solidFill>
+                <a:latin typeface="Calibri"/>
+              </a:rPr>
+              <a:t> por </a:t>
+            </a:r>
+            <a:r>
+              <a:rPr sz="1500" b="0" dirty="0" err="1">
+                <a:solidFill>
+                  <a:srgbClr val="222222"/>
+                </a:solidFill>
+                <a:latin typeface="Calibri"/>
+              </a:rPr>
+              <a:t>palavra-chave</a:t>
+            </a:r>
+            <a:r>
+              <a:rPr sz="1500" b="0" dirty="0">
+                <a:solidFill>
+                  <a:srgbClr val="222222"/>
+                </a:solidFill>
+                <a:latin typeface="Calibri"/>
+              </a:rPr>
+              <a:t>.</a:t>
             </a:r>
           </a:p>
         </p:txBody>
@@ -11797,7 +13447,7 @@
         </p:nvSpPr>
         <p:spPr>
           <a:xfrm>
-            <a:off x="548640" y="3383280"/>
+            <a:off x="548640" y="2880361"/>
             <a:ext cx="5486400" cy="2194560"/>
           </a:xfrm>
           <a:prstGeom prst="roundRect">
@@ -11831,6 +13481,7 @@
           <a:lstStyle/>
           <a:p>
             <a:pPr algn="ctr"/>
+            <a:endParaRPr/>
           </a:p>
         </p:txBody>
       </p:sp>
@@ -11842,7 +13493,7 @@
         </p:nvSpPr>
         <p:spPr>
           <a:xfrm>
-            <a:off x="731520" y="3520440"/>
+            <a:off x="731520" y="3017521"/>
             <a:ext cx="5120640" cy="457200"/>
           </a:xfrm>
           <a:prstGeom prst="rect">
@@ -11851,7 +13502,7 @@
           <a:noFill/>
         </p:spPr>
         <p:txBody>
-          <a:bodyPr wrap="square" lIns="45720" rIns="45720" tIns="18288" bIns="18288">
+          <a:bodyPr wrap="square" lIns="45720" tIns="18288" rIns="45720" bIns="18288">
             <a:spAutoFit/>
           </a:bodyPr>
           <a:lstStyle/>
@@ -11877,7 +13528,7 @@
         </p:nvSpPr>
         <p:spPr>
           <a:xfrm>
-            <a:off x="731520" y="3977639"/>
+            <a:off x="731520" y="3474720"/>
             <a:ext cx="5120640" cy="1554480"/>
           </a:xfrm>
           <a:prstGeom prst="rect">
@@ -11886,56 +13537,242 @@
           <a:noFill/>
         </p:spPr>
         <p:txBody>
-          <a:bodyPr wrap="square" lIns="45720" rIns="45720" tIns="18288" bIns="18288">
+          <a:bodyPr wrap="square" lIns="45720" tIns="18288" rIns="45720" bIns="18288">
             <a:spAutoFit/>
           </a:bodyPr>
           <a:lstStyle/>
           <a:p>
             <a:pPr algn="l"/>
             <a:r>
-              <a:rPr sz="1400" b="0">
-                <a:solidFill>
-                  <a:srgbClr val="222222"/>
-                </a:solidFill>
-                <a:latin typeface="Calibri"/>
-              </a:rPr>
-              <a:t>Pergunta: "prazo de revisão tarifária"</a:t>
-            </a:r>
-          </a:p>
-          <a:p>
-            <a:pPr algn="l"/>
-            <a:r>
-              <a:rPr sz="1400" b="0">
-                <a:solidFill>
-                  <a:srgbClr val="222222"/>
-                </a:solidFill>
-                <a:latin typeface="Calibri"/>
-              </a:rPr>
-              <a:t>Encontra: "período da reanálise das tarifas"</a:t>
-            </a:r>
-          </a:p>
-          <a:p>
-            <a:pPr algn="l"/>
-            <a:r>
-              <a:rPr sz="1400" b="0">
-                <a:solidFill>
-                  <a:srgbClr val="222222"/>
-                </a:solidFill>
-                <a:latin typeface="Calibri"/>
-              </a:rPr>
-              <a:t/>
-            </a:r>
-          </a:p>
-          <a:p>
-            <a:pPr algn="l"/>
-            <a:r>
-              <a:rPr sz="1400" b="0">
-                <a:solidFill>
-                  <a:srgbClr val="222222"/>
-                </a:solidFill>
-                <a:latin typeface="Calibri"/>
-              </a:rPr>
-              <a:t>Mesmo sem palavras iguais.</a:t>
+              <a:rPr sz="1400" b="0" dirty="0" err="1">
+                <a:solidFill>
+                  <a:srgbClr val="222222"/>
+                </a:solidFill>
+                <a:latin typeface="Calibri"/>
+              </a:rPr>
+              <a:t>Pergunta</a:t>
+            </a:r>
+            <a:r>
+              <a:rPr sz="1400" b="0" dirty="0">
+                <a:solidFill>
+                  <a:srgbClr val="222222"/>
+                </a:solidFill>
+                <a:latin typeface="Calibri"/>
+              </a:rPr>
+              <a:t>: "</a:t>
+            </a:r>
+            <a:r>
+              <a:rPr sz="1400" b="0" dirty="0" err="1">
+                <a:solidFill>
+                  <a:srgbClr val="222222"/>
+                </a:solidFill>
+                <a:latin typeface="Calibri"/>
+              </a:rPr>
+              <a:t>prazo</a:t>
+            </a:r>
+            <a:r>
+              <a:rPr sz="1400" b="0" dirty="0">
+                <a:solidFill>
+                  <a:srgbClr val="222222"/>
+                </a:solidFill>
+                <a:latin typeface="Calibri"/>
+              </a:rPr>
+              <a:t> de </a:t>
+            </a:r>
+            <a:r>
+              <a:rPr sz="1400" b="0" dirty="0" err="1">
+                <a:solidFill>
+                  <a:srgbClr val="222222"/>
+                </a:solidFill>
+                <a:latin typeface="Calibri"/>
+              </a:rPr>
+              <a:t>revisão</a:t>
+            </a:r>
+            <a:r>
+              <a:rPr sz="1400" b="0" dirty="0">
+                <a:solidFill>
+                  <a:srgbClr val="222222"/>
+                </a:solidFill>
+                <a:latin typeface="Calibri"/>
+              </a:rPr>
+              <a:t> </a:t>
+            </a:r>
+            <a:r>
+              <a:rPr sz="1400" b="0" dirty="0" err="1">
+                <a:solidFill>
+                  <a:srgbClr val="222222"/>
+                </a:solidFill>
+                <a:latin typeface="Calibri"/>
+              </a:rPr>
+              <a:t>tarifária</a:t>
+            </a:r>
+            <a:r>
+              <a:rPr sz="1400" b="0" dirty="0">
+                <a:solidFill>
+                  <a:srgbClr val="222222"/>
+                </a:solidFill>
+                <a:latin typeface="Calibri"/>
+              </a:rPr>
+              <a:t>"</a:t>
+            </a:r>
+          </a:p>
+          <a:p>
+            <a:pPr algn="l"/>
+            <a:r>
+              <a:rPr sz="1400" b="0" dirty="0" err="1">
+                <a:solidFill>
+                  <a:srgbClr val="222222"/>
+                </a:solidFill>
+                <a:latin typeface="Calibri"/>
+              </a:rPr>
+              <a:t>Encontra</a:t>
+            </a:r>
+            <a:r>
+              <a:rPr sz="1400" b="0" dirty="0">
+                <a:solidFill>
+                  <a:srgbClr val="222222"/>
+                </a:solidFill>
+                <a:latin typeface="Calibri"/>
+              </a:rPr>
+              <a:t>: "</a:t>
+            </a:r>
+            <a:r>
+              <a:rPr sz="1400" b="0" dirty="0" err="1">
+                <a:solidFill>
+                  <a:srgbClr val="222222"/>
+                </a:solidFill>
+                <a:latin typeface="Calibri"/>
+              </a:rPr>
+              <a:t>período</a:t>
+            </a:r>
+            <a:r>
+              <a:rPr sz="1400" b="0" dirty="0">
+                <a:solidFill>
+                  <a:srgbClr val="222222"/>
+                </a:solidFill>
+                <a:latin typeface="Calibri"/>
+              </a:rPr>
+              <a:t> da </a:t>
+            </a:r>
+            <a:r>
+              <a:rPr sz="1400" b="0" dirty="0" err="1">
+                <a:solidFill>
+                  <a:srgbClr val="222222"/>
+                </a:solidFill>
+                <a:latin typeface="Calibri"/>
+              </a:rPr>
+              <a:t>reanálise</a:t>
+            </a:r>
+            <a:r>
+              <a:rPr sz="1400" b="0" dirty="0">
+                <a:solidFill>
+                  <a:srgbClr val="222222"/>
+                </a:solidFill>
+                <a:latin typeface="Calibri"/>
+              </a:rPr>
+              <a:t> das </a:t>
+            </a:r>
+            <a:r>
+              <a:rPr sz="1400" b="0" dirty="0" err="1">
+                <a:solidFill>
+                  <a:srgbClr val="222222"/>
+                </a:solidFill>
+                <a:latin typeface="Calibri"/>
+              </a:rPr>
+              <a:t>tarifas</a:t>
+            </a:r>
+            <a:r>
+              <a:rPr sz="1400" b="0" dirty="0">
+                <a:solidFill>
+                  <a:srgbClr val="222222"/>
+                </a:solidFill>
+                <a:latin typeface="Calibri"/>
+              </a:rPr>
+              <a:t>"</a:t>
+            </a:r>
+          </a:p>
+          <a:p>
+            <a:pPr algn="l"/>
+            <a:endParaRPr sz="1400" b="0" dirty="0">
+              <a:solidFill>
+                <a:srgbClr val="222222"/>
+              </a:solidFill>
+              <a:latin typeface="Calibri"/>
+            </a:endParaRPr>
+          </a:p>
+          <a:p>
+            <a:pPr algn="l"/>
+            <a:r>
+              <a:rPr sz="1400" b="0" dirty="0" err="1">
+                <a:solidFill>
+                  <a:srgbClr val="222222"/>
+                </a:solidFill>
+                <a:latin typeface="Calibri"/>
+              </a:rPr>
+              <a:t>Mesmo</a:t>
+            </a:r>
+            <a:r>
+              <a:rPr sz="1400" b="0" dirty="0">
+                <a:solidFill>
+                  <a:srgbClr val="222222"/>
+                </a:solidFill>
+                <a:latin typeface="Calibri"/>
+              </a:rPr>
+              <a:t> </a:t>
+            </a:r>
+            <a:r>
+              <a:rPr sz="1400" b="0" dirty="0" err="1">
+                <a:solidFill>
+                  <a:srgbClr val="222222"/>
+                </a:solidFill>
+                <a:latin typeface="Calibri"/>
+              </a:rPr>
+              <a:t>sem</a:t>
+            </a:r>
+            <a:r>
+              <a:rPr sz="1400" b="0" dirty="0">
+                <a:solidFill>
+                  <a:srgbClr val="222222"/>
+                </a:solidFill>
+                <a:latin typeface="Calibri"/>
+              </a:rPr>
+              <a:t> </a:t>
+            </a:r>
+            <a:r>
+              <a:rPr sz="1400" b="0" dirty="0" err="1">
+                <a:solidFill>
+                  <a:srgbClr val="222222"/>
+                </a:solidFill>
+                <a:latin typeface="Calibri"/>
+              </a:rPr>
+              <a:t>palavras</a:t>
+            </a:r>
+            <a:r>
+              <a:rPr sz="1400" b="0" dirty="0">
+                <a:solidFill>
+                  <a:srgbClr val="222222"/>
+                </a:solidFill>
+                <a:latin typeface="Calibri"/>
+              </a:rPr>
+              <a:t> </a:t>
+            </a:r>
+            <a:r>
+              <a:rPr sz="1400" b="0" dirty="0" err="1">
+                <a:solidFill>
+                  <a:srgbClr val="222222"/>
+                </a:solidFill>
+                <a:latin typeface="Calibri"/>
+              </a:rPr>
+              <a:t>iguais</a:t>
+            </a:r>
+            <a:r>
+              <a:rPr sz="1400" b="0" dirty="0">
+                <a:solidFill>
+                  <a:srgbClr val="222222"/>
+                </a:solidFill>
+                <a:latin typeface="Calibri"/>
+              </a:rPr>
+              <a:t>.</a:t>
             </a:r>
           </a:p>
         </p:txBody>
@@ -11948,7 +13785,7 @@
         </p:nvSpPr>
         <p:spPr>
           <a:xfrm>
-            <a:off x="6309360" y="3383280"/>
+            <a:off x="6309360" y="2880361"/>
             <a:ext cx="5486400" cy="2194560"/>
           </a:xfrm>
           <a:prstGeom prst="roundRect">
@@ -11982,6 +13819,7 @@
           <a:lstStyle/>
           <a:p>
             <a:pPr algn="ctr"/>
+            <a:endParaRPr/>
           </a:p>
         </p:txBody>
       </p:sp>
@@ -11993,7 +13831,7 @@
         </p:nvSpPr>
         <p:spPr>
           <a:xfrm>
-            <a:off x="6492240" y="3520440"/>
+            <a:off x="6492240" y="3017521"/>
             <a:ext cx="5120640" cy="457200"/>
           </a:xfrm>
           <a:prstGeom prst="rect">
@@ -12002,7 +13840,7 @@
           <a:noFill/>
         </p:spPr>
         <p:txBody>
-          <a:bodyPr wrap="square" lIns="45720" rIns="45720" tIns="18288" bIns="18288">
+          <a:bodyPr wrap="square" lIns="45720" tIns="18288" rIns="45720" bIns="18288">
             <a:spAutoFit/>
           </a:bodyPr>
           <a:lstStyle/>
@@ -12028,7 +13866,7 @@
         </p:nvSpPr>
         <p:spPr>
           <a:xfrm>
-            <a:off x="6492240" y="3977639"/>
+            <a:off x="6492240" y="3474720"/>
             <a:ext cx="5120640" cy="1554480"/>
           </a:xfrm>
           <a:prstGeom prst="rect">
@@ -12037,7 +13875,7 @@
           <a:noFill/>
         </p:spPr>
         <p:txBody>
-          <a:bodyPr wrap="square" lIns="45720" rIns="45720" tIns="18288" bIns="18288">
+          <a:bodyPr wrap="square" lIns="45720" tIns="18288" rIns="45720" bIns="18288">
             <a:spAutoFit/>
           </a:bodyPr>
           <a:lstStyle/>
@@ -12067,15 +13905,12 @@
           </a:p>
           <a:p>
             <a:pPr algn="l"/>
-            <a:r>
-              <a:rPr sz="1400" b="0">
-                <a:solidFill>
-                  <a:srgbClr val="222222"/>
-                </a:solidFill>
-                <a:latin typeface="Calibri"/>
-              </a:rPr>
-              <a:t/>
-            </a:r>
+            <a:endParaRPr sz="1400" b="0">
+              <a:solidFill>
+                <a:srgbClr val="222222"/>
+              </a:solidFill>
+              <a:latin typeface="Calibri"/>
+            </a:endParaRPr>
           </a:p>
           <a:p>
             <a:pPr algn="l"/>
@@ -12108,7 +13943,7 @@
           <a:noFill/>
         </p:spPr>
         <p:txBody>
-          <a:bodyPr wrap="square" lIns="45720" rIns="45720" tIns="18288" bIns="18288">
+          <a:bodyPr wrap="square" lIns="45720" tIns="18288" rIns="45720" bIns="18288">
             <a:spAutoFit/>
           </a:bodyPr>
           <a:lstStyle/>
@@ -12143,7 +13978,7 @@
           <a:noFill/>
         </p:spPr>
         <p:txBody>
-          <a:bodyPr wrap="square" lIns="45720" rIns="45720" tIns="18288" bIns="18288">
+          <a:bodyPr wrap="square" lIns="45720" tIns="18288" rIns="45720" bIns="18288">
             <a:spAutoFit/>
           </a:bodyPr>
           <a:lstStyle/>
@@ -12178,7 +14013,7 @@
           <a:noFill/>
         </p:spPr>
         <p:txBody>
-          <a:bodyPr wrap="square" lIns="45720" rIns="45720" tIns="18288" bIns="18288">
+          <a:bodyPr wrap="square" lIns="45720" tIns="18288" rIns="45720" bIns="18288">
             <a:spAutoFit/>
           </a:bodyPr>
           <a:lstStyle/>
@@ -12213,7 +14048,7 @@
           <a:noFill/>
         </p:spPr>
         <p:txBody>
-          <a:bodyPr wrap="square" lIns="45720" rIns="45720" tIns="18288" bIns="18288">
+          <a:bodyPr wrap="square" lIns="45720" tIns="18288" rIns="45720" bIns="18288">
             <a:spAutoFit/>
           </a:bodyPr>
           <a:lstStyle/>

--- a/apresentacao.pptx
+++ b/apresentacao.pptx
@@ -5,21 +5,21 @@
     <p:sldMasterId id="2147483648" r:id="rId1"/>
   </p:sldMasterIdLst>
   <p:sldIdLst>
-    <p:sldId id="256" r:id="rId2"/>
-    <p:sldId id="257" r:id="rId3"/>
-    <p:sldId id="258" r:id="rId4"/>
-    <p:sldId id="259" r:id="rId5"/>
-    <p:sldId id="260" r:id="rId6"/>
-    <p:sldId id="261" r:id="rId7"/>
-    <p:sldId id="262" r:id="rId8"/>
-    <p:sldId id="263" r:id="rId9"/>
-    <p:sldId id="264" r:id="rId10"/>
-    <p:sldId id="265" r:id="rId11"/>
-    <p:sldId id="266" r:id="rId12"/>
-    <p:sldId id="267" r:id="rId13"/>
-    <p:sldId id="268" r:id="rId14"/>
+    <p:sldId id="256" r:id="rId7"/>
+    <p:sldId id="257" r:id="rId8"/>
+    <p:sldId id="258" r:id="rId9"/>
+    <p:sldId id="259" r:id="rId10"/>
+    <p:sldId id="260" r:id="rId11"/>
+    <p:sldId id="261" r:id="rId12"/>
+    <p:sldId id="262" r:id="rId13"/>
+    <p:sldId id="263" r:id="rId14"/>
+    <p:sldId id="264" r:id="rId15"/>
+    <p:sldId id="265" r:id="rId16"/>
+    <p:sldId id="266" r:id="rId17"/>
+    <p:sldId id="267" r:id="rId18"/>
+    <p:sldId id="268" r:id="rId19"/>
   </p:sldIdLst>
-  <p:sldSz cx="12192000" cy="6858000"/>
+  <p:sldSz cx="12191695" cy="6858000" type="screen4x3"/>
   <p:notesSz cx="6858000" cy="9144000"/>
   <p:defaultTextStyle>
     <a:defPPr>
@@ -116,22 +116,6 @@
       </a:defRPr>
     </a:lvl9pPr>
   </p:defaultTextStyle>
-  <p:extLst>
-    <p:ext uri="{EFAFB233-063F-42B5-8137-9DF3F51BA10A}">
-      <p15:sldGuideLst xmlns:p15="http://schemas.microsoft.com/office/powerpoint/2012/main">
-        <p15:guide id="1" orient="horz" pos="2160">
-          <p15:clr>
-            <a:srgbClr val="A4A3A4"/>
-          </p15:clr>
-        </p15:guide>
-        <p15:guide id="2" pos="2880">
-          <p15:clr>
-            <a:srgbClr val="A4A3A4"/>
-          </p15:clr>
-        </p15:guide>
-      </p15:sldGuideLst>
-    </p:ext>
-  </p:extLst>
 </p:presentation>
 </file>
 
@@ -173,9 +157,10 @@
           <a:lstStyle/>
           <a:p>
             <a:r>
-              <a:rPr lang="en-US"/>
+              <a:rPr lang="en-US" smtClean="0"/>
               <a:t>Click to edit Master title style</a:t>
             </a:r>
+            <a:endParaRPr lang="en-US"/>
           </a:p>
         </p:txBody>
       </p:sp>
@@ -291,9 +276,10 @@
           </a:lstStyle>
           <a:p>
             <a:r>
-              <a:rPr lang="en-US"/>
+              <a:rPr lang="en-US" smtClean="0"/>
               <a:t>Click to edit Master subtitle style</a:t>
             </a:r>
+            <a:endParaRPr lang="en-US"/>
           </a:p>
         </p:txBody>
       </p:sp>
@@ -314,7 +300,7 @@
           <a:p>
             <a:fld id="{5BCAD085-E8A6-8845-BD4E-CB4CCA059FC4}" type="datetimeFigureOut">
               <a:rPr lang="en-US" smtClean="0"/>
-              <a:t>4/27/2026</a:t>
+              <a:t>1/27/13</a:t>
             </a:fld>
             <a:endParaRPr lang="en-US"/>
           </a:p>
@@ -356,7 +342,7 @@
           <a:p>
             <a:fld id="{C1FF6DA9-008F-8B48-92A6-B652298478BF}" type="slidenum">
               <a:rPr lang="en-US" smtClean="0"/>
-              <a:t>‹nº›</a:t>
+              <a:t>‹#›</a:t>
             </a:fld>
             <a:endParaRPr lang="en-US"/>
           </a:p>
@@ -408,9 +394,10 @@
           <a:lstStyle/>
           <a:p>
             <a:r>
-              <a:rPr lang="en-US"/>
+              <a:rPr lang="en-US" smtClean="0"/>
               <a:t>Click to edit Master title style</a:t>
             </a:r>
+            <a:endParaRPr lang="en-US"/>
           </a:p>
         </p:txBody>
       </p:sp>
@@ -431,37 +418,38 @@
           <a:p>
             <a:pPr lvl="0"/>
             <a:r>
-              <a:rPr lang="en-US"/>
+              <a:rPr lang="en-US" smtClean="0"/>
               <a:t>Click to edit Master text styles</a:t>
             </a:r>
           </a:p>
           <a:p>
             <a:pPr lvl="1"/>
             <a:r>
-              <a:rPr lang="en-US"/>
+              <a:rPr lang="en-US" smtClean="0"/>
               <a:t>Second level</a:t>
             </a:r>
           </a:p>
           <a:p>
             <a:pPr lvl="2"/>
             <a:r>
-              <a:rPr lang="en-US"/>
+              <a:rPr lang="en-US" smtClean="0"/>
               <a:t>Third level</a:t>
             </a:r>
           </a:p>
           <a:p>
             <a:pPr lvl="3"/>
             <a:r>
-              <a:rPr lang="en-US"/>
+              <a:rPr lang="en-US" smtClean="0"/>
               <a:t>Fourth level</a:t>
             </a:r>
           </a:p>
           <a:p>
             <a:pPr lvl="4"/>
             <a:r>
-              <a:rPr lang="en-US"/>
+              <a:rPr lang="en-US" smtClean="0"/>
               <a:t>Fifth level</a:t>
             </a:r>
+            <a:endParaRPr lang="en-US"/>
           </a:p>
         </p:txBody>
       </p:sp>
@@ -482,7 +470,7 @@
           <a:p>
             <a:fld id="{5BCAD085-E8A6-8845-BD4E-CB4CCA059FC4}" type="datetimeFigureOut">
               <a:rPr lang="en-US" smtClean="0"/>
-              <a:t>4/27/2026</a:t>
+              <a:t>1/27/13</a:t>
             </a:fld>
             <a:endParaRPr lang="en-US"/>
           </a:p>
@@ -524,7 +512,7 @@
           <a:p>
             <a:fld id="{C1FF6DA9-008F-8B48-92A6-B652298478BF}" type="slidenum">
               <a:rPr lang="en-US" smtClean="0"/>
-              <a:t>‹nº›</a:t>
+              <a:t>‹#›</a:t>
             </a:fld>
             <a:endParaRPr lang="en-US"/>
           </a:p>
@@ -581,9 +569,10 @@
           <a:lstStyle/>
           <a:p>
             <a:r>
-              <a:rPr lang="en-US"/>
+              <a:rPr lang="en-US" smtClean="0"/>
               <a:t>Click to edit Master title style</a:t>
             </a:r>
+            <a:endParaRPr lang="en-US"/>
           </a:p>
         </p:txBody>
       </p:sp>
@@ -609,37 +598,38 @@
           <a:p>
             <a:pPr lvl="0"/>
             <a:r>
-              <a:rPr lang="en-US"/>
+              <a:rPr lang="en-US" smtClean="0"/>
               <a:t>Click to edit Master text styles</a:t>
             </a:r>
           </a:p>
           <a:p>
             <a:pPr lvl="1"/>
             <a:r>
-              <a:rPr lang="en-US"/>
+              <a:rPr lang="en-US" smtClean="0"/>
               <a:t>Second level</a:t>
             </a:r>
           </a:p>
           <a:p>
             <a:pPr lvl="2"/>
             <a:r>
-              <a:rPr lang="en-US"/>
+              <a:rPr lang="en-US" smtClean="0"/>
               <a:t>Third level</a:t>
             </a:r>
           </a:p>
           <a:p>
             <a:pPr lvl="3"/>
             <a:r>
-              <a:rPr lang="en-US"/>
+              <a:rPr lang="en-US" smtClean="0"/>
               <a:t>Fourth level</a:t>
             </a:r>
           </a:p>
           <a:p>
             <a:pPr lvl="4"/>
             <a:r>
-              <a:rPr lang="en-US"/>
+              <a:rPr lang="en-US" smtClean="0"/>
               <a:t>Fifth level</a:t>
             </a:r>
+            <a:endParaRPr lang="en-US"/>
           </a:p>
         </p:txBody>
       </p:sp>
@@ -660,7 +650,7 @@
           <a:p>
             <a:fld id="{5BCAD085-E8A6-8845-BD4E-CB4CCA059FC4}" type="datetimeFigureOut">
               <a:rPr lang="en-US" smtClean="0"/>
-              <a:t>4/27/2026</a:t>
+              <a:t>1/27/13</a:t>
             </a:fld>
             <a:endParaRPr lang="en-US"/>
           </a:p>
@@ -702,7 +692,7 @@
           <a:p>
             <a:fld id="{C1FF6DA9-008F-8B48-92A6-B652298478BF}" type="slidenum">
               <a:rPr lang="en-US" smtClean="0"/>
-              <a:t>‹nº›</a:t>
+              <a:t>‹#›</a:t>
             </a:fld>
             <a:endParaRPr lang="en-US"/>
           </a:p>
@@ -754,9 +744,10 @@
           <a:lstStyle/>
           <a:p>
             <a:r>
-              <a:rPr lang="en-US"/>
+              <a:rPr lang="en-US" smtClean="0"/>
               <a:t>Click to edit Master title style</a:t>
             </a:r>
+            <a:endParaRPr lang="en-US"/>
           </a:p>
         </p:txBody>
       </p:sp>
@@ -777,37 +768,38 @@
           <a:p>
             <a:pPr lvl="0"/>
             <a:r>
-              <a:rPr lang="en-US"/>
+              <a:rPr lang="en-US" smtClean="0"/>
               <a:t>Click to edit Master text styles</a:t>
             </a:r>
           </a:p>
           <a:p>
             <a:pPr lvl="1"/>
             <a:r>
-              <a:rPr lang="en-US"/>
+              <a:rPr lang="en-US" smtClean="0"/>
               <a:t>Second level</a:t>
             </a:r>
           </a:p>
           <a:p>
             <a:pPr lvl="2"/>
             <a:r>
-              <a:rPr lang="en-US"/>
+              <a:rPr lang="en-US" smtClean="0"/>
               <a:t>Third level</a:t>
             </a:r>
           </a:p>
           <a:p>
             <a:pPr lvl="3"/>
             <a:r>
-              <a:rPr lang="en-US"/>
+              <a:rPr lang="en-US" smtClean="0"/>
               <a:t>Fourth level</a:t>
             </a:r>
           </a:p>
           <a:p>
             <a:pPr lvl="4"/>
             <a:r>
-              <a:rPr lang="en-US"/>
+              <a:rPr lang="en-US" smtClean="0"/>
               <a:t>Fifth level</a:t>
             </a:r>
+            <a:endParaRPr lang="en-US"/>
           </a:p>
         </p:txBody>
       </p:sp>
@@ -828,7 +820,7 @@
           <a:p>
             <a:fld id="{5BCAD085-E8A6-8845-BD4E-CB4CCA059FC4}" type="datetimeFigureOut">
               <a:rPr lang="en-US" smtClean="0"/>
-              <a:t>4/27/2026</a:t>
+              <a:t>1/27/13</a:t>
             </a:fld>
             <a:endParaRPr lang="en-US"/>
           </a:p>
@@ -870,7 +862,7 @@
           <a:p>
             <a:fld id="{C1FF6DA9-008F-8B48-92A6-B652298478BF}" type="slidenum">
               <a:rPr lang="en-US" smtClean="0"/>
-              <a:t>‹nº›</a:t>
+              <a:t>‹#›</a:t>
             </a:fld>
             <a:endParaRPr lang="en-US"/>
           </a:p>
@@ -931,9 +923,10 @@
           </a:lstStyle>
           <a:p>
             <a:r>
-              <a:rPr lang="en-US"/>
+              <a:rPr lang="en-US" smtClean="0"/>
               <a:t>Click to edit Master title style</a:t>
             </a:r>
+            <a:endParaRPr lang="en-US"/>
           </a:p>
         </p:txBody>
       </p:sp>
@@ -1050,7 +1043,7 @@
           <a:p>
             <a:pPr lvl="0"/>
             <a:r>
-              <a:rPr lang="en-US"/>
+              <a:rPr lang="en-US" smtClean="0"/>
               <a:t>Click to edit Master text styles</a:t>
             </a:r>
           </a:p>
@@ -1073,7 +1066,7 @@
           <a:p>
             <a:fld id="{5BCAD085-E8A6-8845-BD4E-CB4CCA059FC4}" type="datetimeFigureOut">
               <a:rPr lang="en-US" smtClean="0"/>
-              <a:t>4/27/2026</a:t>
+              <a:t>1/27/13</a:t>
             </a:fld>
             <a:endParaRPr lang="en-US"/>
           </a:p>
@@ -1115,7 +1108,7 @@
           <a:p>
             <a:fld id="{C1FF6DA9-008F-8B48-92A6-B652298478BF}" type="slidenum">
               <a:rPr lang="en-US" smtClean="0"/>
-              <a:t>‹nº›</a:t>
+              <a:t>‹#›</a:t>
             </a:fld>
             <a:endParaRPr lang="en-US"/>
           </a:p>
@@ -1167,9 +1160,10 @@
           <a:lstStyle/>
           <a:p>
             <a:r>
-              <a:rPr lang="en-US"/>
+              <a:rPr lang="en-US" smtClean="0"/>
               <a:t>Click to edit Master title style</a:t>
             </a:r>
+            <a:endParaRPr lang="en-US"/>
           </a:p>
         </p:txBody>
       </p:sp>
@@ -1223,37 +1217,38 @@
           <a:p>
             <a:pPr lvl="0"/>
             <a:r>
-              <a:rPr lang="en-US"/>
+              <a:rPr lang="en-US" smtClean="0"/>
               <a:t>Click to edit Master text styles</a:t>
             </a:r>
           </a:p>
           <a:p>
             <a:pPr lvl="1"/>
             <a:r>
-              <a:rPr lang="en-US"/>
+              <a:rPr lang="en-US" smtClean="0"/>
               <a:t>Second level</a:t>
             </a:r>
           </a:p>
           <a:p>
             <a:pPr lvl="2"/>
             <a:r>
-              <a:rPr lang="en-US"/>
+              <a:rPr lang="en-US" smtClean="0"/>
               <a:t>Third level</a:t>
             </a:r>
           </a:p>
           <a:p>
             <a:pPr lvl="3"/>
             <a:r>
-              <a:rPr lang="en-US"/>
+              <a:rPr lang="en-US" smtClean="0"/>
               <a:t>Fourth level</a:t>
             </a:r>
           </a:p>
           <a:p>
             <a:pPr lvl="4"/>
             <a:r>
-              <a:rPr lang="en-US"/>
+              <a:rPr lang="en-US" smtClean="0"/>
               <a:t>Fifth level</a:t>
             </a:r>
+            <a:endParaRPr lang="en-US"/>
           </a:p>
         </p:txBody>
       </p:sp>
@@ -1307,37 +1302,38 @@
           <a:p>
             <a:pPr lvl="0"/>
             <a:r>
-              <a:rPr lang="en-US"/>
+              <a:rPr lang="en-US" smtClean="0"/>
               <a:t>Click to edit Master text styles</a:t>
             </a:r>
           </a:p>
           <a:p>
             <a:pPr lvl="1"/>
             <a:r>
-              <a:rPr lang="en-US"/>
+              <a:rPr lang="en-US" smtClean="0"/>
               <a:t>Second level</a:t>
             </a:r>
           </a:p>
           <a:p>
             <a:pPr lvl="2"/>
             <a:r>
-              <a:rPr lang="en-US"/>
+              <a:rPr lang="en-US" smtClean="0"/>
               <a:t>Third level</a:t>
             </a:r>
           </a:p>
           <a:p>
             <a:pPr lvl="3"/>
             <a:r>
-              <a:rPr lang="en-US"/>
+              <a:rPr lang="en-US" smtClean="0"/>
               <a:t>Fourth level</a:t>
             </a:r>
           </a:p>
           <a:p>
             <a:pPr lvl="4"/>
             <a:r>
-              <a:rPr lang="en-US"/>
+              <a:rPr lang="en-US" smtClean="0"/>
               <a:t>Fifth level</a:t>
             </a:r>
+            <a:endParaRPr lang="en-US"/>
           </a:p>
         </p:txBody>
       </p:sp>
@@ -1358,7 +1354,7 @@
           <a:p>
             <a:fld id="{5BCAD085-E8A6-8845-BD4E-CB4CCA059FC4}" type="datetimeFigureOut">
               <a:rPr lang="en-US" smtClean="0"/>
-              <a:t>4/27/2026</a:t>
+              <a:t>1/27/13</a:t>
             </a:fld>
             <a:endParaRPr lang="en-US"/>
           </a:p>
@@ -1400,7 +1396,7 @@
           <a:p>
             <a:fld id="{C1FF6DA9-008F-8B48-92A6-B652298478BF}" type="slidenum">
               <a:rPr lang="en-US" smtClean="0"/>
-              <a:t>‹nº›</a:t>
+              <a:t>‹#›</a:t>
             </a:fld>
             <a:endParaRPr lang="en-US"/>
           </a:p>
@@ -1456,9 +1452,10 @@
           </a:lstStyle>
           <a:p>
             <a:r>
-              <a:rPr lang="en-US"/>
+              <a:rPr lang="en-US" smtClean="0"/>
               <a:t>Click to edit Master title style</a:t>
             </a:r>
+            <a:endParaRPr lang="en-US"/>
           </a:p>
         </p:txBody>
       </p:sp>
@@ -1521,7 +1518,7 @@
           <a:p>
             <a:pPr lvl="0"/>
             <a:r>
-              <a:rPr lang="en-US"/>
+              <a:rPr lang="en-US" smtClean="0"/>
               <a:t>Click to edit Master text styles</a:t>
             </a:r>
           </a:p>
@@ -1577,37 +1574,38 @@
           <a:p>
             <a:pPr lvl="0"/>
             <a:r>
-              <a:rPr lang="en-US"/>
+              <a:rPr lang="en-US" smtClean="0"/>
               <a:t>Click to edit Master text styles</a:t>
             </a:r>
           </a:p>
           <a:p>
             <a:pPr lvl="1"/>
             <a:r>
-              <a:rPr lang="en-US"/>
+              <a:rPr lang="en-US" smtClean="0"/>
               <a:t>Second level</a:t>
             </a:r>
           </a:p>
           <a:p>
             <a:pPr lvl="2"/>
             <a:r>
-              <a:rPr lang="en-US"/>
+              <a:rPr lang="en-US" smtClean="0"/>
               <a:t>Third level</a:t>
             </a:r>
           </a:p>
           <a:p>
             <a:pPr lvl="3"/>
             <a:r>
-              <a:rPr lang="en-US"/>
+              <a:rPr lang="en-US" smtClean="0"/>
               <a:t>Fourth level</a:t>
             </a:r>
           </a:p>
           <a:p>
             <a:pPr lvl="4"/>
             <a:r>
-              <a:rPr lang="en-US"/>
+              <a:rPr lang="en-US" smtClean="0"/>
               <a:t>Fifth level</a:t>
             </a:r>
+            <a:endParaRPr lang="en-US"/>
           </a:p>
         </p:txBody>
       </p:sp>
@@ -1670,7 +1668,7 @@
           <a:p>
             <a:pPr lvl="0"/>
             <a:r>
-              <a:rPr lang="en-US"/>
+              <a:rPr lang="en-US" smtClean="0"/>
               <a:t>Click to edit Master text styles</a:t>
             </a:r>
           </a:p>
@@ -1726,37 +1724,38 @@
           <a:p>
             <a:pPr lvl="0"/>
             <a:r>
-              <a:rPr lang="en-US"/>
+              <a:rPr lang="en-US" smtClean="0"/>
               <a:t>Click to edit Master text styles</a:t>
             </a:r>
           </a:p>
           <a:p>
             <a:pPr lvl="1"/>
             <a:r>
-              <a:rPr lang="en-US"/>
+              <a:rPr lang="en-US" smtClean="0"/>
               <a:t>Second level</a:t>
             </a:r>
           </a:p>
           <a:p>
             <a:pPr lvl="2"/>
             <a:r>
-              <a:rPr lang="en-US"/>
+              <a:rPr lang="en-US" smtClean="0"/>
               <a:t>Third level</a:t>
             </a:r>
           </a:p>
           <a:p>
             <a:pPr lvl="3"/>
             <a:r>
-              <a:rPr lang="en-US"/>
+              <a:rPr lang="en-US" smtClean="0"/>
               <a:t>Fourth level</a:t>
             </a:r>
           </a:p>
           <a:p>
             <a:pPr lvl="4"/>
             <a:r>
-              <a:rPr lang="en-US"/>
+              <a:rPr lang="en-US" smtClean="0"/>
               <a:t>Fifth level</a:t>
             </a:r>
+            <a:endParaRPr lang="en-US"/>
           </a:p>
         </p:txBody>
       </p:sp>
@@ -1777,7 +1776,7 @@
           <a:p>
             <a:fld id="{5BCAD085-E8A6-8845-BD4E-CB4CCA059FC4}" type="datetimeFigureOut">
               <a:rPr lang="en-US" smtClean="0"/>
-              <a:t>4/27/2026</a:t>
+              <a:t>1/27/13</a:t>
             </a:fld>
             <a:endParaRPr lang="en-US"/>
           </a:p>
@@ -1819,7 +1818,7 @@
           <a:p>
             <a:fld id="{C1FF6DA9-008F-8B48-92A6-B652298478BF}" type="slidenum">
               <a:rPr lang="en-US" smtClean="0"/>
-              <a:t>‹nº›</a:t>
+              <a:t>‹#›</a:t>
             </a:fld>
             <a:endParaRPr lang="en-US"/>
           </a:p>
@@ -1871,9 +1870,10 @@
           <a:lstStyle/>
           <a:p>
             <a:r>
-              <a:rPr lang="en-US"/>
+              <a:rPr lang="en-US" smtClean="0"/>
               <a:t>Click to edit Master title style</a:t>
             </a:r>
+            <a:endParaRPr lang="en-US"/>
           </a:p>
         </p:txBody>
       </p:sp>
@@ -1894,7 +1894,7 @@
           <a:p>
             <a:fld id="{5BCAD085-E8A6-8845-BD4E-CB4CCA059FC4}" type="datetimeFigureOut">
               <a:rPr lang="en-US" smtClean="0"/>
-              <a:t>4/27/2026</a:t>
+              <a:t>1/27/13</a:t>
             </a:fld>
             <a:endParaRPr lang="en-US"/>
           </a:p>
@@ -1936,7 +1936,7 @@
           <a:p>
             <a:fld id="{C1FF6DA9-008F-8B48-92A6-B652298478BF}" type="slidenum">
               <a:rPr lang="en-US" smtClean="0"/>
-              <a:t>‹nº›</a:t>
+              <a:t>‹#›</a:t>
             </a:fld>
             <a:endParaRPr lang="en-US"/>
           </a:p>
@@ -1989,7 +1989,7 @@
           <a:p>
             <a:fld id="{5BCAD085-E8A6-8845-BD4E-CB4CCA059FC4}" type="datetimeFigureOut">
               <a:rPr lang="en-US" smtClean="0"/>
-              <a:t>4/27/2026</a:t>
+              <a:t>1/27/13</a:t>
             </a:fld>
             <a:endParaRPr lang="en-US"/>
           </a:p>
@@ -2031,7 +2031,7 @@
           <a:p>
             <a:fld id="{C1FF6DA9-008F-8B48-92A6-B652298478BF}" type="slidenum">
               <a:rPr lang="en-US" smtClean="0"/>
-              <a:t>‹nº›</a:t>
+              <a:t>‹#›</a:t>
             </a:fld>
             <a:endParaRPr lang="en-US"/>
           </a:p>
@@ -2092,9 +2092,10 @@
           </a:lstStyle>
           <a:p>
             <a:r>
-              <a:rPr lang="en-US"/>
+              <a:rPr lang="en-US" smtClean="0"/>
               <a:t>Click to edit Master title style</a:t>
             </a:r>
+            <a:endParaRPr lang="en-US"/>
           </a:p>
         </p:txBody>
       </p:sp>
@@ -2148,37 +2149,38 @@
           <a:p>
             <a:pPr lvl="0"/>
             <a:r>
-              <a:rPr lang="en-US"/>
+              <a:rPr lang="en-US" smtClean="0"/>
               <a:t>Click to edit Master text styles</a:t>
             </a:r>
           </a:p>
           <a:p>
             <a:pPr lvl="1"/>
             <a:r>
-              <a:rPr lang="en-US"/>
+              <a:rPr lang="en-US" smtClean="0"/>
               <a:t>Second level</a:t>
             </a:r>
           </a:p>
           <a:p>
             <a:pPr lvl="2"/>
             <a:r>
-              <a:rPr lang="en-US"/>
+              <a:rPr lang="en-US" smtClean="0"/>
               <a:t>Third level</a:t>
             </a:r>
           </a:p>
           <a:p>
             <a:pPr lvl="3"/>
             <a:r>
-              <a:rPr lang="en-US"/>
+              <a:rPr lang="en-US" smtClean="0"/>
               <a:t>Fourth level</a:t>
             </a:r>
           </a:p>
           <a:p>
             <a:pPr lvl="4"/>
             <a:r>
-              <a:rPr lang="en-US"/>
+              <a:rPr lang="en-US" smtClean="0"/>
               <a:t>Fifth level</a:t>
             </a:r>
+            <a:endParaRPr lang="en-US"/>
           </a:p>
         </p:txBody>
       </p:sp>
@@ -2241,7 +2243,7 @@
           <a:p>
             <a:pPr lvl="0"/>
             <a:r>
-              <a:rPr lang="en-US"/>
+              <a:rPr lang="en-US" smtClean="0"/>
               <a:t>Click to edit Master text styles</a:t>
             </a:r>
           </a:p>
@@ -2264,7 +2266,7 @@
           <a:p>
             <a:fld id="{5BCAD085-E8A6-8845-BD4E-CB4CCA059FC4}" type="datetimeFigureOut">
               <a:rPr lang="en-US" smtClean="0"/>
-              <a:t>4/27/2026</a:t>
+              <a:t>1/27/13</a:t>
             </a:fld>
             <a:endParaRPr lang="en-US"/>
           </a:p>
@@ -2306,7 +2308,7 @@
           <a:p>
             <a:fld id="{C1FF6DA9-008F-8B48-92A6-B652298478BF}" type="slidenum">
               <a:rPr lang="en-US" smtClean="0"/>
-              <a:t>‹nº›</a:t>
+              <a:t>‹#›</a:t>
             </a:fld>
             <a:endParaRPr lang="en-US"/>
           </a:p>
@@ -2367,9 +2369,10 @@
           </a:lstStyle>
           <a:p>
             <a:r>
-              <a:rPr lang="en-US"/>
+              <a:rPr lang="en-US" smtClean="0"/>
               <a:t>Click to edit Master title style</a:t>
             </a:r>
+            <a:endParaRPr lang="en-US"/>
           </a:p>
         </p:txBody>
       </p:sp>
@@ -2493,7 +2496,7 @@
           <a:p>
             <a:pPr lvl="0"/>
             <a:r>
-              <a:rPr lang="en-US"/>
+              <a:rPr lang="en-US" smtClean="0"/>
               <a:t>Click to edit Master text styles</a:t>
             </a:r>
           </a:p>
@@ -2516,7 +2519,7 @@
           <a:p>
             <a:fld id="{5BCAD085-E8A6-8845-BD4E-CB4CCA059FC4}" type="datetimeFigureOut">
               <a:rPr lang="en-US" smtClean="0"/>
-              <a:t>4/27/2026</a:t>
+              <a:t>1/27/13</a:t>
             </a:fld>
             <a:endParaRPr lang="en-US"/>
           </a:p>
@@ -2558,7 +2561,7 @@
           <a:p>
             <a:fld id="{C1FF6DA9-008F-8B48-92A6-B652298478BF}" type="slidenum">
               <a:rPr lang="en-US" smtClean="0"/>
-              <a:t>‹nº›</a:t>
+              <a:t>‹#›</a:t>
             </a:fld>
             <a:endParaRPr lang="en-US"/>
           </a:p>
@@ -2625,9 +2628,10 @@
           <a:lstStyle/>
           <a:p>
             <a:r>
-              <a:rPr lang="en-US"/>
+              <a:rPr lang="en-US" smtClean="0"/>
               <a:t>Click to edit Master title style</a:t>
             </a:r>
+            <a:endParaRPr lang="en-US"/>
           </a:p>
         </p:txBody>
       </p:sp>
@@ -2658,37 +2662,38 @@
           <a:p>
             <a:pPr lvl="0"/>
             <a:r>
-              <a:rPr lang="en-US"/>
+              <a:rPr lang="en-US" smtClean="0"/>
               <a:t>Click to edit Master text styles</a:t>
             </a:r>
           </a:p>
           <a:p>
             <a:pPr lvl="1"/>
             <a:r>
-              <a:rPr lang="en-US"/>
+              <a:rPr lang="en-US" smtClean="0"/>
               <a:t>Second level</a:t>
             </a:r>
           </a:p>
           <a:p>
             <a:pPr lvl="2"/>
             <a:r>
-              <a:rPr lang="en-US"/>
+              <a:rPr lang="en-US" smtClean="0"/>
               <a:t>Third level</a:t>
             </a:r>
           </a:p>
           <a:p>
             <a:pPr lvl="3"/>
             <a:r>
-              <a:rPr lang="en-US"/>
+              <a:rPr lang="en-US" smtClean="0"/>
               <a:t>Fourth level</a:t>
             </a:r>
           </a:p>
           <a:p>
             <a:pPr lvl="4"/>
             <a:r>
-              <a:rPr lang="en-US"/>
+              <a:rPr lang="en-US" smtClean="0"/>
               <a:t>Fifth level</a:t>
             </a:r>
+            <a:endParaRPr lang="en-US"/>
           </a:p>
         </p:txBody>
       </p:sp>
@@ -2727,7 +2732,7 @@
           <a:p>
             <a:fld id="{5BCAD085-E8A6-8845-BD4E-CB4CCA059FC4}" type="datetimeFigureOut">
               <a:rPr lang="en-US" smtClean="0"/>
-              <a:t>4/27/2026</a:t>
+              <a:t>1/27/13</a:t>
             </a:fld>
             <a:endParaRPr lang="en-US"/>
           </a:p>
@@ -2805,7 +2810,7 @@
           <a:p>
             <a:fld id="{C1FF6DA9-008F-8B48-92A6-B652298478BF}" type="slidenum">
               <a:rPr lang="en-US" smtClean="0"/>
-              <a:t>‹nº›</a:t>
+              <a:t>‹#›</a:t>
             </a:fld>
             <a:endParaRPr lang="en-US"/>
           </a:p>
@@ -3086,7 +3091,7 @@
 </file>
 
 <file path=ppt/slides/slide1.xml><?xml version="1.0" encoding="utf-8"?>
-<p:sld xmlns:a="http://schemas.openxmlformats.org/drawingml/2006/main" xmlns:r="http://schemas.openxmlformats.org/officeDocument/2006/relationships" xmlns:p="http://schemas.openxmlformats.org/presentationml/2006/main">
+<p:sld xmlns:a="http://schemas.openxmlformats.org/drawingml/2006/main" xmlns:p="http://schemas.openxmlformats.org/presentationml/2006/main" xmlns:r="http://schemas.openxmlformats.org/officeDocument/2006/relationships">
   <p:cSld>
     <p:spTree>
       <p:nvGrpSpPr>
@@ -3094,14 +3099,7 @@
         <p:cNvGrpSpPr/>
         <p:nvPr/>
       </p:nvGrpSpPr>
-      <p:grpSpPr>
-        <a:xfrm>
-          <a:off x="0" y="0"/>
-          <a:ext cx="0" cy="0"/>
-          <a:chOff x="0" y="0"/>
-          <a:chExt cx="0" cy="0"/>
-        </a:xfrm>
-      </p:grpSpPr>
+      <p:grpSpPr/>
       <p:sp>
         <p:nvSpPr>
           <p:cNvPr id="2" name="Rectangle 1"/>
@@ -3142,7 +3140,6 @@
           <a:lstStyle/>
           <a:p>
             <a:pPr algn="ctr"/>
-            <a:endParaRPr/>
           </a:p>
         </p:txBody>
       </p:sp>
@@ -3186,7 +3183,6 @@
           <a:lstStyle/>
           <a:p>
             <a:pPr algn="ctr"/>
-            <a:endParaRPr/>
           </a:p>
         </p:txBody>
       </p:sp>
@@ -3207,7 +3203,7 @@
           <a:noFill/>
         </p:spPr>
         <p:txBody>
-          <a:bodyPr wrap="square" lIns="45720" tIns="18288" rIns="45720" bIns="18288">
+          <a:bodyPr wrap="square" lIns="45720" rIns="45720" tIns="18288" bIns="18288">
             <a:spAutoFit/>
           </a:bodyPr>
           <a:lstStyle/>
@@ -3242,7 +3238,7 @@
           <a:noFill/>
         </p:spPr>
         <p:txBody>
-          <a:bodyPr wrap="square" lIns="45720" tIns="18288" rIns="45720" bIns="18288">
+          <a:bodyPr wrap="square" lIns="45720" rIns="45720" tIns="18288" bIns="18288">
             <a:spAutoFit/>
           </a:bodyPr>
           <a:lstStyle/>
@@ -3277,7 +3273,7 @@
           <a:noFill/>
         </p:spPr>
         <p:txBody>
-          <a:bodyPr wrap="square" lIns="45720" tIns="18288" rIns="45720" bIns="18288">
+          <a:bodyPr wrap="square" lIns="45720" rIns="45720" tIns="18288" bIns="18288">
             <a:spAutoFit/>
           </a:bodyPr>
           <a:lstStyle/>
@@ -3304,7 +3300,7 @@
 </file>
 
 <file path=ppt/slides/slide10.xml><?xml version="1.0" encoding="utf-8"?>
-<p:sld xmlns:a="http://schemas.openxmlformats.org/drawingml/2006/main" xmlns:r="http://schemas.openxmlformats.org/officeDocument/2006/relationships" xmlns:p="http://schemas.openxmlformats.org/presentationml/2006/main">
+<p:sld xmlns:a="http://schemas.openxmlformats.org/drawingml/2006/main" xmlns:p="http://schemas.openxmlformats.org/presentationml/2006/main" xmlns:r="http://schemas.openxmlformats.org/officeDocument/2006/relationships">
   <p:cSld>
     <p:spTree>
       <p:nvGrpSpPr>
@@ -3312,14 +3308,7 @@
         <p:cNvGrpSpPr/>
         <p:nvPr/>
       </p:nvGrpSpPr>
-      <p:grpSpPr>
-        <a:xfrm>
-          <a:off x="0" y="0"/>
-          <a:ext cx="0" cy="0"/>
-          <a:chOff x="0" y="0"/>
-          <a:chExt cx="0" cy="0"/>
-        </a:xfrm>
-      </p:grpSpPr>
+      <p:grpSpPr/>
       <p:sp>
         <p:nvSpPr>
           <p:cNvPr id="2" name="Rectangle 1"/>
@@ -3360,7 +3349,6 @@
           <a:lstStyle/>
           <a:p>
             <a:pPr algn="ctr"/>
-            <a:endParaRPr/>
           </a:p>
         </p:txBody>
       </p:sp>
@@ -3381,7 +3369,7 @@
           <a:noFill/>
         </p:spPr>
         <p:txBody>
-          <a:bodyPr wrap="square" lIns="45720" tIns="18288" rIns="45720" bIns="18288">
+          <a:bodyPr wrap="square" lIns="45720" rIns="45720" tIns="18288" bIns="18288">
             <a:spAutoFit/>
           </a:bodyPr>
           <a:lstStyle/>
@@ -3394,7 +3382,7 @@
                 </a:solidFill>
                 <a:latin typeface="Calibri"/>
               </a:rPr>
-              <a:t>Como Encontrar o Trecho Certo</a:t>
+              <a:t>Retriever Híbrido com RRF + Rerank</a:t>
             </a:r>
           </a:p>
         </p:txBody>
@@ -3416,7 +3404,7 @@
           <a:noFill/>
         </p:spPr>
         <p:txBody>
-          <a:bodyPr wrap="square" lIns="45720" tIns="18288" rIns="45720" bIns="18288">
+          <a:bodyPr wrap="square" lIns="45720" rIns="45720" tIns="18288" bIns="18288">
             <a:spAutoFit/>
           </a:bodyPr>
           <a:lstStyle/>
@@ -3429,7 +3417,7 @@
                 </a:solidFill>
                 <a:latin typeface="Calibri"/>
               </a:rPr>
-              <a:t>3 "investigadores" trabalham juntos pra achar a melhor resposta</a:t>
+              <a:t>3 fontes de busca → fusão → reordenação → top 6</a:t>
             </a:r>
           </a:p>
         </p:txBody>
@@ -3470,7 +3458,7 @@
           </a:fontRef>
         </p:style>
         <p:txBody>
-          <a:bodyPr lIns="45720" rtlCol="0" anchor="ctr"/>
+          <a:bodyPr rtlCol="0" anchor="ctr" lIns="45720"/>
           <a:lstStyle/>
           <a:p>
             <a:pPr algn="ctr"/>
@@ -3493,7 +3481,7 @@
         </p:nvSpPr>
         <p:spPr>
           <a:xfrm>
-            <a:off x="2834640" y="1463040"/>
+            <a:off x="2834640" y="1417320"/>
             <a:ext cx="2743200" cy="777240"/>
           </a:xfrm>
           <a:prstGeom prst="roundRect">
@@ -3521,66 +3509,29 @@
           </a:fontRef>
         </p:style>
         <p:txBody>
-          <a:bodyPr lIns="45720" rtlCol="0" anchor="ctr"/>
+          <a:bodyPr rtlCol="0" anchor="ctr" lIns="45720"/>
           <a:lstStyle/>
           <a:p>
             <a:pPr algn="ctr"/>
             <a:r>
-              <a:rPr sz="1300" b="1" dirty="0">
+              <a:rPr sz="1300" b="1">
                 <a:solidFill>
                   <a:srgbClr val="FFFFFF"/>
                 </a:solidFill>
               </a:rPr>
-              <a:t>🎯 </a:t>
-            </a:r>
-            <a:r>
-              <a:rPr sz="1300" b="1" dirty="0" err="1">
+              <a:t>Dense (BGE-M3)</a:t>
+            </a:r>
+          </a:p>
+          <a:p>
+            <a:pPr algn="ctr"/>
+            <a:r>
+              <a:rPr sz="1000">
                 <a:solidFill>
                   <a:srgbClr val="FFFFFF"/>
                 </a:solidFill>
               </a:rPr>
-              <a:t>Investigador</a:t>
-            </a:r>
-            <a:r>
-              <a:rPr sz="1300" b="1" dirty="0">
-                <a:solidFill>
-                  <a:srgbClr val="FFFFFF"/>
-                </a:solidFill>
-              </a:rPr>
-              <a:t> 1</a:t>
-            </a:r>
-          </a:p>
-          <a:p>
-            <a:pPr algn="ctr"/>
-            <a:r>
-              <a:rPr sz="1000" dirty="0" err="1">
-                <a:solidFill>
-                  <a:srgbClr val="FFFFFF"/>
-                </a:solidFill>
-              </a:rPr>
-              <a:t>busca</a:t>
-            </a:r>
-            <a:r>
-              <a:rPr sz="1000" dirty="0">
-                <a:solidFill>
-                  <a:srgbClr val="FFFFFF"/>
-                </a:solidFill>
-              </a:rPr>
-              <a:t> por </a:t>
-            </a:r>
-            <a:r>
-              <a:rPr sz="1000" dirty="0" err="1">
-                <a:solidFill>
-                  <a:srgbClr val="FFFFFF"/>
-                </a:solidFill>
-              </a:rPr>
-              <a:t>significado</a:t>
-            </a:r>
-            <a:endParaRPr sz="1000" dirty="0">
-              <a:solidFill>
-                <a:srgbClr val="FFFFFF"/>
-              </a:solidFill>
-            </a:endParaRPr>
+              <a:t>top 40 por cosseno</a:t>
+            </a:r>
           </a:p>
         </p:txBody>
       </p:sp>
@@ -3592,7 +3543,7 @@
         </p:nvSpPr>
         <p:spPr>
           <a:xfrm>
-            <a:off x="2834640" y="2514600"/>
+            <a:off x="2834640" y="2468880"/>
             <a:ext cx="2743200" cy="777240"/>
           </a:xfrm>
           <a:prstGeom prst="roundRect">
@@ -3620,7 +3571,7 @@
           </a:fontRef>
         </p:style>
         <p:txBody>
-          <a:bodyPr lIns="45720" rtlCol="0" anchor="ctr"/>
+          <a:bodyPr rtlCol="0" anchor="ctr" lIns="45720"/>
           <a:lstStyle/>
           <a:p>
             <a:pPr algn="ctr"/>
@@ -3630,7 +3581,7 @@
                   <a:srgbClr val="FFFFFF"/>
                 </a:solidFill>
               </a:rPr>
-              <a:t>🔤 Investigador 2</a:t>
+              <a:t>Sparse (BGE-M3)</a:t>
             </a:r>
           </a:p>
           <a:p>
@@ -3641,7 +3592,7 @@
                   <a:srgbClr val="FFFFFF"/>
                 </a:solidFill>
               </a:rPr>
-              <a:t>busca por palavra-chave</a:t>
+              <a:t>top 40 lexical</a:t>
             </a:r>
           </a:p>
         </p:txBody>
@@ -3654,7 +3605,7 @@
         </p:nvSpPr>
         <p:spPr>
           <a:xfrm>
-            <a:off x="2834640" y="3566160"/>
+            <a:off x="2834640" y="3520440"/>
             <a:ext cx="2743200" cy="777240"/>
           </a:xfrm>
           <a:prstGeom prst="roundRect">
@@ -3682,7 +3633,7 @@
           </a:fontRef>
         </p:style>
         <p:txBody>
-          <a:bodyPr lIns="45720" rtlCol="0" anchor="ctr"/>
+          <a:bodyPr rtlCol="0" anchor="ctr" lIns="45720"/>
           <a:lstStyle/>
           <a:p>
             <a:pPr algn="ctr"/>
@@ -3692,7 +3643,7 @@
                   <a:srgbClr val="FFFFFF"/>
                 </a:solidFill>
               </a:rPr>
-              <a:t>🔢 Investigador 3</a:t>
+              <a:t>Identifier lookup</a:t>
             </a:r>
           </a:p>
           <a:p>
@@ -3703,7 +3654,7 @@
                   <a:srgbClr val="FFFFFF"/>
                 </a:solidFill>
               </a:rPr>
-              <a:t>busca por número da norma</a:t>
+              <a:t>regex nº+ano em arquivo</a:t>
             </a:r>
           </a:p>
         </p:txBody>
@@ -3716,7 +3667,7 @@
         </p:nvSpPr>
         <p:spPr>
           <a:xfrm>
-            <a:off x="6126480" y="2514600"/>
+            <a:off x="6126480" y="2468880"/>
             <a:ext cx="2194560" cy="777240"/>
           </a:xfrm>
           <a:prstGeom prst="roundRect">
@@ -3744,7 +3695,7 @@
           </a:fontRef>
         </p:style>
         <p:txBody>
-          <a:bodyPr lIns="45720" rtlCol="0" anchor="ctr"/>
+          <a:bodyPr rtlCol="0" anchor="ctr" lIns="45720"/>
           <a:lstStyle/>
           <a:p>
             <a:pPr algn="ctr"/>
@@ -3754,7 +3705,7 @@
                   <a:srgbClr val="FFFFFF"/>
                 </a:solidFill>
               </a:rPr>
-              <a:t>🤝 Vota junto</a:t>
+              <a:t>RRF (k=60)</a:t>
             </a:r>
           </a:p>
           <a:p>
@@ -3765,7 +3716,7 @@
                   <a:srgbClr val="FFFFFF"/>
                 </a:solidFill>
               </a:rPr>
-              <a:t>combina os 3 rankings</a:t>
+              <a:t>fusão de rankings</a:t>
             </a:r>
           </a:p>
         </p:txBody>
@@ -3778,8 +3729,8 @@
         </p:nvSpPr>
         <p:spPr>
           <a:xfrm>
-            <a:off x="8778240" y="2514600"/>
-            <a:ext cx="1828800" cy="777240"/>
+            <a:off x="8778240" y="2468880"/>
+            <a:ext cx="2011680" cy="777240"/>
           </a:xfrm>
           <a:prstGeom prst="roundRect">
             <a:avLst/>
@@ -3806,36 +3757,28 @@
           </a:fontRef>
         </p:style>
         <p:txBody>
-          <a:bodyPr lIns="45720" rtlCol="0" anchor="ctr"/>
+          <a:bodyPr rtlCol="0" anchor="ctr" lIns="45720"/>
           <a:lstStyle/>
           <a:p>
             <a:pPr algn="ctr"/>
             <a:r>
-              <a:rPr sz="1300" b="1" dirty="0">
+              <a:rPr sz="1300" b="1">
                 <a:solidFill>
                   <a:srgbClr val="FFFFFF"/>
                 </a:solidFill>
               </a:rPr>
-              <a:t>⚖ Juiz final</a:t>
+              <a:t>Reranker</a:t>
             </a:r>
           </a:p>
           <a:p>
             <a:pPr algn="ctr"/>
             <a:r>
-              <a:rPr sz="1000" dirty="0" err="1">
+              <a:rPr sz="1000">
                 <a:solidFill>
                   <a:srgbClr val="FFFFFF"/>
                 </a:solidFill>
               </a:rPr>
-              <a:t>reordena</a:t>
-            </a:r>
-            <a:r>
-              <a:rPr sz="1000" dirty="0">
-                <a:solidFill>
-                  <a:srgbClr val="FFFFFF"/>
-                </a:solidFill>
-              </a:rPr>
-              <a:t> top 20</a:t>
+              <a:t>Cohere v3 / BGE-v2-m3</a:t>
             </a:r>
           </a:p>
         </p:txBody>
@@ -3848,8 +3791,8 @@
         </p:nvSpPr>
         <p:spPr>
           <a:xfrm>
-            <a:off x="10972800" y="2514600"/>
-            <a:ext cx="822960" cy="777240"/>
+            <a:off x="11155680" y="2468880"/>
+            <a:ext cx="640080" cy="777240"/>
           </a:xfrm>
           <a:prstGeom prst="roundRect">
             <a:avLst/>
@@ -3876,31 +3819,18 @@
           </a:fontRef>
         </p:style>
         <p:txBody>
-          <a:bodyPr lIns="45720" rtlCol="0" anchor="ctr"/>
+          <a:bodyPr rtlCol="0" anchor="ctr" lIns="45720"/>
           <a:lstStyle/>
           <a:p>
             <a:pPr algn="ctr"/>
             <a:r>
-              <a:rPr sz="1300" b="1" dirty="0">
+              <a:rPr sz="1300" b="1">
                 <a:solidFill>
                   <a:srgbClr val="FFFFFF"/>
                 </a:solidFill>
               </a:rPr>
-              <a:t>Top </a:t>
-            </a:r>
-            <a:r>
-              <a:rPr lang="pt-BR" sz="1300" b="1" dirty="0">
-                <a:solidFill>
-                  <a:srgbClr val="FFFFFF"/>
-                </a:solidFill>
-              </a:rPr>
-              <a:t>5</a:t>
-            </a:r>
-            <a:endParaRPr sz="1300" b="1" dirty="0">
-              <a:solidFill>
-                <a:srgbClr val="FFFFFF"/>
-              </a:solidFill>
-            </a:endParaRPr>
+              <a:t>Top 6</a:t>
+            </a:r>
           </a:p>
         </p:txBody>
       </p:sp>
@@ -3912,7 +3842,7 @@
         </p:nvSpPr>
         <p:spPr>
           <a:xfrm>
-            <a:off x="548640" y="4663440"/>
+            <a:off x="457200" y="4617720"/>
             <a:ext cx="10972800" cy="365760"/>
           </a:xfrm>
           <a:prstGeom prst="rect">
@@ -3921,20 +3851,20 @@
           <a:noFill/>
         </p:spPr>
         <p:txBody>
-          <a:bodyPr wrap="square" lIns="45720" tIns="18288" rIns="45720" bIns="18288">
-            <a:spAutoFit/>
-          </a:bodyPr>
-          <a:lstStyle/>
-          <a:p>
-            <a:pPr algn="l"/>
-            <a:r>
-              <a:rPr sz="1800" b="1">
+          <a:bodyPr wrap="square" lIns="45720" rIns="45720" tIns="18288" bIns="18288">
+            <a:spAutoFit/>
+          </a:bodyPr>
+          <a:lstStyle/>
+          <a:p>
+            <a:pPr algn="l"/>
+            <a:r>
+              <a:rPr sz="1600" b="1">
                 <a:solidFill>
                   <a:srgbClr val="1A4480"/>
                 </a:solidFill>
                 <a:latin typeface="Calibri"/>
               </a:rPr>
-              <a:t>Por que 3 investigadores?</a:t>
+              <a:t>Decisões-chave:</a:t>
             </a:r>
           </a:p>
         </p:txBody>
@@ -3947,8 +3877,8 @@
         </p:nvSpPr>
         <p:spPr>
           <a:xfrm>
-            <a:off x="731520" y="5074920"/>
-            <a:ext cx="10972800" cy="1828800"/>
+            <a:off x="640080" y="5029200"/>
+            <a:ext cx="11247120" cy="2286000"/>
           </a:xfrm>
           <a:prstGeom prst="rect">
             <a:avLst/>
@@ -3967,632 +3897,14 @@
               </a:spcAft>
             </a:pPr>
             <a:r>
-              <a:rPr sz="1400" dirty="0">
+              <a:rPr sz="1100">
                 <a:solidFill>
                   <a:srgbClr val="222222"/>
                 </a:solidFill>
                 <a:latin typeface="Calibri"/>
               </a:rPr>
-              <a:t>• </a:t>
-            </a:r>
-            <a:r>
-              <a:rPr sz="1400" dirty="0" err="1">
-                <a:solidFill>
-                  <a:srgbClr val="222222"/>
-                </a:solidFill>
-                <a:latin typeface="Calibri"/>
-              </a:rPr>
-              <a:t>Cada</a:t>
-            </a:r>
-            <a:r>
-              <a:rPr sz="1400" dirty="0">
-                <a:solidFill>
-                  <a:srgbClr val="222222"/>
-                </a:solidFill>
-                <a:latin typeface="Calibri"/>
-              </a:rPr>
-              <a:t> um é </a:t>
-            </a:r>
-            <a:r>
-              <a:rPr sz="1400" dirty="0" err="1">
-                <a:solidFill>
-                  <a:srgbClr val="222222"/>
-                </a:solidFill>
-                <a:latin typeface="Calibri"/>
-              </a:rPr>
-              <a:t>bom</a:t>
-            </a:r>
-            <a:r>
-              <a:rPr sz="1400" dirty="0">
-                <a:solidFill>
-                  <a:srgbClr val="222222"/>
-                </a:solidFill>
-                <a:latin typeface="Calibri"/>
-              </a:rPr>
-              <a:t> </a:t>
-            </a:r>
-            <a:r>
-              <a:rPr sz="1400" dirty="0" err="1">
-                <a:solidFill>
-                  <a:srgbClr val="222222"/>
-                </a:solidFill>
-                <a:latin typeface="Calibri"/>
-              </a:rPr>
-              <a:t>em</a:t>
-            </a:r>
-            <a:r>
-              <a:rPr sz="1400" dirty="0">
-                <a:solidFill>
-                  <a:srgbClr val="222222"/>
-                </a:solidFill>
-                <a:latin typeface="Calibri"/>
-              </a:rPr>
-              <a:t> algo </a:t>
-            </a:r>
-            <a:r>
-              <a:rPr sz="1400" dirty="0" err="1">
-                <a:solidFill>
-                  <a:srgbClr val="222222"/>
-                </a:solidFill>
-                <a:latin typeface="Calibri"/>
-              </a:rPr>
-              <a:t>diferente</a:t>
-            </a:r>
-            <a:r>
-              <a:rPr sz="1400" dirty="0">
-                <a:solidFill>
-                  <a:srgbClr val="222222"/>
-                </a:solidFill>
-                <a:latin typeface="Calibri"/>
-              </a:rPr>
-              <a:t> — </a:t>
-            </a:r>
-            <a:r>
-              <a:rPr sz="1400" dirty="0" err="1">
-                <a:solidFill>
-                  <a:srgbClr val="222222"/>
-                </a:solidFill>
-                <a:latin typeface="Calibri"/>
-              </a:rPr>
-              <a:t>combinar</a:t>
-            </a:r>
-            <a:r>
-              <a:rPr sz="1400" dirty="0">
-                <a:solidFill>
-                  <a:srgbClr val="222222"/>
-                </a:solidFill>
-                <a:latin typeface="Calibri"/>
-              </a:rPr>
-              <a:t> é </a:t>
-            </a:r>
-            <a:r>
-              <a:rPr sz="1400" dirty="0" err="1">
-                <a:solidFill>
-                  <a:srgbClr val="222222"/>
-                </a:solidFill>
-                <a:latin typeface="Calibri"/>
-              </a:rPr>
-              <a:t>melhor</a:t>
-            </a:r>
-            <a:r>
-              <a:rPr sz="1400" dirty="0">
-                <a:solidFill>
-                  <a:srgbClr val="222222"/>
-                </a:solidFill>
-                <a:latin typeface="Calibri"/>
-              </a:rPr>
-              <a:t> que </a:t>
-            </a:r>
-            <a:r>
-              <a:rPr sz="1400" dirty="0" err="1">
-                <a:solidFill>
-                  <a:srgbClr val="222222"/>
-                </a:solidFill>
-                <a:latin typeface="Calibri"/>
-              </a:rPr>
-              <a:t>escolher</a:t>
-            </a:r>
-            <a:r>
-              <a:rPr sz="1400" dirty="0">
-                <a:solidFill>
-                  <a:srgbClr val="222222"/>
-                </a:solidFill>
-                <a:latin typeface="Calibri"/>
-              </a:rPr>
-              <a:t> um </a:t>
-            </a:r>
-            <a:r>
-              <a:rPr sz="1400" dirty="0" err="1">
-                <a:solidFill>
-                  <a:srgbClr val="222222"/>
-                </a:solidFill>
-                <a:latin typeface="Calibri"/>
-              </a:rPr>
-              <a:t>só</a:t>
-            </a:r>
-            <a:endParaRPr sz="1400" dirty="0">
-              <a:solidFill>
-                <a:srgbClr val="222222"/>
-              </a:solidFill>
-              <a:latin typeface="Calibri"/>
-            </a:endParaRPr>
-          </a:p>
-          <a:p>
-            <a:pPr lvl="1">
-              <a:spcAft>
-                <a:spcPts val="400"/>
-              </a:spcAft>
-            </a:pPr>
-            <a:r>
-              <a:rPr sz="1200" dirty="0">
-                <a:solidFill>
-                  <a:srgbClr val="222222"/>
-                </a:solidFill>
-                <a:latin typeface="Calibri"/>
-              </a:rPr>
-              <a:t>– </a:t>
-            </a:r>
-            <a:r>
-              <a:rPr sz="1200" dirty="0" err="1">
-                <a:solidFill>
-                  <a:srgbClr val="222222"/>
-                </a:solidFill>
-                <a:latin typeface="Calibri"/>
-              </a:rPr>
-              <a:t>Significado</a:t>
-            </a:r>
-            <a:r>
-              <a:rPr sz="1200" dirty="0">
-                <a:solidFill>
-                  <a:srgbClr val="222222"/>
-                </a:solidFill>
-                <a:latin typeface="Calibri"/>
-              </a:rPr>
-              <a:t> </a:t>
-            </a:r>
-            <a:r>
-              <a:rPr sz="1200" dirty="0" err="1">
-                <a:solidFill>
-                  <a:srgbClr val="222222"/>
-                </a:solidFill>
-                <a:latin typeface="Calibri"/>
-              </a:rPr>
-              <a:t>pega</a:t>
-            </a:r>
-            <a:r>
-              <a:rPr sz="1200" dirty="0">
-                <a:solidFill>
-                  <a:srgbClr val="222222"/>
-                </a:solidFill>
-                <a:latin typeface="Calibri"/>
-              </a:rPr>
-              <a:t> "</a:t>
-            </a:r>
-            <a:r>
-              <a:rPr sz="1200" dirty="0" err="1">
-                <a:solidFill>
-                  <a:srgbClr val="222222"/>
-                </a:solidFill>
-                <a:latin typeface="Calibri"/>
-              </a:rPr>
-              <a:t>prazo</a:t>
-            </a:r>
-            <a:r>
-              <a:rPr sz="1200" dirty="0">
-                <a:solidFill>
-                  <a:srgbClr val="222222"/>
-                </a:solidFill>
-                <a:latin typeface="Calibri"/>
-              </a:rPr>
-              <a:t> de </a:t>
-            </a:r>
-            <a:r>
-              <a:rPr sz="1200" dirty="0" err="1">
-                <a:solidFill>
-                  <a:srgbClr val="222222"/>
-                </a:solidFill>
-                <a:latin typeface="Calibri"/>
-              </a:rPr>
-              <a:t>revisão</a:t>
-            </a:r>
-            <a:r>
-              <a:rPr sz="1200" dirty="0">
-                <a:solidFill>
-                  <a:srgbClr val="222222"/>
-                </a:solidFill>
-                <a:latin typeface="Calibri"/>
-              </a:rPr>
-              <a:t>" </a:t>
-            </a:r>
-            <a:r>
-              <a:rPr sz="1200" dirty="0" err="1">
-                <a:solidFill>
-                  <a:srgbClr val="222222"/>
-                </a:solidFill>
-                <a:latin typeface="Calibri"/>
-              </a:rPr>
-              <a:t>mesmo</a:t>
-            </a:r>
-            <a:r>
-              <a:rPr sz="1200" dirty="0">
-                <a:solidFill>
-                  <a:srgbClr val="222222"/>
-                </a:solidFill>
-                <a:latin typeface="Calibri"/>
-              </a:rPr>
-              <a:t> se o </a:t>
-            </a:r>
-            <a:r>
-              <a:rPr sz="1200" dirty="0" err="1">
-                <a:solidFill>
-                  <a:srgbClr val="222222"/>
-                </a:solidFill>
-                <a:latin typeface="Calibri"/>
-              </a:rPr>
-              <a:t>texto</a:t>
-            </a:r>
-            <a:r>
-              <a:rPr sz="1200" dirty="0">
-                <a:solidFill>
-                  <a:srgbClr val="222222"/>
-                </a:solidFill>
-                <a:latin typeface="Calibri"/>
-              </a:rPr>
-              <a:t> </a:t>
-            </a:r>
-            <a:r>
-              <a:rPr sz="1200" dirty="0" err="1">
-                <a:solidFill>
-                  <a:srgbClr val="222222"/>
-                </a:solidFill>
-                <a:latin typeface="Calibri"/>
-              </a:rPr>
-              <a:t>diz</a:t>
-            </a:r>
-            <a:r>
-              <a:rPr sz="1200" dirty="0">
-                <a:solidFill>
-                  <a:srgbClr val="222222"/>
-                </a:solidFill>
-                <a:latin typeface="Calibri"/>
-              </a:rPr>
-              <a:t> "</a:t>
-            </a:r>
-            <a:r>
-              <a:rPr sz="1200" dirty="0" err="1">
-                <a:solidFill>
-                  <a:srgbClr val="222222"/>
-                </a:solidFill>
-                <a:latin typeface="Calibri"/>
-              </a:rPr>
-              <a:t>período</a:t>
-            </a:r>
-            <a:r>
-              <a:rPr sz="1200" dirty="0">
-                <a:solidFill>
-                  <a:srgbClr val="222222"/>
-                </a:solidFill>
-                <a:latin typeface="Calibri"/>
-              </a:rPr>
-              <a:t> da </a:t>
-            </a:r>
-            <a:r>
-              <a:rPr sz="1200" dirty="0" err="1">
-                <a:solidFill>
-                  <a:srgbClr val="222222"/>
-                </a:solidFill>
-                <a:latin typeface="Calibri"/>
-              </a:rPr>
-              <a:t>reanálise</a:t>
-            </a:r>
-            <a:r>
-              <a:rPr sz="1200" dirty="0">
-                <a:solidFill>
-                  <a:srgbClr val="222222"/>
-                </a:solidFill>
-                <a:latin typeface="Calibri"/>
-              </a:rPr>
-              <a:t>"</a:t>
-            </a:r>
-          </a:p>
-          <a:p>
-            <a:pPr lvl="1">
-              <a:spcAft>
-                <a:spcPts val="400"/>
-              </a:spcAft>
-            </a:pPr>
-            <a:r>
-              <a:rPr sz="1200" dirty="0">
-                <a:solidFill>
-                  <a:srgbClr val="222222"/>
-                </a:solidFill>
-                <a:latin typeface="Calibri"/>
-              </a:rPr>
-              <a:t>– </a:t>
-            </a:r>
-            <a:r>
-              <a:rPr sz="1200" dirty="0" err="1">
-                <a:solidFill>
-                  <a:srgbClr val="222222"/>
-                </a:solidFill>
-                <a:latin typeface="Calibri"/>
-              </a:rPr>
-              <a:t>Palavra-chave</a:t>
-            </a:r>
-            <a:r>
-              <a:rPr sz="1200" dirty="0">
-                <a:solidFill>
-                  <a:srgbClr val="222222"/>
-                </a:solidFill>
-                <a:latin typeface="Calibri"/>
-              </a:rPr>
-              <a:t> </a:t>
-            </a:r>
-            <a:r>
-              <a:rPr sz="1200" dirty="0" err="1">
-                <a:solidFill>
-                  <a:srgbClr val="222222"/>
-                </a:solidFill>
-                <a:latin typeface="Calibri"/>
-              </a:rPr>
-              <a:t>pega</a:t>
-            </a:r>
-            <a:r>
-              <a:rPr sz="1200" dirty="0">
-                <a:solidFill>
-                  <a:srgbClr val="222222"/>
-                </a:solidFill>
-                <a:latin typeface="Calibri"/>
-              </a:rPr>
-              <a:t> </a:t>
-            </a:r>
-            <a:r>
-              <a:rPr sz="1200" dirty="0" err="1">
-                <a:solidFill>
-                  <a:srgbClr val="222222"/>
-                </a:solidFill>
-                <a:latin typeface="Calibri"/>
-              </a:rPr>
-              <a:t>termos</a:t>
-            </a:r>
-            <a:r>
-              <a:rPr sz="1200" dirty="0">
-                <a:solidFill>
-                  <a:srgbClr val="222222"/>
-                </a:solidFill>
-                <a:latin typeface="Calibri"/>
-              </a:rPr>
-              <a:t> </a:t>
-            </a:r>
-            <a:r>
-              <a:rPr sz="1200" dirty="0" err="1">
-                <a:solidFill>
-                  <a:srgbClr val="222222"/>
-                </a:solidFill>
-                <a:latin typeface="Calibri"/>
-              </a:rPr>
-              <a:t>técnicos</a:t>
-            </a:r>
-            <a:r>
-              <a:rPr sz="1200" dirty="0">
-                <a:solidFill>
-                  <a:srgbClr val="222222"/>
-                </a:solidFill>
-                <a:latin typeface="Calibri"/>
-              </a:rPr>
-              <a:t> </a:t>
-            </a:r>
-            <a:r>
-              <a:rPr sz="1200" dirty="0" err="1">
-                <a:solidFill>
-                  <a:srgbClr val="222222"/>
-                </a:solidFill>
-                <a:latin typeface="Calibri"/>
-              </a:rPr>
-              <a:t>exatos</a:t>
-            </a:r>
-            <a:r>
-              <a:rPr sz="1200" dirty="0">
-                <a:solidFill>
-                  <a:srgbClr val="222222"/>
-                </a:solidFill>
-                <a:latin typeface="Calibri"/>
-              </a:rPr>
-              <a:t> </a:t>
-            </a:r>
-            <a:r>
-              <a:rPr sz="1200" dirty="0" err="1">
-                <a:solidFill>
-                  <a:srgbClr val="222222"/>
-                </a:solidFill>
-                <a:latin typeface="Calibri"/>
-              </a:rPr>
-              <a:t>como</a:t>
-            </a:r>
-            <a:r>
-              <a:rPr sz="1200" dirty="0">
-                <a:solidFill>
-                  <a:srgbClr val="222222"/>
-                </a:solidFill>
-                <a:latin typeface="Calibri"/>
-              </a:rPr>
-              <a:t> "</a:t>
-            </a:r>
-            <a:r>
-              <a:rPr sz="1200" dirty="0" err="1">
-                <a:solidFill>
-                  <a:srgbClr val="222222"/>
-                </a:solidFill>
-                <a:latin typeface="Calibri"/>
-              </a:rPr>
-              <a:t>bandeira</a:t>
-            </a:r>
-            <a:r>
-              <a:rPr sz="1200" dirty="0">
-                <a:solidFill>
-                  <a:srgbClr val="222222"/>
-                </a:solidFill>
-                <a:latin typeface="Calibri"/>
-              </a:rPr>
-              <a:t> </a:t>
-            </a:r>
-            <a:r>
-              <a:rPr sz="1200" dirty="0" err="1">
-                <a:solidFill>
-                  <a:srgbClr val="222222"/>
-                </a:solidFill>
-                <a:latin typeface="Calibri"/>
-              </a:rPr>
-              <a:t>tarifária</a:t>
-            </a:r>
-            <a:r>
-              <a:rPr sz="1200" dirty="0">
-                <a:solidFill>
-                  <a:srgbClr val="222222"/>
-                </a:solidFill>
-                <a:latin typeface="Calibri"/>
-              </a:rPr>
-              <a:t>"</a:t>
-            </a:r>
-          </a:p>
-          <a:p>
-            <a:pPr lvl="1">
-              <a:spcAft>
-                <a:spcPts val="400"/>
-              </a:spcAft>
-            </a:pPr>
-            <a:r>
-              <a:rPr sz="1200" dirty="0">
-                <a:solidFill>
-                  <a:srgbClr val="222222"/>
-                </a:solidFill>
-                <a:latin typeface="Calibri"/>
-              </a:rPr>
-              <a:t>– </a:t>
-            </a:r>
-            <a:r>
-              <a:rPr sz="1200" dirty="0" err="1">
-                <a:solidFill>
-                  <a:srgbClr val="222222"/>
-                </a:solidFill>
-                <a:latin typeface="Calibri"/>
-              </a:rPr>
-              <a:t>Número</a:t>
-            </a:r>
-            <a:r>
-              <a:rPr sz="1200" dirty="0">
-                <a:solidFill>
-                  <a:srgbClr val="222222"/>
-                </a:solidFill>
-                <a:latin typeface="Calibri"/>
-              </a:rPr>
-              <a:t> de </a:t>
-            </a:r>
-            <a:r>
-              <a:rPr sz="1200" dirty="0" err="1">
-                <a:solidFill>
-                  <a:srgbClr val="222222"/>
-                </a:solidFill>
-                <a:latin typeface="Calibri"/>
-              </a:rPr>
-              <a:t>norma</a:t>
-            </a:r>
-            <a:r>
-              <a:rPr sz="1200" dirty="0">
-                <a:solidFill>
-                  <a:srgbClr val="222222"/>
-                </a:solidFill>
-                <a:latin typeface="Calibri"/>
-              </a:rPr>
-              <a:t> </a:t>
-            </a:r>
-            <a:r>
-              <a:rPr sz="1200" dirty="0" err="1">
-                <a:solidFill>
-                  <a:srgbClr val="222222"/>
-                </a:solidFill>
-                <a:latin typeface="Calibri"/>
-              </a:rPr>
-              <a:t>pega</a:t>
-            </a:r>
-            <a:r>
-              <a:rPr sz="1200" dirty="0">
-                <a:solidFill>
-                  <a:srgbClr val="222222"/>
-                </a:solidFill>
-                <a:latin typeface="Calibri"/>
-              </a:rPr>
-              <a:t> "REN 1.000/2021" </a:t>
-            </a:r>
-            <a:r>
-              <a:rPr sz="1200" dirty="0" err="1">
-                <a:solidFill>
-                  <a:srgbClr val="222222"/>
-                </a:solidFill>
-                <a:latin typeface="Calibri"/>
-              </a:rPr>
-              <a:t>direto</a:t>
-            </a:r>
-            <a:r>
-              <a:rPr sz="1200" dirty="0">
-                <a:solidFill>
-                  <a:srgbClr val="222222"/>
-                </a:solidFill>
-                <a:latin typeface="Calibri"/>
-              </a:rPr>
-              <a:t>, </a:t>
-            </a:r>
-            <a:r>
-              <a:rPr sz="1200" dirty="0" err="1">
-                <a:solidFill>
-                  <a:srgbClr val="222222"/>
-                </a:solidFill>
-                <a:latin typeface="Calibri"/>
-              </a:rPr>
-              <a:t>sem</a:t>
-            </a:r>
-            <a:r>
-              <a:rPr sz="1200" dirty="0">
-                <a:solidFill>
-                  <a:srgbClr val="222222"/>
-                </a:solidFill>
-                <a:latin typeface="Calibri"/>
-              </a:rPr>
-              <a:t> </a:t>
-            </a:r>
-            <a:r>
-              <a:rPr sz="1200" dirty="0" err="1">
-                <a:solidFill>
-                  <a:srgbClr val="222222"/>
-                </a:solidFill>
-                <a:latin typeface="Calibri"/>
-              </a:rPr>
-              <a:t>depender</a:t>
-            </a:r>
-            <a:r>
-              <a:rPr sz="1200" dirty="0">
-                <a:solidFill>
-                  <a:srgbClr val="222222"/>
-                </a:solidFill>
-                <a:latin typeface="Calibri"/>
-              </a:rPr>
-              <a:t> de </a:t>
-            </a:r>
-            <a:r>
-              <a:rPr sz="1200" dirty="0" err="1">
-                <a:solidFill>
-                  <a:srgbClr val="222222"/>
-                </a:solidFill>
-                <a:latin typeface="Calibri"/>
-              </a:rPr>
-              <a:t>contexto</a:t>
-            </a:r>
-            <a:endParaRPr sz="1200" dirty="0">
-              <a:solidFill>
-                <a:srgbClr val="222222"/>
-              </a:solidFill>
-              <a:latin typeface="Calibri"/>
-            </a:endParaRPr>
+              <a:t>• RRF (Reciprocal Rank Fusion) em vez de pesos fixos: combina rankings sem tuning manual; robusto a escalas diferentes (cosseno vs lexical)</a:t>
+            </a:r>
           </a:p>
           <a:p>
             <a:pPr>
@@ -4601,157 +3913,61 @@
               </a:spcAft>
             </a:pPr>
             <a:r>
-              <a:rPr sz="1400" dirty="0">
+              <a:rPr sz="1100">
                 <a:solidFill>
                   <a:srgbClr val="222222"/>
                 </a:solidFill>
                 <a:latin typeface="Calibri"/>
               </a:rPr>
-              <a:t>• Juiz final </a:t>
-            </a:r>
-            <a:r>
-              <a:rPr sz="1400" dirty="0" err="1">
+              <a:t>• Identifier lookup como 3ª fonte: regex extrai "REN 1.000/2021" da query e busca direto no campo arquivo — pergunta por nº de norma não pode depender só de embedding</a:t>
+            </a:r>
+          </a:p>
+          <a:p>
+            <a:pPr>
+              <a:spcAft>
+                <a:spcPts val="400"/>
+              </a:spcAft>
+            </a:pPr>
+            <a:r>
+              <a:rPr sz="1100">
                 <a:solidFill>
                   <a:srgbClr val="222222"/>
                 </a:solidFill>
                 <a:latin typeface="Calibri"/>
               </a:rPr>
-              <a:t>reordena</a:t>
-            </a:r>
-            <a:r>
-              <a:rPr sz="1400" dirty="0">
+              <a:t>• Hard filter: se identifier match ≤ 3 docs, descarta dense/sparse e busca só dentro deles (evita ruído)</a:t>
+            </a:r>
+          </a:p>
+          <a:p>
+            <a:pPr>
+              <a:spcAft>
+                <a:spcPts val="400"/>
+              </a:spcAft>
+            </a:pPr>
+            <a:r>
+              <a:rPr sz="1100">
                 <a:solidFill>
                   <a:srgbClr val="222222"/>
                 </a:solidFill>
                 <a:latin typeface="Calibri"/>
               </a:rPr>
-              <a:t> com </a:t>
-            </a:r>
-            <a:r>
-              <a:rPr sz="1400" dirty="0" err="1">
+              <a:t>• Reranker cross-encoder reordena top 20 → top 6: cohere-rerank-v3 (API) ou BGE-reranker-v2-m3 (local) como fallback</a:t>
+            </a:r>
+          </a:p>
+          <a:p>
+            <a:pPr>
+              <a:spcAft>
+                <a:spcPts val="400"/>
+              </a:spcAft>
+            </a:pPr>
+            <a:r>
+              <a:rPr sz="1100">
                 <a:solidFill>
                   <a:srgbClr val="222222"/>
                 </a:solidFill>
                 <a:latin typeface="Calibri"/>
               </a:rPr>
-              <a:t>modelo</a:t>
-            </a:r>
-            <a:r>
-              <a:rPr sz="1400" dirty="0">
-                <a:solidFill>
-                  <a:srgbClr val="222222"/>
-                </a:solidFill>
-                <a:latin typeface="Calibri"/>
-              </a:rPr>
-              <a:t> </a:t>
-            </a:r>
-            <a:r>
-              <a:rPr sz="1400" dirty="0" err="1">
-                <a:solidFill>
-                  <a:srgbClr val="222222"/>
-                </a:solidFill>
-                <a:latin typeface="Calibri"/>
-              </a:rPr>
-              <a:t>mais</a:t>
-            </a:r>
-            <a:r>
-              <a:rPr sz="1400" dirty="0">
-                <a:solidFill>
-                  <a:srgbClr val="222222"/>
-                </a:solidFill>
-                <a:latin typeface="Calibri"/>
-              </a:rPr>
-              <a:t> </a:t>
-            </a:r>
-            <a:r>
-              <a:rPr sz="1400" dirty="0" err="1">
-                <a:solidFill>
-                  <a:srgbClr val="222222"/>
-                </a:solidFill>
-                <a:latin typeface="Calibri"/>
-              </a:rPr>
-              <a:t>preciso</a:t>
-            </a:r>
-            <a:r>
-              <a:rPr sz="1400" dirty="0">
-                <a:solidFill>
-                  <a:srgbClr val="222222"/>
-                </a:solidFill>
-                <a:latin typeface="Calibri"/>
-              </a:rPr>
-              <a:t> → </a:t>
-            </a:r>
-            <a:r>
-              <a:rPr sz="1400" dirty="0" err="1">
-                <a:solidFill>
-                  <a:srgbClr val="222222"/>
-                </a:solidFill>
-                <a:latin typeface="Calibri"/>
-              </a:rPr>
-              <a:t>garante</a:t>
-            </a:r>
-            <a:r>
-              <a:rPr sz="1400" dirty="0">
-                <a:solidFill>
-                  <a:srgbClr val="222222"/>
-                </a:solidFill>
-                <a:latin typeface="Calibri"/>
-              </a:rPr>
-              <a:t> que </a:t>
-            </a:r>
-            <a:r>
-              <a:rPr sz="1400" dirty="0" err="1">
-                <a:solidFill>
-                  <a:srgbClr val="222222"/>
-                </a:solidFill>
-                <a:latin typeface="Calibri"/>
-              </a:rPr>
-              <a:t>os</a:t>
-            </a:r>
-            <a:r>
-              <a:rPr sz="1400" dirty="0">
-                <a:solidFill>
-                  <a:srgbClr val="222222"/>
-                </a:solidFill>
-                <a:latin typeface="Calibri"/>
-              </a:rPr>
-              <a:t> 6 </a:t>
-            </a:r>
-            <a:r>
-              <a:rPr sz="1400" dirty="0" err="1">
-                <a:solidFill>
-                  <a:srgbClr val="222222"/>
-                </a:solidFill>
-                <a:latin typeface="Calibri"/>
-              </a:rPr>
-              <a:t>melhores</a:t>
-            </a:r>
-            <a:r>
-              <a:rPr sz="1400" dirty="0">
-                <a:solidFill>
-                  <a:srgbClr val="222222"/>
-                </a:solidFill>
-                <a:latin typeface="Calibri"/>
-              </a:rPr>
-              <a:t> </a:t>
-            </a:r>
-            <a:r>
-              <a:rPr sz="1400" dirty="0" err="1">
-                <a:solidFill>
-                  <a:srgbClr val="222222"/>
-                </a:solidFill>
-                <a:latin typeface="Calibri"/>
-              </a:rPr>
-              <a:t>ficam</a:t>
-            </a:r>
-            <a:r>
-              <a:rPr sz="1400" dirty="0">
-                <a:solidFill>
-                  <a:srgbClr val="222222"/>
-                </a:solidFill>
-                <a:latin typeface="Calibri"/>
-              </a:rPr>
-              <a:t> no topo</a:t>
+              <a:t>• Penalty 0.85 em chunks de ementa (page_start=0): metadados não são conteúdo legal — não devem dominar topo</a:t>
             </a:r>
           </a:p>
         </p:txBody>
@@ -4773,7 +3989,7 @@
           <a:noFill/>
         </p:spPr>
         <p:txBody>
-          <a:bodyPr wrap="square" lIns="45720" tIns="18288" rIns="45720" bIns="18288">
+          <a:bodyPr wrap="square" lIns="45720" rIns="45720" tIns="18288" bIns="18288">
             <a:spAutoFit/>
           </a:bodyPr>
           <a:lstStyle/>
@@ -4808,7 +4024,7 @@
           <a:noFill/>
         </p:spPr>
         <p:txBody>
-          <a:bodyPr wrap="square" lIns="45720" tIns="18288" rIns="45720" bIns="18288">
+          <a:bodyPr wrap="square" lIns="45720" rIns="45720" tIns="18288" bIns="18288">
             <a:spAutoFit/>
           </a:bodyPr>
           <a:lstStyle/>
@@ -4835,7 +4051,7 @@
 </file>
 
 <file path=ppt/slides/slide11.xml><?xml version="1.0" encoding="utf-8"?>
-<p:sld xmlns:a="http://schemas.openxmlformats.org/drawingml/2006/main" xmlns:r="http://schemas.openxmlformats.org/officeDocument/2006/relationships" xmlns:p="http://schemas.openxmlformats.org/presentationml/2006/main">
+<p:sld xmlns:a="http://schemas.openxmlformats.org/drawingml/2006/main" xmlns:p="http://schemas.openxmlformats.org/presentationml/2006/main" xmlns:r="http://schemas.openxmlformats.org/officeDocument/2006/relationships">
   <p:cSld>
     <p:spTree>
       <p:nvGrpSpPr>
@@ -4843,14 +4059,7 @@
         <p:cNvGrpSpPr/>
         <p:nvPr/>
       </p:nvGrpSpPr>
-      <p:grpSpPr>
-        <a:xfrm>
-          <a:off x="0" y="0"/>
-          <a:ext cx="0" cy="0"/>
-          <a:chOff x="0" y="0"/>
-          <a:chExt cx="0" cy="0"/>
-        </a:xfrm>
-      </p:grpSpPr>
+      <p:grpSpPr/>
       <p:sp>
         <p:nvSpPr>
           <p:cNvPr id="2" name="Rectangle 1"/>
@@ -4891,7 +4100,6 @@
           <a:lstStyle/>
           <a:p>
             <a:pPr algn="ctr"/>
-            <a:endParaRPr/>
           </a:p>
         </p:txBody>
       </p:sp>
@@ -4912,7 +4120,7 @@
           <a:noFill/>
         </p:spPr>
         <p:txBody>
-          <a:bodyPr wrap="square" lIns="45720" tIns="18288" rIns="45720" bIns="18288">
+          <a:bodyPr wrap="square" lIns="45720" rIns="45720" tIns="18288" bIns="18288">
             <a:spAutoFit/>
           </a:bodyPr>
           <a:lstStyle/>
@@ -4947,7 +4155,7 @@
           <a:noFill/>
         </p:spPr>
         <p:txBody>
-          <a:bodyPr wrap="square" lIns="45720" tIns="18288" rIns="45720" bIns="18288">
+          <a:bodyPr wrap="square" lIns="45720" rIns="45720" tIns="18288" bIns="18288">
             <a:spAutoFit/>
           </a:bodyPr>
           <a:lstStyle/>
@@ -4982,7 +4190,7 @@
           <a:noFill/>
         </p:spPr>
         <p:txBody>
-          <a:bodyPr wrap="square" lIns="45720" tIns="18288" rIns="45720" bIns="18288">
+          <a:bodyPr wrap="square" lIns="45720" rIns="45720" tIns="18288" bIns="18288">
             <a:spAutoFit/>
           </a:bodyPr>
           <a:lstStyle/>
@@ -5042,7 +4250,6 @@
           <a:lstStyle/>
           <a:p>
             <a:pPr algn="ctr"/>
-            <a:endParaRPr/>
           </a:p>
         </p:txBody>
       </p:sp>
@@ -5055,500 +4262,101 @@
         <p:spPr>
           <a:xfrm>
             <a:off x="731520" y="1874519"/>
-            <a:ext cx="5212080" cy="1760482"/>
-          </a:xfrm>
-          <a:prstGeom prst="rect">
-            <a:avLst/>
-          </a:prstGeom>
-          <a:noFill/>
-        </p:spPr>
-        <p:txBody>
-          <a:bodyPr wrap="square" lIns="45720" tIns="18288" rIns="45720" bIns="18288">
-            <a:spAutoFit/>
-          </a:bodyPr>
-          <a:lstStyle/>
-          <a:p>
-            <a:pPr algn="l"/>
-            <a:r>
-              <a:rPr sz="1400" b="0" dirty="0">
+            <a:ext cx="5212080" cy="2194560"/>
+          </a:xfrm>
+          <a:prstGeom prst="rect">
+            <a:avLst/>
+          </a:prstGeom>
+          <a:noFill/>
+        </p:spPr>
+        <p:txBody>
+          <a:bodyPr wrap="square" lIns="45720" rIns="45720" tIns="18288" bIns="18288">
+            <a:spAutoFit/>
+          </a:bodyPr>
+          <a:lstStyle/>
+          <a:p>
+            <a:pPr algn="l"/>
+            <a:r>
+              <a:rPr sz="1300" b="0">
                 <a:solidFill>
                   <a:srgbClr val="222222"/>
                 </a:solidFill>
                 <a:latin typeface="Calibri"/>
               </a:rPr>
-              <a:t>1. </a:t>
-            </a:r>
-            <a:r>
-              <a:rPr sz="1400" b="0" dirty="0" err="1">
+              <a:t>Modelo: Gemini 2.5 Flash (Vertex AI)</a:t>
+            </a:r>
+          </a:p>
+          <a:p>
+            <a:pPr algn="l"/>
+            <a:r>
+              <a:rPr sz="1300" b="0">
                 <a:solidFill>
                   <a:srgbClr val="222222"/>
                 </a:solidFill>
                 <a:latin typeface="Calibri"/>
               </a:rPr>
-              <a:t>Pegamos</a:t>
-            </a:r>
-            <a:r>
-              <a:rPr sz="1400" b="0" dirty="0">
+              <a:t>1. Top-6 chunks viram contexto</a:t>
+            </a:r>
+          </a:p>
+          <a:p>
+            <a:pPr algn="l"/>
+            <a:r>
+              <a:rPr sz="1300" b="0">
                 <a:solidFill>
                   <a:srgbClr val="222222"/>
                 </a:solidFill>
                 <a:latin typeface="Calibri"/>
               </a:rPr>
-              <a:t> </a:t>
-            </a:r>
-            <a:r>
-              <a:rPr sz="1400" b="0" dirty="0" err="1">
+              <a:t>2. System prompt impõe:</a:t>
+            </a:r>
+          </a:p>
+          <a:p>
+            <a:pPr algn="l"/>
+            <a:r>
+              <a:rPr sz="1300" b="0">
                 <a:solidFill>
                   <a:srgbClr val="222222"/>
                 </a:solidFill>
                 <a:latin typeface="Calibri"/>
               </a:rPr>
-              <a:t>os</a:t>
-            </a:r>
-            <a:r>
-              <a:rPr sz="1400" b="0" dirty="0">
+              <a:t>    – citação [doc_id | art. X] obrigatória</a:t>
+            </a:r>
+          </a:p>
+          <a:p>
+            <a:pPr algn="l"/>
+            <a:r>
+              <a:rPr sz="1300" b="0">
                 <a:solidFill>
                   <a:srgbClr val="222222"/>
                 </a:solidFill>
                 <a:latin typeface="Calibri"/>
               </a:rPr>
-              <a:t> </a:t>
-            </a:r>
-            <a:r>
-              <a:rPr lang="pt-BR" sz="1400" b="0" dirty="0">
+              <a:t>    – tratar ~~...~~ como revogado</a:t>
+            </a:r>
+          </a:p>
+          <a:p>
+            <a:pPr algn="l"/>
+            <a:r>
+              <a:rPr sz="1300" b="0">
                 <a:solidFill>
                   <a:srgbClr val="222222"/>
                 </a:solidFill>
                 <a:latin typeface="Calibri"/>
               </a:rPr>
-              <a:t>k</a:t>
-            </a:r>
-            <a:r>
-              <a:rPr sz="1400" b="0" dirty="0">
+              <a:t>    – "não consta" quando ausente</a:t>
+            </a:r>
+          </a:p>
+          <a:p>
+            <a:pPr algn="l"/>
+            <a:r>
+              <a:rPr sz="1300" b="0">
                 <a:solidFill>
                   <a:srgbClr val="222222"/>
                 </a:solidFill>
                 <a:latin typeface="Calibri"/>
               </a:rPr>
-              <a:t> </a:t>
-            </a:r>
-            <a:r>
-              <a:rPr sz="1400" b="0" dirty="0" err="1">
-                <a:solidFill>
-                  <a:srgbClr val="222222"/>
-                </a:solidFill>
-                <a:latin typeface="Calibri"/>
-              </a:rPr>
-              <a:t>melhores</a:t>
-            </a:r>
-            <a:r>
-              <a:rPr sz="1400" b="0" dirty="0">
-                <a:solidFill>
-                  <a:srgbClr val="222222"/>
-                </a:solidFill>
-                <a:latin typeface="Calibri"/>
-              </a:rPr>
-              <a:t> </a:t>
-            </a:r>
-            <a:r>
-              <a:rPr sz="1400" b="0" dirty="0" err="1">
-                <a:solidFill>
-                  <a:srgbClr val="222222"/>
-                </a:solidFill>
-                <a:latin typeface="Calibri"/>
-              </a:rPr>
-              <a:t>trechos</a:t>
-            </a:r>
-            <a:endParaRPr lang="pt-BR" sz="1400" b="0" dirty="0">
-              <a:solidFill>
-                <a:srgbClr val="222222"/>
-              </a:solidFill>
-              <a:latin typeface="Calibri"/>
-            </a:endParaRPr>
-          </a:p>
-          <a:p>
-            <a:pPr algn="l"/>
-            <a:endParaRPr sz="1400" b="0" dirty="0">
-              <a:solidFill>
-                <a:srgbClr val="222222"/>
-              </a:solidFill>
-              <a:latin typeface="Calibri"/>
-            </a:endParaRPr>
-          </a:p>
-          <a:p>
-            <a:pPr algn="l"/>
-            <a:r>
-              <a:rPr sz="1400" b="0" dirty="0">
-                <a:solidFill>
-                  <a:srgbClr val="222222"/>
-                </a:solidFill>
-                <a:latin typeface="Calibri"/>
-              </a:rPr>
-              <a:t>2. </a:t>
-            </a:r>
-            <a:r>
-              <a:rPr sz="1400" b="0" dirty="0" err="1">
-                <a:solidFill>
-                  <a:srgbClr val="222222"/>
-                </a:solidFill>
-                <a:latin typeface="Calibri"/>
-              </a:rPr>
-              <a:t>Entregamos</a:t>
-            </a:r>
-            <a:r>
-              <a:rPr sz="1400" b="0" dirty="0">
-                <a:solidFill>
-                  <a:srgbClr val="222222"/>
-                </a:solidFill>
-                <a:latin typeface="Calibri"/>
-              </a:rPr>
-              <a:t> </a:t>
-            </a:r>
-            <a:r>
-              <a:rPr sz="1400" b="0" dirty="0" err="1">
-                <a:solidFill>
-                  <a:srgbClr val="222222"/>
-                </a:solidFill>
-                <a:latin typeface="Calibri"/>
-              </a:rPr>
-              <a:t>pra</a:t>
-            </a:r>
-            <a:r>
-              <a:rPr sz="1400" b="0" dirty="0">
-                <a:solidFill>
-                  <a:srgbClr val="222222"/>
-                </a:solidFill>
-                <a:latin typeface="Calibri"/>
-              </a:rPr>
-              <a:t> LLM (Gemini) com </a:t>
-            </a:r>
-            <a:r>
-              <a:rPr sz="1400" b="0" dirty="0" err="1">
-                <a:solidFill>
-                  <a:srgbClr val="222222"/>
-                </a:solidFill>
-                <a:latin typeface="Calibri"/>
-              </a:rPr>
-              <a:t>regras</a:t>
-            </a:r>
-            <a:r>
-              <a:rPr sz="1400" b="0" dirty="0">
-                <a:solidFill>
-                  <a:srgbClr val="222222"/>
-                </a:solidFill>
-                <a:latin typeface="Calibri"/>
-              </a:rPr>
-              <a:t>:</a:t>
-            </a:r>
-          </a:p>
-          <a:p>
-            <a:pPr algn="l"/>
-            <a:r>
-              <a:rPr sz="1400" b="0" dirty="0">
-                <a:solidFill>
-                  <a:srgbClr val="222222"/>
-                </a:solidFill>
-                <a:latin typeface="Calibri"/>
-              </a:rPr>
-              <a:t>    – cite a </a:t>
-            </a:r>
-            <a:r>
-              <a:rPr sz="1400" b="0" dirty="0" err="1">
-                <a:solidFill>
-                  <a:srgbClr val="222222"/>
-                </a:solidFill>
-                <a:latin typeface="Calibri"/>
-              </a:rPr>
-              <a:t>fonte</a:t>
-            </a:r>
-            <a:r>
-              <a:rPr sz="1400" b="0" dirty="0">
-                <a:solidFill>
-                  <a:srgbClr val="222222"/>
-                </a:solidFill>
-                <a:latin typeface="Calibri"/>
-              </a:rPr>
-              <a:t> de </a:t>
-            </a:r>
-            <a:r>
-              <a:rPr sz="1400" b="0" dirty="0" err="1">
-                <a:solidFill>
-                  <a:srgbClr val="222222"/>
-                </a:solidFill>
-                <a:latin typeface="Calibri"/>
-              </a:rPr>
-              <a:t>cada</a:t>
-            </a:r>
-            <a:r>
-              <a:rPr sz="1400" b="0" dirty="0">
-                <a:solidFill>
-                  <a:srgbClr val="222222"/>
-                </a:solidFill>
-                <a:latin typeface="Calibri"/>
-              </a:rPr>
-              <a:t> </a:t>
-            </a:r>
-            <a:r>
-              <a:rPr sz="1400" b="0" dirty="0" err="1">
-                <a:solidFill>
-                  <a:srgbClr val="222222"/>
-                </a:solidFill>
-                <a:latin typeface="Calibri"/>
-              </a:rPr>
-              <a:t>afirmação</a:t>
-            </a:r>
-            <a:endParaRPr sz="1400" b="0" dirty="0">
-              <a:solidFill>
-                <a:srgbClr val="222222"/>
-              </a:solidFill>
-              <a:latin typeface="Calibri"/>
-            </a:endParaRPr>
-          </a:p>
-          <a:p>
-            <a:pPr algn="l"/>
-            <a:r>
-              <a:rPr sz="1400" b="0" dirty="0">
-                <a:solidFill>
-                  <a:srgbClr val="222222"/>
-                </a:solidFill>
-                <a:latin typeface="Calibri"/>
-              </a:rPr>
-              <a:t>    – ignore </a:t>
-            </a:r>
-            <a:r>
-              <a:rPr sz="1400" b="0" dirty="0" err="1">
-                <a:solidFill>
-                  <a:srgbClr val="222222"/>
-                </a:solidFill>
-                <a:latin typeface="Calibri"/>
-              </a:rPr>
-              <a:t>texto</a:t>
-            </a:r>
-            <a:r>
-              <a:rPr sz="1400" b="0" dirty="0">
-                <a:solidFill>
-                  <a:srgbClr val="222222"/>
-                </a:solidFill>
-                <a:latin typeface="Calibri"/>
-              </a:rPr>
-              <a:t> </a:t>
-            </a:r>
-            <a:r>
-              <a:rPr sz="1400" b="0" dirty="0" err="1">
-                <a:solidFill>
-                  <a:srgbClr val="222222"/>
-                </a:solidFill>
-                <a:latin typeface="Calibri"/>
-              </a:rPr>
-              <a:t>revogado</a:t>
-            </a:r>
-            <a:r>
-              <a:rPr sz="1400" b="0" dirty="0">
-                <a:solidFill>
-                  <a:srgbClr val="222222"/>
-                </a:solidFill>
-                <a:latin typeface="Calibri"/>
-              </a:rPr>
-              <a:t> (~~...~~)</a:t>
-            </a:r>
-          </a:p>
-          <a:p>
-            <a:pPr algn="l"/>
-            <a:r>
-              <a:rPr sz="1400" b="0" dirty="0">
-                <a:solidFill>
-                  <a:srgbClr val="222222"/>
-                </a:solidFill>
-                <a:latin typeface="Calibri"/>
-              </a:rPr>
-              <a:t>    – se </a:t>
-            </a:r>
-            <a:r>
-              <a:rPr sz="1400" b="0" dirty="0" err="1">
-                <a:solidFill>
-                  <a:srgbClr val="222222"/>
-                </a:solidFill>
-                <a:latin typeface="Calibri"/>
-              </a:rPr>
-              <a:t>não</a:t>
-            </a:r>
-            <a:r>
-              <a:rPr sz="1400" b="0" dirty="0">
-                <a:solidFill>
-                  <a:srgbClr val="222222"/>
-                </a:solidFill>
-                <a:latin typeface="Calibri"/>
-              </a:rPr>
-              <a:t> </a:t>
-            </a:r>
-            <a:r>
-              <a:rPr sz="1400" b="0" dirty="0" err="1">
-                <a:solidFill>
-                  <a:srgbClr val="222222"/>
-                </a:solidFill>
-                <a:latin typeface="Calibri"/>
-              </a:rPr>
-              <a:t>souber</a:t>
-            </a:r>
-            <a:r>
-              <a:rPr sz="1400" b="0" dirty="0">
-                <a:solidFill>
-                  <a:srgbClr val="222222"/>
-                </a:solidFill>
-                <a:latin typeface="Calibri"/>
-              </a:rPr>
-              <a:t>, </a:t>
-            </a:r>
-            <a:r>
-              <a:rPr sz="1400" b="0" dirty="0" err="1">
-                <a:solidFill>
-                  <a:srgbClr val="222222"/>
-                </a:solidFill>
-                <a:latin typeface="Calibri"/>
-              </a:rPr>
-              <a:t>diga</a:t>
-            </a:r>
-            <a:r>
-              <a:rPr sz="1400" b="0" dirty="0">
-                <a:solidFill>
-                  <a:srgbClr val="222222"/>
-                </a:solidFill>
-                <a:latin typeface="Calibri"/>
-              </a:rPr>
-              <a:t> "</a:t>
-            </a:r>
-            <a:r>
-              <a:rPr sz="1400" b="0" dirty="0" err="1">
-                <a:solidFill>
-                  <a:srgbClr val="222222"/>
-                </a:solidFill>
-                <a:latin typeface="Calibri"/>
-              </a:rPr>
-              <a:t>não</a:t>
-            </a:r>
-            <a:r>
-              <a:rPr sz="1400" b="0" dirty="0">
-                <a:solidFill>
-                  <a:srgbClr val="222222"/>
-                </a:solidFill>
-                <a:latin typeface="Calibri"/>
-              </a:rPr>
-              <a:t> </a:t>
-            </a:r>
-            <a:r>
-              <a:rPr sz="1400" b="0" dirty="0" err="1">
-                <a:solidFill>
-                  <a:srgbClr val="222222"/>
-                </a:solidFill>
-                <a:latin typeface="Calibri"/>
-              </a:rPr>
-              <a:t>consta</a:t>
-            </a:r>
-            <a:r>
-              <a:rPr sz="1400" b="0" dirty="0">
-                <a:solidFill>
-                  <a:srgbClr val="222222"/>
-                </a:solidFill>
-                <a:latin typeface="Calibri"/>
-              </a:rPr>
-              <a:t>"</a:t>
-            </a:r>
-            <a:endParaRPr lang="pt-BR" sz="1400" b="0" dirty="0">
-              <a:solidFill>
-                <a:srgbClr val="222222"/>
-              </a:solidFill>
-              <a:latin typeface="Calibri"/>
-            </a:endParaRPr>
-          </a:p>
-          <a:p>
-            <a:pPr algn="l"/>
-            <a:endParaRPr sz="1400" b="0" dirty="0">
-              <a:solidFill>
-                <a:srgbClr val="222222"/>
-              </a:solidFill>
-              <a:latin typeface="Calibri"/>
-            </a:endParaRPr>
-          </a:p>
-          <a:p>
-            <a:pPr algn="l"/>
-            <a:r>
-              <a:rPr sz="1400" b="0" dirty="0">
-                <a:solidFill>
-                  <a:srgbClr val="222222"/>
-                </a:solidFill>
-                <a:latin typeface="Calibri"/>
-              </a:rPr>
-              <a:t>3. LLM </a:t>
-            </a:r>
-            <a:r>
-              <a:rPr sz="1400" b="0" dirty="0" err="1">
-                <a:solidFill>
-                  <a:srgbClr val="222222"/>
-                </a:solidFill>
-                <a:latin typeface="Calibri"/>
-              </a:rPr>
-              <a:t>gera</a:t>
-            </a:r>
-            <a:r>
-              <a:rPr sz="1400" b="0" dirty="0">
-                <a:solidFill>
-                  <a:srgbClr val="222222"/>
-                </a:solidFill>
-                <a:latin typeface="Calibri"/>
-              </a:rPr>
-              <a:t> </a:t>
-            </a:r>
-            <a:r>
-              <a:rPr sz="1400" b="0" dirty="0" err="1">
-                <a:solidFill>
-                  <a:srgbClr val="222222"/>
-                </a:solidFill>
-                <a:latin typeface="Calibri"/>
-              </a:rPr>
-              <a:t>resposta</a:t>
-            </a:r>
-            <a:r>
-              <a:rPr sz="1400" b="0" dirty="0">
-                <a:solidFill>
-                  <a:srgbClr val="222222"/>
-                </a:solidFill>
-                <a:latin typeface="Calibri"/>
-              </a:rPr>
-              <a:t> + </a:t>
-            </a:r>
-            <a:r>
-              <a:rPr sz="1400" b="0" dirty="0" err="1">
-                <a:solidFill>
-                  <a:srgbClr val="222222"/>
-                </a:solidFill>
-                <a:latin typeface="Calibri"/>
-              </a:rPr>
-              <a:t>lista</a:t>
-            </a:r>
-            <a:r>
-              <a:rPr sz="1400" b="0" dirty="0">
-                <a:solidFill>
-                  <a:srgbClr val="222222"/>
-                </a:solidFill>
-                <a:latin typeface="Calibri"/>
-              </a:rPr>
-              <a:t> de </a:t>
-            </a:r>
-            <a:r>
-              <a:rPr sz="1400" b="0" dirty="0" err="1">
-                <a:solidFill>
-                  <a:srgbClr val="222222"/>
-                </a:solidFill>
-                <a:latin typeface="Calibri"/>
-              </a:rPr>
-              <a:t>citações</a:t>
-            </a:r>
-            <a:endParaRPr sz="1400" b="0" dirty="0">
-              <a:solidFill>
-                <a:srgbClr val="222222"/>
-              </a:solidFill>
-              <a:latin typeface="Calibri"/>
-            </a:endParaRPr>
+              <a:t>3. Saída: resposta + payload de citações</a:t>
+            </a:r>
           </a:p>
         </p:txBody>
       </p:sp>
@@ -5569,7 +4377,7 @@
           <a:noFill/>
         </p:spPr>
         <p:txBody>
-          <a:bodyPr wrap="square" lIns="45720" tIns="18288" rIns="45720" bIns="18288">
+          <a:bodyPr wrap="square" lIns="45720" rIns="45720" tIns="18288" bIns="18288">
             <a:spAutoFit/>
           </a:bodyPr>
           <a:lstStyle/>
@@ -5582,7 +4390,7 @@
                 </a:solidFill>
                 <a:latin typeface="Calibri"/>
               </a:rPr>
-              <a:t>🎚 Temperatura zero</a:t>
+              <a:t>Decisões da geração</a:t>
             </a:r>
           </a:p>
         </p:txBody>
@@ -5595,149 +4403,8 @@
         </p:nvSpPr>
         <p:spPr>
           <a:xfrm>
-            <a:off x="731520" y="4663440"/>
-            <a:ext cx="5394960" cy="1645920"/>
-          </a:xfrm>
-          <a:prstGeom prst="rect">
-            <a:avLst/>
-          </a:prstGeom>
-          <a:noFill/>
-        </p:spPr>
-        <p:txBody>
-          <a:bodyPr wrap="square" lIns="45720" tIns="18288" rIns="45720" bIns="18288">
-            <a:spAutoFit/>
-          </a:bodyPr>
-          <a:lstStyle/>
-          <a:p>
-            <a:pPr algn="l"/>
-            <a:r>
-              <a:rPr sz="1400" b="0">
-                <a:solidFill>
-                  <a:srgbClr val="222222"/>
-                </a:solidFill>
-                <a:latin typeface="Calibri"/>
-              </a:rPr>
-              <a:t>LLM responde de forma determinística — mesma</a:t>
-            </a:r>
-          </a:p>
-          <a:p>
-            <a:pPr algn="l"/>
-            <a:r>
-              <a:rPr sz="1400" b="0">
-                <a:solidFill>
-                  <a:srgbClr val="222222"/>
-                </a:solidFill>
-                <a:latin typeface="Calibri"/>
-              </a:rPr>
-              <a:t>pergunta, mesma resposta. Sem criatividade.</a:t>
-            </a:r>
-          </a:p>
-          <a:p>
-            <a:pPr algn="l"/>
-            <a:r>
-              <a:rPr sz="1400" b="0">
-                <a:solidFill>
-                  <a:srgbClr val="222222"/>
-                </a:solidFill>
-                <a:latin typeface="Calibri"/>
-              </a:rPr>
-              <a:t>Em direito não queremos LLM "inventando".</a:t>
-            </a:r>
-          </a:p>
-        </p:txBody>
-      </p:sp>
-      <p:sp>
-        <p:nvSpPr>
-          <p:cNvPr id="10" name="TextBox 9"/>
-          <p:cNvSpPr txBox="1"/>
-          <p:nvPr/>
-        </p:nvSpPr>
-        <p:spPr>
-          <a:xfrm>
-            <a:off x="6400800" y="1280160"/>
-            <a:ext cx="5486400" cy="365760"/>
-          </a:xfrm>
-          <a:prstGeom prst="rect">
-            <a:avLst/>
-          </a:prstGeom>
-          <a:noFill/>
-        </p:spPr>
-        <p:txBody>
-          <a:bodyPr wrap="square" lIns="45720" tIns="18288" rIns="45720" bIns="18288">
-            <a:spAutoFit/>
-          </a:bodyPr>
-          <a:lstStyle/>
-          <a:p>
-            <a:pPr algn="l"/>
-            <a:r>
-              <a:rPr sz="2000" b="1">
-                <a:solidFill>
-                  <a:srgbClr val="1A4480"/>
-                </a:solidFill>
-                <a:latin typeface="Calibri"/>
-              </a:rPr>
-              <a:t>📏 Como medimos qualidade</a:t>
-            </a:r>
-          </a:p>
-        </p:txBody>
-      </p:sp>
-      <p:sp>
-        <p:nvSpPr>
-          <p:cNvPr id="11" name="TextBox 10"/>
-          <p:cNvSpPr txBox="1"/>
-          <p:nvPr/>
-        </p:nvSpPr>
-        <p:spPr>
-          <a:xfrm>
-            <a:off x="6583680" y="1737360"/>
-            <a:ext cx="5394960" cy="731520"/>
-          </a:xfrm>
-          <a:prstGeom prst="rect">
-            <a:avLst/>
-          </a:prstGeom>
-          <a:noFill/>
-        </p:spPr>
-        <p:txBody>
-          <a:bodyPr wrap="square" lIns="45720" tIns="18288" rIns="45720" bIns="18288">
-            <a:spAutoFit/>
-          </a:bodyPr>
-          <a:lstStyle/>
-          <a:p>
-            <a:pPr algn="l"/>
-            <a:r>
-              <a:rPr sz="1400" b="0">
-                <a:solidFill>
-                  <a:srgbClr val="222222"/>
-                </a:solidFill>
-                <a:latin typeface="Calibri"/>
-              </a:rPr>
-              <a:t>Criamos um "gabarito" — lista de perguntas com</a:t>
-            </a:r>
-          </a:p>
-          <a:p>
-            <a:pPr algn="l"/>
-            <a:r>
-              <a:rPr sz="1400" b="0">
-                <a:solidFill>
-                  <a:srgbClr val="222222"/>
-                </a:solidFill>
-                <a:latin typeface="Calibri"/>
-              </a:rPr>
-              <a:t>as respostas corretas anotadas pelo especialista.</a:t>
-            </a:r>
-          </a:p>
-        </p:txBody>
-      </p:sp>
-      <p:sp>
-        <p:nvSpPr>
-          <p:cNvPr id="12" name="TextBox 11"/>
-          <p:cNvSpPr txBox="1"/>
-          <p:nvPr/>
-        </p:nvSpPr>
-        <p:spPr>
-          <a:xfrm>
-            <a:off x="6583680" y="2606040"/>
-            <a:ext cx="5394960" cy="3657600"/>
+            <a:off x="640080" y="4663440"/>
+            <a:ext cx="5486400" cy="1828800"/>
           </a:xfrm>
           <a:prstGeom prst="rect">
             <a:avLst/>
@@ -5756,13 +4423,13 @@
               </a:spcAft>
             </a:pPr>
             <a:r>
-              <a:rPr sz="1400">
+              <a:rPr sz="1100">
                 <a:solidFill>
                   <a:srgbClr val="222222"/>
                 </a:solidFill>
                 <a:latin typeface="Calibri"/>
               </a:rPr>
-              <a:t>• Achou o documento certo? (Hit@k)</a:t>
+              <a:t>• temperature=0 + thinking_budget=0 → resposta determinística e barata</a:t>
             </a:r>
           </a:p>
           <a:p>
@@ -5772,13 +4439,13 @@
               </a:spcAft>
             </a:pPr>
             <a:r>
-              <a:rPr sz="1400">
+              <a:rPr sz="1100">
                 <a:solidFill>
                   <a:srgbClr val="222222"/>
                 </a:solidFill>
                 <a:latin typeface="Calibri"/>
               </a:rPr>
-              <a:t>• Citou o artigo certo?</a:t>
+              <a:t>• Gemini 2.5 Flash sobre Pro: latência 3-4× menor, qualidade suficiente</a:t>
             </a:r>
           </a:p>
           <a:p>
@@ -5788,15 +4455,120 @@
               </a:spcAft>
             </a:pPr>
             <a:r>
-              <a:rPr sz="1400">
+              <a:rPr sz="1100">
                 <a:solidFill>
                   <a:srgbClr val="222222"/>
                 </a:solidFill>
                 <a:latin typeface="Calibri"/>
               </a:rPr>
-              <a:t>• O número/prazo está exato?</a:t>
-            </a:r>
-          </a:p>
+              <a:t>• Fallback automático para gemini-2.5-flash-lite em erro</a:t>
+            </a:r>
+          </a:p>
+        </p:txBody>
+      </p:sp>
+      <p:sp>
+        <p:nvSpPr>
+          <p:cNvPr id="10" name="TextBox 9"/>
+          <p:cNvSpPr txBox="1"/>
+          <p:nvPr/>
+        </p:nvSpPr>
+        <p:spPr>
+          <a:xfrm>
+            <a:off x="6400800" y="1280160"/>
+            <a:ext cx="5486400" cy="365760"/>
+          </a:xfrm>
+          <a:prstGeom prst="rect">
+            <a:avLst/>
+          </a:prstGeom>
+          <a:noFill/>
+        </p:spPr>
+        <p:txBody>
+          <a:bodyPr wrap="square" lIns="45720" rIns="45720" tIns="18288" bIns="18288">
+            <a:spAutoFit/>
+          </a:bodyPr>
+          <a:lstStyle/>
+          <a:p>
+            <a:pPr algn="l"/>
+            <a:r>
+              <a:rPr sz="2000" b="1">
+                <a:solidFill>
+                  <a:srgbClr val="1A4480"/>
+                </a:solidFill>
+                <a:latin typeface="Calibri"/>
+              </a:rPr>
+              <a:t>Avaliação — benchmark anotado</a:t>
+            </a:r>
+          </a:p>
+        </p:txBody>
+      </p:sp>
+      <p:sp>
+        <p:nvSpPr>
+          <p:cNvPr id="11" name="TextBox 10"/>
+          <p:cNvSpPr txBox="1"/>
+          <p:nvPr/>
+        </p:nvSpPr>
+        <p:spPr>
+          <a:xfrm>
+            <a:off x="6583680" y="1691640"/>
+            <a:ext cx="5394960" cy="640080"/>
+          </a:xfrm>
+          <a:prstGeom prst="rect">
+            <a:avLst/>
+          </a:prstGeom>
+          <a:noFill/>
+        </p:spPr>
+        <p:txBody>
+          <a:bodyPr wrap="square" lIns="45720" rIns="45720" tIns="18288" bIns="18288">
+            <a:spAutoFit/>
+          </a:bodyPr>
+          <a:lstStyle/>
+          <a:p>
+            <a:pPr algn="l"/>
+            <a:r>
+              <a:rPr sz="1200" b="0">
+                <a:solidFill>
+                  <a:srgbClr val="222222"/>
+                </a:solidFill>
+                <a:latin typeface="Calibri"/>
+              </a:rPr>
+              <a:t>Gold JSONL com expected_doc_ids, expected_articles,</a:t>
+            </a:r>
+          </a:p>
+          <a:p>
+            <a:pPr algn="l"/>
+            <a:r>
+              <a:rPr sz="1200" b="0">
+                <a:solidFill>
+                  <a:srgbClr val="222222"/>
+                </a:solidFill>
+                <a:latin typeface="Calibri"/>
+              </a:rPr>
+              <a:t>numeric_facts, must_contain, should_refuse.</a:t>
+            </a:r>
+          </a:p>
+        </p:txBody>
+      </p:sp>
+      <p:sp>
+        <p:nvSpPr>
+          <p:cNvPr id="12" name="TextBox 11"/>
+          <p:cNvSpPr txBox="1"/>
+          <p:nvPr/>
+        </p:nvSpPr>
+        <p:spPr>
+          <a:xfrm>
+            <a:off x="6583680" y="2606040"/>
+            <a:ext cx="5394960" cy="3657600"/>
+          </a:xfrm>
+          <a:prstGeom prst="rect">
+            <a:avLst/>
+          </a:prstGeom>
+          <a:noFill/>
+        </p:spPr>
+        <p:txBody>
+          <a:bodyPr wrap="square">
+            <a:spAutoFit/>
+          </a:bodyPr>
+          <a:lstStyle/>
           <a:p>
             <a:pPr>
               <a:spcAft>
@@ -5804,13 +4576,13 @@
               </a:spcAft>
             </a:pPr>
             <a:r>
-              <a:rPr sz="1400">
+              <a:rPr sz="1100">
                 <a:solidFill>
                   <a:srgbClr val="222222"/>
                 </a:solidFill>
                 <a:latin typeface="Calibri"/>
               </a:rPr>
-              <a:t>• A resposta cobre o que o gabarito diz?</a:t>
+              <a:t>• Retrieval: Hit@k · Recall@k · Precision@k · nDCG@k · MRR</a:t>
             </a:r>
           </a:p>
           <a:p>
@@ -5820,13 +4592,13 @@
               </a:spcAft>
             </a:pPr>
             <a:r>
-              <a:rPr sz="1400">
+              <a:rPr sz="1100">
                 <a:solidFill>
                   <a:srgbClr val="222222"/>
                 </a:solidFill>
                 <a:latin typeface="Calibri"/>
               </a:rPr>
-              <a:t>• Quando não tem informação, ela recusa?</a:t>
+              <a:t>• Citation-F1 (regex normaliza nº+ano)</a:t>
             </a:r>
           </a:p>
           <a:p>
@@ -5836,13 +4608,77 @@
               </a:spcAft>
             </a:pPr>
             <a:r>
-              <a:rPr sz="1400">
+              <a:rPr sz="1100">
                 <a:solidFill>
                   <a:srgbClr val="222222"/>
                 </a:solidFill>
                 <a:latin typeface="Calibri"/>
               </a:rPr>
-              <a:t>• Quanto tempo levou?</a:t>
+              <a:t>• Numeric exactness (tolerância em valores)</a:t>
+            </a:r>
+          </a:p>
+          <a:p>
+            <a:pPr>
+              <a:spcAft>
+                <a:spcPts val="400"/>
+              </a:spcAft>
+            </a:pPr>
+            <a:r>
+              <a:rPr sz="1100">
+                <a:solidFill>
+                  <a:srgbClr val="222222"/>
+                </a:solidFill>
+                <a:latin typeface="Calibri"/>
+              </a:rPr>
+              <a:t>• Refusal correctness (detecta "não consta")</a:t>
+            </a:r>
+          </a:p>
+          <a:p>
+            <a:pPr>
+              <a:spcAft>
+                <a:spcPts val="400"/>
+              </a:spcAft>
+            </a:pPr>
+            <a:r>
+              <a:rPr sz="1100">
+                <a:solidFill>
+                  <a:srgbClr val="222222"/>
+                </a:solidFill>
+                <a:latin typeface="Calibri"/>
+              </a:rPr>
+              <a:t>• LLM-as-judge: faithfulness · correctness · completeness · critical_error</a:t>
+            </a:r>
+          </a:p>
+          <a:p>
+            <a:pPr>
+              <a:spcAft>
+                <a:spcPts val="400"/>
+              </a:spcAft>
+            </a:pPr>
+            <a:r>
+              <a:rPr sz="1100">
+                <a:solidFill>
+                  <a:srgbClr val="222222"/>
+                </a:solidFill>
+                <a:latin typeface="Calibri"/>
+              </a:rPr>
+              <a:t>• Latência p50/p95 separadas (retrieval vs geração)</a:t>
+            </a:r>
+          </a:p>
+          <a:p>
+            <a:pPr>
+              <a:spcAft>
+                <a:spcPts val="400"/>
+              </a:spcAft>
+            </a:pPr>
+            <a:r>
+              <a:rPr sz="1100">
+                <a:solidFill>
+                  <a:srgbClr val="222222"/>
+                </a:solidFill>
+                <a:latin typeface="Calibri"/>
+              </a:rPr>
+              <a:t>• Bootstrap CI 95% — comparação estatística entre versões do retriever</a:t>
             </a:r>
           </a:p>
         </p:txBody>
@@ -5850,53 +4686,6 @@
       <p:sp>
         <p:nvSpPr>
           <p:cNvPr id="13" name="TextBox 12"/>
-          <p:cNvSpPr txBox="1"/>
-          <p:nvPr/>
-        </p:nvSpPr>
-        <p:spPr>
-          <a:xfrm>
-            <a:off x="6400800" y="5852160"/>
-            <a:ext cx="5486400" cy="457200"/>
-          </a:xfrm>
-          <a:prstGeom prst="rect">
-            <a:avLst/>
-          </a:prstGeom>
-          <a:noFill/>
-        </p:spPr>
-        <p:txBody>
-          <a:bodyPr wrap="square" lIns="45720" tIns="18288" rIns="45720" bIns="18288">
-            <a:spAutoFit/>
-          </a:bodyPr>
-          <a:lstStyle/>
-          <a:p>
-            <a:pPr algn="l"/>
-            <a:r>
-              <a:rPr sz="1300" b="0">
-                <a:solidFill>
-                  <a:srgbClr val="555555"/>
-                </a:solidFill>
-                <a:latin typeface="Calibri"/>
-              </a:rPr>
-              <a:t>→ Outra LLM atua como "juiz" comparando</a:t>
-            </a:r>
-          </a:p>
-          <a:p>
-            <a:pPr algn="l"/>
-            <a:r>
-              <a:rPr sz="1300" b="0">
-                <a:solidFill>
-                  <a:srgbClr val="555555"/>
-                </a:solidFill>
-                <a:latin typeface="Calibri"/>
-              </a:rPr>
-              <a:t>    resposta nossa × resposta do gabarito.</a:t>
-            </a:r>
-          </a:p>
-        </p:txBody>
-      </p:sp>
-      <p:sp>
-        <p:nvSpPr>
-          <p:cNvPr id="14" name="TextBox 13"/>
           <p:cNvSpPr txBox="1"/>
           <p:nvPr/>
         </p:nvSpPr>
@@ -5911,7 +4700,7 @@
           <a:noFill/>
         </p:spPr>
         <p:txBody>
-          <a:bodyPr wrap="square" lIns="45720" tIns="18288" rIns="45720" bIns="18288">
+          <a:bodyPr wrap="square" lIns="45720" rIns="45720" tIns="18288" bIns="18288">
             <a:spAutoFit/>
           </a:bodyPr>
           <a:lstStyle/>
@@ -5931,7 +4720,7 @@
       </p:sp>
       <p:sp>
         <p:nvSpPr>
-          <p:cNvPr id="15" name="TextBox 14"/>
+          <p:cNvPr id="14" name="TextBox 13"/>
           <p:cNvSpPr txBox="1"/>
           <p:nvPr/>
         </p:nvSpPr>
@@ -5946,7 +4735,7 @@
           <a:noFill/>
         </p:spPr>
         <p:txBody>
-          <a:bodyPr wrap="square" lIns="45720" tIns="18288" rIns="45720" bIns="18288">
+          <a:bodyPr wrap="square" lIns="45720" rIns="45720" tIns="18288" bIns="18288">
             <a:spAutoFit/>
           </a:bodyPr>
           <a:lstStyle/>
@@ -5973,7 +4762,7 @@
 </file>
 
 <file path=ppt/slides/slide12.xml><?xml version="1.0" encoding="utf-8"?>
-<p:sld xmlns:a="http://schemas.openxmlformats.org/drawingml/2006/main" xmlns:r="http://schemas.openxmlformats.org/officeDocument/2006/relationships" xmlns:p="http://schemas.openxmlformats.org/presentationml/2006/main">
+<p:sld xmlns:a="http://schemas.openxmlformats.org/drawingml/2006/main" xmlns:p="http://schemas.openxmlformats.org/presentationml/2006/main" xmlns:r="http://schemas.openxmlformats.org/officeDocument/2006/relationships">
   <p:cSld>
     <p:spTree>
       <p:nvGrpSpPr>
@@ -5981,14 +4770,7 @@
         <p:cNvGrpSpPr/>
         <p:nvPr/>
       </p:nvGrpSpPr>
-      <p:grpSpPr>
-        <a:xfrm>
-          <a:off x="0" y="0"/>
-          <a:ext cx="0" cy="0"/>
-          <a:chOff x="0" y="0"/>
-          <a:chExt cx="0" cy="0"/>
-        </a:xfrm>
-      </p:grpSpPr>
+      <p:grpSpPr/>
       <p:sp>
         <p:nvSpPr>
           <p:cNvPr id="2" name="Rectangle 1"/>
@@ -6029,7 +4811,6 @@
           <a:lstStyle/>
           <a:p>
             <a:pPr algn="ctr"/>
-            <a:endParaRPr/>
           </a:p>
         </p:txBody>
       </p:sp>
@@ -6050,7 +4831,7 @@
           <a:noFill/>
         </p:spPr>
         <p:txBody>
-          <a:bodyPr wrap="square" lIns="45720" tIns="18288" rIns="45720" bIns="18288">
+          <a:bodyPr wrap="square" lIns="45720" rIns="45720" tIns="18288" bIns="18288">
             <a:spAutoFit/>
           </a:bodyPr>
           <a:lstStyle/>
@@ -6085,7 +4866,7 @@
           <a:noFill/>
         </p:spPr>
         <p:txBody>
-          <a:bodyPr wrap="square" lIns="45720" tIns="18288" rIns="45720" bIns="18288">
+          <a:bodyPr wrap="square" lIns="45720" rIns="45720" tIns="18288" bIns="18288">
             <a:spAutoFit/>
           </a:bodyPr>
           <a:lstStyle/>
@@ -6120,7 +4901,7 @@
           <a:noFill/>
         </p:spPr>
         <p:txBody>
-          <a:bodyPr wrap="square" lIns="45720" tIns="18288" rIns="45720" bIns="18288">
+          <a:bodyPr wrap="square" lIns="45720" rIns="45720" tIns="18288" bIns="18288">
             <a:spAutoFit/>
           </a:bodyPr>
           <a:lstStyle/>
@@ -6226,7 +5007,7 @@
           <a:noFill/>
         </p:spPr>
         <p:txBody>
-          <a:bodyPr wrap="square" lIns="45720" tIns="18288" rIns="45720" bIns="18288">
+          <a:bodyPr wrap="square" lIns="45720" rIns="45720" tIns="18288" bIns="18288">
             <a:spAutoFit/>
           </a:bodyPr>
           <a:lstStyle/>
@@ -6317,6 +5098,80 @@
       </p:sp>
       <p:sp>
         <p:nvSpPr>
+          <p:cNvPr id="9" name="TextBox 8"/>
+          <p:cNvSpPr txBox="1"/>
+          <p:nvPr/>
+        </p:nvSpPr>
+        <p:spPr>
+          <a:xfrm>
+            <a:off x="548640" y="5029200"/>
+            <a:ext cx="10972800" cy="365760"/>
+          </a:xfrm>
+          <a:prstGeom prst="rect">
+            <a:avLst/>
+          </a:prstGeom>
+          <a:noFill/>
+        </p:spPr>
+        <p:txBody>
+          <a:bodyPr wrap="square" lIns="45720" rIns="45720" tIns="18288" bIns="18288">
+            <a:spAutoFit/>
+          </a:bodyPr>
+          <a:lstStyle/>
+          <a:p>
+            <a:pPr algn="l"/>
+            <a:r>
+              <a:rPr sz="2200" b="1">
+                <a:solidFill>
+                  <a:srgbClr val="1A4480"/>
+                </a:solidFill>
+                <a:latin typeface="Calibri"/>
+              </a:rPr>
+              <a:t>🚀 Próximos passos</a:t>
+            </a:r>
+          </a:p>
+        </p:txBody>
+      </p:sp>
+      <p:sp>
+        <p:nvSpPr>
+          <p:cNvPr id="10" name="TextBox 9"/>
+          <p:cNvSpPr txBox="1"/>
+          <p:nvPr/>
+        </p:nvSpPr>
+        <p:spPr>
+          <a:xfrm>
+            <a:off x="731520" y="5532120"/>
+            <a:ext cx="10972800" cy="1371600"/>
+          </a:xfrm>
+          <a:prstGeom prst="rect">
+            <a:avLst/>
+          </a:prstGeom>
+          <a:noFill/>
+        </p:spPr>
+        <p:txBody>
+          <a:bodyPr wrap="square">
+            <a:spAutoFit/>
+          </a:bodyPr>
+          <a:lstStyle/>
+          <a:p>
+            <a:pPr>
+              <a:spcAft>
+                <a:spcPts val="400"/>
+              </a:spcAft>
+            </a:pPr>
+            <a:r>
+              <a:rPr sz="1400">
+                <a:solidFill>
+                  <a:srgbClr val="222222"/>
+                </a:solidFill>
+                <a:latin typeface="Calibri"/>
+              </a:rPr>
+              <a:t>• Testar variações de tamanho de chunk · LLM reescrevendo a pergunta antes de buscar · cache de buscas frequentes</a:t>
+            </a:r>
+          </a:p>
+        </p:txBody>
+      </p:sp>
+      <p:sp>
+        <p:nvSpPr>
           <p:cNvPr id="11" name="TextBox 10"/>
           <p:cNvSpPr txBox="1"/>
           <p:nvPr/>
@@ -6332,7 +5187,7 @@
           <a:noFill/>
         </p:spPr>
         <p:txBody>
-          <a:bodyPr wrap="square" lIns="45720" tIns="18288" rIns="45720" bIns="18288">
+          <a:bodyPr wrap="square" lIns="45720" rIns="45720" tIns="18288" bIns="18288">
             <a:spAutoFit/>
           </a:bodyPr>
           <a:lstStyle/>
@@ -6367,7 +5222,7 @@
           <a:noFill/>
         </p:spPr>
         <p:txBody>
-          <a:bodyPr wrap="square" lIns="45720" tIns="18288" rIns="45720" bIns="18288">
+          <a:bodyPr wrap="square" lIns="45720" rIns="45720" tIns="18288" bIns="18288">
             <a:spAutoFit/>
           </a:bodyPr>
           <a:lstStyle/>
@@ -6394,7 +5249,7 @@
 </file>
 
 <file path=ppt/slides/slide13.xml><?xml version="1.0" encoding="utf-8"?>
-<p:sld xmlns:a="http://schemas.openxmlformats.org/drawingml/2006/main" xmlns:r="http://schemas.openxmlformats.org/officeDocument/2006/relationships" xmlns:p="http://schemas.openxmlformats.org/presentationml/2006/main">
+<p:sld xmlns:a="http://schemas.openxmlformats.org/drawingml/2006/main" xmlns:p="http://schemas.openxmlformats.org/presentationml/2006/main" xmlns:r="http://schemas.openxmlformats.org/officeDocument/2006/relationships">
   <p:cSld>
     <p:spTree>
       <p:nvGrpSpPr>
@@ -6402,14 +5257,7 @@
         <p:cNvGrpSpPr/>
         <p:nvPr/>
       </p:nvGrpSpPr>
-      <p:grpSpPr>
-        <a:xfrm>
-          <a:off x="0" y="0"/>
-          <a:ext cx="0" cy="0"/>
-          <a:chOff x="0" y="0"/>
-          <a:chExt cx="0" cy="0"/>
-        </a:xfrm>
-      </p:grpSpPr>
+      <p:grpSpPr/>
       <p:sp>
         <p:nvSpPr>
           <p:cNvPr id="2" name="Rectangle 1"/>
@@ -6450,7 +5298,6 @@
           <a:lstStyle/>
           <a:p>
             <a:pPr algn="ctr"/>
-            <a:endParaRPr/>
           </a:p>
         </p:txBody>
       </p:sp>
@@ -6471,7 +5318,7 @@
           <a:noFill/>
         </p:spPr>
         <p:txBody>
-          <a:bodyPr wrap="square" lIns="45720" tIns="18288" rIns="45720" bIns="18288">
+          <a:bodyPr wrap="square" lIns="45720" rIns="45720" tIns="18288" bIns="18288">
             <a:spAutoFit/>
           </a:bodyPr>
           <a:lstStyle/>
@@ -6506,7 +5353,7 @@
           <a:noFill/>
         </p:spPr>
         <p:txBody>
-          <a:bodyPr wrap="square" lIns="45720" tIns="18288" rIns="45720" bIns="18288">
+          <a:bodyPr wrap="square" lIns="45720" rIns="45720" tIns="18288" bIns="18288">
             <a:spAutoFit/>
           </a:bodyPr>
           <a:lstStyle/>
@@ -6530,13 +5377,7 @@
           <p:cNvGraphicFramePr>
             <a:graphicFrameLocks noGrp="1"/>
           </p:cNvGraphicFramePr>
-          <p:nvPr>
-            <p:extLst>
-              <p:ext uri="{D42A27DB-BD31-4B8C-83A1-F6EECF244321}">
-                <p14:modId xmlns:p14="http://schemas.microsoft.com/office/powerpoint/2010/main" val="3690043225"/>
-              </p:ext>
-            </p:extLst>
-          </p:nvPr>
+          <p:nvPr/>
         </p:nvGraphicFramePr>
         <p:xfrm>
           <a:off x="365760" y="1188720"/>
@@ -6549,32 +5390,14 @@
                 <a:tableStyleId>{5C22544A-7EE6-4342-B048-85BDC9FD1C3A}</a:tableStyleId>
               </a:tblPr>
               <a:tblGrid>
-                <a:gridCol w="2637692">
-                  <a:extLst>
-                    <a:ext uri="{9D8B030D-6E8A-4147-A177-3AD203B41FA5}">
-                      <a16:colId xmlns:a16="http://schemas.microsoft.com/office/drawing/2014/main" val="20000"/>
-                    </a:ext>
-                  </a:extLst>
-                </a:gridCol>
-                <a:gridCol w="3516923">
-                  <a:extLst>
-                    <a:ext uri="{9D8B030D-6E8A-4147-A177-3AD203B41FA5}">
-                      <a16:colId xmlns:a16="http://schemas.microsoft.com/office/drawing/2014/main" val="20001"/>
-                    </a:ext>
-                  </a:extLst>
-                </a:gridCol>
-                <a:gridCol w="5275384">
-                  <a:extLst>
-                    <a:ext uri="{9D8B030D-6E8A-4147-A177-3AD203B41FA5}">
-                      <a16:colId xmlns:a16="http://schemas.microsoft.com/office/drawing/2014/main" val="20002"/>
-                    </a:ext>
-                  </a:extLst>
-                </a:gridCol>
+                <a:gridCol w="2637692"/>
+                <a:gridCol w="3516923"/>
+                <a:gridCol w="5275384"/>
               </a:tblGrid>
               <a:tr h="493776">
                 <a:tc>
                   <a:txBody>
-                    <a:bodyPr/>
+                    <a:bodyPr wrap="square" lIns="73152" rIns="73152"/>
                     <a:lstStyle/>
                     <a:p>
                       <a:r>
@@ -6596,7 +5419,7 @@
                 </a:tc>
                 <a:tc>
                   <a:txBody>
-                    <a:bodyPr/>
+                    <a:bodyPr wrap="square" lIns="73152" rIns="73152"/>
                     <a:lstStyle/>
                     <a:p>
                       <a:r>
@@ -6618,7 +5441,7 @@
                 </a:tc>
                 <a:tc>
                   <a:txBody>
-                    <a:bodyPr/>
+                    <a:bodyPr wrap="square" lIns="73152" rIns="73152"/>
                     <a:lstStyle/>
                     <a:p>
                       <a:r>
@@ -6638,16 +5461,11 @@
                     </a:solidFill>
                   </a:tcPr>
                 </a:tc>
-                <a:extLst>
-                  <a:ext uri="{0D108BD9-81ED-4DB2-BD59-A6C34878D82A}">
-                    <a16:rowId xmlns:a16="http://schemas.microsoft.com/office/drawing/2014/main" val="10000"/>
-                  </a:ext>
-                </a:extLst>
               </a:tr>
               <a:tr h="493776">
                 <a:tc>
                   <a:txBody>
-                    <a:bodyPr/>
+                    <a:bodyPr wrap="square" lIns="73152" rIns="73152"/>
                     <a:lstStyle/>
                     <a:p>
                       <a:r>
@@ -6669,7 +5487,7 @@
                 </a:tc>
                 <a:tc>
                   <a:txBody>
-                    <a:bodyPr/>
+                    <a:bodyPr wrap="square" lIns="73152" rIns="73152"/>
                     <a:lstStyle/>
                     <a:p>
                       <a:r>
@@ -6691,7 +5509,7 @@
                 </a:tc>
                 <a:tc>
                   <a:txBody>
-                    <a:bodyPr/>
+                    <a:bodyPr wrap="square" lIns="73152" rIns="73152"/>
                     <a:lstStyle/>
                     <a:p>
                       <a:r>
@@ -6711,16 +5529,11 @@
                     </a:solidFill>
                   </a:tcPr>
                 </a:tc>
-                <a:extLst>
-                  <a:ext uri="{0D108BD9-81ED-4DB2-BD59-A6C34878D82A}">
-                    <a16:rowId xmlns:a16="http://schemas.microsoft.com/office/drawing/2014/main" val="10001"/>
-                  </a:ext>
-                </a:extLst>
               </a:tr>
               <a:tr h="493776">
                 <a:tc>
                   <a:txBody>
-                    <a:bodyPr/>
+                    <a:bodyPr wrap="square" lIns="73152" rIns="73152"/>
                     <a:lstStyle/>
                     <a:p>
                       <a:r>
@@ -6742,7 +5555,7 @@
                 </a:tc>
                 <a:tc>
                   <a:txBody>
-                    <a:bodyPr/>
+                    <a:bodyPr wrap="square" lIns="73152" rIns="73152"/>
                     <a:lstStyle/>
                     <a:p>
                       <a:r>
@@ -6764,7 +5577,7 @@
                 </a:tc>
                 <a:tc>
                   <a:txBody>
-                    <a:bodyPr/>
+                    <a:bodyPr wrap="square" lIns="73152" rIns="73152"/>
                     <a:lstStyle/>
                     <a:p>
                       <a:r>
@@ -6784,16 +5597,11 @@
                     </a:solidFill>
                   </a:tcPr>
                 </a:tc>
-                <a:extLst>
-                  <a:ext uri="{0D108BD9-81ED-4DB2-BD59-A6C34878D82A}">
-                    <a16:rowId xmlns:a16="http://schemas.microsoft.com/office/drawing/2014/main" val="10002"/>
-                  </a:ext>
-                </a:extLst>
               </a:tr>
               <a:tr h="493776">
                 <a:tc>
                   <a:txBody>
-                    <a:bodyPr/>
+                    <a:bodyPr wrap="square" lIns="73152" rIns="73152"/>
                     <a:lstStyle/>
                     <a:p>
                       <a:r>
@@ -6815,7 +5623,7 @@
                 </a:tc>
                 <a:tc>
                   <a:txBody>
-                    <a:bodyPr/>
+                    <a:bodyPr wrap="square" lIns="73152" rIns="73152"/>
                     <a:lstStyle/>
                     <a:p>
                       <a:r>
@@ -6837,7 +5645,7 @@
                 </a:tc>
                 <a:tc>
                   <a:txBody>
-                    <a:bodyPr/>
+                    <a:bodyPr wrap="square" lIns="73152" rIns="73152"/>
                     <a:lstStyle/>
                     <a:p>
                       <a:r>
@@ -6857,33 +5665,22 @@
                     </a:solidFill>
                   </a:tcPr>
                 </a:tc>
-                <a:extLst>
-                  <a:ext uri="{0D108BD9-81ED-4DB2-BD59-A6C34878D82A}">
-                    <a16:rowId xmlns:a16="http://schemas.microsoft.com/office/drawing/2014/main" val="10003"/>
-                  </a:ext>
-                </a:extLst>
               </a:tr>
               <a:tr h="493776">
                 <a:tc>
                   <a:txBody>
-                    <a:bodyPr/>
+                    <a:bodyPr wrap="square" lIns="73152" rIns="73152"/>
                     <a:lstStyle/>
                     <a:p>
                       <a:r>
-                        <a:rPr lang="pt-BR" sz="1200" dirty="0" err="1">
+                        <a:rPr sz="1200">
                           <a:solidFill>
                             <a:srgbClr val="222222"/>
                           </a:solidFill>
                           <a:latin typeface="Calibri"/>
                         </a:rPr>
-                        <a:t>Chunk</a:t>
+                        <a:t>Cortar em pedaços</a:t>
                       </a:r>
-                      <a:endParaRPr sz="1200" dirty="0">
-                        <a:solidFill>
-                          <a:srgbClr val="222222"/>
-                        </a:solidFill>
-                        <a:latin typeface="Calibri"/>
-                      </a:endParaRPr>
                     </a:p>
                   </a:txBody>
                   <a:tcPr>
@@ -6894,42 +5691,18 @@
                 </a:tc>
                 <a:tc>
                   <a:txBody>
-                    <a:bodyPr/>
+                    <a:bodyPr wrap="square" lIns="73152" rIns="73152"/>
                     <a:lstStyle/>
                     <a:p>
                       <a:r>
-                        <a:rPr lang="pt-BR" sz="1200" dirty="0">
+                        <a:rPr sz="1200">
                           <a:solidFill>
                             <a:srgbClr val="222222"/>
                           </a:solidFill>
                           <a:latin typeface="Calibri"/>
                         </a:rPr>
-                        <a:t>Cascata (</a:t>
+                        <a:t>Lógica própria</a:t>
                       </a:r>
-                      <a:r>
-                        <a:rPr lang="pt-BR" sz="1200" dirty="0" err="1">
-                          <a:solidFill>
-                            <a:srgbClr val="222222"/>
-                          </a:solidFill>
-                          <a:latin typeface="Calibri"/>
-                        </a:rPr>
-                        <a:t>Regex</a:t>
-                      </a:r>
-                      <a:r>
-                        <a:rPr lang="pt-BR" sz="1200" dirty="0">
-                          <a:solidFill>
-                            <a:srgbClr val="222222"/>
-                          </a:solidFill>
-                          <a:latin typeface="Calibri"/>
-                        </a:rPr>
-                        <a:t> + Janela deslizante + fusão)</a:t>
-                      </a:r>
-                      <a:endParaRPr sz="1200" dirty="0">
-                        <a:solidFill>
-                          <a:srgbClr val="222222"/>
-                        </a:solidFill>
-                        <a:latin typeface="Calibri"/>
-                      </a:endParaRPr>
                     </a:p>
                   </a:txBody>
                   <a:tcPr>
@@ -6940,7 +5713,7 @@
                 </a:tc>
                 <a:tc>
                   <a:txBody>
-                    <a:bodyPr/>
+                    <a:bodyPr wrap="square" lIns="73152" rIns="73152"/>
                     <a:lstStyle/>
                     <a:p>
                       <a:r>
@@ -6960,42 +5733,22 @@
                     </a:solidFill>
                   </a:tcPr>
                 </a:tc>
-                <a:extLst>
-                  <a:ext uri="{0D108BD9-81ED-4DB2-BD59-A6C34878D82A}">
-                    <a16:rowId xmlns:a16="http://schemas.microsoft.com/office/drawing/2014/main" val="10004"/>
-                  </a:ext>
-                </a:extLst>
               </a:tr>
               <a:tr h="493776">
                 <a:tc>
                   <a:txBody>
-                    <a:bodyPr/>
+                    <a:bodyPr wrap="square" lIns="73152" rIns="73152"/>
                     <a:lstStyle/>
                     <a:p>
                       <a:r>
-                        <a:rPr lang="pt-BR" sz="1200" dirty="0">
+                        <a:rPr sz="1200">
                           <a:solidFill>
                             <a:srgbClr val="222222"/>
                           </a:solidFill>
                           <a:latin typeface="Calibri"/>
                         </a:rPr>
-                        <a:t>Modelo de </a:t>
+                        <a:t>DNA do texto</a:t>
                       </a:r>
-                      <a:r>
-                        <a:rPr lang="pt-BR" sz="1200" dirty="0" err="1">
-                          <a:solidFill>
-                            <a:srgbClr val="222222"/>
-                          </a:solidFill>
-                          <a:latin typeface="Calibri"/>
-                        </a:rPr>
-                        <a:t>embedding</a:t>
-                      </a:r>
-                      <a:endParaRPr sz="1200" dirty="0">
-                        <a:solidFill>
-                          <a:srgbClr val="222222"/>
-                        </a:solidFill>
-                        <a:latin typeface="Calibri"/>
-                      </a:endParaRPr>
                     </a:p>
                   </a:txBody>
                   <a:tcPr>
@@ -7006,7 +5759,7 @@
                 </a:tc>
                 <a:tc>
                   <a:txBody>
-                    <a:bodyPr/>
+                    <a:bodyPr wrap="square" lIns="73152" rIns="73152"/>
                     <a:lstStyle/>
                     <a:p>
                       <a:r>
@@ -7028,7 +5781,7 @@
                 </a:tc>
                 <a:tc>
                   <a:txBody>
-                    <a:bodyPr/>
+                    <a:bodyPr wrap="square" lIns="73152" rIns="73152"/>
                     <a:lstStyle/>
                     <a:p>
                       <a:r>
@@ -7048,33 +5801,22 @@
                     </a:solidFill>
                   </a:tcPr>
                 </a:tc>
-                <a:extLst>
-                  <a:ext uri="{0D108BD9-81ED-4DB2-BD59-A6C34878D82A}">
-                    <a16:rowId xmlns:a16="http://schemas.microsoft.com/office/drawing/2014/main" val="10005"/>
-                  </a:ext>
-                </a:extLst>
               </a:tr>
               <a:tr h="493776">
                 <a:tc>
                   <a:txBody>
-                    <a:bodyPr/>
+                    <a:bodyPr wrap="square" lIns="73152" rIns="73152"/>
                     <a:lstStyle/>
                     <a:p>
                       <a:r>
-                        <a:rPr lang="pt-BR" sz="1200" dirty="0">
+                        <a:rPr sz="1200">
                           <a:solidFill>
                             <a:srgbClr val="222222"/>
                           </a:solidFill>
                           <a:latin typeface="Calibri"/>
                         </a:rPr>
-                        <a:t>BD VETORIAL</a:t>
+                        <a:t>Banco de busca</a:t>
                       </a:r>
-                      <a:endParaRPr sz="1200" dirty="0">
-                        <a:solidFill>
-                          <a:srgbClr val="222222"/>
-                        </a:solidFill>
-                        <a:latin typeface="Calibri"/>
-                      </a:endParaRPr>
                     </a:p>
                   </a:txBody>
                   <a:tcPr>
@@ -7085,7 +5827,7 @@
                 </a:tc>
                 <a:tc>
                   <a:txBody>
-                    <a:bodyPr/>
+                    <a:bodyPr wrap="square" lIns="73152" rIns="73152"/>
                     <a:lstStyle/>
                     <a:p>
                       <a:r>
@@ -7107,7 +5849,7 @@
                 </a:tc>
                 <a:tc>
                   <a:txBody>
-                    <a:bodyPr/>
+                    <a:bodyPr wrap="square" lIns="73152" rIns="73152"/>
                     <a:lstStyle/>
                     <a:p>
                       <a:r>
@@ -7127,16 +5869,11 @@
                     </a:solidFill>
                   </a:tcPr>
                 </a:tc>
-                <a:extLst>
-                  <a:ext uri="{0D108BD9-81ED-4DB2-BD59-A6C34878D82A}">
-                    <a16:rowId xmlns:a16="http://schemas.microsoft.com/office/drawing/2014/main" val="10006"/>
-                  </a:ext>
-                </a:extLst>
               </a:tr>
               <a:tr h="493776">
                 <a:tc>
                   <a:txBody>
-                    <a:bodyPr/>
+                    <a:bodyPr wrap="square" lIns="73152" rIns="73152"/>
                     <a:lstStyle/>
                     <a:p>
                       <a:r>
@@ -7158,60 +5895,18 @@
                 </a:tc>
                 <a:tc>
                   <a:txBody>
-                    <a:bodyPr/>
+                    <a:bodyPr wrap="square" lIns="73152" rIns="73152"/>
                     <a:lstStyle/>
                     <a:p>
                       <a:r>
-                        <a:rPr sz="1200" dirty="0">
+                        <a:rPr sz="1200">
                           <a:solidFill>
                             <a:srgbClr val="222222"/>
                           </a:solidFill>
                           <a:latin typeface="Calibri"/>
                         </a:rPr>
-                        <a:t>3 </a:t>
+                        <a:t>3 buscas + fusão + juiz</a:t>
                       </a:r>
-                      <a:r>
-                        <a:rPr sz="1200" dirty="0" err="1">
-                          <a:solidFill>
-                            <a:srgbClr val="222222"/>
-                          </a:solidFill>
-                          <a:latin typeface="Calibri"/>
-                        </a:rPr>
-                        <a:t>buscas</a:t>
-                      </a:r>
-                      <a:r>
-                        <a:rPr sz="1200" dirty="0">
-                          <a:solidFill>
-                            <a:srgbClr val="222222"/>
-                          </a:solidFill>
-                          <a:latin typeface="Calibri"/>
-                        </a:rPr>
-                        <a:t> + </a:t>
-                      </a:r>
-                      <a:r>
-                        <a:rPr lang="pt-BR" sz="1200" dirty="0">
-                          <a:solidFill>
-                            <a:srgbClr val="222222"/>
-                          </a:solidFill>
-                          <a:latin typeface="Calibri"/>
-                        </a:rPr>
-                        <a:t>RRF + </a:t>
-                      </a:r>
-                      <a:r>
-                        <a:rPr lang="pt-BR" sz="1200" dirty="0" err="1">
-                          <a:solidFill>
-                            <a:srgbClr val="222222"/>
-                          </a:solidFill>
-                          <a:latin typeface="Calibri"/>
-                        </a:rPr>
-                        <a:t>Reranker</a:t>
-                      </a:r>
-                      <a:endParaRPr sz="1200" dirty="0">
-                        <a:solidFill>
-                          <a:srgbClr val="222222"/>
-                        </a:solidFill>
-                        <a:latin typeface="Calibri"/>
-                      </a:endParaRPr>
                     </a:p>
                   </a:txBody>
                   <a:tcPr>
@@ -7222,78 +5917,18 @@
                 </a:tc>
                 <a:tc>
                   <a:txBody>
-                    <a:bodyPr/>
+                    <a:bodyPr wrap="square" lIns="73152" rIns="73152"/>
                     <a:lstStyle/>
                     <a:p>
                       <a:r>
-                        <a:rPr sz="1200" dirty="0" err="1">
+                        <a:rPr sz="1200">
                           <a:solidFill>
                             <a:srgbClr val="222222"/>
                           </a:solidFill>
                           <a:latin typeface="Calibri"/>
                         </a:rPr>
-                        <a:t>Acha</a:t>
+                        <a:t>Acha os 6 melhores</a:t>
                       </a:r>
-                      <a:r>
-                        <a:rPr sz="1200" dirty="0">
-                          <a:solidFill>
-                            <a:srgbClr val="222222"/>
-                          </a:solidFill>
-                          <a:latin typeface="Calibri"/>
-                        </a:rPr>
-                        <a:t> </a:t>
-                      </a:r>
-                      <a:r>
-                        <a:rPr sz="1200" dirty="0" err="1">
-                          <a:solidFill>
-                            <a:srgbClr val="222222"/>
-                          </a:solidFill>
-                          <a:latin typeface="Calibri"/>
-                        </a:rPr>
-                        <a:t>os</a:t>
-                      </a:r>
-                      <a:r>
-                        <a:rPr sz="1200" dirty="0">
-                          <a:solidFill>
-                            <a:srgbClr val="222222"/>
-                          </a:solidFill>
-                          <a:latin typeface="Calibri"/>
-                        </a:rPr>
-                        <a:t> </a:t>
-                      </a:r>
-                      <a:r>
-                        <a:rPr lang="pt-BR" sz="1200" dirty="0">
-                          <a:solidFill>
-                            <a:srgbClr val="222222"/>
-                          </a:solidFill>
-                          <a:latin typeface="Calibri"/>
-                        </a:rPr>
-                        <a:t>K</a:t>
-                      </a:r>
-                      <a:r>
-                        <a:rPr sz="1200" dirty="0">
-                          <a:solidFill>
-                            <a:srgbClr val="222222"/>
-                          </a:solidFill>
-                          <a:latin typeface="Calibri"/>
-                        </a:rPr>
-                        <a:t> </a:t>
-                      </a:r>
-                      <a:r>
-                        <a:rPr sz="1200" dirty="0" err="1">
-                          <a:solidFill>
-                            <a:srgbClr val="222222"/>
-                          </a:solidFill>
-                          <a:latin typeface="Calibri"/>
-                        </a:rPr>
-                        <a:t>melhores</a:t>
-                      </a:r>
-                      <a:endParaRPr sz="1200" dirty="0">
-                        <a:solidFill>
-                          <a:srgbClr val="222222"/>
-                        </a:solidFill>
-                        <a:latin typeface="Calibri"/>
-                      </a:endParaRPr>
                     </a:p>
                   </a:txBody>
                   <a:tcPr>
@@ -7302,16 +5937,11 @@
                     </a:solidFill>
                   </a:tcPr>
                 </a:tc>
-                <a:extLst>
-                  <a:ext uri="{0D108BD9-81ED-4DB2-BD59-A6C34878D82A}">
-                    <a16:rowId xmlns:a16="http://schemas.microsoft.com/office/drawing/2014/main" val="10007"/>
-                  </a:ext>
-                </a:extLst>
               </a:tr>
               <a:tr h="493776">
                 <a:tc>
                   <a:txBody>
-                    <a:bodyPr/>
+                    <a:bodyPr wrap="square" lIns="73152" rIns="73152"/>
                     <a:lstStyle/>
                     <a:p>
                       <a:r>
@@ -7333,7 +5963,7 @@
                 </a:tc>
                 <a:tc>
                   <a:txBody>
-                    <a:bodyPr/>
+                    <a:bodyPr wrap="square" lIns="73152" rIns="73152"/>
                     <a:lstStyle/>
                     <a:p>
                       <a:r>
@@ -7355,7 +5985,7 @@
                 </a:tc>
                 <a:tc>
                   <a:txBody>
-                    <a:bodyPr/>
+                    <a:bodyPr wrap="square" lIns="73152" rIns="73152"/>
                     <a:lstStyle/>
                     <a:p>
                       <a:r>
@@ -7375,24 +6005,22 @@
                     </a:solidFill>
                   </a:tcPr>
                 </a:tc>
-                <a:extLst>
-                  <a:ext uri="{0D108BD9-81ED-4DB2-BD59-A6C34878D82A}">
-                    <a16:rowId xmlns:a16="http://schemas.microsoft.com/office/drawing/2014/main" val="10008"/>
-                  </a:ext>
-                </a:extLst>
               </a:tr>
               <a:tr h="493776">
                 <a:tc>
                   <a:txBody>
-                    <a:bodyPr/>
+                    <a:bodyPr wrap="square" lIns="73152" rIns="73152"/>
                     <a:lstStyle/>
                     <a:p>
-                      <a:endParaRPr sz="1200" dirty="0">
-                        <a:solidFill>
-                          <a:srgbClr val="222222"/>
-                        </a:solidFill>
-                        <a:latin typeface="Calibri"/>
-                      </a:endParaRPr>
+                      <a:r>
+                        <a:rPr sz="1200">
+                          <a:solidFill>
+                            <a:srgbClr val="222222"/>
+                          </a:solidFill>
+                          <a:latin typeface="Calibri"/>
+                        </a:rPr>
+                        <a:t>Avaliar</a:t>
+                      </a:r>
                     </a:p>
                   </a:txBody>
                   <a:tcPr>
@@ -7403,15 +6031,18 @@
                 </a:tc>
                 <a:tc>
                   <a:txBody>
-                    <a:bodyPr/>
+                    <a:bodyPr wrap="square" lIns="73152" rIns="73152"/>
                     <a:lstStyle/>
                     <a:p>
-                      <a:endParaRPr sz="1200" dirty="0">
-                        <a:solidFill>
-                          <a:srgbClr val="222222"/>
-                        </a:solidFill>
-                        <a:latin typeface="Calibri"/>
-                      </a:endParaRPr>
+                      <a:r>
+                        <a:rPr sz="1200">
+                          <a:solidFill>
+                            <a:srgbClr val="222222"/>
+                          </a:solidFill>
+                          <a:latin typeface="Calibri"/>
+                        </a:rPr>
+                        <a:t>Gabarito + outra LLM como juiz</a:t>
+                      </a:r>
                     </a:p>
                   </a:txBody>
                   <a:tcPr>
@@ -7422,15 +6053,18 @@
                 </a:tc>
                 <a:tc>
                   <a:txBody>
-                    <a:bodyPr/>
+                    <a:bodyPr wrap="square" lIns="73152" rIns="73152"/>
                     <a:lstStyle/>
                     <a:p>
-                      <a:endParaRPr sz="1200" dirty="0">
-                        <a:solidFill>
-                          <a:srgbClr val="222222"/>
-                        </a:solidFill>
-                        <a:latin typeface="Calibri"/>
-                      </a:endParaRPr>
+                      <a:r>
+                        <a:rPr sz="1200">
+                          <a:solidFill>
+                            <a:srgbClr val="222222"/>
+                          </a:solidFill>
+                          <a:latin typeface="Calibri"/>
+                        </a:rPr>
+                        <a:t>Mede se a resposta está boa</a:t>
+                      </a:r>
                     </a:p>
                   </a:txBody>
                   <a:tcPr>
@@ -7439,11 +6073,6 @@
                     </a:solidFill>
                   </a:tcPr>
                 </a:tc>
-                <a:extLst>
-                  <a:ext uri="{0D108BD9-81ED-4DB2-BD59-A6C34878D82A}">
-                    <a16:rowId xmlns:a16="http://schemas.microsoft.com/office/drawing/2014/main" val="10009"/>
-                  </a:ext>
-                </a:extLst>
               </a:tr>
             </a:tbl>
           </a:graphicData>
@@ -7466,7 +6095,7 @@
           <a:noFill/>
         </p:spPr>
         <p:txBody>
-          <a:bodyPr wrap="square" lIns="45720" tIns="18288" rIns="45720" bIns="18288">
+          <a:bodyPr wrap="square" lIns="45720" rIns="45720" tIns="18288" bIns="18288">
             <a:spAutoFit/>
           </a:bodyPr>
           <a:lstStyle/>
@@ -7501,7 +6130,7 @@
           <a:noFill/>
         </p:spPr>
         <p:txBody>
-          <a:bodyPr wrap="square" lIns="45720" tIns="18288" rIns="45720" bIns="18288">
+          <a:bodyPr wrap="square" lIns="45720" rIns="45720" tIns="18288" bIns="18288">
             <a:spAutoFit/>
           </a:bodyPr>
           <a:lstStyle/>
@@ -7536,7 +6165,7 @@
           <a:noFill/>
         </p:spPr>
         <p:txBody>
-          <a:bodyPr wrap="square" lIns="45720" tIns="18288" rIns="45720" bIns="18288">
+          <a:bodyPr wrap="square" lIns="45720" rIns="45720" tIns="18288" bIns="18288">
             <a:spAutoFit/>
           </a:bodyPr>
           <a:lstStyle/>
@@ -7563,7 +6192,7 @@
 </file>
 
 <file path=ppt/slides/slide2.xml><?xml version="1.0" encoding="utf-8"?>
-<p:sld xmlns:a="http://schemas.openxmlformats.org/drawingml/2006/main" xmlns:r="http://schemas.openxmlformats.org/officeDocument/2006/relationships" xmlns:p="http://schemas.openxmlformats.org/presentationml/2006/main">
+<p:sld xmlns:a="http://schemas.openxmlformats.org/drawingml/2006/main" xmlns:p="http://schemas.openxmlformats.org/presentationml/2006/main" xmlns:r="http://schemas.openxmlformats.org/officeDocument/2006/relationships">
   <p:cSld>
     <p:spTree>
       <p:nvGrpSpPr>
@@ -7571,14 +6200,7 @@
         <p:cNvGrpSpPr/>
         <p:nvPr/>
       </p:nvGrpSpPr>
-      <p:grpSpPr>
-        <a:xfrm>
-          <a:off x="0" y="0"/>
-          <a:ext cx="0" cy="0"/>
-          <a:chOff x="0" y="0"/>
-          <a:chExt cx="0" cy="0"/>
-        </a:xfrm>
-      </p:grpSpPr>
+      <p:grpSpPr/>
       <p:sp>
         <p:nvSpPr>
           <p:cNvPr id="2" name="Rectangle 1"/>
@@ -7619,7 +6241,6 @@
           <a:lstStyle/>
           <a:p>
             <a:pPr algn="ctr"/>
-            <a:endParaRPr/>
           </a:p>
         </p:txBody>
       </p:sp>
@@ -7640,7 +6261,7 @@
           <a:noFill/>
         </p:spPr>
         <p:txBody>
-          <a:bodyPr wrap="square" lIns="45720" tIns="18288" rIns="45720" bIns="18288">
+          <a:bodyPr wrap="square" lIns="45720" rIns="45720" tIns="18288" bIns="18288">
             <a:spAutoFit/>
           </a:bodyPr>
           <a:lstStyle/>
@@ -7675,7 +6296,7 @@
           <a:noFill/>
         </p:spPr>
         <p:txBody>
-          <a:bodyPr wrap="square" lIns="45720" tIns="18288" rIns="45720" bIns="18288">
+          <a:bodyPr wrap="square" lIns="45720" rIns="45720" tIns="18288" bIns="18288">
             <a:spAutoFit/>
           </a:bodyPr>
           <a:lstStyle/>
@@ -7710,7 +6331,7 @@
           <a:noFill/>
         </p:spPr>
         <p:txBody>
-          <a:bodyPr wrap="square" lIns="45720" tIns="18288" rIns="45720" bIns="18288">
+          <a:bodyPr wrap="square" lIns="45720" rIns="45720" tIns="18288" bIns="18288">
             <a:spAutoFit/>
           </a:bodyPr>
           <a:lstStyle/>
@@ -7841,7 +6462,6 @@
           <a:lstStyle/>
           <a:p>
             <a:pPr algn="ctr"/>
-            <a:endParaRPr/>
           </a:p>
         </p:txBody>
       </p:sp>
@@ -7862,7 +6482,7 @@
           <a:noFill/>
         </p:spPr>
         <p:txBody>
-          <a:bodyPr wrap="square" lIns="45720" tIns="18288" rIns="45720" bIns="18288">
+          <a:bodyPr wrap="square" lIns="45720" rIns="45720" tIns="18288" bIns="18288">
             <a:spAutoFit/>
           </a:bodyPr>
           <a:lstStyle/>
@@ -7897,7 +6517,7 @@
           <a:noFill/>
         </p:spPr>
         <p:txBody>
-          <a:bodyPr wrap="square" lIns="45720" tIns="18288" rIns="45720" bIns="18288">
+          <a:bodyPr wrap="square" lIns="45720" rIns="45720" tIns="18288" bIns="18288">
             <a:spAutoFit/>
           </a:bodyPr>
           <a:lstStyle/>
@@ -7957,7 +6577,6 @@
           <a:lstStyle/>
           <a:p>
             <a:pPr algn="ctr"/>
-            <a:endParaRPr/>
           </a:p>
         </p:txBody>
       </p:sp>
@@ -7978,7 +6597,7 @@
           <a:noFill/>
         </p:spPr>
         <p:txBody>
-          <a:bodyPr wrap="square" lIns="45720" tIns="18288" rIns="45720" bIns="18288">
+          <a:bodyPr wrap="square" lIns="45720" rIns="45720" tIns="18288" bIns="18288">
             <a:spAutoFit/>
           </a:bodyPr>
           <a:lstStyle/>
@@ -8013,7 +6632,7 @@
           <a:noFill/>
         </p:spPr>
         <p:txBody>
-          <a:bodyPr wrap="square" lIns="45720" tIns="18288" rIns="45720" bIns="18288">
+          <a:bodyPr wrap="square" lIns="45720" rIns="45720" tIns="18288" bIns="18288">
             <a:spAutoFit/>
           </a:bodyPr>
           <a:lstStyle/>
@@ -8073,7 +6692,6 @@
           <a:lstStyle/>
           <a:p>
             <a:pPr algn="ctr"/>
-            <a:endParaRPr/>
           </a:p>
         </p:txBody>
       </p:sp>
@@ -8094,7 +6712,7 @@
           <a:noFill/>
         </p:spPr>
         <p:txBody>
-          <a:bodyPr wrap="square" lIns="45720" tIns="18288" rIns="45720" bIns="18288">
+          <a:bodyPr wrap="square" lIns="45720" rIns="45720" tIns="18288" bIns="18288">
             <a:spAutoFit/>
           </a:bodyPr>
           <a:lstStyle/>
@@ -8129,7 +6747,7 @@
           <a:noFill/>
         </p:spPr>
         <p:txBody>
-          <a:bodyPr wrap="square" lIns="45720" tIns="18288" rIns="45720" bIns="18288">
+          <a:bodyPr wrap="square" lIns="45720" rIns="45720" tIns="18288" bIns="18288">
             <a:spAutoFit/>
           </a:bodyPr>
           <a:lstStyle/>
@@ -8164,7 +6782,7 @@
           <a:noFill/>
         </p:spPr>
         <p:txBody>
-          <a:bodyPr wrap="square" lIns="45720" tIns="18288" rIns="45720" bIns="18288">
+          <a:bodyPr wrap="square" lIns="45720" rIns="45720" tIns="18288" bIns="18288">
             <a:spAutoFit/>
           </a:bodyPr>
           <a:lstStyle/>
@@ -8199,7 +6817,7 @@
           <a:noFill/>
         </p:spPr>
         <p:txBody>
-          <a:bodyPr wrap="square" lIns="45720" tIns="18288" rIns="45720" bIns="18288">
+          <a:bodyPr wrap="square" lIns="45720" rIns="45720" tIns="18288" bIns="18288">
             <a:spAutoFit/>
           </a:bodyPr>
           <a:lstStyle/>
@@ -8234,7 +6852,7 @@
           <a:noFill/>
         </p:spPr>
         <p:txBody>
-          <a:bodyPr wrap="square" lIns="45720" tIns="18288" rIns="45720" bIns="18288">
+          <a:bodyPr wrap="square" lIns="45720" rIns="45720" tIns="18288" bIns="18288">
             <a:spAutoFit/>
           </a:bodyPr>
           <a:lstStyle/>
@@ -8261,7 +6879,7 @@
 </file>
 
 <file path=ppt/slides/slide3.xml><?xml version="1.0" encoding="utf-8"?>
-<p:sld xmlns:a="http://schemas.openxmlformats.org/drawingml/2006/main" xmlns:r="http://schemas.openxmlformats.org/officeDocument/2006/relationships" xmlns:p="http://schemas.openxmlformats.org/presentationml/2006/main">
+<p:sld xmlns:a="http://schemas.openxmlformats.org/drawingml/2006/main" xmlns:p="http://schemas.openxmlformats.org/presentationml/2006/main" xmlns:r="http://schemas.openxmlformats.org/officeDocument/2006/relationships">
   <p:cSld>
     <p:spTree>
       <p:nvGrpSpPr>
@@ -8269,14 +6887,7 @@
         <p:cNvGrpSpPr/>
         <p:nvPr/>
       </p:nvGrpSpPr>
-      <p:grpSpPr>
-        <a:xfrm>
-          <a:off x="0" y="0"/>
-          <a:ext cx="0" cy="0"/>
-          <a:chOff x="0" y="0"/>
-          <a:chExt cx="0" cy="0"/>
-        </a:xfrm>
-      </p:grpSpPr>
+      <p:grpSpPr/>
       <p:sp>
         <p:nvSpPr>
           <p:cNvPr id="2" name="Rectangle 1"/>
@@ -8317,7 +6928,6 @@
           <a:lstStyle/>
           <a:p>
             <a:pPr algn="ctr"/>
-            <a:endParaRPr/>
           </a:p>
         </p:txBody>
       </p:sp>
@@ -8338,7 +6948,7 @@
           <a:noFill/>
         </p:spPr>
         <p:txBody>
-          <a:bodyPr wrap="square" lIns="45720" tIns="18288" rIns="45720" bIns="18288">
+          <a:bodyPr wrap="square" lIns="45720" rIns="45720" tIns="18288" bIns="18288">
             <a:spAutoFit/>
           </a:bodyPr>
           <a:lstStyle/>
@@ -8373,7 +6983,7 @@
           <a:noFill/>
         </p:spPr>
         <p:txBody>
-          <a:bodyPr wrap="square" lIns="45720" tIns="18288" rIns="45720" bIns="18288">
+          <a:bodyPr wrap="square" lIns="45720" rIns="45720" tIns="18288" bIns="18288">
             <a:spAutoFit/>
           </a:bodyPr>
           <a:lstStyle/>
@@ -8427,7 +7037,7 @@
           </a:fontRef>
         </p:style>
         <p:txBody>
-          <a:bodyPr lIns="182880" rtlCol="0" anchor="ctr"/>
+          <a:bodyPr rtlCol="0" anchor="ctr" lIns="182880"/>
           <a:lstStyle/>
           <a:p>
             <a:pPr algn="l"/>
@@ -8459,7 +7069,7 @@
           <a:noFill/>
         </p:spPr>
         <p:txBody>
-          <a:bodyPr wrap="square" lIns="45720" tIns="18288" rIns="45720" bIns="18288">
+          <a:bodyPr wrap="square" lIns="45720" rIns="45720" tIns="18288" bIns="18288">
             <a:spAutoFit/>
           </a:bodyPr>
           <a:lstStyle/>
@@ -8513,7 +7123,7 @@
           </a:fontRef>
         </p:style>
         <p:txBody>
-          <a:bodyPr lIns="182880" rtlCol="0" anchor="ctr"/>
+          <a:bodyPr rtlCol="0" anchor="ctr" lIns="182880"/>
           <a:lstStyle/>
           <a:p>
             <a:pPr algn="l"/>
@@ -8545,7 +7155,7 @@
           <a:noFill/>
         </p:spPr>
         <p:txBody>
-          <a:bodyPr wrap="square" lIns="45720" tIns="18288" rIns="45720" bIns="18288">
+          <a:bodyPr wrap="square" lIns="45720" rIns="45720" tIns="18288" bIns="18288">
             <a:spAutoFit/>
           </a:bodyPr>
           <a:lstStyle/>
@@ -8599,7 +7209,7 @@
           </a:fontRef>
         </p:style>
         <p:txBody>
-          <a:bodyPr lIns="182880" rtlCol="0" anchor="ctr"/>
+          <a:bodyPr rtlCol="0" anchor="ctr" lIns="182880"/>
           <a:lstStyle/>
           <a:p>
             <a:pPr algn="l"/>
@@ -8631,7 +7241,7 @@
           <a:noFill/>
         </p:spPr>
         <p:txBody>
-          <a:bodyPr wrap="square" lIns="45720" tIns="18288" rIns="45720" bIns="18288">
+          <a:bodyPr wrap="square" lIns="45720" rIns="45720" tIns="18288" bIns="18288">
             <a:spAutoFit/>
           </a:bodyPr>
           <a:lstStyle/>
@@ -8685,7 +7295,7 @@
           </a:fontRef>
         </p:style>
         <p:txBody>
-          <a:bodyPr lIns="182880" rtlCol="0" anchor="ctr"/>
+          <a:bodyPr rtlCol="0" anchor="ctr" lIns="182880"/>
           <a:lstStyle/>
           <a:p>
             <a:pPr algn="l"/>
@@ -8717,7 +7327,7 @@
           <a:noFill/>
         </p:spPr>
         <p:txBody>
-          <a:bodyPr wrap="square" lIns="45720" tIns="18288" rIns="45720" bIns="18288">
+          <a:bodyPr wrap="square" lIns="45720" rIns="45720" tIns="18288" bIns="18288">
             <a:spAutoFit/>
           </a:bodyPr>
           <a:lstStyle/>
@@ -8771,7 +7381,7 @@
           </a:fontRef>
         </p:style>
         <p:txBody>
-          <a:bodyPr lIns="182880" rtlCol="0" anchor="ctr"/>
+          <a:bodyPr rtlCol="0" anchor="ctr" lIns="182880"/>
           <a:lstStyle/>
           <a:p>
             <a:pPr algn="l"/>
@@ -8803,7 +7413,7 @@
           <a:noFill/>
         </p:spPr>
         <p:txBody>
-          <a:bodyPr wrap="square" lIns="45720" tIns="18288" rIns="45720" bIns="18288">
+          <a:bodyPr wrap="square" lIns="45720" rIns="45720" tIns="18288" bIns="18288">
             <a:spAutoFit/>
           </a:bodyPr>
           <a:lstStyle/>
@@ -8857,7 +7467,7 @@
           </a:fontRef>
         </p:style>
         <p:txBody>
-          <a:bodyPr lIns="182880" rtlCol="0" anchor="ctr"/>
+          <a:bodyPr rtlCol="0" anchor="ctr" lIns="182880"/>
           <a:lstStyle/>
           <a:p>
             <a:pPr algn="l"/>
@@ -8889,7 +7499,7 @@
           <a:noFill/>
         </p:spPr>
         <p:txBody>
-          <a:bodyPr wrap="square" lIns="45720" tIns="18288" rIns="45720" bIns="18288">
+          <a:bodyPr wrap="square" lIns="45720" rIns="45720" tIns="18288" bIns="18288">
             <a:spAutoFit/>
           </a:bodyPr>
           <a:lstStyle/>
@@ -8924,7 +7534,7 @@
           <a:noFill/>
         </p:spPr>
         <p:txBody>
-          <a:bodyPr wrap="square" lIns="45720" tIns="18288" rIns="45720" bIns="18288">
+          <a:bodyPr wrap="square" lIns="45720" rIns="45720" tIns="18288" bIns="18288">
             <a:spAutoFit/>
           </a:bodyPr>
           <a:lstStyle/>
@@ -8959,7 +7569,7 @@
           <a:noFill/>
         </p:spPr>
         <p:txBody>
-          <a:bodyPr wrap="square" lIns="45720" tIns="18288" rIns="45720" bIns="18288">
+          <a:bodyPr wrap="square" lIns="45720" rIns="45720" tIns="18288" bIns="18288">
             <a:spAutoFit/>
           </a:bodyPr>
           <a:lstStyle/>
@@ -8986,7 +7596,7 @@
 </file>
 
 <file path=ppt/slides/slide4.xml><?xml version="1.0" encoding="utf-8"?>
-<p:sld xmlns:a="http://schemas.openxmlformats.org/drawingml/2006/main" xmlns:r="http://schemas.openxmlformats.org/officeDocument/2006/relationships" xmlns:p="http://schemas.openxmlformats.org/presentationml/2006/main">
+<p:sld xmlns:a="http://schemas.openxmlformats.org/drawingml/2006/main" xmlns:p="http://schemas.openxmlformats.org/presentationml/2006/main" xmlns:r="http://schemas.openxmlformats.org/officeDocument/2006/relationships">
   <p:cSld>
     <p:spTree>
       <p:nvGrpSpPr>
@@ -8994,14 +7604,7 @@
         <p:cNvGrpSpPr/>
         <p:nvPr/>
       </p:nvGrpSpPr>
-      <p:grpSpPr>
-        <a:xfrm>
-          <a:off x="0" y="0"/>
-          <a:ext cx="0" cy="0"/>
-          <a:chOff x="0" y="0"/>
-          <a:chExt cx="0" cy="0"/>
-        </a:xfrm>
-      </p:grpSpPr>
+      <p:grpSpPr/>
       <p:sp>
         <p:nvSpPr>
           <p:cNvPr id="2" name="Rectangle 1"/>
@@ -9042,7 +7645,6 @@
           <a:lstStyle/>
           <a:p>
             <a:pPr algn="ctr"/>
-            <a:endParaRPr/>
           </a:p>
         </p:txBody>
       </p:sp>
@@ -9063,7 +7665,7 @@
           <a:noFill/>
         </p:spPr>
         <p:txBody>
-          <a:bodyPr wrap="square" lIns="45720" tIns="18288" rIns="45720" bIns="18288">
+          <a:bodyPr wrap="square" lIns="45720" rIns="45720" tIns="18288" bIns="18288">
             <a:spAutoFit/>
           </a:bodyPr>
           <a:lstStyle/>
@@ -9098,7 +7700,7 @@
           <a:noFill/>
         </p:spPr>
         <p:txBody>
-          <a:bodyPr wrap="square" lIns="45720" tIns="18288" rIns="45720" bIns="18288">
+          <a:bodyPr wrap="square" lIns="45720" rIns="45720" tIns="18288" bIns="18288">
             <a:spAutoFit/>
           </a:bodyPr>
           <a:lstStyle/>
@@ -9124,7 +7726,7 @@
         </p:nvSpPr>
         <p:spPr>
           <a:xfrm>
-            <a:off x="548640" y="1280160"/>
+            <a:off x="548640" y="1234440"/>
             <a:ext cx="5486400" cy="365760"/>
           </a:xfrm>
           <a:prstGeom prst="rect">
@@ -9133,20 +7735,20 @@
           <a:noFill/>
         </p:spPr>
         <p:txBody>
-          <a:bodyPr wrap="square" lIns="45720" tIns="18288" rIns="45720" bIns="18288">
-            <a:spAutoFit/>
-          </a:bodyPr>
-          <a:lstStyle/>
-          <a:p>
-            <a:pPr algn="l"/>
-            <a:r>
-              <a:rPr sz="2000" b="1">
+          <a:bodyPr wrap="square" lIns="45720" rIns="45720" tIns="18288" bIns="18288">
+            <a:spAutoFit/>
+          </a:bodyPr>
+          <a:lstStyle/>
+          <a:p>
+            <a:pPr algn="l"/>
+            <a:r>
+              <a:rPr sz="1800" b="1">
                 <a:solidFill>
                   <a:srgbClr val="1A4480"/>
                 </a:solidFill>
                 <a:latin typeface="Calibri"/>
               </a:rPr>
-              <a:t>🌐 Baixar — o site bloqueava bots</a:t>
+              <a:t>🌐 Download — Cloudflare bloqueia bots</a:t>
             </a:r>
           </a:p>
         </p:txBody>
@@ -9159,7 +7761,7 @@
         </p:nvSpPr>
         <p:spPr>
           <a:xfrm>
-            <a:off x="731520" y="1737360"/>
+            <a:off x="731520" y="1691640"/>
             <a:ext cx="5303520" cy="1828800"/>
           </a:xfrm>
           <a:prstGeom prst="rect">
@@ -9179,13 +7781,13 @@
               </a:spcAft>
             </a:pPr>
             <a:r>
-              <a:rPr sz="1500">
+              <a:rPr sz="1200">
                 <a:solidFill>
                   <a:srgbClr val="222222"/>
                 </a:solidFill>
                 <a:latin typeface="Calibri"/>
               </a:rPr>
-              <a:t>• Site da ANEEL detecta robôs e devolve erro</a:t>
+              <a:t>• Site da ANEEL inspeciona JA3 (TLS fingerprint)</a:t>
             </a:r>
           </a:p>
           <a:p>
@@ -9195,13 +7797,13 @@
               </a:spcAft>
             </a:pPr>
             <a:r>
-              <a:rPr sz="1500">
+              <a:rPr sz="1200">
                 <a:solidFill>
                   <a:srgbClr val="222222"/>
                 </a:solidFill>
                 <a:latin typeface="Calibri"/>
               </a:rPr>
-              <a:t>• Solução: ferramenta que se passa pelo navegador Chrome</a:t>
+              <a:t>• requests / httpx → 403. curl_cffi com impersonate=chrome resolve</a:t>
             </a:r>
           </a:p>
           <a:p>
@@ -9211,13 +7813,13 @@
               </a:spcAft>
             </a:pPr>
             <a:r>
-              <a:rPr sz="1500">
+              <a:rPr sz="1200">
                 <a:solidFill>
                   <a:srgbClr val="222222"/>
                 </a:solidFill>
                 <a:latin typeface="Calibri"/>
               </a:rPr>
-              <a:t>• Resultado: download em massa funciona</a:t>
+              <a:t>• Async com 16 conexões paralelas + retry exponencial</a:t>
             </a:r>
           </a:p>
         </p:txBody>
@@ -9230,7 +7832,7 @@
         </p:nvSpPr>
         <p:spPr>
           <a:xfrm>
-            <a:off x="548640" y="3657600"/>
+            <a:off x="548640" y="3383280"/>
             <a:ext cx="5486400" cy="365760"/>
           </a:xfrm>
           <a:prstGeom prst="rect">
@@ -9239,20 +7841,20 @@
           <a:noFill/>
         </p:spPr>
         <p:txBody>
-          <a:bodyPr wrap="square" lIns="45720" tIns="18288" rIns="45720" bIns="18288">
-            <a:spAutoFit/>
-          </a:bodyPr>
-          <a:lstStyle/>
-          <a:p>
-            <a:pPr algn="l"/>
-            <a:r>
-              <a:rPr sz="2000" b="1">
+          <a:bodyPr wrap="square" lIns="45720" rIns="45720" tIns="18288" bIns="18288">
+            <a:spAutoFit/>
+          </a:bodyPr>
+          <a:lstStyle/>
+          <a:p>
+            <a:pPr algn="l"/>
+            <a:r>
+              <a:rPr sz="1800" b="1">
                 <a:solidFill>
                   <a:srgbClr val="1A4480"/>
                 </a:solidFill>
                 <a:latin typeface="Calibri"/>
               </a:rPr>
-              <a:t>🧠 Decisor inteligente por página</a:t>
+              <a:t>🧠 Router por página (não por doc)</a:t>
             </a:r>
           </a:p>
         </p:txBody>
@@ -9265,8 +7867,8 @@
         </p:nvSpPr>
         <p:spPr>
           <a:xfrm>
-            <a:off x="731520" y="4114800"/>
-            <a:ext cx="5303520" cy="2377440"/>
+            <a:off x="731520" y="3840480"/>
+            <a:ext cx="5303520" cy="2560320"/>
           </a:xfrm>
           <a:prstGeom prst="rect">
             <a:avLst/>
@@ -9285,13 +7887,13 @@
               </a:spcAft>
             </a:pPr>
             <a:r>
-              <a:rPr sz="1500">
+              <a:rPr sz="1200">
                 <a:solidFill>
                   <a:srgbClr val="222222"/>
                 </a:solidFill>
                 <a:latin typeface="Calibri"/>
               </a:rPr>
-              <a:t>• Cada página é classificada antes de ser lida:</a:t>
+              <a:t>• Cada página classificada via PyMuPDF antes do parse:</a:t>
             </a:r>
           </a:p>
           <a:p>
@@ -9301,13 +7903,13 @@
               </a:spcAft>
             </a:pPr>
             <a:r>
-              <a:rPr sz="1300">
+              <a:rPr sz="1000">
                 <a:solidFill>
                   <a:srgbClr val="222222"/>
                 </a:solidFill>
                 <a:latin typeface="Calibri"/>
               </a:rPr>
-              <a:t>– Texto digital → caminho rápido (grátis)</a:t>
+              <a:t>– digital → texto extraível direto</a:t>
             </a:r>
           </a:p>
           <a:p>
@@ -9317,13 +7919,13 @@
               </a:spcAft>
             </a:pPr>
             <a:r>
-              <a:rPr sz="1300">
+              <a:rPr sz="1000">
                 <a:solidFill>
                   <a:srgbClr val="222222"/>
                 </a:solidFill>
                 <a:latin typeface="Calibri"/>
               </a:rPr>
-              <a:t>– Imagem escaneada → caminho lento (LLM com visão)</a:t>
+              <a:t>– scanned → poucos chars + alta razão de imagem → vision</a:t>
             </a:r>
           </a:p>
           <a:p>
@@ -9333,13 +7935,29 @@
               </a:spcAft>
             </a:pPr>
             <a:r>
-              <a:rPr sz="1300">
+              <a:rPr sz="1000">
                 <a:solidFill>
                   <a:srgbClr val="222222"/>
                 </a:solidFill>
                 <a:latin typeface="Calibri"/>
               </a:rPr>
-              <a:t>– Tabela complexa → ferramenta especializada</a:t>
+              <a:t>– complex → tabelas detectadas → Camelot ou vision</a:t>
+            </a:r>
+          </a:p>
+          <a:p>
+            <a:pPr>
+              <a:spcAft>
+                <a:spcPts val="400"/>
+              </a:spcAft>
+            </a:pPr>
+            <a:r>
+              <a:rPr sz="1200">
+                <a:solidFill>
+                  <a:srgbClr val="222222"/>
+                </a:solidFill>
+                <a:latin typeface="Calibri"/>
+              </a:rPr>
+              <a:t>• Decisão por página: doc misto é a regra, não exceção</a:t>
             </a:r>
           </a:p>
         </p:txBody>
@@ -9352,7 +7970,7 @@
         </p:nvSpPr>
         <p:spPr>
           <a:xfrm>
-            <a:off x="6400800" y="1280160"/>
+            <a:off x="6400800" y="1234440"/>
             <a:ext cx="5486400" cy="365760"/>
           </a:xfrm>
           <a:prstGeom prst="rect">
@@ -9361,20 +7979,20 @@
           <a:noFill/>
         </p:spPr>
         <p:txBody>
-          <a:bodyPr wrap="square" lIns="45720" tIns="18288" rIns="45720" bIns="18288">
-            <a:spAutoFit/>
-          </a:bodyPr>
-          <a:lstStyle/>
-          <a:p>
-            <a:pPr algn="l"/>
-            <a:r>
-              <a:rPr sz="2000" b="1">
+          <a:bodyPr wrap="square" lIns="45720" rIns="45720" tIns="18288" bIns="18288">
+            <a:spAutoFit/>
+          </a:bodyPr>
+          <a:lstStyle/>
+          <a:p>
+            <a:pPr algn="l"/>
+            <a:r>
+              <a:rPr sz="1800" b="1">
                 <a:solidFill>
                   <a:srgbClr val="1A4480"/>
                 </a:solidFill>
                 <a:latin typeface="Calibri"/>
               </a:rPr>
-              <a:t>Por que 2 caminhos?</a:t>
+              <a:t>Fast vs Slow path</a:t>
             </a:r>
           </a:p>
         </p:txBody>
@@ -9387,8 +8005,8 @@
         </p:nvSpPr>
         <p:spPr>
           <a:xfrm>
-            <a:off x="6400800" y="1783080"/>
-            <a:ext cx="5303520" cy="1920240"/>
+            <a:off x="6400800" y="1691640"/>
+            <a:ext cx="5303520" cy="2011680"/>
           </a:xfrm>
           <a:prstGeom prst="roundRect">
             <a:avLst/>
@@ -9421,7 +8039,6 @@
           <a:lstStyle/>
           <a:p>
             <a:pPr algn="ctr"/>
-            <a:endParaRPr/>
           </a:p>
         </p:txBody>
       </p:sp>
@@ -9433,7 +8050,7 @@
         </p:nvSpPr>
         <p:spPr>
           <a:xfrm>
-            <a:off x="6583680" y="1874519"/>
+            <a:off x="6583680" y="1783080"/>
             <a:ext cx="5029200" cy="457200"/>
           </a:xfrm>
           <a:prstGeom prst="rect">
@@ -9442,20 +8059,20 @@
           <a:noFill/>
         </p:spPr>
         <p:txBody>
-          <a:bodyPr wrap="square" lIns="45720" tIns="18288" rIns="45720" bIns="18288">
-            <a:spAutoFit/>
-          </a:bodyPr>
-          <a:lstStyle/>
-          <a:p>
-            <a:pPr algn="l"/>
-            <a:r>
-              <a:rPr sz="1600" b="1">
+          <a:bodyPr wrap="square" lIns="45720" rIns="45720" tIns="18288" bIns="18288">
+            <a:spAutoFit/>
+          </a:bodyPr>
+          <a:lstStyle/>
+          <a:p>
+            <a:pPr algn="l"/>
+            <a:r>
+              <a:rPr sz="1500" b="1">
                 <a:solidFill>
                   <a:srgbClr val="228844"/>
                 </a:solidFill>
                 <a:latin typeface="Calibri"/>
               </a:rPr>
-              <a:t>✓ Caminho rápido (95% das páginas)</a:t>
+              <a:t>✓ Fast path (~95% das páginas)</a:t>
             </a:r>
           </a:p>
         </p:txBody>
@@ -9468,53 +8085,65 @@
         </p:nvSpPr>
         <p:spPr>
           <a:xfrm>
-            <a:off x="6583680" y="2331720"/>
-            <a:ext cx="5029200" cy="1371600"/>
-          </a:xfrm>
-          <a:prstGeom prst="rect">
-            <a:avLst/>
-          </a:prstGeom>
-          <a:noFill/>
-        </p:spPr>
-        <p:txBody>
-          <a:bodyPr wrap="square" lIns="45720" tIns="18288" rIns="45720" bIns="18288">
-            <a:spAutoFit/>
-          </a:bodyPr>
-          <a:lstStyle/>
-          <a:p>
-            <a:pPr algn="l"/>
-            <a:r>
-              <a:rPr sz="1400" b="0">
+            <a:off x="6583680" y="2240280"/>
+            <a:ext cx="5029200" cy="1554480"/>
+          </a:xfrm>
+          <a:prstGeom prst="rect">
+            <a:avLst/>
+          </a:prstGeom>
+          <a:noFill/>
+        </p:spPr>
+        <p:txBody>
+          <a:bodyPr wrap="square" lIns="45720" rIns="45720" tIns="18288" bIns="18288">
+            <a:spAutoFit/>
+          </a:bodyPr>
+          <a:lstStyle/>
+          <a:p>
+            <a:pPr algn="l"/>
+            <a:r>
+              <a:rPr sz="1200" b="0">
                 <a:solidFill>
                   <a:srgbClr val="222222"/>
                 </a:solidFill>
                 <a:latin typeface="Calibri"/>
               </a:rPr>
-              <a:t>PDF "normal" tem o texto guardado dentro.</a:t>
-            </a:r>
-          </a:p>
-          <a:p>
-            <a:pPr algn="l"/>
-            <a:r>
-              <a:rPr sz="1400" b="0">
+              <a:t>PyMuPDF → texto + bbox dos spans</a:t>
+            </a:r>
+          </a:p>
+          <a:p>
+            <a:pPr algn="l"/>
+            <a:r>
+              <a:rPr sz="1200" b="0">
                 <a:solidFill>
                   <a:srgbClr val="222222"/>
                 </a:solidFill>
                 <a:latin typeface="Calibri"/>
               </a:rPr>
-              <a:t>Ferramenta abre, copia o texto, pega tabelas.</a:t>
-            </a:r>
-          </a:p>
-          <a:p>
-            <a:pPr algn="l"/>
-            <a:r>
-              <a:rPr sz="1400" b="0">
+              <a:t>pdfplumber → tabelas simples (markdown)</a:t>
+            </a:r>
+          </a:p>
+          <a:p>
+            <a:pPr algn="l"/>
+            <a:r>
+              <a:rPr sz="1200" b="0">
                 <a:solidFill>
                   <a:srgbClr val="222222"/>
                 </a:solidFill>
                 <a:latin typeface="Calibri"/>
               </a:rPr>
-              <a:t>Custo: zero. Velocidade: alta.</a:t>
+              <a:t>Camelot → tabelas com bordas (lattice)</a:t>
+            </a:r>
+          </a:p>
+          <a:p>
+            <a:pPr algn="l"/>
+            <a:r>
+              <a:rPr sz="1200" b="0">
+                <a:solidFill>
+                  <a:srgbClr val="222222"/>
+                </a:solidFill>
+                <a:latin typeface="Calibri"/>
+              </a:rPr>
+              <a:t>Custo: 0 · totalmente local</a:t>
             </a:r>
           </a:p>
         </p:txBody>
@@ -9528,7 +8157,7 @@
         <p:spPr>
           <a:xfrm>
             <a:off x="6400800" y="3840480"/>
-            <a:ext cx="5303520" cy="1920240"/>
+            <a:ext cx="5303520" cy="2011680"/>
           </a:xfrm>
           <a:prstGeom prst="roundRect">
             <a:avLst/>
@@ -9561,7 +8190,6 @@
           <a:lstStyle/>
           <a:p>
             <a:pPr algn="ctr"/>
-            <a:endParaRPr/>
           </a:p>
         </p:txBody>
       </p:sp>
@@ -9582,20 +8210,20 @@
           <a:noFill/>
         </p:spPr>
         <p:txBody>
-          <a:bodyPr wrap="square" lIns="45720" tIns="18288" rIns="45720" bIns="18288">
-            <a:spAutoFit/>
-          </a:bodyPr>
-          <a:lstStyle/>
-          <a:p>
-            <a:pPr algn="l"/>
-            <a:r>
-              <a:rPr sz="1600" b="1">
+          <a:bodyPr wrap="square" lIns="45720" rIns="45720" tIns="18288" bIns="18288">
+            <a:spAutoFit/>
+          </a:bodyPr>
+          <a:lstStyle/>
+          <a:p>
+            <a:pPr algn="l"/>
+            <a:r>
+              <a:rPr sz="1500" b="1">
                 <a:solidFill>
                   <a:srgbClr val="C26B00"/>
                 </a:solidFill>
                 <a:latin typeface="Calibri"/>
               </a:rPr>
-              <a:t>⚠ Caminho lento (~5% das páginas)</a:t>
+              <a:t>⚠ Slow path (~5% das páginas)</a:t>
             </a:r>
           </a:p>
         </p:txBody>
@@ -9609,52 +8237,64 @@
         <p:spPr>
           <a:xfrm>
             <a:off x="6583680" y="4389120"/>
-            <a:ext cx="5029200" cy="1371600"/>
-          </a:xfrm>
-          <a:prstGeom prst="rect">
-            <a:avLst/>
-          </a:prstGeom>
-          <a:noFill/>
-        </p:spPr>
-        <p:txBody>
-          <a:bodyPr wrap="square" lIns="45720" tIns="18288" rIns="45720" bIns="18288">
-            <a:spAutoFit/>
-          </a:bodyPr>
-          <a:lstStyle/>
-          <a:p>
-            <a:pPr algn="l"/>
-            <a:r>
-              <a:rPr sz="1400" b="0">
+            <a:ext cx="5029200" cy="1554480"/>
+          </a:xfrm>
+          <a:prstGeom prst="rect">
+            <a:avLst/>
+          </a:prstGeom>
+          <a:noFill/>
+        </p:spPr>
+        <p:txBody>
+          <a:bodyPr wrap="square" lIns="45720" rIns="45720" tIns="18288" bIns="18288">
+            <a:spAutoFit/>
+          </a:bodyPr>
+          <a:lstStyle/>
+          <a:p>
+            <a:pPr algn="l"/>
+            <a:r>
+              <a:rPr sz="1200" b="0">
                 <a:solidFill>
                   <a:srgbClr val="222222"/>
                 </a:solidFill>
                 <a:latin typeface="Calibri"/>
               </a:rPr>
-              <a:t>PDF escaneado é uma foto — não tem texto.</a:t>
-            </a:r>
-          </a:p>
-          <a:p>
-            <a:pPr algn="l"/>
-            <a:r>
-              <a:rPr sz="1400" b="0">
+              <a:t>Gemini 2.5 Flash via Vertex AI (multimodal)</a:t>
+            </a:r>
+          </a:p>
+          <a:p>
+            <a:pPr algn="l"/>
+            <a:r>
+              <a:rPr sz="1200" b="0">
                 <a:solidFill>
                   <a:srgbClr val="222222"/>
                 </a:solidFill>
                 <a:latin typeface="Calibri"/>
               </a:rPr>
-              <a:t>LLM com visão (Gemini) lê a imagem.</a:t>
-            </a:r>
-          </a:p>
-          <a:p>
-            <a:pPr algn="l"/>
-            <a:r>
-              <a:rPr sz="1400" b="0">
+              <a:t>Render 180 DPI → prompt que exige ~~tachado~~</a:t>
+            </a:r>
+          </a:p>
+          <a:p>
+            <a:pPr algn="l"/>
+            <a:r>
+              <a:rPr sz="1200" b="0">
                 <a:solidFill>
                   <a:srgbClr val="222222"/>
                 </a:solidFill>
                 <a:latin typeface="Calibri"/>
               </a:rPr>
-              <a:t>Custo: paga por página. Só usar quando precisa.</a:t>
+              <a:t>thinking_budget=0 → custo de input ~$0,15/M tokens</a:t>
+            </a:r>
+          </a:p>
+          <a:p>
+            <a:pPr algn="l"/>
+            <a:r>
+              <a:rPr sz="1200" b="0">
+                <a:solidFill>
+                  <a:srgbClr val="222222"/>
+                </a:solidFill>
+                <a:latin typeface="Calibri"/>
+              </a:rPr>
+              <a:t>Fallback: gemini-2.5-flash-lite</a:t>
             </a:r>
           </a:p>
         </p:txBody>
@@ -9676,20 +8316,20 @@
           <a:noFill/>
         </p:spPr>
         <p:txBody>
-          <a:bodyPr wrap="square" lIns="45720" tIns="18288" rIns="45720" bIns="18288">
-            <a:spAutoFit/>
-          </a:bodyPr>
-          <a:lstStyle/>
-          <a:p>
-            <a:pPr algn="l"/>
-            <a:r>
-              <a:rPr sz="1600" b="1">
+          <a:bodyPr wrap="square" lIns="45720" rIns="45720" tIns="18288" bIns="18288">
+            <a:spAutoFit/>
+          </a:bodyPr>
+          <a:lstStyle/>
+          <a:p>
+            <a:pPr algn="l"/>
+            <a:r>
+              <a:rPr sz="1400" b="1">
                 <a:solidFill>
                   <a:srgbClr val="228844"/>
                 </a:solidFill>
                 <a:latin typeface="Calibri"/>
               </a:rPr>
-              <a:t>💰 Sem o decisor: ~$300+. Com o decisor: ~$22. Economia de ~93%.</a:t>
+              <a:t>💰 Vision em 100% das páginas: ~$300+ · com router por página: ~$22 · ~93% de economia</a:t>
             </a:r>
           </a:p>
         </p:txBody>
@@ -9711,7 +8351,7 @@
           <a:noFill/>
         </p:spPr>
         <p:txBody>
-          <a:bodyPr wrap="square" lIns="45720" tIns="18288" rIns="45720" bIns="18288">
+          <a:bodyPr wrap="square" lIns="45720" rIns="45720" tIns="18288" bIns="18288">
             <a:spAutoFit/>
           </a:bodyPr>
           <a:lstStyle/>
@@ -9746,7 +8386,7 @@
           <a:noFill/>
         </p:spPr>
         <p:txBody>
-          <a:bodyPr wrap="square" lIns="45720" tIns="18288" rIns="45720" bIns="18288">
+          <a:bodyPr wrap="square" lIns="45720" rIns="45720" tIns="18288" bIns="18288">
             <a:spAutoFit/>
           </a:bodyPr>
           <a:lstStyle/>
@@ -9773,7 +8413,7 @@
 </file>
 
 <file path=ppt/slides/slide5.xml><?xml version="1.0" encoding="utf-8"?>
-<p:sld xmlns:a="http://schemas.openxmlformats.org/drawingml/2006/main" xmlns:r="http://schemas.openxmlformats.org/officeDocument/2006/relationships" xmlns:p="http://schemas.openxmlformats.org/presentationml/2006/main">
+<p:sld xmlns:a="http://schemas.openxmlformats.org/drawingml/2006/main" xmlns:p="http://schemas.openxmlformats.org/presentationml/2006/main" xmlns:r="http://schemas.openxmlformats.org/officeDocument/2006/relationships">
   <p:cSld>
     <p:spTree>
       <p:nvGrpSpPr>
@@ -9781,14 +8421,7 @@
         <p:cNvGrpSpPr/>
         <p:nvPr/>
       </p:nvGrpSpPr>
-      <p:grpSpPr>
-        <a:xfrm>
-          <a:off x="0" y="0"/>
-          <a:ext cx="0" cy="0"/>
-          <a:chOff x="0" y="0"/>
-          <a:chExt cx="0" cy="0"/>
-        </a:xfrm>
-      </p:grpSpPr>
+      <p:grpSpPr/>
       <p:sp>
         <p:nvSpPr>
           <p:cNvPr id="2" name="Rectangle 1"/>
@@ -9829,7 +8462,6 @@
           <a:lstStyle/>
           <a:p>
             <a:pPr algn="ctr"/>
-            <a:endParaRPr/>
           </a:p>
         </p:txBody>
       </p:sp>
@@ -9850,7 +8482,7 @@
           <a:noFill/>
         </p:spPr>
         <p:txBody>
-          <a:bodyPr wrap="square" lIns="45720" tIns="18288" rIns="45720" bIns="18288">
+          <a:bodyPr wrap="square" lIns="45720" rIns="45720" tIns="18288" bIns="18288">
             <a:spAutoFit/>
           </a:bodyPr>
           <a:lstStyle/>
@@ -9885,7 +8517,7 @@
           <a:noFill/>
         </p:spPr>
         <p:txBody>
-          <a:bodyPr wrap="square" lIns="45720" tIns="18288" rIns="45720" bIns="18288">
+          <a:bodyPr wrap="square" lIns="45720" rIns="45720" tIns="18288" bIns="18288">
             <a:spAutoFit/>
           </a:bodyPr>
           <a:lstStyle/>
@@ -9920,7 +8552,7 @@
           <a:noFill/>
         </p:spPr>
         <p:txBody>
-          <a:bodyPr wrap="square" lIns="45720" tIns="18288" rIns="45720" bIns="18288">
+          <a:bodyPr wrap="square" lIns="45720" rIns="45720" tIns="18288" bIns="18288">
             <a:spAutoFit/>
           </a:bodyPr>
           <a:lstStyle/>
@@ -9955,7 +8587,7 @@
           <a:noFill/>
         </p:spPr>
         <p:txBody>
-          <a:bodyPr wrap="square" lIns="45720" tIns="18288" rIns="45720" bIns="18288">
+          <a:bodyPr wrap="square" lIns="45720" rIns="45720" tIns="18288" bIns="18288">
             <a:spAutoFit/>
           </a:bodyPr>
           <a:lstStyle/>
@@ -10011,7 +8643,7 @@
           </a:fontRef>
         </p:style>
         <p:txBody>
-          <a:bodyPr lIns="137160" rtlCol="0" anchor="ctr"/>
+          <a:bodyPr rtlCol="0" anchor="ctr" lIns="137160"/>
           <a:lstStyle/>
           <a:p>
             <a:pPr algn="ctr"/>
@@ -10051,7 +8683,7 @@
           <a:noFill/>
         </p:spPr>
         <p:txBody>
-          <a:bodyPr wrap="square" lIns="45720" tIns="18288" rIns="45720" bIns="18288">
+          <a:bodyPr wrap="square" lIns="45720" rIns="45720" tIns="18288" bIns="18288">
             <a:spAutoFit/>
           </a:bodyPr>
           <a:lstStyle/>
@@ -10182,7 +8814,6 @@
           <a:lstStyle/>
           <a:p>
             <a:pPr algn="ctr"/>
-            <a:endParaRPr/>
           </a:p>
         </p:txBody>
       </p:sp>
@@ -10203,7 +8834,7 @@
           <a:noFill/>
         </p:spPr>
         <p:txBody>
-          <a:bodyPr wrap="square" lIns="45720" tIns="18288" rIns="45720" bIns="18288">
+          <a:bodyPr wrap="square" lIns="45720" rIns="45720" tIns="18288" bIns="18288">
             <a:spAutoFit/>
           </a:bodyPr>
           <a:lstStyle/>
@@ -10325,7 +8956,7 @@
           <a:noFill/>
         </p:spPr>
         <p:txBody>
-          <a:bodyPr wrap="square" lIns="45720" tIns="18288" rIns="45720" bIns="18288">
+          <a:bodyPr wrap="square" lIns="45720" rIns="45720" tIns="18288" bIns="18288">
             <a:spAutoFit/>
           </a:bodyPr>
           <a:lstStyle/>
@@ -10360,7 +8991,7 @@
           <a:noFill/>
         </p:spPr>
         <p:txBody>
-          <a:bodyPr wrap="square" lIns="45720" tIns="18288" rIns="45720" bIns="18288">
+          <a:bodyPr wrap="square" lIns="45720" rIns="45720" tIns="18288" bIns="18288">
             <a:spAutoFit/>
           </a:bodyPr>
           <a:lstStyle/>
@@ -10395,7 +9026,7 @@
           <a:noFill/>
         </p:spPr>
         <p:txBody>
-          <a:bodyPr wrap="square" lIns="45720" tIns="18288" rIns="45720" bIns="18288">
+          <a:bodyPr wrap="square" lIns="45720" rIns="45720" tIns="18288" bIns="18288">
             <a:spAutoFit/>
           </a:bodyPr>
           <a:lstStyle/>
@@ -10422,7 +9053,7 @@
 </file>
 
 <file path=ppt/slides/slide6.xml><?xml version="1.0" encoding="utf-8"?>
-<p:sld xmlns:a="http://schemas.openxmlformats.org/drawingml/2006/main" xmlns:r="http://schemas.openxmlformats.org/officeDocument/2006/relationships" xmlns:p="http://schemas.openxmlformats.org/presentationml/2006/main">
+<p:sld xmlns:a="http://schemas.openxmlformats.org/drawingml/2006/main" xmlns:p="http://schemas.openxmlformats.org/presentationml/2006/main" xmlns:r="http://schemas.openxmlformats.org/officeDocument/2006/relationships">
   <p:cSld>
     <p:spTree>
       <p:nvGrpSpPr>
@@ -10430,14 +9061,7 @@
         <p:cNvGrpSpPr/>
         <p:nvPr/>
       </p:nvGrpSpPr>
-      <p:grpSpPr>
-        <a:xfrm>
-          <a:off x="0" y="0"/>
-          <a:ext cx="0" cy="0"/>
-          <a:chOff x="0" y="0"/>
-          <a:chExt cx="0" cy="0"/>
-        </a:xfrm>
-      </p:grpSpPr>
+      <p:grpSpPr/>
       <p:sp>
         <p:nvSpPr>
           <p:cNvPr id="2" name="Rectangle 1"/>
@@ -10478,7 +9102,6 @@
           <a:lstStyle/>
           <a:p>
             <a:pPr algn="ctr"/>
-            <a:endParaRPr/>
           </a:p>
         </p:txBody>
       </p:sp>
@@ -10499,7 +9122,7 @@
           <a:noFill/>
         </p:spPr>
         <p:txBody>
-          <a:bodyPr wrap="square" lIns="45720" tIns="18288" rIns="45720" bIns="18288">
+          <a:bodyPr wrap="square" lIns="45720" rIns="45720" tIns="18288" bIns="18288">
             <a:spAutoFit/>
           </a:bodyPr>
           <a:lstStyle/>
@@ -10534,7 +9157,7 @@
           <a:noFill/>
         </p:spPr>
         <p:txBody>
-          <a:bodyPr wrap="square" lIns="45720" tIns="18288" rIns="45720" bIns="18288">
+          <a:bodyPr wrap="square" lIns="45720" rIns="45720" tIns="18288" bIns="18288">
             <a:spAutoFit/>
           </a:bodyPr>
           <a:lstStyle/>
@@ -10569,7 +9192,7 @@
           <a:noFill/>
         </p:spPr>
         <p:txBody>
-          <a:bodyPr wrap="square" lIns="45720" tIns="18288" rIns="45720" bIns="18288">
+          <a:bodyPr wrap="square" lIns="45720" rIns="45720" tIns="18288" bIns="18288">
             <a:spAutoFit/>
           </a:bodyPr>
           <a:lstStyle/>
@@ -10625,7 +9248,7 @@
           </a:fontRef>
         </p:style>
         <p:txBody>
-          <a:bodyPr lIns="137160" rtlCol="0" anchor="ctr"/>
+          <a:bodyPr rtlCol="0" anchor="ctr" lIns="137160"/>
           <a:lstStyle/>
           <a:p>
             <a:pPr algn="ctr"/>
@@ -10688,7 +9311,7 @@
           </a:fontRef>
         </p:style>
         <p:txBody>
-          <a:bodyPr lIns="137160" rtlCol="0" anchor="ctr"/>
+          <a:bodyPr rtlCol="0" anchor="ctr" lIns="137160"/>
           <a:lstStyle/>
           <a:p>
             <a:pPr algn="ctr"/>
@@ -10751,7 +9374,7 @@
           </a:fontRef>
         </p:style>
         <p:txBody>
-          <a:bodyPr lIns="137160" rtlCol="0" anchor="ctr"/>
+          <a:bodyPr rtlCol="0" anchor="ctr" lIns="137160"/>
           <a:lstStyle/>
           <a:p>
             <a:pPr algn="ctr"/>
@@ -10793,7 +9416,7 @@
           <a:noFill/>
         </p:spPr>
         <p:txBody>
-          <a:bodyPr wrap="square" lIns="45720" tIns="18288" rIns="45720" bIns="18288">
+          <a:bodyPr wrap="square" lIns="45720" rIns="45720" tIns="18288" bIns="18288">
             <a:spAutoFit/>
           </a:bodyPr>
           <a:lstStyle/>
@@ -10853,7 +9476,6 @@
           <a:lstStyle/>
           <a:p>
             <a:pPr algn="ctr"/>
-            <a:endParaRPr/>
           </a:p>
         </p:txBody>
       </p:sp>
@@ -10874,7 +9496,7 @@
           <a:noFill/>
         </p:spPr>
         <p:txBody>
-          <a:bodyPr wrap="square" lIns="45720" tIns="18288" rIns="45720" bIns="18288">
+          <a:bodyPr wrap="square" lIns="45720" rIns="45720" tIns="18288" bIns="18288">
             <a:spAutoFit/>
           </a:bodyPr>
           <a:lstStyle/>
@@ -10909,7 +9531,7 @@
           <a:noFill/>
         </p:spPr>
         <p:txBody>
-          <a:bodyPr wrap="square" lIns="45720" tIns="18288" rIns="45720" bIns="18288">
+          <a:bodyPr wrap="square" lIns="45720" rIns="45720" tIns="18288" bIns="18288">
             <a:spAutoFit/>
           </a:bodyPr>
           <a:lstStyle/>
@@ -10967,7 +9589,6 @@
           <a:lstStyle/>
           <a:p>
             <a:pPr algn="ctr"/>
-            <a:endParaRPr/>
           </a:p>
         </p:txBody>
       </p:sp>
@@ -10988,7 +9609,7 @@
           <a:noFill/>
         </p:spPr>
         <p:txBody>
-          <a:bodyPr wrap="square" lIns="45720" tIns="18288" rIns="45720" bIns="18288">
+          <a:bodyPr wrap="square" lIns="45720" rIns="45720" tIns="18288" bIns="18288">
             <a:spAutoFit/>
           </a:bodyPr>
           <a:lstStyle/>
@@ -11058,7 +9679,7 @@
           <a:noFill/>
         </p:spPr>
         <p:txBody>
-          <a:bodyPr wrap="square" lIns="45720" tIns="18288" rIns="45720" bIns="18288">
+          <a:bodyPr wrap="square" lIns="45720" rIns="45720" tIns="18288" bIns="18288">
             <a:spAutoFit/>
           </a:bodyPr>
           <a:lstStyle/>
@@ -11093,7 +9714,7 @@
           <a:noFill/>
         </p:spPr>
         <p:txBody>
-          <a:bodyPr wrap="square" lIns="45720" tIns="18288" rIns="45720" bIns="18288">
+          <a:bodyPr wrap="square" lIns="45720" rIns="45720" tIns="18288" bIns="18288">
             <a:spAutoFit/>
           </a:bodyPr>
           <a:lstStyle/>
@@ -11128,7 +9749,7 @@
           <a:noFill/>
         </p:spPr>
         <p:txBody>
-          <a:bodyPr wrap="square" lIns="45720" tIns="18288" rIns="45720" bIns="18288">
+          <a:bodyPr wrap="square" lIns="45720" rIns="45720" tIns="18288" bIns="18288">
             <a:spAutoFit/>
           </a:bodyPr>
           <a:lstStyle/>
@@ -11163,7 +9784,7 @@
           <a:noFill/>
         </p:spPr>
         <p:txBody>
-          <a:bodyPr wrap="square" lIns="45720" tIns="18288" rIns="45720" bIns="18288">
+          <a:bodyPr wrap="square" lIns="45720" rIns="45720" tIns="18288" bIns="18288">
             <a:spAutoFit/>
           </a:bodyPr>
           <a:lstStyle/>
@@ -11198,7 +9819,7 @@
           <a:noFill/>
         </p:spPr>
         <p:txBody>
-          <a:bodyPr wrap="square" lIns="45720" tIns="18288" rIns="45720" bIns="18288">
+          <a:bodyPr wrap="square" lIns="45720" rIns="45720" tIns="18288" bIns="18288">
             <a:spAutoFit/>
           </a:bodyPr>
           <a:lstStyle/>
@@ -11233,7 +9854,7 @@
           <a:noFill/>
         </p:spPr>
         <p:txBody>
-          <a:bodyPr wrap="square" lIns="45720" tIns="18288" rIns="45720" bIns="18288">
+          <a:bodyPr wrap="square" lIns="45720" rIns="45720" tIns="18288" bIns="18288">
             <a:spAutoFit/>
           </a:bodyPr>
           <a:lstStyle/>
@@ -11268,7 +9889,7 @@
           <a:noFill/>
         </p:spPr>
         <p:txBody>
-          <a:bodyPr wrap="square" lIns="45720" tIns="18288" rIns="45720" bIns="18288">
+          <a:bodyPr wrap="square" lIns="45720" rIns="45720" tIns="18288" bIns="18288">
             <a:spAutoFit/>
           </a:bodyPr>
           <a:lstStyle/>
@@ -11303,7 +9924,7 @@
           <a:noFill/>
         </p:spPr>
         <p:txBody>
-          <a:bodyPr wrap="square" lIns="45720" tIns="18288" rIns="45720" bIns="18288">
+          <a:bodyPr wrap="square" lIns="45720" rIns="45720" tIns="18288" bIns="18288">
             <a:spAutoFit/>
           </a:bodyPr>
           <a:lstStyle/>
@@ -11330,7 +9951,7 @@
 </file>
 
 <file path=ppt/slides/slide7.xml><?xml version="1.0" encoding="utf-8"?>
-<p:sld xmlns:a="http://schemas.openxmlformats.org/drawingml/2006/main" xmlns:r="http://schemas.openxmlformats.org/officeDocument/2006/relationships" xmlns:p="http://schemas.openxmlformats.org/presentationml/2006/main">
+<p:sld xmlns:a="http://schemas.openxmlformats.org/drawingml/2006/main" xmlns:p="http://schemas.openxmlformats.org/presentationml/2006/main" xmlns:r="http://schemas.openxmlformats.org/officeDocument/2006/relationships">
   <p:cSld>
     <p:spTree>
       <p:nvGrpSpPr>
@@ -11338,14 +9959,7 @@
         <p:cNvGrpSpPr/>
         <p:nvPr/>
       </p:nvGrpSpPr>
-      <p:grpSpPr>
-        <a:xfrm>
-          <a:off x="0" y="0"/>
-          <a:ext cx="0" cy="0"/>
-          <a:chOff x="0" y="0"/>
-          <a:chExt cx="0" cy="0"/>
-        </a:xfrm>
-      </p:grpSpPr>
+      <p:grpSpPr/>
       <p:sp>
         <p:nvSpPr>
           <p:cNvPr id="2" name="Rectangle 1"/>
@@ -11386,7 +10000,6 @@
           <a:lstStyle/>
           <a:p>
             <a:pPr algn="ctr"/>
-            <a:endParaRPr/>
           </a:p>
         </p:txBody>
       </p:sp>
@@ -11407,7 +10020,7 @@
           <a:noFill/>
         </p:spPr>
         <p:txBody>
-          <a:bodyPr wrap="square" lIns="45720" tIns="18288" rIns="45720" bIns="18288">
+          <a:bodyPr wrap="square" lIns="45720" rIns="45720" tIns="18288" bIns="18288">
             <a:spAutoFit/>
           </a:bodyPr>
           <a:lstStyle/>
@@ -11442,7 +10055,7 @@
           <a:noFill/>
         </p:spPr>
         <p:txBody>
-          <a:bodyPr wrap="square" lIns="45720" tIns="18288" rIns="45720" bIns="18288">
+          <a:bodyPr wrap="square" lIns="45720" rIns="45720" tIns="18288" bIns="18288">
             <a:spAutoFit/>
           </a:bodyPr>
           <a:lstStyle/>
@@ -11477,7 +10090,7 @@
           <a:noFill/>
         </p:spPr>
         <p:txBody>
-          <a:bodyPr wrap="square" lIns="45720" tIns="18288" rIns="45720" bIns="18288">
+          <a:bodyPr wrap="square" lIns="45720" rIns="45720" tIns="18288" bIns="18288">
             <a:spAutoFit/>
           </a:bodyPr>
           <a:lstStyle/>
@@ -11512,7 +10125,7 @@
           <a:noFill/>
         </p:spPr>
         <p:txBody>
-          <a:bodyPr wrap="square" lIns="45720" tIns="18288" rIns="45720" bIns="18288">
+          <a:bodyPr wrap="square" lIns="45720" rIns="45720" tIns="18288" bIns="18288">
             <a:spAutoFit/>
           </a:bodyPr>
           <a:lstStyle/>
@@ -11542,12 +10155,15 @@
           </a:p>
           <a:p>
             <a:pPr algn="l"/>
-            <a:endParaRPr sz="1500" b="0">
-              <a:solidFill>
-                <a:srgbClr val="222222"/>
-              </a:solidFill>
-              <a:latin typeface="Calibri"/>
-            </a:endParaRPr>
+            <a:r>
+              <a:rPr sz="1500" b="0">
+                <a:solidFill>
+                  <a:srgbClr val="222222"/>
+                </a:solidFill>
+                <a:latin typeface="Calibri"/>
+              </a:rPr>
+              <a:t/>
+            </a:r>
           </a:p>
           <a:p>
             <a:pPr algn="l"/>
@@ -11605,7 +10221,6 @@
           <a:lstStyle/>
           <a:p>
             <a:pPr algn="ctr"/>
-            <a:endParaRPr/>
           </a:p>
         </p:txBody>
       </p:sp>
@@ -11626,7 +10241,7 @@
           <a:noFill/>
         </p:spPr>
         <p:txBody>
-          <a:bodyPr wrap="square" lIns="45720" tIns="18288" rIns="45720" bIns="18288">
+          <a:bodyPr wrap="square" lIns="45720" rIns="45720" tIns="18288" bIns="18288">
             <a:spAutoFit/>
           </a:bodyPr>
           <a:lstStyle/>
@@ -11661,7 +10276,7 @@
           <a:noFill/>
         </p:spPr>
         <p:txBody>
-          <a:bodyPr wrap="square" lIns="45720" tIns="18288" rIns="45720" bIns="18288">
+          <a:bodyPr wrap="square" lIns="45720" rIns="45720" tIns="18288" bIns="18288">
             <a:spAutoFit/>
           </a:bodyPr>
           <a:lstStyle/>
@@ -11733,7 +10348,6 @@
           <a:lstStyle/>
           <a:p>
             <a:pPr algn="ctr"/>
-            <a:endParaRPr/>
           </a:p>
         </p:txBody>
       </p:sp>
@@ -11754,7 +10368,7 @@
           <a:noFill/>
         </p:spPr>
         <p:txBody>
-          <a:bodyPr wrap="square" lIns="45720" tIns="18288" rIns="45720" bIns="18288">
+          <a:bodyPr wrap="square" lIns="45720" rIns="45720" tIns="18288" bIns="18288">
             <a:spAutoFit/>
           </a:bodyPr>
           <a:lstStyle/>
@@ -11789,7 +10403,7 @@
           <a:noFill/>
         </p:spPr>
         <p:txBody>
-          <a:bodyPr wrap="square" lIns="45720" tIns="18288" rIns="45720" bIns="18288">
+          <a:bodyPr wrap="square" lIns="45720" rIns="45720" tIns="18288" bIns="18288">
             <a:spAutoFit/>
           </a:bodyPr>
           <a:lstStyle/>
@@ -11836,7 +10450,7 @@
           <a:noFill/>
         </p:spPr>
         <p:txBody>
-          <a:bodyPr wrap="square" lIns="45720" tIns="18288" rIns="45720" bIns="18288">
+          <a:bodyPr wrap="square" lIns="45720" rIns="45720" tIns="18288" bIns="18288">
             <a:spAutoFit/>
           </a:bodyPr>
           <a:lstStyle/>
@@ -11849,7 +10463,7 @@
                 </a:solidFill>
                 <a:latin typeface="Calibri"/>
               </a:rPr>
-              <a:t>Exemplo de pedaço gerado</a:t>
+              <a:t>Payload propagado por chunk</a:t>
             </a:r>
           </a:p>
         </p:txBody>
@@ -11863,7 +10477,7 @@
         <p:spPr>
           <a:xfrm>
             <a:off x="6400800" y="1783080"/>
-            <a:ext cx="5394960" cy="3200400"/>
+            <a:ext cx="5394960" cy="3291840"/>
           </a:xfrm>
           <a:prstGeom prst="roundRect">
             <a:avLst/>
@@ -11896,7 +10510,6 @@
           <a:lstStyle/>
           <a:p>
             <a:pPr algn="ctr"/>
-            <a:endParaRPr/>
           </a:p>
         </p:txBody>
       </p:sp>
@@ -11917,20 +10530,20 @@
           <a:noFill/>
         </p:spPr>
         <p:txBody>
-          <a:bodyPr wrap="square" lIns="45720" tIns="18288" rIns="45720" bIns="18288">
-            <a:spAutoFit/>
-          </a:bodyPr>
-          <a:lstStyle/>
-          <a:p>
-            <a:pPr algn="l"/>
-            <a:r>
-              <a:rPr sz="1400" b="1">
+          <a:bodyPr wrap="square" lIns="45720" rIns="45720" tIns="18288" bIns="18288">
+            <a:spAutoFit/>
+          </a:bodyPr>
+          <a:lstStyle/>
+          <a:p>
+            <a:pPr algn="l"/>
+            <a:r>
+              <a:rPr sz="1300" b="1">
                 <a:solidFill>
                   <a:srgbClr val="1A4480"/>
                 </a:solidFill>
                 <a:latin typeface="Calibri"/>
               </a:rPr>
-              <a:t>Etiquetas que viajam com o pedaço:</a:t>
+              <a:t>Metadados indexados no Qdrant:</a:t>
             </a:r>
           </a:p>
         </p:txBody>
@@ -11944,7 +10557,7 @@
         <p:spPr>
           <a:xfrm>
             <a:off x="6583680" y="2286000"/>
-            <a:ext cx="5120640" cy="2651760"/>
+            <a:ext cx="5120640" cy="2743200"/>
           </a:xfrm>
           <a:prstGeom prst="rect">
             <a:avLst/>
@@ -11963,13 +10576,13 @@
               </a:spcAft>
             </a:pPr>
             <a:r>
-              <a:rPr sz="1400">
+              <a:rPr sz="1200">
                 <a:solidFill>
                   <a:srgbClr val="222222"/>
                 </a:solidFill>
                 <a:latin typeface="Calibri"/>
               </a:rPr>
-              <a:t>• Qual artigo? (Art. 12)</a:t>
+              <a:t>• article_ref (Art. 12)</a:t>
             </a:r>
           </a:p>
           <a:p>
@@ -11979,13 +10592,13 @@
               </a:spcAft>
             </a:pPr>
             <a:r>
-              <a:rPr sz="1400">
+              <a:rPr sz="1200">
                 <a:solidFill>
                   <a:srgbClr val="222222"/>
                 </a:solidFill>
                 <a:latin typeface="Calibri"/>
               </a:rPr>
-              <a:t>• Qual documento? (REN 1.000/2021)</a:t>
+              <a:t>• doc_id, arquivo, ano, autor, situacao_doc</a:t>
             </a:r>
           </a:p>
           <a:p>
@@ -11995,13 +10608,13 @@
               </a:spcAft>
             </a:pPr>
             <a:r>
-              <a:rPr sz="1400">
+              <a:rPr sz="1200">
                 <a:solidFill>
                   <a:srgbClr val="222222"/>
                 </a:solidFill>
                 <a:latin typeface="Calibri"/>
               </a:rPr>
-              <a:t>• Qual página? (pg 4-5)</a:t>
+              <a:t>• page_start, page_end</a:t>
             </a:r>
           </a:p>
           <a:p>
@@ -12011,13 +10624,13 @@
               </a:spcAft>
             </a:pPr>
             <a:r>
-              <a:rPr sz="1400">
+              <a:rPr sz="1200">
                 <a:solidFill>
                   <a:srgbClr val="222222"/>
                 </a:solidFill>
                 <a:latin typeface="Calibri"/>
               </a:rPr>
-              <a:t>• Tem tabela? Sim/Não</a:t>
+              <a:t>• has_table, has_revoked (booleanos)</a:t>
             </a:r>
           </a:p>
           <a:p>
@@ -12027,13 +10640,13 @@
               </a:spcAft>
             </a:pPr>
             <a:r>
-              <a:rPr sz="1400">
+              <a:rPr sz="1200">
                 <a:solidFill>
                   <a:srgbClr val="222222"/>
                 </a:solidFill>
                 <a:latin typeface="Calibri"/>
               </a:rPr>
-              <a:t>• Tem trecho revogado? Sim/Não</a:t>
+              <a:t>• ementa, assunto, publicacao</a:t>
             </a:r>
           </a:p>
         </p:txBody>
@@ -12046,7 +10659,7 @@
         </p:nvSpPr>
         <p:spPr>
           <a:xfrm>
-            <a:off x="6400800" y="5166360"/>
+            <a:off x="6400800" y="5212080"/>
             <a:ext cx="5486400" cy="1280160"/>
           </a:xfrm>
           <a:prstGeom prst="rect">
@@ -12055,44 +10668,44 @@
           <a:noFill/>
         </p:spPr>
         <p:txBody>
-          <a:bodyPr wrap="square" lIns="45720" tIns="18288" rIns="45720" bIns="18288">
-            <a:spAutoFit/>
-          </a:bodyPr>
-          <a:lstStyle/>
-          <a:p>
-            <a:pPr algn="l"/>
-            <a:r>
-              <a:rPr sz="1400" b="0">
+          <a:bodyPr wrap="square" lIns="45720" rIns="45720" tIns="18288" bIns="18288">
+            <a:spAutoFit/>
+          </a:bodyPr>
+          <a:lstStyle/>
+          <a:p>
+            <a:pPr algn="l"/>
+            <a:r>
+              <a:rPr sz="1200" b="0">
                 <a:solidFill>
                   <a:srgbClr val="222222"/>
                 </a:solidFill>
                 <a:latin typeface="Calibri"/>
               </a:rPr>
-              <a:t>Quando a LLM responde, ela já sabe:</a:t>
-            </a:r>
-          </a:p>
-          <a:p>
-            <a:pPr algn="l"/>
-            <a:r>
-              <a:rPr sz="1400" b="0">
+              <a:t>Permite filtros estruturados na query</a:t>
+            </a:r>
+          </a:p>
+          <a:p>
+            <a:pPr algn="l"/>
+            <a:r>
+              <a:rPr sz="1200" b="0">
                 <a:solidFill>
                   <a:srgbClr val="222222"/>
                 </a:solidFill>
                 <a:latin typeface="Calibri"/>
               </a:rPr>
-              <a:t>"isso veio do Art. 12 da REN 1.000/2021".</a:t>
-            </a:r>
-          </a:p>
-          <a:p>
-            <a:pPr algn="l"/>
-            <a:r>
-              <a:rPr sz="1400" b="0">
+              <a:t>(ex: ano=2021 AND has_revoked=false) +</a:t>
+            </a:r>
+          </a:p>
+          <a:p>
+            <a:pPr algn="l"/>
+            <a:r>
+              <a:rPr sz="1200" b="0">
                 <a:solidFill>
                   <a:srgbClr val="222222"/>
                 </a:solidFill>
                 <a:latin typeface="Calibri"/>
               </a:rPr>
-              <a:t>→ Citação automática e precisa.</a:t>
+              <a:t>citação automática [doc_id | art. X].</a:t>
             </a:r>
           </a:p>
         </p:txBody>
@@ -12114,7 +10727,7 @@
           <a:noFill/>
         </p:spPr>
         <p:txBody>
-          <a:bodyPr wrap="square" lIns="45720" tIns="18288" rIns="45720" bIns="18288">
+          <a:bodyPr wrap="square" lIns="45720" rIns="45720" tIns="18288" bIns="18288">
             <a:spAutoFit/>
           </a:bodyPr>
           <a:lstStyle/>
@@ -12149,7 +10762,7 @@
           <a:noFill/>
         </p:spPr>
         <p:txBody>
-          <a:bodyPr wrap="square" lIns="45720" tIns="18288" rIns="45720" bIns="18288">
+          <a:bodyPr wrap="square" lIns="45720" rIns="45720" tIns="18288" bIns="18288">
             <a:spAutoFit/>
           </a:bodyPr>
           <a:lstStyle/>
@@ -12176,7 +10789,7 @@
 </file>
 
 <file path=ppt/slides/slide8.xml><?xml version="1.0" encoding="utf-8"?>
-<p:sld xmlns:a="http://schemas.openxmlformats.org/drawingml/2006/main" xmlns:r="http://schemas.openxmlformats.org/officeDocument/2006/relationships" xmlns:p="http://schemas.openxmlformats.org/presentationml/2006/main">
+<p:sld xmlns:a="http://schemas.openxmlformats.org/drawingml/2006/main" xmlns:p="http://schemas.openxmlformats.org/presentationml/2006/main" xmlns:r="http://schemas.openxmlformats.org/officeDocument/2006/relationships">
   <p:cSld>
     <p:spTree>
       <p:nvGrpSpPr>
@@ -12184,14 +10797,7 @@
         <p:cNvGrpSpPr/>
         <p:nvPr/>
       </p:nvGrpSpPr>
-      <p:grpSpPr>
-        <a:xfrm>
-          <a:off x="0" y="0"/>
-          <a:ext cx="0" cy="0"/>
-          <a:chOff x="0" y="0"/>
-          <a:chExt cx="0" cy="0"/>
-        </a:xfrm>
-      </p:grpSpPr>
+      <p:grpSpPr/>
       <p:sp>
         <p:nvSpPr>
           <p:cNvPr id="2" name="Rectangle 1"/>
@@ -12232,7 +10838,6 @@
           <a:lstStyle/>
           <a:p>
             <a:pPr algn="ctr"/>
-            <a:endParaRPr/>
           </a:p>
         </p:txBody>
       </p:sp>
@@ -12253,7 +10858,7 @@
           <a:noFill/>
         </p:spPr>
         <p:txBody>
-          <a:bodyPr wrap="square" lIns="45720" tIns="18288" rIns="45720" bIns="18288">
+          <a:bodyPr wrap="square" lIns="45720" rIns="45720" tIns="18288" bIns="18288">
             <a:spAutoFit/>
           </a:bodyPr>
           <a:lstStyle/>
@@ -12288,7 +10893,7 @@
           <a:noFill/>
         </p:spPr>
         <p:txBody>
-          <a:bodyPr wrap="square" lIns="45720" tIns="18288" rIns="45720" bIns="18288">
+          <a:bodyPr wrap="square" lIns="45720" rIns="45720" tIns="18288" bIns="18288">
             <a:spAutoFit/>
           </a:bodyPr>
           <a:lstStyle/>
@@ -12323,7 +10928,7 @@
           <a:noFill/>
         </p:spPr>
         <p:txBody>
-          <a:bodyPr wrap="square" lIns="45720" tIns="18288" rIns="45720" bIns="18288">
+          <a:bodyPr wrap="square" lIns="45720" rIns="45720" tIns="18288" bIns="18288">
             <a:spAutoFit/>
           </a:bodyPr>
           <a:lstStyle/>
@@ -12383,7 +10988,6 @@
           <a:lstStyle/>
           <a:p>
             <a:pPr algn="ctr"/>
-            <a:endParaRPr/>
           </a:p>
         </p:txBody>
       </p:sp>
@@ -12423,7 +11027,7 @@
           </a:fontRef>
         </p:style>
         <p:txBody>
-          <a:bodyPr tIns="18288" rtlCol="0" anchor="ctr"/>
+          <a:bodyPr rtlCol="0" anchor="ctr" tIns="18288"/>
           <a:lstStyle/>
           <a:p>
             <a:pPr algn="ctr"/>
@@ -12455,7 +11059,7 @@
           <a:noFill/>
         </p:spPr>
         <p:txBody>
-          <a:bodyPr wrap="square" lIns="45720" tIns="18288" rIns="45720" bIns="18288">
+          <a:bodyPr wrap="square" lIns="45720" rIns="45720" tIns="18288" bIns="18288">
             <a:spAutoFit/>
           </a:bodyPr>
           <a:lstStyle/>
@@ -12468,7 +11072,7 @@
                 </a:solidFill>
                 <a:latin typeface="Calibri"/>
               </a:rPr>
-              <a:t>Cortar pela estrutura da lei (regex)</a:t>
+              <a:t>Split estrutural por hierarquia legal (regex)</a:t>
             </a:r>
           </a:p>
         </p:txBody>
@@ -12490,7 +11094,7 @@
           <a:noFill/>
         </p:spPr>
         <p:txBody>
-          <a:bodyPr wrap="square" lIns="45720" tIns="18288" rIns="45720" bIns="18288">
+          <a:bodyPr wrap="square" lIns="45720" rIns="45720" tIns="18288" bIns="18288">
             <a:spAutoFit/>
           </a:bodyPr>
           <a:lstStyle/>
@@ -12503,7 +11107,7 @@
                 </a:solidFill>
                 <a:latin typeface="Calibri"/>
               </a:rPr>
-              <a:t>Procura cabeçalhos: Art. 5º · § 1º · Capítulo II · Seção III · Título IV.</a:t>
+              <a:t>Cabeçalhos: Art. X · § N · Capítulo (romano) · Seção · Título.</a:t>
             </a:r>
           </a:p>
           <a:p>
@@ -12515,7 +11119,7 @@
                 </a:solidFill>
                 <a:latin typeface="Calibri"/>
               </a:rPr>
-              <a:t>Cada um deles começa um novo pedaço. Resultado: 1 artigo = 1 chunk.</a:t>
+              <a:t>1 artigo = 1 chunk · article_ref propaga como metadado pra citação.</a:t>
             </a:r>
           </a:p>
         </p:txBody>
@@ -12562,7 +11166,6 @@
           <a:lstStyle/>
           <a:p>
             <a:pPr algn="ctr"/>
-            <a:endParaRPr/>
           </a:p>
         </p:txBody>
       </p:sp>
@@ -12602,7 +11205,7 @@
           </a:fontRef>
         </p:style>
         <p:txBody>
-          <a:bodyPr tIns="18288" rtlCol="0" anchor="ctr"/>
+          <a:bodyPr rtlCol="0" anchor="ctr" tIns="18288"/>
           <a:lstStyle/>
           <a:p>
             <a:pPr algn="ctr"/>
@@ -12634,7 +11237,7 @@
           <a:noFill/>
         </p:spPr>
         <p:txBody>
-          <a:bodyPr wrap="square" lIns="45720" tIns="18288" rIns="45720" bIns="18288">
+          <a:bodyPr wrap="square" lIns="45720" rIns="45720" tIns="18288" bIns="18288">
             <a:spAutoFit/>
           </a:bodyPr>
           <a:lstStyle/>
@@ -12647,7 +11250,7 @@
                 </a:solidFill>
                 <a:latin typeface="Calibri"/>
               </a:rPr>
-              <a:t>SE o artigo for gigante (&gt;900 tokens) → janela deslizante</a:t>
+              <a:t>SE bloco &gt; 900 tokens → sliding window com overlap 100</a:t>
             </a:r>
           </a:p>
         </p:txBody>
@@ -12669,7 +11272,7 @@
           <a:noFill/>
         </p:spPr>
         <p:txBody>
-          <a:bodyPr wrap="square" lIns="45720" tIns="18288" rIns="45720" bIns="18288">
+          <a:bodyPr wrap="square" lIns="45720" rIns="45720" tIns="18288" bIns="18288">
             <a:spAutoFit/>
           </a:bodyPr>
           <a:lstStyle/>
@@ -12682,7 +11285,7 @@
                 </a:solidFill>
                 <a:latin typeface="Calibri"/>
               </a:rPr>
-              <a:t>Alguns artigos têm 5+ páginas. Cortamos por parágrafos com sobreposição</a:t>
+              <a:t>Limite de 900 escolhido pra caber confortável no max_length=1024 do BGE-M3.</a:t>
             </a:r>
           </a:p>
           <a:p>
@@ -12694,7 +11297,7 @@
                 </a:solidFill>
                 <a:latin typeface="Calibri"/>
               </a:rPr>
-              <a:t>de 100 tokens entre os pedaços — o final de um aparece no começo do próximo.</a:t>
+              <a:t>Quebra por parágrafo (\n\n) preservando coerência · overlap 100 tokens evita</a:t>
             </a:r>
           </a:p>
           <a:p>
@@ -12706,7 +11309,7 @@
                 </a:solidFill>
                 <a:latin typeface="Calibri"/>
               </a:rPr>
-              <a:t>Assim o contexto não "se perde" entre chunks vizinhos.</a:t>
+              <a:t>perda de contexto na fronteira entre chunks vizinhos.</a:t>
             </a:r>
           </a:p>
         </p:txBody>
@@ -12753,7 +11356,6 @@
           <a:lstStyle/>
           <a:p>
             <a:pPr algn="ctr"/>
-            <a:endParaRPr/>
           </a:p>
         </p:txBody>
       </p:sp>
@@ -12793,7 +11395,7 @@
           </a:fontRef>
         </p:style>
         <p:txBody>
-          <a:bodyPr tIns="18288" rtlCol="0" anchor="ctr"/>
+          <a:bodyPr rtlCol="0" anchor="ctr" tIns="18288"/>
           <a:lstStyle/>
           <a:p>
             <a:pPr algn="ctr"/>
@@ -12825,7 +11427,7 @@
           <a:noFill/>
         </p:spPr>
         <p:txBody>
-          <a:bodyPr wrap="square" lIns="45720" tIns="18288" rIns="45720" bIns="18288">
+          <a:bodyPr wrap="square" lIns="45720" rIns="45720" tIns="18288" bIns="18288">
             <a:spAutoFit/>
           </a:bodyPr>
           <a:lstStyle/>
@@ -12838,7 +11440,7 @@
                 </a:solidFill>
                 <a:latin typeface="Calibri"/>
               </a:rPr>
-              <a:t>SE sobrar pedaço minúsculo (&lt;60 tokens) → funde no anterior</a:t>
+              <a:t>SE chunk &lt; 60 tokens → merge no anterior (exceto se has_table=true)</a:t>
             </a:r>
           </a:p>
         </p:txBody>
@@ -12860,7 +11462,7 @@
           <a:noFill/>
         </p:spPr>
         <p:txBody>
-          <a:bodyPr wrap="square" lIns="45720" tIns="18288" rIns="45720" bIns="18288">
+          <a:bodyPr wrap="square" lIns="45720" rIns="45720" tIns="18288" bIns="18288">
             <a:spAutoFit/>
           </a:bodyPr>
           <a:lstStyle/>
@@ -12873,7 +11475,7 @@
                 </a:solidFill>
                 <a:latin typeface="Calibri"/>
               </a:rPr>
-              <a:t>Migalha tipo "§ 3º Revogado." não vale chunk próprio — vira ruído na busca.</a:t>
+              <a:t>Migalhas ("§ 3º Revogado.") inflam o índice e atrapalham reranker.</a:t>
             </a:r>
           </a:p>
           <a:p>
@@ -12885,7 +11487,7 @@
                 </a:solidFill>
                 <a:latin typeface="Calibri"/>
               </a:rPr>
-              <a:t>Exceção: se contém tabela, mantém separado (tabelas não podem ser fundidas).</a:t>
+              <a:t>Tabelas mantêm chunk próprio · merge atualiza page_end e has_revoked.</a:t>
             </a:r>
           </a:p>
         </p:txBody>
@@ -12907,7 +11509,7 @@
           <a:noFill/>
         </p:spPr>
         <p:txBody>
-          <a:bodyPr wrap="square" lIns="45720" tIns="18288" rIns="45720" bIns="18288">
+          <a:bodyPr wrap="square" lIns="45720" rIns="45720" tIns="18288" bIns="18288">
             <a:spAutoFit/>
           </a:bodyPr>
           <a:lstStyle/>
@@ -12942,7 +11544,7 @@
           <a:noFill/>
         </p:spPr>
         <p:txBody>
-          <a:bodyPr wrap="square" lIns="45720" tIns="18288" rIns="45720" bIns="18288">
+          <a:bodyPr wrap="square" lIns="45720" rIns="45720" tIns="18288" bIns="18288">
             <a:spAutoFit/>
           </a:bodyPr>
           <a:lstStyle/>
@@ -12977,7 +11579,7 @@
           <a:noFill/>
         </p:spPr>
         <p:txBody>
-          <a:bodyPr wrap="square" lIns="45720" tIns="18288" rIns="45720" bIns="18288">
+          <a:bodyPr wrap="square" lIns="45720" rIns="45720" tIns="18288" bIns="18288">
             <a:spAutoFit/>
           </a:bodyPr>
           <a:lstStyle/>
@@ -13004,7 +11606,7 @@
 </file>
 
 <file path=ppt/slides/slide9.xml><?xml version="1.0" encoding="utf-8"?>
-<p:sld xmlns:a="http://schemas.openxmlformats.org/drawingml/2006/main" xmlns:r="http://schemas.openxmlformats.org/officeDocument/2006/relationships" xmlns:p="http://schemas.openxmlformats.org/presentationml/2006/main">
+<p:sld xmlns:a="http://schemas.openxmlformats.org/drawingml/2006/main" xmlns:p="http://schemas.openxmlformats.org/presentationml/2006/main" xmlns:r="http://schemas.openxmlformats.org/officeDocument/2006/relationships">
   <p:cSld>
     <p:spTree>
       <p:nvGrpSpPr>
@@ -13012,14 +11614,7 @@
         <p:cNvGrpSpPr/>
         <p:nvPr/>
       </p:nvGrpSpPr>
-      <p:grpSpPr>
-        <a:xfrm>
-          <a:off x="0" y="0"/>
-          <a:ext cx="0" cy="0"/>
-          <a:chOff x="0" y="0"/>
-          <a:chExt cx="0" cy="0"/>
-        </a:xfrm>
-      </p:grpSpPr>
+      <p:grpSpPr/>
       <p:sp>
         <p:nvSpPr>
           <p:cNvPr id="2" name="Rectangle 1"/>
@@ -13060,7 +11655,6 @@
           <a:lstStyle/>
           <a:p>
             <a:pPr algn="ctr"/>
-            <a:endParaRPr/>
           </a:p>
         </p:txBody>
       </p:sp>
@@ -13073,35 +11667,64 @@
         <p:spPr>
           <a:xfrm>
             <a:off x="457200" y="228600"/>
-            <a:ext cx="11247120" cy="498598"/>
-          </a:xfrm>
-          <a:prstGeom prst="rect">
-            <a:avLst/>
-          </a:prstGeom>
-          <a:noFill/>
-        </p:spPr>
-        <p:txBody>
-          <a:bodyPr wrap="square" lIns="45720" tIns="18288" rIns="45720" bIns="18288">
-            <a:spAutoFit/>
-          </a:bodyPr>
-          <a:lstStyle/>
-          <a:p>
-            <a:pPr algn="l"/>
-            <a:r>
-              <a:rPr lang="pt-BR" sz="3000" b="1" dirty="0" err="1">
+            <a:ext cx="11247120" cy="640080"/>
+          </a:xfrm>
+          <a:prstGeom prst="rect">
+            <a:avLst/>
+          </a:prstGeom>
+          <a:noFill/>
+        </p:spPr>
+        <p:txBody>
+          <a:bodyPr wrap="square" lIns="45720" rIns="45720" tIns="18288" bIns="18288">
+            <a:spAutoFit/>
+          </a:bodyPr>
+          <a:lstStyle/>
+          <a:p>
+            <a:pPr algn="l"/>
+            <a:r>
+              <a:rPr sz="3000" b="1">
                 <a:solidFill>
                   <a:srgbClr val="1A4480"/>
                 </a:solidFill>
                 <a:latin typeface="Calibri"/>
               </a:rPr>
-              <a:t>Embeddings</a:t>
-            </a:r>
-            <a:endParaRPr sz="3000" b="1" dirty="0">
-              <a:solidFill>
-                <a:srgbClr val="1A4480"/>
-              </a:solidFill>
-              <a:latin typeface="Calibri"/>
-            </a:endParaRPr>
+              <a:t>Transformando Texto em "Coordenadas"</a:t>
+            </a:r>
+          </a:p>
+        </p:txBody>
+      </p:sp>
+      <p:sp>
+        <p:nvSpPr>
+          <p:cNvPr id="4" name="TextBox 3"/>
+          <p:cNvSpPr txBox="1"/>
+          <p:nvPr/>
+        </p:nvSpPr>
+        <p:spPr>
+          <a:xfrm>
+            <a:off x="457200" y="777240"/>
+            <a:ext cx="11247120" cy="365760"/>
+          </a:xfrm>
+          <a:prstGeom prst="rect">
+            <a:avLst/>
+          </a:prstGeom>
+          <a:noFill/>
+        </p:spPr>
+        <p:txBody>
+          <a:bodyPr wrap="square" lIns="45720" rIns="45720" tIns="18288" bIns="18288">
+            <a:spAutoFit/>
+          </a:bodyPr>
+          <a:lstStyle/>
+          <a:p>
+            <a:pPr algn="l"/>
+            <a:r>
+              <a:rPr sz="1600" b="0">
+                <a:solidFill>
+                  <a:srgbClr val="555555"/>
+                </a:solidFill>
+                <a:latin typeface="Calibri"/>
+              </a:rPr>
+              <a:t>Como o computador entende o significado de um trecho</a:t>
+            </a:r>
           </a:p>
         </p:txBody>
       </p:sp>
@@ -13113,7 +11736,7 @@
         </p:nvSpPr>
         <p:spPr>
           <a:xfrm>
-            <a:off x="548640" y="951474"/>
+            <a:off x="548640" y="1234440"/>
             <a:ext cx="10972800" cy="365760"/>
           </a:xfrm>
           <a:prstGeom prst="rect">
@@ -13122,110 +11745,20 @@
           <a:noFill/>
         </p:spPr>
         <p:txBody>
-          <a:bodyPr wrap="square" lIns="45720" tIns="18288" rIns="45720" bIns="18288">
-            <a:spAutoFit/>
-          </a:bodyPr>
-          <a:lstStyle/>
-          <a:p>
-            <a:pPr algn="l"/>
-            <a:r>
-              <a:rPr sz="2000" b="1" dirty="0">
+          <a:bodyPr wrap="square" lIns="45720" rIns="45720" tIns="18288" bIns="18288">
+            <a:spAutoFit/>
+          </a:bodyPr>
+          <a:lstStyle/>
+          <a:p>
+            <a:pPr algn="l"/>
+            <a:r>
+              <a:rPr sz="2000" b="1">
                 <a:solidFill>
                   <a:srgbClr val="1A4480"/>
                 </a:solidFill>
                 <a:latin typeface="Calibri"/>
               </a:rPr>
-              <a:t>🧬 A </a:t>
-            </a:r>
-            <a:r>
-              <a:rPr sz="2000" b="1" dirty="0" err="1">
-                <a:solidFill>
-                  <a:srgbClr val="1A4480"/>
-                </a:solidFill>
-                <a:latin typeface="Calibri"/>
-              </a:rPr>
-              <a:t>ideia</a:t>
-            </a:r>
-            <a:r>
-              <a:rPr sz="2000" b="1" dirty="0">
-                <a:solidFill>
-                  <a:srgbClr val="1A4480"/>
-                </a:solidFill>
-                <a:latin typeface="Calibri"/>
-              </a:rPr>
-              <a:t>: </a:t>
-            </a:r>
-            <a:r>
-              <a:rPr sz="2000" b="1" dirty="0" err="1">
-                <a:solidFill>
-                  <a:srgbClr val="1A4480"/>
-                </a:solidFill>
-                <a:latin typeface="Calibri"/>
-              </a:rPr>
-              <a:t>cada</a:t>
-            </a:r>
-            <a:r>
-              <a:rPr sz="2000" b="1" dirty="0">
-                <a:solidFill>
-                  <a:srgbClr val="1A4480"/>
-                </a:solidFill>
-                <a:latin typeface="Calibri"/>
-              </a:rPr>
-              <a:t> </a:t>
-            </a:r>
-            <a:r>
-              <a:rPr sz="2000" b="1" dirty="0" err="1">
-                <a:solidFill>
-                  <a:srgbClr val="1A4480"/>
-                </a:solidFill>
-                <a:latin typeface="Calibri"/>
-              </a:rPr>
-              <a:t>trecho</a:t>
-            </a:r>
-            <a:r>
-              <a:rPr sz="2000" b="1" dirty="0">
-                <a:solidFill>
-                  <a:srgbClr val="1A4480"/>
-                </a:solidFill>
-                <a:latin typeface="Calibri"/>
-              </a:rPr>
-              <a:t> </a:t>
-            </a:r>
-            <a:r>
-              <a:rPr sz="2000" b="1" dirty="0" err="1">
-                <a:solidFill>
-                  <a:srgbClr val="1A4480"/>
-                </a:solidFill>
-                <a:latin typeface="Calibri"/>
-              </a:rPr>
-              <a:t>vira</a:t>
-            </a:r>
-            <a:r>
-              <a:rPr sz="2000" b="1" dirty="0">
-                <a:solidFill>
-                  <a:srgbClr val="1A4480"/>
-                </a:solidFill>
-                <a:latin typeface="Calibri"/>
-              </a:rPr>
-              <a:t> um "DNA </a:t>
-            </a:r>
-            <a:r>
-              <a:rPr sz="2000" b="1" dirty="0" err="1">
-                <a:solidFill>
-                  <a:srgbClr val="1A4480"/>
-                </a:solidFill>
-                <a:latin typeface="Calibri"/>
-              </a:rPr>
-              <a:t>numérico</a:t>
-            </a:r>
-            <a:r>
-              <a:rPr sz="2000" b="1" dirty="0">
-                <a:solidFill>
-                  <a:srgbClr val="1A4480"/>
-                </a:solidFill>
-                <a:latin typeface="Calibri"/>
-              </a:rPr>
-              <a:t>"</a:t>
+              <a:t>🧬 Modelo de embedding: BGE-M3</a:t>
             </a:r>
           </a:p>
         </p:txBody>
@@ -13238,203 +11771,41 @@
         </p:nvSpPr>
         <p:spPr>
           <a:xfrm>
-            <a:off x="731520" y="1527297"/>
-            <a:ext cx="10972800" cy="729430"/>
-          </a:xfrm>
-          <a:prstGeom prst="rect">
-            <a:avLst/>
-          </a:prstGeom>
-          <a:noFill/>
-        </p:spPr>
-        <p:txBody>
-          <a:bodyPr wrap="square" lIns="45720" tIns="18288" rIns="45720" bIns="18288">
-            <a:spAutoFit/>
-          </a:bodyPr>
-          <a:lstStyle/>
-          <a:p>
-            <a:pPr algn="l"/>
-            <a:r>
-              <a:rPr lang="pt-BR" sz="1500" b="0" dirty="0">
+            <a:off x="731520" y="1691640"/>
+            <a:ext cx="10972800" cy="914400"/>
+          </a:xfrm>
+          <a:prstGeom prst="rect">
+            <a:avLst/>
+          </a:prstGeom>
+          <a:noFill/>
+        </p:spPr>
+        <p:txBody>
+          <a:bodyPr wrap="square" lIns="45720" rIns="45720" tIns="18288" bIns="18288">
+            <a:spAutoFit/>
+          </a:bodyPr>
+          <a:lstStyle/>
+          <a:p>
+            <a:pPr algn="l"/>
+            <a:r>
+              <a:rPr sz="1400" b="0">
                 <a:solidFill>
                   <a:srgbClr val="222222"/>
                 </a:solidFill>
                 <a:latin typeface="Calibri"/>
               </a:rPr>
-              <a:t>O modelo de </a:t>
-            </a:r>
-            <a:r>
-              <a:rPr lang="pt-BR" sz="1500" b="0" dirty="0" err="1">
+              <a:t>Cada trecho vira vetor de 1024 dimensões + vetor esparso lexical.</a:t>
+            </a:r>
+          </a:p>
+          <a:p>
+            <a:pPr algn="l"/>
+            <a:r>
+              <a:rPr sz="1400" b="0">
                 <a:solidFill>
                   <a:srgbClr val="222222"/>
                 </a:solidFill>
                 <a:latin typeface="Calibri"/>
               </a:rPr>
-              <a:t>embeddings</a:t>
-            </a:r>
-            <a:r>
-              <a:rPr lang="pt-BR" sz="1500" b="0" dirty="0">
-                <a:solidFill>
-                  <a:srgbClr val="222222"/>
-                </a:solidFill>
-                <a:latin typeface="Calibri"/>
-              </a:rPr>
-              <a:t> gera um vetor </a:t>
-            </a:r>
-            <a:r>
-              <a:rPr sz="1500" b="0" dirty="0">
-                <a:solidFill>
-                  <a:srgbClr val="222222"/>
-                </a:solidFill>
-                <a:latin typeface="Calibri"/>
-              </a:rPr>
-              <a:t>1024 </a:t>
-            </a:r>
-            <a:r>
-              <a:rPr lang="pt-BR" sz="1500" b="0" dirty="0">
-                <a:solidFill>
-                  <a:srgbClr val="222222"/>
-                </a:solidFill>
-                <a:latin typeface="Calibri"/>
-              </a:rPr>
-              <a:t>dimensões.</a:t>
-            </a:r>
-          </a:p>
-          <a:p>
-            <a:pPr algn="l"/>
-            <a:endParaRPr sz="1500" b="0" dirty="0">
-              <a:solidFill>
-                <a:srgbClr val="222222"/>
-              </a:solidFill>
-              <a:latin typeface="Calibri"/>
-            </a:endParaRPr>
-          </a:p>
-          <a:p>
-            <a:pPr algn="l"/>
-            <a:r>
-              <a:rPr sz="1500" b="0" dirty="0" err="1">
-                <a:solidFill>
-                  <a:srgbClr val="222222"/>
-                </a:solidFill>
-                <a:latin typeface="Calibri"/>
-              </a:rPr>
-              <a:t>Computador</a:t>
-            </a:r>
-            <a:r>
-              <a:rPr sz="1500" b="0" dirty="0">
-                <a:solidFill>
-                  <a:srgbClr val="222222"/>
-                </a:solidFill>
-                <a:latin typeface="Calibri"/>
-              </a:rPr>
-              <a:t> </a:t>
-            </a:r>
-            <a:r>
-              <a:rPr sz="1500" b="0" dirty="0" err="1">
-                <a:solidFill>
-                  <a:srgbClr val="222222"/>
-                </a:solidFill>
-                <a:latin typeface="Calibri"/>
-              </a:rPr>
-              <a:t>consegue</a:t>
-            </a:r>
-            <a:r>
-              <a:rPr sz="1500" b="0" dirty="0">
-                <a:solidFill>
-                  <a:srgbClr val="222222"/>
-                </a:solidFill>
-                <a:latin typeface="Calibri"/>
-              </a:rPr>
-              <a:t> "</a:t>
-            </a:r>
-            <a:r>
-              <a:rPr sz="1500" b="0" dirty="0" err="1">
-                <a:solidFill>
-                  <a:srgbClr val="222222"/>
-                </a:solidFill>
-                <a:latin typeface="Calibri"/>
-              </a:rPr>
-              <a:t>buscar</a:t>
-            </a:r>
-            <a:r>
-              <a:rPr sz="1500" b="0" dirty="0">
-                <a:solidFill>
-                  <a:srgbClr val="222222"/>
-                </a:solidFill>
-                <a:latin typeface="Calibri"/>
-              </a:rPr>
-              <a:t> por </a:t>
-            </a:r>
-            <a:r>
-              <a:rPr sz="1500" b="0" dirty="0" err="1">
-                <a:solidFill>
-                  <a:srgbClr val="222222"/>
-                </a:solidFill>
-                <a:latin typeface="Calibri"/>
-              </a:rPr>
-              <a:t>significado</a:t>
-            </a:r>
-            <a:r>
-              <a:rPr sz="1500" b="0" dirty="0">
-                <a:solidFill>
-                  <a:srgbClr val="222222"/>
-                </a:solidFill>
-                <a:latin typeface="Calibri"/>
-              </a:rPr>
-              <a:t>", </a:t>
-            </a:r>
-            <a:r>
-              <a:rPr sz="1500" b="0" dirty="0" err="1">
-                <a:solidFill>
-                  <a:srgbClr val="222222"/>
-                </a:solidFill>
-                <a:latin typeface="Calibri"/>
-              </a:rPr>
-              <a:t>não</a:t>
-            </a:r>
-            <a:r>
-              <a:rPr sz="1500" b="0" dirty="0">
-                <a:solidFill>
-                  <a:srgbClr val="222222"/>
-                </a:solidFill>
-                <a:latin typeface="Calibri"/>
-              </a:rPr>
-              <a:t> </a:t>
-            </a:r>
-            <a:r>
-              <a:rPr sz="1500" b="0" dirty="0" err="1">
-                <a:solidFill>
-                  <a:srgbClr val="222222"/>
-                </a:solidFill>
-                <a:latin typeface="Calibri"/>
-              </a:rPr>
-              <a:t>só</a:t>
-            </a:r>
-            <a:r>
-              <a:rPr sz="1500" b="0" dirty="0">
-                <a:solidFill>
-                  <a:srgbClr val="222222"/>
-                </a:solidFill>
-                <a:latin typeface="Calibri"/>
-              </a:rPr>
-              <a:t> por </a:t>
-            </a:r>
-            <a:r>
-              <a:rPr sz="1500" b="0" dirty="0" err="1">
-                <a:solidFill>
-                  <a:srgbClr val="222222"/>
-                </a:solidFill>
-                <a:latin typeface="Calibri"/>
-              </a:rPr>
-              <a:t>palavra-chave</a:t>
-            </a:r>
-            <a:r>
-              <a:rPr sz="1500" b="0" dirty="0">
-                <a:solidFill>
-                  <a:srgbClr val="222222"/>
-                </a:solidFill>
-                <a:latin typeface="Calibri"/>
-              </a:rPr>
-              <a:t>.</a:t>
+              <a:t>Um único modelo entrega os dois — sem rodar BM25 separado.</a:t>
             </a:r>
           </a:p>
         </p:txBody>
@@ -13447,8 +11818,8 @@
         </p:nvSpPr>
         <p:spPr>
           <a:xfrm>
-            <a:off x="548640" y="2880361"/>
-            <a:ext cx="5486400" cy="2194560"/>
+            <a:off x="457200" y="2743200"/>
+            <a:ext cx="5669280" cy="2286000"/>
           </a:xfrm>
           <a:prstGeom prst="roundRect">
             <a:avLst/>
@@ -13481,7 +11852,6 @@
           <a:lstStyle/>
           <a:p>
             <a:pPr algn="ctr"/>
-            <a:endParaRPr/>
           </a:p>
         </p:txBody>
       </p:sp>
@@ -13493,29 +11863,29 @@
         </p:nvSpPr>
         <p:spPr>
           <a:xfrm>
-            <a:off x="731520" y="3017521"/>
-            <a:ext cx="5120640" cy="457200"/>
-          </a:xfrm>
-          <a:prstGeom prst="rect">
-            <a:avLst/>
-          </a:prstGeom>
-          <a:noFill/>
-        </p:spPr>
-        <p:txBody>
-          <a:bodyPr wrap="square" lIns="45720" tIns="18288" rIns="45720" bIns="18288">
-            <a:spAutoFit/>
-          </a:bodyPr>
-          <a:lstStyle/>
-          <a:p>
-            <a:pPr algn="l"/>
-            <a:r>
-              <a:rPr sz="1700" b="1">
+            <a:off x="640080" y="2834640"/>
+            <a:ext cx="5303520" cy="457200"/>
+          </a:xfrm>
+          <a:prstGeom prst="rect">
+            <a:avLst/>
+          </a:prstGeom>
+          <a:noFill/>
+        </p:spPr>
+        <p:txBody>
+          <a:bodyPr wrap="square" lIns="45720" rIns="45720" tIns="18288" bIns="18288">
+            <a:spAutoFit/>
+          </a:bodyPr>
+          <a:lstStyle/>
+          <a:p>
+            <a:pPr algn="l"/>
+            <a:r>
+              <a:rPr sz="1600" b="1">
                 <a:solidFill>
                   <a:srgbClr val="1A4480"/>
                 </a:solidFill>
                 <a:latin typeface="Calibri"/>
               </a:rPr>
-              <a:t>🎯 Busca por significado</a:t>
+              <a:t>Vetor denso (1024d, cosine)</a:t>
             </a:r>
           </a:p>
         </p:txBody>
@@ -13528,251 +11898,65 @@
         </p:nvSpPr>
         <p:spPr>
           <a:xfrm>
-            <a:off x="731520" y="3474720"/>
-            <a:ext cx="5120640" cy="1554480"/>
-          </a:xfrm>
-          <a:prstGeom prst="rect">
-            <a:avLst/>
-          </a:prstGeom>
-          <a:noFill/>
-        </p:spPr>
-        <p:txBody>
-          <a:bodyPr wrap="square" lIns="45720" tIns="18288" rIns="45720" bIns="18288">
-            <a:spAutoFit/>
-          </a:bodyPr>
-          <a:lstStyle/>
-          <a:p>
-            <a:pPr algn="l"/>
-            <a:r>
-              <a:rPr sz="1400" b="0" dirty="0" err="1">
+            <a:off x="640080" y="3291840"/>
+            <a:ext cx="5303520" cy="1737360"/>
+          </a:xfrm>
+          <a:prstGeom prst="rect">
+            <a:avLst/>
+          </a:prstGeom>
+          <a:noFill/>
+        </p:spPr>
+        <p:txBody>
+          <a:bodyPr wrap="square" lIns="45720" rIns="45720" tIns="18288" bIns="18288">
+            <a:spAutoFit/>
+          </a:bodyPr>
+          <a:lstStyle/>
+          <a:p>
+            <a:pPr algn="l"/>
+            <a:r>
+              <a:rPr sz="1300" b="0">
                 <a:solidFill>
                   <a:srgbClr val="222222"/>
                 </a:solidFill>
                 <a:latin typeface="Calibri"/>
               </a:rPr>
-              <a:t>Pergunta</a:t>
-            </a:r>
-            <a:r>
-              <a:rPr sz="1400" b="0" dirty="0">
+              <a:t>Captura significado.</a:t>
+            </a:r>
+          </a:p>
+          <a:p>
+            <a:pPr algn="l"/>
+            <a:r>
+              <a:rPr sz="1300" b="0">
                 <a:solidFill>
                   <a:srgbClr val="222222"/>
                 </a:solidFill>
                 <a:latin typeface="Calibri"/>
               </a:rPr>
-              <a:t>: "</a:t>
-            </a:r>
-            <a:r>
-              <a:rPr sz="1400" b="0" dirty="0" err="1">
+              <a:t>"prazo de revisão" ≈ "período de reanálise".</a:t>
+            </a:r>
+          </a:p>
+          <a:p>
+            <a:pPr algn="l"/>
+            <a:r>
+              <a:rPr sz="1300" b="0">
                 <a:solidFill>
                   <a:srgbClr val="222222"/>
                 </a:solidFill>
                 <a:latin typeface="Calibri"/>
               </a:rPr>
-              <a:t>prazo</a:t>
-            </a:r>
-            <a:r>
-              <a:rPr sz="1400" b="0" dirty="0">
+              <a:t/>
+            </a:r>
+          </a:p>
+          <a:p>
+            <a:pPr algn="l"/>
+            <a:r>
+              <a:rPr sz="1300" b="0">
                 <a:solidFill>
                   <a:srgbClr val="222222"/>
                 </a:solidFill>
                 <a:latin typeface="Calibri"/>
               </a:rPr>
-              <a:t> de </a:t>
-            </a:r>
-            <a:r>
-              <a:rPr sz="1400" b="0" dirty="0" err="1">
-                <a:solidFill>
-                  <a:srgbClr val="222222"/>
-                </a:solidFill>
-                <a:latin typeface="Calibri"/>
-              </a:rPr>
-              <a:t>revisão</a:t>
-            </a:r>
-            <a:r>
-              <a:rPr sz="1400" b="0" dirty="0">
-                <a:solidFill>
-                  <a:srgbClr val="222222"/>
-                </a:solidFill>
-                <a:latin typeface="Calibri"/>
-              </a:rPr>
-              <a:t> </a:t>
-            </a:r>
-            <a:r>
-              <a:rPr sz="1400" b="0" dirty="0" err="1">
-                <a:solidFill>
-                  <a:srgbClr val="222222"/>
-                </a:solidFill>
-                <a:latin typeface="Calibri"/>
-              </a:rPr>
-              <a:t>tarifária</a:t>
-            </a:r>
-            <a:r>
-              <a:rPr sz="1400" b="0" dirty="0">
-                <a:solidFill>
-                  <a:srgbClr val="222222"/>
-                </a:solidFill>
-                <a:latin typeface="Calibri"/>
-              </a:rPr>
-              <a:t>"</a:t>
-            </a:r>
-          </a:p>
-          <a:p>
-            <a:pPr algn="l"/>
-            <a:r>
-              <a:rPr sz="1400" b="0" dirty="0" err="1">
-                <a:solidFill>
-                  <a:srgbClr val="222222"/>
-                </a:solidFill>
-                <a:latin typeface="Calibri"/>
-              </a:rPr>
-              <a:t>Encontra</a:t>
-            </a:r>
-            <a:r>
-              <a:rPr sz="1400" b="0" dirty="0">
-                <a:solidFill>
-                  <a:srgbClr val="222222"/>
-                </a:solidFill>
-                <a:latin typeface="Calibri"/>
-              </a:rPr>
-              <a:t>: "</a:t>
-            </a:r>
-            <a:r>
-              <a:rPr sz="1400" b="0" dirty="0" err="1">
-                <a:solidFill>
-                  <a:srgbClr val="222222"/>
-                </a:solidFill>
-                <a:latin typeface="Calibri"/>
-              </a:rPr>
-              <a:t>período</a:t>
-            </a:r>
-            <a:r>
-              <a:rPr sz="1400" b="0" dirty="0">
-                <a:solidFill>
-                  <a:srgbClr val="222222"/>
-                </a:solidFill>
-                <a:latin typeface="Calibri"/>
-              </a:rPr>
-              <a:t> da </a:t>
-            </a:r>
-            <a:r>
-              <a:rPr sz="1400" b="0" dirty="0" err="1">
-                <a:solidFill>
-                  <a:srgbClr val="222222"/>
-                </a:solidFill>
-                <a:latin typeface="Calibri"/>
-              </a:rPr>
-              <a:t>reanálise</a:t>
-            </a:r>
-            <a:r>
-              <a:rPr sz="1400" b="0" dirty="0">
-                <a:solidFill>
-                  <a:srgbClr val="222222"/>
-                </a:solidFill>
-                <a:latin typeface="Calibri"/>
-              </a:rPr>
-              <a:t> das </a:t>
-            </a:r>
-            <a:r>
-              <a:rPr sz="1400" b="0" dirty="0" err="1">
-                <a:solidFill>
-                  <a:srgbClr val="222222"/>
-                </a:solidFill>
-                <a:latin typeface="Calibri"/>
-              </a:rPr>
-              <a:t>tarifas</a:t>
-            </a:r>
-            <a:r>
-              <a:rPr sz="1400" b="0" dirty="0">
-                <a:solidFill>
-                  <a:srgbClr val="222222"/>
-                </a:solidFill>
-                <a:latin typeface="Calibri"/>
-              </a:rPr>
-              <a:t>"</a:t>
-            </a:r>
-          </a:p>
-          <a:p>
-            <a:pPr algn="l"/>
-            <a:endParaRPr sz="1400" b="0" dirty="0">
-              <a:solidFill>
-                <a:srgbClr val="222222"/>
-              </a:solidFill>
-              <a:latin typeface="Calibri"/>
-            </a:endParaRPr>
-          </a:p>
-          <a:p>
-            <a:pPr algn="l"/>
-            <a:r>
-              <a:rPr sz="1400" b="0" dirty="0" err="1">
-                <a:solidFill>
-                  <a:srgbClr val="222222"/>
-                </a:solidFill>
-                <a:latin typeface="Calibri"/>
-              </a:rPr>
-              <a:t>Mesmo</a:t>
-            </a:r>
-            <a:r>
-              <a:rPr sz="1400" b="0" dirty="0">
-                <a:solidFill>
-                  <a:srgbClr val="222222"/>
-                </a:solidFill>
-                <a:latin typeface="Calibri"/>
-              </a:rPr>
-              <a:t> </a:t>
-            </a:r>
-            <a:r>
-              <a:rPr sz="1400" b="0" dirty="0" err="1">
-                <a:solidFill>
-                  <a:srgbClr val="222222"/>
-                </a:solidFill>
-                <a:latin typeface="Calibri"/>
-              </a:rPr>
-              <a:t>sem</a:t>
-            </a:r>
-            <a:r>
-              <a:rPr sz="1400" b="0" dirty="0">
-                <a:solidFill>
-                  <a:srgbClr val="222222"/>
-                </a:solidFill>
-                <a:latin typeface="Calibri"/>
-              </a:rPr>
-              <a:t> </a:t>
-            </a:r>
-            <a:r>
-              <a:rPr sz="1400" b="0" dirty="0" err="1">
-                <a:solidFill>
-                  <a:srgbClr val="222222"/>
-                </a:solidFill>
-                <a:latin typeface="Calibri"/>
-              </a:rPr>
-              <a:t>palavras</a:t>
-            </a:r>
-            <a:r>
-              <a:rPr sz="1400" b="0" dirty="0">
-                <a:solidFill>
-                  <a:srgbClr val="222222"/>
-                </a:solidFill>
-                <a:latin typeface="Calibri"/>
-              </a:rPr>
-              <a:t> </a:t>
-            </a:r>
-            <a:r>
-              <a:rPr sz="1400" b="0" dirty="0" err="1">
-                <a:solidFill>
-                  <a:srgbClr val="222222"/>
-                </a:solidFill>
-                <a:latin typeface="Calibri"/>
-              </a:rPr>
-              <a:t>iguais</a:t>
-            </a:r>
-            <a:r>
-              <a:rPr sz="1400" b="0" dirty="0">
-                <a:solidFill>
-                  <a:srgbClr val="222222"/>
-                </a:solidFill>
-                <a:latin typeface="Calibri"/>
-              </a:rPr>
-              <a:t>.</a:t>
+              <a:t>Distância: cosseno · normalizado.</a:t>
             </a:r>
           </a:p>
         </p:txBody>
@@ -13785,8 +11969,8 @@
         </p:nvSpPr>
         <p:spPr>
           <a:xfrm>
-            <a:off x="6309360" y="2880361"/>
-            <a:ext cx="5486400" cy="2194560"/>
+            <a:off x="6309360" y="2743200"/>
+            <a:ext cx="5486400" cy="2286000"/>
           </a:xfrm>
           <a:prstGeom prst="roundRect">
             <a:avLst/>
@@ -13819,7 +12003,6 @@
           <a:lstStyle/>
           <a:p>
             <a:pPr algn="ctr"/>
-            <a:endParaRPr/>
           </a:p>
         </p:txBody>
       </p:sp>
@@ -13831,7 +12014,7 @@
         </p:nvSpPr>
         <p:spPr>
           <a:xfrm>
-            <a:off x="6492240" y="3017521"/>
+            <a:off x="6492240" y="2834640"/>
             <a:ext cx="5120640" cy="457200"/>
           </a:xfrm>
           <a:prstGeom prst="rect">
@@ -13840,20 +12023,20 @@
           <a:noFill/>
         </p:spPr>
         <p:txBody>
-          <a:bodyPr wrap="square" lIns="45720" tIns="18288" rIns="45720" bIns="18288">
-            <a:spAutoFit/>
-          </a:bodyPr>
-          <a:lstStyle/>
-          <a:p>
-            <a:pPr algn="l"/>
-            <a:r>
-              <a:rPr sz="1700" b="1">
+          <a:bodyPr wrap="square" lIns="45720" rIns="45720" tIns="18288" bIns="18288">
+            <a:spAutoFit/>
+          </a:bodyPr>
+          <a:lstStyle/>
+          <a:p>
+            <a:pPr algn="l"/>
+            <a:r>
+              <a:rPr sz="1600" b="1">
                 <a:solidFill>
                   <a:srgbClr val="1A4480"/>
                 </a:solidFill>
                 <a:latin typeface="Calibri"/>
               </a:rPr>
-              <a:t>🔤 Busca por palavra-chave</a:t>
+              <a:t>Vetor esparso (lexical)</a:t>
             </a:r>
           </a:p>
         </p:txBody>
@@ -13866,62 +12049,65 @@
         </p:nvSpPr>
         <p:spPr>
           <a:xfrm>
-            <a:off x="6492240" y="3474720"/>
-            <a:ext cx="5120640" cy="1554480"/>
-          </a:xfrm>
-          <a:prstGeom prst="rect">
-            <a:avLst/>
-          </a:prstGeom>
-          <a:noFill/>
-        </p:spPr>
-        <p:txBody>
-          <a:bodyPr wrap="square" lIns="45720" tIns="18288" rIns="45720" bIns="18288">
-            <a:spAutoFit/>
-          </a:bodyPr>
-          <a:lstStyle/>
-          <a:p>
-            <a:pPr algn="l"/>
-            <a:r>
-              <a:rPr sz="1400" b="0">
+            <a:off x="6492240" y="3291840"/>
+            <a:ext cx="5120640" cy="1737360"/>
+          </a:xfrm>
+          <a:prstGeom prst="rect">
+            <a:avLst/>
+          </a:prstGeom>
+          <a:noFill/>
+        </p:spPr>
+        <p:txBody>
+          <a:bodyPr wrap="square" lIns="45720" rIns="45720" tIns="18288" bIns="18288">
+            <a:spAutoFit/>
+          </a:bodyPr>
+          <a:lstStyle/>
+          <a:p>
+            <a:pPr algn="l"/>
+            <a:r>
+              <a:rPr sz="1300" b="0">
                 <a:solidFill>
                   <a:srgbClr val="222222"/>
                 </a:solidFill>
                 <a:latin typeface="Calibri"/>
               </a:rPr>
-              <a:t>Pergunta menciona "REN 1.000"</a:t>
-            </a:r>
-          </a:p>
-          <a:p>
-            <a:pPr algn="l"/>
-            <a:r>
-              <a:rPr sz="1400" b="0">
+              <a:t>Captura termos exatos.</a:t>
+            </a:r>
+          </a:p>
+          <a:p>
+            <a:pPr algn="l"/>
+            <a:r>
+              <a:rPr sz="1300" b="0">
                 <a:solidFill>
                   <a:srgbClr val="222222"/>
                 </a:solidFill>
                 <a:latin typeface="Calibri"/>
               </a:rPr>
-              <a:t>Encontra trechos com exatamente "REN 1.000".</a:t>
-            </a:r>
-          </a:p>
-          <a:p>
-            <a:pPr algn="l"/>
-            <a:endParaRPr sz="1400" b="0">
-              <a:solidFill>
-                <a:srgbClr val="222222"/>
-              </a:solidFill>
-              <a:latin typeface="Calibri"/>
-            </a:endParaRPr>
-          </a:p>
-          <a:p>
-            <a:pPr algn="l"/>
-            <a:r>
-              <a:rPr sz="1400" b="0">
+              <a:t>"REN 1.000", "bandeira tarifária", siglas.</a:t>
+            </a:r>
+          </a:p>
+          <a:p>
+            <a:pPr algn="l"/>
+            <a:r>
+              <a:rPr sz="1300" b="0">
                 <a:solidFill>
                   <a:srgbClr val="222222"/>
                 </a:solidFill>
                 <a:latin typeface="Calibri"/>
               </a:rPr>
-              <a:t>Bom pra termos técnicos e nomes próprios.</a:t>
+              <a:t/>
+            </a:r>
+          </a:p>
+          <a:p>
+            <a:pPr algn="l"/>
+            <a:r>
+              <a:rPr sz="1300" b="0">
+                <a:solidFill>
+                  <a:srgbClr val="222222"/>
+                </a:solidFill>
+                <a:latin typeface="Calibri"/>
+              </a:rPr>
+              <a:t>Substitui BM25 — nativo no Qdrant.</a:t>
             </a:r>
           </a:p>
         </p:txBody>
@@ -13934,7 +12120,7 @@
         </p:nvSpPr>
         <p:spPr>
           <a:xfrm>
-            <a:off x="548640" y="5760720"/>
+            <a:off x="457200" y="5120640"/>
             <a:ext cx="10972800" cy="365760"/>
           </a:xfrm>
           <a:prstGeom prst="rect">
@@ -13943,20 +12129,20 @@
           <a:noFill/>
         </p:spPr>
         <p:txBody>
-          <a:bodyPr wrap="square" lIns="45720" tIns="18288" rIns="45720" bIns="18288">
-            <a:spAutoFit/>
-          </a:bodyPr>
-          <a:lstStyle/>
-          <a:p>
-            <a:pPr algn="l"/>
-            <a:r>
-              <a:rPr sz="1800" b="1">
+          <a:bodyPr wrap="square" lIns="45720" rIns="45720" tIns="18288" bIns="18288">
+            <a:spAutoFit/>
+          </a:bodyPr>
+          <a:lstStyle/>
+          <a:p>
+            <a:pPr algn="l"/>
+            <a:r>
+              <a:rPr sz="1500" b="1">
                 <a:solidFill>
                   <a:srgbClr val="1A4480"/>
                 </a:solidFill>
                 <a:latin typeface="Calibri"/>
               </a:rPr>
-              <a:t>📦 Onde guardamos: Qdrant — banco de dados especializado em vetores</a:t>
+              <a:t>Decisões:</a:t>
             </a:r>
           </a:p>
         </p:txBody>
@@ -13969,29 +12155,49 @@
         </p:nvSpPr>
         <p:spPr>
           <a:xfrm>
-            <a:off x="731520" y="6172200"/>
-            <a:ext cx="10972800" cy="365760"/>
-          </a:xfrm>
-          <a:prstGeom prst="rect">
-            <a:avLst/>
-          </a:prstGeom>
-          <a:noFill/>
-        </p:spPr>
-        <p:txBody>
-          <a:bodyPr wrap="square" lIns="45720" tIns="18288" rIns="45720" bIns="18288">
-            <a:spAutoFit/>
-          </a:bodyPr>
-          <a:lstStyle/>
-          <a:p>
-            <a:pPr algn="l"/>
-            <a:r>
-              <a:rPr sz="1400" b="0">
+            <a:off x="640080" y="5486400"/>
+            <a:ext cx="11247120" cy="1280160"/>
+          </a:xfrm>
+          <a:prstGeom prst="rect">
+            <a:avLst/>
+          </a:prstGeom>
+          <a:noFill/>
+        </p:spPr>
+        <p:txBody>
+          <a:bodyPr wrap="square">
+            <a:spAutoFit/>
+          </a:bodyPr>
+          <a:lstStyle/>
+          <a:p>
+            <a:pPr>
+              <a:spcAft>
+                <a:spcPts val="400"/>
+              </a:spcAft>
+            </a:pPr>
+            <a:r>
+              <a:rPr sz="1200">
                 <a:solidFill>
                   <a:srgbClr val="222222"/>
                 </a:solidFill>
                 <a:latin typeface="Calibri"/>
               </a:rPr>
-              <a:t>Roda local (Docker), grátis. Permite filtrar por ano, documento, situação.</a:t>
+              <a:t>• BGE-M3 escolhido por: multilíngue forte em PT-BR · 8K tokens de contexto · dense+sparse no mesmo modelo · roda local (custo zero)</a:t>
+            </a:r>
+          </a:p>
+          <a:p>
+            <a:pPr>
+              <a:spcAft>
+                <a:spcPts val="400"/>
+              </a:spcAft>
+            </a:pPr>
+            <a:r>
+              <a:rPr sz="1200">
+                <a:solidFill>
+                  <a:srgbClr val="222222"/>
+                </a:solidFill>
+                <a:latin typeface="Calibri"/>
+              </a:rPr>
+              <a:t>• Qdrant escolhido por: named vectors nativos (dense + sparse na mesma coleção) · filtros estruturados (ano, doc_id, has_table) · open-source · Docker local</a:t>
             </a:r>
           </a:p>
         </p:txBody>
@@ -14013,7 +12219,7 @@
           <a:noFill/>
         </p:spPr>
         <p:txBody>
-          <a:bodyPr wrap="square" lIns="45720" tIns="18288" rIns="45720" bIns="18288">
+          <a:bodyPr wrap="square" lIns="45720" rIns="45720" tIns="18288" bIns="18288">
             <a:spAutoFit/>
           </a:bodyPr>
           <a:lstStyle/>
@@ -14048,7 +12254,7 @@
           <a:noFill/>
         </p:spPr>
         <p:txBody>
-          <a:bodyPr wrap="square" lIns="45720" tIns="18288" rIns="45720" bIns="18288">
+          <a:bodyPr wrap="square" lIns="45720" rIns="45720" tIns="18288" bIns="18288">
             <a:spAutoFit/>
           </a:bodyPr>
           <a:lstStyle/>

--- a/apresentacao.pptx
+++ b/apresentacao.pptx
@@ -5,21 +5,20 @@
     <p:sldMasterId id="2147483648" r:id="rId1"/>
   </p:sldMasterIdLst>
   <p:sldIdLst>
-    <p:sldId id="256" r:id="rId7"/>
-    <p:sldId id="257" r:id="rId8"/>
-    <p:sldId id="258" r:id="rId9"/>
-    <p:sldId id="259" r:id="rId10"/>
-    <p:sldId id="260" r:id="rId11"/>
-    <p:sldId id="261" r:id="rId12"/>
-    <p:sldId id="262" r:id="rId13"/>
-    <p:sldId id="263" r:id="rId14"/>
-    <p:sldId id="264" r:id="rId15"/>
-    <p:sldId id="265" r:id="rId16"/>
-    <p:sldId id="266" r:id="rId17"/>
-    <p:sldId id="267" r:id="rId18"/>
-    <p:sldId id="268" r:id="rId19"/>
+    <p:sldId id="256" r:id="rId2"/>
+    <p:sldId id="257" r:id="rId3"/>
+    <p:sldId id="258" r:id="rId4"/>
+    <p:sldId id="259" r:id="rId5"/>
+    <p:sldId id="260" r:id="rId6"/>
+    <p:sldId id="261" r:id="rId7"/>
+    <p:sldId id="262" r:id="rId8"/>
+    <p:sldId id="263" r:id="rId9"/>
+    <p:sldId id="264" r:id="rId10"/>
+    <p:sldId id="265" r:id="rId11"/>
+    <p:sldId id="266" r:id="rId12"/>
+    <p:sldId id="268" r:id="rId13"/>
   </p:sldIdLst>
-  <p:sldSz cx="12191695" cy="6858000" type="screen4x3"/>
+  <p:sldSz cx="12192000" cy="6858000"/>
   <p:notesSz cx="6858000" cy="9144000"/>
   <p:defaultTextStyle>
     <a:defPPr>
@@ -116,6 +115,22 @@
       </a:defRPr>
     </a:lvl9pPr>
   </p:defaultTextStyle>
+  <p:extLst>
+    <p:ext uri="{EFAFB233-063F-42B5-8137-9DF3F51BA10A}">
+      <p15:sldGuideLst xmlns:p15="http://schemas.microsoft.com/office/powerpoint/2012/main">
+        <p15:guide id="1" orient="horz" pos="2160">
+          <p15:clr>
+            <a:srgbClr val="A4A3A4"/>
+          </p15:clr>
+        </p15:guide>
+        <p15:guide id="2" pos="2880">
+          <p15:clr>
+            <a:srgbClr val="A4A3A4"/>
+          </p15:clr>
+        </p15:guide>
+      </p15:sldGuideLst>
+    </p:ext>
+  </p:extLst>
 </p:presentation>
 </file>
 
@@ -157,10 +172,9 @@
           <a:lstStyle/>
           <a:p>
             <a:r>
-              <a:rPr lang="en-US" smtClean="0"/>
+              <a:rPr lang="en-US"/>
               <a:t>Click to edit Master title style</a:t>
             </a:r>
-            <a:endParaRPr lang="en-US"/>
           </a:p>
         </p:txBody>
       </p:sp>
@@ -276,10 +290,9 @@
           </a:lstStyle>
           <a:p>
             <a:r>
-              <a:rPr lang="en-US" smtClean="0"/>
+              <a:rPr lang="en-US"/>
               <a:t>Click to edit Master subtitle style</a:t>
             </a:r>
-            <a:endParaRPr lang="en-US"/>
           </a:p>
         </p:txBody>
       </p:sp>
@@ -300,7 +313,7 @@
           <a:p>
             <a:fld id="{5BCAD085-E8A6-8845-BD4E-CB4CCA059FC4}" type="datetimeFigureOut">
               <a:rPr lang="en-US" smtClean="0"/>
-              <a:t>1/27/13</a:t>
+              <a:t>4/27/2026</a:t>
             </a:fld>
             <a:endParaRPr lang="en-US"/>
           </a:p>
@@ -342,7 +355,7 @@
           <a:p>
             <a:fld id="{C1FF6DA9-008F-8B48-92A6-B652298478BF}" type="slidenum">
               <a:rPr lang="en-US" smtClean="0"/>
-              <a:t>‹#›</a:t>
+              <a:t>‹nº›</a:t>
             </a:fld>
             <a:endParaRPr lang="en-US"/>
           </a:p>
@@ -394,10 +407,9 @@
           <a:lstStyle/>
           <a:p>
             <a:r>
-              <a:rPr lang="en-US" smtClean="0"/>
+              <a:rPr lang="en-US"/>
               <a:t>Click to edit Master title style</a:t>
             </a:r>
-            <a:endParaRPr lang="en-US"/>
           </a:p>
         </p:txBody>
       </p:sp>
@@ -418,38 +430,37 @@
           <a:p>
             <a:pPr lvl="0"/>
             <a:r>
-              <a:rPr lang="en-US" smtClean="0"/>
+              <a:rPr lang="en-US"/>
               <a:t>Click to edit Master text styles</a:t>
             </a:r>
           </a:p>
           <a:p>
             <a:pPr lvl="1"/>
             <a:r>
-              <a:rPr lang="en-US" smtClean="0"/>
+              <a:rPr lang="en-US"/>
               <a:t>Second level</a:t>
             </a:r>
           </a:p>
           <a:p>
             <a:pPr lvl="2"/>
             <a:r>
-              <a:rPr lang="en-US" smtClean="0"/>
+              <a:rPr lang="en-US"/>
               <a:t>Third level</a:t>
             </a:r>
           </a:p>
           <a:p>
             <a:pPr lvl="3"/>
             <a:r>
-              <a:rPr lang="en-US" smtClean="0"/>
+              <a:rPr lang="en-US"/>
               <a:t>Fourth level</a:t>
             </a:r>
           </a:p>
           <a:p>
             <a:pPr lvl="4"/>
             <a:r>
-              <a:rPr lang="en-US" smtClean="0"/>
+              <a:rPr lang="en-US"/>
               <a:t>Fifth level</a:t>
             </a:r>
-            <a:endParaRPr lang="en-US"/>
           </a:p>
         </p:txBody>
       </p:sp>
@@ -470,7 +481,7 @@
           <a:p>
             <a:fld id="{5BCAD085-E8A6-8845-BD4E-CB4CCA059FC4}" type="datetimeFigureOut">
               <a:rPr lang="en-US" smtClean="0"/>
-              <a:t>1/27/13</a:t>
+              <a:t>4/27/2026</a:t>
             </a:fld>
             <a:endParaRPr lang="en-US"/>
           </a:p>
@@ -512,7 +523,7 @@
           <a:p>
             <a:fld id="{C1FF6DA9-008F-8B48-92A6-B652298478BF}" type="slidenum">
               <a:rPr lang="en-US" smtClean="0"/>
-              <a:t>‹#›</a:t>
+              <a:t>‹nº›</a:t>
             </a:fld>
             <a:endParaRPr lang="en-US"/>
           </a:p>
@@ -569,10 +580,9 @@
           <a:lstStyle/>
           <a:p>
             <a:r>
-              <a:rPr lang="en-US" smtClean="0"/>
+              <a:rPr lang="en-US"/>
               <a:t>Click to edit Master title style</a:t>
             </a:r>
-            <a:endParaRPr lang="en-US"/>
           </a:p>
         </p:txBody>
       </p:sp>
@@ -598,38 +608,37 @@
           <a:p>
             <a:pPr lvl="0"/>
             <a:r>
-              <a:rPr lang="en-US" smtClean="0"/>
+              <a:rPr lang="en-US"/>
               <a:t>Click to edit Master text styles</a:t>
             </a:r>
           </a:p>
           <a:p>
             <a:pPr lvl="1"/>
             <a:r>
-              <a:rPr lang="en-US" smtClean="0"/>
+              <a:rPr lang="en-US"/>
               <a:t>Second level</a:t>
             </a:r>
           </a:p>
           <a:p>
             <a:pPr lvl="2"/>
             <a:r>
-              <a:rPr lang="en-US" smtClean="0"/>
+              <a:rPr lang="en-US"/>
               <a:t>Third level</a:t>
             </a:r>
           </a:p>
           <a:p>
             <a:pPr lvl="3"/>
             <a:r>
-              <a:rPr lang="en-US" smtClean="0"/>
+              <a:rPr lang="en-US"/>
               <a:t>Fourth level</a:t>
             </a:r>
           </a:p>
           <a:p>
             <a:pPr lvl="4"/>
             <a:r>
-              <a:rPr lang="en-US" smtClean="0"/>
+              <a:rPr lang="en-US"/>
               <a:t>Fifth level</a:t>
             </a:r>
-            <a:endParaRPr lang="en-US"/>
           </a:p>
         </p:txBody>
       </p:sp>
@@ -650,7 +659,7 @@
           <a:p>
             <a:fld id="{5BCAD085-E8A6-8845-BD4E-CB4CCA059FC4}" type="datetimeFigureOut">
               <a:rPr lang="en-US" smtClean="0"/>
-              <a:t>1/27/13</a:t>
+              <a:t>4/27/2026</a:t>
             </a:fld>
             <a:endParaRPr lang="en-US"/>
           </a:p>
@@ -692,7 +701,7 @@
           <a:p>
             <a:fld id="{C1FF6DA9-008F-8B48-92A6-B652298478BF}" type="slidenum">
               <a:rPr lang="en-US" smtClean="0"/>
-              <a:t>‹#›</a:t>
+              <a:t>‹nº›</a:t>
             </a:fld>
             <a:endParaRPr lang="en-US"/>
           </a:p>
@@ -744,10 +753,9 @@
           <a:lstStyle/>
           <a:p>
             <a:r>
-              <a:rPr lang="en-US" smtClean="0"/>
+              <a:rPr lang="en-US"/>
               <a:t>Click to edit Master title style</a:t>
             </a:r>
-            <a:endParaRPr lang="en-US"/>
           </a:p>
         </p:txBody>
       </p:sp>
@@ -768,38 +776,37 @@
           <a:p>
             <a:pPr lvl="0"/>
             <a:r>
-              <a:rPr lang="en-US" smtClean="0"/>
+              <a:rPr lang="en-US"/>
               <a:t>Click to edit Master text styles</a:t>
             </a:r>
           </a:p>
           <a:p>
             <a:pPr lvl="1"/>
             <a:r>
-              <a:rPr lang="en-US" smtClean="0"/>
+              <a:rPr lang="en-US"/>
               <a:t>Second level</a:t>
             </a:r>
           </a:p>
           <a:p>
             <a:pPr lvl="2"/>
             <a:r>
-              <a:rPr lang="en-US" smtClean="0"/>
+              <a:rPr lang="en-US"/>
               <a:t>Third level</a:t>
             </a:r>
           </a:p>
           <a:p>
             <a:pPr lvl="3"/>
             <a:r>
-              <a:rPr lang="en-US" smtClean="0"/>
+              <a:rPr lang="en-US"/>
               <a:t>Fourth level</a:t>
             </a:r>
           </a:p>
           <a:p>
             <a:pPr lvl="4"/>
             <a:r>
-              <a:rPr lang="en-US" smtClean="0"/>
+              <a:rPr lang="en-US"/>
               <a:t>Fifth level</a:t>
             </a:r>
-            <a:endParaRPr lang="en-US"/>
           </a:p>
         </p:txBody>
       </p:sp>
@@ -820,7 +827,7 @@
           <a:p>
             <a:fld id="{5BCAD085-E8A6-8845-BD4E-CB4CCA059FC4}" type="datetimeFigureOut">
               <a:rPr lang="en-US" smtClean="0"/>
-              <a:t>1/27/13</a:t>
+              <a:t>4/27/2026</a:t>
             </a:fld>
             <a:endParaRPr lang="en-US"/>
           </a:p>
@@ -862,7 +869,7 @@
           <a:p>
             <a:fld id="{C1FF6DA9-008F-8B48-92A6-B652298478BF}" type="slidenum">
               <a:rPr lang="en-US" smtClean="0"/>
-              <a:t>‹#›</a:t>
+              <a:t>‹nº›</a:t>
             </a:fld>
             <a:endParaRPr lang="en-US"/>
           </a:p>
@@ -923,10 +930,9 @@
           </a:lstStyle>
           <a:p>
             <a:r>
-              <a:rPr lang="en-US" smtClean="0"/>
+              <a:rPr lang="en-US"/>
               <a:t>Click to edit Master title style</a:t>
             </a:r>
-            <a:endParaRPr lang="en-US"/>
           </a:p>
         </p:txBody>
       </p:sp>
@@ -1043,7 +1049,7 @@
           <a:p>
             <a:pPr lvl="0"/>
             <a:r>
-              <a:rPr lang="en-US" smtClean="0"/>
+              <a:rPr lang="en-US"/>
               <a:t>Click to edit Master text styles</a:t>
             </a:r>
           </a:p>
@@ -1066,7 +1072,7 @@
           <a:p>
             <a:fld id="{5BCAD085-E8A6-8845-BD4E-CB4CCA059FC4}" type="datetimeFigureOut">
               <a:rPr lang="en-US" smtClean="0"/>
-              <a:t>1/27/13</a:t>
+              <a:t>4/27/2026</a:t>
             </a:fld>
             <a:endParaRPr lang="en-US"/>
           </a:p>
@@ -1108,7 +1114,7 @@
           <a:p>
             <a:fld id="{C1FF6DA9-008F-8B48-92A6-B652298478BF}" type="slidenum">
               <a:rPr lang="en-US" smtClean="0"/>
-              <a:t>‹#›</a:t>
+              <a:t>‹nº›</a:t>
             </a:fld>
             <a:endParaRPr lang="en-US"/>
           </a:p>
@@ -1160,10 +1166,9 @@
           <a:lstStyle/>
           <a:p>
             <a:r>
-              <a:rPr lang="en-US" smtClean="0"/>
+              <a:rPr lang="en-US"/>
               <a:t>Click to edit Master title style</a:t>
             </a:r>
-            <a:endParaRPr lang="en-US"/>
           </a:p>
         </p:txBody>
       </p:sp>
@@ -1217,38 +1222,37 @@
           <a:p>
             <a:pPr lvl="0"/>
             <a:r>
-              <a:rPr lang="en-US" smtClean="0"/>
+              <a:rPr lang="en-US"/>
               <a:t>Click to edit Master text styles</a:t>
             </a:r>
           </a:p>
           <a:p>
             <a:pPr lvl="1"/>
             <a:r>
-              <a:rPr lang="en-US" smtClean="0"/>
+              <a:rPr lang="en-US"/>
               <a:t>Second level</a:t>
             </a:r>
           </a:p>
           <a:p>
             <a:pPr lvl="2"/>
             <a:r>
-              <a:rPr lang="en-US" smtClean="0"/>
+              <a:rPr lang="en-US"/>
               <a:t>Third level</a:t>
             </a:r>
           </a:p>
           <a:p>
             <a:pPr lvl="3"/>
             <a:r>
-              <a:rPr lang="en-US" smtClean="0"/>
+              <a:rPr lang="en-US"/>
               <a:t>Fourth level</a:t>
             </a:r>
           </a:p>
           <a:p>
             <a:pPr lvl="4"/>
             <a:r>
-              <a:rPr lang="en-US" smtClean="0"/>
+              <a:rPr lang="en-US"/>
               <a:t>Fifth level</a:t>
             </a:r>
-            <a:endParaRPr lang="en-US"/>
           </a:p>
         </p:txBody>
       </p:sp>
@@ -1302,38 +1306,37 @@
           <a:p>
             <a:pPr lvl="0"/>
             <a:r>
-              <a:rPr lang="en-US" smtClean="0"/>
+              <a:rPr lang="en-US"/>
               <a:t>Click to edit Master text styles</a:t>
             </a:r>
           </a:p>
           <a:p>
             <a:pPr lvl="1"/>
             <a:r>
-              <a:rPr lang="en-US" smtClean="0"/>
+              <a:rPr lang="en-US"/>
               <a:t>Second level</a:t>
             </a:r>
           </a:p>
           <a:p>
             <a:pPr lvl="2"/>
             <a:r>
-              <a:rPr lang="en-US" smtClean="0"/>
+              <a:rPr lang="en-US"/>
               <a:t>Third level</a:t>
             </a:r>
           </a:p>
           <a:p>
             <a:pPr lvl="3"/>
             <a:r>
-              <a:rPr lang="en-US" smtClean="0"/>
+              <a:rPr lang="en-US"/>
               <a:t>Fourth level</a:t>
             </a:r>
           </a:p>
           <a:p>
             <a:pPr lvl="4"/>
             <a:r>
-              <a:rPr lang="en-US" smtClean="0"/>
+              <a:rPr lang="en-US"/>
               <a:t>Fifth level</a:t>
             </a:r>
-            <a:endParaRPr lang="en-US"/>
           </a:p>
         </p:txBody>
       </p:sp>
@@ -1354,7 +1357,7 @@
           <a:p>
             <a:fld id="{5BCAD085-E8A6-8845-BD4E-CB4CCA059FC4}" type="datetimeFigureOut">
               <a:rPr lang="en-US" smtClean="0"/>
-              <a:t>1/27/13</a:t>
+              <a:t>4/27/2026</a:t>
             </a:fld>
             <a:endParaRPr lang="en-US"/>
           </a:p>
@@ -1396,7 +1399,7 @@
           <a:p>
             <a:fld id="{C1FF6DA9-008F-8B48-92A6-B652298478BF}" type="slidenum">
               <a:rPr lang="en-US" smtClean="0"/>
-              <a:t>‹#›</a:t>
+              <a:t>‹nº›</a:t>
             </a:fld>
             <a:endParaRPr lang="en-US"/>
           </a:p>
@@ -1452,10 +1455,9 @@
           </a:lstStyle>
           <a:p>
             <a:r>
-              <a:rPr lang="en-US" smtClean="0"/>
+              <a:rPr lang="en-US"/>
               <a:t>Click to edit Master title style</a:t>
             </a:r>
-            <a:endParaRPr lang="en-US"/>
           </a:p>
         </p:txBody>
       </p:sp>
@@ -1518,7 +1520,7 @@
           <a:p>
             <a:pPr lvl="0"/>
             <a:r>
-              <a:rPr lang="en-US" smtClean="0"/>
+              <a:rPr lang="en-US"/>
               <a:t>Click to edit Master text styles</a:t>
             </a:r>
           </a:p>
@@ -1574,38 +1576,37 @@
           <a:p>
             <a:pPr lvl="0"/>
             <a:r>
-              <a:rPr lang="en-US" smtClean="0"/>
+              <a:rPr lang="en-US"/>
               <a:t>Click to edit Master text styles</a:t>
             </a:r>
           </a:p>
           <a:p>
             <a:pPr lvl="1"/>
             <a:r>
-              <a:rPr lang="en-US" smtClean="0"/>
+              <a:rPr lang="en-US"/>
               <a:t>Second level</a:t>
             </a:r>
           </a:p>
           <a:p>
             <a:pPr lvl="2"/>
             <a:r>
-              <a:rPr lang="en-US" smtClean="0"/>
+              <a:rPr lang="en-US"/>
               <a:t>Third level</a:t>
             </a:r>
           </a:p>
           <a:p>
             <a:pPr lvl="3"/>
             <a:r>
-              <a:rPr lang="en-US" smtClean="0"/>
+              <a:rPr lang="en-US"/>
               <a:t>Fourth level</a:t>
             </a:r>
           </a:p>
           <a:p>
             <a:pPr lvl="4"/>
             <a:r>
-              <a:rPr lang="en-US" smtClean="0"/>
+              <a:rPr lang="en-US"/>
               <a:t>Fifth level</a:t>
             </a:r>
-            <a:endParaRPr lang="en-US"/>
           </a:p>
         </p:txBody>
       </p:sp>
@@ -1668,7 +1669,7 @@
           <a:p>
             <a:pPr lvl="0"/>
             <a:r>
-              <a:rPr lang="en-US" smtClean="0"/>
+              <a:rPr lang="en-US"/>
               <a:t>Click to edit Master text styles</a:t>
             </a:r>
           </a:p>
@@ -1724,38 +1725,37 @@
           <a:p>
             <a:pPr lvl="0"/>
             <a:r>
-              <a:rPr lang="en-US" smtClean="0"/>
+              <a:rPr lang="en-US"/>
               <a:t>Click to edit Master text styles</a:t>
             </a:r>
           </a:p>
           <a:p>
             <a:pPr lvl="1"/>
             <a:r>
-              <a:rPr lang="en-US" smtClean="0"/>
+              <a:rPr lang="en-US"/>
               <a:t>Second level</a:t>
             </a:r>
           </a:p>
           <a:p>
             <a:pPr lvl="2"/>
             <a:r>
-              <a:rPr lang="en-US" smtClean="0"/>
+              <a:rPr lang="en-US"/>
               <a:t>Third level</a:t>
             </a:r>
           </a:p>
           <a:p>
             <a:pPr lvl="3"/>
             <a:r>
-              <a:rPr lang="en-US" smtClean="0"/>
+              <a:rPr lang="en-US"/>
               <a:t>Fourth level</a:t>
             </a:r>
           </a:p>
           <a:p>
             <a:pPr lvl="4"/>
             <a:r>
-              <a:rPr lang="en-US" smtClean="0"/>
+              <a:rPr lang="en-US"/>
               <a:t>Fifth level</a:t>
             </a:r>
-            <a:endParaRPr lang="en-US"/>
           </a:p>
         </p:txBody>
       </p:sp>
@@ -1776,7 +1776,7 @@
           <a:p>
             <a:fld id="{5BCAD085-E8A6-8845-BD4E-CB4CCA059FC4}" type="datetimeFigureOut">
               <a:rPr lang="en-US" smtClean="0"/>
-              <a:t>1/27/13</a:t>
+              <a:t>4/27/2026</a:t>
             </a:fld>
             <a:endParaRPr lang="en-US"/>
           </a:p>
@@ -1818,7 +1818,7 @@
           <a:p>
             <a:fld id="{C1FF6DA9-008F-8B48-92A6-B652298478BF}" type="slidenum">
               <a:rPr lang="en-US" smtClean="0"/>
-              <a:t>‹#›</a:t>
+              <a:t>‹nº›</a:t>
             </a:fld>
             <a:endParaRPr lang="en-US"/>
           </a:p>
@@ -1870,10 +1870,9 @@
           <a:lstStyle/>
           <a:p>
             <a:r>
-              <a:rPr lang="en-US" smtClean="0"/>
+              <a:rPr lang="en-US"/>
               <a:t>Click to edit Master title style</a:t>
             </a:r>
-            <a:endParaRPr lang="en-US"/>
           </a:p>
         </p:txBody>
       </p:sp>
@@ -1894,7 +1893,7 @@
           <a:p>
             <a:fld id="{5BCAD085-E8A6-8845-BD4E-CB4CCA059FC4}" type="datetimeFigureOut">
               <a:rPr lang="en-US" smtClean="0"/>
-              <a:t>1/27/13</a:t>
+              <a:t>4/27/2026</a:t>
             </a:fld>
             <a:endParaRPr lang="en-US"/>
           </a:p>
@@ -1936,7 +1935,7 @@
           <a:p>
             <a:fld id="{C1FF6DA9-008F-8B48-92A6-B652298478BF}" type="slidenum">
               <a:rPr lang="en-US" smtClean="0"/>
-              <a:t>‹#›</a:t>
+              <a:t>‹nº›</a:t>
             </a:fld>
             <a:endParaRPr lang="en-US"/>
           </a:p>
@@ -1989,7 +1988,7 @@
           <a:p>
             <a:fld id="{5BCAD085-E8A6-8845-BD4E-CB4CCA059FC4}" type="datetimeFigureOut">
               <a:rPr lang="en-US" smtClean="0"/>
-              <a:t>1/27/13</a:t>
+              <a:t>4/27/2026</a:t>
             </a:fld>
             <a:endParaRPr lang="en-US"/>
           </a:p>
@@ -2031,7 +2030,7 @@
           <a:p>
             <a:fld id="{C1FF6DA9-008F-8B48-92A6-B652298478BF}" type="slidenum">
               <a:rPr lang="en-US" smtClean="0"/>
-              <a:t>‹#›</a:t>
+              <a:t>‹nº›</a:t>
             </a:fld>
             <a:endParaRPr lang="en-US"/>
           </a:p>
@@ -2092,10 +2091,9 @@
           </a:lstStyle>
           <a:p>
             <a:r>
-              <a:rPr lang="en-US" smtClean="0"/>
+              <a:rPr lang="en-US"/>
               <a:t>Click to edit Master title style</a:t>
             </a:r>
-            <a:endParaRPr lang="en-US"/>
           </a:p>
         </p:txBody>
       </p:sp>
@@ -2149,38 +2147,37 @@
           <a:p>
             <a:pPr lvl="0"/>
             <a:r>
-              <a:rPr lang="en-US" smtClean="0"/>
+              <a:rPr lang="en-US"/>
               <a:t>Click to edit Master text styles</a:t>
             </a:r>
           </a:p>
           <a:p>
             <a:pPr lvl="1"/>
             <a:r>
-              <a:rPr lang="en-US" smtClean="0"/>
+              <a:rPr lang="en-US"/>
               <a:t>Second level</a:t>
             </a:r>
           </a:p>
           <a:p>
             <a:pPr lvl="2"/>
             <a:r>
-              <a:rPr lang="en-US" smtClean="0"/>
+              <a:rPr lang="en-US"/>
               <a:t>Third level</a:t>
             </a:r>
           </a:p>
           <a:p>
             <a:pPr lvl="3"/>
             <a:r>
-              <a:rPr lang="en-US" smtClean="0"/>
+              <a:rPr lang="en-US"/>
               <a:t>Fourth level</a:t>
             </a:r>
           </a:p>
           <a:p>
             <a:pPr lvl="4"/>
             <a:r>
-              <a:rPr lang="en-US" smtClean="0"/>
+              <a:rPr lang="en-US"/>
               <a:t>Fifth level</a:t>
             </a:r>
-            <a:endParaRPr lang="en-US"/>
           </a:p>
         </p:txBody>
       </p:sp>
@@ -2243,7 +2240,7 @@
           <a:p>
             <a:pPr lvl="0"/>
             <a:r>
-              <a:rPr lang="en-US" smtClean="0"/>
+              <a:rPr lang="en-US"/>
               <a:t>Click to edit Master text styles</a:t>
             </a:r>
           </a:p>
@@ -2266,7 +2263,7 @@
           <a:p>
             <a:fld id="{5BCAD085-E8A6-8845-BD4E-CB4CCA059FC4}" type="datetimeFigureOut">
               <a:rPr lang="en-US" smtClean="0"/>
-              <a:t>1/27/13</a:t>
+              <a:t>4/27/2026</a:t>
             </a:fld>
             <a:endParaRPr lang="en-US"/>
           </a:p>
@@ -2308,7 +2305,7 @@
           <a:p>
             <a:fld id="{C1FF6DA9-008F-8B48-92A6-B652298478BF}" type="slidenum">
               <a:rPr lang="en-US" smtClean="0"/>
-              <a:t>‹#›</a:t>
+              <a:t>‹nº›</a:t>
             </a:fld>
             <a:endParaRPr lang="en-US"/>
           </a:p>
@@ -2369,10 +2366,9 @@
           </a:lstStyle>
           <a:p>
             <a:r>
-              <a:rPr lang="en-US" smtClean="0"/>
+              <a:rPr lang="en-US"/>
               <a:t>Click to edit Master title style</a:t>
             </a:r>
-            <a:endParaRPr lang="en-US"/>
           </a:p>
         </p:txBody>
       </p:sp>
@@ -2496,7 +2492,7 @@
           <a:p>
             <a:pPr lvl="0"/>
             <a:r>
-              <a:rPr lang="en-US" smtClean="0"/>
+              <a:rPr lang="en-US"/>
               <a:t>Click to edit Master text styles</a:t>
             </a:r>
           </a:p>
@@ -2519,7 +2515,7 @@
           <a:p>
             <a:fld id="{5BCAD085-E8A6-8845-BD4E-CB4CCA059FC4}" type="datetimeFigureOut">
               <a:rPr lang="en-US" smtClean="0"/>
-              <a:t>1/27/13</a:t>
+              <a:t>4/27/2026</a:t>
             </a:fld>
             <a:endParaRPr lang="en-US"/>
           </a:p>
@@ -2561,7 +2557,7 @@
           <a:p>
             <a:fld id="{C1FF6DA9-008F-8B48-92A6-B652298478BF}" type="slidenum">
               <a:rPr lang="en-US" smtClean="0"/>
-              <a:t>‹#›</a:t>
+              <a:t>‹nº›</a:t>
             </a:fld>
             <a:endParaRPr lang="en-US"/>
           </a:p>
@@ -2628,10 +2624,9 @@
           <a:lstStyle/>
           <a:p>
             <a:r>
-              <a:rPr lang="en-US" smtClean="0"/>
+              <a:rPr lang="en-US"/>
               <a:t>Click to edit Master title style</a:t>
             </a:r>
-            <a:endParaRPr lang="en-US"/>
           </a:p>
         </p:txBody>
       </p:sp>
@@ -2662,38 +2657,37 @@
           <a:p>
             <a:pPr lvl="0"/>
             <a:r>
-              <a:rPr lang="en-US" smtClean="0"/>
+              <a:rPr lang="en-US"/>
               <a:t>Click to edit Master text styles</a:t>
             </a:r>
           </a:p>
           <a:p>
             <a:pPr lvl="1"/>
             <a:r>
-              <a:rPr lang="en-US" smtClean="0"/>
+              <a:rPr lang="en-US"/>
               <a:t>Second level</a:t>
             </a:r>
           </a:p>
           <a:p>
             <a:pPr lvl="2"/>
             <a:r>
-              <a:rPr lang="en-US" smtClean="0"/>
+              <a:rPr lang="en-US"/>
               <a:t>Third level</a:t>
             </a:r>
           </a:p>
           <a:p>
             <a:pPr lvl="3"/>
             <a:r>
-              <a:rPr lang="en-US" smtClean="0"/>
+              <a:rPr lang="en-US"/>
               <a:t>Fourth level</a:t>
             </a:r>
           </a:p>
           <a:p>
             <a:pPr lvl="4"/>
             <a:r>
-              <a:rPr lang="en-US" smtClean="0"/>
+              <a:rPr lang="en-US"/>
               <a:t>Fifth level</a:t>
             </a:r>
-            <a:endParaRPr lang="en-US"/>
           </a:p>
         </p:txBody>
       </p:sp>
@@ -2732,7 +2726,7 @@
           <a:p>
             <a:fld id="{5BCAD085-E8A6-8845-BD4E-CB4CCA059FC4}" type="datetimeFigureOut">
               <a:rPr lang="en-US" smtClean="0"/>
-              <a:t>1/27/13</a:t>
+              <a:t>4/27/2026</a:t>
             </a:fld>
             <a:endParaRPr lang="en-US"/>
           </a:p>
@@ -2810,7 +2804,7 @@
           <a:p>
             <a:fld id="{C1FF6DA9-008F-8B48-92A6-B652298478BF}" type="slidenum">
               <a:rPr lang="en-US" smtClean="0"/>
-              <a:t>‹#›</a:t>
+              <a:t>‹nº›</a:t>
             </a:fld>
             <a:endParaRPr lang="en-US"/>
           </a:p>
@@ -3091,7 +3085,7 @@
 </file>
 
 <file path=ppt/slides/slide1.xml><?xml version="1.0" encoding="utf-8"?>
-<p:sld xmlns:a="http://schemas.openxmlformats.org/drawingml/2006/main" xmlns:p="http://schemas.openxmlformats.org/presentationml/2006/main" xmlns:r="http://schemas.openxmlformats.org/officeDocument/2006/relationships">
+<p:sld xmlns:a="http://schemas.openxmlformats.org/drawingml/2006/main" xmlns:r="http://schemas.openxmlformats.org/officeDocument/2006/relationships" xmlns:p="http://schemas.openxmlformats.org/presentationml/2006/main">
   <p:cSld>
     <p:spTree>
       <p:nvGrpSpPr>
@@ -3099,7 +3093,14 @@
         <p:cNvGrpSpPr/>
         <p:nvPr/>
       </p:nvGrpSpPr>
-      <p:grpSpPr/>
+      <p:grpSpPr>
+        <a:xfrm>
+          <a:off x="0" y="0"/>
+          <a:ext cx="0" cy="0"/>
+          <a:chOff x="0" y="0"/>
+          <a:chExt cx="0" cy="0"/>
+        </a:xfrm>
+      </p:grpSpPr>
       <p:sp>
         <p:nvSpPr>
           <p:cNvPr id="2" name="Rectangle 1"/>
@@ -3140,6 +3141,7 @@
           <a:lstStyle/>
           <a:p>
             <a:pPr algn="ctr"/>
+            <a:endParaRPr/>
           </a:p>
         </p:txBody>
       </p:sp>
@@ -3183,6 +3185,7 @@
           <a:lstStyle/>
           <a:p>
             <a:pPr algn="ctr"/>
+            <a:endParaRPr/>
           </a:p>
         </p:txBody>
       </p:sp>
@@ -3203,7 +3206,7 @@
           <a:noFill/>
         </p:spPr>
         <p:txBody>
-          <a:bodyPr wrap="square" lIns="45720" rIns="45720" tIns="18288" bIns="18288">
+          <a:bodyPr wrap="square" lIns="45720" tIns="18288" rIns="45720" bIns="18288">
             <a:spAutoFit/>
           </a:bodyPr>
           <a:lstStyle/>
@@ -3238,7 +3241,7 @@
           <a:noFill/>
         </p:spPr>
         <p:txBody>
-          <a:bodyPr wrap="square" lIns="45720" rIns="45720" tIns="18288" bIns="18288">
+          <a:bodyPr wrap="square" lIns="45720" tIns="18288" rIns="45720" bIns="18288">
             <a:spAutoFit/>
           </a:bodyPr>
           <a:lstStyle/>
@@ -3273,7 +3276,7 @@
           <a:noFill/>
         </p:spPr>
         <p:txBody>
-          <a:bodyPr wrap="square" lIns="45720" rIns="45720" tIns="18288" bIns="18288">
+          <a:bodyPr wrap="square" lIns="45720" tIns="18288" rIns="45720" bIns="18288">
             <a:spAutoFit/>
           </a:bodyPr>
           <a:lstStyle/>
@@ -3300,7 +3303,7 @@
 </file>
 
 <file path=ppt/slides/slide10.xml><?xml version="1.0" encoding="utf-8"?>
-<p:sld xmlns:a="http://schemas.openxmlformats.org/drawingml/2006/main" xmlns:p="http://schemas.openxmlformats.org/presentationml/2006/main" xmlns:r="http://schemas.openxmlformats.org/officeDocument/2006/relationships">
+<p:sld xmlns:a="http://schemas.openxmlformats.org/drawingml/2006/main" xmlns:r="http://schemas.openxmlformats.org/officeDocument/2006/relationships" xmlns:p="http://schemas.openxmlformats.org/presentationml/2006/main">
   <p:cSld>
     <p:spTree>
       <p:nvGrpSpPr>
@@ -3308,7 +3311,14 @@
         <p:cNvGrpSpPr/>
         <p:nvPr/>
       </p:nvGrpSpPr>
-      <p:grpSpPr/>
+      <p:grpSpPr>
+        <a:xfrm>
+          <a:off x="0" y="0"/>
+          <a:ext cx="0" cy="0"/>
+          <a:chOff x="0" y="0"/>
+          <a:chExt cx="0" cy="0"/>
+        </a:xfrm>
+      </p:grpSpPr>
       <p:sp>
         <p:nvSpPr>
           <p:cNvPr id="2" name="Rectangle 1"/>
@@ -3349,6 +3359,7 @@
           <a:lstStyle/>
           <a:p>
             <a:pPr algn="ctr"/>
+            <a:endParaRPr/>
           </a:p>
         </p:txBody>
       </p:sp>
@@ -3369,7 +3380,7 @@
           <a:noFill/>
         </p:spPr>
         <p:txBody>
-          <a:bodyPr wrap="square" lIns="45720" rIns="45720" tIns="18288" bIns="18288">
+          <a:bodyPr wrap="square" lIns="45720" tIns="18288" rIns="45720" bIns="18288">
             <a:spAutoFit/>
           </a:bodyPr>
           <a:lstStyle/>
@@ -3404,7 +3415,7 @@
           <a:noFill/>
         </p:spPr>
         <p:txBody>
-          <a:bodyPr wrap="square" lIns="45720" rIns="45720" tIns="18288" bIns="18288">
+          <a:bodyPr wrap="square" lIns="45720" tIns="18288" rIns="45720" bIns="18288">
             <a:spAutoFit/>
           </a:bodyPr>
           <a:lstStyle/>
@@ -3458,7 +3469,7 @@
           </a:fontRef>
         </p:style>
         <p:txBody>
-          <a:bodyPr rtlCol="0" anchor="ctr" lIns="45720"/>
+          <a:bodyPr lIns="45720" rtlCol="0" anchor="ctr"/>
           <a:lstStyle/>
           <a:p>
             <a:pPr algn="ctr"/>
@@ -3509,7 +3520,7 @@
           </a:fontRef>
         </p:style>
         <p:txBody>
-          <a:bodyPr rtlCol="0" anchor="ctr" lIns="45720"/>
+          <a:bodyPr lIns="45720" rtlCol="0" anchor="ctr"/>
           <a:lstStyle/>
           <a:p>
             <a:pPr algn="ctr"/>
@@ -3571,7 +3582,7 @@
           </a:fontRef>
         </p:style>
         <p:txBody>
-          <a:bodyPr rtlCol="0" anchor="ctr" lIns="45720"/>
+          <a:bodyPr lIns="45720" rtlCol="0" anchor="ctr"/>
           <a:lstStyle/>
           <a:p>
             <a:pPr algn="ctr"/>
@@ -3633,7 +3644,7 @@
           </a:fontRef>
         </p:style>
         <p:txBody>
-          <a:bodyPr rtlCol="0" anchor="ctr" lIns="45720"/>
+          <a:bodyPr lIns="45720" rtlCol="0" anchor="ctr"/>
           <a:lstStyle/>
           <a:p>
             <a:pPr algn="ctr"/>
@@ -3695,7 +3706,7 @@
           </a:fontRef>
         </p:style>
         <p:txBody>
-          <a:bodyPr rtlCol="0" anchor="ctr" lIns="45720"/>
+          <a:bodyPr lIns="45720" rtlCol="0" anchor="ctr"/>
           <a:lstStyle/>
           <a:p>
             <a:pPr algn="ctr"/>
@@ -3757,7 +3768,7 @@
           </a:fontRef>
         </p:style>
         <p:txBody>
-          <a:bodyPr rtlCol="0" anchor="ctr" lIns="45720"/>
+          <a:bodyPr lIns="45720" rtlCol="0" anchor="ctr"/>
           <a:lstStyle/>
           <a:p>
             <a:pPr algn="ctr"/>
@@ -3819,18 +3830,31 @@
           </a:fontRef>
         </p:style>
         <p:txBody>
-          <a:bodyPr rtlCol="0" anchor="ctr" lIns="45720"/>
+          <a:bodyPr lIns="45720" rtlCol="0" anchor="ctr"/>
           <a:lstStyle/>
           <a:p>
             <a:pPr algn="ctr"/>
             <a:r>
-              <a:rPr sz="1300" b="1">
+              <a:rPr sz="1300" b="1" dirty="0">
                 <a:solidFill>
                   <a:srgbClr val="FFFFFF"/>
                 </a:solidFill>
               </a:rPr>
-              <a:t>Top 6</a:t>
-            </a:r>
+              <a:t>Top </a:t>
+            </a:r>
+            <a:r>
+              <a:rPr lang="pt-BR" sz="1300" b="1" dirty="0">
+                <a:solidFill>
+                  <a:srgbClr val="FFFFFF"/>
+                </a:solidFill>
+              </a:rPr>
+              <a:t>K</a:t>
+            </a:r>
+            <a:endParaRPr sz="1300" b="1" dirty="0">
+              <a:solidFill>
+                <a:srgbClr val="FFFFFF"/>
+              </a:solidFill>
+            </a:endParaRPr>
           </a:p>
         </p:txBody>
       </p:sp>
@@ -3851,7 +3875,7 @@
           <a:noFill/>
         </p:spPr>
         <p:txBody>
-          <a:bodyPr wrap="square" lIns="45720" rIns="45720" tIns="18288" bIns="18288">
+          <a:bodyPr wrap="square" lIns="45720" tIns="18288" rIns="45720" bIns="18288">
             <a:spAutoFit/>
           </a:bodyPr>
           <a:lstStyle/>
@@ -3989,7 +4013,7 @@
           <a:noFill/>
         </p:spPr>
         <p:txBody>
-          <a:bodyPr wrap="square" lIns="45720" rIns="45720" tIns="18288" bIns="18288">
+          <a:bodyPr wrap="square" lIns="45720" tIns="18288" rIns="45720" bIns="18288">
             <a:spAutoFit/>
           </a:bodyPr>
           <a:lstStyle/>
@@ -4024,7 +4048,7 @@
           <a:noFill/>
         </p:spPr>
         <p:txBody>
-          <a:bodyPr wrap="square" lIns="45720" rIns="45720" tIns="18288" bIns="18288">
+          <a:bodyPr wrap="square" lIns="45720" tIns="18288" rIns="45720" bIns="18288">
             <a:spAutoFit/>
           </a:bodyPr>
           <a:lstStyle/>
@@ -4051,7 +4075,7 @@
 </file>
 
 <file path=ppt/slides/slide11.xml><?xml version="1.0" encoding="utf-8"?>
-<p:sld xmlns:a="http://schemas.openxmlformats.org/drawingml/2006/main" xmlns:p="http://schemas.openxmlformats.org/presentationml/2006/main" xmlns:r="http://schemas.openxmlformats.org/officeDocument/2006/relationships">
+<p:sld xmlns:a="http://schemas.openxmlformats.org/drawingml/2006/main" xmlns:r="http://schemas.openxmlformats.org/officeDocument/2006/relationships" xmlns:p="http://schemas.openxmlformats.org/presentationml/2006/main">
   <p:cSld>
     <p:spTree>
       <p:nvGrpSpPr>
@@ -4059,7 +4083,14 @@
         <p:cNvGrpSpPr/>
         <p:nvPr/>
       </p:nvGrpSpPr>
-      <p:grpSpPr/>
+      <p:grpSpPr>
+        <a:xfrm>
+          <a:off x="0" y="0"/>
+          <a:ext cx="0" cy="0"/>
+          <a:chOff x="0" y="0"/>
+          <a:chExt cx="0" cy="0"/>
+        </a:xfrm>
+      </p:grpSpPr>
       <p:sp>
         <p:nvSpPr>
           <p:cNvPr id="2" name="Rectangle 1"/>
@@ -4100,6 +4131,7 @@
           <a:lstStyle/>
           <a:p>
             <a:pPr algn="ctr"/>
+            <a:endParaRPr/>
           </a:p>
         </p:txBody>
       </p:sp>
@@ -4112,7 +4144,7 @@
         <p:spPr>
           <a:xfrm>
             <a:off x="457200" y="228600"/>
-            <a:ext cx="11247120" cy="640080"/>
+            <a:ext cx="11247120" cy="498598"/>
           </a:xfrm>
           <a:prstGeom prst="rect">
             <a:avLst/>
@@ -4120,34 +4152,49 @@
           <a:noFill/>
         </p:spPr>
         <p:txBody>
-          <a:bodyPr wrap="square" lIns="45720" rIns="45720" tIns="18288" bIns="18288">
+          <a:bodyPr wrap="square" lIns="45720" tIns="18288" rIns="45720" bIns="18288">
             <a:spAutoFit/>
           </a:bodyPr>
           <a:lstStyle/>
           <a:p>
             <a:pPr algn="l"/>
             <a:r>
-              <a:rPr sz="3000" b="1">
+              <a:rPr sz="3000" b="1" dirty="0" err="1">
                 <a:solidFill>
                   <a:srgbClr val="1A4480"/>
                 </a:solidFill>
                 <a:latin typeface="Calibri"/>
               </a:rPr>
-              <a:t>Resposta e Como Sabemos Se Está Boa</a:t>
-            </a:r>
-          </a:p>
-        </p:txBody>
-      </p:sp>
-      <p:sp>
-        <p:nvSpPr>
-          <p:cNvPr id="4" name="TextBox 3"/>
+              <a:t>Respost</a:t>
+            </a:r>
+            <a:r>
+              <a:rPr lang="pt-BR" sz="3000" b="1" dirty="0">
+                <a:solidFill>
+                  <a:srgbClr val="1A4480"/>
+                </a:solidFill>
+                <a:latin typeface="Calibri"/>
+              </a:rPr>
+              <a:t>a</a:t>
+            </a:r>
+            <a:endParaRPr sz="3000" b="1" dirty="0">
+              <a:solidFill>
+                <a:srgbClr val="1A4480"/>
+              </a:solidFill>
+              <a:latin typeface="Calibri"/>
+            </a:endParaRPr>
+          </a:p>
+        </p:txBody>
+      </p:sp>
+      <p:sp>
+        <p:nvSpPr>
+          <p:cNvPr id="5" name="TextBox 4"/>
           <p:cNvSpPr txBox="1"/>
           <p:nvPr/>
         </p:nvSpPr>
         <p:spPr>
           <a:xfrm>
-            <a:off x="457200" y="777240"/>
-            <a:ext cx="11247120" cy="365760"/>
+            <a:off x="386715" y="1032344"/>
+            <a:ext cx="5577840" cy="467820"/>
           </a:xfrm>
           <a:prstGeom prst="rect">
             <a:avLst/>
@@ -4155,49 +4202,14 @@
           <a:noFill/>
         </p:spPr>
         <p:txBody>
-          <a:bodyPr wrap="square" lIns="45720" rIns="45720" tIns="18288" bIns="18288">
+          <a:bodyPr wrap="square" lIns="45720" tIns="18288" rIns="45720" bIns="18288">
             <a:spAutoFit/>
           </a:bodyPr>
           <a:lstStyle/>
           <a:p>
             <a:pPr algn="l"/>
             <a:r>
-              <a:rPr sz="1600" b="0">
-                <a:solidFill>
-                  <a:srgbClr val="555555"/>
-                </a:solidFill>
-                <a:latin typeface="Calibri"/>
-              </a:rPr>
-              <a:t>LLM monta a resposta · gabarito mede qualidade</a:t>
-            </a:r>
-          </a:p>
-        </p:txBody>
-      </p:sp>
-      <p:sp>
-        <p:nvSpPr>
-          <p:cNvPr id="5" name="TextBox 4"/>
-          <p:cNvSpPr txBox="1"/>
-          <p:nvPr/>
-        </p:nvSpPr>
-        <p:spPr>
-          <a:xfrm>
-            <a:off x="548640" y="1280160"/>
-            <a:ext cx="5577840" cy="365760"/>
-          </a:xfrm>
-          <a:prstGeom prst="rect">
-            <a:avLst/>
-          </a:prstGeom>
-          <a:noFill/>
-        </p:spPr>
-        <p:txBody>
-          <a:bodyPr wrap="square" lIns="45720" rIns="45720" tIns="18288" bIns="18288">
-            <a:spAutoFit/>
-          </a:bodyPr>
-          <a:lstStyle/>
-          <a:p>
-            <a:pPr algn="l"/>
-            <a:r>
-              <a:rPr sz="2000" b="1">
+              <a:rPr sz="2800" b="1">
                 <a:solidFill>
                   <a:srgbClr val="1A4480"/>
                 </a:solidFill>
@@ -4216,8 +4228,8 @@
         </p:nvSpPr>
         <p:spPr>
           <a:xfrm>
-            <a:off x="548640" y="1783080"/>
-            <a:ext cx="5577840" cy="2286000"/>
+            <a:off x="386715" y="1535264"/>
+            <a:ext cx="5577840" cy="2493236"/>
           </a:xfrm>
           <a:prstGeom prst="roundRect">
             <a:avLst/>
@@ -4250,6 +4262,7 @@
           <a:lstStyle/>
           <a:p>
             <a:pPr algn="ctr"/>
+            <a:endParaRPr sz="2400"/>
           </a:p>
         </p:txBody>
       </p:sp>
@@ -4261,8 +4274,8 @@
         </p:nvSpPr>
         <p:spPr>
           <a:xfrm>
-            <a:off x="731520" y="1874519"/>
-            <a:ext cx="5212080" cy="2194560"/>
+            <a:off x="742950" y="1691475"/>
+            <a:ext cx="4352925" cy="2252924"/>
           </a:xfrm>
           <a:prstGeom prst="rect">
             <a:avLst/>
@@ -4270,93 +4283,411 @@
           <a:noFill/>
         </p:spPr>
         <p:txBody>
-          <a:bodyPr wrap="square" lIns="45720" rIns="45720" tIns="18288" bIns="18288">
+          <a:bodyPr wrap="square" lIns="45720" tIns="18288" rIns="45720" bIns="18288">
             <a:spAutoFit/>
           </a:bodyPr>
           <a:lstStyle/>
           <a:p>
             <a:pPr algn="l"/>
             <a:r>
-              <a:rPr sz="1300" b="0">
-                <a:solidFill>
-                  <a:srgbClr val="222222"/>
-                </a:solidFill>
-                <a:latin typeface="Calibri"/>
-              </a:rPr>
-              <a:t>Modelo: Gemini 2.5 Flash (Vertex AI)</a:t>
+              <a:rPr sz="1600" b="0" dirty="0" err="1">
+                <a:solidFill>
+                  <a:srgbClr val="222222"/>
+                </a:solidFill>
+                <a:latin typeface="Calibri"/>
+              </a:rPr>
+              <a:t>Modelo</a:t>
+            </a:r>
+            <a:r>
+              <a:rPr sz="1600" b="0" dirty="0">
+                <a:solidFill>
+                  <a:srgbClr val="222222"/>
+                </a:solidFill>
+                <a:latin typeface="Calibri"/>
+              </a:rPr>
+              <a:t>: Gemini 2.5 Flash (Vertex AI)</a:t>
             </a:r>
           </a:p>
           <a:p>
             <a:pPr algn="l"/>
             <a:r>
-              <a:rPr sz="1300" b="0">
-                <a:solidFill>
-                  <a:srgbClr val="222222"/>
-                </a:solidFill>
-                <a:latin typeface="Calibri"/>
-              </a:rPr>
-              <a:t>1. Top-6 chunks viram contexto</a:t>
-            </a:r>
+              <a:rPr sz="1600" b="0" dirty="0">
+                <a:solidFill>
+                  <a:srgbClr val="222222"/>
+                </a:solidFill>
+                <a:latin typeface="Calibri"/>
+              </a:rPr>
+              <a:t>1. Top-</a:t>
+            </a:r>
+            <a:r>
+              <a:rPr lang="pt-BR" sz="1600" b="0" dirty="0">
+                <a:solidFill>
+                  <a:srgbClr val="222222"/>
+                </a:solidFill>
+                <a:latin typeface="Calibri"/>
+              </a:rPr>
+              <a:t>K</a:t>
+            </a:r>
+            <a:r>
+              <a:rPr sz="1600" b="0" dirty="0">
+                <a:solidFill>
+                  <a:srgbClr val="222222"/>
+                </a:solidFill>
+                <a:latin typeface="Calibri"/>
+              </a:rPr>
+              <a:t> chunks </a:t>
+            </a:r>
+            <a:r>
+              <a:rPr sz="1600" b="0" dirty="0" err="1">
+                <a:solidFill>
+                  <a:srgbClr val="222222"/>
+                </a:solidFill>
+                <a:latin typeface="Calibri"/>
+              </a:rPr>
+              <a:t>viram</a:t>
+            </a:r>
+            <a:r>
+              <a:rPr sz="1600" b="0" dirty="0">
+                <a:solidFill>
+                  <a:srgbClr val="222222"/>
+                </a:solidFill>
+                <a:latin typeface="Calibri"/>
+              </a:rPr>
+              <a:t> </a:t>
+            </a:r>
+            <a:r>
+              <a:rPr sz="1600" b="0" dirty="0" err="1">
+                <a:solidFill>
+                  <a:srgbClr val="222222"/>
+                </a:solidFill>
+                <a:latin typeface="Calibri"/>
+              </a:rPr>
+              <a:t>contexto</a:t>
+            </a:r>
+            <a:endParaRPr lang="pt-BR" sz="1600" b="0" dirty="0">
+              <a:solidFill>
+                <a:srgbClr val="222222"/>
+              </a:solidFill>
+              <a:latin typeface="Calibri"/>
+            </a:endParaRPr>
           </a:p>
           <a:p>
             <a:pPr algn="l"/>
-            <a:r>
-              <a:rPr sz="1300" b="0">
-                <a:solidFill>
-                  <a:srgbClr val="222222"/>
-                </a:solidFill>
-                <a:latin typeface="Calibri"/>
-              </a:rPr>
-              <a:t>2. System prompt impõe:</a:t>
-            </a:r>
+            <a:endParaRPr sz="1600" b="0" dirty="0">
+              <a:solidFill>
+                <a:srgbClr val="222222"/>
+              </a:solidFill>
+              <a:latin typeface="Calibri"/>
+            </a:endParaRPr>
           </a:p>
           <a:p>
             <a:pPr algn="l"/>
             <a:r>
-              <a:rPr sz="1300" b="0">
-                <a:solidFill>
-                  <a:srgbClr val="222222"/>
-                </a:solidFill>
-                <a:latin typeface="Calibri"/>
-              </a:rPr>
-              <a:t>    – citação [doc_id | art. X] obrigatória</a:t>
+              <a:rPr sz="1600" b="0" dirty="0">
+                <a:solidFill>
+                  <a:srgbClr val="222222"/>
+                </a:solidFill>
+                <a:latin typeface="Calibri"/>
+              </a:rPr>
+              <a:t>2. System prompt </a:t>
+            </a:r>
+            <a:r>
+              <a:rPr sz="1600" b="0" dirty="0" err="1">
+                <a:solidFill>
+                  <a:srgbClr val="222222"/>
+                </a:solidFill>
+                <a:latin typeface="Calibri"/>
+              </a:rPr>
+              <a:t>impõe</a:t>
+            </a:r>
+            <a:r>
+              <a:rPr sz="1600" b="0" dirty="0">
+                <a:solidFill>
+                  <a:srgbClr val="222222"/>
+                </a:solidFill>
+                <a:latin typeface="Calibri"/>
+              </a:rPr>
+              <a:t>:</a:t>
             </a:r>
           </a:p>
           <a:p>
             <a:pPr algn="l"/>
             <a:r>
-              <a:rPr sz="1300" b="0">
-                <a:solidFill>
-                  <a:srgbClr val="222222"/>
-                </a:solidFill>
-                <a:latin typeface="Calibri"/>
-              </a:rPr>
-              <a:t>    – tratar ~~...~~ como revogado</a:t>
-            </a:r>
+              <a:rPr sz="1600" b="0" dirty="0">
+                <a:solidFill>
+                  <a:srgbClr val="222222"/>
+                </a:solidFill>
+                <a:latin typeface="Calibri"/>
+              </a:rPr>
+              <a:t>    – </a:t>
+            </a:r>
+            <a:r>
+              <a:rPr sz="1600" b="0" dirty="0" err="1">
+                <a:solidFill>
+                  <a:srgbClr val="222222"/>
+                </a:solidFill>
+                <a:latin typeface="Calibri"/>
+              </a:rPr>
+              <a:t>citação</a:t>
+            </a:r>
+            <a:r>
+              <a:rPr sz="1600" b="0" dirty="0">
+                <a:solidFill>
+                  <a:srgbClr val="222222"/>
+                </a:solidFill>
+                <a:latin typeface="Calibri"/>
+              </a:rPr>
+              <a:t> [</a:t>
+            </a:r>
+            <a:r>
+              <a:rPr sz="1600" b="0" dirty="0" err="1">
+                <a:solidFill>
+                  <a:srgbClr val="222222"/>
+                </a:solidFill>
+                <a:latin typeface="Calibri"/>
+              </a:rPr>
+              <a:t>doc_id</a:t>
+            </a:r>
+            <a:r>
+              <a:rPr sz="1600" b="0" dirty="0">
+                <a:solidFill>
+                  <a:srgbClr val="222222"/>
+                </a:solidFill>
+                <a:latin typeface="Calibri"/>
+              </a:rPr>
+              <a:t> | art. X] </a:t>
+            </a:r>
+            <a:r>
+              <a:rPr sz="1600" b="0" dirty="0" err="1">
+                <a:solidFill>
+                  <a:srgbClr val="222222"/>
+                </a:solidFill>
+                <a:latin typeface="Calibri"/>
+              </a:rPr>
+              <a:t>obrigatória</a:t>
+            </a:r>
+            <a:endParaRPr sz="1600" b="0" dirty="0">
+              <a:solidFill>
+                <a:srgbClr val="222222"/>
+              </a:solidFill>
+              <a:latin typeface="Calibri"/>
+            </a:endParaRPr>
           </a:p>
           <a:p>
             <a:pPr algn="l"/>
             <a:r>
-              <a:rPr sz="1300" b="0">
-                <a:solidFill>
-                  <a:srgbClr val="222222"/>
-                </a:solidFill>
-                <a:latin typeface="Calibri"/>
-              </a:rPr>
-              <a:t>    – "não consta" quando ausente</a:t>
-            </a:r>
+              <a:rPr sz="1600" b="0" dirty="0">
+                <a:solidFill>
+                  <a:srgbClr val="222222"/>
+                </a:solidFill>
+                <a:latin typeface="Calibri"/>
+              </a:rPr>
+              <a:t>    – </a:t>
+            </a:r>
+            <a:r>
+              <a:rPr sz="1600" b="0" dirty="0" err="1">
+                <a:solidFill>
+                  <a:srgbClr val="222222"/>
+                </a:solidFill>
+                <a:latin typeface="Calibri"/>
+              </a:rPr>
+              <a:t>tratar</a:t>
+            </a:r>
+            <a:r>
+              <a:rPr sz="1600" b="0" dirty="0">
+                <a:solidFill>
+                  <a:srgbClr val="222222"/>
+                </a:solidFill>
+                <a:latin typeface="Calibri"/>
+              </a:rPr>
+              <a:t> ~~...~~ </a:t>
+            </a:r>
+            <a:r>
+              <a:rPr sz="1600" b="0" dirty="0" err="1">
+                <a:solidFill>
+                  <a:srgbClr val="222222"/>
+                </a:solidFill>
+                <a:latin typeface="Calibri"/>
+              </a:rPr>
+              <a:t>como</a:t>
+            </a:r>
+            <a:r>
+              <a:rPr sz="1600" b="0" dirty="0">
+                <a:solidFill>
+                  <a:srgbClr val="222222"/>
+                </a:solidFill>
+                <a:latin typeface="Calibri"/>
+              </a:rPr>
+              <a:t> </a:t>
+            </a:r>
+            <a:r>
+              <a:rPr sz="1600" b="0" dirty="0" err="1">
+                <a:solidFill>
+                  <a:srgbClr val="222222"/>
+                </a:solidFill>
+                <a:latin typeface="Calibri"/>
+              </a:rPr>
+              <a:t>revogado</a:t>
+            </a:r>
+            <a:endParaRPr sz="1600" b="0" dirty="0">
+              <a:solidFill>
+                <a:srgbClr val="222222"/>
+              </a:solidFill>
+              <a:latin typeface="Calibri"/>
+            </a:endParaRPr>
           </a:p>
           <a:p>
             <a:pPr algn="l"/>
             <a:r>
-              <a:rPr sz="1300" b="0">
-                <a:solidFill>
-                  <a:srgbClr val="222222"/>
-                </a:solidFill>
-                <a:latin typeface="Calibri"/>
-              </a:rPr>
-              <a:t>3. Saída: resposta + payload de citações</a:t>
-            </a:r>
+              <a:rPr sz="1600" b="0" dirty="0">
+                <a:solidFill>
+                  <a:srgbClr val="222222"/>
+                </a:solidFill>
+                <a:latin typeface="Calibri"/>
+              </a:rPr>
+              <a:t>    – "</a:t>
+            </a:r>
+            <a:r>
+              <a:rPr sz="1600" b="0" dirty="0" err="1">
+                <a:solidFill>
+                  <a:srgbClr val="222222"/>
+                </a:solidFill>
+                <a:latin typeface="Calibri"/>
+              </a:rPr>
+              <a:t>não</a:t>
+            </a:r>
+            <a:r>
+              <a:rPr sz="1600" b="0" dirty="0">
+                <a:solidFill>
+                  <a:srgbClr val="222222"/>
+                </a:solidFill>
+                <a:latin typeface="Calibri"/>
+              </a:rPr>
+              <a:t> </a:t>
+            </a:r>
+            <a:r>
+              <a:rPr sz="1600" b="0" dirty="0" err="1">
+                <a:solidFill>
+                  <a:srgbClr val="222222"/>
+                </a:solidFill>
+                <a:latin typeface="Calibri"/>
+              </a:rPr>
+              <a:t>consta</a:t>
+            </a:r>
+            <a:r>
+              <a:rPr sz="1600" b="0" dirty="0">
+                <a:solidFill>
+                  <a:srgbClr val="222222"/>
+                </a:solidFill>
+                <a:latin typeface="Calibri"/>
+              </a:rPr>
+              <a:t>" </a:t>
+            </a:r>
+            <a:r>
+              <a:rPr sz="1600" b="0" dirty="0" err="1">
+                <a:solidFill>
+                  <a:srgbClr val="222222"/>
+                </a:solidFill>
+                <a:latin typeface="Calibri"/>
+              </a:rPr>
+              <a:t>quando</a:t>
+            </a:r>
+            <a:r>
+              <a:rPr sz="1600" b="0" dirty="0">
+                <a:solidFill>
+                  <a:srgbClr val="222222"/>
+                </a:solidFill>
+                <a:latin typeface="Calibri"/>
+              </a:rPr>
+              <a:t> </a:t>
+            </a:r>
+            <a:r>
+              <a:rPr sz="1600" b="0" dirty="0" err="1">
+                <a:solidFill>
+                  <a:srgbClr val="222222"/>
+                </a:solidFill>
+                <a:latin typeface="Calibri"/>
+              </a:rPr>
+              <a:t>ausente</a:t>
+            </a:r>
+            <a:endParaRPr lang="pt-BR" sz="1600" b="0" dirty="0">
+              <a:solidFill>
+                <a:srgbClr val="222222"/>
+              </a:solidFill>
+              <a:latin typeface="Calibri"/>
+            </a:endParaRPr>
+          </a:p>
+          <a:p>
+            <a:pPr algn="l"/>
+            <a:endParaRPr sz="1600" b="0" dirty="0">
+              <a:solidFill>
+                <a:srgbClr val="222222"/>
+              </a:solidFill>
+              <a:latin typeface="Calibri"/>
+            </a:endParaRPr>
+          </a:p>
+          <a:p>
+            <a:pPr algn="l"/>
+            <a:r>
+              <a:rPr sz="1600" b="0" dirty="0">
+                <a:solidFill>
+                  <a:srgbClr val="222222"/>
+                </a:solidFill>
+                <a:latin typeface="Calibri"/>
+              </a:rPr>
+              <a:t>3. </a:t>
+            </a:r>
+            <a:r>
+              <a:rPr sz="1600" b="0" dirty="0" err="1">
+                <a:solidFill>
+                  <a:srgbClr val="222222"/>
+                </a:solidFill>
+                <a:latin typeface="Calibri"/>
+              </a:rPr>
+              <a:t>Saída</a:t>
+            </a:r>
+            <a:r>
+              <a:rPr sz="1600" b="0" dirty="0">
+                <a:solidFill>
+                  <a:srgbClr val="222222"/>
+                </a:solidFill>
+                <a:latin typeface="Calibri"/>
+              </a:rPr>
+              <a:t>: </a:t>
+            </a:r>
+            <a:r>
+              <a:rPr sz="1600" b="0" dirty="0" err="1">
+                <a:solidFill>
+                  <a:srgbClr val="222222"/>
+                </a:solidFill>
+                <a:latin typeface="Calibri"/>
+              </a:rPr>
+              <a:t>resposta</a:t>
+            </a:r>
+            <a:r>
+              <a:rPr sz="1600" b="0" dirty="0">
+                <a:solidFill>
+                  <a:srgbClr val="222222"/>
+                </a:solidFill>
+                <a:latin typeface="Calibri"/>
+              </a:rPr>
+              <a:t> + payload de </a:t>
+            </a:r>
+            <a:r>
+              <a:rPr sz="1600" b="0" dirty="0" err="1">
+                <a:solidFill>
+                  <a:srgbClr val="222222"/>
+                </a:solidFill>
+                <a:latin typeface="Calibri"/>
+              </a:rPr>
+              <a:t>citações</a:t>
+            </a:r>
+            <a:endParaRPr sz="1600" b="0" dirty="0">
+              <a:solidFill>
+                <a:srgbClr val="222222"/>
+              </a:solidFill>
+              <a:latin typeface="Calibri"/>
+            </a:endParaRPr>
           </a:p>
         </p:txBody>
       </p:sp>
@@ -4368,8 +4699,8 @@
         </p:nvSpPr>
         <p:spPr>
           <a:xfrm>
-            <a:off x="548640" y="4251960"/>
-            <a:ext cx="5577840" cy="365760"/>
+            <a:off x="4853940" y="4658963"/>
+            <a:ext cx="5577840" cy="406265"/>
           </a:xfrm>
           <a:prstGeom prst="rect">
             <a:avLst/>
@@ -4377,14 +4708,14 @@
           <a:noFill/>
         </p:spPr>
         <p:txBody>
-          <a:bodyPr wrap="square" lIns="45720" rIns="45720" tIns="18288" bIns="18288">
+          <a:bodyPr wrap="square" lIns="45720" tIns="18288" rIns="45720" bIns="18288">
             <a:spAutoFit/>
           </a:bodyPr>
           <a:lstStyle/>
           <a:p>
             <a:pPr algn="l"/>
             <a:r>
-              <a:rPr sz="1800" b="1">
+              <a:rPr sz="2400" b="1">
                 <a:solidFill>
                   <a:srgbClr val="1A4480"/>
                 </a:solidFill>
@@ -4403,8 +4734,8 @@
         </p:nvSpPr>
         <p:spPr>
           <a:xfrm>
-            <a:off x="640080" y="4663440"/>
-            <a:ext cx="5486400" cy="1828800"/>
+            <a:off x="4945380" y="5070443"/>
+            <a:ext cx="5486400" cy="1056700"/>
           </a:xfrm>
           <a:prstGeom prst="rect">
             <a:avLst/>
@@ -4423,7 +4754,7 @@
               </a:spcAft>
             </a:pPr>
             <a:r>
-              <a:rPr sz="1100">
+              <a:rPr sz="1400">
                 <a:solidFill>
                   <a:srgbClr val="222222"/>
                 </a:solidFill>
@@ -4439,7 +4770,7 @@
               </a:spcAft>
             </a:pPr>
             <a:r>
-              <a:rPr sz="1100">
+              <a:rPr sz="1400">
                 <a:solidFill>
                   <a:srgbClr val="222222"/>
                 </a:solidFill>
@@ -4455,7 +4786,7 @@
               </a:spcAft>
             </a:pPr>
             <a:r>
-              <a:rPr sz="1100">
+              <a:rPr sz="1400">
                 <a:solidFill>
                   <a:srgbClr val="222222"/>
                 </a:solidFill>
@@ -4468,14 +4799,14 @@
       </p:sp>
       <p:sp>
         <p:nvSpPr>
-          <p:cNvPr id="10" name="TextBox 9"/>
+          <p:cNvPr id="13" name="TextBox 12"/>
           <p:cNvSpPr txBox="1"/>
           <p:nvPr/>
         </p:nvSpPr>
         <p:spPr>
           <a:xfrm>
-            <a:off x="6400800" y="1280160"/>
-            <a:ext cx="5486400" cy="365760"/>
+            <a:off x="457200" y="6492240"/>
+            <a:ext cx="7315200" cy="206210"/>
           </a:xfrm>
           <a:prstGeom prst="rect">
             <a:avLst/>
@@ -4483,34 +4814,34 @@
           <a:noFill/>
         </p:spPr>
         <p:txBody>
-          <a:bodyPr wrap="square" lIns="45720" rIns="45720" tIns="18288" bIns="18288">
+          <a:bodyPr wrap="square" lIns="45720" tIns="18288" rIns="45720" bIns="18288">
             <a:spAutoFit/>
           </a:bodyPr>
           <a:lstStyle/>
           <a:p>
             <a:pPr algn="l"/>
             <a:r>
-              <a:rPr sz="2000" b="1">
-                <a:solidFill>
-                  <a:srgbClr val="1A4480"/>
-                </a:solidFill>
-                <a:latin typeface="Calibri"/>
-              </a:rPr>
-              <a:t>Avaliação — benchmark anotado</a:t>
-            </a:r>
-          </a:p>
-        </p:txBody>
-      </p:sp>
-      <p:sp>
-        <p:nvSpPr>
-          <p:cNvPr id="11" name="TextBox 10"/>
+              <a:rPr sz="1100" b="0">
+                <a:solidFill>
+                  <a:srgbClr val="555555"/>
+                </a:solidFill>
+                <a:latin typeface="Calibri"/>
+              </a:rPr>
+              <a:t>RAG ANEEL · Desafio CEIA</a:t>
+            </a:r>
+          </a:p>
+        </p:txBody>
+      </p:sp>
+      <p:sp>
+        <p:nvSpPr>
+          <p:cNvPr id="14" name="TextBox 13"/>
           <p:cNvSpPr txBox="1"/>
           <p:nvPr/>
         </p:nvSpPr>
         <p:spPr>
           <a:xfrm>
-            <a:off x="6583680" y="1691640"/>
-            <a:ext cx="5394960" cy="640080"/>
+            <a:off x="11430000" y="6492240"/>
+            <a:ext cx="548640" cy="206210"/>
           </a:xfrm>
           <a:prstGeom prst="rect">
             <a:avLst/>
@@ -4518,231 +4849,14 @@
           <a:noFill/>
         </p:spPr>
         <p:txBody>
-          <a:bodyPr wrap="square" lIns="45720" rIns="45720" tIns="18288" bIns="18288">
+          <a:bodyPr wrap="square" lIns="45720" tIns="18288" rIns="45720" bIns="18288">
             <a:spAutoFit/>
           </a:bodyPr>
           <a:lstStyle/>
           <a:p>
-            <a:pPr algn="l"/>
-            <a:r>
-              <a:rPr sz="1200" b="0">
-                <a:solidFill>
-                  <a:srgbClr val="222222"/>
-                </a:solidFill>
-                <a:latin typeface="Calibri"/>
-              </a:rPr>
-              <a:t>Gold JSONL com expected_doc_ids, expected_articles,</a:t>
-            </a:r>
-          </a:p>
-          <a:p>
-            <a:pPr algn="l"/>
-            <a:r>
-              <a:rPr sz="1200" b="0">
-                <a:solidFill>
-                  <a:srgbClr val="222222"/>
-                </a:solidFill>
-                <a:latin typeface="Calibri"/>
-              </a:rPr>
-              <a:t>numeric_facts, must_contain, should_refuse.</a:t>
-            </a:r>
-          </a:p>
-        </p:txBody>
-      </p:sp>
-      <p:sp>
-        <p:nvSpPr>
-          <p:cNvPr id="12" name="TextBox 11"/>
-          <p:cNvSpPr txBox="1"/>
-          <p:nvPr/>
-        </p:nvSpPr>
-        <p:spPr>
-          <a:xfrm>
-            <a:off x="6583680" y="2606040"/>
-            <a:ext cx="5394960" cy="3657600"/>
-          </a:xfrm>
-          <a:prstGeom prst="rect">
-            <a:avLst/>
-          </a:prstGeom>
-          <a:noFill/>
-        </p:spPr>
-        <p:txBody>
-          <a:bodyPr wrap="square">
-            <a:spAutoFit/>
-          </a:bodyPr>
-          <a:lstStyle/>
-          <a:p>
-            <a:pPr>
-              <a:spcAft>
-                <a:spcPts val="400"/>
-              </a:spcAft>
-            </a:pPr>
-            <a:r>
-              <a:rPr sz="1100">
-                <a:solidFill>
-                  <a:srgbClr val="222222"/>
-                </a:solidFill>
-                <a:latin typeface="Calibri"/>
-              </a:rPr>
-              <a:t>• Retrieval: Hit@k · Recall@k · Precision@k · nDCG@k · MRR</a:t>
-            </a:r>
-          </a:p>
-          <a:p>
-            <a:pPr>
-              <a:spcAft>
-                <a:spcPts val="400"/>
-              </a:spcAft>
-            </a:pPr>
-            <a:r>
-              <a:rPr sz="1100">
-                <a:solidFill>
-                  <a:srgbClr val="222222"/>
-                </a:solidFill>
-                <a:latin typeface="Calibri"/>
-              </a:rPr>
-              <a:t>• Citation-F1 (regex normaliza nº+ano)</a:t>
-            </a:r>
-          </a:p>
-          <a:p>
-            <a:pPr>
-              <a:spcAft>
-                <a:spcPts val="400"/>
-              </a:spcAft>
-            </a:pPr>
-            <a:r>
-              <a:rPr sz="1100">
-                <a:solidFill>
-                  <a:srgbClr val="222222"/>
-                </a:solidFill>
-                <a:latin typeface="Calibri"/>
-              </a:rPr>
-              <a:t>• Numeric exactness (tolerância em valores)</a:t>
-            </a:r>
-          </a:p>
-          <a:p>
-            <a:pPr>
-              <a:spcAft>
-                <a:spcPts val="400"/>
-              </a:spcAft>
-            </a:pPr>
-            <a:r>
-              <a:rPr sz="1100">
-                <a:solidFill>
-                  <a:srgbClr val="222222"/>
-                </a:solidFill>
-                <a:latin typeface="Calibri"/>
-              </a:rPr>
-              <a:t>• Refusal correctness (detecta "não consta")</a:t>
-            </a:r>
-          </a:p>
-          <a:p>
-            <a:pPr>
-              <a:spcAft>
-                <a:spcPts val="400"/>
-              </a:spcAft>
-            </a:pPr>
-            <a:r>
-              <a:rPr sz="1100">
-                <a:solidFill>
-                  <a:srgbClr val="222222"/>
-                </a:solidFill>
-                <a:latin typeface="Calibri"/>
-              </a:rPr>
-              <a:t>• LLM-as-judge: faithfulness · correctness · completeness · critical_error</a:t>
-            </a:r>
-          </a:p>
-          <a:p>
-            <a:pPr>
-              <a:spcAft>
-                <a:spcPts val="400"/>
-              </a:spcAft>
-            </a:pPr>
-            <a:r>
-              <a:rPr sz="1100">
-                <a:solidFill>
-                  <a:srgbClr val="222222"/>
-                </a:solidFill>
-                <a:latin typeface="Calibri"/>
-              </a:rPr>
-              <a:t>• Latência p50/p95 separadas (retrieval vs geração)</a:t>
-            </a:r>
-          </a:p>
-          <a:p>
-            <a:pPr>
-              <a:spcAft>
-                <a:spcPts val="400"/>
-              </a:spcAft>
-            </a:pPr>
-            <a:r>
-              <a:rPr sz="1100">
-                <a:solidFill>
-                  <a:srgbClr val="222222"/>
-                </a:solidFill>
-                <a:latin typeface="Calibri"/>
-              </a:rPr>
-              <a:t>• Bootstrap CI 95% — comparação estatística entre versões do retriever</a:t>
-            </a:r>
-          </a:p>
-        </p:txBody>
-      </p:sp>
-      <p:sp>
-        <p:nvSpPr>
-          <p:cNvPr id="13" name="TextBox 12"/>
-          <p:cNvSpPr txBox="1"/>
-          <p:nvPr/>
-        </p:nvSpPr>
-        <p:spPr>
-          <a:xfrm>
-            <a:off x="457200" y="6492240"/>
-            <a:ext cx="7315200" cy="274320"/>
-          </a:xfrm>
-          <a:prstGeom prst="rect">
-            <a:avLst/>
-          </a:prstGeom>
-          <a:noFill/>
-        </p:spPr>
-        <p:txBody>
-          <a:bodyPr wrap="square" lIns="45720" rIns="45720" tIns="18288" bIns="18288">
-            <a:spAutoFit/>
-          </a:bodyPr>
-          <a:lstStyle/>
-          <a:p>
-            <a:pPr algn="l"/>
-            <a:r>
-              <a:rPr sz="1000" b="0">
-                <a:solidFill>
-                  <a:srgbClr val="555555"/>
-                </a:solidFill>
-                <a:latin typeface="Calibri"/>
-              </a:rPr>
-              <a:t>RAG ANEEL · Desafio CEIA</a:t>
-            </a:r>
-          </a:p>
-        </p:txBody>
-      </p:sp>
-      <p:sp>
-        <p:nvSpPr>
-          <p:cNvPr id="14" name="TextBox 13"/>
-          <p:cNvSpPr txBox="1"/>
-          <p:nvPr/>
-        </p:nvSpPr>
-        <p:spPr>
-          <a:xfrm>
-            <a:off x="11430000" y="6492240"/>
-            <a:ext cx="548640" cy="274320"/>
-          </a:xfrm>
-          <a:prstGeom prst="rect">
-            <a:avLst/>
-          </a:prstGeom>
-          <a:noFill/>
-        </p:spPr>
-        <p:txBody>
-          <a:bodyPr wrap="square" lIns="45720" rIns="45720" tIns="18288" bIns="18288">
-            <a:spAutoFit/>
-          </a:bodyPr>
-          <a:lstStyle/>
-          <a:p>
             <a:pPr algn="r"/>
             <a:r>
-              <a:rPr sz="1000" b="0">
+              <a:rPr sz="1100" b="0">
                 <a:solidFill>
                   <a:srgbClr val="555555"/>
                 </a:solidFill>
@@ -4762,7 +4876,7 @@
 </file>
 
 <file path=ppt/slides/slide12.xml><?xml version="1.0" encoding="utf-8"?>
-<p:sld xmlns:a="http://schemas.openxmlformats.org/drawingml/2006/main" xmlns:p="http://schemas.openxmlformats.org/presentationml/2006/main" xmlns:r="http://schemas.openxmlformats.org/officeDocument/2006/relationships">
+<p:sld xmlns:a="http://schemas.openxmlformats.org/drawingml/2006/main" xmlns:r="http://schemas.openxmlformats.org/officeDocument/2006/relationships" xmlns:p="http://schemas.openxmlformats.org/presentationml/2006/main">
   <p:cSld>
     <p:spTree>
       <p:nvGrpSpPr>
@@ -4770,7 +4884,14 @@
         <p:cNvGrpSpPr/>
         <p:nvPr/>
       </p:nvGrpSpPr>
-      <p:grpSpPr/>
+      <p:grpSpPr>
+        <a:xfrm>
+          <a:off x="0" y="0"/>
+          <a:ext cx="0" cy="0"/>
+          <a:chOff x="0" y="0"/>
+          <a:chExt cx="0" cy="0"/>
+        </a:xfrm>
+      </p:grpSpPr>
       <p:sp>
         <p:nvSpPr>
           <p:cNvPr id="2" name="Rectangle 1"/>
@@ -4811,6 +4932,7 @@
           <a:lstStyle/>
           <a:p>
             <a:pPr algn="ctr"/>
+            <a:endParaRPr/>
           </a:p>
         </p:txBody>
       </p:sp>
@@ -4831,7 +4953,7 @@
           <a:noFill/>
         </p:spPr>
         <p:txBody>
-          <a:bodyPr wrap="square" lIns="45720" rIns="45720" tIns="18288" bIns="18288">
+          <a:bodyPr wrap="square" lIns="45720" tIns="18288" rIns="45720" bIns="18288">
             <a:spAutoFit/>
           </a:bodyPr>
           <a:lstStyle/>
@@ -4844,7 +4966,7 @@
                 </a:solidFill>
                 <a:latin typeface="Calibri"/>
               </a:rPr>
-              <a:t>O Que Funcionou e o Que Foi Trocado</a:t>
+              <a:t>Ferramentas Usadas</a:t>
             </a:r>
           </a:p>
         </p:txBody>
@@ -4866,494 +4988,7 @@
           <a:noFill/>
         </p:spPr>
         <p:txBody>
-          <a:bodyPr wrap="square" lIns="45720" rIns="45720" tIns="18288" bIns="18288">
-            <a:spAutoFit/>
-          </a:bodyPr>
-          <a:lstStyle/>
-          <a:p>
-            <a:pPr algn="l"/>
-            <a:r>
-              <a:rPr sz="1600" b="0">
-                <a:solidFill>
-                  <a:srgbClr val="555555"/>
-                </a:solidFill>
-                <a:latin typeface="Calibri"/>
-              </a:rPr>
-              <a:t>Decisões importantes em linguagem simples</a:t>
-            </a:r>
-          </a:p>
-        </p:txBody>
-      </p:sp>
-      <p:sp>
-        <p:nvSpPr>
-          <p:cNvPr id="5" name="TextBox 4"/>
-          <p:cNvSpPr txBox="1"/>
-          <p:nvPr/>
-        </p:nvSpPr>
-        <p:spPr>
-          <a:xfrm>
-            <a:off x="548640" y="1280160"/>
-            <a:ext cx="5486400" cy="365760"/>
-          </a:xfrm>
-          <a:prstGeom prst="rect">
-            <a:avLst/>
-          </a:prstGeom>
-          <a:noFill/>
-        </p:spPr>
-        <p:txBody>
-          <a:bodyPr wrap="square" lIns="45720" rIns="45720" tIns="18288" bIns="18288">
-            <a:spAutoFit/>
-          </a:bodyPr>
-          <a:lstStyle/>
-          <a:p>
-            <a:pPr algn="l"/>
-            <a:r>
-              <a:rPr sz="2200" b="1">
-                <a:solidFill>
-                  <a:srgbClr val="228844"/>
-                </a:solidFill>
-                <a:latin typeface="Calibri"/>
-              </a:rPr>
-              <a:t>✓ Acertos</a:t>
-            </a:r>
-          </a:p>
-        </p:txBody>
-      </p:sp>
-      <p:sp>
-        <p:nvSpPr>
-          <p:cNvPr id="6" name="TextBox 5"/>
-          <p:cNvSpPr txBox="1"/>
-          <p:nvPr/>
-        </p:nvSpPr>
-        <p:spPr>
-          <a:xfrm>
-            <a:off x="731520" y="1783080"/>
-            <a:ext cx="5394960" cy="3200400"/>
-          </a:xfrm>
-          <a:prstGeom prst="rect">
-            <a:avLst/>
-          </a:prstGeom>
-          <a:noFill/>
-        </p:spPr>
-        <p:txBody>
-          <a:bodyPr wrap="square">
-            <a:spAutoFit/>
-          </a:bodyPr>
-          <a:lstStyle/>
-          <a:p>
-            <a:pPr>
-              <a:spcAft>
-                <a:spcPts val="400"/>
-              </a:spcAft>
-            </a:pPr>
-            <a:r>
-              <a:rPr sz="1500">
-                <a:solidFill>
-                  <a:srgbClr val="222222"/>
-                </a:solidFill>
-                <a:latin typeface="Calibri"/>
-              </a:rPr>
-              <a:t>• Decisor por página economizou ~93% do custo de OCR</a:t>
-            </a:r>
-          </a:p>
-          <a:p>
-            <a:pPr>
-              <a:spcAft>
-                <a:spcPts val="400"/>
-              </a:spcAft>
-            </a:pPr>
-            <a:r>
-              <a:rPr sz="1500">
-                <a:solidFill>
-                  <a:srgbClr val="222222"/>
-                </a:solidFill>
-                <a:latin typeface="Calibri"/>
-              </a:rPr>
-              <a:t>• Cortar texto pelos artigos da lei melhorou muito as citações</a:t>
-            </a:r>
-          </a:p>
-          <a:p>
-            <a:pPr>
-              <a:spcAft>
-                <a:spcPts val="400"/>
-              </a:spcAft>
-            </a:pPr>
-            <a:r>
-              <a:rPr sz="1500">
-                <a:solidFill>
-                  <a:srgbClr val="222222"/>
-                </a:solidFill>
-                <a:latin typeface="Calibri"/>
-              </a:rPr>
-              <a:t>• Pipeline retoma do ponto onde parou se cair — sem refazer do zero</a:t>
-            </a:r>
-          </a:p>
-        </p:txBody>
-      </p:sp>
-      <p:sp>
-        <p:nvSpPr>
-          <p:cNvPr id="7" name="TextBox 6"/>
-          <p:cNvSpPr txBox="1"/>
-          <p:nvPr/>
-        </p:nvSpPr>
-        <p:spPr>
-          <a:xfrm>
-            <a:off x="6400800" y="1280160"/>
-            <a:ext cx="5486400" cy="365760"/>
-          </a:xfrm>
-          <a:prstGeom prst="rect">
-            <a:avLst/>
-          </a:prstGeom>
-          <a:noFill/>
-        </p:spPr>
-        <p:txBody>
-          <a:bodyPr wrap="square" lIns="45720" rIns="45720" tIns="18288" bIns="18288">
-            <a:spAutoFit/>
-          </a:bodyPr>
-          <a:lstStyle/>
-          <a:p>
-            <a:pPr algn="l"/>
-            <a:r>
-              <a:rPr sz="2200" b="1">
-                <a:solidFill>
-                  <a:srgbClr val="C26B00"/>
-                </a:solidFill>
-                <a:latin typeface="Calibri"/>
-              </a:rPr>
-              <a:t>⚖ Escolhas conscientes</a:t>
-            </a:r>
-          </a:p>
-        </p:txBody>
-      </p:sp>
-      <p:sp>
-        <p:nvSpPr>
-          <p:cNvPr id="8" name="TextBox 7"/>
-          <p:cNvSpPr txBox="1"/>
-          <p:nvPr/>
-        </p:nvSpPr>
-        <p:spPr>
-          <a:xfrm>
-            <a:off x="6583680" y="1783080"/>
-            <a:ext cx="5394960" cy="3200400"/>
-          </a:xfrm>
-          <a:prstGeom prst="rect">
-            <a:avLst/>
-          </a:prstGeom>
-          <a:noFill/>
-        </p:spPr>
-        <p:txBody>
-          <a:bodyPr wrap="square">
-            <a:spAutoFit/>
-          </a:bodyPr>
-          <a:lstStyle/>
-          <a:p>
-            <a:pPr>
-              <a:spcAft>
-                <a:spcPts val="400"/>
-              </a:spcAft>
-            </a:pPr>
-            <a:r>
-              <a:rPr sz="1500">
-                <a:solidFill>
-                  <a:srgbClr val="222222"/>
-                </a:solidFill>
-                <a:latin typeface="Calibri"/>
-              </a:rPr>
-              <a:t>• Pagamos a LLM (Vertex AI) em vez de usar gratuita — confiabilidade vale mais</a:t>
-            </a:r>
-          </a:p>
-          <a:p>
-            <a:pPr>
-              <a:spcAft>
-                <a:spcPts val="400"/>
-              </a:spcAft>
-            </a:pPr>
-            <a:r>
-              <a:rPr sz="1500">
-                <a:solidFill>
-                  <a:srgbClr val="222222"/>
-                </a:solidFill>
-                <a:latin typeface="Calibri"/>
-              </a:rPr>
-              <a:t>• Reranker pago é mais rápido e preciso, mas tem limite de chamadas</a:t>
-            </a:r>
-          </a:p>
-          <a:p>
-            <a:pPr>
-              <a:spcAft>
-                <a:spcPts val="400"/>
-              </a:spcAft>
-            </a:pPr>
-            <a:r>
-              <a:rPr sz="1500">
-                <a:solidFill>
-                  <a:srgbClr val="222222"/>
-                </a:solidFill>
-                <a:latin typeface="Calibri"/>
-              </a:rPr>
-              <a:t>• Banco de controle simples (sqlite) — basta pra esse projeto</a:t>
-            </a:r>
-          </a:p>
-        </p:txBody>
-      </p:sp>
-      <p:sp>
-        <p:nvSpPr>
-          <p:cNvPr id="9" name="TextBox 8"/>
-          <p:cNvSpPr txBox="1"/>
-          <p:nvPr/>
-        </p:nvSpPr>
-        <p:spPr>
-          <a:xfrm>
-            <a:off x="548640" y="5029200"/>
-            <a:ext cx="10972800" cy="365760"/>
-          </a:xfrm>
-          <a:prstGeom prst="rect">
-            <a:avLst/>
-          </a:prstGeom>
-          <a:noFill/>
-        </p:spPr>
-        <p:txBody>
-          <a:bodyPr wrap="square" lIns="45720" rIns="45720" tIns="18288" bIns="18288">
-            <a:spAutoFit/>
-          </a:bodyPr>
-          <a:lstStyle/>
-          <a:p>
-            <a:pPr algn="l"/>
-            <a:r>
-              <a:rPr sz="2200" b="1">
-                <a:solidFill>
-                  <a:srgbClr val="1A4480"/>
-                </a:solidFill>
-                <a:latin typeface="Calibri"/>
-              </a:rPr>
-              <a:t>🚀 Próximos passos</a:t>
-            </a:r>
-          </a:p>
-        </p:txBody>
-      </p:sp>
-      <p:sp>
-        <p:nvSpPr>
-          <p:cNvPr id="10" name="TextBox 9"/>
-          <p:cNvSpPr txBox="1"/>
-          <p:nvPr/>
-        </p:nvSpPr>
-        <p:spPr>
-          <a:xfrm>
-            <a:off x="731520" y="5532120"/>
-            <a:ext cx="10972800" cy="1371600"/>
-          </a:xfrm>
-          <a:prstGeom prst="rect">
-            <a:avLst/>
-          </a:prstGeom>
-          <a:noFill/>
-        </p:spPr>
-        <p:txBody>
-          <a:bodyPr wrap="square">
-            <a:spAutoFit/>
-          </a:bodyPr>
-          <a:lstStyle/>
-          <a:p>
-            <a:pPr>
-              <a:spcAft>
-                <a:spcPts val="400"/>
-              </a:spcAft>
-            </a:pPr>
-            <a:r>
-              <a:rPr sz="1400">
-                <a:solidFill>
-                  <a:srgbClr val="222222"/>
-                </a:solidFill>
-                <a:latin typeface="Calibri"/>
-              </a:rPr>
-              <a:t>• Testar variações de tamanho de chunk · LLM reescrevendo a pergunta antes de buscar · cache de buscas frequentes</a:t>
-            </a:r>
-          </a:p>
-        </p:txBody>
-      </p:sp>
-      <p:sp>
-        <p:nvSpPr>
-          <p:cNvPr id="11" name="TextBox 10"/>
-          <p:cNvSpPr txBox="1"/>
-          <p:nvPr/>
-        </p:nvSpPr>
-        <p:spPr>
-          <a:xfrm>
-            <a:off x="457200" y="6492240"/>
-            <a:ext cx="7315200" cy="274320"/>
-          </a:xfrm>
-          <a:prstGeom prst="rect">
-            <a:avLst/>
-          </a:prstGeom>
-          <a:noFill/>
-        </p:spPr>
-        <p:txBody>
-          <a:bodyPr wrap="square" lIns="45720" rIns="45720" tIns="18288" bIns="18288">
-            <a:spAutoFit/>
-          </a:bodyPr>
-          <a:lstStyle/>
-          <a:p>
-            <a:pPr algn="l"/>
-            <a:r>
-              <a:rPr sz="1000" b="0">
-                <a:solidFill>
-                  <a:srgbClr val="555555"/>
-                </a:solidFill>
-                <a:latin typeface="Calibri"/>
-              </a:rPr>
-              <a:t>RAG ANEEL · Desafio CEIA</a:t>
-            </a:r>
-          </a:p>
-        </p:txBody>
-      </p:sp>
-      <p:sp>
-        <p:nvSpPr>
-          <p:cNvPr id="12" name="TextBox 11"/>
-          <p:cNvSpPr txBox="1"/>
-          <p:nvPr/>
-        </p:nvSpPr>
-        <p:spPr>
-          <a:xfrm>
-            <a:off x="11430000" y="6492240"/>
-            <a:ext cx="548640" cy="274320"/>
-          </a:xfrm>
-          <a:prstGeom prst="rect">
-            <a:avLst/>
-          </a:prstGeom>
-          <a:noFill/>
-        </p:spPr>
-        <p:txBody>
-          <a:bodyPr wrap="square" lIns="45720" rIns="45720" tIns="18288" bIns="18288">
-            <a:spAutoFit/>
-          </a:bodyPr>
-          <a:lstStyle/>
-          <a:p>
-            <a:pPr algn="r"/>
-            <a:r>
-              <a:rPr sz="1000" b="0">
-                <a:solidFill>
-                  <a:srgbClr val="555555"/>
-                </a:solidFill>
-                <a:latin typeface="Calibri"/>
-              </a:rPr>
-              <a:t>12</a:t>
-            </a:r>
-          </a:p>
-        </p:txBody>
-      </p:sp>
-    </p:spTree>
-  </p:cSld>
-  <p:clrMapOvr>
-    <a:masterClrMapping/>
-  </p:clrMapOvr>
-</p:sld>
-</file>
-
-<file path=ppt/slides/slide13.xml><?xml version="1.0" encoding="utf-8"?>
-<p:sld xmlns:a="http://schemas.openxmlformats.org/drawingml/2006/main" xmlns:p="http://schemas.openxmlformats.org/presentationml/2006/main" xmlns:r="http://schemas.openxmlformats.org/officeDocument/2006/relationships">
-  <p:cSld>
-    <p:spTree>
-      <p:nvGrpSpPr>
-        <p:cNvPr id="1" name=""/>
-        <p:cNvGrpSpPr/>
-        <p:nvPr/>
-      </p:nvGrpSpPr>
-      <p:grpSpPr/>
-      <p:sp>
-        <p:nvSpPr>
-          <p:cNvPr id="2" name="Rectangle 1"/>
-          <p:cNvSpPr/>
-          <p:nvPr/>
-        </p:nvSpPr>
-        <p:spPr>
-          <a:xfrm>
-            <a:off x="0" y="0"/>
-            <a:ext cx="12191695" cy="73152"/>
-          </a:xfrm>
-          <a:prstGeom prst="rect">
-            <a:avLst/>
-          </a:prstGeom>
-          <a:solidFill>
-            <a:srgbClr val="1A4480"/>
-          </a:solidFill>
-          <a:ln>
-            <a:noFill/>
-          </a:ln>
-        </p:spPr>
-        <p:style>
-          <a:lnRef idx="1">
-            <a:schemeClr val="accent1"/>
-          </a:lnRef>
-          <a:fillRef idx="3">
-            <a:schemeClr val="accent1"/>
-          </a:fillRef>
-          <a:effectRef idx="2">
-            <a:schemeClr val="accent1"/>
-          </a:effectRef>
-          <a:fontRef idx="minor">
-            <a:schemeClr val="lt1"/>
-          </a:fontRef>
-        </p:style>
-        <p:txBody>
-          <a:bodyPr rtlCol="0" anchor="ctr"/>
-          <a:lstStyle/>
-          <a:p>
-            <a:pPr algn="ctr"/>
-          </a:p>
-        </p:txBody>
-      </p:sp>
-      <p:sp>
-        <p:nvSpPr>
-          <p:cNvPr id="3" name="TextBox 2"/>
-          <p:cNvSpPr txBox="1"/>
-          <p:nvPr/>
-        </p:nvSpPr>
-        <p:spPr>
-          <a:xfrm>
-            <a:off x="457200" y="228600"/>
-            <a:ext cx="11247120" cy="640080"/>
-          </a:xfrm>
-          <a:prstGeom prst="rect">
-            <a:avLst/>
-          </a:prstGeom>
-          <a:noFill/>
-        </p:spPr>
-        <p:txBody>
-          <a:bodyPr wrap="square" lIns="45720" rIns="45720" tIns="18288" bIns="18288">
-            <a:spAutoFit/>
-          </a:bodyPr>
-          <a:lstStyle/>
-          <a:p>
-            <a:pPr algn="l"/>
-            <a:r>
-              <a:rPr sz="3000" b="1">
-                <a:solidFill>
-                  <a:srgbClr val="1A4480"/>
-                </a:solidFill>
-                <a:latin typeface="Calibri"/>
-              </a:rPr>
-              <a:t>Ferramentas Usadas</a:t>
-            </a:r>
-          </a:p>
-        </p:txBody>
-      </p:sp>
-      <p:sp>
-        <p:nvSpPr>
-          <p:cNvPr id="4" name="TextBox 3"/>
-          <p:cNvSpPr txBox="1"/>
-          <p:nvPr/>
-        </p:nvSpPr>
-        <p:spPr>
-          <a:xfrm>
-            <a:off x="457200" y="777240"/>
-            <a:ext cx="11247120" cy="365760"/>
-          </a:xfrm>
-          <a:prstGeom prst="rect">
-            <a:avLst/>
-          </a:prstGeom>
-          <a:noFill/>
-        </p:spPr>
-        <p:txBody>
-          <a:bodyPr wrap="square" lIns="45720" rIns="45720" tIns="18288" bIns="18288">
+          <a:bodyPr wrap="square" lIns="45720" tIns="18288" rIns="45720" bIns="18288">
             <a:spAutoFit/>
           </a:bodyPr>
           <a:lstStyle/>
@@ -5377,7 +5012,13 @@
           <p:cNvGraphicFramePr>
             <a:graphicFrameLocks noGrp="1"/>
           </p:cNvGraphicFramePr>
-          <p:nvPr/>
+          <p:nvPr>
+            <p:extLst>
+              <p:ext uri="{D42A27DB-BD31-4B8C-83A1-F6EECF244321}">
+                <p14:modId xmlns:p14="http://schemas.microsoft.com/office/powerpoint/2010/main" val="3343678798"/>
+              </p:ext>
+            </p:extLst>
+          </p:nvPr>
         </p:nvGraphicFramePr>
         <p:xfrm>
           <a:off x="365760" y="1188720"/>
@@ -5390,14 +5031,32 @@
                 <a:tableStyleId>{5C22544A-7EE6-4342-B048-85BDC9FD1C3A}</a:tableStyleId>
               </a:tblPr>
               <a:tblGrid>
-                <a:gridCol w="2637692"/>
-                <a:gridCol w="3516923"/>
-                <a:gridCol w="5275384"/>
+                <a:gridCol w="2637692">
+                  <a:extLst>
+                    <a:ext uri="{9D8B030D-6E8A-4147-A177-3AD203B41FA5}">
+                      <a16:colId xmlns:a16="http://schemas.microsoft.com/office/drawing/2014/main" val="20000"/>
+                    </a:ext>
+                  </a:extLst>
+                </a:gridCol>
+                <a:gridCol w="3516923">
+                  <a:extLst>
+                    <a:ext uri="{9D8B030D-6E8A-4147-A177-3AD203B41FA5}">
+                      <a16:colId xmlns:a16="http://schemas.microsoft.com/office/drawing/2014/main" val="20001"/>
+                    </a:ext>
+                  </a:extLst>
+                </a:gridCol>
+                <a:gridCol w="5275384">
+                  <a:extLst>
+                    <a:ext uri="{9D8B030D-6E8A-4147-A177-3AD203B41FA5}">
+                      <a16:colId xmlns:a16="http://schemas.microsoft.com/office/drawing/2014/main" val="20002"/>
+                    </a:ext>
+                  </a:extLst>
+                </a:gridCol>
               </a:tblGrid>
               <a:tr h="493776">
                 <a:tc>
                   <a:txBody>
-                    <a:bodyPr wrap="square" lIns="73152" rIns="73152"/>
+                    <a:bodyPr/>
                     <a:lstStyle/>
                     <a:p>
                       <a:r>
@@ -5419,7 +5078,7 @@
                 </a:tc>
                 <a:tc>
                   <a:txBody>
-                    <a:bodyPr wrap="square" lIns="73152" rIns="73152"/>
+                    <a:bodyPr/>
                     <a:lstStyle/>
                     <a:p>
                       <a:r>
@@ -5441,7 +5100,7 @@
                 </a:tc>
                 <a:tc>
                   <a:txBody>
-                    <a:bodyPr wrap="square" lIns="73152" rIns="73152"/>
+                    <a:bodyPr/>
                     <a:lstStyle/>
                     <a:p>
                       <a:r>
@@ -5461,11 +5120,16 @@
                     </a:solidFill>
                   </a:tcPr>
                 </a:tc>
+                <a:extLst>
+                  <a:ext uri="{0D108BD9-81ED-4DB2-BD59-A6C34878D82A}">
+                    <a16:rowId xmlns:a16="http://schemas.microsoft.com/office/drawing/2014/main" val="10000"/>
+                  </a:ext>
+                </a:extLst>
               </a:tr>
               <a:tr h="493776">
                 <a:tc>
                   <a:txBody>
-                    <a:bodyPr wrap="square" lIns="73152" rIns="73152"/>
+                    <a:bodyPr/>
                     <a:lstStyle/>
                     <a:p>
                       <a:r>
@@ -5487,7 +5151,7 @@
                 </a:tc>
                 <a:tc>
                   <a:txBody>
-                    <a:bodyPr wrap="square" lIns="73152" rIns="73152"/>
+                    <a:bodyPr/>
                     <a:lstStyle/>
                     <a:p>
                       <a:r>
@@ -5509,7 +5173,7 @@
                 </a:tc>
                 <a:tc>
                   <a:txBody>
-                    <a:bodyPr wrap="square" lIns="73152" rIns="73152"/>
+                    <a:bodyPr/>
                     <a:lstStyle/>
                     <a:p>
                       <a:r>
@@ -5529,11 +5193,16 @@
                     </a:solidFill>
                   </a:tcPr>
                 </a:tc>
+                <a:extLst>
+                  <a:ext uri="{0D108BD9-81ED-4DB2-BD59-A6C34878D82A}">
+                    <a16:rowId xmlns:a16="http://schemas.microsoft.com/office/drawing/2014/main" val="10001"/>
+                  </a:ext>
+                </a:extLst>
               </a:tr>
               <a:tr h="493776">
                 <a:tc>
                   <a:txBody>
-                    <a:bodyPr wrap="square" lIns="73152" rIns="73152"/>
+                    <a:bodyPr/>
                     <a:lstStyle/>
                     <a:p>
                       <a:r>
@@ -5555,7 +5224,7 @@
                 </a:tc>
                 <a:tc>
                   <a:txBody>
-                    <a:bodyPr wrap="square" lIns="73152" rIns="73152"/>
+                    <a:bodyPr/>
                     <a:lstStyle/>
                     <a:p>
                       <a:r>
@@ -5577,7 +5246,7 @@
                 </a:tc>
                 <a:tc>
                   <a:txBody>
-                    <a:bodyPr wrap="square" lIns="73152" rIns="73152"/>
+                    <a:bodyPr/>
                     <a:lstStyle/>
                     <a:p>
                       <a:r>
@@ -5597,11 +5266,16 @@
                     </a:solidFill>
                   </a:tcPr>
                 </a:tc>
+                <a:extLst>
+                  <a:ext uri="{0D108BD9-81ED-4DB2-BD59-A6C34878D82A}">
+                    <a16:rowId xmlns:a16="http://schemas.microsoft.com/office/drawing/2014/main" val="10002"/>
+                  </a:ext>
+                </a:extLst>
               </a:tr>
               <a:tr h="493776">
                 <a:tc>
                   <a:txBody>
-                    <a:bodyPr wrap="square" lIns="73152" rIns="73152"/>
+                    <a:bodyPr/>
                     <a:lstStyle/>
                     <a:p>
                       <a:r>
@@ -5623,7 +5297,7 @@
                 </a:tc>
                 <a:tc>
                   <a:txBody>
-                    <a:bodyPr wrap="square" lIns="73152" rIns="73152"/>
+                    <a:bodyPr/>
                     <a:lstStyle/>
                     <a:p>
                       <a:r>
@@ -5645,7 +5319,7 @@
                 </a:tc>
                 <a:tc>
                   <a:txBody>
-                    <a:bodyPr wrap="square" lIns="73152" rIns="73152"/>
+                    <a:bodyPr/>
                     <a:lstStyle/>
                     <a:p>
                       <a:r>
@@ -5665,11 +5339,16 @@
                     </a:solidFill>
                   </a:tcPr>
                 </a:tc>
+                <a:extLst>
+                  <a:ext uri="{0D108BD9-81ED-4DB2-BD59-A6C34878D82A}">
+                    <a16:rowId xmlns:a16="http://schemas.microsoft.com/office/drawing/2014/main" val="10003"/>
+                  </a:ext>
+                </a:extLst>
               </a:tr>
               <a:tr h="493776">
                 <a:tc>
                   <a:txBody>
-                    <a:bodyPr wrap="square" lIns="73152" rIns="73152"/>
+                    <a:bodyPr/>
                     <a:lstStyle/>
                     <a:p>
                       <a:r>
@@ -5691,7 +5370,7 @@
                 </a:tc>
                 <a:tc>
                   <a:txBody>
-                    <a:bodyPr wrap="square" lIns="73152" rIns="73152"/>
+                    <a:bodyPr/>
                     <a:lstStyle/>
                     <a:p>
                       <a:r>
@@ -5713,7 +5392,7 @@
                 </a:tc>
                 <a:tc>
                   <a:txBody>
-                    <a:bodyPr wrap="square" lIns="73152" rIns="73152"/>
+                    <a:bodyPr/>
                     <a:lstStyle/>
                     <a:p>
                       <a:r>
@@ -5733,11 +5412,16 @@
                     </a:solidFill>
                   </a:tcPr>
                 </a:tc>
+                <a:extLst>
+                  <a:ext uri="{0D108BD9-81ED-4DB2-BD59-A6C34878D82A}">
+                    <a16:rowId xmlns:a16="http://schemas.microsoft.com/office/drawing/2014/main" val="10004"/>
+                  </a:ext>
+                </a:extLst>
               </a:tr>
               <a:tr h="493776">
                 <a:tc>
                   <a:txBody>
-                    <a:bodyPr wrap="square" lIns="73152" rIns="73152"/>
+                    <a:bodyPr/>
                     <a:lstStyle/>
                     <a:p>
                       <a:r>
@@ -5759,7 +5443,7 @@
                 </a:tc>
                 <a:tc>
                   <a:txBody>
-                    <a:bodyPr wrap="square" lIns="73152" rIns="73152"/>
+                    <a:bodyPr/>
                     <a:lstStyle/>
                     <a:p>
                       <a:r>
@@ -5781,7 +5465,7 @@
                 </a:tc>
                 <a:tc>
                   <a:txBody>
-                    <a:bodyPr wrap="square" lIns="73152" rIns="73152"/>
+                    <a:bodyPr/>
                     <a:lstStyle/>
                     <a:p>
                       <a:r>
@@ -5801,11 +5485,16 @@
                     </a:solidFill>
                   </a:tcPr>
                 </a:tc>
+                <a:extLst>
+                  <a:ext uri="{0D108BD9-81ED-4DB2-BD59-A6C34878D82A}">
+                    <a16:rowId xmlns:a16="http://schemas.microsoft.com/office/drawing/2014/main" val="10005"/>
+                  </a:ext>
+                </a:extLst>
               </a:tr>
               <a:tr h="493776">
                 <a:tc>
                   <a:txBody>
-                    <a:bodyPr wrap="square" lIns="73152" rIns="73152"/>
+                    <a:bodyPr/>
                     <a:lstStyle/>
                     <a:p>
                       <a:r>
@@ -5827,7 +5516,7 @@
                 </a:tc>
                 <a:tc>
                   <a:txBody>
-                    <a:bodyPr wrap="square" lIns="73152" rIns="73152"/>
+                    <a:bodyPr/>
                     <a:lstStyle/>
                     <a:p>
                       <a:r>
@@ -5849,7 +5538,7 @@
                 </a:tc>
                 <a:tc>
                   <a:txBody>
-                    <a:bodyPr wrap="square" lIns="73152" rIns="73152"/>
+                    <a:bodyPr/>
                     <a:lstStyle/>
                     <a:p>
                       <a:r>
@@ -5869,11 +5558,16 @@
                     </a:solidFill>
                   </a:tcPr>
                 </a:tc>
+                <a:extLst>
+                  <a:ext uri="{0D108BD9-81ED-4DB2-BD59-A6C34878D82A}">
+                    <a16:rowId xmlns:a16="http://schemas.microsoft.com/office/drawing/2014/main" val="10006"/>
+                  </a:ext>
+                </a:extLst>
               </a:tr>
               <a:tr h="493776">
                 <a:tc>
                   <a:txBody>
-                    <a:bodyPr wrap="square" lIns="73152" rIns="73152"/>
+                    <a:bodyPr/>
                     <a:lstStyle/>
                     <a:p>
                       <a:r>
@@ -5895,7 +5589,7 @@
                 </a:tc>
                 <a:tc>
                   <a:txBody>
-                    <a:bodyPr wrap="square" lIns="73152" rIns="73152"/>
+                    <a:bodyPr/>
                     <a:lstStyle/>
                     <a:p>
                       <a:r>
@@ -5917,7 +5611,7 @@
                 </a:tc>
                 <a:tc>
                   <a:txBody>
-                    <a:bodyPr wrap="square" lIns="73152" rIns="73152"/>
+                    <a:bodyPr/>
                     <a:lstStyle/>
                     <a:p>
                       <a:r>
@@ -5937,22 +5631,51 @@
                     </a:solidFill>
                   </a:tcPr>
                 </a:tc>
+                <a:extLst>
+                  <a:ext uri="{0D108BD9-81ED-4DB2-BD59-A6C34878D82A}">
+                    <a16:rowId xmlns:a16="http://schemas.microsoft.com/office/drawing/2014/main" val="10007"/>
+                  </a:ext>
+                </a:extLst>
               </a:tr>
               <a:tr h="493776">
                 <a:tc>
                   <a:txBody>
-                    <a:bodyPr wrap="square" lIns="73152" rIns="73152"/>
+                    <a:bodyPr/>
                     <a:lstStyle/>
                     <a:p>
                       <a:r>
-                        <a:rPr sz="1200">
+                        <a:rPr sz="1200" dirty="0" err="1">
                           <a:solidFill>
                             <a:srgbClr val="222222"/>
                           </a:solidFill>
                           <a:latin typeface="Calibri"/>
                         </a:rPr>
-                        <a:t>Gerar resposta</a:t>
+                        <a:t>Gerar</a:t>
                       </a:r>
+                      <a:r>
+                        <a:rPr sz="1200" dirty="0">
+                          <a:solidFill>
+                            <a:srgbClr val="222222"/>
+                          </a:solidFill>
+                          <a:latin typeface="Calibri"/>
+                        </a:rPr>
+                        <a:t> </a:t>
+                      </a:r>
+                      <a:r>
+                        <a:rPr sz="1200" dirty="0" err="1">
+                          <a:solidFill>
+                            <a:srgbClr val="222222"/>
+                          </a:solidFill>
+                          <a:latin typeface="Calibri"/>
+                        </a:rPr>
+                        <a:t>resposta</a:t>
+                      </a:r>
+                      <a:endParaRPr sz="1200" dirty="0">
+                        <a:solidFill>
+                          <a:srgbClr val="222222"/>
+                        </a:solidFill>
+                        <a:latin typeface="Calibri"/>
+                      </a:endParaRPr>
                     </a:p>
                   </a:txBody>
                   <a:tcPr>
@@ -5963,7 +5686,7 @@
                 </a:tc>
                 <a:tc>
                   <a:txBody>
-                    <a:bodyPr wrap="square" lIns="73152" rIns="73152"/>
+                    <a:bodyPr/>
                     <a:lstStyle/>
                     <a:p>
                       <a:r>
@@ -5985,7 +5708,7 @@
                 </a:tc>
                 <a:tc>
                   <a:txBody>
-                    <a:bodyPr wrap="square" lIns="73152" rIns="73152"/>
+                    <a:bodyPr/>
                     <a:lstStyle/>
                     <a:p>
                       <a:r>
@@ -6005,22 +5728,24 @@
                     </a:solidFill>
                   </a:tcPr>
                 </a:tc>
+                <a:extLst>
+                  <a:ext uri="{0D108BD9-81ED-4DB2-BD59-A6C34878D82A}">
+                    <a16:rowId xmlns:a16="http://schemas.microsoft.com/office/drawing/2014/main" val="10008"/>
+                  </a:ext>
+                </a:extLst>
               </a:tr>
               <a:tr h="493776">
                 <a:tc>
                   <a:txBody>
-                    <a:bodyPr wrap="square" lIns="73152" rIns="73152"/>
+                    <a:bodyPr/>
                     <a:lstStyle/>
                     <a:p>
-                      <a:r>
-                        <a:rPr sz="1200">
-                          <a:solidFill>
-                            <a:srgbClr val="222222"/>
-                          </a:solidFill>
-                          <a:latin typeface="Calibri"/>
-                        </a:rPr>
-                        <a:t>Avaliar</a:t>
-                      </a:r>
+                      <a:endParaRPr sz="1200" dirty="0">
+                        <a:solidFill>
+                          <a:srgbClr val="222222"/>
+                        </a:solidFill>
+                        <a:latin typeface="Calibri"/>
+                      </a:endParaRPr>
                     </a:p>
                   </a:txBody>
                   <a:tcPr>
@@ -6031,18 +5756,15 @@
                 </a:tc>
                 <a:tc>
                   <a:txBody>
-                    <a:bodyPr wrap="square" lIns="73152" rIns="73152"/>
+                    <a:bodyPr/>
                     <a:lstStyle/>
                     <a:p>
-                      <a:r>
-                        <a:rPr sz="1200">
-                          <a:solidFill>
-                            <a:srgbClr val="222222"/>
-                          </a:solidFill>
-                          <a:latin typeface="Calibri"/>
-                        </a:rPr>
-                        <a:t>Gabarito + outra LLM como juiz</a:t>
-                      </a:r>
+                      <a:endParaRPr sz="1200" dirty="0">
+                        <a:solidFill>
+                          <a:srgbClr val="222222"/>
+                        </a:solidFill>
+                        <a:latin typeface="Calibri"/>
+                      </a:endParaRPr>
                     </a:p>
                   </a:txBody>
                   <a:tcPr>
@@ -6053,18 +5775,15 @@
                 </a:tc>
                 <a:tc>
                   <a:txBody>
-                    <a:bodyPr wrap="square" lIns="73152" rIns="73152"/>
+                    <a:bodyPr/>
                     <a:lstStyle/>
                     <a:p>
-                      <a:r>
-                        <a:rPr sz="1200">
-                          <a:solidFill>
-                            <a:srgbClr val="222222"/>
-                          </a:solidFill>
-                          <a:latin typeface="Calibri"/>
-                        </a:rPr>
-                        <a:t>Mede se a resposta está boa</a:t>
-                      </a:r>
+                      <a:endParaRPr sz="1200" dirty="0">
+                        <a:solidFill>
+                          <a:srgbClr val="222222"/>
+                        </a:solidFill>
+                        <a:latin typeface="Calibri"/>
+                      </a:endParaRPr>
                     </a:p>
                   </a:txBody>
                   <a:tcPr>
@@ -6073,6 +5792,11 @@
                     </a:solidFill>
                   </a:tcPr>
                 </a:tc>
+                <a:extLst>
+                  <a:ext uri="{0D108BD9-81ED-4DB2-BD59-A6C34878D82A}">
+                    <a16:rowId xmlns:a16="http://schemas.microsoft.com/office/drawing/2014/main" val="10009"/>
+                  </a:ext>
+                </a:extLst>
               </a:tr>
             </a:tbl>
           </a:graphicData>
@@ -6095,7 +5819,7 @@
           <a:noFill/>
         </p:spPr>
         <p:txBody>
-          <a:bodyPr wrap="square" lIns="45720" rIns="45720" tIns="18288" bIns="18288">
+          <a:bodyPr wrap="square" lIns="45720" tIns="18288" rIns="45720" bIns="18288">
             <a:spAutoFit/>
           </a:bodyPr>
           <a:lstStyle/>
@@ -6130,7 +5854,7 @@
           <a:noFill/>
         </p:spPr>
         <p:txBody>
-          <a:bodyPr wrap="square" lIns="45720" rIns="45720" tIns="18288" bIns="18288">
+          <a:bodyPr wrap="square" lIns="45720" tIns="18288" rIns="45720" bIns="18288">
             <a:spAutoFit/>
           </a:bodyPr>
           <a:lstStyle/>
@@ -6165,7 +5889,7 @@
           <a:noFill/>
         </p:spPr>
         <p:txBody>
-          <a:bodyPr wrap="square" lIns="45720" rIns="45720" tIns="18288" bIns="18288">
+          <a:bodyPr wrap="square" lIns="45720" tIns="18288" rIns="45720" bIns="18288">
             <a:spAutoFit/>
           </a:bodyPr>
           <a:lstStyle/>
@@ -6192,7 +5916,7 @@
 </file>
 
 <file path=ppt/slides/slide2.xml><?xml version="1.0" encoding="utf-8"?>
-<p:sld xmlns:a="http://schemas.openxmlformats.org/drawingml/2006/main" xmlns:p="http://schemas.openxmlformats.org/presentationml/2006/main" xmlns:r="http://schemas.openxmlformats.org/officeDocument/2006/relationships">
+<p:sld xmlns:a="http://schemas.openxmlformats.org/drawingml/2006/main" xmlns:r="http://schemas.openxmlformats.org/officeDocument/2006/relationships" xmlns:p="http://schemas.openxmlformats.org/presentationml/2006/main">
   <p:cSld>
     <p:spTree>
       <p:nvGrpSpPr>
@@ -6200,7 +5924,14 @@
         <p:cNvGrpSpPr/>
         <p:nvPr/>
       </p:nvGrpSpPr>
-      <p:grpSpPr/>
+      <p:grpSpPr>
+        <a:xfrm>
+          <a:off x="0" y="0"/>
+          <a:ext cx="0" cy="0"/>
+          <a:chOff x="0" y="0"/>
+          <a:chExt cx="0" cy="0"/>
+        </a:xfrm>
+      </p:grpSpPr>
       <p:sp>
         <p:nvSpPr>
           <p:cNvPr id="2" name="Rectangle 1"/>
@@ -6241,6 +5972,7 @@
           <a:lstStyle/>
           <a:p>
             <a:pPr algn="ctr"/>
+            <a:endParaRPr/>
           </a:p>
         </p:txBody>
       </p:sp>
@@ -6261,7 +5993,7 @@
           <a:noFill/>
         </p:spPr>
         <p:txBody>
-          <a:bodyPr wrap="square" lIns="45720" rIns="45720" tIns="18288" bIns="18288">
+          <a:bodyPr wrap="square" lIns="45720" tIns="18288" rIns="45720" bIns="18288">
             <a:spAutoFit/>
           </a:bodyPr>
           <a:lstStyle/>
@@ -6296,7 +6028,7 @@
           <a:noFill/>
         </p:spPr>
         <p:txBody>
-          <a:bodyPr wrap="square" lIns="45720" rIns="45720" tIns="18288" bIns="18288">
+          <a:bodyPr wrap="square" lIns="45720" tIns="18288" rIns="45720" bIns="18288">
             <a:spAutoFit/>
           </a:bodyPr>
           <a:lstStyle/>
@@ -6331,7 +6063,7 @@
           <a:noFill/>
         </p:spPr>
         <p:txBody>
-          <a:bodyPr wrap="square" lIns="45720" rIns="45720" tIns="18288" bIns="18288">
+          <a:bodyPr wrap="square" lIns="45720" tIns="18288" rIns="45720" bIns="18288">
             <a:spAutoFit/>
           </a:bodyPr>
           <a:lstStyle/>
@@ -6462,6 +6194,7 @@
           <a:lstStyle/>
           <a:p>
             <a:pPr algn="ctr"/>
+            <a:endParaRPr/>
           </a:p>
         </p:txBody>
       </p:sp>
@@ -6482,7 +6215,7 @@
           <a:noFill/>
         </p:spPr>
         <p:txBody>
-          <a:bodyPr wrap="square" lIns="45720" rIns="45720" tIns="18288" bIns="18288">
+          <a:bodyPr wrap="square" lIns="45720" tIns="18288" rIns="45720" bIns="18288">
             <a:spAutoFit/>
           </a:bodyPr>
           <a:lstStyle/>
@@ -6517,7 +6250,7 @@
           <a:noFill/>
         </p:spPr>
         <p:txBody>
-          <a:bodyPr wrap="square" lIns="45720" rIns="45720" tIns="18288" bIns="18288">
+          <a:bodyPr wrap="square" lIns="45720" tIns="18288" rIns="45720" bIns="18288">
             <a:spAutoFit/>
           </a:bodyPr>
           <a:lstStyle/>
@@ -6577,6 +6310,7 @@
           <a:lstStyle/>
           <a:p>
             <a:pPr algn="ctr"/>
+            <a:endParaRPr/>
           </a:p>
         </p:txBody>
       </p:sp>
@@ -6597,7 +6331,7 @@
           <a:noFill/>
         </p:spPr>
         <p:txBody>
-          <a:bodyPr wrap="square" lIns="45720" rIns="45720" tIns="18288" bIns="18288">
+          <a:bodyPr wrap="square" lIns="45720" tIns="18288" rIns="45720" bIns="18288">
             <a:spAutoFit/>
           </a:bodyPr>
           <a:lstStyle/>
@@ -6632,7 +6366,7 @@
           <a:noFill/>
         </p:spPr>
         <p:txBody>
-          <a:bodyPr wrap="square" lIns="45720" rIns="45720" tIns="18288" bIns="18288">
+          <a:bodyPr wrap="square" lIns="45720" tIns="18288" rIns="45720" bIns="18288">
             <a:spAutoFit/>
           </a:bodyPr>
           <a:lstStyle/>
@@ -6692,6 +6426,7 @@
           <a:lstStyle/>
           <a:p>
             <a:pPr algn="ctr"/>
+            <a:endParaRPr/>
           </a:p>
         </p:txBody>
       </p:sp>
@@ -6712,7 +6447,7 @@
           <a:noFill/>
         </p:spPr>
         <p:txBody>
-          <a:bodyPr wrap="square" lIns="45720" rIns="45720" tIns="18288" bIns="18288">
+          <a:bodyPr wrap="square" lIns="45720" tIns="18288" rIns="45720" bIns="18288">
             <a:spAutoFit/>
           </a:bodyPr>
           <a:lstStyle/>
@@ -6747,7 +6482,7 @@
           <a:noFill/>
         </p:spPr>
         <p:txBody>
-          <a:bodyPr wrap="square" lIns="45720" rIns="45720" tIns="18288" bIns="18288">
+          <a:bodyPr wrap="square" lIns="45720" tIns="18288" rIns="45720" bIns="18288">
             <a:spAutoFit/>
           </a:bodyPr>
           <a:lstStyle/>
@@ -6782,7 +6517,7 @@
           <a:noFill/>
         </p:spPr>
         <p:txBody>
-          <a:bodyPr wrap="square" lIns="45720" rIns="45720" tIns="18288" bIns="18288">
+          <a:bodyPr wrap="square" lIns="45720" tIns="18288" rIns="45720" bIns="18288">
             <a:spAutoFit/>
           </a:bodyPr>
           <a:lstStyle/>
@@ -6817,7 +6552,7 @@
           <a:noFill/>
         </p:spPr>
         <p:txBody>
-          <a:bodyPr wrap="square" lIns="45720" rIns="45720" tIns="18288" bIns="18288">
+          <a:bodyPr wrap="square" lIns="45720" tIns="18288" rIns="45720" bIns="18288">
             <a:spAutoFit/>
           </a:bodyPr>
           <a:lstStyle/>
@@ -6852,7 +6587,7 @@
           <a:noFill/>
         </p:spPr>
         <p:txBody>
-          <a:bodyPr wrap="square" lIns="45720" rIns="45720" tIns="18288" bIns="18288">
+          <a:bodyPr wrap="square" lIns="45720" tIns="18288" rIns="45720" bIns="18288">
             <a:spAutoFit/>
           </a:bodyPr>
           <a:lstStyle/>
@@ -6879,7 +6614,7 @@
 </file>
 
 <file path=ppt/slides/slide3.xml><?xml version="1.0" encoding="utf-8"?>
-<p:sld xmlns:a="http://schemas.openxmlformats.org/drawingml/2006/main" xmlns:p="http://schemas.openxmlformats.org/presentationml/2006/main" xmlns:r="http://schemas.openxmlformats.org/officeDocument/2006/relationships">
+<p:sld xmlns:a="http://schemas.openxmlformats.org/drawingml/2006/main" xmlns:r="http://schemas.openxmlformats.org/officeDocument/2006/relationships" xmlns:p="http://schemas.openxmlformats.org/presentationml/2006/main">
   <p:cSld>
     <p:spTree>
       <p:nvGrpSpPr>
@@ -6887,7 +6622,14 @@
         <p:cNvGrpSpPr/>
         <p:nvPr/>
       </p:nvGrpSpPr>
-      <p:grpSpPr/>
+      <p:grpSpPr>
+        <a:xfrm>
+          <a:off x="0" y="0"/>
+          <a:ext cx="0" cy="0"/>
+          <a:chOff x="0" y="0"/>
+          <a:chExt cx="0" cy="0"/>
+        </a:xfrm>
+      </p:grpSpPr>
       <p:sp>
         <p:nvSpPr>
           <p:cNvPr id="2" name="Rectangle 1"/>
@@ -6928,6 +6670,7 @@
           <a:lstStyle/>
           <a:p>
             <a:pPr algn="ctr"/>
+            <a:endParaRPr/>
           </a:p>
         </p:txBody>
       </p:sp>
@@ -6948,7 +6691,7 @@
           <a:noFill/>
         </p:spPr>
         <p:txBody>
-          <a:bodyPr wrap="square" lIns="45720" rIns="45720" tIns="18288" bIns="18288">
+          <a:bodyPr wrap="square" lIns="45720" tIns="18288" rIns="45720" bIns="18288">
             <a:spAutoFit/>
           </a:bodyPr>
           <a:lstStyle/>
@@ -6983,7 +6726,7 @@
           <a:noFill/>
         </p:spPr>
         <p:txBody>
-          <a:bodyPr wrap="square" lIns="45720" rIns="45720" tIns="18288" bIns="18288">
+          <a:bodyPr wrap="square" lIns="45720" tIns="18288" rIns="45720" bIns="18288">
             <a:spAutoFit/>
           </a:bodyPr>
           <a:lstStyle/>
@@ -7037,7 +6780,7 @@
           </a:fontRef>
         </p:style>
         <p:txBody>
-          <a:bodyPr rtlCol="0" anchor="ctr" lIns="182880"/>
+          <a:bodyPr lIns="182880" rtlCol="0" anchor="ctr"/>
           <a:lstStyle/>
           <a:p>
             <a:pPr algn="l"/>
@@ -7069,7 +6812,7 @@
           <a:noFill/>
         </p:spPr>
         <p:txBody>
-          <a:bodyPr wrap="square" lIns="45720" rIns="45720" tIns="18288" bIns="18288">
+          <a:bodyPr wrap="square" lIns="45720" tIns="18288" rIns="45720" bIns="18288">
             <a:spAutoFit/>
           </a:bodyPr>
           <a:lstStyle/>
@@ -7123,7 +6866,7 @@
           </a:fontRef>
         </p:style>
         <p:txBody>
-          <a:bodyPr rtlCol="0" anchor="ctr" lIns="182880"/>
+          <a:bodyPr lIns="182880" rtlCol="0" anchor="ctr"/>
           <a:lstStyle/>
           <a:p>
             <a:pPr algn="l"/>
@@ -7147,7 +6890,7 @@
         <p:spPr>
           <a:xfrm>
             <a:off x="3520440" y="2331720"/>
-            <a:ext cx="8229600" cy="685800"/>
+            <a:ext cx="8229600" cy="529376"/>
           </a:xfrm>
           <a:prstGeom prst="rect">
             <a:avLst/>
@@ -7155,21 +6898,162 @@
           <a:noFill/>
         </p:spPr>
         <p:txBody>
-          <a:bodyPr wrap="square" lIns="45720" rIns="45720" tIns="18288" bIns="18288">
+          <a:bodyPr wrap="square" lIns="45720" tIns="18288" rIns="45720" bIns="18288">
             <a:spAutoFit/>
           </a:bodyPr>
           <a:lstStyle/>
           <a:p>
             <a:pPr algn="l"/>
             <a:r>
-              <a:rPr sz="1600" b="0">
-                <a:solidFill>
-                  <a:srgbClr val="222222"/>
-                </a:solidFill>
-                <a:latin typeface="Calibri"/>
-              </a:rPr>
-              <a:t>Ler é fácil ou vai precisar "olho humano"?</a:t>
-            </a:r>
+              <a:rPr sz="1600" b="0" dirty="0" err="1">
+                <a:solidFill>
+                  <a:srgbClr val="222222"/>
+                </a:solidFill>
+                <a:latin typeface="Calibri"/>
+              </a:rPr>
+              <a:t>Ler</a:t>
+            </a:r>
+            <a:r>
+              <a:rPr sz="1600" b="0" dirty="0">
+                <a:solidFill>
+                  <a:srgbClr val="222222"/>
+                </a:solidFill>
+                <a:latin typeface="Calibri"/>
+              </a:rPr>
+              <a:t> é </a:t>
+            </a:r>
+            <a:r>
+              <a:rPr sz="1600" b="0" dirty="0" err="1">
+                <a:solidFill>
+                  <a:srgbClr val="222222"/>
+                </a:solidFill>
+                <a:latin typeface="Calibri"/>
+              </a:rPr>
+              <a:t>fácil</a:t>
+            </a:r>
+            <a:r>
+              <a:rPr sz="1600" b="0" dirty="0">
+                <a:solidFill>
+                  <a:srgbClr val="222222"/>
+                </a:solidFill>
+                <a:latin typeface="Calibri"/>
+              </a:rPr>
+              <a:t> </a:t>
+            </a:r>
+            <a:r>
+              <a:rPr sz="1600" b="0" dirty="0" err="1">
+                <a:solidFill>
+                  <a:srgbClr val="222222"/>
+                </a:solidFill>
+                <a:latin typeface="Calibri"/>
+              </a:rPr>
+              <a:t>ou</a:t>
+            </a:r>
+            <a:r>
+              <a:rPr sz="1600" b="0" dirty="0">
+                <a:solidFill>
+                  <a:srgbClr val="222222"/>
+                </a:solidFill>
+                <a:latin typeface="Calibri"/>
+              </a:rPr>
+              <a:t> </a:t>
+            </a:r>
+            <a:r>
+              <a:rPr sz="1600" b="0" dirty="0" err="1">
+                <a:solidFill>
+                  <a:srgbClr val="222222"/>
+                </a:solidFill>
+                <a:latin typeface="Calibri"/>
+              </a:rPr>
+              <a:t>vai</a:t>
+            </a:r>
+            <a:r>
+              <a:rPr sz="1600" b="0" dirty="0">
+                <a:solidFill>
+                  <a:srgbClr val="222222"/>
+                </a:solidFill>
+                <a:latin typeface="Calibri"/>
+              </a:rPr>
+              <a:t> </a:t>
+            </a:r>
+            <a:r>
+              <a:rPr sz="1600" b="0" dirty="0" err="1">
+                <a:solidFill>
+                  <a:srgbClr val="222222"/>
+                </a:solidFill>
+                <a:latin typeface="Calibri"/>
+              </a:rPr>
+              <a:t>precisar</a:t>
+            </a:r>
+            <a:r>
+              <a:rPr sz="1600" b="0" dirty="0">
+                <a:solidFill>
+                  <a:srgbClr val="222222"/>
+                </a:solidFill>
+                <a:latin typeface="Calibri"/>
+              </a:rPr>
+              <a:t> "</a:t>
+            </a:r>
+            <a:r>
+              <a:rPr sz="1600" b="0" dirty="0" err="1">
+                <a:solidFill>
+                  <a:srgbClr val="222222"/>
+                </a:solidFill>
+                <a:latin typeface="Calibri"/>
+              </a:rPr>
+              <a:t>olho</a:t>
+            </a:r>
+            <a:r>
+              <a:rPr sz="1600" b="0" dirty="0">
+                <a:solidFill>
+                  <a:srgbClr val="222222"/>
+                </a:solidFill>
+                <a:latin typeface="Calibri"/>
+              </a:rPr>
+              <a:t> </a:t>
+            </a:r>
+            <a:r>
+              <a:rPr sz="1600" b="0" dirty="0" err="1">
+                <a:solidFill>
+                  <a:srgbClr val="222222"/>
+                </a:solidFill>
+                <a:latin typeface="Calibri"/>
+              </a:rPr>
+              <a:t>humano</a:t>
+            </a:r>
+            <a:r>
+              <a:rPr sz="1600" b="0" dirty="0">
+                <a:solidFill>
+                  <a:srgbClr val="222222"/>
+                </a:solidFill>
+                <a:latin typeface="Calibri"/>
+              </a:rPr>
+              <a:t>"?</a:t>
+            </a:r>
+            <a:endParaRPr lang="pt-BR" sz="1600" b="0" dirty="0">
+              <a:solidFill>
+                <a:srgbClr val="222222"/>
+              </a:solidFill>
+              <a:latin typeface="Calibri"/>
+            </a:endParaRPr>
+          </a:p>
+          <a:p>
+            <a:pPr algn="l"/>
+            <a:r>
+              <a:rPr lang="pt-BR" sz="1600" dirty="0">
+                <a:solidFill>
+                  <a:srgbClr val="222222"/>
+                </a:solidFill>
+                <a:latin typeface="Calibri"/>
+              </a:rPr>
+              <a:t>Roteador</a:t>
+            </a:r>
+            <a:endParaRPr sz="1600" b="0" dirty="0">
+              <a:solidFill>
+                <a:srgbClr val="222222"/>
+              </a:solidFill>
+              <a:latin typeface="Calibri"/>
+            </a:endParaRPr>
           </a:p>
         </p:txBody>
       </p:sp>
@@ -7209,7 +7093,7 @@
           </a:fontRef>
         </p:style>
         <p:txBody>
-          <a:bodyPr rtlCol="0" anchor="ctr" lIns="182880"/>
+          <a:bodyPr lIns="182880" rtlCol="0" anchor="ctr"/>
           <a:lstStyle/>
           <a:p>
             <a:pPr algn="l"/>
@@ -7241,21 +7125,81 @@
           <a:noFill/>
         </p:spPr>
         <p:txBody>
-          <a:bodyPr wrap="square" lIns="45720" rIns="45720" tIns="18288" bIns="18288">
+          <a:bodyPr wrap="square" lIns="45720" tIns="18288" rIns="45720" bIns="18288">
             <a:spAutoFit/>
           </a:bodyPr>
           <a:lstStyle/>
           <a:p>
             <a:pPr algn="l"/>
             <a:r>
-              <a:rPr sz="1600" b="0">
-                <a:solidFill>
-                  <a:srgbClr val="222222"/>
-                </a:solidFill>
-                <a:latin typeface="Calibri"/>
-              </a:rPr>
-              <a:t>Tirar o conteúdo do PDF → texto puro + tabelas</a:t>
-            </a:r>
+              <a:rPr sz="1600" b="0" dirty="0" err="1">
+                <a:solidFill>
+                  <a:srgbClr val="222222"/>
+                </a:solidFill>
+                <a:latin typeface="Calibri"/>
+              </a:rPr>
+              <a:t>Tirar</a:t>
+            </a:r>
+            <a:r>
+              <a:rPr sz="1600" b="0" dirty="0">
+                <a:solidFill>
+                  <a:srgbClr val="222222"/>
+                </a:solidFill>
+                <a:latin typeface="Calibri"/>
+              </a:rPr>
+              <a:t> o </a:t>
+            </a:r>
+            <a:r>
+              <a:rPr sz="1600" b="0" dirty="0" err="1">
+                <a:solidFill>
+                  <a:srgbClr val="222222"/>
+                </a:solidFill>
+                <a:latin typeface="Calibri"/>
+              </a:rPr>
+              <a:t>conteúdo</a:t>
+            </a:r>
+            <a:r>
+              <a:rPr sz="1600" b="0" dirty="0">
+                <a:solidFill>
+                  <a:srgbClr val="222222"/>
+                </a:solidFill>
+                <a:latin typeface="Calibri"/>
+              </a:rPr>
+              <a:t> do PDF → </a:t>
+            </a:r>
+            <a:r>
+              <a:rPr sz="1600" b="0" dirty="0" err="1">
+                <a:solidFill>
+                  <a:srgbClr val="222222"/>
+                </a:solidFill>
+                <a:latin typeface="Calibri"/>
+              </a:rPr>
+              <a:t>texto</a:t>
+            </a:r>
+            <a:r>
+              <a:rPr sz="1600" b="0" dirty="0">
+                <a:solidFill>
+                  <a:srgbClr val="222222"/>
+                </a:solidFill>
+                <a:latin typeface="Calibri"/>
+              </a:rPr>
+              <a:t> puro + </a:t>
+            </a:r>
+            <a:r>
+              <a:rPr sz="1600" b="0" dirty="0" err="1">
+                <a:solidFill>
+                  <a:srgbClr val="222222"/>
+                </a:solidFill>
+                <a:latin typeface="Calibri"/>
+              </a:rPr>
+              <a:t>tabelas</a:t>
+            </a:r>
+            <a:endParaRPr sz="1600" b="0" dirty="0">
+              <a:solidFill>
+                <a:srgbClr val="222222"/>
+              </a:solidFill>
+              <a:latin typeface="Calibri"/>
+            </a:endParaRPr>
           </a:p>
         </p:txBody>
       </p:sp>
@@ -7295,7 +7239,7 @@
           </a:fontRef>
         </p:style>
         <p:txBody>
-          <a:bodyPr rtlCol="0" anchor="ctr" lIns="182880"/>
+          <a:bodyPr lIns="182880" rtlCol="0" anchor="ctr"/>
           <a:lstStyle/>
           <a:p>
             <a:pPr algn="l"/>
@@ -7319,7 +7263,7 @@
         <p:spPr>
           <a:xfrm>
             <a:off x="3520440" y="3922776"/>
-            <a:ext cx="8229600" cy="685800"/>
+            <a:ext cx="8229600" cy="283154"/>
           </a:xfrm>
           <a:prstGeom prst="rect">
             <a:avLst/>
@@ -7327,21 +7271,27 @@
           <a:noFill/>
         </p:spPr>
         <p:txBody>
-          <a:bodyPr wrap="square" lIns="45720" rIns="45720" tIns="18288" bIns="18288">
+          <a:bodyPr wrap="square" lIns="45720" tIns="18288" rIns="45720" bIns="18288">
             <a:spAutoFit/>
           </a:bodyPr>
           <a:lstStyle/>
           <a:p>
             <a:pPr algn="l"/>
             <a:r>
-              <a:rPr sz="1600" b="0">
-                <a:solidFill>
-                  <a:srgbClr val="222222"/>
-                </a:solidFill>
-                <a:latin typeface="Calibri"/>
-              </a:rPr>
-              <a:t>Quebrar texto longo em "trechos" de tamanho útil</a:t>
-            </a:r>
+              <a:rPr lang="pt-BR" sz="1600" b="0" dirty="0" err="1">
+                <a:solidFill>
+                  <a:srgbClr val="222222"/>
+                </a:solidFill>
+                <a:latin typeface="Calibri"/>
+              </a:rPr>
+              <a:t>Chunkenização</a:t>
+            </a:r>
+            <a:endParaRPr sz="1600" b="0" dirty="0">
+              <a:solidFill>
+                <a:srgbClr val="222222"/>
+              </a:solidFill>
+              <a:latin typeface="Calibri"/>
+            </a:endParaRPr>
           </a:p>
         </p:txBody>
       </p:sp>
@@ -7381,7 +7331,7 @@
           </a:fontRef>
         </p:style>
         <p:txBody>
-          <a:bodyPr rtlCol="0" anchor="ctr" lIns="182880"/>
+          <a:bodyPr lIns="182880" rtlCol="0" anchor="ctr"/>
           <a:lstStyle/>
           <a:p>
             <a:pPr algn="l"/>
@@ -7405,7 +7355,7 @@
         <p:spPr>
           <a:xfrm>
             <a:off x="3520440" y="4718304"/>
-            <a:ext cx="8229600" cy="685800"/>
+            <a:ext cx="8229600" cy="283154"/>
           </a:xfrm>
           <a:prstGeom prst="rect">
             <a:avLst/>
@@ -7413,21 +7363,27 @@
           <a:noFill/>
         </p:spPr>
         <p:txBody>
-          <a:bodyPr wrap="square" lIns="45720" rIns="45720" tIns="18288" bIns="18288">
+          <a:bodyPr wrap="square" lIns="45720" tIns="18288" rIns="45720" bIns="18288">
             <a:spAutoFit/>
           </a:bodyPr>
           <a:lstStyle/>
           <a:p>
             <a:pPr algn="l"/>
             <a:r>
-              <a:rPr sz="1600" b="0">
-                <a:solidFill>
-                  <a:srgbClr val="222222"/>
-                </a:solidFill>
-                <a:latin typeface="Calibri"/>
-              </a:rPr>
-              <a:t>Transformar texto em números → guardar em "banco de busca"</a:t>
-            </a:r>
+              <a:rPr lang="pt-BR" sz="1600" b="0" dirty="0" err="1">
+                <a:solidFill>
+                  <a:srgbClr val="222222"/>
+                </a:solidFill>
+                <a:latin typeface="Calibri"/>
+              </a:rPr>
+              <a:t>Embeddings</a:t>
+            </a:r>
+            <a:endParaRPr sz="1600" b="0" dirty="0">
+              <a:solidFill>
+                <a:srgbClr val="222222"/>
+              </a:solidFill>
+              <a:latin typeface="Calibri"/>
+            </a:endParaRPr>
           </a:p>
         </p:txBody>
       </p:sp>
@@ -7467,7 +7423,7 @@
           </a:fontRef>
         </p:style>
         <p:txBody>
-          <a:bodyPr rtlCol="0" anchor="ctr" lIns="182880"/>
+          <a:bodyPr lIns="182880" rtlCol="0" anchor="ctr"/>
           <a:lstStyle/>
           <a:p>
             <a:pPr algn="l"/>
@@ -7491,7 +7447,7 @@
         <p:spPr>
           <a:xfrm>
             <a:off x="3520440" y="5513832"/>
-            <a:ext cx="8229600" cy="685800"/>
+            <a:ext cx="8229600" cy="283154"/>
           </a:xfrm>
           <a:prstGeom prst="rect">
             <a:avLst/>
@@ -7499,21 +7455,27 @@
           <a:noFill/>
         </p:spPr>
         <p:txBody>
-          <a:bodyPr wrap="square" lIns="45720" rIns="45720" tIns="18288" bIns="18288">
+          <a:bodyPr wrap="square" lIns="45720" tIns="18288" rIns="45720" bIns="18288">
             <a:spAutoFit/>
           </a:bodyPr>
           <a:lstStyle/>
           <a:p>
             <a:pPr algn="l"/>
             <a:r>
-              <a:rPr sz="1600" b="0">
-                <a:solidFill>
-                  <a:srgbClr val="222222"/>
-                </a:solidFill>
-                <a:latin typeface="Calibri"/>
-              </a:rPr>
-              <a:t>Buscar trechos relevantes → LLM monta a resposta</a:t>
-            </a:r>
+              <a:rPr lang="pt-BR" sz="1600" b="0" dirty="0">
+                <a:solidFill>
+                  <a:srgbClr val="222222"/>
+                </a:solidFill>
+                <a:latin typeface="Calibri"/>
+              </a:rPr>
+              <a:t>Recuperação de informação → LLM monta a resposta</a:t>
+            </a:r>
+            <a:endParaRPr sz="1600" b="0" dirty="0">
+              <a:solidFill>
+                <a:srgbClr val="222222"/>
+              </a:solidFill>
+              <a:latin typeface="Calibri"/>
+            </a:endParaRPr>
           </a:p>
         </p:txBody>
       </p:sp>
@@ -7534,7 +7496,7 @@
           <a:noFill/>
         </p:spPr>
         <p:txBody>
-          <a:bodyPr wrap="square" lIns="45720" rIns="45720" tIns="18288" bIns="18288">
+          <a:bodyPr wrap="square" lIns="45720" tIns="18288" rIns="45720" bIns="18288">
             <a:spAutoFit/>
           </a:bodyPr>
           <a:lstStyle/>
@@ -7569,7 +7531,7 @@
           <a:noFill/>
         </p:spPr>
         <p:txBody>
-          <a:bodyPr wrap="square" lIns="45720" rIns="45720" tIns="18288" bIns="18288">
+          <a:bodyPr wrap="square" lIns="45720" tIns="18288" rIns="45720" bIns="18288">
             <a:spAutoFit/>
           </a:bodyPr>
           <a:lstStyle/>
@@ -7596,7 +7558,7 @@
 </file>
 
 <file path=ppt/slides/slide4.xml><?xml version="1.0" encoding="utf-8"?>
-<p:sld xmlns:a="http://schemas.openxmlformats.org/drawingml/2006/main" xmlns:p="http://schemas.openxmlformats.org/presentationml/2006/main" xmlns:r="http://schemas.openxmlformats.org/officeDocument/2006/relationships">
+<p:sld xmlns:a="http://schemas.openxmlformats.org/drawingml/2006/main" xmlns:r="http://schemas.openxmlformats.org/officeDocument/2006/relationships" xmlns:p="http://schemas.openxmlformats.org/presentationml/2006/main">
   <p:cSld>
     <p:spTree>
       <p:nvGrpSpPr>
@@ -7604,7 +7566,14 @@
         <p:cNvGrpSpPr/>
         <p:nvPr/>
       </p:nvGrpSpPr>
-      <p:grpSpPr/>
+      <p:grpSpPr>
+        <a:xfrm>
+          <a:off x="0" y="0"/>
+          <a:ext cx="0" cy="0"/>
+          <a:chOff x="0" y="0"/>
+          <a:chExt cx="0" cy="0"/>
+        </a:xfrm>
+      </p:grpSpPr>
       <p:sp>
         <p:nvSpPr>
           <p:cNvPr id="2" name="Rectangle 1"/>
@@ -7645,6 +7614,7 @@
           <a:lstStyle/>
           <a:p>
             <a:pPr algn="ctr"/>
+            <a:endParaRPr/>
           </a:p>
         </p:txBody>
       </p:sp>
@@ -7665,7 +7635,7 @@
           <a:noFill/>
         </p:spPr>
         <p:txBody>
-          <a:bodyPr wrap="square" lIns="45720" rIns="45720" tIns="18288" bIns="18288">
+          <a:bodyPr wrap="square" lIns="45720" tIns="18288" rIns="45720" bIns="18288">
             <a:spAutoFit/>
           </a:bodyPr>
           <a:lstStyle/>
@@ -7700,7 +7670,7 @@
           <a:noFill/>
         </p:spPr>
         <p:txBody>
-          <a:bodyPr wrap="square" lIns="45720" rIns="45720" tIns="18288" bIns="18288">
+          <a:bodyPr wrap="square" lIns="45720" tIns="18288" rIns="45720" bIns="18288">
             <a:spAutoFit/>
           </a:bodyPr>
           <a:lstStyle/>
@@ -7727,7 +7697,7 @@
         <p:spPr>
           <a:xfrm>
             <a:off x="548640" y="1234440"/>
-            <a:ext cx="5486400" cy="365760"/>
+            <a:ext cx="5486400" cy="344710"/>
           </a:xfrm>
           <a:prstGeom prst="rect">
             <a:avLst/>
@@ -7735,14 +7705,14 @@
           <a:noFill/>
         </p:spPr>
         <p:txBody>
-          <a:bodyPr wrap="square" lIns="45720" rIns="45720" tIns="18288" bIns="18288">
+          <a:bodyPr wrap="square" lIns="45720" tIns="18288" rIns="45720" bIns="18288">
             <a:spAutoFit/>
           </a:bodyPr>
           <a:lstStyle/>
           <a:p>
             <a:pPr algn="l"/>
             <a:r>
-              <a:rPr sz="1800" b="1">
+              <a:rPr sz="2000" b="1">
                 <a:solidFill>
                   <a:srgbClr val="1A4480"/>
                 </a:solidFill>
@@ -7762,7 +7732,7 @@
         <p:spPr>
           <a:xfrm>
             <a:off x="731520" y="1691640"/>
-            <a:ext cx="5303520" cy="1828800"/>
+            <a:ext cx="5303520" cy="841256"/>
           </a:xfrm>
           <a:prstGeom prst="rect">
             <a:avLst/>
@@ -7781,13 +7751,31 @@
               </a:spcAft>
             </a:pPr>
             <a:r>
-              <a:rPr sz="1200">
-                <a:solidFill>
-                  <a:srgbClr val="222222"/>
-                </a:solidFill>
-                <a:latin typeface="Calibri"/>
-              </a:rPr>
-              <a:t>• Site da ANEEL inspeciona JA3 (TLS fingerprint)</a:t>
+              <a:rPr sz="1400" dirty="0">
+                <a:solidFill>
+                  <a:srgbClr val="222222"/>
+                </a:solidFill>
+                <a:latin typeface="Calibri"/>
+              </a:rPr>
+              <a:t>• Site da ANEEL </a:t>
+            </a:r>
+            <a:r>
+              <a:rPr sz="1400" dirty="0" err="1">
+                <a:solidFill>
+                  <a:srgbClr val="222222"/>
+                </a:solidFill>
+                <a:latin typeface="Calibri"/>
+              </a:rPr>
+              <a:t>inspeciona</a:t>
+            </a:r>
+            <a:r>
+              <a:rPr sz="1400" dirty="0">
+                <a:solidFill>
+                  <a:srgbClr val="222222"/>
+                </a:solidFill>
+                <a:latin typeface="Calibri"/>
+              </a:rPr>
+              <a:t> JA3 (TLS fingerprint)</a:t>
             </a:r>
           </a:p>
           <a:p>
@@ -7797,13 +7785,49 @@
               </a:spcAft>
             </a:pPr>
             <a:r>
-              <a:rPr sz="1200">
-                <a:solidFill>
-                  <a:srgbClr val="222222"/>
-                </a:solidFill>
-                <a:latin typeface="Calibri"/>
-              </a:rPr>
-              <a:t>• requests / httpx → 403. curl_cffi com impersonate=chrome resolve</a:t>
+              <a:rPr sz="1400" dirty="0">
+                <a:solidFill>
+                  <a:srgbClr val="222222"/>
+                </a:solidFill>
+                <a:latin typeface="Calibri"/>
+              </a:rPr>
+              <a:t>• requests / </a:t>
+            </a:r>
+            <a:r>
+              <a:rPr sz="1400" dirty="0" err="1">
+                <a:solidFill>
+                  <a:srgbClr val="222222"/>
+                </a:solidFill>
+                <a:latin typeface="Calibri"/>
+              </a:rPr>
+              <a:t>httpx</a:t>
+            </a:r>
+            <a:r>
+              <a:rPr sz="1400" dirty="0">
+                <a:solidFill>
+                  <a:srgbClr val="222222"/>
+                </a:solidFill>
+                <a:latin typeface="Calibri"/>
+              </a:rPr>
+              <a:t> → 403. </a:t>
+            </a:r>
+            <a:r>
+              <a:rPr sz="1400" dirty="0" err="1">
+                <a:solidFill>
+                  <a:srgbClr val="222222"/>
+                </a:solidFill>
+                <a:latin typeface="Calibri"/>
+              </a:rPr>
+              <a:t>curl_cffi</a:t>
+            </a:r>
+            <a:r>
+              <a:rPr sz="1400" dirty="0">
+                <a:solidFill>
+                  <a:srgbClr val="222222"/>
+                </a:solidFill>
+                <a:latin typeface="Calibri"/>
+              </a:rPr>
+              <a:t> com impersonate=chrome resolve</a:t>
             </a:r>
           </a:p>
           <a:p>
@@ -7813,14 +7837,65 @@
               </a:spcAft>
             </a:pPr>
             <a:r>
-              <a:rPr sz="1200">
-                <a:solidFill>
-                  <a:srgbClr val="222222"/>
-                </a:solidFill>
-                <a:latin typeface="Calibri"/>
-              </a:rPr>
-              <a:t>• Async com 16 conexões paralelas + retry exponencial</a:t>
-            </a:r>
+              <a:rPr sz="1400" dirty="0">
+                <a:solidFill>
+                  <a:srgbClr val="222222"/>
+                </a:solidFill>
+                <a:latin typeface="Calibri"/>
+              </a:rPr>
+              <a:t>• Async com 16 </a:t>
+            </a:r>
+            <a:r>
+              <a:rPr sz="1400" dirty="0" err="1">
+                <a:solidFill>
+                  <a:srgbClr val="222222"/>
+                </a:solidFill>
+                <a:latin typeface="Calibri"/>
+              </a:rPr>
+              <a:t>conexões</a:t>
+            </a:r>
+            <a:r>
+              <a:rPr sz="1400" dirty="0">
+                <a:solidFill>
+                  <a:srgbClr val="222222"/>
+                </a:solidFill>
+                <a:latin typeface="Calibri"/>
+              </a:rPr>
+              <a:t> </a:t>
+            </a:r>
+            <a:r>
+              <a:rPr sz="1400" dirty="0" err="1">
+                <a:solidFill>
+                  <a:srgbClr val="222222"/>
+                </a:solidFill>
+                <a:latin typeface="Calibri"/>
+              </a:rPr>
+              <a:t>paralelas</a:t>
+            </a:r>
+            <a:r>
+              <a:rPr sz="1400" dirty="0">
+                <a:solidFill>
+                  <a:srgbClr val="222222"/>
+                </a:solidFill>
+                <a:latin typeface="Calibri"/>
+              </a:rPr>
+              <a:t> + retry </a:t>
+            </a:r>
+            <a:r>
+              <a:rPr sz="1400" dirty="0" err="1">
+                <a:solidFill>
+                  <a:srgbClr val="222222"/>
+                </a:solidFill>
+                <a:latin typeface="Calibri"/>
+              </a:rPr>
+              <a:t>exponencial</a:t>
+            </a:r>
+            <a:endParaRPr sz="1400" dirty="0">
+              <a:solidFill>
+                <a:srgbClr val="222222"/>
+              </a:solidFill>
+              <a:latin typeface="Calibri"/>
+            </a:endParaRPr>
           </a:p>
         </p:txBody>
       </p:sp>
@@ -7833,7 +7908,7 @@
         <p:spPr>
           <a:xfrm>
             <a:off x="548640" y="3383280"/>
-            <a:ext cx="5486400" cy="365760"/>
+            <a:ext cx="5486400" cy="344710"/>
           </a:xfrm>
           <a:prstGeom prst="rect">
             <a:avLst/>
@@ -7841,20 +7916,56 @@
           <a:noFill/>
         </p:spPr>
         <p:txBody>
-          <a:bodyPr wrap="square" lIns="45720" rIns="45720" tIns="18288" bIns="18288">
+          <a:bodyPr wrap="square" lIns="45720" tIns="18288" rIns="45720" bIns="18288">
             <a:spAutoFit/>
           </a:bodyPr>
           <a:lstStyle/>
           <a:p>
             <a:pPr algn="l"/>
             <a:r>
-              <a:rPr sz="1800" b="1">
+              <a:rPr sz="2000" b="1" dirty="0">
                 <a:solidFill>
                   <a:srgbClr val="1A4480"/>
                 </a:solidFill>
                 <a:latin typeface="Calibri"/>
               </a:rPr>
-              <a:t>🧠 Router por página (não por doc)</a:t>
+              <a:t>🧠 Router por </a:t>
+            </a:r>
+            <a:r>
+              <a:rPr sz="2000" b="1" dirty="0" err="1">
+                <a:solidFill>
+                  <a:srgbClr val="1A4480"/>
+                </a:solidFill>
+                <a:latin typeface="Calibri"/>
+              </a:rPr>
+              <a:t>página</a:t>
+            </a:r>
+            <a:r>
+              <a:rPr sz="2000" b="1" dirty="0">
+                <a:solidFill>
+                  <a:srgbClr val="1A4480"/>
+                </a:solidFill>
+                <a:latin typeface="Calibri"/>
+              </a:rPr>
+              <a:t> (</a:t>
+            </a:r>
+            <a:r>
+              <a:rPr sz="2000" b="1" dirty="0" err="1">
+                <a:solidFill>
+                  <a:srgbClr val="1A4480"/>
+                </a:solidFill>
+                <a:latin typeface="Calibri"/>
+              </a:rPr>
+              <a:t>não</a:t>
+            </a:r>
+            <a:r>
+              <a:rPr sz="2000" b="1" dirty="0">
+                <a:solidFill>
+                  <a:srgbClr val="1A4480"/>
+                </a:solidFill>
+                <a:latin typeface="Calibri"/>
+              </a:rPr>
+              <a:t> por doc)</a:t>
             </a:r>
           </a:p>
         </p:txBody>
@@ -7868,7 +7979,7 @@
         <p:spPr>
           <a:xfrm>
             <a:off x="731520" y="3840480"/>
-            <a:ext cx="5303520" cy="2560320"/>
+            <a:ext cx="5303520" cy="1374735"/>
           </a:xfrm>
           <a:prstGeom prst="rect">
             <a:avLst/>
@@ -7887,13 +7998,85 @@
               </a:spcAft>
             </a:pPr>
             <a:r>
-              <a:rPr sz="1200">
-                <a:solidFill>
-                  <a:srgbClr val="222222"/>
-                </a:solidFill>
-                <a:latin typeface="Calibri"/>
-              </a:rPr>
-              <a:t>• Cada página classificada via PyMuPDF antes do parse:</a:t>
+              <a:rPr sz="1400" dirty="0">
+                <a:solidFill>
+                  <a:srgbClr val="222222"/>
+                </a:solidFill>
+                <a:latin typeface="Calibri"/>
+              </a:rPr>
+              <a:t>• </a:t>
+            </a:r>
+            <a:r>
+              <a:rPr sz="1400" dirty="0" err="1">
+                <a:solidFill>
+                  <a:srgbClr val="222222"/>
+                </a:solidFill>
+                <a:latin typeface="Calibri"/>
+              </a:rPr>
+              <a:t>Cada</a:t>
+            </a:r>
+            <a:r>
+              <a:rPr sz="1400" dirty="0">
+                <a:solidFill>
+                  <a:srgbClr val="222222"/>
+                </a:solidFill>
+                <a:latin typeface="Calibri"/>
+              </a:rPr>
+              <a:t> </a:t>
+            </a:r>
+            <a:r>
+              <a:rPr sz="1400" dirty="0" err="1">
+                <a:solidFill>
+                  <a:srgbClr val="222222"/>
+                </a:solidFill>
+                <a:latin typeface="Calibri"/>
+              </a:rPr>
+              <a:t>página</a:t>
+            </a:r>
+            <a:r>
+              <a:rPr sz="1400" dirty="0">
+                <a:solidFill>
+                  <a:srgbClr val="222222"/>
+                </a:solidFill>
+                <a:latin typeface="Calibri"/>
+              </a:rPr>
+              <a:t> </a:t>
+            </a:r>
+            <a:r>
+              <a:rPr sz="1400" dirty="0" err="1">
+                <a:solidFill>
+                  <a:srgbClr val="222222"/>
+                </a:solidFill>
+                <a:latin typeface="Calibri"/>
+              </a:rPr>
+              <a:t>classificada</a:t>
+            </a:r>
+            <a:r>
+              <a:rPr sz="1400" dirty="0">
+                <a:solidFill>
+                  <a:srgbClr val="222222"/>
+                </a:solidFill>
+                <a:latin typeface="Calibri"/>
+              </a:rPr>
+              <a:t> via </a:t>
+            </a:r>
+            <a:r>
+              <a:rPr sz="1400" dirty="0" err="1">
+                <a:solidFill>
+                  <a:srgbClr val="222222"/>
+                </a:solidFill>
+                <a:latin typeface="Calibri"/>
+              </a:rPr>
+              <a:t>PyMuPDF</a:t>
+            </a:r>
+            <a:r>
+              <a:rPr sz="1400" dirty="0">
+                <a:solidFill>
+                  <a:srgbClr val="222222"/>
+                </a:solidFill>
+                <a:latin typeface="Calibri"/>
+              </a:rPr>
+              <a:t> antes do parse:</a:t>
             </a:r>
           </a:p>
           <a:p>
@@ -7903,14 +8086,65 @@
               </a:spcAft>
             </a:pPr>
             <a:r>
-              <a:rPr sz="1000">
-                <a:solidFill>
-                  <a:srgbClr val="222222"/>
-                </a:solidFill>
-                <a:latin typeface="Calibri"/>
-              </a:rPr>
-              <a:t>– digital → texto extraível direto</a:t>
-            </a:r>
+              <a:rPr sz="1400" dirty="0">
+                <a:solidFill>
+                  <a:srgbClr val="222222"/>
+                </a:solidFill>
+                <a:latin typeface="Calibri"/>
+              </a:rPr>
+              <a:t>– digital → </a:t>
+            </a:r>
+            <a:r>
+              <a:rPr sz="1400" dirty="0" err="1">
+                <a:solidFill>
+                  <a:srgbClr val="222222"/>
+                </a:solidFill>
+                <a:latin typeface="Calibri"/>
+              </a:rPr>
+              <a:t>texto</a:t>
+            </a:r>
+            <a:r>
+              <a:rPr sz="1400" dirty="0">
+                <a:solidFill>
+                  <a:srgbClr val="222222"/>
+                </a:solidFill>
+                <a:latin typeface="Calibri"/>
+              </a:rPr>
+              <a:t> </a:t>
+            </a:r>
+            <a:r>
+              <a:rPr sz="1400" dirty="0" err="1">
+                <a:solidFill>
+                  <a:srgbClr val="222222"/>
+                </a:solidFill>
+                <a:latin typeface="Calibri"/>
+              </a:rPr>
+              <a:t>extraível</a:t>
+            </a:r>
+            <a:r>
+              <a:rPr sz="1400" dirty="0">
+                <a:solidFill>
+                  <a:srgbClr val="222222"/>
+                </a:solidFill>
+                <a:latin typeface="Calibri"/>
+              </a:rPr>
+              <a:t> </a:t>
+            </a:r>
+            <a:r>
+              <a:rPr sz="1400" dirty="0" err="1">
+                <a:solidFill>
+                  <a:srgbClr val="222222"/>
+                </a:solidFill>
+                <a:latin typeface="Calibri"/>
+              </a:rPr>
+              <a:t>direto</a:t>
+            </a:r>
+            <a:endParaRPr sz="1400" dirty="0">
+              <a:solidFill>
+                <a:srgbClr val="222222"/>
+              </a:solidFill>
+              <a:latin typeface="Calibri"/>
+            </a:endParaRPr>
           </a:p>
           <a:p>
             <a:pPr lvl="1">
@@ -7919,13 +8153,85 @@
               </a:spcAft>
             </a:pPr>
             <a:r>
-              <a:rPr sz="1000">
-                <a:solidFill>
-                  <a:srgbClr val="222222"/>
-                </a:solidFill>
-                <a:latin typeface="Calibri"/>
-              </a:rPr>
-              <a:t>– scanned → poucos chars + alta razão de imagem → vision</a:t>
+              <a:rPr sz="1400" dirty="0">
+                <a:solidFill>
+                  <a:srgbClr val="222222"/>
+                </a:solidFill>
+                <a:latin typeface="Calibri"/>
+              </a:rPr>
+              <a:t>– scanned → </a:t>
+            </a:r>
+            <a:r>
+              <a:rPr sz="1400" dirty="0" err="1">
+                <a:solidFill>
+                  <a:srgbClr val="222222"/>
+                </a:solidFill>
+                <a:latin typeface="Calibri"/>
+              </a:rPr>
+              <a:t>poucos</a:t>
+            </a:r>
+            <a:r>
+              <a:rPr sz="1400" dirty="0">
+                <a:solidFill>
+                  <a:srgbClr val="222222"/>
+                </a:solidFill>
+                <a:latin typeface="Calibri"/>
+              </a:rPr>
+              <a:t> chars + </a:t>
+            </a:r>
+            <a:r>
+              <a:rPr sz="1400" dirty="0" err="1">
+                <a:solidFill>
+                  <a:srgbClr val="222222"/>
+                </a:solidFill>
+                <a:latin typeface="Calibri"/>
+              </a:rPr>
+              <a:t>alta</a:t>
+            </a:r>
+            <a:r>
+              <a:rPr sz="1400" dirty="0">
+                <a:solidFill>
+                  <a:srgbClr val="222222"/>
+                </a:solidFill>
+                <a:latin typeface="Calibri"/>
+              </a:rPr>
+              <a:t> </a:t>
+            </a:r>
+            <a:r>
+              <a:rPr sz="1400" dirty="0" err="1">
+                <a:solidFill>
+                  <a:srgbClr val="222222"/>
+                </a:solidFill>
+                <a:latin typeface="Calibri"/>
+              </a:rPr>
+              <a:t>razão</a:t>
+            </a:r>
+            <a:r>
+              <a:rPr sz="1400" dirty="0">
+                <a:solidFill>
+                  <a:srgbClr val="222222"/>
+                </a:solidFill>
+                <a:latin typeface="Calibri"/>
+              </a:rPr>
+              <a:t> de </a:t>
+            </a:r>
+            <a:r>
+              <a:rPr sz="1400" dirty="0" err="1">
+                <a:solidFill>
+                  <a:srgbClr val="222222"/>
+                </a:solidFill>
+                <a:latin typeface="Calibri"/>
+              </a:rPr>
+              <a:t>imagem</a:t>
+            </a:r>
+            <a:r>
+              <a:rPr sz="1400" dirty="0">
+                <a:solidFill>
+                  <a:srgbClr val="222222"/>
+                </a:solidFill>
+                <a:latin typeface="Calibri"/>
+              </a:rPr>
+              <a:t> → vision</a:t>
             </a:r>
           </a:p>
           <a:p>
@@ -7935,13 +8241,67 @@
               </a:spcAft>
             </a:pPr>
             <a:r>
-              <a:rPr sz="1000">
-                <a:solidFill>
-                  <a:srgbClr val="222222"/>
-                </a:solidFill>
-                <a:latin typeface="Calibri"/>
-              </a:rPr>
-              <a:t>– complex → tabelas detectadas → Camelot ou vision</a:t>
+              <a:rPr sz="1400" dirty="0">
+                <a:solidFill>
+                  <a:srgbClr val="222222"/>
+                </a:solidFill>
+                <a:latin typeface="Calibri"/>
+              </a:rPr>
+              <a:t>– complex → </a:t>
+            </a:r>
+            <a:r>
+              <a:rPr sz="1400" dirty="0" err="1">
+                <a:solidFill>
+                  <a:srgbClr val="222222"/>
+                </a:solidFill>
+                <a:latin typeface="Calibri"/>
+              </a:rPr>
+              <a:t>tabelas</a:t>
+            </a:r>
+            <a:r>
+              <a:rPr sz="1400" dirty="0">
+                <a:solidFill>
+                  <a:srgbClr val="222222"/>
+                </a:solidFill>
+                <a:latin typeface="Calibri"/>
+              </a:rPr>
+              <a:t> </a:t>
+            </a:r>
+            <a:r>
+              <a:rPr sz="1400" dirty="0" err="1">
+                <a:solidFill>
+                  <a:srgbClr val="222222"/>
+                </a:solidFill>
+                <a:latin typeface="Calibri"/>
+              </a:rPr>
+              <a:t>detectadas</a:t>
+            </a:r>
+            <a:r>
+              <a:rPr sz="1400" dirty="0">
+                <a:solidFill>
+                  <a:srgbClr val="222222"/>
+                </a:solidFill>
+                <a:latin typeface="Calibri"/>
+              </a:rPr>
+              <a:t> → Camelot </a:t>
+            </a:r>
+            <a:r>
+              <a:rPr sz="1400" dirty="0" err="1">
+                <a:solidFill>
+                  <a:srgbClr val="222222"/>
+                </a:solidFill>
+                <a:latin typeface="Calibri"/>
+              </a:rPr>
+              <a:t>ou</a:t>
+            </a:r>
+            <a:r>
+              <a:rPr sz="1400" dirty="0">
+                <a:solidFill>
+                  <a:srgbClr val="222222"/>
+                </a:solidFill>
+                <a:latin typeface="Calibri"/>
+              </a:rPr>
+              <a:t> vision</a:t>
             </a:r>
           </a:p>
           <a:p>
@@ -7951,14 +8311,101 @@
               </a:spcAft>
             </a:pPr>
             <a:r>
-              <a:rPr sz="1200">
-                <a:solidFill>
-                  <a:srgbClr val="222222"/>
-                </a:solidFill>
-                <a:latin typeface="Calibri"/>
-              </a:rPr>
-              <a:t>• Decisão por página: doc misto é a regra, não exceção</a:t>
-            </a:r>
+              <a:rPr sz="1400" dirty="0">
+                <a:solidFill>
+                  <a:srgbClr val="222222"/>
+                </a:solidFill>
+                <a:latin typeface="Calibri"/>
+              </a:rPr>
+              <a:t>• </a:t>
+            </a:r>
+            <a:r>
+              <a:rPr sz="1400" dirty="0" err="1">
+                <a:solidFill>
+                  <a:srgbClr val="222222"/>
+                </a:solidFill>
+                <a:latin typeface="Calibri"/>
+              </a:rPr>
+              <a:t>Decisão</a:t>
+            </a:r>
+            <a:r>
+              <a:rPr sz="1400" dirty="0">
+                <a:solidFill>
+                  <a:srgbClr val="222222"/>
+                </a:solidFill>
+                <a:latin typeface="Calibri"/>
+              </a:rPr>
+              <a:t> por </a:t>
+            </a:r>
+            <a:r>
+              <a:rPr sz="1400" dirty="0" err="1">
+                <a:solidFill>
+                  <a:srgbClr val="222222"/>
+                </a:solidFill>
+                <a:latin typeface="Calibri"/>
+              </a:rPr>
+              <a:t>página</a:t>
+            </a:r>
+            <a:r>
+              <a:rPr sz="1400" dirty="0">
+                <a:solidFill>
+                  <a:srgbClr val="222222"/>
+                </a:solidFill>
+                <a:latin typeface="Calibri"/>
+              </a:rPr>
+              <a:t>: doc misto é a </a:t>
+            </a:r>
+            <a:r>
+              <a:rPr sz="1400" dirty="0" err="1">
+                <a:solidFill>
+                  <a:srgbClr val="222222"/>
+                </a:solidFill>
+                <a:latin typeface="Calibri"/>
+              </a:rPr>
+              <a:t>regra</a:t>
+            </a:r>
+            <a:r>
+              <a:rPr sz="1400" dirty="0">
+                <a:solidFill>
+                  <a:srgbClr val="222222"/>
+                </a:solidFill>
+                <a:latin typeface="Calibri"/>
+              </a:rPr>
+              <a:t>, </a:t>
+            </a:r>
+            <a:r>
+              <a:rPr sz="1400" dirty="0" err="1">
+                <a:solidFill>
+                  <a:srgbClr val="222222"/>
+                </a:solidFill>
+                <a:latin typeface="Calibri"/>
+              </a:rPr>
+              <a:t>não</a:t>
+            </a:r>
+            <a:r>
+              <a:rPr sz="1400" dirty="0">
+                <a:solidFill>
+                  <a:srgbClr val="222222"/>
+                </a:solidFill>
+                <a:latin typeface="Calibri"/>
+              </a:rPr>
+              <a:t> </a:t>
+            </a:r>
+            <a:r>
+              <a:rPr sz="1400" dirty="0" err="1">
+                <a:solidFill>
+                  <a:srgbClr val="222222"/>
+                </a:solidFill>
+                <a:latin typeface="Calibri"/>
+              </a:rPr>
+              <a:t>exceção</a:t>
+            </a:r>
+            <a:endParaRPr sz="1400" dirty="0">
+              <a:solidFill>
+                <a:srgbClr val="222222"/>
+              </a:solidFill>
+              <a:latin typeface="Calibri"/>
+            </a:endParaRPr>
           </a:p>
         </p:txBody>
       </p:sp>
@@ -7979,7 +8426,7 @@
           <a:noFill/>
         </p:spPr>
         <p:txBody>
-          <a:bodyPr wrap="square" lIns="45720" rIns="45720" tIns="18288" bIns="18288">
+          <a:bodyPr wrap="square" lIns="45720" tIns="18288" rIns="45720" bIns="18288">
             <a:spAutoFit/>
           </a:bodyPr>
           <a:lstStyle/>
@@ -8039,6 +8486,7 @@
           <a:lstStyle/>
           <a:p>
             <a:pPr algn="ctr"/>
+            <a:endParaRPr sz="2400"/>
           </a:p>
         </p:txBody>
       </p:sp>
@@ -8051,7 +8499,7 @@
         <p:spPr>
           <a:xfrm>
             <a:off x="6583680" y="1783080"/>
-            <a:ext cx="5029200" cy="457200"/>
+            <a:ext cx="5029200" cy="313932"/>
           </a:xfrm>
           <a:prstGeom prst="rect">
             <a:avLst/>
@@ -8059,14 +8507,14 @@
           <a:noFill/>
         </p:spPr>
         <p:txBody>
-          <a:bodyPr wrap="square" lIns="45720" rIns="45720" tIns="18288" bIns="18288">
+          <a:bodyPr wrap="square" lIns="45720" tIns="18288" rIns="45720" bIns="18288">
             <a:spAutoFit/>
           </a:bodyPr>
           <a:lstStyle/>
           <a:p>
             <a:pPr algn="l"/>
             <a:r>
-              <a:rPr sz="1500" b="1">
+              <a:rPr b="1">
                 <a:solidFill>
                   <a:srgbClr val="228844"/>
                 </a:solidFill>
@@ -8086,7 +8534,7 @@
         <p:spPr>
           <a:xfrm>
             <a:off x="6583680" y="2240280"/>
-            <a:ext cx="5029200" cy="1554480"/>
+            <a:ext cx="5029200" cy="1021818"/>
           </a:xfrm>
           <a:prstGeom prst="rect">
             <a:avLst/>
@@ -8094,14 +8542,14 @@
           <a:noFill/>
         </p:spPr>
         <p:txBody>
-          <a:bodyPr wrap="square" lIns="45720" rIns="45720" tIns="18288" bIns="18288">
+          <a:bodyPr wrap="square" lIns="45720" tIns="18288" rIns="45720" bIns="18288">
             <a:spAutoFit/>
           </a:bodyPr>
           <a:lstStyle/>
           <a:p>
             <a:pPr algn="l"/>
             <a:r>
-              <a:rPr sz="1200" b="0">
+              <a:rPr sz="1600" b="0">
                 <a:solidFill>
                   <a:srgbClr val="222222"/>
                 </a:solidFill>
@@ -8113,7 +8561,7 @@
           <a:p>
             <a:pPr algn="l"/>
             <a:r>
-              <a:rPr sz="1200" b="0">
+              <a:rPr sz="1600" b="0">
                 <a:solidFill>
                   <a:srgbClr val="222222"/>
                 </a:solidFill>
@@ -8125,7 +8573,7 @@
           <a:p>
             <a:pPr algn="l"/>
             <a:r>
-              <a:rPr sz="1200" b="0">
+              <a:rPr sz="1600" b="0">
                 <a:solidFill>
                   <a:srgbClr val="222222"/>
                 </a:solidFill>
@@ -8137,7 +8585,7 @@
           <a:p>
             <a:pPr algn="l"/>
             <a:r>
-              <a:rPr sz="1200" b="0">
+              <a:rPr sz="1600" b="0">
                 <a:solidFill>
                   <a:srgbClr val="222222"/>
                 </a:solidFill>
@@ -8190,6 +8638,7 @@
           <a:lstStyle/>
           <a:p>
             <a:pPr algn="ctr"/>
+            <a:endParaRPr sz="2400"/>
           </a:p>
         </p:txBody>
       </p:sp>
@@ -8202,7 +8651,7 @@
         <p:spPr>
           <a:xfrm>
             <a:off x="6583680" y="3931920"/>
-            <a:ext cx="5029200" cy="457200"/>
+            <a:ext cx="5029200" cy="313932"/>
           </a:xfrm>
           <a:prstGeom prst="rect">
             <a:avLst/>
@@ -8210,14 +8659,14 @@
           <a:noFill/>
         </p:spPr>
         <p:txBody>
-          <a:bodyPr wrap="square" lIns="45720" rIns="45720" tIns="18288" bIns="18288">
+          <a:bodyPr wrap="square" lIns="45720" tIns="18288" rIns="45720" bIns="18288">
             <a:spAutoFit/>
           </a:bodyPr>
           <a:lstStyle/>
           <a:p>
             <a:pPr algn="l"/>
             <a:r>
-              <a:rPr sz="1500" b="1">
+              <a:rPr b="1">
                 <a:solidFill>
                   <a:srgbClr val="C26B00"/>
                 </a:solidFill>
@@ -8237,7 +8686,7 @@
         <p:spPr>
           <a:xfrm>
             <a:off x="6583680" y="4389120"/>
-            <a:ext cx="5029200" cy="1554480"/>
+            <a:ext cx="5029200" cy="1021818"/>
           </a:xfrm>
           <a:prstGeom prst="rect">
             <a:avLst/>
@@ -8245,14 +8694,14 @@
           <a:noFill/>
         </p:spPr>
         <p:txBody>
-          <a:bodyPr wrap="square" lIns="45720" rIns="45720" tIns="18288" bIns="18288">
+          <a:bodyPr wrap="square" lIns="45720" tIns="18288" rIns="45720" bIns="18288">
             <a:spAutoFit/>
           </a:bodyPr>
           <a:lstStyle/>
           <a:p>
             <a:pPr algn="l"/>
             <a:r>
-              <a:rPr sz="1200" b="0">
+              <a:rPr sz="1600" b="0">
                 <a:solidFill>
                   <a:srgbClr val="222222"/>
                 </a:solidFill>
@@ -8264,7 +8713,7 @@
           <a:p>
             <a:pPr algn="l"/>
             <a:r>
-              <a:rPr sz="1200" b="0">
+              <a:rPr sz="1600" b="0">
                 <a:solidFill>
                   <a:srgbClr val="222222"/>
                 </a:solidFill>
@@ -8276,7 +8725,7 @@
           <a:p>
             <a:pPr algn="l"/>
             <a:r>
-              <a:rPr sz="1200" b="0">
+              <a:rPr sz="1600" b="0">
                 <a:solidFill>
                   <a:srgbClr val="222222"/>
                 </a:solidFill>
@@ -8288,7 +8737,7 @@
           <a:p>
             <a:pPr algn="l"/>
             <a:r>
-              <a:rPr sz="1200" b="0">
+              <a:rPr sz="1600" b="0">
                 <a:solidFill>
                   <a:srgbClr val="222222"/>
                 </a:solidFill>
@@ -8316,7 +8765,7 @@
           <a:noFill/>
         </p:spPr>
         <p:txBody>
-          <a:bodyPr wrap="square" lIns="45720" rIns="45720" tIns="18288" bIns="18288">
+          <a:bodyPr wrap="square" lIns="45720" tIns="18288" rIns="45720" bIns="18288">
             <a:spAutoFit/>
           </a:bodyPr>
           <a:lstStyle/>
@@ -8351,7 +8800,7 @@
           <a:noFill/>
         </p:spPr>
         <p:txBody>
-          <a:bodyPr wrap="square" lIns="45720" rIns="45720" tIns="18288" bIns="18288">
+          <a:bodyPr wrap="square" lIns="45720" tIns="18288" rIns="45720" bIns="18288">
             <a:spAutoFit/>
           </a:bodyPr>
           <a:lstStyle/>
@@ -8386,7 +8835,7 @@
           <a:noFill/>
         </p:spPr>
         <p:txBody>
-          <a:bodyPr wrap="square" lIns="45720" rIns="45720" tIns="18288" bIns="18288">
+          <a:bodyPr wrap="square" lIns="45720" tIns="18288" rIns="45720" bIns="18288">
             <a:spAutoFit/>
           </a:bodyPr>
           <a:lstStyle/>
@@ -8413,7 +8862,7 @@
 </file>
 
 <file path=ppt/slides/slide5.xml><?xml version="1.0" encoding="utf-8"?>
-<p:sld xmlns:a="http://schemas.openxmlformats.org/drawingml/2006/main" xmlns:p="http://schemas.openxmlformats.org/presentationml/2006/main" xmlns:r="http://schemas.openxmlformats.org/officeDocument/2006/relationships">
+<p:sld xmlns:a="http://schemas.openxmlformats.org/drawingml/2006/main" xmlns:r="http://schemas.openxmlformats.org/officeDocument/2006/relationships" xmlns:p="http://schemas.openxmlformats.org/presentationml/2006/main">
   <p:cSld>
     <p:spTree>
       <p:nvGrpSpPr>
@@ -8421,7 +8870,14 @@
         <p:cNvGrpSpPr/>
         <p:nvPr/>
       </p:nvGrpSpPr>
-      <p:grpSpPr/>
+      <p:grpSpPr>
+        <a:xfrm>
+          <a:off x="0" y="0"/>
+          <a:ext cx="0" cy="0"/>
+          <a:chOff x="0" y="0"/>
+          <a:chExt cx="0" cy="0"/>
+        </a:xfrm>
+      </p:grpSpPr>
       <p:sp>
         <p:nvSpPr>
           <p:cNvPr id="2" name="Rectangle 1"/>
@@ -8462,6 +8918,7 @@
           <a:lstStyle/>
           <a:p>
             <a:pPr algn="ctr"/>
+            <a:endParaRPr/>
           </a:p>
         </p:txBody>
       </p:sp>
@@ -8482,7 +8939,7 @@
           <a:noFill/>
         </p:spPr>
         <p:txBody>
-          <a:bodyPr wrap="square" lIns="45720" rIns="45720" tIns="18288" bIns="18288">
+          <a:bodyPr wrap="square" lIns="45720" tIns="18288" rIns="45720" bIns="18288">
             <a:spAutoFit/>
           </a:bodyPr>
           <a:lstStyle/>
@@ -8517,7 +8974,7 @@
           <a:noFill/>
         </p:spPr>
         <p:txBody>
-          <a:bodyPr wrap="square" lIns="45720" rIns="45720" tIns="18288" bIns="18288">
+          <a:bodyPr wrap="square" lIns="45720" tIns="18288" rIns="45720" bIns="18288">
             <a:spAutoFit/>
           </a:bodyPr>
           <a:lstStyle/>
@@ -8552,7 +9009,7 @@
           <a:noFill/>
         </p:spPr>
         <p:txBody>
-          <a:bodyPr wrap="square" lIns="45720" rIns="45720" tIns="18288" bIns="18288">
+          <a:bodyPr wrap="square" lIns="45720" tIns="18288" rIns="45720" bIns="18288">
             <a:spAutoFit/>
           </a:bodyPr>
           <a:lstStyle/>
@@ -8587,7 +9044,7 @@
           <a:noFill/>
         </p:spPr>
         <p:txBody>
-          <a:bodyPr wrap="square" lIns="45720" rIns="45720" tIns="18288" bIns="18288">
+          <a:bodyPr wrap="square" lIns="45720" tIns="18288" rIns="45720" bIns="18288">
             <a:spAutoFit/>
           </a:bodyPr>
           <a:lstStyle/>
@@ -8643,7 +9100,7 @@
           </a:fontRef>
         </p:style>
         <p:txBody>
-          <a:bodyPr rtlCol="0" anchor="ctr" lIns="137160"/>
+          <a:bodyPr lIns="137160" rtlCol="0" anchor="ctr"/>
           <a:lstStyle/>
           <a:p>
             <a:pPr algn="ctr"/>
@@ -8683,7 +9140,7 @@
           <a:noFill/>
         </p:spPr>
         <p:txBody>
-          <a:bodyPr wrap="square" lIns="45720" rIns="45720" tIns="18288" bIns="18288">
+          <a:bodyPr wrap="square" lIns="45720" tIns="18288" rIns="45720" bIns="18288">
             <a:spAutoFit/>
           </a:bodyPr>
           <a:lstStyle/>
@@ -8814,6 +9271,7 @@
           <a:lstStyle/>
           <a:p>
             <a:pPr algn="ctr"/>
+            <a:endParaRPr/>
           </a:p>
         </p:txBody>
       </p:sp>
@@ -8834,7 +9292,7 @@
           <a:noFill/>
         </p:spPr>
         <p:txBody>
-          <a:bodyPr wrap="square" lIns="45720" rIns="45720" tIns="18288" bIns="18288">
+          <a:bodyPr wrap="square" lIns="45720" tIns="18288" rIns="45720" bIns="18288">
             <a:spAutoFit/>
           </a:bodyPr>
           <a:lstStyle/>
@@ -8947,7 +9405,7 @@
         </p:nvSpPr>
         <p:spPr>
           <a:xfrm>
-            <a:off x="548640" y="5943600"/>
+            <a:off x="548640" y="6242685"/>
             <a:ext cx="10972800" cy="365760"/>
           </a:xfrm>
           <a:prstGeom prst="rect">
@@ -8956,20 +9414,227 @@
           <a:noFill/>
         </p:spPr>
         <p:txBody>
-          <a:bodyPr wrap="square" lIns="45720" rIns="45720" tIns="18288" bIns="18288">
+          <a:bodyPr wrap="square" lIns="45720" tIns="18288" rIns="45720" bIns="18288">
             <a:spAutoFit/>
           </a:bodyPr>
           <a:lstStyle/>
           <a:p>
             <a:pPr algn="l"/>
             <a:r>
-              <a:rPr sz="1500" b="1">
+              <a:rPr sz="1500" b="1" dirty="0" err="1">
                 <a:solidFill>
                   <a:srgbClr val="1A4480"/>
                 </a:solidFill>
                 <a:latin typeface="Calibri"/>
               </a:rPr>
-              <a:t>Problema: PDF não armazena flag "isto é tachado". Texto e linha são camadas separadas — preciso cruzar.</a:t>
+              <a:t>Problema</a:t>
+            </a:r>
+            <a:r>
+              <a:rPr sz="1500" b="1" dirty="0">
+                <a:solidFill>
+                  <a:srgbClr val="1A4480"/>
+                </a:solidFill>
+                <a:latin typeface="Calibri"/>
+              </a:rPr>
+              <a:t>: PDF </a:t>
+            </a:r>
+            <a:r>
+              <a:rPr sz="1500" b="1" dirty="0" err="1">
+                <a:solidFill>
+                  <a:srgbClr val="1A4480"/>
+                </a:solidFill>
+                <a:latin typeface="Calibri"/>
+              </a:rPr>
+              <a:t>não</a:t>
+            </a:r>
+            <a:r>
+              <a:rPr sz="1500" b="1" dirty="0">
+                <a:solidFill>
+                  <a:srgbClr val="1A4480"/>
+                </a:solidFill>
+                <a:latin typeface="Calibri"/>
+              </a:rPr>
+              <a:t> </a:t>
+            </a:r>
+            <a:r>
+              <a:rPr sz="1500" b="1" dirty="0" err="1">
+                <a:solidFill>
+                  <a:srgbClr val="1A4480"/>
+                </a:solidFill>
+                <a:latin typeface="Calibri"/>
+              </a:rPr>
+              <a:t>armazena</a:t>
+            </a:r>
+            <a:r>
+              <a:rPr sz="1500" b="1" dirty="0">
+                <a:solidFill>
+                  <a:srgbClr val="1A4480"/>
+                </a:solidFill>
+                <a:latin typeface="Calibri"/>
+              </a:rPr>
+              <a:t> flag "</a:t>
+            </a:r>
+            <a:r>
+              <a:rPr sz="1500" b="1" dirty="0" err="1">
+                <a:solidFill>
+                  <a:srgbClr val="1A4480"/>
+                </a:solidFill>
+                <a:latin typeface="Calibri"/>
+              </a:rPr>
+              <a:t>isto</a:t>
+            </a:r>
+            <a:r>
+              <a:rPr sz="1500" b="1" dirty="0">
+                <a:solidFill>
+                  <a:srgbClr val="1A4480"/>
+                </a:solidFill>
+                <a:latin typeface="Calibri"/>
+              </a:rPr>
+              <a:t> é </a:t>
+            </a:r>
+            <a:r>
+              <a:rPr sz="1500" b="1" dirty="0" err="1">
+                <a:solidFill>
+                  <a:srgbClr val="1A4480"/>
+                </a:solidFill>
+                <a:latin typeface="Calibri"/>
+              </a:rPr>
+              <a:t>tachado</a:t>
+            </a:r>
+            <a:r>
+              <a:rPr sz="1500" b="1" dirty="0">
+                <a:solidFill>
+                  <a:srgbClr val="1A4480"/>
+                </a:solidFill>
+                <a:latin typeface="Calibri"/>
+              </a:rPr>
+              <a:t>". </a:t>
+            </a:r>
+            <a:r>
+              <a:rPr sz="1500" b="1" dirty="0" err="1">
+                <a:solidFill>
+                  <a:srgbClr val="1A4480"/>
+                </a:solidFill>
+                <a:latin typeface="Calibri"/>
+              </a:rPr>
+              <a:t>Texto</a:t>
+            </a:r>
+            <a:r>
+              <a:rPr sz="1500" b="1" dirty="0">
+                <a:solidFill>
+                  <a:srgbClr val="1A4480"/>
+                </a:solidFill>
+                <a:latin typeface="Calibri"/>
+              </a:rPr>
+              <a:t> e </a:t>
+            </a:r>
+            <a:r>
+              <a:rPr sz="1500" b="1" dirty="0" err="1">
+                <a:solidFill>
+                  <a:srgbClr val="1A4480"/>
+                </a:solidFill>
+                <a:latin typeface="Calibri"/>
+              </a:rPr>
+              <a:t>linha</a:t>
+            </a:r>
+            <a:r>
+              <a:rPr sz="1500" b="1" dirty="0">
+                <a:solidFill>
+                  <a:srgbClr val="1A4480"/>
+                </a:solidFill>
+                <a:latin typeface="Calibri"/>
+              </a:rPr>
+              <a:t> </a:t>
+            </a:r>
+            <a:r>
+              <a:rPr sz="1500" b="1" dirty="0" err="1">
+                <a:solidFill>
+                  <a:srgbClr val="1A4480"/>
+                </a:solidFill>
+                <a:latin typeface="Calibri"/>
+              </a:rPr>
+              <a:t>são</a:t>
+            </a:r>
+            <a:r>
+              <a:rPr sz="1500" b="1" dirty="0">
+                <a:solidFill>
+                  <a:srgbClr val="1A4480"/>
+                </a:solidFill>
+                <a:latin typeface="Calibri"/>
+              </a:rPr>
+              <a:t> </a:t>
+            </a:r>
+            <a:r>
+              <a:rPr sz="1500" b="1" dirty="0" err="1">
+                <a:solidFill>
+                  <a:srgbClr val="1A4480"/>
+                </a:solidFill>
+                <a:latin typeface="Calibri"/>
+              </a:rPr>
+              <a:t>camadas</a:t>
+            </a:r>
+            <a:r>
+              <a:rPr sz="1500" b="1" dirty="0">
+                <a:solidFill>
+                  <a:srgbClr val="1A4480"/>
+                </a:solidFill>
+                <a:latin typeface="Calibri"/>
+              </a:rPr>
+              <a:t> </a:t>
+            </a:r>
+            <a:r>
+              <a:rPr sz="1500" b="1" dirty="0" err="1">
+                <a:solidFill>
+                  <a:srgbClr val="1A4480"/>
+                </a:solidFill>
+                <a:latin typeface="Calibri"/>
+              </a:rPr>
+              <a:t>separadas</a:t>
+            </a:r>
+            <a:r>
+              <a:rPr sz="1500" b="1" dirty="0">
+                <a:solidFill>
+                  <a:srgbClr val="1A4480"/>
+                </a:solidFill>
+                <a:latin typeface="Calibri"/>
+              </a:rPr>
+              <a:t> — </a:t>
+            </a:r>
+            <a:r>
+              <a:rPr sz="1500" b="1" dirty="0" err="1">
+                <a:solidFill>
+                  <a:srgbClr val="1A4480"/>
+                </a:solidFill>
+                <a:latin typeface="Calibri"/>
+              </a:rPr>
+              <a:t>preciso</a:t>
+            </a:r>
+            <a:r>
+              <a:rPr sz="1500" b="1" dirty="0">
+                <a:solidFill>
+                  <a:srgbClr val="1A4480"/>
+                </a:solidFill>
+                <a:latin typeface="Calibri"/>
+              </a:rPr>
+              <a:t> </a:t>
+            </a:r>
+            <a:r>
+              <a:rPr sz="1500" b="1" dirty="0" err="1">
+                <a:solidFill>
+                  <a:srgbClr val="1A4480"/>
+                </a:solidFill>
+                <a:latin typeface="Calibri"/>
+              </a:rPr>
+              <a:t>cruzar</a:t>
+            </a:r>
+            <a:r>
+              <a:rPr sz="1500" b="1" dirty="0">
+                <a:solidFill>
+                  <a:srgbClr val="1A4480"/>
+                </a:solidFill>
+                <a:latin typeface="Calibri"/>
+              </a:rPr>
+              <a:t>.</a:t>
             </a:r>
           </a:p>
         </p:txBody>
@@ -8991,7 +9656,7 @@
           <a:noFill/>
         </p:spPr>
         <p:txBody>
-          <a:bodyPr wrap="square" lIns="45720" rIns="45720" tIns="18288" bIns="18288">
+          <a:bodyPr wrap="square" lIns="45720" tIns="18288" rIns="45720" bIns="18288">
             <a:spAutoFit/>
           </a:bodyPr>
           <a:lstStyle/>
@@ -9026,7 +9691,7 @@
           <a:noFill/>
         </p:spPr>
         <p:txBody>
-          <a:bodyPr wrap="square" lIns="45720" rIns="45720" tIns="18288" bIns="18288">
+          <a:bodyPr wrap="square" lIns="45720" tIns="18288" rIns="45720" bIns="18288">
             <a:spAutoFit/>
           </a:bodyPr>
           <a:lstStyle/>
@@ -9053,7 +9718,7 @@
 </file>
 
 <file path=ppt/slides/slide6.xml><?xml version="1.0" encoding="utf-8"?>
-<p:sld xmlns:a="http://schemas.openxmlformats.org/drawingml/2006/main" xmlns:p="http://schemas.openxmlformats.org/presentationml/2006/main" xmlns:r="http://schemas.openxmlformats.org/officeDocument/2006/relationships">
+<p:sld xmlns:a="http://schemas.openxmlformats.org/drawingml/2006/main" xmlns:r="http://schemas.openxmlformats.org/officeDocument/2006/relationships" xmlns:p="http://schemas.openxmlformats.org/presentationml/2006/main">
   <p:cSld>
     <p:spTree>
       <p:nvGrpSpPr>
@@ -9061,7 +9726,14 @@
         <p:cNvGrpSpPr/>
         <p:nvPr/>
       </p:nvGrpSpPr>
-      <p:grpSpPr/>
+      <p:grpSpPr>
+        <a:xfrm>
+          <a:off x="0" y="0"/>
+          <a:ext cx="0" cy="0"/>
+          <a:chOff x="0" y="0"/>
+          <a:chExt cx="0" cy="0"/>
+        </a:xfrm>
+      </p:grpSpPr>
       <p:sp>
         <p:nvSpPr>
           <p:cNvPr id="2" name="Rectangle 1"/>
@@ -9102,6 +9774,7 @@
           <a:lstStyle/>
           <a:p>
             <a:pPr algn="ctr"/>
+            <a:endParaRPr/>
           </a:p>
         </p:txBody>
       </p:sp>
@@ -9122,7 +9795,7 @@
           <a:noFill/>
         </p:spPr>
         <p:txBody>
-          <a:bodyPr wrap="square" lIns="45720" rIns="45720" tIns="18288" bIns="18288">
+          <a:bodyPr wrap="square" lIns="45720" tIns="18288" rIns="45720" bIns="18288">
             <a:spAutoFit/>
           </a:bodyPr>
           <a:lstStyle/>
@@ -9157,7 +9830,7 @@
           <a:noFill/>
         </p:spPr>
         <p:txBody>
-          <a:bodyPr wrap="square" lIns="45720" rIns="45720" tIns="18288" bIns="18288">
+          <a:bodyPr wrap="square" lIns="45720" tIns="18288" rIns="45720" bIns="18288">
             <a:spAutoFit/>
           </a:bodyPr>
           <a:lstStyle/>
@@ -9192,7 +9865,7 @@
           <a:noFill/>
         </p:spPr>
         <p:txBody>
-          <a:bodyPr wrap="square" lIns="45720" rIns="45720" tIns="18288" bIns="18288">
+          <a:bodyPr wrap="square" lIns="45720" tIns="18288" rIns="45720" bIns="18288">
             <a:spAutoFit/>
           </a:bodyPr>
           <a:lstStyle/>
@@ -9248,7 +9921,7 @@
           </a:fontRef>
         </p:style>
         <p:txBody>
-          <a:bodyPr rtlCol="0" anchor="ctr" lIns="137160"/>
+          <a:bodyPr lIns="137160" rtlCol="0" anchor="ctr"/>
           <a:lstStyle/>
           <a:p>
             <a:pPr algn="ctr"/>
@@ -9311,7 +9984,7 @@
           </a:fontRef>
         </p:style>
         <p:txBody>
-          <a:bodyPr rtlCol="0" anchor="ctr" lIns="137160"/>
+          <a:bodyPr lIns="137160" rtlCol="0" anchor="ctr"/>
           <a:lstStyle/>
           <a:p>
             <a:pPr algn="ctr"/>
@@ -9374,7 +10047,7 @@
           </a:fontRef>
         </p:style>
         <p:txBody>
-          <a:bodyPr rtlCol="0" anchor="ctr" lIns="137160"/>
+          <a:bodyPr lIns="137160" rtlCol="0" anchor="ctr"/>
           <a:lstStyle/>
           <a:p>
             <a:pPr algn="ctr"/>
@@ -9416,7 +10089,7 @@
           <a:noFill/>
         </p:spPr>
         <p:txBody>
-          <a:bodyPr wrap="square" lIns="45720" rIns="45720" tIns="18288" bIns="18288">
+          <a:bodyPr wrap="square" lIns="45720" tIns="18288" rIns="45720" bIns="18288">
             <a:spAutoFit/>
           </a:bodyPr>
           <a:lstStyle/>
@@ -9476,6 +10149,7 @@
           <a:lstStyle/>
           <a:p>
             <a:pPr algn="ctr"/>
+            <a:endParaRPr/>
           </a:p>
         </p:txBody>
       </p:sp>
@@ -9496,7 +10170,7 @@
           <a:noFill/>
         </p:spPr>
         <p:txBody>
-          <a:bodyPr wrap="square" lIns="45720" rIns="45720" tIns="18288" bIns="18288">
+          <a:bodyPr wrap="square" lIns="45720" tIns="18288" rIns="45720" bIns="18288">
             <a:spAutoFit/>
           </a:bodyPr>
           <a:lstStyle/>
@@ -9531,7 +10205,7 @@
           <a:noFill/>
         </p:spPr>
         <p:txBody>
-          <a:bodyPr wrap="square" lIns="45720" rIns="45720" tIns="18288" bIns="18288">
+          <a:bodyPr wrap="square" lIns="45720" tIns="18288" rIns="45720" bIns="18288">
             <a:spAutoFit/>
           </a:bodyPr>
           <a:lstStyle/>
@@ -9589,6 +10263,7 @@
           <a:lstStyle/>
           <a:p>
             <a:pPr algn="ctr"/>
+            <a:endParaRPr/>
           </a:p>
         </p:txBody>
       </p:sp>
@@ -9609,7 +10284,7 @@
           <a:noFill/>
         </p:spPr>
         <p:txBody>
-          <a:bodyPr wrap="square" lIns="45720" rIns="45720" tIns="18288" bIns="18288">
+          <a:bodyPr wrap="square" lIns="45720" tIns="18288" rIns="45720" bIns="18288">
             <a:spAutoFit/>
           </a:bodyPr>
           <a:lstStyle/>
@@ -9679,7 +10354,7 @@
           <a:noFill/>
         </p:spPr>
         <p:txBody>
-          <a:bodyPr wrap="square" lIns="45720" rIns="45720" tIns="18288" bIns="18288">
+          <a:bodyPr wrap="square" lIns="45720" tIns="18288" rIns="45720" bIns="18288">
             <a:spAutoFit/>
           </a:bodyPr>
           <a:lstStyle/>
@@ -9714,7 +10389,7 @@
           <a:noFill/>
         </p:spPr>
         <p:txBody>
-          <a:bodyPr wrap="square" lIns="45720" rIns="45720" tIns="18288" bIns="18288">
+          <a:bodyPr wrap="square" lIns="45720" tIns="18288" rIns="45720" bIns="18288">
             <a:spAutoFit/>
           </a:bodyPr>
           <a:lstStyle/>
@@ -9749,7 +10424,7 @@
           <a:noFill/>
         </p:spPr>
         <p:txBody>
-          <a:bodyPr wrap="square" lIns="45720" rIns="45720" tIns="18288" bIns="18288">
+          <a:bodyPr wrap="square" lIns="45720" tIns="18288" rIns="45720" bIns="18288">
             <a:spAutoFit/>
           </a:bodyPr>
           <a:lstStyle/>
@@ -9784,7 +10459,7 @@
           <a:noFill/>
         </p:spPr>
         <p:txBody>
-          <a:bodyPr wrap="square" lIns="45720" rIns="45720" tIns="18288" bIns="18288">
+          <a:bodyPr wrap="square" lIns="45720" tIns="18288" rIns="45720" bIns="18288">
             <a:spAutoFit/>
           </a:bodyPr>
           <a:lstStyle/>
@@ -9819,7 +10494,7 @@
           <a:noFill/>
         </p:spPr>
         <p:txBody>
-          <a:bodyPr wrap="square" lIns="45720" rIns="45720" tIns="18288" bIns="18288">
+          <a:bodyPr wrap="square" lIns="45720" tIns="18288" rIns="45720" bIns="18288">
             <a:spAutoFit/>
           </a:bodyPr>
           <a:lstStyle/>
@@ -9854,7 +10529,7 @@
           <a:noFill/>
         </p:spPr>
         <p:txBody>
-          <a:bodyPr wrap="square" lIns="45720" rIns="45720" tIns="18288" bIns="18288">
+          <a:bodyPr wrap="square" lIns="45720" tIns="18288" rIns="45720" bIns="18288">
             <a:spAutoFit/>
           </a:bodyPr>
           <a:lstStyle/>
@@ -9889,7 +10564,7 @@
           <a:noFill/>
         </p:spPr>
         <p:txBody>
-          <a:bodyPr wrap="square" lIns="45720" rIns="45720" tIns="18288" bIns="18288">
+          <a:bodyPr wrap="square" lIns="45720" tIns="18288" rIns="45720" bIns="18288">
             <a:spAutoFit/>
           </a:bodyPr>
           <a:lstStyle/>
@@ -9924,7 +10599,7 @@
           <a:noFill/>
         </p:spPr>
         <p:txBody>
-          <a:bodyPr wrap="square" lIns="45720" rIns="45720" tIns="18288" bIns="18288">
+          <a:bodyPr wrap="square" lIns="45720" tIns="18288" rIns="45720" bIns="18288">
             <a:spAutoFit/>
           </a:bodyPr>
           <a:lstStyle/>
@@ -9951,7 +10626,7 @@
 </file>
 
 <file path=ppt/slides/slide7.xml><?xml version="1.0" encoding="utf-8"?>
-<p:sld xmlns:a="http://schemas.openxmlformats.org/drawingml/2006/main" xmlns:p="http://schemas.openxmlformats.org/presentationml/2006/main" xmlns:r="http://schemas.openxmlformats.org/officeDocument/2006/relationships">
+<p:sld xmlns:a="http://schemas.openxmlformats.org/drawingml/2006/main" xmlns:r="http://schemas.openxmlformats.org/officeDocument/2006/relationships" xmlns:p="http://schemas.openxmlformats.org/presentationml/2006/main">
   <p:cSld>
     <p:spTree>
       <p:nvGrpSpPr>
@@ -9959,7 +10634,14 @@
         <p:cNvGrpSpPr/>
         <p:nvPr/>
       </p:nvGrpSpPr>
-      <p:grpSpPr/>
+      <p:grpSpPr>
+        <a:xfrm>
+          <a:off x="0" y="0"/>
+          <a:ext cx="0" cy="0"/>
+          <a:chOff x="0" y="0"/>
+          <a:chExt cx="0" cy="0"/>
+        </a:xfrm>
+      </p:grpSpPr>
       <p:sp>
         <p:nvSpPr>
           <p:cNvPr id="2" name="Rectangle 1"/>
@@ -10000,6 +10682,7 @@
           <a:lstStyle/>
           <a:p>
             <a:pPr algn="ctr"/>
+            <a:endParaRPr/>
           </a:p>
         </p:txBody>
       </p:sp>
@@ -10020,7 +10703,7 @@
           <a:noFill/>
         </p:spPr>
         <p:txBody>
-          <a:bodyPr wrap="square" lIns="45720" rIns="45720" tIns="18288" bIns="18288">
+          <a:bodyPr wrap="square" lIns="45720" tIns="18288" rIns="45720" bIns="18288">
             <a:spAutoFit/>
           </a:bodyPr>
           <a:lstStyle/>
@@ -10055,7 +10738,7 @@
           <a:noFill/>
         </p:spPr>
         <p:txBody>
-          <a:bodyPr wrap="square" lIns="45720" rIns="45720" tIns="18288" bIns="18288">
+          <a:bodyPr wrap="square" lIns="45720" tIns="18288" rIns="45720" bIns="18288">
             <a:spAutoFit/>
           </a:bodyPr>
           <a:lstStyle/>
@@ -10090,7 +10773,7 @@
           <a:noFill/>
         </p:spPr>
         <p:txBody>
-          <a:bodyPr wrap="square" lIns="45720" rIns="45720" tIns="18288" bIns="18288">
+          <a:bodyPr wrap="square" lIns="45720" tIns="18288" rIns="45720" bIns="18288">
             <a:spAutoFit/>
           </a:bodyPr>
           <a:lstStyle/>
@@ -10125,7 +10808,7 @@
           <a:noFill/>
         </p:spPr>
         <p:txBody>
-          <a:bodyPr wrap="square" lIns="45720" rIns="45720" tIns="18288" bIns="18288">
+          <a:bodyPr wrap="square" lIns="45720" tIns="18288" rIns="45720" bIns="18288">
             <a:spAutoFit/>
           </a:bodyPr>
           <a:lstStyle/>
@@ -10155,15 +10838,12 @@
           </a:p>
           <a:p>
             <a:pPr algn="l"/>
-            <a:r>
-              <a:rPr sz="1500" b="0">
-                <a:solidFill>
-                  <a:srgbClr val="222222"/>
-                </a:solidFill>
-                <a:latin typeface="Calibri"/>
-              </a:rPr>
-              <a:t/>
-            </a:r>
+            <a:endParaRPr sz="1500" b="0">
+              <a:solidFill>
+                <a:srgbClr val="222222"/>
+              </a:solidFill>
+              <a:latin typeface="Calibri"/>
+            </a:endParaRPr>
           </a:p>
           <a:p>
             <a:pPr algn="l"/>
@@ -10221,6 +10901,7 @@
           <a:lstStyle/>
           <a:p>
             <a:pPr algn="ctr"/>
+            <a:endParaRPr/>
           </a:p>
         </p:txBody>
       </p:sp>
@@ -10241,7 +10922,7 @@
           <a:noFill/>
         </p:spPr>
         <p:txBody>
-          <a:bodyPr wrap="square" lIns="45720" rIns="45720" tIns="18288" bIns="18288">
+          <a:bodyPr wrap="square" lIns="45720" tIns="18288" rIns="45720" bIns="18288">
             <a:spAutoFit/>
           </a:bodyPr>
           <a:lstStyle/>
@@ -10276,7 +10957,7 @@
           <a:noFill/>
         </p:spPr>
         <p:txBody>
-          <a:bodyPr wrap="square" lIns="45720" rIns="45720" tIns="18288" bIns="18288">
+          <a:bodyPr wrap="square" lIns="45720" tIns="18288" rIns="45720" bIns="18288">
             <a:spAutoFit/>
           </a:bodyPr>
           <a:lstStyle/>
@@ -10348,6 +11029,7 @@
           <a:lstStyle/>
           <a:p>
             <a:pPr algn="ctr"/>
+            <a:endParaRPr/>
           </a:p>
         </p:txBody>
       </p:sp>
@@ -10368,7 +11050,7 @@
           <a:noFill/>
         </p:spPr>
         <p:txBody>
-          <a:bodyPr wrap="square" lIns="45720" rIns="45720" tIns="18288" bIns="18288">
+          <a:bodyPr wrap="square" lIns="45720" tIns="18288" rIns="45720" bIns="18288">
             <a:spAutoFit/>
           </a:bodyPr>
           <a:lstStyle/>
@@ -10403,7 +11085,7 @@
           <a:noFill/>
         </p:spPr>
         <p:txBody>
-          <a:bodyPr wrap="square" lIns="45720" rIns="45720" tIns="18288" bIns="18288">
+          <a:bodyPr wrap="square" lIns="45720" tIns="18288" rIns="45720" bIns="18288">
             <a:spAutoFit/>
           </a:bodyPr>
           <a:lstStyle/>
@@ -10450,7 +11132,7 @@
           <a:noFill/>
         </p:spPr>
         <p:txBody>
-          <a:bodyPr wrap="square" lIns="45720" rIns="45720" tIns="18288" bIns="18288">
+          <a:bodyPr wrap="square" lIns="45720" tIns="18288" rIns="45720" bIns="18288">
             <a:spAutoFit/>
           </a:bodyPr>
           <a:lstStyle/>
@@ -10510,6 +11192,7 @@
           <a:lstStyle/>
           <a:p>
             <a:pPr algn="ctr"/>
+            <a:endParaRPr/>
           </a:p>
         </p:txBody>
       </p:sp>
@@ -10530,7 +11213,7 @@
           <a:noFill/>
         </p:spPr>
         <p:txBody>
-          <a:bodyPr wrap="square" lIns="45720" rIns="45720" tIns="18288" bIns="18288">
+          <a:bodyPr wrap="square" lIns="45720" tIns="18288" rIns="45720" bIns="18288">
             <a:spAutoFit/>
           </a:bodyPr>
           <a:lstStyle/>
@@ -10668,7 +11351,7 @@
           <a:noFill/>
         </p:spPr>
         <p:txBody>
-          <a:bodyPr wrap="square" lIns="45720" rIns="45720" tIns="18288" bIns="18288">
+          <a:bodyPr wrap="square" lIns="45720" tIns="18288" rIns="45720" bIns="18288">
             <a:spAutoFit/>
           </a:bodyPr>
           <a:lstStyle/>
@@ -10727,7 +11410,7 @@
           <a:noFill/>
         </p:spPr>
         <p:txBody>
-          <a:bodyPr wrap="square" lIns="45720" rIns="45720" tIns="18288" bIns="18288">
+          <a:bodyPr wrap="square" lIns="45720" tIns="18288" rIns="45720" bIns="18288">
             <a:spAutoFit/>
           </a:bodyPr>
           <a:lstStyle/>
@@ -10762,7 +11445,7 @@
           <a:noFill/>
         </p:spPr>
         <p:txBody>
-          <a:bodyPr wrap="square" lIns="45720" rIns="45720" tIns="18288" bIns="18288">
+          <a:bodyPr wrap="square" lIns="45720" tIns="18288" rIns="45720" bIns="18288">
             <a:spAutoFit/>
           </a:bodyPr>
           <a:lstStyle/>
@@ -10789,7 +11472,7 @@
 </file>
 
 <file path=ppt/slides/slide8.xml><?xml version="1.0" encoding="utf-8"?>
-<p:sld xmlns:a="http://schemas.openxmlformats.org/drawingml/2006/main" xmlns:p="http://schemas.openxmlformats.org/presentationml/2006/main" xmlns:r="http://schemas.openxmlformats.org/officeDocument/2006/relationships">
+<p:sld xmlns:a="http://schemas.openxmlformats.org/drawingml/2006/main" xmlns:r="http://schemas.openxmlformats.org/officeDocument/2006/relationships" xmlns:p="http://schemas.openxmlformats.org/presentationml/2006/main">
   <p:cSld>
     <p:spTree>
       <p:nvGrpSpPr>
@@ -10797,7 +11480,14 @@
         <p:cNvGrpSpPr/>
         <p:nvPr/>
       </p:nvGrpSpPr>
-      <p:grpSpPr/>
+      <p:grpSpPr>
+        <a:xfrm>
+          <a:off x="0" y="0"/>
+          <a:ext cx="0" cy="0"/>
+          <a:chOff x="0" y="0"/>
+          <a:chExt cx="0" cy="0"/>
+        </a:xfrm>
+      </p:grpSpPr>
       <p:sp>
         <p:nvSpPr>
           <p:cNvPr id="2" name="Rectangle 1"/>
@@ -10838,6 +11528,7 @@
           <a:lstStyle/>
           <a:p>
             <a:pPr algn="ctr"/>
+            <a:endParaRPr/>
           </a:p>
         </p:txBody>
       </p:sp>
@@ -10858,7 +11549,7 @@
           <a:noFill/>
         </p:spPr>
         <p:txBody>
-          <a:bodyPr wrap="square" lIns="45720" rIns="45720" tIns="18288" bIns="18288">
+          <a:bodyPr wrap="square" lIns="45720" tIns="18288" rIns="45720" bIns="18288">
             <a:spAutoFit/>
           </a:bodyPr>
           <a:lstStyle/>
@@ -10893,7 +11584,7 @@
           <a:noFill/>
         </p:spPr>
         <p:txBody>
-          <a:bodyPr wrap="square" lIns="45720" rIns="45720" tIns="18288" bIns="18288">
+          <a:bodyPr wrap="square" lIns="45720" tIns="18288" rIns="45720" bIns="18288">
             <a:spAutoFit/>
           </a:bodyPr>
           <a:lstStyle/>
@@ -10928,7 +11619,7 @@
           <a:noFill/>
         </p:spPr>
         <p:txBody>
-          <a:bodyPr wrap="square" lIns="45720" rIns="45720" tIns="18288" bIns="18288">
+          <a:bodyPr wrap="square" lIns="45720" tIns="18288" rIns="45720" bIns="18288">
             <a:spAutoFit/>
           </a:bodyPr>
           <a:lstStyle/>
@@ -10988,6 +11679,7 @@
           <a:lstStyle/>
           <a:p>
             <a:pPr algn="ctr"/>
+            <a:endParaRPr/>
           </a:p>
         </p:txBody>
       </p:sp>
@@ -11027,7 +11719,7 @@
           </a:fontRef>
         </p:style>
         <p:txBody>
-          <a:bodyPr rtlCol="0" anchor="ctr" tIns="18288"/>
+          <a:bodyPr tIns="18288" rtlCol="0" anchor="ctr"/>
           <a:lstStyle/>
           <a:p>
             <a:pPr algn="ctr"/>
@@ -11059,7 +11751,7 @@
           <a:noFill/>
         </p:spPr>
         <p:txBody>
-          <a:bodyPr wrap="square" lIns="45720" rIns="45720" tIns="18288" bIns="18288">
+          <a:bodyPr wrap="square" lIns="45720" tIns="18288" rIns="45720" bIns="18288">
             <a:spAutoFit/>
           </a:bodyPr>
           <a:lstStyle/>
@@ -11094,7 +11786,7 @@
           <a:noFill/>
         </p:spPr>
         <p:txBody>
-          <a:bodyPr wrap="square" lIns="45720" rIns="45720" tIns="18288" bIns="18288">
+          <a:bodyPr wrap="square" lIns="45720" tIns="18288" rIns="45720" bIns="18288">
             <a:spAutoFit/>
           </a:bodyPr>
           <a:lstStyle/>
@@ -11166,6 +11858,7 @@
           <a:lstStyle/>
           <a:p>
             <a:pPr algn="ctr"/>
+            <a:endParaRPr/>
           </a:p>
         </p:txBody>
       </p:sp>
@@ -11205,7 +11898,7 @@
           </a:fontRef>
         </p:style>
         <p:txBody>
-          <a:bodyPr rtlCol="0" anchor="ctr" tIns="18288"/>
+          <a:bodyPr tIns="18288" rtlCol="0" anchor="ctr"/>
           <a:lstStyle/>
           <a:p>
             <a:pPr algn="ctr"/>
@@ -11237,7 +11930,7 @@
           <a:noFill/>
         </p:spPr>
         <p:txBody>
-          <a:bodyPr wrap="square" lIns="45720" rIns="45720" tIns="18288" bIns="18288">
+          <a:bodyPr wrap="square" lIns="45720" tIns="18288" rIns="45720" bIns="18288">
             <a:spAutoFit/>
           </a:bodyPr>
           <a:lstStyle/>
@@ -11272,7 +11965,7 @@
           <a:noFill/>
         </p:spPr>
         <p:txBody>
-          <a:bodyPr wrap="square" lIns="45720" rIns="45720" tIns="18288" bIns="18288">
+          <a:bodyPr wrap="square" lIns="45720" tIns="18288" rIns="45720" bIns="18288">
             <a:spAutoFit/>
           </a:bodyPr>
           <a:lstStyle/>
@@ -11356,6 +12049,7 @@
           <a:lstStyle/>
           <a:p>
             <a:pPr algn="ctr"/>
+            <a:endParaRPr/>
           </a:p>
         </p:txBody>
       </p:sp>
@@ -11395,7 +12089,7 @@
           </a:fontRef>
         </p:style>
         <p:txBody>
-          <a:bodyPr rtlCol="0" anchor="ctr" tIns="18288"/>
+          <a:bodyPr tIns="18288" rtlCol="0" anchor="ctr"/>
           <a:lstStyle/>
           <a:p>
             <a:pPr algn="ctr"/>
@@ -11427,7 +12121,7 @@
           <a:noFill/>
         </p:spPr>
         <p:txBody>
-          <a:bodyPr wrap="square" lIns="45720" rIns="45720" tIns="18288" bIns="18288">
+          <a:bodyPr wrap="square" lIns="45720" tIns="18288" rIns="45720" bIns="18288">
             <a:spAutoFit/>
           </a:bodyPr>
           <a:lstStyle/>
@@ -11462,7 +12156,7 @@
           <a:noFill/>
         </p:spPr>
         <p:txBody>
-          <a:bodyPr wrap="square" lIns="45720" rIns="45720" tIns="18288" bIns="18288">
+          <a:bodyPr wrap="square" lIns="45720" tIns="18288" rIns="45720" bIns="18288">
             <a:spAutoFit/>
           </a:bodyPr>
           <a:lstStyle/>
@@ -11509,7 +12203,7 @@
           <a:noFill/>
         </p:spPr>
         <p:txBody>
-          <a:bodyPr wrap="square" lIns="45720" rIns="45720" tIns="18288" bIns="18288">
+          <a:bodyPr wrap="square" lIns="45720" tIns="18288" rIns="45720" bIns="18288">
             <a:spAutoFit/>
           </a:bodyPr>
           <a:lstStyle/>
@@ -11544,7 +12238,7 @@
           <a:noFill/>
         </p:spPr>
         <p:txBody>
-          <a:bodyPr wrap="square" lIns="45720" rIns="45720" tIns="18288" bIns="18288">
+          <a:bodyPr wrap="square" lIns="45720" tIns="18288" rIns="45720" bIns="18288">
             <a:spAutoFit/>
           </a:bodyPr>
           <a:lstStyle/>
@@ -11579,7 +12273,7 @@
           <a:noFill/>
         </p:spPr>
         <p:txBody>
-          <a:bodyPr wrap="square" lIns="45720" rIns="45720" tIns="18288" bIns="18288">
+          <a:bodyPr wrap="square" lIns="45720" tIns="18288" rIns="45720" bIns="18288">
             <a:spAutoFit/>
           </a:bodyPr>
           <a:lstStyle/>
@@ -11606,7 +12300,7 @@
 </file>
 
 <file path=ppt/slides/slide9.xml><?xml version="1.0" encoding="utf-8"?>
-<p:sld xmlns:a="http://schemas.openxmlformats.org/drawingml/2006/main" xmlns:p="http://schemas.openxmlformats.org/presentationml/2006/main" xmlns:r="http://schemas.openxmlformats.org/officeDocument/2006/relationships">
+<p:sld xmlns:a="http://schemas.openxmlformats.org/drawingml/2006/main" xmlns:r="http://schemas.openxmlformats.org/officeDocument/2006/relationships" xmlns:p="http://schemas.openxmlformats.org/presentationml/2006/main">
   <p:cSld>
     <p:spTree>
       <p:nvGrpSpPr>
@@ -11614,7 +12308,14 @@
         <p:cNvGrpSpPr/>
         <p:nvPr/>
       </p:nvGrpSpPr>
-      <p:grpSpPr/>
+      <p:grpSpPr>
+        <a:xfrm>
+          <a:off x="0" y="0"/>
+          <a:ext cx="0" cy="0"/>
+          <a:chOff x="0" y="0"/>
+          <a:chExt cx="0" cy="0"/>
+        </a:xfrm>
+      </p:grpSpPr>
       <p:sp>
         <p:nvSpPr>
           <p:cNvPr id="2" name="Rectangle 1"/>
@@ -11655,6 +12356,7 @@
           <a:lstStyle/>
           <a:p>
             <a:pPr algn="ctr"/>
+            <a:endParaRPr/>
           </a:p>
         </p:txBody>
       </p:sp>
@@ -11667,7 +12369,7 @@
         <p:spPr>
           <a:xfrm>
             <a:off x="457200" y="228600"/>
-            <a:ext cx="11247120" cy="640080"/>
+            <a:ext cx="11247120" cy="498598"/>
           </a:xfrm>
           <a:prstGeom prst="rect">
             <a:avLst/>
@@ -11675,21 +12377,81 @@
           <a:noFill/>
         </p:spPr>
         <p:txBody>
-          <a:bodyPr wrap="square" lIns="45720" rIns="45720" tIns="18288" bIns="18288">
+          <a:bodyPr wrap="square" lIns="45720" tIns="18288" rIns="45720" bIns="18288">
             <a:spAutoFit/>
           </a:bodyPr>
           <a:lstStyle/>
           <a:p>
             <a:pPr algn="l"/>
             <a:r>
-              <a:rPr sz="3000" b="1">
+              <a:rPr sz="3000" b="1" dirty="0" err="1">
                 <a:solidFill>
                   <a:srgbClr val="1A4480"/>
                 </a:solidFill>
                 <a:latin typeface="Calibri"/>
               </a:rPr>
-              <a:t>Transformando Texto em "Coordenadas"</a:t>
-            </a:r>
+              <a:t>Transformando</a:t>
+            </a:r>
+            <a:r>
+              <a:rPr sz="3000" b="1" dirty="0">
+                <a:solidFill>
+                  <a:srgbClr val="1A4480"/>
+                </a:solidFill>
+                <a:latin typeface="Calibri"/>
+              </a:rPr>
+              <a:t> </a:t>
+            </a:r>
+            <a:r>
+              <a:rPr sz="3000" b="1" dirty="0" err="1">
+                <a:solidFill>
+                  <a:srgbClr val="1A4480"/>
+                </a:solidFill>
+                <a:latin typeface="Calibri"/>
+              </a:rPr>
+              <a:t>Texto</a:t>
+            </a:r>
+            <a:r>
+              <a:rPr sz="3000" b="1" dirty="0">
+                <a:solidFill>
+                  <a:srgbClr val="1A4480"/>
+                </a:solidFill>
+                <a:latin typeface="Calibri"/>
+              </a:rPr>
+              <a:t> </a:t>
+            </a:r>
+            <a:r>
+              <a:rPr sz="3000" b="1" dirty="0" err="1">
+                <a:solidFill>
+                  <a:srgbClr val="1A4480"/>
+                </a:solidFill>
+                <a:latin typeface="Calibri"/>
+              </a:rPr>
+              <a:t>em</a:t>
+            </a:r>
+            <a:r>
+              <a:rPr sz="3000" b="1" dirty="0">
+                <a:solidFill>
+                  <a:srgbClr val="1A4480"/>
+                </a:solidFill>
+                <a:latin typeface="Calibri"/>
+              </a:rPr>
+              <a:t> </a:t>
+            </a:r>
+            <a:r>
+              <a:rPr lang="pt-BR" sz="3000" b="1" dirty="0" err="1">
+                <a:solidFill>
+                  <a:srgbClr val="1A4480"/>
+                </a:solidFill>
+                <a:latin typeface="Calibri"/>
+              </a:rPr>
+              <a:t>Embeddings</a:t>
+            </a:r>
+            <a:endParaRPr sz="3000" b="1" dirty="0">
+              <a:solidFill>
+                <a:srgbClr val="1A4480"/>
+              </a:solidFill>
+              <a:latin typeface="Calibri"/>
+            </a:endParaRPr>
           </a:p>
         </p:txBody>
       </p:sp>
@@ -11710,7 +12472,7 @@
           <a:noFill/>
         </p:spPr>
         <p:txBody>
-          <a:bodyPr wrap="square" lIns="45720" rIns="45720" tIns="18288" bIns="18288">
+          <a:bodyPr wrap="square" lIns="45720" tIns="18288" rIns="45720" bIns="18288">
             <a:spAutoFit/>
           </a:bodyPr>
           <a:lstStyle/>
@@ -11745,7 +12507,7 @@
           <a:noFill/>
         </p:spPr>
         <p:txBody>
-          <a:bodyPr wrap="square" lIns="45720" rIns="45720" tIns="18288" bIns="18288">
+          <a:bodyPr wrap="square" lIns="45720" tIns="18288" rIns="45720" bIns="18288">
             <a:spAutoFit/>
           </a:bodyPr>
           <a:lstStyle/>
@@ -11772,7 +12534,7 @@
         <p:spPr>
           <a:xfrm>
             <a:off x="731520" y="1691640"/>
-            <a:ext cx="10972800" cy="914400"/>
+            <a:ext cx="10972800" cy="590931"/>
           </a:xfrm>
           <a:prstGeom prst="rect">
             <a:avLst/>
@@ -11780,32 +12542,293 @@
           <a:noFill/>
         </p:spPr>
         <p:txBody>
-          <a:bodyPr wrap="square" lIns="45720" rIns="45720" tIns="18288" bIns="18288">
+          <a:bodyPr wrap="square" lIns="45720" tIns="18288" rIns="45720" bIns="18288">
             <a:spAutoFit/>
           </a:bodyPr>
           <a:lstStyle/>
           <a:p>
             <a:pPr algn="l"/>
             <a:r>
-              <a:rPr sz="1400" b="0">
-                <a:solidFill>
-                  <a:srgbClr val="222222"/>
-                </a:solidFill>
-                <a:latin typeface="Calibri"/>
-              </a:rPr>
-              <a:t>Cada trecho vira vetor de 1024 dimensões + vetor esparso lexical.</a:t>
+              <a:rPr b="0" dirty="0" err="1">
+                <a:solidFill>
+                  <a:srgbClr val="222222"/>
+                </a:solidFill>
+                <a:latin typeface="Calibri"/>
+              </a:rPr>
+              <a:t>Cada</a:t>
+            </a:r>
+            <a:r>
+              <a:rPr b="0" dirty="0">
+                <a:solidFill>
+                  <a:srgbClr val="222222"/>
+                </a:solidFill>
+                <a:latin typeface="Calibri"/>
+              </a:rPr>
+              <a:t> </a:t>
+            </a:r>
+            <a:r>
+              <a:rPr b="0" dirty="0" err="1">
+                <a:solidFill>
+                  <a:srgbClr val="222222"/>
+                </a:solidFill>
+                <a:latin typeface="Calibri"/>
+              </a:rPr>
+              <a:t>trecho</a:t>
+            </a:r>
+            <a:r>
+              <a:rPr b="0" dirty="0">
+                <a:solidFill>
+                  <a:srgbClr val="222222"/>
+                </a:solidFill>
+                <a:latin typeface="Calibri"/>
+              </a:rPr>
+              <a:t> </a:t>
+            </a:r>
+            <a:r>
+              <a:rPr b="0" dirty="0" err="1">
+                <a:solidFill>
+                  <a:srgbClr val="222222"/>
+                </a:solidFill>
+                <a:latin typeface="Calibri"/>
+              </a:rPr>
+              <a:t>vira</a:t>
+            </a:r>
+            <a:r>
+              <a:rPr b="0" dirty="0">
+                <a:solidFill>
+                  <a:srgbClr val="222222"/>
+                </a:solidFill>
+                <a:latin typeface="Calibri"/>
+              </a:rPr>
+              <a:t> </a:t>
+            </a:r>
+            <a:r>
+              <a:rPr b="0" dirty="0" err="1">
+                <a:solidFill>
+                  <a:srgbClr val="222222"/>
+                </a:solidFill>
+                <a:latin typeface="Calibri"/>
+              </a:rPr>
+              <a:t>vetor</a:t>
+            </a:r>
+            <a:r>
+              <a:rPr b="0" dirty="0">
+                <a:solidFill>
+                  <a:srgbClr val="222222"/>
+                </a:solidFill>
+                <a:latin typeface="Calibri"/>
+              </a:rPr>
+              <a:t> de 1024 </a:t>
+            </a:r>
+            <a:r>
+              <a:rPr b="0" dirty="0" err="1">
+                <a:solidFill>
+                  <a:srgbClr val="222222"/>
+                </a:solidFill>
+                <a:latin typeface="Calibri"/>
+              </a:rPr>
+              <a:t>dimensões</a:t>
+            </a:r>
+            <a:r>
+              <a:rPr b="0" dirty="0">
+                <a:solidFill>
+                  <a:srgbClr val="222222"/>
+                </a:solidFill>
+                <a:latin typeface="Calibri"/>
+              </a:rPr>
+              <a:t> + </a:t>
+            </a:r>
+            <a:r>
+              <a:rPr b="0" dirty="0" err="1">
+                <a:solidFill>
+                  <a:srgbClr val="222222"/>
+                </a:solidFill>
+                <a:latin typeface="Calibri"/>
+              </a:rPr>
+              <a:t>vetor</a:t>
+            </a:r>
+            <a:r>
+              <a:rPr b="0" dirty="0">
+                <a:solidFill>
+                  <a:srgbClr val="222222"/>
+                </a:solidFill>
+                <a:latin typeface="Calibri"/>
+              </a:rPr>
+              <a:t> </a:t>
+            </a:r>
+            <a:r>
+              <a:rPr b="0" dirty="0" err="1">
+                <a:solidFill>
+                  <a:srgbClr val="222222"/>
+                </a:solidFill>
+                <a:latin typeface="Calibri"/>
+              </a:rPr>
+              <a:t>esparso</a:t>
+            </a:r>
+            <a:r>
+              <a:rPr b="0" dirty="0">
+                <a:solidFill>
+                  <a:srgbClr val="222222"/>
+                </a:solidFill>
+                <a:latin typeface="Calibri"/>
+              </a:rPr>
+              <a:t> lexical.</a:t>
             </a:r>
           </a:p>
           <a:p>
             <a:pPr algn="l"/>
             <a:r>
-              <a:rPr sz="1400" b="0">
-                <a:solidFill>
-                  <a:srgbClr val="222222"/>
-                </a:solidFill>
-                <a:latin typeface="Calibri"/>
-              </a:rPr>
-              <a:t>Um único modelo entrega os dois — sem rodar BM25 separado.</a:t>
+              <a:rPr b="0" dirty="0">
+                <a:solidFill>
+                  <a:srgbClr val="222222"/>
+                </a:solidFill>
+                <a:latin typeface="Calibri"/>
+              </a:rPr>
+              <a:t>Um </a:t>
+            </a:r>
+            <a:r>
+              <a:rPr b="0" dirty="0" err="1">
+                <a:solidFill>
+                  <a:srgbClr val="222222"/>
+                </a:solidFill>
+                <a:latin typeface="Calibri"/>
+              </a:rPr>
+              <a:t>único</a:t>
+            </a:r>
+            <a:r>
+              <a:rPr b="0" dirty="0">
+                <a:solidFill>
+                  <a:srgbClr val="222222"/>
+                </a:solidFill>
+                <a:latin typeface="Calibri"/>
+              </a:rPr>
+              <a:t> </a:t>
+            </a:r>
+            <a:r>
+              <a:rPr b="0" dirty="0" err="1">
+                <a:solidFill>
+                  <a:srgbClr val="222222"/>
+                </a:solidFill>
+                <a:latin typeface="Calibri"/>
+              </a:rPr>
+              <a:t>modelo</a:t>
+            </a:r>
+            <a:r>
+              <a:rPr b="0" dirty="0">
+                <a:solidFill>
+                  <a:srgbClr val="222222"/>
+                </a:solidFill>
+                <a:latin typeface="Calibri"/>
+              </a:rPr>
+              <a:t> </a:t>
+            </a:r>
+            <a:r>
+              <a:rPr b="0" dirty="0" err="1">
+                <a:solidFill>
+                  <a:srgbClr val="222222"/>
+                </a:solidFill>
+                <a:latin typeface="Calibri"/>
+              </a:rPr>
+              <a:t>entrega</a:t>
+            </a:r>
+            <a:r>
+              <a:rPr b="0" dirty="0">
+                <a:solidFill>
+                  <a:srgbClr val="222222"/>
+                </a:solidFill>
+                <a:latin typeface="Calibri"/>
+              </a:rPr>
+              <a:t> </a:t>
+            </a:r>
+            <a:r>
+              <a:rPr b="0" dirty="0" err="1">
+                <a:solidFill>
+                  <a:srgbClr val="222222"/>
+                </a:solidFill>
+                <a:latin typeface="Calibri"/>
+              </a:rPr>
+              <a:t>os</a:t>
+            </a:r>
+            <a:r>
+              <a:rPr b="0" dirty="0">
+                <a:solidFill>
+                  <a:srgbClr val="222222"/>
+                </a:solidFill>
+                <a:latin typeface="Calibri"/>
+              </a:rPr>
+              <a:t> </a:t>
+            </a:r>
+            <a:r>
+              <a:rPr b="0" dirty="0" err="1">
+                <a:solidFill>
+                  <a:srgbClr val="222222"/>
+                </a:solidFill>
+                <a:latin typeface="Calibri"/>
+              </a:rPr>
+              <a:t>dois</a:t>
+            </a:r>
+            <a:r>
+              <a:rPr b="0" dirty="0">
+                <a:solidFill>
+                  <a:srgbClr val="222222"/>
+                </a:solidFill>
+                <a:latin typeface="Calibri"/>
+              </a:rPr>
+              <a:t> — </a:t>
+            </a:r>
+            <a:r>
+              <a:rPr b="0" dirty="0" err="1">
+                <a:solidFill>
+                  <a:srgbClr val="222222"/>
+                </a:solidFill>
+                <a:latin typeface="Calibri"/>
+              </a:rPr>
+              <a:t>sem</a:t>
+            </a:r>
+            <a:r>
+              <a:rPr b="0" dirty="0">
+                <a:solidFill>
+                  <a:srgbClr val="222222"/>
+                </a:solidFill>
+                <a:latin typeface="Calibri"/>
+              </a:rPr>
+              <a:t> </a:t>
+            </a:r>
+            <a:r>
+              <a:rPr b="0" dirty="0" err="1">
+                <a:solidFill>
+                  <a:srgbClr val="222222"/>
+                </a:solidFill>
+                <a:latin typeface="Calibri"/>
+              </a:rPr>
+              <a:t>rodar</a:t>
+            </a:r>
+            <a:r>
+              <a:rPr b="0" dirty="0">
+                <a:solidFill>
+                  <a:srgbClr val="222222"/>
+                </a:solidFill>
+                <a:latin typeface="Calibri"/>
+              </a:rPr>
+              <a:t> BM25 </a:t>
+            </a:r>
+            <a:r>
+              <a:rPr b="0" dirty="0" err="1">
+                <a:solidFill>
+                  <a:srgbClr val="222222"/>
+                </a:solidFill>
+                <a:latin typeface="Calibri"/>
+              </a:rPr>
+              <a:t>separado</a:t>
+            </a:r>
+            <a:r>
+              <a:rPr b="0" dirty="0">
+                <a:solidFill>
+                  <a:srgbClr val="222222"/>
+                </a:solidFill>
+                <a:latin typeface="Calibri"/>
+              </a:rPr>
+              <a:t>.</a:t>
             </a:r>
           </a:p>
         </p:txBody>
@@ -11852,6 +12875,7 @@
           <a:lstStyle/>
           <a:p>
             <a:pPr algn="ctr"/>
+            <a:endParaRPr/>
           </a:p>
         </p:txBody>
       </p:sp>
@@ -11864,7 +12888,7 @@
         <p:spPr>
           <a:xfrm>
             <a:off x="640080" y="2834640"/>
-            <a:ext cx="5303520" cy="457200"/>
+            <a:ext cx="5303520" cy="344710"/>
           </a:xfrm>
           <a:prstGeom prst="rect">
             <a:avLst/>
@@ -11872,20 +12896,47 @@
           <a:noFill/>
         </p:spPr>
         <p:txBody>
-          <a:bodyPr wrap="square" lIns="45720" rIns="45720" tIns="18288" bIns="18288">
+          <a:bodyPr wrap="square" lIns="45720" tIns="18288" rIns="45720" bIns="18288">
             <a:spAutoFit/>
           </a:bodyPr>
           <a:lstStyle/>
           <a:p>
             <a:pPr algn="l"/>
             <a:r>
-              <a:rPr sz="1600" b="1">
+              <a:rPr sz="2000" b="1" dirty="0" err="1">
                 <a:solidFill>
                   <a:srgbClr val="1A4480"/>
                 </a:solidFill>
                 <a:latin typeface="Calibri"/>
               </a:rPr>
-              <a:t>Vetor denso (1024d, cosine)</a:t>
+              <a:t>Vetor</a:t>
+            </a:r>
+            <a:r>
+              <a:rPr sz="2000" b="1" dirty="0">
+                <a:solidFill>
+                  <a:srgbClr val="1A4480"/>
+                </a:solidFill>
+                <a:latin typeface="Calibri"/>
+              </a:rPr>
+              <a:t> </a:t>
+            </a:r>
+            <a:r>
+              <a:rPr sz="2000" b="1" dirty="0" err="1">
+                <a:solidFill>
+                  <a:srgbClr val="1A4480"/>
+                </a:solidFill>
+                <a:latin typeface="Calibri"/>
+              </a:rPr>
+              <a:t>denso</a:t>
+            </a:r>
+            <a:r>
+              <a:rPr sz="2000" b="1" dirty="0">
+                <a:solidFill>
+                  <a:srgbClr val="1A4480"/>
+                </a:solidFill>
+                <a:latin typeface="Calibri"/>
+              </a:rPr>
+              <a:t> (1024d, cosine)</a:t>
             </a:r>
           </a:p>
         </p:txBody>
@@ -11899,7 +12950,7 @@
         <p:spPr>
           <a:xfrm>
             <a:off x="640080" y="3291840"/>
-            <a:ext cx="5303520" cy="1737360"/>
+            <a:ext cx="5303520" cy="1021818"/>
           </a:xfrm>
           <a:prstGeom prst="rect">
             <a:avLst/>
@@ -11907,56 +12958,197 @@
           <a:noFill/>
         </p:spPr>
         <p:txBody>
-          <a:bodyPr wrap="square" lIns="45720" rIns="45720" tIns="18288" bIns="18288">
+          <a:bodyPr wrap="square" lIns="45720" tIns="18288" rIns="45720" bIns="18288">
             <a:spAutoFit/>
           </a:bodyPr>
           <a:lstStyle/>
           <a:p>
             <a:pPr algn="l"/>
             <a:r>
-              <a:rPr sz="1300" b="0">
-                <a:solidFill>
-                  <a:srgbClr val="222222"/>
-                </a:solidFill>
-                <a:latin typeface="Calibri"/>
-              </a:rPr>
-              <a:t>Captura significado.</a:t>
+              <a:rPr sz="1600" b="0" dirty="0" err="1">
+                <a:solidFill>
+                  <a:srgbClr val="222222"/>
+                </a:solidFill>
+                <a:latin typeface="Calibri"/>
+              </a:rPr>
+              <a:t>Captura</a:t>
+            </a:r>
+            <a:r>
+              <a:rPr sz="1600" b="0" dirty="0">
+                <a:solidFill>
+                  <a:srgbClr val="222222"/>
+                </a:solidFill>
+                <a:latin typeface="Calibri"/>
+              </a:rPr>
+              <a:t> </a:t>
+            </a:r>
+            <a:r>
+              <a:rPr sz="1600" b="0" dirty="0" err="1">
+                <a:solidFill>
+                  <a:srgbClr val="222222"/>
+                </a:solidFill>
+                <a:latin typeface="Calibri"/>
+              </a:rPr>
+              <a:t>significado</a:t>
+            </a:r>
+            <a:r>
+              <a:rPr sz="1600" b="0" dirty="0">
+                <a:solidFill>
+                  <a:srgbClr val="222222"/>
+                </a:solidFill>
+                <a:latin typeface="Calibri"/>
+              </a:rPr>
+              <a:t>.</a:t>
             </a:r>
           </a:p>
           <a:p>
             <a:pPr algn="l"/>
             <a:r>
-              <a:rPr sz="1300" b="0">
-                <a:solidFill>
-                  <a:srgbClr val="222222"/>
-                </a:solidFill>
-                <a:latin typeface="Calibri"/>
-              </a:rPr>
-              <a:t>"prazo de revisão" ≈ "período de reanálise".</a:t>
+              <a:rPr sz="1600" b="0" dirty="0">
+                <a:solidFill>
+                  <a:srgbClr val="222222"/>
+                </a:solidFill>
+                <a:latin typeface="Calibri"/>
+              </a:rPr>
+              <a:t>"</a:t>
+            </a:r>
+            <a:r>
+              <a:rPr sz="1600" b="0" dirty="0" err="1">
+                <a:solidFill>
+                  <a:srgbClr val="222222"/>
+                </a:solidFill>
+                <a:latin typeface="Calibri"/>
+              </a:rPr>
+              <a:t>prazo</a:t>
+            </a:r>
+            <a:r>
+              <a:rPr sz="1600" b="0" dirty="0">
+                <a:solidFill>
+                  <a:srgbClr val="222222"/>
+                </a:solidFill>
+                <a:latin typeface="Calibri"/>
+              </a:rPr>
+              <a:t> de </a:t>
+            </a:r>
+            <a:r>
+              <a:rPr sz="1600" b="0" dirty="0" err="1">
+                <a:solidFill>
+                  <a:srgbClr val="222222"/>
+                </a:solidFill>
+                <a:latin typeface="Calibri"/>
+              </a:rPr>
+              <a:t>revisão</a:t>
+            </a:r>
+            <a:r>
+              <a:rPr sz="1600" b="0" dirty="0">
+                <a:solidFill>
+                  <a:srgbClr val="222222"/>
+                </a:solidFill>
+                <a:latin typeface="Calibri"/>
+              </a:rPr>
+              <a:t>" ≈ "</a:t>
+            </a:r>
+            <a:r>
+              <a:rPr sz="1600" b="0" dirty="0" err="1">
+                <a:solidFill>
+                  <a:srgbClr val="222222"/>
+                </a:solidFill>
+                <a:latin typeface="Calibri"/>
+              </a:rPr>
+              <a:t>período</a:t>
+            </a:r>
+            <a:r>
+              <a:rPr sz="1600" b="0" dirty="0">
+                <a:solidFill>
+                  <a:srgbClr val="222222"/>
+                </a:solidFill>
+                <a:latin typeface="Calibri"/>
+              </a:rPr>
+              <a:t> de </a:t>
+            </a:r>
+            <a:r>
+              <a:rPr sz="1600" b="0" dirty="0" err="1">
+                <a:solidFill>
+                  <a:srgbClr val="222222"/>
+                </a:solidFill>
+                <a:latin typeface="Calibri"/>
+              </a:rPr>
+              <a:t>reanálise</a:t>
+            </a:r>
+            <a:r>
+              <a:rPr sz="1600" b="0" dirty="0">
+                <a:solidFill>
+                  <a:srgbClr val="222222"/>
+                </a:solidFill>
+                <a:latin typeface="Calibri"/>
+              </a:rPr>
+              <a:t>".</a:t>
             </a:r>
           </a:p>
           <a:p>
             <a:pPr algn="l"/>
-            <a:r>
-              <a:rPr sz="1300" b="0">
-                <a:solidFill>
-                  <a:srgbClr val="222222"/>
-                </a:solidFill>
-                <a:latin typeface="Calibri"/>
-              </a:rPr>
-              <a:t/>
-            </a:r>
+            <a:endParaRPr sz="1600" b="0" dirty="0">
+              <a:solidFill>
+                <a:srgbClr val="222222"/>
+              </a:solidFill>
+              <a:latin typeface="Calibri"/>
+            </a:endParaRPr>
           </a:p>
           <a:p>
             <a:pPr algn="l"/>
             <a:r>
-              <a:rPr sz="1300" b="0">
-                <a:solidFill>
-                  <a:srgbClr val="222222"/>
-                </a:solidFill>
-                <a:latin typeface="Calibri"/>
-              </a:rPr>
-              <a:t>Distância: cosseno · normalizado.</a:t>
+              <a:rPr sz="1600" b="0" dirty="0" err="1">
+                <a:solidFill>
+                  <a:srgbClr val="222222"/>
+                </a:solidFill>
+                <a:latin typeface="Calibri"/>
+              </a:rPr>
+              <a:t>Distância</a:t>
+            </a:r>
+            <a:r>
+              <a:rPr sz="1600" b="0" dirty="0">
+                <a:solidFill>
+                  <a:srgbClr val="222222"/>
+                </a:solidFill>
+                <a:latin typeface="Calibri"/>
+              </a:rPr>
+              <a:t>: </a:t>
+            </a:r>
+            <a:r>
+              <a:rPr sz="1600" b="0" dirty="0" err="1">
+                <a:solidFill>
+                  <a:srgbClr val="222222"/>
+                </a:solidFill>
+                <a:latin typeface="Calibri"/>
+              </a:rPr>
+              <a:t>cosseno</a:t>
+            </a:r>
+            <a:r>
+              <a:rPr sz="1600" b="0" dirty="0">
+                <a:solidFill>
+                  <a:srgbClr val="222222"/>
+                </a:solidFill>
+                <a:latin typeface="Calibri"/>
+              </a:rPr>
+              <a:t> · </a:t>
+            </a:r>
+            <a:r>
+              <a:rPr sz="1600" b="0" dirty="0" err="1">
+                <a:solidFill>
+                  <a:srgbClr val="222222"/>
+                </a:solidFill>
+                <a:latin typeface="Calibri"/>
+              </a:rPr>
+              <a:t>normalizado</a:t>
+            </a:r>
+            <a:r>
+              <a:rPr sz="1600" b="0" dirty="0">
+                <a:solidFill>
+                  <a:srgbClr val="222222"/>
+                </a:solidFill>
+                <a:latin typeface="Calibri"/>
+              </a:rPr>
+              <a:t>.</a:t>
             </a:r>
           </a:p>
         </p:txBody>
@@ -12003,6 +13195,7 @@
           <a:lstStyle/>
           <a:p>
             <a:pPr algn="ctr"/>
+            <a:endParaRPr/>
           </a:p>
         </p:txBody>
       </p:sp>
@@ -12015,7 +13208,7 @@
         <p:spPr>
           <a:xfrm>
             <a:off x="6492240" y="2834640"/>
-            <a:ext cx="5120640" cy="457200"/>
+            <a:ext cx="5120640" cy="344710"/>
           </a:xfrm>
           <a:prstGeom prst="rect">
             <a:avLst/>
@@ -12023,20 +13216,47 @@
           <a:noFill/>
         </p:spPr>
         <p:txBody>
-          <a:bodyPr wrap="square" lIns="45720" rIns="45720" tIns="18288" bIns="18288">
+          <a:bodyPr wrap="square" lIns="45720" tIns="18288" rIns="45720" bIns="18288">
             <a:spAutoFit/>
           </a:bodyPr>
           <a:lstStyle/>
           <a:p>
             <a:pPr algn="l"/>
             <a:r>
-              <a:rPr sz="1600" b="1">
+              <a:rPr sz="2000" b="1" dirty="0" err="1">
                 <a:solidFill>
                   <a:srgbClr val="1A4480"/>
                 </a:solidFill>
                 <a:latin typeface="Calibri"/>
               </a:rPr>
-              <a:t>Vetor esparso (lexical)</a:t>
+              <a:t>Vetor</a:t>
+            </a:r>
+            <a:r>
+              <a:rPr sz="2000" b="1" dirty="0">
+                <a:solidFill>
+                  <a:srgbClr val="1A4480"/>
+                </a:solidFill>
+                <a:latin typeface="Calibri"/>
+              </a:rPr>
+              <a:t> </a:t>
+            </a:r>
+            <a:r>
+              <a:rPr sz="2000" b="1" dirty="0" err="1">
+                <a:solidFill>
+                  <a:srgbClr val="1A4480"/>
+                </a:solidFill>
+                <a:latin typeface="Calibri"/>
+              </a:rPr>
+              <a:t>esparso</a:t>
+            </a:r>
+            <a:r>
+              <a:rPr sz="2000" b="1" dirty="0">
+                <a:solidFill>
+                  <a:srgbClr val="1A4480"/>
+                </a:solidFill>
+                <a:latin typeface="Calibri"/>
+              </a:rPr>
+              <a:t> (lexical)</a:t>
             </a:r>
           </a:p>
         </p:txBody>
@@ -12050,7 +13270,7 @@
         <p:spPr>
           <a:xfrm>
             <a:off x="6492240" y="3291840"/>
-            <a:ext cx="5120640" cy="1737360"/>
+            <a:ext cx="5120640" cy="1144929"/>
           </a:xfrm>
           <a:prstGeom prst="rect">
             <a:avLst/>
@@ -12058,56 +13278,197 @@
           <a:noFill/>
         </p:spPr>
         <p:txBody>
-          <a:bodyPr wrap="square" lIns="45720" rIns="45720" tIns="18288" bIns="18288">
+          <a:bodyPr wrap="square" lIns="45720" tIns="18288" rIns="45720" bIns="18288">
             <a:spAutoFit/>
           </a:bodyPr>
           <a:lstStyle/>
           <a:p>
             <a:pPr algn="l"/>
             <a:r>
-              <a:rPr sz="1300" b="0">
-                <a:solidFill>
-                  <a:srgbClr val="222222"/>
-                </a:solidFill>
-                <a:latin typeface="Calibri"/>
-              </a:rPr>
-              <a:t>Captura termos exatos.</a:t>
+              <a:rPr b="0" dirty="0" err="1">
+                <a:solidFill>
+                  <a:srgbClr val="222222"/>
+                </a:solidFill>
+                <a:latin typeface="Calibri"/>
+              </a:rPr>
+              <a:t>Captura</a:t>
+            </a:r>
+            <a:r>
+              <a:rPr b="0" dirty="0">
+                <a:solidFill>
+                  <a:srgbClr val="222222"/>
+                </a:solidFill>
+                <a:latin typeface="Calibri"/>
+              </a:rPr>
+              <a:t> </a:t>
+            </a:r>
+            <a:r>
+              <a:rPr b="0" dirty="0" err="1">
+                <a:solidFill>
+                  <a:srgbClr val="222222"/>
+                </a:solidFill>
+                <a:latin typeface="Calibri"/>
+              </a:rPr>
+              <a:t>termos</a:t>
+            </a:r>
+            <a:r>
+              <a:rPr b="0" dirty="0">
+                <a:solidFill>
+                  <a:srgbClr val="222222"/>
+                </a:solidFill>
+                <a:latin typeface="Calibri"/>
+              </a:rPr>
+              <a:t> </a:t>
+            </a:r>
+            <a:r>
+              <a:rPr b="0" dirty="0" err="1">
+                <a:solidFill>
+                  <a:srgbClr val="222222"/>
+                </a:solidFill>
+                <a:latin typeface="Calibri"/>
+              </a:rPr>
+              <a:t>exatos</a:t>
+            </a:r>
+            <a:r>
+              <a:rPr b="0" dirty="0">
+                <a:solidFill>
+                  <a:srgbClr val="222222"/>
+                </a:solidFill>
+                <a:latin typeface="Calibri"/>
+              </a:rPr>
+              <a:t>.</a:t>
             </a:r>
           </a:p>
           <a:p>
             <a:pPr algn="l"/>
             <a:r>
-              <a:rPr sz="1300" b="0">
-                <a:solidFill>
-                  <a:srgbClr val="222222"/>
-                </a:solidFill>
-                <a:latin typeface="Calibri"/>
-              </a:rPr>
-              <a:t>"REN 1.000", "bandeira tarifária", siglas.</a:t>
+              <a:rPr b="0" dirty="0">
+                <a:solidFill>
+                  <a:srgbClr val="222222"/>
+                </a:solidFill>
+                <a:latin typeface="Calibri"/>
+              </a:rPr>
+              <a:t>"REN 1.000", "</a:t>
+            </a:r>
+            <a:r>
+              <a:rPr b="0" dirty="0" err="1">
+                <a:solidFill>
+                  <a:srgbClr val="222222"/>
+                </a:solidFill>
+                <a:latin typeface="Calibri"/>
+              </a:rPr>
+              <a:t>bandeira</a:t>
+            </a:r>
+            <a:r>
+              <a:rPr b="0" dirty="0">
+                <a:solidFill>
+                  <a:srgbClr val="222222"/>
+                </a:solidFill>
+                <a:latin typeface="Calibri"/>
+              </a:rPr>
+              <a:t> </a:t>
+            </a:r>
+            <a:r>
+              <a:rPr b="0" dirty="0" err="1">
+                <a:solidFill>
+                  <a:srgbClr val="222222"/>
+                </a:solidFill>
+                <a:latin typeface="Calibri"/>
+              </a:rPr>
+              <a:t>tarifária</a:t>
+            </a:r>
+            <a:r>
+              <a:rPr b="0" dirty="0">
+                <a:solidFill>
+                  <a:srgbClr val="222222"/>
+                </a:solidFill>
+                <a:latin typeface="Calibri"/>
+              </a:rPr>
+              <a:t>", </a:t>
+            </a:r>
+            <a:r>
+              <a:rPr b="0" dirty="0" err="1">
+                <a:solidFill>
+                  <a:srgbClr val="222222"/>
+                </a:solidFill>
+                <a:latin typeface="Calibri"/>
+              </a:rPr>
+              <a:t>siglas</a:t>
+            </a:r>
+            <a:r>
+              <a:rPr b="0" dirty="0">
+                <a:solidFill>
+                  <a:srgbClr val="222222"/>
+                </a:solidFill>
+                <a:latin typeface="Calibri"/>
+              </a:rPr>
+              <a:t>.</a:t>
             </a:r>
           </a:p>
           <a:p>
             <a:pPr algn="l"/>
-            <a:r>
-              <a:rPr sz="1300" b="0">
-                <a:solidFill>
-                  <a:srgbClr val="222222"/>
-                </a:solidFill>
-                <a:latin typeface="Calibri"/>
-              </a:rPr>
-              <a:t/>
-            </a:r>
+            <a:endParaRPr b="0" dirty="0">
+              <a:solidFill>
+                <a:srgbClr val="222222"/>
+              </a:solidFill>
+              <a:latin typeface="Calibri"/>
+            </a:endParaRPr>
           </a:p>
           <a:p>
             <a:pPr algn="l"/>
             <a:r>
-              <a:rPr sz="1300" b="0">
-                <a:solidFill>
-                  <a:srgbClr val="222222"/>
-                </a:solidFill>
-                <a:latin typeface="Calibri"/>
-              </a:rPr>
-              <a:t>Substitui BM25 — nativo no Qdrant.</a:t>
+              <a:rPr b="0" dirty="0" err="1">
+                <a:solidFill>
+                  <a:srgbClr val="222222"/>
+                </a:solidFill>
+                <a:latin typeface="Calibri"/>
+              </a:rPr>
+              <a:t>Substitui</a:t>
+            </a:r>
+            <a:r>
+              <a:rPr b="0" dirty="0">
+                <a:solidFill>
+                  <a:srgbClr val="222222"/>
+                </a:solidFill>
+                <a:latin typeface="Calibri"/>
+              </a:rPr>
+              <a:t> BM25 — </a:t>
+            </a:r>
+            <a:r>
+              <a:rPr b="0" dirty="0" err="1">
+                <a:solidFill>
+                  <a:srgbClr val="222222"/>
+                </a:solidFill>
+                <a:latin typeface="Calibri"/>
+              </a:rPr>
+              <a:t>nativo</a:t>
+            </a:r>
+            <a:r>
+              <a:rPr b="0" dirty="0">
+                <a:solidFill>
+                  <a:srgbClr val="222222"/>
+                </a:solidFill>
+                <a:latin typeface="Calibri"/>
+              </a:rPr>
+              <a:t> no </a:t>
+            </a:r>
+            <a:r>
+              <a:rPr b="0" dirty="0" err="1">
+                <a:solidFill>
+                  <a:srgbClr val="222222"/>
+                </a:solidFill>
+                <a:latin typeface="Calibri"/>
+              </a:rPr>
+              <a:t>Qdrant</a:t>
+            </a:r>
+            <a:r>
+              <a:rPr b="0" dirty="0">
+                <a:solidFill>
+                  <a:srgbClr val="222222"/>
+                </a:solidFill>
+                <a:latin typeface="Calibri"/>
+              </a:rPr>
+              <a:t>.</a:t>
             </a:r>
           </a:p>
         </p:txBody>
@@ -12129,7 +13490,7 @@
           <a:noFill/>
         </p:spPr>
         <p:txBody>
-          <a:bodyPr wrap="square" lIns="45720" rIns="45720" tIns="18288" bIns="18288">
+          <a:bodyPr wrap="square" lIns="45720" tIns="18288" rIns="45720" bIns="18288">
             <a:spAutoFit/>
           </a:bodyPr>
           <a:lstStyle/>
@@ -12156,7 +13517,7 @@
         <p:spPr>
           <a:xfrm>
             <a:off x="640080" y="5486400"/>
-            <a:ext cx="11247120" cy="1280160"/>
+            <a:ext cx="11247120" cy="789960"/>
           </a:xfrm>
           <a:prstGeom prst="rect">
             <a:avLst/>
@@ -12175,13 +13536,175 @@
               </a:spcAft>
             </a:pPr>
             <a:r>
-              <a:rPr sz="1200">
-                <a:solidFill>
-                  <a:srgbClr val="222222"/>
-                </a:solidFill>
-                <a:latin typeface="Calibri"/>
-              </a:rPr>
-              <a:t>• BGE-M3 escolhido por: multilíngue forte em PT-BR · 8K tokens de contexto · dense+sparse no mesmo modelo · roda local (custo zero)</a:t>
+              <a:rPr sz="1400" dirty="0">
+                <a:solidFill>
+                  <a:srgbClr val="222222"/>
+                </a:solidFill>
+                <a:latin typeface="Calibri"/>
+              </a:rPr>
+              <a:t>• BGE-M3 </a:t>
+            </a:r>
+            <a:r>
+              <a:rPr sz="1400" dirty="0" err="1">
+                <a:solidFill>
+                  <a:srgbClr val="222222"/>
+                </a:solidFill>
+                <a:latin typeface="Calibri"/>
+              </a:rPr>
+              <a:t>escolhido</a:t>
+            </a:r>
+            <a:r>
+              <a:rPr sz="1400" dirty="0">
+                <a:solidFill>
+                  <a:srgbClr val="222222"/>
+                </a:solidFill>
+                <a:latin typeface="Calibri"/>
+              </a:rPr>
+              <a:t> por: </a:t>
+            </a:r>
+            <a:r>
+              <a:rPr sz="1400" dirty="0" err="1">
+                <a:solidFill>
+                  <a:srgbClr val="222222"/>
+                </a:solidFill>
+                <a:latin typeface="Calibri"/>
+              </a:rPr>
+              <a:t>multilíngue</a:t>
+            </a:r>
+            <a:r>
+              <a:rPr sz="1400" dirty="0">
+                <a:solidFill>
+                  <a:srgbClr val="222222"/>
+                </a:solidFill>
+                <a:latin typeface="Calibri"/>
+              </a:rPr>
+              <a:t> forte </a:t>
+            </a:r>
+            <a:r>
+              <a:rPr sz="1400" dirty="0" err="1">
+                <a:solidFill>
+                  <a:srgbClr val="222222"/>
+                </a:solidFill>
+                <a:latin typeface="Calibri"/>
+              </a:rPr>
+              <a:t>em</a:t>
+            </a:r>
+            <a:r>
+              <a:rPr sz="1400" dirty="0">
+                <a:solidFill>
+                  <a:srgbClr val="222222"/>
+                </a:solidFill>
+                <a:latin typeface="Calibri"/>
+              </a:rPr>
+              <a:t> PT-BR · 8K tokens de </a:t>
+            </a:r>
+            <a:r>
+              <a:rPr sz="1400" dirty="0" err="1">
+                <a:solidFill>
+                  <a:srgbClr val="222222"/>
+                </a:solidFill>
+                <a:latin typeface="Calibri"/>
+              </a:rPr>
+              <a:t>contexto</a:t>
+            </a:r>
+            <a:r>
+              <a:rPr sz="1400" dirty="0">
+                <a:solidFill>
+                  <a:srgbClr val="222222"/>
+                </a:solidFill>
+                <a:latin typeface="Calibri"/>
+              </a:rPr>
+              <a:t> · </a:t>
+            </a:r>
+            <a:r>
+              <a:rPr sz="1400" dirty="0" err="1">
+                <a:solidFill>
+                  <a:srgbClr val="222222"/>
+                </a:solidFill>
+                <a:latin typeface="Calibri"/>
+              </a:rPr>
+              <a:t>dense+sparse</a:t>
+            </a:r>
+            <a:r>
+              <a:rPr sz="1400" dirty="0">
+                <a:solidFill>
+                  <a:srgbClr val="222222"/>
+                </a:solidFill>
+                <a:latin typeface="Calibri"/>
+              </a:rPr>
+              <a:t> no </a:t>
+            </a:r>
+            <a:r>
+              <a:rPr sz="1400" dirty="0" err="1">
+                <a:solidFill>
+                  <a:srgbClr val="222222"/>
+                </a:solidFill>
+                <a:latin typeface="Calibri"/>
+              </a:rPr>
+              <a:t>mesmo</a:t>
+            </a:r>
+            <a:r>
+              <a:rPr sz="1400" dirty="0">
+                <a:solidFill>
+                  <a:srgbClr val="222222"/>
+                </a:solidFill>
+                <a:latin typeface="Calibri"/>
+              </a:rPr>
+              <a:t> </a:t>
+            </a:r>
+            <a:r>
+              <a:rPr sz="1400" dirty="0" err="1">
+                <a:solidFill>
+                  <a:srgbClr val="222222"/>
+                </a:solidFill>
+                <a:latin typeface="Calibri"/>
+              </a:rPr>
+              <a:t>modelo</a:t>
+            </a:r>
+            <a:r>
+              <a:rPr sz="1400" dirty="0">
+                <a:solidFill>
+                  <a:srgbClr val="222222"/>
+                </a:solidFill>
+                <a:latin typeface="Calibri"/>
+              </a:rPr>
+              <a:t> · </a:t>
+            </a:r>
+            <a:r>
+              <a:rPr sz="1400" dirty="0" err="1">
+                <a:solidFill>
+                  <a:srgbClr val="222222"/>
+                </a:solidFill>
+                <a:latin typeface="Calibri"/>
+              </a:rPr>
+              <a:t>roda</a:t>
+            </a:r>
+            <a:r>
+              <a:rPr sz="1400" dirty="0">
+                <a:solidFill>
+                  <a:srgbClr val="222222"/>
+                </a:solidFill>
+                <a:latin typeface="Calibri"/>
+              </a:rPr>
+              <a:t> local (</a:t>
+            </a:r>
+            <a:r>
+              <a:rPr sz="1400" dirty="0" err="1">
+                <a:solidFill>
+                  <a:srgbClr val="222222"/>
+                </a:solidFill>
+                <a:latin typeface="Calibri"/>
+              </a:rPr>
+              <a:t>custo</a:t>
+            </a:r>
+            <a:r>
+              <a:rPr sz="1400" dirty="0">
+                <a:solidFill>
+                  <a:srgbClr val="222222"/>
+                </a:solidFill>
+                <a:latin typeface="Calibri"/>
+              </a:rPr>
+              <a:t> zero)</a:t>
             </a:r>
           </a:p>
           <a:p>
@@ -12191,13 +13714,211 @@
               </a:spcAft>
             </a:pPr>
             <a:r>
-              <a:rPr sz="1200">
-                <a:solidFill>
-                  <a:srgbClr val="222222"/>
-                </a:solidFill>
-                <a:latin typeface="Calibri"/>
-              </a:rPr>
-              <a:t>• Qdrant escolhido por: named vectors nativos (dense + sparse na mesma coleção) · filtros estruturados (ano, doc_id, has_table) · open-source · Docker local</a:t>
+              <a:rPr sz="1400" dirty="0">
+                <a:solidFill>
+                  <a:srgbClr val="222222"/>
+                </a:solidFill>
+                <a:latin typeface="Calibri"/>
+              </a:rPr>
+              <a:t>• </a:t>
+            </a:r>
+            <a:r>
+              <a:rPr sz="1400" dirty="0" err="1">
+                <a:solidFill>
+                  <a:srgbClr val="222222"/>
+                </a:solidFill>
+                <a:latin typeface="Calibri"/>
+              </a:rPr>
+              <a:t>Qdrant</a:t>
+            </a:r>
+            <a:r>
+              <a:rPr sz="1400" dirty="0">
+                <a:solidFill>
+                  <a:srgbClr val="222222"/>
+                </a:solidFill>
+                <a:latin typeface="Calibri"/>
+              </a:rPr>
+              <a:t> </a:t>
+            </a:r>
+            <a:r>
+              <a:rPr sz="1400" dirty="0" err="1">
+                <a:solidFill>
+                  <a:srgbClr val="222222"/>
+                </a:solidFill>
+                <a:latin typeface="Calibri"/>
+              </a:rPr>
+              <a:t>escolhido</a:t>
+            </a:r>
+            <a:r>
+              <a:rPr sz="1400" dirty="0">
+                <a:solidFill>
+                  <a:srgbClr val="222222"/>
+                </a:solidFill>
+                <a:latin typeface="Calibri"/>
+              </a:rPr>
+              <a:t> por: named vectors </a:t>
+            </a:r>
+            <a:r>
+              <a:rPr sz="1400" dirty="0" err="1">
+                <a:solidFill>
+                  <a:srgbClr val="222222"/>
+                </a:solidFill>
+                <a:latin typeface="Calibri"/>
+              </a:rPr>
+              <a:t>nativos</a:t>
+            </a:r>
+            <a:r>
+              <a:rPr sz="1400" dirty="0">
+                <a:solidFill>
+                  <a:srgbClr val="222222"/>
+                </a:solidFill>
+                <a:latin typeface="Calibri"/>
+              </a:rPr>
+              <a:t> (dense + sparse </a:t>
+            </a:r>
+            <a:r>
+              <a:rPr sz="1400" dirty="0" err="1">
+                <a:solidFill>
+                  <a:srgbClr val="222222"/>
+                </a:solidFill>
+                <a:latin typeface="Calibri"/>
+              </a:rPr>
+              <a:t>na</a:t>
+            </a:r>
+            <a:r>
+              <a:rPr sz="1400" dirty="0">
+                <a:solidFill>
+                  <a:srgbClr val="222222"/>
+                </a:solidFill>
+                <a:latin typeface="Calibri"/>
+              </a:rPr>
+              <a:t> </a:t>
+            </a:r>
+            <a:r>
+              <a:rPr sz="1400" dirty="0" err="1">
+                <a:solidFill>
+                  <a:srgbClr val="222222"/>
+                </a:solidFill>
+                <a:latin typeface="Calibri"/>
+              </a:rPr>
+              <a:t>mesma</a:t>
+            </a:r>
+            <a:r>
+              <a:rPr sz="1400" dirty="0">
+                <a:solidFill>
+                  <a:srgbClr val="222222"/>
+                </a:solidFill>
+                <a:latin typeface="Calibri"/>
+              </a:rPr>
+              <a:t> </a:t>
+            </a:r>
+            <a:r>
+              <a:rPr sz="1400" dirty="0" err="1">
+                <a:solidFill>
+                  <a:srgbClr val="222222"/>
+                </a:solidFill>
+                <a:latin typeface="Calibri"/>
+              </a:rPr>
+              <a:t>coleção</a:t>
+            </a:r>
+            <a:r>
+              <a:rPr sz="1400" dirty="0">
+                <a:solidFill>
+                  <a:srgbClr val="222222"/>
+                </a:solidFill>
+                <a:latin typeface="Calibri"/>
+              </a:rPr>
+              <a:t>) · </a:t>
+            </a:r>
+            <a:r>
+              <a:rPr sz="1400" dirty="0" err="1">
+                <a:solidFill>
+                  <a:srgbClr val="222222"/>
+                </a:solidFill>
+                <a:latin typeface="Calibri"/>
+              </a:rPr>
+              <a:t>filtros</a:t>
+            </a:r>
+            <a:r>
+              <a:rPr sz="1400" dirty="0">
+                <a:solidFill>
+                  <a:srgbClr val="222222"/>
+                </a:solidFill>
+                <a:latin typeface="Calibri"/>
+              </a:rPr>
+              <a:t> </a:t>
+            </a:r>
+            <a:r>
+              <a:rPr sz="1400" dirty="0" err="1">
+                <a:solidFill>
+                  <a:srgbClr val="222222"/>
+                </a:solidFill>
+                <a:latin typeface="Calibri"/>
+              </a:rPr>
+              <a:t>estruturados</a:t>
+            </a:r>
+            <a:r>
+              <a:rPr sz="1400" dirty="0">
+                <a:solidFill>
+                  <a:srgbClr val="222222"/>
+                </a:solidFill>
+                <a:latin typeface="Calibri"/>
+              </a:rPr>
+              <a:t> (</a:t>
+            </a:r>
+            <a:r>
+              <a:rPr sz="1400" dirty="0" err="1">
+                <a:solidFill>
+                  <a:srgbClr val="222222"/>
+                </a:solidFill>
+                <a:latin typeface="Calibri"/>
+              </a:rPr>
+              <a:t>ano</a:t>
+            </a:r>
+            <a:r>
+              <a:rPr sz="1400" dirty="0">
+                <a:solidFill>
+                  <a:srgbClr val="222222"/>
+                </a:solidFill>
+                <a:latin typeface="Calibri"/>
+              </a:rPr>
+              <a:t>, </a:t>
+            </a:r>
+            <a:r>
+              <a:rPr sz="1400" dirty="0" err="1">
+                <a:solidFill>
+                  <a:srgbClr val="222222"/>
+                </a:solidFill>
+                <a:latin typeface="Calibri"/>
+              </a:rPr>
+              <a:t>doc_id</a:t>
+            </a:r>
+            <a:r>
+              <a:rPr sz="1400" dirty="0">
+                <a:solidFill>
+                  <a:srgbClr val="222222"/>
+                </a:solidFill>
+                <a:latin typeface="Calibri"/>
+              </a:rPr>
+              <a:t>, </a:t>
+            </a:r>
+            <a:r>
+              <a:rPr sz="1400" dirty="0" err="1">
+                <a:solidFill>
+                  <a:srgbClr val="222222"/>
+                </a:solidFill>
+                <a:latin typeface="Calibri"/>
+              </a:rPr>
+              <a:t>has_table</a:t>
+            </a:r>
+            <a:r>
+              <a:rPr sz="1400" dirty="0">
+                <a:solidFill>
+                  <a:srgbClr val="222222"/>
+                </a:solidFill>
+                <a:latin typeface="Calibri"/>
+              </a:rPr>
+              <a:t>) · open-source · Docker local</a:t>
             </a:r>
           </a:p>
         </p:txBody>
@@ -12219,7 +13940,7 @@
           <a:noFill/>
         </p:spPr>
         <p:txBody>
-          <a:bodyPr wrap="square" lIns="45720" rIns="45720" tIns="18288" bIns="18288">
+          <a:bodyPr wrap="square" lIns="45720" tIns="18288" rIns="45720" bIns="18288">
             <a:spAutoFit/>
           </a:bodyPr>
           <a:lstStyle/>
@@ -12254,7 +13975,7 @@
           <a:noFill/>
         </p:spPr>
         <p:txBody>
-          <a:bodyPr wrap="square" lIns="45720" rIns="45720" tIns="18288" bIns="18288">
+          <a:bodyPr wrap="square" lIns="45720" tIns="18288" rIns="45720" bIns="18288">
             <a:spAutoFit/>
           </a:bodyPr>
           <a:lstStyle/>
